--- a/Delivrables/Graph model.pptx
+++ b/Delivrables/Graph model.pptx
@@ -882,7 +882,7 @@
         <a:p>
           <a:r>
             <a:rPr lang="en-US" dirty="0"/>
-            <a:t>Museum</a:t>
+            <a:t>Artifacts</a:t>
           </a:r>
         </a:p>
       </dgm:t>
@@ -990,7 +990,7 @@
         <a:p>
           <a:r>
             <a:rPr lang="en-US" dirty="0"/>
-            <a:t>Collection Id#1</a:t>
+            <a:t>Collection ref#1</a:t>
           </a:r>
         </a:p>
       </dgm:t>
@@ -1018,6 +1018,42 @@
       </dgm:t>
     </dgm:pt>
     <dgm:pt modelId="{9DFAA83C-0ED7-4C5D-908E-2A02657C3D57}">
+      <dgm:prSet phldrT="[Text]" phldr="0"/>
+      <dgm:spPr/>
+      <dgm:t>
+        <a:bodyPr/>
+        <a:lstStyle/>
+        <a:p>
+          <a:r>
+            <a:rPr lang="en-US" dirty="0"/>
+            <a:t>Exhibitions</a:t>
+          </a:r>
+        </a:p>
+      </dgm:t>
+    </dgm:pt>
+    <dgm:pt modelId="{B6EFE756-66AC-4682-AE3E-4E5A980226A5}" type="parTrans" cxnId="{4A52468F-FADF-4AD1-8BF8-227ED1BE1440}">
+      <dgm:prSet/>
+      <dgm:spPr/>
+      <dgm:t>
+        <a:bodyPr/>
+        <a:lstStyle/>
+        <a:p>
+          <a:endParaRPr lang="en-US"/>
+        </a:p>
+      </dgm:t>
+    </dgm:pt>
+    <dgm:pt modelId="{0FBCAEE9-6184-4B39-99B3-8073FB519715}" type="sibTrans" cxnId="{4A52468F-FADF-4AD1-8BF8-227ED1BE1440}">
+      <dgm:prSet/>
+      <dgm:spPr/>
+      <dgm:t>
+        <a:bodyPr/>
+        <a:lstStyle/>
+        <a:p>
+          <a:endParaRPr lang="en-US"/>
+        </a:p>
+      </dgm:t>
+    </dgm:pt>
+    <dgm:pt modelId="{E0F095D0-0CDD-4899-95AE-C151B28DF4D1}">
       <dgm:prSet phldrT="[Text]" phldr="0"/>
       <dgm:spPr/>
       <dgm:t>
@@ -1031,42 +1067,6 @@
         </a:p>
       </dgm:t>
     </dgm:pt>
-    <dgm:pt modelId="{B6EFE756-66AC-4682-AE3E-4E5A980226A5}" type="parTrans" cxnId="{4A52468F-FADF-4AD1-8BF8-227ED1BE1440}">
-      <dgm:prSet/>
-      <dgm:spPr/>
-      <dgm:t>
-        <a:bodyPr/>
-        <a:lstStyle/>
-        <a:p>
-          <a:endParaRPr lang="en-US"/>
-        </a:p>
-      </dgm:t>
-    </dgm:pt>
-    <dgm:pt modelId="{0FBCAEE9-6184-4B39-99B3-8073FB519715}" type="sibTrans" cxnId="{4A52468F-FADF-4AD1-8BF8-227ED1BE1440}">
-      <dgm:prSet/>
-      <dgm:spPr/>
-      <dgm:t>
-        <a:bodyPr/>
-        <a:lstStyle/>
-        <a:p>
-          <a:endParaRPr lang="en-US"/>
-        </a:p>
-      </dgm:t>
-    </dgm:pt>
-    <dgm:pt modelId="{E0F095D0-0CDD-4899-95AE-C151B28DF4D1}">
-      <dgm:prSet phldrT="[Text]" phldr="0"/>
-      <dgm:spPr/>
-      <dgm:t>
-        <a:bodyPr/>
-        <a:lstStyle/>
-        <a:p>
-          <a:r>
-            <a:rPr lang="en-US" dirty="0"/>
-            <a:t>Schedule</a:t>
-          </a:r>
-        </a:p>
-      </dgm:t>
-    </dgm:pt>
     <dgm:pt modelId="{A901081C-4D82-49A2-9AF0-FDB6D79D7219}" type="parTrans" cxnId="{6620BD34-0599-4A37-843B-95E73982D995}">
       <dgm:prSet/>
       <dgm:spPr/>
@@ -1331,42 +1331,6 @@
       </dgm:t>
     </dgm:pt>
     <dgm:pt modelId="{CCEFAA32-A3AE-42BA-A24E-BFA35382DBF3}" type="sibTrans" cxnId="{D595DF86-55CC-40E1-991D-096A4EDC08CB}">
-      <dgm:prSet/>
-      <dgm:spPr/>
-      <dgm:t>
-        <a:bodyPr/>
-        <a:lstStyle/>
-        <a:p>
-          <a:endParaRPr lang="en-US"/>
-        </a:p>
-      </dgm:t>
-    </dgm:pt>
-    <dgm:pt modelId="{3B3021F4-1B88-4824-8D12-7496727C461B}">
-      <dgm:prSet phldrT="[Text]" phldr="0"/>
-      <dgm:spPr/>
-      <dgm:t>
-        <a:bodyPr/>
-        <a:lstStyle/>
-        <a:p>
-          <a:r>
-            <a:rPr lang="en-US" dirty="0"/>
-            <a:t>Restoration</a:t>
-          </a:r>
-        </a:p>
-      </dgm:t>
-    </dgm:pt>
-    <dgm:pt modelId="{76CB5FF8-DAAE-4108-8F27-58BE17CA5BF3}" type="parTrans" cxnId="{1531985C-03EF-49C2-8E08-19BB7D635F73}">
-      <dgm:prSet/>
-      <dgm:spPr/>
-      <dgm:t>
-        <a:bodyPr/>
-        <a:lstStyle/>
-        <a:p>
-          <a:endParaRPr lang="en-US"/>
-        </a:p>
-      </dgm:t>
-    </dgm:pt>
-    <dgm:pt modelId="{52291D77-3FC5-46EF-9F8F-91DE64AC9C4F}" type="sibTrans" cxnId="{1531985C-03EF-49C2-8E08-19BB7D635F73}">
       <dgm:prSet/>
       <dgm:spPr/>
       <dgm:t>
@@ -1606,7 +1570,7 @@
         <a:p>
           <a:r>
             <a:rPr lang="en-US" dirty="0"/>
-            <a:t>Exhibition Id#2</a:t>
+            <a:t>Restoration</a:t>
           </a:r>
         </a:p>
       </dgm:t>
@@ -1878,7 +1842,7 @@
         <a:p>
           <a:r>
             <a:rPr lang="en-US" dirty="0"/>
-            <a:t>5</a:t>
+            <a:t>05</a:t>
           </a:r>
           <a:r>
             <a:rPr lang="en-US" baseline="30000" dirty="0"/>
@@ -1913,123 +1877,6 @@
         </a:p>
       </dgm:t>
     </dgm:pt>
-    <dgm:pt modelId="{E3AF1FB6-7793-4A4C-A846-4D8E2C079072}">
-      <dgm:prSet phldrT="[Text]" phldr="0"/>
-      <dgm:spPr/>
-      <dgm:t>
-        <a:bodyPr/>
-        <a:lstStyle/>
-        <a:p>
-          <a:r>
-            <a:rPr lang="en-US" dirty="0"/>
-            <a:t>Sculpture</a:t>
-          </a:r>
-        </a:p>
-      </dgm:t>
-    </dgm:pt>
-    <dgm:pt modelId="{11D63282-5C42-403B-97BA-1AB59BBC2C41}" type="parTrans" cxnId="{479B14B0-2F5F-43B7-89F4-4143CAD3C035}">
-      <dgm:prSet/>
-      <dgm:spPr/>
-      <dgm:t>
-        <a:bodyPr/>
-        <a:lstStyle/>
-        <a:p>
-          <a:endParaRPr lang="en-US"/>
-        </a:p>
-      </dgm:t>
-    </dgm:pt>
-    <dgm:pt modelId="{8A78BB5C-7073-4BA7-947D-CBB9388C8BC5}" type="sibTrans" cxnId="{479B14B0-2F5F-43B7-89F4-4143CAD3C035}">
-      <dgm:prSet/>
-      <dgm:spPr/>
-      <dgm:t>
-        <a:bodyPr/>
-        <a:lstStyle/>
-        <a:p>
-          <a:endParaRPr lang="en-US"/>
-        </a:p>
-      </dgm:t>
-    </dgm:pt>
-    <dgm:pt modelId="{E92EBC15-E9D8-4B5F-B808-E2AAF4F94361}">
-      <dgm:prSet phldrT="[Text]" phldr="0"/>
-      <dgm:spPr>
-        <a:solidFill>
-          <a:srgbClr val="FFC000"/>
-        </a:solidFill>
-      </dgm:spPr>
-      <dgm:t>
-        <a:bodyPr/>
-        <a:lstStyle/>
-        <a:p>
-          <a:r>
-            <a:rPr lang="en-US" dirty="0"/>
-            <a:t>Limestone</a:t>
-          </a:r>
-        </a:p>
-      </dgm:t>
-    </dgm:pt>
-    <dgm:pt modelId="{6187C6C3-B996-4ED1-9E29-1993D45E2169}" type="parTrans" cxnId="{C17A2759-A1E0-419E-9992-B891FCA4A052}">
-      <dgm:prSet/>
-      <dgm:spPr/>
-      <dgm:t>
-        <a:bodyPr/>
-        <a:lstStyle/>
-        <a:p>
-          <a:endParaRPr lang="en-US"/>
-        </a:p>
-      </dgm:t>
-    </dgm:pt>
-    <dgm:pt modelId="{8063460F-3FE9-46FF-8DF1-8EE5CB6EECE9}" type="sibTrans" cxnId="{C17A2759-A1E0-419E-9992-B891FCA4A052}">
-      <dgm:prSet/>
-      <dgm:spPr/>
-      <dgm:t>
-        <a:bodyPr/>
-        <a:lstStyle/>
-        <a:p>
-          <a:endParaRPr lang="en-US"/>
-        </a:p>
-      </dgm:t>
-    </dgm:pt>
-    <dgm:pt modelId="{0C931ACA-CC53-4D97-9D61-C471A807C39D}">
-      <dgm:prSet phldrT="[Text]" phldr="0"/>
-      <dgm:spPr>
-        <a:solidFill>
-          <a:srgbClr val="FFC000"/>
-        </a:solidFill>
-      </dgm:spPr>
-      <dgm:t>
-        <a:bodyPr/>
-        <a:lstStyle/>
-        <a:p>
-          <a:r>
-            <a:rPr lang="en-US"/>
-            <a:t>Bust</a:t>
-          </a:r>
-          <a:endParaRPr lang="en-US" dirty="0"/>
-        </a:p>
-      </dgm:t>
-    </dgm:pt>
-    <dgm:pt modelId="{E13A3907-2F21-472C-B2F1-588C6FECF12C}" type="parTrans" cxnId="{DA048835-4A0E-4CF5-86C6-63625723604A}">
-      <dgm:prSet/>
-      <dgm:spPr/>
-      <dgm:t>
-        <a:bodyPr/>
-        <a:lstStyle/>
-        <a:p>
-          <a:endParaRPr lang="en-US"/>
-        </a:p>
-      </dgm:t>
-    </dgm:pt>
-    <dgm:pt modelId="{FDBDD9A4-125D-461A-BF34-39CF6F29CC28}" type="sibTrans" cxnId="{DA048835-4A0E-4CF5-86C6-63625723604A}">
-      <dgm:prSet/>
-      <dgm:spPr/>
-      <dgm:t>
-        <a:bodyPr/>
-        <a:lstStyle/>
-        <a:p>
-          <a:endParaRPr lang="en-US"/>
-        </a:p>
-      </dgm:t>
-    </dgm:pt>
     <dgm:pt modelId="{7BFC5FFE-8955-4513-8485-C479782305F9}">
       <dgm:prSet phldrT="[Text]" phldr="0"/>
       <dgm:spPr>
@@ -2328,6 +2175,338 @@
       </dgm:t>
     </dgm:pt>
     <dgm:pt modelId="{2EA43260-1DBE-427E-AE7E-F1D9881271AE}" type="sibTrans" cxnId="{9154D30D-EAA0-42E1-8C09-EB4FE655F630}">
+      <dgm:prSet/>
+      <dgm:spPr/>
+      <dgm:t>
+        <a:bodyPr/>
+        <a:lstStyle/>
+        <a:p>
+          <a:endParaRPr lang="en-US"/>
+        </a:p>
+      </dgm:t>
+    </dgm:pt>
+    <dgm:pt modelId="{5AFEC8AD-8C3F-4724-85E3-77D8EA592781}">
+      <dgm:prSet phldrT="[Text]" phldr="0"/>
+      <dgm:spPr/>
+      <dgm:t>
+        <a:bodyPr/>
+        <a:lstStyle/>
+        <a:p>
+          <a:r>
+            <a:rPr lang="en-US" dirty="0"/>
+            <a:t>Museum</a:t>
+          </a:r>
+        </a:p>
+      </dgm:t>
+    </dgm:pt>
+    <dgm:pt modelId="{8D4DADF3-A559-473F-B457-30AAF42C09D7}" type="parTrans" cxnId="{04F8C65E-115C-4784-89A0-4491AD529736}">
+      <dgm:prSet/>
+      <dgm:spPr/>
+      <dgm:t>
+        <a:bodyPr/>
+        <a:lstStyle/>
+        <a:p>
+          <a:endParaRPr lang="en-US"/>
+        </a:p>
+      </dgm:t>
+    </dgm:pt>
+    <dgm:pt modelId="{20C3EAD4-7885-4840-B357-8B0AE16E3E20}" type="sibTrans" cxnId="{04F8C65E-115C-4784-89A0-4491AD529736}">
+      <dgm:prSet/>
+      <dgm:spPr/>
+      <dgm:t>
+        <a:bodyPr/>
+        <a:lstStyle/>
+        <a:p>
+          <a:endParaRPr lang="en-US"/>
+        </a:p>
+      </dgm:t>
+    </dgm:pt>
+    <dgm:pt modelId="{3E6A9241-7ED7-4E1E-9A0C-FCCB8AFE0676}">
+      <dgm:prSet phldrT="[Text]"/>
+      <dgm:spPr/>
+      <dgm:t>
+        <a:bodyPr/>
+        <a:lstStyle/>
+        <a:p>
+          <a:r>
+            <a:rPr lang="en-US" dirty="0"/>
+            <a:t>Collections</a:t>
+          </a:r>
+        </a:p>
+      </dgm:t>
+    </dgm:pt>
+    <dgm:pt modelId="{C3FB077C-2462-498E-B844-9538FDE898FE}" type="parTrans" cxnId="{CB62C827-67E5-4123-88C9-AC674D1D8A7E}">
+      <dgm:prSet/>
+      <dgm:spPr/>
+      <dgm:t>
+        <a:bodyPr/>
+        <a:lstStyle/>
+        <a:p>
+          <a:endParaRPr lang="en-US"/>
+        </a:p>
+      </dgm:t>
+    </dgm:pt>
+    <dgm:pt modelId="{CB332FBD-7E08-4152-AD88-22BA4367C068}" type="sibTrans" cxnId="{CB62C827-67E5-4123-88C9-AC674D1D8A7E}">
+      <dgm:prSet/>
+      <dgm:spPr/>
+      <dgm:t>
+        <a:bodyPr/>
+        <a:lstStyle/>
+        <a:p>
+          <a:endParaRPr lang="en-US"/>
+        </a:p>
+      </dgm:t>
+    </dgm:pt>
+    <dgm:pt modelId="{AE4652B3-3398-42D3-A9DE-FBC115B53A0D}">
+      <dgm:prSet phldrT="[Text]" phldr="0"/>
+      <dgm:spPr/>
+      <dgm:t>
+        <a:bodyPr/>
+        <a:lstStyle/>
+        <a:p>
+          <a:r>
+            <a:rPr lang="en-US" dirty="0"/>
+            <a:t>Collection Id#1</a:t>
+          </a:r>
+        </a:p>
+      </dgm:t>
+    </dgm:pt>
+    <dgm:pt modelId="{03FC0ABC-78B9-4767-8291-52E8792ED142}" type="parTrans" cxnId="{DBF9F3C7-8713-48F8-939E-02FE8C807189}">
+      <dgm:prSet/>
+      <dgm:spPr/>
+      <dgm:t>
+        <a:bodyPr/>
+        <a:lstStyle/>
+        <a:p>
+          <a:endParaRPr lang="en-US"/>
+        </a:p>
+      </dgm:t>
+    </dgm:pt>
+    <dgm:pt modelId="{8BC6BC54-3043-424C-91DC-F945F6203B98}" type="sibTrans" cxnId="{DBF9F3C7-8713-48F8-939E-02FE8C807189}">
+      <dgm:prSet/>
+      <dgm:spPr/>
+      <dgm:t>
+        <a:bodyPr/>
+        <a:lstStyle/>
+        <a:p>
+          <a:endParaRPr lang="en-US"/>
+        </a:p>
+      </dgm:t>
+    </dgm:pt>
+    <dgm:pt modelId="{2A323462-12B1-44A5-95A4-30F7D5E83E80}">
+      <dgm:prSet phldrT="[Text]" phldr="0"/>
+      <dgm:spPr/>
+      <dgm:t>
+        <a:bodyPr/>
+        <a:lstStyle/>
+        <a:p>
+          <a:r>
+            <a:rPr lang="en-US" dirty="0"/>
+            <a:t>Collection Id#2</a:t>
+          </a:r>
+        </a:p>
+      </dgm:t>
+    </dgm:pt>
+    <dgm:pt modelId="{4EAB6B4E-4AE3-4DD0-93A3-0784ECF3F600}" type="parTrans" cxnId="{983A92A3-EF29-4954-A755-8D540079A70E}">
+      <dgm:prSet/>
+      <dgm:spPr/>
+      <dgm:t>
+        <a:bodyPr/>
+        <a:lstStyle/>
+        <a:p>
+          <a:endParaRPr lang="en-US"/>
+        </a:p>
+      </dgm:t>
+    </dgm:pt>
+    <dgm:pt modelId="{A6DF5D9B-B3EB-49CE-B0F2-E2BA7CAB9FCB}" type="sibTrans" cxnId="{983A92A3-EF29-4954-A755-8D540079A70E}">
+      <dgm:prSet/>
+      <dgm:spPr/>
+      <dgm:t>
+        <a:bodyPr/>
+        <a:lstStyle/>
+        <a:p>
+          <a:endParaRPr lang="en-US"/>
+        </a:p>
+      </dgm:t>
+    </dgm:pt>
+    <dgm:pt modelId="{A63AFC23-093E-44C6-B267-3891CF123A84}">
+      <dgm:prSet phldrT="[Text]" phldr="0"/>
+      <dgm:spPr/>
+      <dgm:t>
+        <a:bodyPr/>
+        <a:lstStyle/>
+        <a:p>
+          <a:r>
+            <a:rPr lang="en-US" dirty="0"/>
+            <a:t>Exhibition Id#2</a:t>
+          </a:r>
+        </a:p>
+      </dgm:t>
+    </dgm:pt>
+    <dgm:pt modelId="{9388F973-CD46-4AFC-9454-5895E33035BE}" type="parTrans" cxnId="{74EA1D59-CE25-4484-898B-D0B363CF7FF8}">
+      <dgm:prSet/>
+      <dgm:spPr/>
+      <dgm:t>
+        <a:bodyPr/>
+        <a:lstStyle/>
+        <a:p>
+          <a:endParaRPr lang="en-US"/>
+        </a:p>
+      </dgm:t>
+    </dgm:pt>
+    <dgm:pt modelId="{1F61FF8D-23AE-4147-B5BA-4EC53E60A999}" type="sibTrans" cxnId="{74EA1D59-CE25-4484-898B-D0B363CF7FF8}">
+      <dgm:prSet/>
+      <dgm:spPr/>
+      <dgm:t>
+        <a:bodyPr/>
+        <a:lstStyle/>
+        <a:p>
+          <a:endParaRPr lang="en-US"/>
+        </a:p>
+      </dgm:t>
+    </dgm:pt>
+    <dgm:pt modelId="{B9F7BE26-7120-4362-B07A-512CE293CF66}">
+      <dgm:prSet phldrT="[Text]"/>
+      <dgm:spPr/>
+      <dgm:t>
+        <a:bodyPr/>
+        <a:lstStyle/>
+        <a:p>
+          <a:r>
+            <a:rPr lang="en-US" dirty="0"/>
+            <a:t>Schedule</a:t>
+          </a:r>
+        </a:p>
+      </dgm:t>
+    </dgm:pt>
+    <dgm:pt modelId="{9510750D-81D3-4DD1-BEEF-9ABF3212385B}" type="parTrans" cxnId="{2A9B7C4B-D978-4918-A408-6A548363CF3E}">
+      <dgm:prSet/>
+      <dgm:spPr/>
+      <dgm:t>
+        <a:bodyPr/>
+        <a:lstStyle/>
+        <a:p>
+          <a:endParaRPr lang="en-US"/>
+        </a:p>
+      </dgm:t>
+    </dgm:pt>
+    <dgm:pt modelId="{4522FBCC-88DD-42A2-A603-47CAAEA95766}" type="sibTrans" cxnId="{2A9B7C4B-D978-4918-A408-6A548363CF3E}">
+      <dgm:prSet/>
+      <dgm:spPr/>
+      <dgm:t>
+        <a:bodyPr/>
+        <a:lstStyle/>
+        <a:p>
+          <a:endParaRPr lang="en-US"/>
+        </a:p>
+      </dgm:t>
+    </dgm:pt>
+    <dgm:pt modelId="{4F9DC5B4-E119-4273-B0C6-F44F279BA1CA}">
+      <dgm:prSet phldrT="[Text]" phldr="0"/>
+      <dgm:spPr>
+        <a:solidFill>
+          <a:srgbClr val="FFC000"/>
+        </a:solidFill>
+      </dgm:spPr>
+      <dgm:t>
+        <a:bodyPr/>
+        <a:lstStyle/>
+        <a:p>
+          <a:r>
+            <a:rPr lang="en-US" dirty="0"/>
+            <a:t>Sculpture Antiquities</a:t>
+          </a:r>
+        </a:p>
+      </dgm:t>
+    </dgm:pt>
+    <dgm:pt modelId="{471AAB30-6948-4AC5-A872-0315651955DF}" type="parTrans" cxnId="{FE708485-FFDF-48BB-B0BC-165ED27709E5}">
+      <dgm:prSet/>
+      <dgm:spPr/>
+      <dgm:t>
+        <a:bodyPr/>
+        <a:lstStyle/>
+        <a:p>
+          <a:endParaRPr lang="en-US"/>
+        </a:p>
+      </dgm:t>
+    </dgm:pt>
+    <dgm:pt modelId="{2408ECCD-D6DE-4241-9433-C9D56DB2C8B8}" type="sibTrans" cxnId="{FE708485-FFDF-48BB-B0BC-165ED27709E5}">
+      <dgm:prSet/>
+      <dgm:spPr/>
+      <dgm:t>
+        <a:bodyPr/>
+        <a:lstStyle/>
+        <a:p>
+          <a:endParaRPr lang="en-US"/>
+        </a:p>
+      </dgm:t>
+    </dgm:pt>
+    <dgm:pt modelId="{B9CE2267-5814-421B-8674-D202299E0DA9}">
+      <dgm:prSet phldrT="[Text]"/>
+      <dgm:spPr/>
+      <dgm:t>
+        <a:bodyPr/>
+        <a:lstStyle/>
+        <a:p>
+          <a:r>
+            <a:rPr lang="en-US" dirty="0"/>
+            <a:t>Material</a:t>
+          </a:r>
+        </a:p>
+      </dgm:t>
+    </dgm:pt>
+    <dgm:pt modelId="{8E55D407-483C-4F95-9E0F-F2F663299F50}" type="parTrans" cxnId="{732BF519-8AF9-46E9-A605-D8B3016E8487}">
+      <dgm:prSet/>
+      <dgm:spPr/>
+      <dgm:t>
+        <a:bodyPr/>
+        <a:lstStyle/>
+        <a:p>
+          <a:endParaRPr lang="en-US"/>
+        </a:p>
+      </dgm:t>
+    </dgm:pt>
+    <dgm:pt modelId="{6BDF92C9-5D8A-4F54-A8D5-BCAC6B9A57C3}" type="sibTrans" cxnId="{732BF519-8AF9-46E9-A605-D8B3016E8487}">
+      <dgm:prSet/>
+      <dgm:spPr/>
+      <dgm:t>
+        <a:bodyPr/>
+        <a:lstStyle/>
+        <a:p>
+          <a:endParaRPr lang="en-US"/>
+        </a:p>
+      </dgm:t>
+    </dgm:pt>
+    <dgm:pt modelId="{915177A7-D4EB-4AE8-86BD-249E5278466B}">
+      <dgm:prSet phldrT="[Text]" phldr="0"/>
+      <dgm:spPr>
+        <a:solidFill>
+          <a:srgbClr val="FFC000"/>
+        </a:solidFill>
+      </dgm:spPr>
+      <dgm:t>
+        <a:bodyPr/>
+        <a:lstStyle/>
+        <a:p>
+          <a:r>
+            <a:rPr lang="en-US" dirty="0"/>
+            <a:t>Limestone</a:t>
+          </a:r>
+        </a:p>
+      </dgm:t>
+    </dgm:pt>
+    <dgm:pt modelId="{B5BAD76A-7E9A-4668-B9E3-5A85C816283D}" type="parTrans" cxnId="{B0544159-2B54-4B40-B794-E990ACD48374}">
+      <dgm:prSet/>
+      <dgm:spPr/>
+      <dgm:t>
+        <a:bodyPr/>
+        <a:lstStyle/>
+        <a:p>
+          <a:endParaRPr lang="en-US"/>
+        </a:p>
+      </dgm:t>
+    </dgm:pt>
+    <dgm:pt modelId="{DF845212-58D8-452F-BDF5-6A66F33A5CFF}" type="sibTrans" cxnId="{B0544159-2B54-4B40-B794-E990ACD48374}">
       <dgm:prSet/>
       <dgm:spPr/>
       <dgm:t>
@@ -2351,36 +2530,212 @@
       </dgm:prSet>
       <dgm:spPr/>
     </dgm:pt>
-    <dgm:pt modelId="{B353C52D-BACF-435C-8EB5-9A8E19D70CDB}" type="pres">
-      <dgm:prSet presAssocID="{3CBB9B95-F2DE-4200-8B3A-58D04CAEA47D}" presName="hierRoot1" presStyleCnt="0">
+    <dgm:pt modelId="{72548BFA-9BBC-45A7-9143-4A33BB8882F9}" type="pres">
+      <dgm:prSet presAssocID="{5AFEC8AD-8C3F-4724-85E3-77D8EA592781}" presName="hierRoot1" presStyleCnt="0">
         <dgm:presLayoutVars>
           <dgm:hierBranch val="init"/>
         </dgm:presLayoutVars>
       </dgm:prSet>
       <dgm:spPr/>
     </dgm:pt>
-    <dgm:pt modelId="{0F0BA860-8E2C-436A-9AD6-9C25C962289A}" type="pres">
-      <dgm:prSet presAssocID="{3CBB9B95-F2DE-4200-8B3A-58D04CAEA47D}" presName="rootComposite1" presStyleCnt="0"/>
-      <dgm:spPr/>
-    </dgm:pt>
-    <dgm:pt modelId="{70046D02-65D6-40DB-ACBF-E73D76169B62}" type="pres">
-      <dgm:prSet presAssocID="{3CBB9B95-F2DE-4200-8B3A-58D04CAEA47D}" presName="rootText1" presStyleLbl="node0" presStyleIdx="0" presStyleCnt="1">
+    <dgm:pt modelId="{C6E05D97-7EA0-48B5-B671-3A23A78C70BD}" type="pres">
+      <dgm:prSet presAssocID="{5AFEC8AD-8C3F-4724-85E3-77D8EA592781}" presName="rootComposite1" presStyleCnt="0"/>
+      <dgm:spPr/>
+    </dgm:pt>
+    <dgm:pt modelId="{03A1BB14-9637-40F9-B5B5-81520F48315F}" type="pres">
+      <dgm:prSet presAssocID="{5AFEC8AD-8C3F-4724-85E3-77D8EA592781}" presName="rootText1" presStyleLbl="node0" presStyleIdx="0" presStyleCnt="1">
         <dgm:presLayoutVars>
           <dgm:chPref val="3"/>
         </dgm:presLayoutVars>
       </dgm:prSet>
       <dgm:spPr/>
     </dgm:pt>
-    <dgm:pt modelId="{1E04B9EB-E6E0-4CAA-B858-CAD2D06C5A89}" type="pres">
-      <dgm:prSet presAssocID="{3CBB9B95-F2DE-4200-8B3A-58D04CAEA47D}" presName="rootConnector1" presStyleLbl="node1" presStyleIdx="0" presStyleCnt="0"/>
-      <dgm:spPr/>
-    </dgm:pt>
-    <dgm:pt modelId="{C516F576-9EA6-4A3E-BB9C-8700E1875F5A}" type="pres">
-      <dgm:prSet presAssocID="{3CBB9B95-F2DE-4200-8B3A-58D04CAEA47D}" presName="hierChild2" presStyleCnt="0"/>
-      <dgm:spPr/>
-    </dgm:pt>
-    <dgm:pt modelId="{3AAB2EC9-B2E4-493A-908E-ED4DAFB764DF}" type="pres">
-      <dgm:prSet presAssocID="{9A5D99C4-3A63-4397-B386-EBF9464401C2}" presName="Name64" presStyleLbl="parChTrans1D2" presStyleIdx="0" presStyleCnt="5"/>
+    <dgm:pt modelId="{04C1E8F7-D7F2-4A83-90D5-2A24E89AE95F}" type="pres">
+      <dgm:prSet presAssocID="{5AFEC8AD-8C3F-4724-85E3-77D8EA592781}" presName="rootConnector1" presStyleLbl="node1" presStyleIdx="0" presStyleCnt="0"/>
+      <dgm:spPr/>
+    </dgm:pt>
+    <dgm:pt modelId="{D843F3EE-B8EE-43C2-86E0-4F7E350611A9}" type="pres">
+      <dgm:prSet presAssocID="{5AFEC8AD-8C3F-4724-85E3-77D8EA592781}" presName="hierChild2" presStyleCnt="0"/>
+      <dgm:spPr/>
+    </dgm:pt>
+    <dgm:pt modelId="{E35E075B-61F2-41BC-BC2A-69356E0D43EE}" type="pres">
+      <dgm:prSet presAssocID="{C3FB077C-2462-498E-B844-9538FDE898FE}" presName="Name64" presStyleLbl="parChTrans1D2" presStyleIdx="0" presStyleCnt="4"/>
+      <dgm:spPr/>
+    </dgm:pt>
+    <dgm:pt modelId="{644D243D-C3FA-49AC-98C7-4A947FD5C596}" type="pres">
+      <dgm:prSet presAssocID="{3E6A9241-7ED7-4E1E-9A0C-FCCB8AFE0676}" presName="hierRoot2" presStyleCnt="0">
+        <dgm:presLayoutVars>
+          <dgm:hierBranch val="init"/>
+        </dgm:presLayoutVars>
+      </dgm:prSet>
+      <dgm:spPr/>
+    </dgm:pt>
+    <dgm:pt modelId="{479C7696-5389-4F7E-AB80-043BC155F2EE}" type="pres">
+      <dgm:prSet presAssocID="{3E6A9241-7ED7-4E1E-9A0C-FCCB8AFE0676}" presName="rootComposite" presStyleCnt="0"/>
+      <dgm:spPr/>
+    </dgm:pt>
+    <dgm:pt modelId="{1557FC18-F726-42E8-B0B5-F6D08A985014}" type="pres">
+      <dgm:prSet presAssocID="{3E6A9241-7ED7-4E1E-9A0C-FCCB8AFE0676}" presName="rootText" presStyleLbl="node2" presStyleIdx="0" presStyleCnt="4" custLinFactY="-6733" custLinFactNeighborX="0" custLinFactNeighborY="-100000">
+        <dgm:presLayoutVars>
+          <dgm:chPref val="3"/>
+        </dgm:presLayoutVars>
+      </dgm:prSet>
+      <dgm:spPr/>
+    </dgm:pt>
+    <dgm:pt modelId="{8E0DAD77-8259-47D3-8A7C-09406F1139F1}" type="pres">
+      <dgm:prSet presAssocID="{3E6A9241-7ED7-4E1E-9A0C-FCCB8AFE0676}" presName="rootConnector" presStyleLbl="node2" presStyleIdx="0" presStyleCnt="4"/>
+      <dgm:spPr/>
+    </dgm:pt>
+    <dgm:pt modelId="{0580859A-50EF-453D-BFC8-CEC25E8395B7}" type="pres">
+      <dgm:prSet presAssocID="{3E6A9241-7ED7-4E1E-9A0C-FCCB8AFE0676}" presName="hierChild4" presStyleCnt="0"/>
+      <dgm:spPr/>
+    </dgm:pt>
+    <dgm:pt modelId="{6D1FD870-2315-4054-B29C-39DF6F98439B}" type="pres">
+      <dgm:prSet presAssocID="{03FC0ABC-78B9-4767-8291-52E8792ED142}" presName="Name64" presStyleLbl="parChTrans1D3" presStyleIdx="0" presStyleCnt="8"/>
+      <dgm:spPr/>
+    </dgm:pt>
+    <dgm:pt modelId="{135CFCF6-872B-4789-9B65-2D8EAB952075}" type="pres">
+      <dgm:prSet presAssocID="{AE4652B3-3398-42D3-A9DE-FBC115B53A0D}" presName="hierRoot2" presStyleCnt="0">
+        <dgm:presLayoutVars>
+          <dgm:hierBranch val="init"/>
+        </dgm:presLayoutVars>
+      </dgm:prSet>
+      <dgm:spPr/>
+    </dgm:pt>
+    <dgm:pt modelId="{83157CDB-F484-4B87-8293-E4B564ADF99F}" type="pres">
+      <dgm:prSet presAssocID="{AE4652B3-3398-42D3-A9DE-FBC115B53A0D}" presName="rootComposite" presStyleCnt="0"/>
+      <dgm:spPr/>
+    </dgm:pt>
+    <dgm:pt modelId="{8C383FB3-4D14-4CBA-A0C6-CFF4847BA3EC}" type="pres">
+      <dgm:prSet presAssocID="{AE4652B3-3398-42D3-A9DE-FBC115B53A0D}" presName="rootText" presStyleLbl="node3" presStyleIdx="0" presStyleCnt="8" custLinFactY="-22435" custLinFactNeighborX="-1194" custLinFactNeighborY="-100000">
+        <dgm:presLayoutVars>
+          <dgm:chPref val="3"/>
+        </dgm:presLayoutVars>
+      </dgm:prSet>
+      <dgm:spPr/>
+    </dgm:pt>
+    <dgm:pt modelId="{9D3EEB16-49D5-49C0-85BE-0CF3D3E7D9DC}" type="pres">
+      <dgm:prSet presAssocID="{AE4652B3-3398-42D3-A9DE-FBC115B53A0D}" presName="rootConnector" presStyleLbl="node3" presStyleIdx="0" presStyleCnt="8"/>
+      <dgm:spPr/>
+    </dgm:pt>
+    <dgm:pt modelId="{86E86BCC-29B6-43B0-A110-A4C382B83FA3}" type="pres">
+      <dgm:prSet presAssocID="{AE4652B3-3398-42D3-A9DE-FBC115B53A0D}" presName="hierChild4" presStyleCnt="0"/>
+      <dgm:spPr/>
+    </dgm:pt>
+    <dgm:pt modelId="{5613D8DC-8394-4EB2-BEC0-4978BB2F3DA3}" type="pres">
+      <dgm:prSet presAssocID="{471AAB30-6948-4AC5-A872-0315651955DF}" presName="Name64" presStyleLbl="parChTrans1D4" presStyleIdx="0" presStyleCnt="31"/>
+      <dgm:spPr/>
+    </dgm:pt>
+    <dgm:pt modelId="{7C7902C3-EFB0-42BE-83D6-3EEF998E34AB}" type="pres">
+      <dgm:prSet presAssocID="{4F9DC5B4-E119-4273-B0C6-F44F279BA1CA}" presName="hierRoot2" presStyleCnt="0">
+        <dgm:presLayoutVars>
+          <dgm:hierBranch val="init"/>
+        </dgm:presLayoutVars>
+      </dgm:prSet>
+      <dgm:spPr/>
+    </dgm:pt>
+    <dgm:pt modelId="{8670FF6F-47A9-4179-A7EC-2F65366EB1A0}" type="pres">
+      <dgm:prSet presAssocID="{4F9DC5B4-E119-4273-B0C6-F44F279BA1CA}" presName="rootComposite" presStyleCnt="0"/>
+      <dgm:spPr/>
+    </dgm:pt>
+    <dgm:pt modelId="{8A071F50-0936-48EF-AE15-796B92F4F4A2}" type="pres">
+      <dgm:prSet presAssocID="{4F9DC5B4-E119-4273-B0C6-F44F279BA1CA}" presName="rootText" presStyleLbl="node4" presStyleIdx="0" presStyleCnt="31">
+        <dgm:presLayoutVars>
+          <dgm:chPref val="3"/>
+        </dgm:presLayoutVars>
+      </dgm:prSet>
+      <dgm:spPr/>
+    </dgm:pt>
+    <dgm:pt modelId="{BC5242FB-9811-49A0-A754-F9DF7804FA27}" type="pres">
+      <dgm:prSet presAssocID="{4F9DC5B4-E119-4273-B0C6-F44F279BA1CA}" presName="rootConnector" presStyleLbl="node4" presStyleIdx="0" presStyleCnt="31"/>
+      <dgm:spPr/>
+    </dgm:pt>
+    <dgm:pt modelId="{EC9AFF7F-5A8E-4CDA-BB48-AD6FD5B8B872}" type="pres">
+      <dgm:prSet presAssocID="{4F9DC5B4-E119-4273-B0C6-F44F279BA1CA}" presName="hierChild4" presStyleCnt="0"/>
+      <dgm:spPr/>
+    </dgm:pt>
+    <dgm:pt modelId="{7243B122-BF38-47A9-A7FB-01F27DC5A255}" type="pres">
+      <dgm:prSet presAssocID="{4F9DC5B4-E119-4273-B0C6-F44F279BA1CA}" presName="hierChild5" presStyleCnt="0"/>
+      <dgm:spPr/>
+    </dgm:pt>
+    <dgm:pt modelId="{8948F03F-28E2-4589-96A6-4C0F659AB93C}" type="pres">
+      <dgm:prSet presAssocID="{AE4652B3-3398-42D3-A9DE-FBC115B53A0D}" presName="hierChild5" presStyleCnt="0"/>
+      <dgm:spPr/>
+    </dgm:pt>
+    <dgm:pt modelId="{172AD772-32C1-453D-A10B-AD2F2B8A156F}" type="pres">
+      <dgm:prSet presAssocID="{4EAB6B4E-4AE3-4DD0-93A3-0784ECF3F600}" presName="Name64" presStyleLbl="parChTrans1D3" presStyleIdx="1" presStyleCnt="8"/>
+      <dgm:spPr/>
+    </dgm:pt>
+    <dgm:pt modelId="{B89BC2F4-8E12-4AAD-AE0E-8BD41F4F6A66}" type="pres">
+      <dgm:prSet presAssocID="{2A323462-12B1-44A5-95A4-30F7D5E83E80}" presName="hierRoot2" presStyleCnt="0">
+        <dgm:presLayoutVars>
+          <dgm:hierBranch val="init"/>
+        </dgm:presLayoutVars>
+      </dgm:prSet>
+      <dgm:spPr/>
+    </dgm:pt>
+    <dgm:pt modelId="{790B3243-67B0-44B6-8319-A1351FA4E1B0}" type="pres">
+      <dgm:prSet presAssocID="{2A323462-12B1-44A5-95A4-30F7D5E83E80}" presName="rootComposite" presStyleCnt="0"/>
+      <dgm:spPr/>
+    </dgm:pt>
+    <dgm:pt modelId="{582577D3-050E-4B41-BF32-01AA487AE0ED}" type="pres">
+      <dgm:prSet presAssocID="{2A323462-12B1-44A5-95A4-30F7D5E83E80}" presName="rootText" presStyleLbl="node3" presStyleIdx="1" presStyleCnt="8" custLinFactNeighborX="-1194" custLinFactNeighborY="-11945">
+        <dgm:presLayoutVars>
+          <dgm:chPref val="3"/>
+        </dgm:presLayoutVars>
+      </dgm:prSet>
+      <dgm:spPr/>
+    </dgm:pt>
+    <dgm:pt modelId="{ADACFA42-F20B-4E19-8623-C276B1FF0253}" type="pres">
+      <dgm:prSet presAssocID="{2A323462-12B1-44A5-95A4-30F7D5E83E80}" presName="rootConnector" presStyleLbl="node3" presStyleIdx="1" presStyleCnt="8"/>
+      <dgm:spPr/>
+    </dgm:pt>
+    <dgm:pt modelId="{FA7482C3-260F-4FD3-815C-AF4B1B75464D}" type="pres">
+      <dgm:prSet presAssocID="{2A323462-12B1-44A5-95A4-30F7D5E83E80}" presName="hierChild4" presStyleCnt="0"/>
+      <dgm:spPr/>
+    </dgm:pt>
+    <dgm:pt modelId="{5E5EF9F5-E3CC-45C6-99DE-3ACA0A30BE43}" type="pres">
+      <dgm:prSet presAssocID="{2A323462-12B1-44A5-95A4-30F7D5E83E80}" presName="hierChild5" presStyleCnt="0"/>
+      <dgm:spPr/>
+    </dgm:pt>
+    <dgm:pt modelId="{65807902-FF69-40E6-B197-480C58AD0E5A}" type="pres">
+      <dgm:prSet presAssocID="{3E6A9241-7ED7-4E1E-9A0C-FCCB8AFE0676}" presName="hierChild5" presStyleCnt="0"/>
+      <dgm:spPr/>
+    </dgm:pt>
+    <dgm:pt modelId="{B0CC0030-18CD-4C76-8E04-002BB6D32A15}" type="pres">
+      <dgm:prSet presAssocID="{9242D754-7730-4B78-AB9C-A02DFB9723F4}" presName="Name64" presStyleLbl="parChTrans1D2" presStyleIdx="1" presStyleCnt="4"/>
+      <dgm:spPr/>
+    </dgm:pt>
+    <dgm:pt modelId="{309A1635-DE84-4660-81FA-431325D7FF2B}" type="pres">
+      <dgm:prSet presAssocID="{3CBB9B95-F2DE-4200-8B3A-58D04CAEA47D}" presName="hierRoot2" presStyleCnt="0">
+        <dgm:presLayoutVars>
+          <dgm:hierBranch val="init"/>
+        </dgm:presLayoutVars>
+      </dgm:prSet>
+      <dgm:spPr/>
+    </dgm:pt>
+    <dgm:pt modelId="{0FC2F79D-D526-4E6A-A10F-B46305F486B9}" type="pres">
+      <dgm:prSet presAssocID="{3CBB9B95-F2DE-4200-8B3A-58D04CAEA47D}" presName="rootComposite" presStyleCnt="0"/>
+      <dgm:spPr/>
+    </dgm:pt>
+    <dgm:pt modelId="{61A0D4EF-EC3A-4279-BC51-4F36D0B52EB7}" type="pres">
+      <dgm:prSet presAssocID="{3CBB9B95-F2DE-4200-8B3A-58D04CAEA47D}" presName="rootText" presStyleLbl="node2" presStyleIdx="1" presStyleCnt="4">
+        <dgm:presLayoutVars>
+          <dgm:chPref val="3"/>
+        </dgm:presLayoutVars>
+      </dgm:prSet>
+      <dgm:spPr/>
+    </dgm:pt>
+    <dgm:pt modelId="{C2C48CC0-3A5A-4EE7-B580-FAF454A09CD8}" type="pres">
+      <dgm:prSet presAssocID="{3CBB9B95-F2DE-4200-8B3A-58D04CAEA47D}" presName="rootConnector" presStyleLbl="node2" presStyleIdx="1" presStyleCnt="4"/>
+      <dgm:spPr/>
+    </dgm:pt>
+    <dgm:pt modelId="{21C05684-978E-4814-BFFD-06D294C8A223}" type="pres">
+      <dgm:prSet presAssocID="{3CBB9B95-F2DE-4200-8B3A-58D04CAEA47D}" presName="hierChild4" presStyleCnt="0"/>
+      <dgm:spPr/>
+    </dgm:pt>
+    <dgm:pt modelId="{0A14706F-1BC6-48E6-BDBA-7B500E589BAD}" type="pres">
+      <dgm:prSet presAssocID="{9A5D99C4-3A63-4397-B386-EBF9464401C2}" presName="Name64" presStyleLbl="parChTrans1D3" presStyleIdx="2" presStyleCnt="8"/>
       <dgm:spPr/>
     </dgm:pt>
     <dgm:pt modelId="{297A1475-871F-4B02-9E8C-FA3D011634A1}" type="pres">
@@ -2396,7 +2751,7 @@
       <dgm:spPr/>
     </dgm:pt>
     <dgm:pt modelId="{BAE31ACF-752D-4EA8-8B6E-54DBD06D21AE}" type="pres">
-      <dgm:prSet presAssocID="{9A4F48F6-BCF9-4165-AF3C-7C7BA667FA27}" presName="rootText" presStyleLbl="node2" presStyleIdx="0" presStyleCnt="5">
+      <dgm:prSet presAssocID="{9A4F48F6-BCF9-4165-AF3C-7C7BA667FA27}" presName="rootText" presStyleLbl="node3" presStyleIdx="2" presStyleCnt="8">
         <dgm:presLayoutVars>
           <dgm:chPref val="3"/>
         </dgm:presLayoutVars>
@@ -2404,15 +2759,15 @@
       <dgm:spPr/>
     </dgm:pt>
     <dgm:pt modelId="{D46F3F0D-30A4-4DDE-884B-BD4A774332AE}" type="pres">
-      <dgm:prSet presAssocID="{9A4F48F6-BCF9-4165-AF3C-7C7BA667FA27}" presName="rootConnector" presStyleLbl="node2" presStyleIdx="0" presStyleCnt="5"/>
+      <dgm:prSet presAssocID="{9A4F48F6-BCF9-4165-AF3C-7C7BA667FA27}" presName="rootConnector" presStyleLbl="node3" presStyleIdx="2" presStyleCnt="8"/>
       <dgm:spPr/>
     </dgm:pt>
     <dgm:pt modelId="{6322132C-78CD-43CA-BDB1-15934FC6847D}" type="pres">
       <dgm:prSet presAssocID="{9A4F48F6-BCF9-4165-AF3C-7C7BA667FA27}" presName="hierChild4" presStyleCnt="0"/>
       <dgm:spPr/>
     </dgm:pt>
-    <dgm:pt modelId="{0AD372FC-0845-44C5-90A0-4A444CE67921}" type="pres">
-      <dgm:prSet presAssocID="{6C4DA155-8243-4072-B293-EC0CBA97AD7C}" presName="Name64" presStyleLbl="parChTrans1D3" presStyleIdx="0" presStyleCnt="13"/>
+    <dgm:pt modelId="{E7F095C9-0EEA-49B6-905E-AC74937B597A}" type="pres">
+      <dgm:prSet presAssocID="{6C4DA155-8243-4072-B293-EC0CBA97AD7C}" presName="Name64" presStyleLbl="parChTrans1D4" presStyleIdx="1" presStyleCnt="31"/>
       <dgm:spPr/>
     </dgm:pt>
     <dgm:pt modelId="{2E752132-E630-4632-9600-9B043BD9E414}" type="pres">
@@ -2428,7 +2783,7 @@
       <dgm:spPr/>
     </dgm:pt>
     <dgm:pt modelId="{171F98E8-7A93-4667-99EC-A67EE133F035}" type="pres">
-      <dgm:prSet presAssocID="{4ECE59B8-536D-4DBD-9298-39EEE1A4E2F2}" presName="rootText" presStyleLbl="node3" presStyleIdx="0" presStyleCnt="13">
+      <dgm:prSet presAssocID="{4ECE59B8-536D-4DBD-9298-39EEE1A4E2F2}" presName="rootText" presStyleLbl="node4" presStyleIdx="1" presStyleCnt="31">
         <dgm:presLayoutVars>
           <dgm:chPref val="3"/>
         </dgm:presLayoutVars>
@@ -2436,15 +2791,15 @@
       <dgm:spPr/>
     </dgm:pt>
     <dgm:pt modelId="{B4B0D416-48DF-4327-B6CB-95B60821634B}" type="pres">
-      <dgm:prSet presAssocID="{4ECE59B8-536D-4DBD-9298-39EEE1A4E2F2}" presName="rootConnector" presStyleLbl="node3" presStyleIdx="0" presStyleCnt="13"/>
+      <dgm:prSet presAssocID="{4ECE59B8-536D-4DBD-9298-39EEE1A4E2F2}" presName="rootConnector" presStyleLbl="node4" presStyleIdx="1" presStyleCnt="31"/>
       <dgm:spPr/>
     </dgm:pt>
     <dgm:pt modelId="{860F5D21-83EC-4D1B-83FE-010E6AAAD6E1}" type="pres">
       <dgm:prSet presAssocID="{4ECE59B8-536D-4DBD-9298-39EEE1A4E2F2}" presName="hierChild4" presStyleCnt="0"/>
       <dgm:spPr/>
     </dgm:pt>
-    <dgm:pt modelId="{0C48BBF9-D61A-49C3-9C4A-9F8E897BC526}" type="pres">
-      <dgm:prSet presAssocID="{454A2903-42E9-4AD4-B32C-56480B741CA4}" presName="Name64" presStyleLbl="parChTrans1D4" presStyleIdx="0" presStyleCnt="20"/>
+    <dgm:pt modelId="{2086A9C7-9135-4192-911C-9FD307A3662E}" type="pres">
+      <dgm:prSet presAssocID="{454A2903-42E9-4AD4-B32C-56480B741CA4}" presName="Name64" presStyleLbl="parChTrans1D4" presStyleIdx="2" presStyleCnt="31"/>
       <dgm:spPr/>
     </dgm:pt>
     <dgm:pt modelId="{68B35679-26B2-422F-8E58-AD1E0E71C97A}" type="pres">
@@ -2460,7 +2815,7 @@
       <dgm:spPr/>
     </dgm:pt>
     <dgm:pt modelId="{4F157AFE-1A3E-4945-AFFE-3FBFDF773F45}" type="pres">
-      <dgm:prSet presAssocID="{9AC9B081-25C5-4E83-B9FC-4EE1220C42CC}" presName="rootText" presStyleLbl="node4" presStyleIdx="0" presStyleCnt="20">
+      <dgm:prSet presAssocID="{9AC9B081-25C5-4E83-B9FC-4EE1220C42CC}" presName="rootText" presStyleLbl="node4" presStyleIdx="2" presStyleCnt="31">
         <dgm:presLayoutVars>
           <dgm:chPref val="3"/>
         </dgm:presLayoutVars>
@@ -2468,7 +2823,7 @@
       <dgm:spPr/>
     </dgm:pt>
     <dgm:pt modelId="{32B448BD-E161-46C8-A1F6-88A373738118}" type="pres">
-      <dgm:prSet presAssocID="{9AC9B081-25C5-4E83-B9FC-4EE1220C42CC}" presName="rootConnector" presStyleLbl="node4" presStyleIdx="0" presStyleCnt="20"/>
+      <dgm:prSet presAssocID="{9AC9B081-25C5-4E83-B9FC-4EE1220C42CC}" presName="rootConnector" presStyleLbl="node4" presStyleIdx="2" presStyleCnt="31"/>
       <dgm:spPr/>
     </dgm:pt>
     <dgm:pt modelId="{E336B98F-281B-4A8A-AE13-8063387C03E3}" type="pres">
@@ -2479,48 +2834,84 @@
       <dgm:prSet presAssocID="{9AC9B081-25C5-4E83-B9FC-4EE1220C42CC}" presName="hierChild5" presStyleCnt="0"/>
       <dgm:spPr/>
     </dgm:pt>
-    <dgm:pt modelId="{FEF5E04A-D12E-4CCE-A14B-A308CB2E3CFB}" type="pres">
-      <dgm:prSet presAssocID="{6187C6C3-B996-4ED1-9E29-1993D45E2169}" presName="Name64" presStyleLbl="parChTrans1D4" presStyleIdx="1" presStyleCnt="20"/>
-      <dgm:spPr/>
-    </dgm:pt>
-    <dgm:pt modelId="{DF3A6B01-9AF0-47D5-B2C6-4767265990E0}" type="pres">
-      <dgm:prSet presAssocID="{E92EBC15-E9D8-4B5F-B808-E2AAF4F94361}" presName="hierRoot2" presStyleCnt="0">
+    <dgm:pt modelId="{8A3A4087-C2D1-4E88-BA2C-FF26690A6263}" type="pres">
+      <dgm:prSet presAssocID="{4ECE59B8-536D-4DBD-9298-39EEE1A4E2F2}" presName="hierChild5" presStyleCnt="0"/>
+      <dgm:spPr/>
+    </dgm:pt>
+    <dgm:pt modelId="{4CFCDFA8-E01C-4C6B-A731-226D0B6C2C76}" type="pres">
+      <dgm:prSet presAssocID="{8E55D407-483C-4F95-9E0F-F2F663299F50}" presName="Name64" presStyleLbl="parChTrans1D4" presStyleIdx="3" presStyleCnt="31"/>
+      <dgm:spPr/>
+    </dgm:pt>
+    <dgm:pt modelId="{8E96193A-7879-4C54-B22A-A2C9C6D1B243}" type="pres">
+      <dgm:prSet presAssocID="{B9CE2267-5814-421B-8674-D202299E0DA9}" presName="hierRoot2" presStyleCnt="0">
         <dgm:presLayoutVars>
           <dgm:hierBranch val="init"/>
         </dgm:presLayoutVars>
       </dgm:prSet>
       <dgm:spPr/>
     </dgm:pt>
-    <dgm:pt modelId="{E0BBCED8-EF82-4B98-8005-DA81FE43F6E1}" type="pres">
-      <dgm:prSet presAssocID="{E92EBC15-E9D8-4B5F-B808-E2AAF4F94361}" presName="rootComposite" presStyleCnt="0"/>
-      <dgm:spPr/>
-    </dgm:pt>
-    <dgm:pt modelId="{7EEBE634-507C-452D-8F74-93F7DA14811D}" type="pres">
-      <dgm:prSet presAssocID="{E92EBC15-E9D8-4B5F-B808-E2AAF4F94361}" presName="rootText" presStyleLbl="node4" presStyleIdx="1" presStyleCnt="20">
+    <dgm:pt modelId="{E49EF6BC-879F-4C43-9032-39D4E59C1122}" type="pres">
+      <dgm:prSet presAssocID="{B9CE2267-5814-421B-8674-D202299E0DA9}" presName="rootComposite" presStyleCnt="0"/>
+      <dgm:spPr/>
+    </dgm:pt>
+    <dgm:pt modelId="{1ECE9F9F-A668-4333-B43A-1DABED3BF4C5}" type="pres">
+      <dgm:prSet presAssocID="{B9CE2267-5814-421B-8674-D202299E0DA9}" presName="rootText" presStyleLbl="node4" presStyleIdx="3" presStyleCnt="31">
         <dgm:presLayoutVars>
           <dgm:chPref val="3"/>
         </dgm:presLayoutVars>
       </dgm:prSet>
       <dgm:spPr/>
     </dgm:pt>
-    <dgm:pt modelId="{67AC6E1B-A339-4183-A794-6F8370D03B71}" type="pres">
-      <dgm:prSet presAssocID="{E92EBC15-E9D8-4B5F-B808-E2AAF4F94361}" presName="rootConnector" presStyleLbl="node4" presStyleIdx="1" presStyleCnt="20"/>
-      <dgm:spPr/>
-    </dgm:pt>
-    <dgm:pt modelId="{ECA1E168-5C42-4AB6-9EB7-EB069D860EC3}" type="pres">
-      <dgm:prSet presAssocID="{E92EBC15-E9D8-4B5F-B808-E2AAF4F94361}" presName="hierChild4" presStyleCnt="0"/>
-      <dgm:spPr/>
-    </dgm:pt>
-    <dgm:pt modelId="{3EEBBF62-1428-45E5-AB17-40275F203E09}" type="pres">
-      <dgm:prSet presAssocID="{E92EBC15-E9D8-4B5F-B808-E2AAF4F94361}" presName="hierChild5" presStyleCnt="0"/>
-      <dgm:spPr/>
-    </dgm:pt>
-    <dgm:pt modelId="{8A3A4087-C2D1-4E88-BA2C-FF26690A6263}" type="pres">
-      <dgm:prSet presAssocID="{4ECE59B8-536D-4DBD-9298-39EEE1A4E2F2}" presName="hierChild5" presStyleCnt="0"/>
-      <dgm:spPr/>
-    </dgm:pt>
-    <dgm:pt modelId="{37CB0559-0F9C-4E01-9395-9AF1D8335AB3}" type="pres">
-      <dgm:prSet presAssocID="{83D18EB3-F613-46C2-86CF-CF849473A283}" presName="Name64" presStyleLbl="parChTrans1D3" presStyleIdx="1" presStyleCnt="13"/>
+    <dgm:pt modelId="{33C6A336-A8D1-4674-9B6A-18C545834C69}" type="pres">
+      <dgm:prSet presAssocID="{B9CE2267-5814-421B-8674-D202299E0DA9}" presName="rootConnector" presStyleLbl="node4" presStyleIdx="3" presStyleCnt="31"/>
+      <dgm:spPr/>
+    </dgm:pt>
+    <dgm:pt modelId="{B7C1DC1A-E336-4BB4-9D9D-A520B288CB01}" type="pres">
+      <dgm:prSet presAssocID="{B9CE2267-5814-421B-8674-D202299E0DA9}" presName="hierChild4" presStyleCnt="0"/>
+      <dgm:spPr/>
+    </dgm:pt>
+    <dgm:pt modelId="{595CFFA0-B569-4A56-8175-567F57E3E286}" type="pres">
+      <dgm:prSet presAssocID="{B5BAD76A-7E9A-4668-B9E3-5A85C816283D}" presName="Name64" presStyleLbl="parChTrans1D4" presStyleIdx="4" presStyleCnt="31"/>
+      <dgm:spPr/>
+    </dgm:pt>
+    <dgm:pt modelId="{0409A85C-1F0E-4A89-987F-3851A7A68BDF}" type="pres">
+      <dgm:prSet presAssocID="{915177A7-D4EB-4AE8-86BD-249E5278466B}" presName="hierRoot2" presStyleCnt="0">
+        <dgm:presLayoutVars>
+          <dgm:hierBranch val="init"/>
+        </dgm:presLayoutVars>
+      </dgm:prSet>
+      <dgm:spPr/>
+    </dgm:pt>
+    <dgm:pt modelId="{3DBCD097-5046-4AD9-9F47-C3B6A8869991}" type="pres">
+      <dgm:prSet presAssocID="{915177A7-D4EB-4AE8-86BD-249E5278466B}" presName="rootComposite" presStyleCnt="0"/>
+      <dgm:spPr/>
+    </dgm:pt>
+    <dgm:pt modelId="{88A62553-AA35-4C7E-AEE4-0944A5577F9F}" type="pres">
+      <dgm:prSet presAssocID="{915177A7-D4EB-4AE8-86BD-249E5278466B}" presName="rootText" presStyleLbl="node4" presStyleIdx="4" presStyleCnt="31">
+        <dgm:presLayoutVars>
+          <dgm:chPref val="3"/>
+        </dgm:presLayoutVars>
+      </dgm:prSet>
+      <dgm:spPr/>
+    </dgm:pt>
+    <dgm:pt modelId="{B1A98113-5456-4FA2-978F-D9BF6518B3D2}" type="pres">
+      <dgm:prSet presAssocID="{915177A7-D4EB-4AE8-86BD-249E5278466B}" presName="rootConnector" presStyleLbl="node4" presStyleIdx="4" presStyleCnt="31"/>
+      <dgm:spPr/>
+    </dgm:pt>
+    <dgm:pt modelId="{1AE67292-3C18-4CA8-AB74-0B8B6C5F7208}" type="pres">
+      <dgm:prSet presAssocID="{915177A7-D4EB-4AE8-86BD-249E5278466B}" presName="hierChild4" presStyleCnt="0"/>
+      <dgm:spPr/>
+    </dgm:pt>
+    <dgm:pt modelId="{ED18E2C5-2C0C-470F-BF50-AE8352C26AD4}" type="pres">
+      <dgm:prSet presAssocID="{915177A7-D4EB-4AE8-86BD-249E5278466B}" presName="hierChild5" presStyleCnt="0"/>
+      <dgm:spPr/>
+    </dgm:pt>
+    <dgm:pt modelId="{E32B485E-A57D-472A-85FF-B48E86C2EA4B}" type="pres">
+      <dgm:prSet presAssocID="{B9CE2267-5814-421B-8674-D202299E0DA9}" presName="hierChild5" presStyleCnt="0"/>
+      <dgm:spPr/>
+    </dgm:pt>
+    <dgm:pt modelId="{183240E7-EEA6-46D8-AE60-487B0566B9A2}" type="pres">
+      <dgm:prSet presAssocID="{83D18EB3-F613-46C2-86CF-CF849473A283}" presName="Name64" presStyleLbl="parChTrans1D4" presStyleIdx="5" presStyleCnt="31"/>
       <dgm:spPr/>
     </dgm:pt>
     <dgm:pt modelId="{CFDB63F1-940F-405A-A9B4-7DDC93AF5869}" type="pres">
@@ -2536,7 +2927,7 @@
       <dgm:spPr/>
     </dgm:pt>
     <dgm:pt modelId="{E9A97367-2565-4CA7-B81D-4E147657D835}" type="pres">
-      <dgm:prSet presAssocID="{855297F2-A162-4EED-8FE7-B40916947E1F}" presName="rootText" presStyleLbl="node3" presStyleIdx="1" presStyleCnt="13">
+      <dgm:prSet presAssocID="{855297F2-A162-4EED-8FE7-B40916947E1F}" presName="rootText" presStyleLbl="node4" presStyleIdx="5" presStyleCnt="31">
         <dgm:presLayoutVars>
           <dgm:chPref val="3"/>
         </dgm:presLayoutVars>
@@ -2544,91 +2935,19 @@
       <dgm:spPr/>
     </dgm:pt>
     <dgm:pt modelId="{2846335E-09B8-4070-8AE1-F4A8659BD36F}" type="pres">
-      <dgm:prSet presAssocID="{855297F2-A162-4EED-8FE7-B40916947E1F}" presName="rootConnector" presStyleLbl="node3" presStyleIdx="1" presStyleCnt="13"/>
+      <dgm:prSet presAssocID="{855297F2-A162-4EED-8FE7-B40916947E1F}" presName="rootConnector" presStyleLbl="node4" presStyleIdx="5" presStyleCnt="31"/>
       <dgm:spPr/>
     </dgm:pt>
     <dgm:pt modelId="{D98298B5-4B34-459A-BC81-9CF46F584A90}" type="pres">
       <dgm:prSet presAssocID="{855297F2-A162-4EED-8FE7-B40916947E1F}" presName="hierChild4" presStyleCnt="0"/>
       <dgm:spPr/>
     </dgm:pt>
-    <dgm:pt modelId="{904226D0-5DE5-4039-A33D-3A3B483D2045}" type="pres">
-      <dgm:prSet presAssocID="{11D63282-5C42-403B-97BA-1AB59BBC2C41}" presName="Name64" presStyleLbl="parChTrans1D4" presStyleIdx="2" presStyleCnt="20"/>
-      <dgm:spPr/>
-    </dgm:pt>
-    <dgm:pt modelId="{CFDFF4EB-FEE9-4245-894A-89F788BCC283}" type="pres">
-      <dgm:prSet presAssocID="{E3AF1FB6-7793-4A4C-A846-4D8E2C079072}" presName="hierRoot2" presStyleCnt="0">
-        <dgm:presLayoutVars>
-          <dgm:hierBranch val="init"/>
-        </dgm:presLayoutVars>
-      </dgm:prSet>
-      <dgm:spPr/>
-    </dgm:pt>
-    <dgm:pt modelId="{0C24B182-0E6A-4D77-80B6-2F0EFD2DF32A}" type="pres">
-      <dgm:prSet presAssocID="{E3AF1FB6-7793-4A4C-A846-4D8E2C079072}" presName="rootComposite" presStyleCnt="0"/>
-      <dgm:spPr/>
-    </dgm:pt>
-    <dgm:pt modelId="{CBCC7696-EFAB-4F9F-8C0A-720224B8DCB6}" type="pres">
-      <dgm:prSet presAssocID="{E3AF1FB6-7793-4A4C-A846-4D8E2C079072}" presName="rootText" presStyleLbl="node4" presStyleIdx="2" presStyleCnt="20">
-        <dgm:presLayoutVars>
-          <dgm:chPref val="3"/>
-        </dgm:presLayoutVars>
-      </dgm:prSet>
-      <dgm:spPr/>
-    </dgm:pt>
-    <dgm:pt modelId="{23D4DC71-764D-47BE-982C-F5FC61CA73F7}" type="pres">
-      <dgm:prSet presAssocID="{E3AF1FB6-7793-4A4C-A846-4D8E2C079072}" presName="rootConnector" presStyleLbl="node4" presStyleIdx="2" presStyleCnt="20"/>
-      <dgm:spPr/>
-    </dgm:pt>
-    <dgm:pt modelId="{3E27F26B-6132-4147-8863-74AD7D9AB567}" type="pres">
-      <dgm:prSet presAssocID="{E3AF1FB6-7793-4A4C-A846-4D8E2C079072}" presName="hierChild4" presStyleCnt="0"/>
-      <dgm:spPr/>
-    </dgm:pt>
-    <dgm:pt modelId="{2C4198AB-26E0-4488-A949-AC34DCA3B154}" type="pres">
-      <dgm:prSet presAssocID="{E13A3907-2F21-472C-B2F1-588C6FECF12C}" presName="Name64" presStyleLbl="parChTrans1D4" presStyleIdx="3" presStyleCnt="20"/>
-      <dgm:spPr/>
-    </dgm:pt>
-    <dgm:pt modelId="{D474E4AE-4358-419C-9225-BC9E6D566826}" type="pres">
-      <dgm:prSet presAssocID="{0C931ACA-CC53-4D97-9D61-C471A807C39D}" presName="hierRoot2" presStyleCnt="0">
-        <dgm:presLayoutVars>
-          <dgm:hierBranch val="init"/>
-        </dgm:presLayoutVars>
-      </dgm:prSet>
-      <dgm:spPr/>
-    </dgm:pt>
-    <dgm:pt modelId="{EF097900-7832-47D3-9D78-69FD0289B4AF}" type="pres">
-      <dgm:prSet presAssocID="{0C931ACA-CC53-4D97-9D61-C471A807C39D}" presName="rootComposite" presStyleCnt="0"/>
-      <dgm:spPr/>
-    </dgm:pt>
-    <dgm:pt modelId="{AD980698-3B39-4F03-BC7B-E6CC415D37FF}" type="pres">
-      <dgm:prSet presAssocID="{0C931ACA-CC53-4D97-9D61-C471A807C39D}" presName="rootText" presStyleLbl="node4" presStyleIdx="3" presStyleCnt="20">
-        <dgm:presLayoutVars>
-          <dgm:chPref val="3"/>
-        </dgm:presLayoutVars>
-      </dgm:prSet>
-      <dgm:spPr/>
-    </dgm:pt>
-    <dgm:pt modelId="{39661304-84F2-4510-A80A-0ED0BF9B0CEA}" type="pres">
-      <dgm:prSet presAssocID="{0C931ACA-CC53-4D97-9D61-C471A807C39D}" presName="rootConnector" presStyleLbl="node4" presStyleIdx="3" presStyleCnt="20"/>
-      <dgm:spPr/>
-    </dgm:pt>
-    <dgm:pt modelId="{065A812D-ABB5-4FA3-8F10-23657A25B85B}" type="pres">
-      <dgm:prSet presAssocID="{0C931ACA-CC53-4D97-9D61-C471A807C39D}" presName="hierChild4" presStyleCnt="0"/>
-      <dgm:spPr/>
-    </dgm:pt>
-    <dgm:pt modelId="{6942C355-73E2-4014-9379-D8E1C3BBB07F}" type="pres">
-      <dgm:prSet presAssocID="{0C931ACA-CC53-4D97-9D61-C471A807C39D}" presName="hierChild5" presStyleCnt="0"/>
-      <dgm:spPr/>
-    </dgm:pt>
-    <dgm:pt modelId="{C273ABF5-E08A-4BE7-A63B-1BF59E20ADD2}" type="pres">
-      <dgm:prSet presAssocID="{E3AF1FB6-7793-4A4C-A846-4D8E2C079072}" presName="hierChild5" presStyleCnt="0"/>
-      <dgm:spPr/>
-    </dgm:pt>
     <dgm:pt modelId="{51A25AF1-B8A8-40A6-BC8E-0E3A3D038724}" type="pres">
       <dgm:prSet presAssocID="{855297F2-A162-4EED-8FE7-B40916947E1F}" presName="hierChild5" presStyleCnt="0"/>
       <dgm:spPr/>
     </dgm:pt>
-    <dgm:pt modelId="{E4E142D8-98D9-4BB4-8826-8B27491F43B4}" type="pres">
-      <dgm:prSet presAssocID="{A874BA0B-B7EF-479E-B1B8-17FB9E8D2868}" presName="Name64" presStyleLbl="parChTrans1D3" presStyleIdx="2" presStyleCnt="13"/>
+    <dgm:pt modelId="{B8837C6A-8105-408D-9A2C-4FAA52810339}" type="pres">
+      <dgm:prSet presAssocID="{A874BA0B-B7EF-479E-B1B8-17FB9E8D2868}" presName="Name64" presStyleLbl="parChTrans1D4" presStyleIdx="6" presStyleCnt="31"/>
       <dgm:spPr/>
     </dgm:pt>
     <dgm:pt modelId="{7D003827-466D-499B-9492-0D274854DE71}" type="pres">
@@ -2644,7 +2963,7 @@
       <dgm:spPr/>
     </dgm:pt>
     <dgm:pt modelId="{3E0FA384-F7A7-4EF5-BB6C-325C5B877E93}" type="pres">
-      <dgm:prSet presAssocID="{13719A43-B673-4C88-9D1E-16D752C05E25}" presName="rootText" presStyleLbl="node3" presStyleIdx="2" presStyleCnt="13">
+      <dgm:prSet presAssocID="{13719A43-B673-4C88-9D1E-16D752C05E25}" presName="rootText" presStyleLbl="node4" presStyleIdx="6" presStyleCnt="31">
         <dgm:presLayoutVars>
           <dgm:chPref val="3"/>
         </dgm:presLayoutVars>
@@ -2652,15 +2971,15 @@
       <dgm:spPr/>
     </dgm:pt>
     <dgm:pt modelId="{039EE693-846A-452B-938C-A79863754B50}" type="pres">
-      <dgm:prSet presAssocID="{13719A43-B673-4C88-9D1E-16D752C05E25}" presName="rootConnector" presStyleLbl="node3" presStyleIdx="2" presStyleCnt="13"/>
+      <dgm:prSet presAssocID="{13719A43-B673-4C88-9D1E-16D752C05E25}" presName="rootConnector" presStyleLbl="node4" presStyleIdx="6" presStyleCnt="31"/>
       <dgm:spPr/>
     </dgm:pt>
     <dgm:pt modelId="{15438C47-FF5A-46A4-A923-94CF51153C82}" type="pres">
       <dgm:prSet presAssocID="{13719A43-B673-4C88-9D1E-16D752C05E25}" presName="hierChild4" presStyleCnt="0"/>
       <dgm:spPr/>
     </dgm:pt>
-    <dgm:pt modelId="{B53F97DA-CD42-477B-978A-645AB0B3B0D8}" type="pres">
-      <dgm:prSet presAssocID="{B0A38B96-90FF-402E-A24A-BEF06D54B9B6}" presName="Name64" presStyleLbl="parChTrans1D4" presStyleIdx="4" presStyleCnt="20"/>
+    <dgm:pt modelId="{D5EFD006-A32B-489A-B809-E3D7E0386B88}" type="pres">
+      <dgm:prSet presAssocID="{B0A38B96-90FF-402E-A24A-BEF06D54B9B6}" presName="Name64" presStyleLbl="parChTrans1D4" presStyleIdx="7" presStyleCnt="31"/>
       <dgm:spPr/>
     </dgm:pt>
     <dgm:pt modelId="{6D2D5EBF-D547-4528-A20C-8F5E2C9B880C}" type="pres">
@@ -2676,7 +2995,7 @@
       <dgm:spPr/>
     </dgm:pt>
     <dgm:pt modelId="{5CE68631-E50F-4A7D-A78E-B9848249D5F3}" type="pres">
-      <dgm:prSet presAssocID="{764BB32F-0818-4190-8CBA-5BFD6043BFBC}" presName="rootText" presStyleLbl="node4" presStyleIdx="4" presStyleCnt="20">
+      <dgm:prSet presAssocID="{764BB32F-0818-4190-8CBA-5BFD6043BFBC}" presName="rootText" presStyleLbl="node4" presStyleIdx="7" presStyleCnt="31">
         <dgm:presLayoutVars>
           <dgm:chPref val="3"/>
         </dgm:presLayoutVars>
@@ -2684,7 +3003,7 @@
       <dgm:spPr/>
     </dgm:pt>
     <dgm:pt modelId="{313097A2-C9D5-4518-B29A-5B216269D568}" type="pres">
-      <dgm:prSet presAssocID="{764BB32F-0818-4190-8CBA-5BFD6043BFBC}" presName="rootConnector" presStyleLbl="node4" presStyleIdx="4" presStyleCnt="20"/>
+      <dgm:prSet presAssocID="{764BB32F-0818-4190-8CBA-5BFD6043BFBC}" presName="rootConnector" presStyleLbl="node4" presStyleIdx="7" presStyleCnt="31"/>
       <dgm:spPr/>
     </dgm:pt>
     <dgm:pt modelId="{23275A76-13D0-4464-8314-473BE340AD8F}" type="pres">
@@ -2699,8 +3018,152 @@
       <dgm:prSet presAssocID="{13719A43-B673-4C88-9D1E-16D752C05E25}" presName="hierChild5" presStyleCnt="0"/>
       <dgm:spPr/>
     </dgm:pt>
-    <dgm:pt modelId="{422596F1-C75B-45F9-BFD0-9951F8F32EFB}" type="pres">
-      <dgm:prSet presAssocID="{4F864848-EEBF-4930-A161-A4A71CAED760}" presName="Name64" presStyleLbl="parChTrans1D3" presStyleIdx="3" presStyleCnt="13"/>
+    <dgm:pt modelId="{16D33CAD-B597-414C-9523-47A079B2FFFB}" type="pres">
+      <dgm:prSet presAssocID="{C7EBEF87-5076-4181-B19B-8AD6A127BA45}" presName="Name64" presStyleLbl="parChTrans1D4" presStyleIdx="8" presStyleCnt="31"/>
+      <dgm:spPr/>
+    </dgm:pt>
+    <dgm:pt modelId="{2768B59B-453A-42A2-85F9-75C2F9E31EB2}" type="pres">
+      <dgm:prSet presAssocID="{6A27566D-5E2B-4C81-8C09-639ED0AF984B}" presName="hierRoot2" presStyleCnt="0">
+        <dgm:presLayoutVars>
+          <dgm:hierBranch val="init"/>
+        </dgm:presLayoutVars>
+      </dgm:prSet>
+      <dgm:spPr/>
+    </dgm:pt>
+    <dgm:pt modelId="{AA82314E-5F22-45DE-BE38-64D9F48D91DF}" type="pres">
+      <dgm:prSet presAssocID="{6A27566D-5E2B-4C81-8C09-639ED0AF984B}" presName="rootComposite" presStyleCnt="0"/>
+      <dgm:spPr/>
+    </dgm:pt>
+    <dgm:pt modelId="{7E303F30-9711-4703-9E93-53900C059588}" type="pres">
+      <dgm:prSet presAssocID="{6A27566D-5E2B-4C81-8C09-639ED0AF984B}" presName="rootText" presStyleLbl="node4" presStyleIdx="8" presStyleCnt="31">
+        <dgm:presLayoutVars>
+          <dgm:chPref val="3"/>
+        </dgm:presLayoutVars>
+      </dgm:prSet>
+      <dgm:spPr/>
+    </dgm:pt>
+    <dgm:pt modelId="{6B320540-8EFC-424C-87BB-7A322C848E8D}" type="pres">
+      <dgm:prSet presAssocID="{6A27566D-5E2B-4C81-8C09-639ED0AF984B}" presName="rootConnector" presStyleLbl="node4" presStyleIdx="8" presStyleCnt="31"/>
+      <dgm:spPr/>
+    </dgm:pt>
+    <dgm:pt modelId="{3A41FAFC-2989-4EED-BB19-C23AE601C621}" type="pres">
+      <dgm:prSet presAssocID="{6A27566D-5E2B-4C81-8C09-639ED0AF984B}" presName="hierChild4" presStyleCnt="0"/>
+      <dgm:spPr/>
+    </dgm:pt>
+    <dgm:pt modelId="{AE91CF76-6598-4254-A5BF-61941E0FBFD6}" type="pres">
+      <dgm:prSet presAssocID="{76476CBF-B102-41E4-9248-4221376F70AF}" presName="Name64" presStyleLbl="parChTrans1D4" presStyleIdx="9" presStyleCnt="31"/>
+      <dgm:spPr/>
+    </dgm:pt>
+    <dgm:pt modelId="{ECC1C45E-B00C-4A59-AEB9-1F953F5C00A3}" type="pres">
+      <dgm:prSet presAssocID="{A396E0BF-DF91-4BCD-8AC5-B6EA0224F397}" presName="hierRoot2" presStyleCnt="0">
+        <dgm:presLayoutVars>
+          <dgm:hierBranch val="init"/>
+        </dgm:presLayoutVars>
+      </dgm:prSet>
+      <dgm:spPr/>
+    </dgm:pt>
+    <dgm:pt modelId="{08A8723F-9790-4D05-9A7F-A695DD54ADA0}" type="pres">
+      <dgm:prSet presAssocID="{A396E0BF-DF91-4BCD-8AC5-B6EA0224F397}" presName="rootComposite" presStyleCnt="0"/>
+      <dgm:spPr/>
+    </dgm:pt>
+    <dgm:pt modelId="{2A231453-FF0D-443D-87E8-87257BA9B0EE}" type="pres">
+      <dgm:prSet presAssocID="{A396E0BF-DF91-4BCD-8AC5-B6EA0224F397}" presName="rootText" presStyleLbl="node4" presStyleIdx="9" presStyleCnt="31">
+        <dgm:presLayoutVars>
+          <dgm:chPref val="3"/>
+        </dgm:presLayoutVars>
+      </dgm:prSet>
+      <dgm:spPr/>
+    </dgm:pt>
+    <dgm:pt modelId="{0A0759F7-AEC9-45E6-B0C9-C7C1A3150A4F}" type="pres">
+      <dgm:prSet presAssocID="{A396E0BF-DF91-4BCD-8AC5-B6EA0224F397}" presName="rootConnector" presStyleLbl="node4" presStyleIdx="9" presStyleCnt="31"/>
+      <dgm:spPr/>
+    </dgm:pt>
+    <dgm:pt modelId="{F155B652-50D0-4E33-B58C-7DC296E2D5F0}" type="pres">
+      <dgm:prSet presAssocID="{A396E0BF-DF91-4BCD-8AC5-B6EA0224F397}" presName="hierChild4" presStyleCnt="0"/>
+      <dgm:spPr/>
+    </dgm:pt>
+    <dgm:pt modelId="{B3A37EE4-B0F0-4588-A807-3153A2E69F69}" type="pres">
+      <dgm:prSet presAssocID="{A396E0BF-DF91-4BCD-8AC5-B6EA0224F397}" presName="hierChild5" presStyleCnt="0"/>
+      <dgm:spPr/>
+    </dgm:pt>
+    <dgm:pt modelId="{485D3EB7-314F-4C91-B2D4-8AB5126CF5BB}" type="pres">
+      <dgm:prSet presAssocID="{6A27566D-5E2B-4C81-8C09-639ED0AF984B}" presName="hierChild5" presStyleCnt="0"/>
+      <dgm:spPr/>
+    </dgm:pt>
+    <dgm:pt modelId="{34B1EDD2-BFE8-4A14-8948-7EEB84EDF964}" type="pres">
+      <dgm:prSet presAssocID="{4A1ABC62-FD06-4AC0-BC51-20F24998E5FF}" presName="Name64" presStyleLbl="parChTrans1D4" presStyleIdx="10" presStyleCnt="31"/>
+      <dgm:spPr/>
+    </dgm:pt>
+    <dgm:pt modelId="{A6B1FB9B-052B-489F-9CB1-187B6E579E3C}" type="pres">
+      <dgm:prSet presAssocID="{7170B3D7-7385-4271-BFDD-77BDCB4B9D7D}" presName="hierRoot2" presStyleCnt="0">
+        <dgm:presLayoutVars>
+          <dgm:hierBranch val="init"/>
+        </dgm:presLayoutVars>
+      </dgm:prSet>
+      <dgm:spPr/>
+    </dgm:pt>
+    <dgm:pt modelId="{FF477795-AE90-4627-9E54-30BBA876CAB3}" type="pres">
+      <dgm:prSet presAssocID="{7170B3D7-7385-4271-BFDD-77BDCB4B9D7D}" presName="rootComposite" presStyleCnt="0"/>
+      <dgm:spPr/>
+    </dgm:pt>
+    <dgm:pt modelId="{3D02A4C7-D3F8-46A9-BF13-B91E1207C679}" type="pres">
+      <dgm:prSet presAssocID="{7170B3D7-7385-4271-BFDD-77BDCB4B9D7D}" presName="rootText" presStyleLbl="node4" presStyleIdx="10" presStyleCnt="31">
+        <dgm:presLayoutVars>
+          <dgm:chPref val="3"/>
+        </dgm:presLayoutVars>
+      </dgm:prSet>
+      <dgm:spPr/>
+    </dgm:pt>
+    <dgm:pt modelId="{75AB063C-95C2-4D08-BD75-E990F011A243}" type="pres">
+      <dgm:prSet presAssocID="{7170B3D7-7385-4271-BFDD-77BDCB4B9D7D}" presName="rootConnector" presStyleLbl="node4" presStyleIdx="10" presStyleCnt="31"/>
+      <dgm:spPr/>
+    </dgm:pt>
+    <dgm:pt modelId="{896FC98F-C18B-48B6-9368-6A4224F8D339}" type="pres">
+      <dgm:prSet presAssocID="{7170B3D7-7385-4271-BFDD-77BDCB4B9D7D}" presName="hierChild4" presStyleCnt="0"/>
+      <dgm:spPr/>
+    </dgm:pt>
+    <dgm:pt modelId="{50A4060C-F737-4459-BC6A-B233FEC9432A}" type="pres">
+      <dgm:prSet presAssocID="{B777D164-DD56-45DE-9496-BC18234B1690}" presName="Name64" presStyleLbl="parChTrans1D4" presStyleIdx="11" presStyleCnt="31"/>
+      <dgm:spPr/>
+    </dgm:pt>
+    <dgm:pt modelId="{D14D68CC-E066-4447-90AF-4E5C4D91C745}" type="pres">
+      <dgm:prSet presAssocID="{6D41F822-3F5E-498D-8427-D9976FC14949}" presName="hierRoot2" presStyleCnt="0">
+        <dgm:presLayoutVars>
+          <dgm:hierBranch val="init"/>
+        </dgm:presLayoutVars>
+      </dgm:prSet>
+      <dgm:spPr/>
+    </dgm:pt>
+    <dgm:pt modelId="{4CB1C44D-18C1-45B3-8B69-3E34236607C4}" type="pres">
+      <dgm:prSet presAssocID="{6D41F822-3F5E-498D-8427-D9976FC14949}" presName="rootComposite" presStyleCnt="0"/>
+      <dgm:spPr/>
+    </dgm:pt>
+    <dgm:pt modelId="{90D35EA2-A25D-449A-8C0B-91C81C67A50C}" type="pres">
+      <dgm:prSet presAssocID="{6D41F822-3F5E-498D-8427-D9976FC14949}" presName="rootText" presStyleLbl="node4" presStyleIdx="11" presStyleCnt="31">
+        <dgm:presLayoutVars>
+          <dgm:chPref val="3"/>
+        </dgm:presLayoutVars>
+      </dgm:prSet>
+      <dgm:spPr/>
+    </dgm:pt>
+    <dgm:pt modelId="{89FD8EE9-AA60-48A6-9D40-0DBE92C02DE0}" type="pres">
+      <dgm:prSet presAssocID="{6D41F822-3F5E-498D-8427-D9976FC14949}" presName="rootConnector" presStyleLbl="node4" presStyleIdx="11" presStyleCnt="31"/>
+      <dgm:spPr/>
+    </dgm:pt>
+    <dgm:pt modelId="{53B6FEF6-D5AE-485A-8D43-4347859156E9}" type="pres">
+      <dgm:prSet presAssocID="{6D41F822-3F5E-498D-8427-D9976FC14949}" presName="hierChild4" presStyleCnt="0"/>
+      <dgm:spPr/>
+    </dgm:pt>
+    <dgm:pt modelId="{6077FBBF-C54E-456A-B261-7861B4F23FB0}" type="pres">
+      <dgm:prSet presAssocID="{6D41F822-3F5E-498D-8427-D9976FC14949}" presName="hierChild5" presStyleCnt="0"/>
+      <dgm:spPr/>
+    </dgm:pt>
+    <dgm:pt modelId="{293C3232-9283-4A76-99D0-ACC9F33364EB}" type="pres">
+      <dgm:prSet presAssocID="{7170B3D7-7385-4271-BFDD-77BDCB4B9D7D}" presName="hierChild5" presStyleCnt="0"/>
+      <dgm:spPr/>
+    </dgm:pt>
+    <dgm:pt modelId="{26800CCF-2CF7-4C2B-BE5D-668243245262}" type="pres">
+      <dgm:prSet presAssocID="{4F864848-EEBF-4930-A161-A4A71CAED760}" presName="Name64" presStyleLbl="parChTrans1D4" presStyleIdx="12" presStyleCnt="31"/>
       <dgm:spPr/>
     </dgm:pt>
     <dgm:pt modelId="{2385C688-3F8F-43A2-A30A-2252C12C33E5}" type="pres">
@@ -2716,7 +3179,7 @@
       <dgm:spPr/>
     </dgm:pt>
     <dgm:pt modelId="{9E916334-F27B-4E86-B949-E7079E77F959}" type="pres">
-      <dgm:prSet presAssocID="{24C79789-50A6-4247-997A-B75D020D2C6D}" presName="rootText" presStyleLbl="node3" presStyleIdx="3" presStyleCnt="13">
+      <dgm:prSet presAssocID="{24C79789-50A6-4247-997A-B75D020D2C6D}" presName="rootText" presStyleLbl="node4" presStyleIdx="12" presStyleCnt="31">
         <dgm:presLayoutVars>
           <dgm:chPref val="3"/>
         </dgm:presLayoutVars>
@@ -2724,15 +3187,15 @@
       <dgm:spPr/>
     </dgm:pt>
     <dgm:pt modelId="{49F9D926-559F-4648-BFF5-79BEBC70A452}" type="pres">
-      <dgm:prSet presAssocID="{24C79789-50A6-4247-997A-B75D020D2C6D}" presName="rootConnector" presStyleLbl="node3" presStyleIdx="3" presStyleCnt="13"/>
+      <dgm:prSet presAssocID="{24C79789-50A6-4247-997A-B75D020D2C6D}" presName="rootConnector" presStyleLbl="node4" presStyleIdx="12" presStyleCnt="31"/>
       <dgm:spPr/>
     </dgm:pt>
     <dgm:pt modelId="{16DEFBD3-D008-4B05-B2DD-39FF5F864F76}" type="pres">
       <dgm:prSet presAssocID="{24C79789-50A6-4247-997A-B75D020D2C6D}" presName="hierChild4" presStyleCnt="0"/>
       <dgm:spPr/>
     </dgm:pt>
-    <dgm:pt modelId="{137A950C-A2C9-4E92-AA44-CCBE0A4712D0}" type="pres">
-      <dgm:prSet presAssocID="{928CD5CC-816D-4B40-9D14-7256E32D7DFD}" presName="Name64" presStyleLbl="parChTrans1D4" presStyleIdx="5" presStyleCnt="20"/>
+    <dgm:pt modelId="{171E7136-836A-486B-B91D-37B90AC43AE7}" type="pres">
+      <dgm:prSet presAssocID="{928CD5CC-816D-4B40-9D14-7256E32D7DFD}" presName="Name64" presStyleLbl="parChTrans1D4" presStyleIdx="13" presStyleCnt="31"/>
       <dgm:spPr/>
     </dgm:pt>
     <dgm:pt modelId="{642302D4-25F5-4191-A6BD-80A90EE256CB}" type="pres">
@@ -2748,7 +3211,7 @@
       <dgm:spPr/>
     </dgm:pt>
     <dgm:pt modelId="{0BA28261-1ED3-47EB-A7EA-310484F5DF09}" type="pres">
-      <dgm:prSet presAssocID="{218DF31D-CF8B-459F-887A-8E793F7A6593}" presName="rootText" presStyleLbl="node4" presStyleIdx="5" presStyleCnt="20">
+      <dgm:prSet presAssocID="{218DF31D-CF8B-459F-887A-8E793F7A6593}" presName="rootText" presStyleLbl="node4" presStyleIdx="13" presStyleCnt="31">
         <dgm:presLayoutVars>
           <dgm:chPref val="3"/>
         </dgm:presLayoutVars>
@@ -2756,15 +3219,15 @@
       <dgm:spPr/>
     </dgm:pt>
     <dgm:pt modelId="{1F3D57A6-91D2-48AA-B105-E07306DABA2F}" type="pres">
-      <dgm:prSet presAssocID="{218DF31D-CF8B-459F-887A-8E793F7A6593}" presName="rootConnector" presStyleLbl="node4" presStyleIdx="5" presStyleCnt="20"/>
+      <dgm:prSet presAssocID="{218DF31D-CF8B-459F-887A-8E793F7A6593}" presName="rootConnector" presStyleLbl="node4" presStyleIdx="13" presStyleCnt="31"/>
       <dgm:spPr/>
     </dgm:pt>
     <dgm:pt modelId="{E693CDA9-254D-4703-B79E-4F8CEA104BCE}" type="pres">
       <dgm:prSet presAssocID="{218DF31D-CF8B-459F-887A-8E793F7A6593}" presName="hierChild4" presStyleCnt="0"/>
       <dgm:spPr/>
     </dgm:pt>
-    <dgm:pt modelId="{DF5FB862-76EA-4FBD-97DB-876FA1B4C7A5}" type="pres">
-      <dgm:prSet presAssocID="{BCC45095-3A8B-4CB4-9AE4-6772688B37EF}" presName="Name64" presStyleLbl="parChTrans1D4" presStyleIdx="6" presStyleCnt="20"/>
+    <dgm:pt modelId="{D56AF9D6-52CD-49B7-B03A-910C74477DFD}" type="pres">
+      <dgm:prSet presAssocID="{BCC45095-3A8B-4CB4-9AE4-6772688B37EF}" presName="Name64" presStyleLbl="parChTrans1D4" presStyleIdx="14" presStyleCnt="31"/>
       <dgm:spPr/>
     </dgm:pt>
     <dgm:pt modelId="{929D98B8-E1AF-4AB0-A72E-45EB1F9E4936}" type="pres">
@@ -2780,7 +3243,7 @@
       <dgm:spPr/>
     </dgm:pt>
     <dgm:pt modelId="{B509227D-8391-4FEA-8798-380D7D9E41EE}" type="pres">
-      <dgm:prSet presAssocID="{7BFC5FFE-8955-4513-8485-C479782305F9}" presName="rootText" presStyleLbl="node4" presStyleIdx="6" presStyleCnt="20">
+      <dgm:prSet presAssocID="{7BFC5FFE-8955-4513-8485-C479782305F9}" presName="rootText" presStyleLbl="node4" presStyleIdx="14" presStyleCnt="31">
         <dgm:presLayoutVars>
           <dgm:chPref val="3"/>
         </dgm:presLayoutVars>
@@ -2788,7 +3251,7 @@
       <dgm:spPr/>
     </dgm:pt>
     <dgm:pt modelId="{13AAB80B-89C4-451F-A39D-CC96E0BE201C}" type="pres">
-      <dgm:prSet presAssocID="{7BFC5FFE-8955-4513-8485-C479782305F9}" presName="rootConnector" presStyleLbl="node4" presStyleIdx="6" presStyleCnt="20"/>
+      <dgm:prSet presAssocID="{7BFC5FFE-8955-4513-8485-C479782305F9}" presName="rootConnector" presStyleLbl="node4" presStyleIdx="14" presStyleCnt="31"/>
       <dgm:spPr/>
     </dgm:pt>
     <dgm:pt modelId="{037CCFC1-A766-48DA-8CDC-17C070D2D1E8}" type="pres">
@@ -2807,156 +3270,12 @@
       <dgm:prSet presAssocID="{24C79789-50A6-4247-997A-B75D020D2C6D}" presName="hierChild5" presStyleCnt="0"/>
       <dgm:spPr/>
     </dgm:pt>
-    <dgm:pt modelId="{259DBE4E-D122-4206-8EBC-C98CAAF97ECC}" type="pres">
-      <dgm:prSet presAssocID="{C7EBEF87-5076-4181-B19B-8AD6A127BA45}" presName="Name64" presStyleLbl="parChTrans1D3" presStyleIdx="4" presStyleCnt="13"/>
-      <dgm:spPr/>
-    </dgm:pt>
-    <dgm:pt modelId="{2768B59B-453A-42A2-85F9-75C2F9E31EB2}" type="pres">
-      <dgm:prSet presAssocID="{6A27566D-5E2B-4C81-8C09-639ED0AF984B}" presName="hierRoot2" presStyleCnt="0">
-        <dgm:presLayoutVars>
-          <dgm:hierBranch val="init"/>
-        </dgm:presLayoutVars>
-      </dgm:prSet>
-      <dgm:spPr/>
-    </dgm:pt>
-    <dgm:pt modelId="{AA82314E-5F22-45DE-BE38-64D9F48D91DF}" type="pres">
-      <dgm:prSet presAssocID="{6A27566D-5E2B-4C81-8C09-639ED0AF984B}" presName="rootComposite" presStyleCnt="0"/>
-      <dgm:spPr/>
-    </dgm:pt>
-    <dgm:pt modelId="{7E303F30-9711-4703-9E93-53900C059588}" type="pres">
-      <dgm:prSet presAssocID="{6A27566D-5E2B-4C81-8C09-639ED0AF984B}" presName="rootText" presStyleLbl="node3" presStyleIdx="4" presStyleCnt="13">
-        <dgm:presLayoutVars>
-          <dgm:chPref val="3"/>
-        </dgm:presLayoutVars>
-      </dgm:prSet>
-      <dgm:spPr/>
-    </dgm:pt>
-    <dgm:pt modelId="{6B320540-8EFC-424C-87BB-7A322C848E8D}" type="pres">
-      <dgm:prSet presAssocID="{6A27566D-5E2B-4C81-8C09-639ED0AF984B}" presName="rootConnector" presStyleLbl="node3" presStyleIdx="4" presStyleCnt="13"/>
-      <dgm:spPr/>
-    </dgm:pt>
-    <dgm:pt modelId="{3A41FAFC-2989-4EED-BB19-C23AE601C621}" type="pres">
-      <dgm:prSet presAssocID="{6A27566D-5E2B-4C81-8C09-639ED0AF984B}" presName="hierChild4" presStyleCnt="0"/>
-      <dgm:spPr/>
-    </dgm:pt>
-    <dgm:pt modelId="{95CF0774-536B-4F9D-A2E5-78BCC760D370}" type="pres">
-      <dgm:prSet presAssocID="{76476CBF-B102-41E4-9248-4221376F70AF}" presName="Name64" presStyleLbl="parChTrans1D4" presStyleIdx="7" presStyleCnt="20"/>
-      <dgm:spPr/>
-    </dgm:pt>
-    <dgm:pt modelId="{ECC1C45E-B00C-4A59-AEB9-1F953F5C00A3}" type="pres">
-      <dgm:prSet presAssocID="{A396E0BF-DF91-4BCD-8AC5-B6EA0224F397}" presName="hierRoot2" presStyleCnt="0">
-        <dgm:presLayoutVars>
-          <dgm:hierBranch val="init"/>
-        </dgm:presLayoutVars>
-      </dgm:prSet>
-      <dgm:spPr/>
-    </dgm:pt>
-    <dgm:pt modelId="{08A8723F-9790-4D05-9A7F-A695DD54ADA0}" type="pres">
-      <dgm:prSet presAssocID="{A396E0BF-DF91-4BCD-8AC5-B6EA0224F397}" presName="rootComposite" presStyleCnt="0"/>
-      <dgm:spPr/>
-    </dgm:pt>
-    <dgm:pt modelId="{2A231453-FF0D-443D-87E8-87257BA9B0EE}" type="pres">
-      <dgm:prSet presAssocID="{A396E0BF-DF91-4BCD-8AC5-B6EA0224F397}" presName="rootText" presStyleLbl="node4" presStyleIdx="7" presStyleCnt="20">
-        <dgm:presLayoutVars>
-          <dgm:chPref val="3"/>
-        </dgm:presLayoutVars>
-      </dgm:prSet>
-      <dgm:spPr/>
-    </dgm:pt>
-    <dgm:pt modelId="{0A0759F7-AEC9-45E6-B0C9-C7C1A3150A4F}" type="pres">
-      <dgm:prSet presAssocID="{A396E0BF-DF91-4BCD-8AC5-B6EA0224F397}" presName="rootConnector" presStyleLbl="node4" presStyleIdx="7" presStyleCnt="20"/>
-      <dgm:spPr/>
-    </dgm:pt>
-    <dgm:pt modelId="{F155B652-50D0-4E33-B58C-7DC296E2D5F0}" type="pres">
-      <dgm:prSet presAssocID="{A396E0BF-DF91-4BCD-8AC5-B6EA0224F397}" presName="hierChild4" presStyleCnt="0"/>
-      <dgm:spPr/>
-    </dgm:pt>
-    <dgm:pt modelId="{B3A37EE4-B0F0-4588-A807-3153A2E69F69}" type="pres">
-      <dgm:prSet presAssocID="{A396E0BF-DF91-4BCD-8AC5-B6EA0224F397}" presName="hierChild5" presStyleCnt="0"/>
-      <dgm:spPr/>
-    </dgm:pt>
-    <dgm:pt modelId="{485D3EB7-314F-4C91-B2D4-8AB5126CF5BB}" type="pres">
-      <dgm:prSet presAssocID="{6A27566D-5E2B-4C81-8C09-639ED0AF984B}" presName="hierChild5" presStyleCnt="0"/>
-      <dgm:spPr/>
-    </dgm:pt>
-    <dgm:pt modelId="{5D734C8D-E40C-4BF2-A310-8A858AE1F314}" type="pres">
-      <dgm:prSet presAssocID="{4A1ABC62-FD06-4AC0-BC51-20F24998E5FF}" presName="Name64" presStyleLbl="parChTrans1D3" presStyleIdx="5" presStyleCnt="13"/>
-      <dgm:spPr/>
-    </dgm:pt>
-    <dgm:pt modelId="{A6B1FB9B-052B-489F-9CB1-187B6E579E3C}" type="pres">
-      <dgm:prSet presAssocID="{7170B3D7-7385-4271-BFDD-77BDCB4B9D7D}" presName="hierRoot2" presStyleCnt="0">
-        <dgm:presLayoutVars>
-          <dgm:hierBranch val="init"/>
-        </dgm:presLayoutVars>
-      </dgm:prSet>
-      <dgm:spPr/>
-    </dgm:pt>
-    <dgm:pt modelId="{FF477795-AE90-4627-9E54-30BBA876CAB3}" type="pres">
-      <dgm:prSet presAssocID="{7170B3D7-7385-4271-BFDD-77BDCB4B9D7D}" presName="rootComposite" presStyleCnt="0"/>
-      <dgm:spPr/>
-    </dgm:pt>
-    <dgm:pt modelId="{3D02A4C7-D3F8-46A9-BF13-B91E1207C679}" type="pres">
-      <dgm:prSet presAssocID="{7170B3D7-7385-4271-BFDD-77BDCB4B9D7D}" presName="rootText" presStyleLbl="node3" presStyleIdx="5" presStyleCnt="13">
-        <dgm:presLayoutVars>
-          <dgm:chPref val="3"/>
-        </dgm:presLayoutVars>
-      </dgm:prSet>
-      <dgm:spPr/>
-    </dgm:pt>
-    <dgm:pt modelId="{75AB063C-95C2-4D08-BD75-E990F011A243}" type="pres">
-      <dgm:prSet presAssocID="{7170B3D7-7385-4271-BFDD-77BDCB4B9D7D}" presName="rootConnector" presStyleLbl="node3" presStyleIdx="5" presStyleCnt="13"/>
-      <dgm:spPr/>
-    </dgm:pt>
-    <dgm:pt modelId="{896FC98F-C18B-48B6-9368-6A4224F8D339}" type="pres">
-      <dgm:prSet presAssocID="{7170B3D7-7385-4271-BFDD-77BDCB4B9D7D}" presName="hierChild4" presStyleCnt="0"/>
-      <dgm:spPr/>
-    </dgm:pt>
-    <dgm:pt modelId="{DF3D6495-4140-4D40-8D35-ABD35584EF53}" type="pres">
-      <dgm:prSet presAssocID="{B777D164-DD56-45DE-9496-BC18234B1690}" presName="Name64" presStyleLbl="parChTrans1D4" presStyleIdx="8" presStyleCnt="20"/>
-      <dgm:spPr/>
-    </dgm:pt>
-    <dgm:pt modelId="{D14D68CC-E066-4447-90AF-4E5C4D91C745}" type="pres">
-      <dgm:prSet presAssocID="{6D41F822-3F5E-498D-8427-D9976FC14949}" presName="hierRoot2" presStyleCnt="0">
-        <dgm:presLayoutVars>
-          <dgm:hierBranch val="init"/>
-        </dgm:presLayoutVars>
-      </dgm:prSet>
-      <dgm:spPr/>
-    </dgm:pt>
-    <dgm:pt modelId="{4CB1C44D-18C1-45B3-8B69-3E34236607C4}" type="pres">
-      <dgm:prSet presAssocID="{6D41F822-3F5E-498D-8427-D9976FC14949}" presName="rootComposite" presStyleCnt="0"/>
-      <dgm:spPr/>
-    </dgm:pt>
-    <dgm:pt modelId="{90D35EA2-A25D-449A-8C0B-91C81C67A50C}" type="pres">
-      <dgm:prSet presAssocID="{6D41F822-3F5E-498D-8427-D9976FC14949}" presName="rootText" presStyleLbl="node4" presStyleIdx="8" presStyleCnt="20">
-        <dgm:presLayoutVars>
-          <dgm:chPref val="3"/>
-        </dgm:presLayoutVars>
-      </dgm:prSet>
-      <dgm:spPr/>
-    </dgm:pt>
-    <dgm:pt modelId="{89FD8EE9-AA60-48A6-9D40-0DBE92C02DE0}" type="pres">
-      <dgm:prSet presAssocID="{6D41F822-3F5E-498D-8427-D9976FC14949}" presName="rootConnector" presStyleLbl="node4" presStyleIdx="8" presStyleCnt="20"/>
-      <dgm:spPr/>
-    </dgm:pt>
-    <dgm:pt modelId="{53B6FEF6-D5AE-485A-8D43-4347859156E9}" type="pres">
-      <dgm:prSet presAssocID="{6D41F822-3F5E-498D-8427-D9976FC14949}" presName="hierChild4" presStyleCnt="0"/>
-      <dgm:spPr/>
-    </dgm:pt>
-    <dgm:pt modelId="{6077FBBF-C54E-456A-B261-7861B4F23FB0}" type="pres">
-      <dgm:prSet presAssocID="{6D41F822-3F5E-498D-8427-D9976FC14949}" presName="hierChild5" presStyleCnt="0"/>
-      <dgm:spPr/>
-    </dgm:pt>
-    <dgm:pt modelId="{293C3232-9283-4A76-99D0-ACC9F33364EB}" type="pres">
-      <dgm:prSet presAssocID="{7170B3D7-7385-4271-BFDD-77BDCB4B9D7D}" presName="hierChild5" presStyleCnt="0"/>
-      <dgm:spPr/>
-    </dgm:pt>
     <dgm:pt modelId="{0B06169F-9F61-42D6-8ABC-16C0E3ADE867}" type="pres">
       <dgm:prSet presAssocID="{9A4F48F6-BCF9-4165-AF3C-7C7BA667FA27}" presName="hierChild5" presStyleCnt="0"/>
       <dgm:spPr/>
     </dgm:pt>
-    <dgm:pt modelId="{87CE32BE-E790-4C1C-A724-8399427B532F}" type="pres">
-      <dgm:prSet presAssocID="{C4BC2D65-C06B-4D32-962C-942429050144}" presName="Name64" presStyleLbl="parChTrans1D2" presStyleIdx="1" presStyleCnt="5"/>
+    <dgm:pt modelId="{11F963ED-B3F0-41A3-B824-325961929004}" type="pres">
+      <dgm:prSet presAssocID="{C4BC2D65-C06B-4D32-962C-942429050144}" presName="Name64" presStyleLbl="parChTrans1D3" presStyleIdx="3" presStyleCnt="8"/>
       <dgm:spPr/>
     </dgm:pt>
     <dgm:pt modelId="{DF6F6EFF-03DB-45D7-9A74-CFE192F02E5B}" type="pres">
@@ -2972,7 +3291,7 @@
       <dgm:spPr/>
     </dgm:pt>
     <dgm:pt modelId="{8C63EC56-3637-4380-B189-D0B66ADCD3F7}" type="pres">
-      <dgm:prSet presAssocID="{23D84297-71D0-47C1-8874-FF344216EAC8}" presName="rootText" presStyleLbl="node2" presStyleIdx="1" presStyleCnt="5">
+      <dgm:prSet presAssocID="{23D84297-71D0-47C1-8874-FF344216EAC8}" presName="rootText" presStyleLbl="node3" presStyleIdx="3" presStyleCnt="8">
         <dgm:presLayoutVars>
           <dgm:chPref val="3"/>
         </dgm:presLayoutVars>
@@ -2980,7 +3299,7 @@
       <dgm:spPr/>
     </dgm:pt>
     <dgm:pt modelId="{AC252788-612D-4E9E-AE60-64A72A6D6716}" type="pres">
-      <dgm:prSet presAssocID="{23D84297-71D0-47C1-8874-FF344216EAC8}" presName="rootConnector" presStyleLbl="node2" presStyleIdx="1" presStyleCnt="5"/>
+      <dgm:prSet presAssocID="{23D84297-71D0-47C1-8874-FF344216EAC8}" presName="rootConnector" presStyleLbl="node3" presStyleIdx="3" presStyleCnt="8"/>
       <dgm:spPr/>
     </dgm:pt>
     <dgm:pt modelId="{7DC8C575-4697-4BB3-BD29-6296054E1F4E}" type="pres">
@@ -2991,8 +3310,12 @@
       <dgm:prSet presAssocID="{23D84297-71D0-47C1-8874-FF344216EAC8}" presName="hierChild5" presStyleCnt="0"/>
       <dgm:spPr/>
     </dgm:pt>
-    <dgm:pt modelId="{B62982CB-6890-46C2-886C-0FC435E2E88A}" type="pres">
-      <dgm:prSet presAssocID="{B6EFE756-66AC-4682-AE3E-4E5A980226A5}" presName="Name64" presStyleLbl="parChTrans1D2" presStyleIdx="2" presStyleCnt="5"/>
+    <dgm:pt modelId="{D580C470-8173-4D6F-8E9E-D5D672C1D4BB}" type="pres">
+      <dgm:prSet presAssocID="{3CBB9B95-F2DE-4200-8B3A-58D04CAEA47D}" presName="hierChild5" presStyleCnt="0"/>
+      <dgm:spPr/>
+    </dgm:pt>
+    <dgm:pt modelId="{3E53AB13-732C-4F83-9B8F-D6D7DB3860B6}" type="pres">
+      <dgm:prSet presAssocID="{B6EFE756-66AC-4682-AE3E-4E5A980226A5}" presName="Name64" presStyleLbl="parChTrans1D2" presStyleIdx="2" presStyleCnt="4"/>
       <dgm:spPr/>
     </dgm:pt>
     <dgm:pt modelId="{2B3438B6-C4AF-4776-9B02-580A7BE79A50}" type="pres">
@@ -3008,7 +3331,7 @@
       <dgm:spPr/>
     </dgm:pt>
     <dgm:pt modelId="{110F79BE-B8CE-48C2-943A-1C7F5605B400}" type="pres">
-      <dgm:prSet presAssocID="{9DFAA83C-0ED7-4C5D-908E-2A02657C3D57}" presName="rootText" presStyleLbl="node2" presStyleIdx="2" presStyleCnt="5">
+      <dgm:prSet presAssocID="{9DFAA83C-0ED7-4C5D-908E-2A02657C3D57}" presName="rootText" presStyleLbl="node2" presStyleIdx="2" presStyleCnt="4">
         <dgm:presLayoutVars>
           <dgm:chPref val="3"/>
         </dgm:presLayoutVars>
@@ -3016,15 +3339,15 @@
       <dgm:spPr/>
     </dgm:pt>
     <dgm:pt modelId="{B8476156-8F22-41DE-9C5C-CDA42789A7C4}" type="pres">
-      <dgm:prSet presAssocID="{9DFAA83C-0ED7-4C5D-908E-2A02657C3D57}" presName="rootConnector" presStyleLbl="node2" presStyleIdx="2" presStyleCnt="5"/>
+      <dgm:prSet presAssocID="{9DFAA83C-0ED7-4C5D-908E-2A02657C3D57}" presName="rootConnector" presStyleLbl="node2" presStyleIdx="2" presStyleCnt="4"/>
       <dgm:spPr/>
     </dgm:pt>
     <dgm:pt modelId="{E94EFD84-5C54-40D8-9A8F-C38CEAB04081}" type="pres">
       <dgm:prSet presAssocID="{9DFAA83C-0ED7-4C5D-908E-2A02657C3D57}" presName="hierChild4" presStyleCnt="0"/>
       <dgm:spPr/>
     </dgm:pt>
-    <dgm:pt modelId="{6B2D008C-CA97-4972-8B5B-45081F19E3EC}" type="pres">
-      <dgm:prSet presAssocID="{A901081C-4D82-49A2-9AF0-FDB6D79D7219}" presName="Name64" presStyleLbl="parChTrans1D3" presStyleIdx="6" presStyleCnt="13"/>
+    <dgm:pt modelId="{554A0E78-C210-4338-8B5C-48DD3D201C5A}" type="pres">
+      <dgm:prSet presAssocID="{A901081C-4D82-49A2-9AF0-FDB6D79D7219}" presName="Name64" presStyleLbl="parChTrans1D3" presStyleIdx="4" presStyleCnt="8"/>
       <dgm:spPr/>
     </dgm:pt>
     <dgm:pt modelId="{7D941C44-EDB9-43A1-8B0D-A42E00E86928}" type="pres">
@@ -3040,7 +3363,7 @@
       <dgm:spPr/>
     </dgm:pt>
     <dgm:pt modelId="{5ED98B15-1271-4C1B-BD70-D93D404A68CE}" type="pres">
-      <dgm:prSet presAssocID="{E0F095D0-0CDD-4899-95AE-C151B28DF4D1}" presName="rootText" presStyleLbl="node3" presStyleIdx="6" presStyleCnt="13">
+      <dgm:prSet presAssocID="{E0F095D0-0CDD-4899-95AE-C151B28DF4D1}" presName="rootText" presStyleLbl="node3" presStyleIdx="4" presStyleCnt="8">
         <dgm:presLayoutVars>
           <dgm:chPref val="3"/>
         </dgm:presLayoutVars>
@@ -3048,19 +3371,51 @@
       <dgm:spPr/>
     </dgm:pt>
     <dgm:pt modelId="{32F9F6CA-A9C9-4EC0-B487-8A6B1DDEE396}" type="pres">
-      <dgm:prSet presAssocID="{E0F095D0-0CDD-4899-95AE-C151B28DF4D1}" presName="rootConnector" presStyleLbl="node3" presStyleIdx="6" presStyleCnt="13"/>
+      <dgm:prSet presAssocID="{E0F095D0-0CDD-4899-95AE-C151B28DF4D1}" presName="rootConnector" presStyleLbl="node3" presStyleIdx="4" presStyleCnt="8"/>
       <dgm:spPr/>
     </dgm:pt>
     <dgm:pt modelId="{6072350C-6373-4705-A9DC-82BB2DD64A3A}" type="pres">
       <dgm:prSet presAssocID="{E0F095D0-0CDD-4899-95AE-C151B28DF4D1}" presName="hierChild4" presStyleCnt="0"/>
       <dgm:spPr/>
     </dgm:pt>
-    <dgm:pt modelId="{42B863AB-8FAF-4752-9099-E77932F0D395}" type="pres">
-      <dgm:prSet presAssocID="{E0F095D0-0CDD-4899-95AE-C151B28DF4D1}" presName="hierChild5" presStyleCnt="0"/>
-      <dgm:spPr/>
-    </dgm:pt>
-    <dgm:pt modelId="{A9FBC398-F630-4DAD-8DDB-C584F376881B}" type="pres">
-      <dgm:prSet presAssocID="{A5F5E471-F067-43AE-8556-402C42D66216}" presName="Name64" presStyleLbl="parChTrans1D3" presStyleIdx="7" presStyleCnt="13"/>
+    <dgm:pt modelId="{5D697390-7377-44AA-914E-7F34A506AC17}" type="pres">
+      <dgm:prSet presAssocID="{9510750D-81D3-4DD1-BEEF-9ABF3212385B}" presName="Name64" presStyleLbl="parChTrans1D4" presStyleIdx="15" presStyleCnt="31"/>
+      <dgm:spPr/>
+    </dgm:pt>
+    <dgm:pt modelId="{81A249B5-1F4D-4281-8CFD-E20AACD928D8}" type="pres">
+      <dgm:prSet presAssocID="{B9F7BE26-7120-4362-B07A-512CE293CF66}" presName="hierRoot2" presStyleCnt="0">
+        <dgm:presLayoutVars>
+          <dgm:hierBranch val="init"/>
+        </dgm:presLayoutVars>
+      </dgm:prSet>
+      <dgm:spPr/>
+    </dgm:pt>
+    <dgm:pt modelId="{02C783C3-9198-4864-8220-79C5B39D318A}" type="pres">
+      <dgm:prSet presAssocID="{B9F7BE26-7120-4362-B07A-512CE293CF66}" presName="rootComposite" presStyleCnt="0"/>
+      <dgm:spPr/>
+    </dgm:pt>
+    <dgm:pt modelId="{DDF5EC19-41AE-4BDE-81B3-DB61285BD74A}" type="pres">
+      <dgm:prSet presAssocID="{B9F7BE26-7120-4362-B07A-512CE293CF66}" presName="rootText" presStyleLbl="node4" presStyleIdx="15" presStyleCnt="31">
+        <dgm:presLayoutVars>
+          <dgm:chPref val="3"/>
+        </dgm:presLayoutVars>
+      </dgm:prSet>
+      <dgm:spPr/>
+    </dgm:pt>
+    <dgm:pt modelId="{6F9A1A66-336B-4BA9-A352-FD8CB9DA2042}" type="pres">
+      <dgm:prSet presAssocID="{B9F7BE26-7120-4362-B07A-512CE293CF66}" presName="rootConnector" presStyleLbl="node4" presStyleIdx="15" presStyleCnt="31"/>
+      <dgm:spPr/>
+    </dgm:pt>
+    <dgm:pt modelId="{D39E991D-3564-4C29-BDB1-716D94172FD1}" type="pres">
+      <dgm:prSet presAssocID="{B9F7BE26-7120-4362-B07A-512CE293CF66}" presName="hierChild4" presStyleCnt="0"/>
+      <dgm:spPr/>
+    </dgm:pt>
+    <dgm:pt modelId="{826711E4-43F7-4415-BEE7-D30FE48D53F0}" type="pres">
+      <dgm:prSet presAssocID="{B9F7BE26-7120-4362-B07A-512CE293CF66}" presName="hierChild5" presStyleCnt="0"/>
+      <dgm:spPr/>
+    </dgm:pt>
+    <dgm:pt modelId="{7C3BC206-817E-47FC-AA4A-7E68D35E9CC7}" type="pres">
+      <dgm:prSet presAssocID="{A5F5E471-F067-43AE-8556-402C42D66216}" presName="Name64" presStyleLbl="parChTrans1D4" presStyleIdx="16" presStyleCnt="31"/>
       <dgm:spPr/>
     </dgm:pt>
     <dgm:pt modelId="{CE404325-D390-4D1D-A6D6-0523ECB0D0C3}" type="pres">
@@ -3076,7 +3431,7 @@
       <dgm:spPr/>
     </dgm:pt>
     <dgm:pt modelId="{E3458C5F-4332-4439-96AF-FD966B7B137A}" type="pres">
-      <dgm:prSet presAssocID="{D7660C3C-E08D-431C-8EE1-9AA78C89B4A5}" presName="rootText" presStyleLbl="node3" presStyleIdx="7" presStyleCnt="13">
+      <dgm:prSet presAssocID="{D7660C3C-E08D-431C-8EE1-9AA78C89B4A5}" presName="rootText" presStyleLbl="node4" presStyleIdx="16" presStyleCnt="31">
         <dgm:presLayoutVars>
           <dgm:chPref val="3"/>
         </dgm:presLayoutVars>
@@ -3084,15 +3439,15 @@
       <dgm:spPr/>
     </dgm:pt>
     <dgm:pt modelId="{E64611E0-F76B-4B48-BD4A-3D9E4DE85202}" type="pres">
-      <dgm:prSet presAssocID="{D7660C3C-E08D-431C-8EE1-9AA78C89B4A5}" presName="rootConnector" presStyleLbl="node3" presStyleIdx="7" presStyleCnt="13"/>
+      <dgm:prSet presAssocID="{D7660C3C-E08D-431C-8EE1-9AA78C89B4A5}" presName="rootConnector" presStyleLbl="node4" presStyleIdx="16" presStyleCnt="31"/>
       <dgm:spPr/>
     </dgm:pt>
     <dgm:pt modelId="{178FB168-8EC0-4C39-B0F2-CBAC9954840C}" type="pres">
       <dgm:prSet presAssocID="{D7660C3C-E08D-431C-8EE1-9AA78C89B4A5}" presName="hierChild4" presStyleCnt="0"/>
       <dgm:spPr/>
     </dgm:pt>
-    <dgm:pt modelId="{DB5E1FBB-4766-4187-B99E-821C906B52A9}" type="pres">
-      <dgm:prSet presAssocID="{BCF3A011-CCE5-4332-B9BE-4DBB4EB90D3E}" presName="Name64" presStyleLbl="parChTrans1D4" presStyleIdx="9" presStyleCnt="20"/>
+    <dgm:pt modelId="{93F93993-47F1-428E-9F9E-450A331F894E}" type="pres">
+      <dgm:prSet presAssocID="{BCF3A011-CCE5-4332-B9BE-4DBB4EB90D3E}" presName="Name64" presStyleLbl="parChTrans1D4" presStyleIdx="17" presStyleCnt="31"/>
       <dgm:spPr/>
     </dgm:pt>
     <dgm:pt modelId="{10C12785-5206-46A6-BA56-0F5E579E9E0C}" type="pres">
@@ -3108,7 +3463,7 @@
       <dgm:spPr/>
     </dgm:pt>
     <dgm:pt modelId="{07CF39E6-9B2B-4A5F-B780-120DD8E62C9B}" type="pres">
-      <dgm:prSet presAssocID="{061809CC-87E0-4E97-84A6-384BF07724D8}" presName="rootText" presStyleLbl="node4" presStyleIdx="9" presStyleCnt="20">
+      <dgm:prSet presAssocID="{061809CC-87E0-4E97-84A6-384BF07724D8}" presName="rootText" presStyleLbl="node4" presStyleIdx="17" presStyleCnt="31">
         <dgm:presLayoutVars>
           <dgm:chPref val="3"/>
         </dgm:presLayoutVars>
@@ -3116,15 +3471,15 @@
       <dgm:spPr/>
     </dgm:pt>
     <dgm:pt modelId="{B2D69DCB-202B-46EC-819A-C954631D964B}" type="pres">
-      <dgm:prSet presAssocID="{061809CC-87E0-4E97-84A6-384BF07724D8}" presName="rootConnector" presStyleLbl="node4" presStyleIdx="9" presStyleCnt="20"/>
+      <dgm:prSet presAssocID="{061809CC-87E0-4E97-84A6-384BF07724D8}" presName="rootConnector" presStyleLbl="node4" presStyleIdx="17" presStyleCnt="31"/>
       <dgm:spPr/>
     </dgm:pt>
     <dgm:pt modelId="{39477503-7022-4EFE-910A-4D9CD5006307}" type="pres">
       <dgm:prSet presAssocID="{061809CC-87E0-4E97-84A6-384BF07724D8}" presName="hierChild4" presStyleCnt="0"/>
       <dgm:spPr/>
     </dgm:pt>
-    <dgm:pt modelId="{F4508D2D-CCAA-4B6E-AD9A-E2A8D4EBB379}" type="pres">
-      <dgm:prSet presAssocID="{2637AE1D-117E-454F-9D3F-416D113148BB}" presName="Name64" presStyleLbl="parChTrans1D4" presStyleIdx="10" presStyleCnt="20"/>
+    <dgm:pt modelId="{00A95A3F-3AAD-468F-908F-845C4ED90DA2}" type="pres">
+      <dgm:prSet presAssocID="{2637AE1D-117E-454F-9D3F-416D113148BB}" presName="Name64" presStyleLbl="parChTrans1D4" presStyleIdx="18" presStyleCnt="31"/>
       <dgm:spPr/>
     </dgm:pt>
     <dgm:pt modelId="{A679DF6E-2E87-49EF-9331-294A3BA4327D}" type="pres">
@@ -3140,7 +3495,7 @@
       <dgm:spPr/>
     </dgm:pt>
     <dgm:pt modelId="{B652EFB0-A88E-48A1-836A-A245919707FD}" type="pres">
-      <dgm:prSet presAssocID="{F7D84224-A973-485F-ADAD-95BF5231A40B}" presName="rootText" presStyleLbl="node4" presStyleIdx="10" presStyleCnt="20">
+      <dgm:prSet presAssocID="{F7D84224-A973-485F-ADAD-95BF5231A40B}" presName="rootText" presStyleLbl="node4" presStyleIdx="18" presStyleCnt="31">
         <dgm:presLayoutVars>
           <dgm:chPref val="3"/>
         </dgm:presLayoutVars>
@@ -3148,7 +3503,7 @@
       <dgm:spPr/>
     </dgm:pt>
     <dgm:pt modelId="{DC81B629-CD82-4B25-9F47-C4E4D420D1AE}" type="pres">
-      <dgm:prSet presAssocID="{F7D84224-A973-485F-ADAD-95BF5231A40B}" presName="rootConnector" presStyleLbl="node4" presStyleIdx="10" presStyleCnt="20"/>
+      <dgm:prSet presAssocID="{F7D84224-A973-485F-ADAD-95BF5231A40B}" presName="rootConnector" presStyleLbl="node4" presStyleIdx="18" presStyleCnt="31"/>
       <dgm:spPr/>
     </dgm:pt>
     <dgm:pt modelId="{6D88FD24-272B-4F88-85DA-3D20C3E257B3}" type="pres">
@@ -3163,8 +3518,8 @@
       <dgm:prSet presAssocID="{061809CC-87E0-4E97-84A6-384BF07724D8}" presName="hierChild5" presStyleCnt="0"/>
       <dgm:spPr/>
     </dgm:pt>
-    <dgm:pt modelId="{A70F5440-1532-4A1D-A6B4-AF69FBE58D12}" type="pres">
-      <dgm:prSet presAssocID="{45EF24BF-2957-4968-9E77-C679A38F2BE0}" presName="Name64" presStyleLbl="parChTrans1D4" presStyleIdx="11" presStyleCnt="20"/>
+    <dgm:pt modelId="{CA185CE9-65D3-4677-966D-33B7645E2257}" type="pres">
+      <dgm:prSet presAssocID="{45EF24BF-2957-4968-9E77-C679A38F2BE0}" presName="Name64" presStyleLbl="parChTrans1D4" presStyleIdx="19" presStyleCnt="31"/>
       <dgm:spPr/>
     </dgm:pt>
     <dgm:pt modelId="{EC40E019-0120-4F45-94FE-CCD6C60DCCFC}" type="pres">
@@ -3180,7 +3535,7 @@
       <dgm:spPr/>
     </dgm:pt>
     <dgm:pt modelId="{1D1D8692-63AE-448E-8E39-430F6A4B46BF}" type="pres">
-      <dgm:prSet presAssocID="{CD4954CC-F1E7-474A-9C14-897F60DC4DA4}" presName="rootText" presStyleLbl="node4" presStyleIdx="11" presStyleCnt="20">
+      <dgm:prSet presAssocID="{CD4954CC-F1E7-474A-9C14-897F60DC4DA4}" presName="rootText" presStyleLbl="node4" presStyleIdx="19" presStyleCnt="31">
         <dgm:presLayoutVars>
           <dgm:chPref val="3"/>
         </dgm:presLayoutVars>
@@ -3188,15 +3543,15 @@
       <dgm:spPr/>
     </dgm:pt>
     <dgm:pt modelId="{18E21695-07C6-4F19-99E8-D16CE3157C9B}" type="pres">
-      <dgm:prSet presAssocID="{CD4954CC-F1E7-474A-9C14-897F60DC4DA4}" presName="rootConnector" presStyleLbl="node4" presStyleIdx="11" presStyleCnt="20"/>
+      <dgm:prSet presAssocID="{CD4954CC-F1E7-474A-9C14-897F60DC4DA4}" presName="rootConnector" presStyleLbl="node4" presStyleIdx="19" presStyleCnt="31"/>
       <dgm:spPr/>
     </dgm:pt>
     <dgm:pt modelId="{3BDF94F5-1D25-402E-8247-6F898723BBB9}" type="pres">
       <dgm:prSet presAssocID="{CD4954CC-F1E7-474A-9C14-897F60DC4DA4}" presName="hierChild4" presStyleCnt="0"/>
       <dgm:spPr/>
     </dgm:pt>
-    <dgm:pt modelId="{CA242517-F53F-48F5-B2BD-3695E5DF74DD}" type="pres">
-      <dgm:prSet presAssocID="{04012DFC-77A8-4A46-B858-7332CB8C84A1}" presName="Name64" presStyleLbl="parChTrans1D4" presStyleIdx="12" presStyleCnt="20"/>
+    <dgm:pt modelId="{6EBCB12D-6D77-4447-9F58-D885806C37C1}" type="pres">
+      <dgm:prSet presAssocID="{04012DFC-77A8-4A46-B858-7332CB8C84A1}" presName="Name64" presStyleLbl="parChTrans1D4" presStyleIdx="20" presStyleCnt="31"/>
       <dgm:spPr/>
     </dgm:pt>
     <dgm:pt modelId="{C4BC5194-FE1C-4020-9B78-BED164EFDC75}" type="pres">
@@ -3212,7 +3567,7 @@
       <dgm:spPr/>
     </dgm:pt>
     <dgm:pt modelId="{CF184D97-6870-475F-82DD-C951C974B444}" type="pres">
-      <dgm:prSet presAssocID="{6D92348B-BF22-4F09-BD16-E4E9FEADFB32}" presName="rootText" presStyleLbl="node4" presStyleIdx="12" presStyleCnt="20">
+      <dgm:prSet presAssocID="{6D92348B-BF22-4F09-BD16-E4E9FEADFB32}" presName="rootText" presStyleLbl="node4" presStyleIdx="20" presStyleCnt="31">
         <dgm:presLayoutVars>
           <dgm:chPref val="3"/>
         </dgm:presLayoutVars>
@@ -3220,7 +3575,7 @@
       <dgm:spPr/>
     </dgm:pt>
     <dgm:pt modelId="{368DE4E4-C42A-435E-AD32-88164C04A62F}" type="pres">
-      <dgm:prSet presAssocID="{6D92348B-BF22-4F09-BD16-E4E9FEADFB32}" presName="rootConnector" presStyleLbl="node4" presStyleIdx="12" presStyleCnt="20"/>
+      <dgm:prSet presAssocID="{6D92348B-BF22-4F09-BD16-E4E9FEADFB32}" presName="rootConnector" presStyleLbl="node4" presStyleIdx="20" presStyleCnt="31"/>
       <dgm:spPr/>
     </dgm:pt>
     <dgm:pt modelId="{2F5EE40E-768E-468A-97CB-B7D089D3E5A6}" type="pres">
@@ -3239,8 +3594,8 @@
       <dgm:prSet presAssocID="{D7660C3C-E08D-431C-8EE1-9AA78C89B4A5}" presName="hierChild5" presStyleCnt="0"/>
       <dgm:spPr/>
     </dgm:pt>
-    <dgm:pt modelId="{0F92594C-0E70-43C7-B781-9ACAC2BFB8E4}" type="pres">
-      <dgm:prSet presAssocID="{7F41646D-7809-44F5-B24B-6E191227AD5F}" presName="Name64" presStyleLbl="parChTrans1D3" presStyleIdx="8" presStyleCnt="13"/>
+    <dgm:pt modelId="{418A319B-5CB8-4C1A-929A-A579AE777841}" type="pres">
+      <dgm:prSet presAssocID="{7F41646D-7809-44F5-B24B-6E191227AD5F}" presName="Name64" presStyleLbl="parChTrans1D4" presStyleIdx="21" presStyleCnt="31"/>
       <dgm:spPr/>
     </dgm:pt>
     <dgm:pt modelId="{F49CA836-44E5-4C40-8AC4-2AE0EF430965}" type="pres">
@@ -3256,7 +3611,7 @@
       <dgm:spPr/>
     </dgm:pt>
     <dgm:pt modelId="{FD314EC3-FAF3-42D4-B72F-81E23652E3D9}" type="pres">
-      <dgm:prSet presAssocID="{C499CC0F-4E7A-4FEC-97EE-0BDE6BB4004A}" presName="rootText" presStyleLbl="node3" presStyleIdx="8" presStyleCnt="13">
+      <dgm:prSet presAssocID="{C499CC0F-4E7A-4FEC-97EE-0BDE6BB4004A}" presName="rootText" presStyleLbl="node4" presStyleIdx="21" presStyleCnt="31">
         <dgm:presLayoutVars>
           <dgm:chPref val="3"/>
         </dgm:presLayoutVars>
@@ -3264,15 +3619,15 @@
       <dgm:spPr/>
     </dgm:pt>
     <dgm:pt modelId="{3FD13D51-28CB-4ACA-8CF5-784F6B0C3075}" type="pres">
-      <dgm:prSet presAssocID="{C499CC0F-4E7A-4FEC-97EE-0BDE6BB4004A}" presName="rootConnector" presStyleLbl="node3" presStyleIdx="8" presStyleCnt="13"/>
+      <dgm:prSet presAssocID="{C499CC0F-4E7A-4FEC-97EE-0BDE6BB4004A}" presName="rootConnector" presStyleLbl="node4" presStyleIdx="21" presStyleCnt="31"/>
       <dgm:spPr/>
     </dgm:pt>
     <dgm:pt modelId="{16EE9FFA-E407-4775-9823-E76B3F7213DD}" type="pres">
       <dgm:prSet presAssocID="{C499CC0F-4E7A-4FEC-97EE-0BDE6BB4004A}" presName="hierChild4" presStyleCnt="0"/>
       <dgm:spPr/>
     </dgm:pt>
-    <dgm:pt modelId="{7E682426-9DD9-499F-8054-AD080EABE950}" type="pres">
-      <dgm:prSet presAssocID="{37ECD93D-C6A9-4F2D-B4DF-3F071835E72F}" presName="Name64" presStyleLbl="parChTrans1D4" presStyleIdx="13" presStyleCnt="20"/>
+    <dgm:pt modelId="{9296E3D5-989F-4B79-93AD-BF39EEE4C999}" type="pres">
+      <dgm:prSet presAssocID="{37ECD93D-C6A9-4F2D-B4DF-3F071835E72F}" presName="Name64" presStyleLbl="parChTrans1D4" presStyleIdx="22" presStyleCnt="31"/>
       <dgm:spPr/>
     </dgm:pt>
     <dgm:pt modelId="{9AE62F2E-6CB3-4473-B405-A3BA1D9BFA8A}" type="pres">
@@ -3288,7 +3643,7 @@
       <dgm:spPr/>
     </dgm:pt>
     <dgm:pt modelId="{2CFF43AD-E638-48CC-A1A6-213BB3000388}" type="pres">
-      <dgm:prSet presAssocID="{38A0B2E5-D90D-4428-806C-7CCE3CC93BD2}" presName="rootText" presStyleLbl="node4" presStyleIdx="13" presStyleCnt="20">
+      <dgm:prSet presAssocID="{38A0B2E5-D90D-4428-806C-7CCE3CC93BD2}" presName="rootText" presStyleLbl="node4" presStyleIdx="22" presStyleCnt="31">
         <dgm:presLayoutVars>
           <dgm:chPref val="3"/>
         </dgm:presLayoutVars>
@@ -3296,7 +3651,7 @@
       <dgm:spPr/>
     </dgm:pt>
     <dgm:pt modelId="{47B80075-7A99-4CC4-8E04-7AE4D94B5491}" type="pres">
-      <dgm:prSet presAssocID="{38A0B2E5-D90D-4428-806C-7CCE3CC93BD2}" presName="rootConnector" presStyleLbl="node4" presStyleIdx="13" presStyleCnt="20"/>
+      <dgm:prSet presAssocID="{38A0B2E5-D90D-4428-806C-7CCE3CC93BD2}" presName="rootConnector" presStyleLbl="node4" presStyleIdx="22" presStyleCnt="31"/>
       <dgm:spPr/>
     </dgm:pt>
     <dgm:pt modelId="{2B1F2EC5-D922-47CB-9075-5C58620A91A3}" type="pres">
@@ -3311,8 +3666,8 @@
       <dgm:prSet presAssocID="{C499CC0F-4E7A-4FEC-97EE-0BDE6BB4004A}" presName="hierChild5" presStyleCnt="0"/>
       <dgm:spPr/>
     </dgm:pt>
-    <dgm:pt modelId="{51F75AAC-642B-48ED-B19B-2EA01A0D0209}" type="pres">
-      <dgm:prSet presAssocID="{A3638297-C98E-49B2-935E-46CEF1892D42}" presName="Name64" presStyleLbl="parChTrans1D3" presStyleIdx="9" presStyleCnt="13"/>
+    <dgm:pt modelId="{325B629F-ABB1-4EC6-9F54-565334BD27E2}" type="pres">
+      <dgm:prSet presAssocID="{A3638297-C98E-49B2-935E-46CEF1892D42}" presName="Name64" presStyleLbl="parChTrans1D4" presStyleIdx="23" presStyleCnt="31"/>
       <dgm:spPr/>
     </dgm:pt>
     <dgm:pt modelId="{BA8D7E82-10E0-4B5D-A7A8-5B403C181AAD}" type="pres">
@@ -3328,7 +3683,7 @@
       <dgm:spPr/>
     </dgm:pt>
     <dgm:pt modelId="{B7E87C89-F2A3-40BE-A158-9348331D318D}" type="pres">
-      <dgm:prSet presAssocID="{503A382B-1D5A-4546-833B-2164E945BC79}" presName="rootText" presStyleLbl="node3" presStyleIdx="9" presStyleCnt="13">
+      <dgm:prSet presAssocID="{503A382B-1D5A-4546-833B-2164E945BC79}" presName="rootText" presStyleLbl="node4" presStyleIdx="23" presStyleCnt="31">
         <dgm:presLayoutVars>
           <dgm:chPref val="3"/>
         </dgm:presLayoutVars>
@@ -3336,15 +3691,15 @@
       <dgm:spPr/>
     </dgm:pt>
     <dgm:pt modelId="{F4F402F9-353D-4DAF-A0B3-B8E72F14207C}" type="pres">
-      <dgm:prSet presAssocID="{503A382B-1D5A-4546-833B-2164E945BC79}" presName="rootConnector" presStyleLbl="node3" presStyleIdx="9" presStyleCnt="13"/>
+      <dgm:prSet presAssocID="{503A382B-1D5A-4546-833B-2164E945BC79}" presName="rootConnector" presStyleLbl="node4" presStyleIdx="23" presStyleCnt="31"/>
       <dgm:spPr/>
     </dgm:pt>
     <dgm:pt modelId="{75DC4A39-6C23-4835-9E4D-4BC7EA472591}" type="pres">
       <dgm:prSet presAssocID="{503A382B-1D5A-4546-833B-2164E945BC79}" presName="hierChild4" presStyleCnt="0"/>
       <dgm:spPr/>
     </dgm:pt>
-    <dgm:pt modelId="{893463AD-E827-4ADB-B408-E38128099076}" type="pres">
-      <dgm:prSet presAssocID="{95FA36E0-4680-4632-B27E-091BE020210A}" presName="Name64" presStyleLbl="parChTrans1D4" presStyleIdx="14" presStyleCnt="20"/>
+    <dgm:pt modelId="{C1341CAE-26B4-413C-B659-B4133610AE2C}" type="pres">
+      <dgm:prSet presAssocID="{95FA36E0-4680-4632-B27E-091BE020210A}" presName="Name64" presStyleLbl="parChTrans1D4" presStyleIdx="24" presStyleCnt="31"/>
       <dgm:spPr/>
     </dgm:pt>
     <dgm:pt modelId="{34334FEB-0A74-4945-9E06-62902E13F72D}" type="pres">
@@ -3360,7 +3715,7 @@
       <dgm:spPr/>
     </dgm:pt>
     <dgm:pt modelId="{FD27C63C-53AB-4EF5-B065-A5CCC6683CBC}" type="pres">
-      <dgm:prSet presAssocID="{1BCF77AA-6B04-4D81-9D59-6F959F70F803}" presName="rootText" presStyleLbl="node4" presStyleIdx="14" presStyleCnt="20">
+      <dgm:prSet presAssocID="{1BCF77AA-6B04-4D81-9D59-6F959F70F803}" presName="rootText" presStyleLbl="node4" presStyleIdx="24" presStyleCnt="31">
         <dgm:presLayoutVars>
           <dgm:chPref val="3"/>
         </dgm:presLayoutVars>
@@ -3368,7 +3723,7 @@
       <dgm:spPr/>
     </dgm:pt>
     <dgm:pt modelId="{B81833A2-355D-431A-B42B-FFB97F5DED7E}" type="pres">
-      <dgm:prSet presAssocID="{1BCF77AA-6B04-4D81-9D59-6F959F70F803}" presName="rootConnector" presStyleLbl="node4" presStyleIdx="14" presStyleCnt="20"/>
+      <dgm:prSet presAssocID="{1BCF77AA-6B04-4D81-9D59-6F959F70F803}" presName="rootConnector" presStyleLbl="node4" presStyleIdx="24" presStyleCnt="31"/>
       <dgm:spPr/>
     </dgm:pt>
     <dgm:pt modelId="{B75101D1-41FE-4F79-AE84-A03090A9821A}" type="pres">
@@ -3383,8 +3738,8 @@
       <dgm:prSet presAssocID="{503A382B-1D5A-4546-833B-2164E945BC79}" presName="hierChild5" presStyleCnt="0"/>
       <dgm:spPr/>
     </dgm:pt>
-    <dgm:pt modelId="{8B19CEE5-FC4A-40A5-A7B6-1FB7479BBBE5}" type="pres">
-      <dgm:prSet presAssocID="{C270D4B2-63B3-44BE-90B2-A3B79110A5BC}" presName="Name64" presStyleLbl="parChTrans1D3" presStyleIdx="10" presStyleCnt="13"/>
+    <dgm:pt modelId="{43CC1C42-04AA-435A-979C-E62AFAAF4D5E}" type="pres">
+      <dgm:prSet presAssocID="{C270D4B2-63B3-44BE-90B2-A3B79110A5BC}" presName="Name64" presStyleLbl="parChTrans1D4" presStyleIdx="25" presStyleCnt="31"/>
       <dgm:spPr/>
     </dgm:pt>
     <dgm:pt modelId="{44A8D897-8291-4E69-A253-691929D80E5E}" type="pres">
@@ -3400,7 +3755,7 @@
       <dgm:spPr/>
     </dgm:pt>
     <dgm:pt modelId="{77267FA6-0CDF-4F47-97BA-153747EF1791}" type="pres">
-      <dgm:prSet presAssocID="{06F09080-0CCF-47DD-9F14-9B09338FC156}" presName="rootText" presStyleLbl="node3" presStyleIdx="10" presStyleCnt="13">
+      <dgm:prSet presAssocID="{06F09080-0CCF-47DD-9F14-9B09338FC156}" presName="rootText" presStyleLbl="node4" presStyleIdx="25" presStyleCnt="31">
         <dgm:presLayoutVars>
           <dgm:chPref val="3"/>
         </dgm:presLayoutVars>
@@ -3408,7 +3763,7 @@
       <dgm:spPr/>
     </dgm:pt>
     <dgm:pt modelId="{213124F1-A749-4DBC-85FE-5AC202AF5919}" type="pres">
-      <dgm:prSet presAssocID="{06F09080-0CCF-47DD-9F14-9B09338FC156}" presName="rootConnector" presStyleLbl="node3" presStyleIdx="10" presStyleCnt="13"/>
+      <dgm:prSet presAssocID="{06F09080-0CCF-47DD-9F14-9B09338FC156}" presName="rootConnector" presStyleLbl="node4" presStyleIdx="25" presStyleCnt="31"/>
       <dgm:spPr/>
     </dgm:pt>
     <dgm:pt modelId="{6F0A908E-CE1D-48B7-9FC6-B9C6A134D0D8}" type="pres">
@@ -3419,12 +3774,52 @@
       <dgm:prSet presAssocID="{06F09080-0CCF-47DD-9F14-9B09338FC156}" presName="hierChild5" presStyleCnt="0"/>
       <dgm:spPr/>
     </dgm:pt>
+    <dgm:pt modelId="{42B863AB-8FAF-4752-9099-E77932F0D395}" type="pres">
+      <dgm:prSet presAssocID="{E0F095D0-0CDD-4899-95AE-C151B28DF4D1}" presName="hierChild5" presStyleCnt="0"/>
+      <dgm:spPr/>
+    </dgm:pt>
+    <dgm:pt modelId="{5E890DBA-4975-4C75-941F-F0AF649459D5}" type="pres">
+      <dgm:prSet presAssocID="{9388F973-CD46-4AFC-9454-5895E33035BE}" presName="Name64" presStyleLbl="parChTrans1D3" presStyleIdx="5" presStyleCnt="8"/>
+      <dgm:spPr/>
+    </dgm:pt>
+    <dgm:pt modelId="{1457AC4E-F267-437E-877A-1B46D5336CAC}" type="pres">
+      <dgm:prSet presAssocID="{A63AFC23-093E-44C6-B267-3891CF123A84}" presName="hierRoot2" presStyleCnt="0">
+        <dgm:presLayoutVars>
+          <dgm:hierBranch val="init"/>
+        </dgm:presLayoutVars>
+      </dgm:prSet>
+      <dgm:spPr/>
+    </dgm:pt>
+    <dgm:pt modelId="{D5D8FEA8-2FA9-46E7-936A-DE00846C26BC}" type="pres">
+      <dgm:prSet presAssocID="{A63AFC23-093E-44C6-B267-3891CF123A84}" presName="rootComposite" presStyleCnt="0"/>
+      <dgm:spPr/>
+    </dgm:pt>
+    <dgm:pt modelId="{3BF77DC6-A893-4A65-9C1E-D38F5E103AA5}" type="pres">
+      <dgm:prSet presAssocID="{A63AFC23-093E-44C6-B267-3891CF123A84}" presName="rootText" presStyleLbl="node3" presStyleIdx="5" presStyleCnt="8">
+        <dgm:presLayoutVars>
+          <dgm:chPref val="3"/>
+        </dgm:presLayoutVars>
+      </dgm:prSet>
+      <dgm:spPr/>
+    </dgm:pt>
+    <dgm:pt modelId="{4E262D70-023C-4E9D-82BC-E1D1DAA6E0E0}" type="pres">
+      <dgm:prSet presAssocID="{A63AFC23-093E-44C6-B267-3891CF123A84}" presName="rootConnector" presStyleLbl="node3" presStyleIdx="5" presStyleCnt="8"/>
+      <dgm:spPr/>
+    </dgm:pt>
+    <dgm:pt modelId="{9F61D904-DB97-4461-AA89-0EBCDF58B28C}" type="pres">
+      <dgm:prSet presAssocID="{A63AFC23-093E-44C6-B267-3891CF123A84}" presName="hierChild4" presStyleCnt="0"/>
+      <dgm:spPr/>
+    </dgm:pt>
+    <dgm:pt modelId="{E28180BC-C29F-4744-B670-C17F06C7EB26}" type="pres">
+      <dgm:prSet presAssocID="{A63AFC23-093E-44C6-B267-3891CF123A84}" presName="hierChild5" presStyleCnt="0"/>
+      <dgm:spPr/>
+    </dgm:pt>
     <dgm:pt modelId="{0388B9DF-2E42-4F52-A48F-58CC2C71E622}" type="pres">
       <dgm:prSet presAssocID="{9DFAA83C-0ED7-4C5D-908E-2A02657C3D57}" presName="hierChild5" presStyleCnt="0"/>
       <dgm:spPr/>
     </dgm:pt>
-    <dgm:pt modelId="{68ED52F3-D00D-4FBA-A7F0-19107FBE0261}" type="pres">
-      <dgm:prSet presAssocID="{880276D0-EB74-4489-85C7-23E81AC85430}" presName="Name64" presStyleLbl="parChTrans1D2" presStyleIdx="3" presStyleCnt="5"/>
+    <dgm:pt modelId="{C7F7A17E-AF77-42CB-93B1-39B0770E3C79}" type="pres">
+      <dgm:prSet presAssocID="{880276D0-EB74-4489-85C7-23E81AC85430}" presName="Name64" presStyleLbl="parChTrans1D2" presStyleIdx="3" presStyleCnt="4"/>
       <dgm:spPr/>
     </dgm:pt>
     <dgm:pt modelId="{64BE223F-5889-4D6D-A0F4-BB63E949CCCB}" type="pres">
@@ -3440,7 +3835,7 @@
       <dgm:spPr/>
     </dgm:pt>
     <dgm:pt modelId="{F727FD69-DA36-400A-9A17-E435D30B6294}" type="pres">
-      <dgm:prSet presAssocID="{CA6200AF-7336-4AB8-A4E9-530BC5027306}" presName="rootText" presStyleLbl="node2" presStyleIdx="3" presStyleCnt="5">
+      <dgm:prSet presAssocID="{CA6200AF-7336-4AB8-A4E9-530BC5027306}" presName="rootText" presStyleLbl="node2" presStyleIdx="3" presStyleCnt="4">
         <dgm:presLayoutVars>
           <dgm:chPref val="3"/>
         </dgm:presLayoutVars>
@@ -3448,51 +3843,15 @@
       <dgm:spPr/>
     </dgm:pt>
     <dgm:pt modelId="{2CB5E2D1-00D5-4B61-9756-D570A792B6B1}" type="pres">
-      <dgm:prSet presAssocID="{CA6200AF-7336-4AB8-A4E9-530BC5027306}" presName="rootConnector" presStyleLbl="node2" presStyleIdx="3" presStyleCnt="5"/>
+      <dgm:prSet presAssocID="{CA6200AF-7336-4AB8-A4E9-530BC5027306}" presName="rootConnector" presStyleLbl="node2" presStyleIdx="3" presStyleCnt="4"/>
       <dgm:spPr/>
     </dgm:pt>
     <dgm:pt modelId="{8C32301D-5FB8-498A-9CA5-A658480BBA39}" type="pres">
       <dgm:prSet presAssocID="{CA6200AF-7336-4AB8-A4E9-530BC5027306}" presName="hierChild4" presStyleCnt="0"/>
       <dgm:spPr/>
     </dgm:pt>
-    <dgm:pt modelId="{A267EB81-E463-4D76-BE76-C7894AF884CA}" type="pres">
-      <dgm:prSet presAssocID="{CA6200AF-7336-4AB8-A4E9-530BC5027306}" presName="hierChild5" presStyleCnt="0"/>
-      <dgm:spPr/>
-    </dgm:pt>
-    <dgm:pt modelId="{C051B183-B590-41B4-8423-18A273DCC6CE}" type="pres">
-      <dgm:prSet presAssocID="{76CB5FF8-DAAE-4108-8F27-58BE17CA5BF3}" presName="Name64" presStyleLbl="parChTrans1D2" presStyleIdx="4" presStyleCnt="5"/>
-      <dgm:spPr/>
-    </dgm:pt>
-    <dgm:pt modelId="{EF252ADE-8F24-4923-893F-2FEA501546F0}" type="pres">
-      <dgm:prSet presAssocID="{3B3021F4-1B88-4824-8D12-7496727C461B}" presName="hierRoot2" presStyleCnt="0">
-        <dgm:presLayoutVars>
-          <dgm:hierBranch val="init"/>
-        </dgm:presLayoutVars>
-      </dgm:prSet>
-      <dgm:spPr/>
-    </dgm:pt>
-    <dgm:pt modelId="{05D653B7-2F99-4133-A805-BCCCAE3E9BE3}" type="pres">
-      <dgm:prSet presAssocID="{3B3021F4-1B88-4824-8D12-7496727C461B}" presName="rootComposite" presStyleCnt="0"/>
-      <dgm:spPr/>
-    </dgm:pt>
-    <dgm:pt modelId="{B027295A-93BB-4C19-A90B-553BB78E8D73}" type="pres">
-      <dgm:prSet presAssocID="{3B3021F4-1B88-4824-8D12-7496727C461B}" presName="rootText" presStyleLbl="node2" presStyleIdx="4" presStyleCnt="5">
-        <dgm:presLayoutVars>
-          <dgm:chPref val="3"/>
-        </dgm:presLayoutVars>
-      </dgm:prSet>
-      <dgm:spPr/>
-    </dgm:pt>
-    <dgm:pt modelId="{15203896-4C7D-488D-B574-8B2BB4AE209F}" type="pres">
-      <dgm:prSet presAssocID="{3B3021F4-1B88-4824-8D12-7496727C461B}" presName="rootConnector" presStyleLbl="node2" presStyleIdx="4" presStyleCnt="5"/>
-      <dgm:spPr/>
-    </dgm:pt>
-    <dgm:pt modelId="{FC909073-6875-437B-8301-7329DF9D877D}" type="pres">
-      <dgm:prSet presAssocID="{3B3021F4-1B88-4824-8D12-7496727C461B}" presName="hierChild4" presStyleCnt="0"/>
-      <dgm:spPr/>
-    </dgm:pt>
-    <dgm:pt modelId="{10EB81BB-2FAE-4863-8B61-F4C17BFFA6D6}" type="pres">
-      <dgm:prSet presAssocID="{ACF9E546-FC16-43CF-809C-930B68C88DB1}" presName="Name64" presStyleLbl="parChTrans1D3" presStyleIdx="11" presStyleCnt="13"/>
+    <dgm:pt modelId="{1BDA3CD5-F552-4A8E-AA99-3DA9469CB538}" type="pres">
+      <dgm:prSet presAssocID="{ACF9E546-FC16-43CF-809C-930B68C88DB1}" presName="Name64" presStyleLbl="parChTrans1D3" presStyleIdx="6" presStyleCnt="8"/>
       <dgm:spPr/>
     </dgm:pt>
     <dgm:pt modelId="{C46F1EF1-B875-4283-8030-8CE5A965CE21}" type="pres">
@@ -3508,7 +3867,7 @@
       <dgm:spPr/>
     </dgm:pt>
     <dgm:pt modelId="{490BDFA8-D452-4BE4-9F81-245774E0D158}" type="pres">
-      <dgm:prSet presAssocID="{C9E721F3-3509-40BA-945D-417CE334E5F2}" presName="rootText" presStyleLbl="node3" presStyleIdx="11" presStyleCnt="13">
+      <dgm:prSet presAssocID="{C9E721F3-3509-40BA-945D-417CE334E5F2}" presName="rootText" presStyleLbl="node3" presStyleIdx="6" presStyleCnt="8">
         <dgm:presLayoutVars>
           <dgm:chPref val="3"/>
         </dgm:presLayoutVars>
@@ -3516,15 +3875,15 @@
       <dgm:spPr/>
     </dgm:pt>
     <dgm:pt modelId="{D1162B1B-B769-48DB-B85B-AF3C1F73D58F}" type="pres">
-      <dgm:prSet presAssocID="{C9E721F3-3509-40BA-945D-417CE334E5F2}" presName="rootConnector" presStyleLbl="node3" presStyleIdx="11" presStyleCnt="13"/>
+      <dgm:prSet presAssocID="{C9E721F3-3509-40BA-945D-417CE334E5F2}" presName="rootConnector" presStyleLbl="node3" presStyleIdx="6" presStyleCnt="8"/>
       <dgm:spPr/>
     </dgm:pt>
     <dgm:pt modelId="{DF467D77-B7F9-4F62-89A6-51F4A7058AA6}" type="pres">
       <dgm:prSet presAssocID="{C9E721F3-3509-40BA-945D-417CE334E5F2}" presName="hierChild4" presStyleCnt="0"/>
       <dgm:spPr/>
     </dgm:pt>
-    <dgm:pt modelId="{E53C180E-99C8-4878-A5D0-A54393670C21}" type="pres">
-      <dgm:prSet presAssocID="{5CD82464-BD85-410D-9486-CDF630216295}" presName="Name64" presStyleLbl="parChTrans1D4" presStyleIdx="15" presStyleCnt="20"/>
+    <dgm:pt modelId="{AF9CAAFC-37A2-4187-8C63-BDC2E7B8A2E9}" type="pres">
+      <dgm:prSet presAssocID="{5CD82464-BD85-410D-9486-CDF630216295}" presName="Name64" presStyleLbl="parChTrans1D4" presStyleIdx="26" presStyleCnt="31"/>
       <dgm:spPr/>
     </dgm:pt>
     <dgm:pt modelId="{2042EA74-39A6-4A01-BBF1-F23AE808212A}" type="pres">
@@ -3540,7 +3899,7 @@
       <dgm:spPr/>
     </dgm:pt>
     <dgm:pt modelId="{BEB5F23A-260D-4EA4-9C52-D29289AE19DF}" type="pres">
-      <dgm:prSet presAssocID="{97A8E0E5-1256-46F5-BDCA-CBF242F3C57E}" presName="rootText" presStyleLbl="node4" presStyleIdx="15" presStyleCnt="20">
+      <dgm:prSet presAssocID="{97A8E0E5-1256-46F5-BDCA-CBF242F3C57E}" presName="rootText" presStyleLbl="node4" presStyleIdx="26" presStyleCnt="31">
         <dgm:presLayoutVars>
           <dgm:chPref val="3"/>
         </dgm:presLayoutVars>
@@ -3548,7 +3907,7 @@
       <dgm:spPr/>
     </dgm:pt>
     <dgm:pt modelId="{B70E4C0E-1521-4091-B753-26370D64F4FD}" type="pres">
-      <dgm:prSet presAssocID="{97A8E0E5-1256-46F5-BDCA-CBF242F3C57E}" presName="rootConnector" presStyleLbl="node4" presStyleIdx="15" presStyleCnt="20"/>
+      <dgm:prSet presAssocID="{97A8E0E5-1256-46F5-BDCA-CBF242F3C57E}" presName="rootConnector" presStyleLbl="node4" presStyleIdx="26" presStyleCnt="31"/>
       <dgm:spPr/>
     </dgm:pt>
     <dgm:pt modelId="{59A16828-9F48-4DC0-B6AB-56DC66C5C14A}" type="pres">
@@ -3559,8 +3918,8 @@
       <dgm:prSet presAssocID="{97A8E0E5-1256-46F5-BDCA-CBF242F3C57E}" presName="hierChild5" presStyleCnt="0"/>
       <dgm:spPr/>
     </dgm:pt>
-    <dgm:pt modelId="{26D6FA4F-D6A5-4878-8B80-5B29006D93F2}" type="pres">
-      <dgm:prSet presAssocID="{2053DD24-1A05-4174-B3A2-006AF3B872F4}" presName="Name64" presStyleLbl="parChTrans1D4" presStyleIdx="16" presStyleCnt="20"/>
+    <dgm:pt modelId="{B074A3F9-9B82-47D6-B99B-37FA4AD461B1}" type="pres">
+      <dgm:prSet presAssocID="{2053DD24-1A05-4174-B3A2-006AF3B872F4}" presName="Name64" presStyleLbl="parChTrans1D4" presStyleIdx="27" presStyleCnt="31"/>
       <dgm:spPr/>
     </dgm:pt>
     <dgm:pt modelId="{E5641DC2-99FE-4CFE-BBC9-8BC561313068}" type="pres">
@@ -3576,7 +3935,7 @@
       <dgm:spPr/>
     </dgm:pt>
     <dgm:pt modelId="{15470CCD-2DC4-4446-952E-0EA1F9168293}" type="pres">
-      <dgm:prSet presAssocID="{35D396C7-832D-4310-9EFD-0CBA7534B49E}" presName="rootText" presStyleLbl="node4" presStyleIdx="16" presStyleCnt="20">
+      <dgm:prSet presAssocID="{35D396C7-832D-4310-9EFD-0CBA7534B49E}" presName="rootText" presStyleLbl="node4" presStyleIdx="27" presStyleCnt="31">
         <dgm:presLayoutVars>
           <dgm:chPref val="3"/>
         </dgm:presLayoutVars>
@@ -3584,15 +3943,15 @@
       <dgm:spPr/>
     </dgm:pt>
     <dgm:pt modelId="{C1FA8641-48D3-43B7-8727-7E323B1B501C}" type="pres">
-      <dgm:prSet presAssocID="{35D396C7-832D-4310-9EFD-0CBA7534B49E}" presName="rootConnector" presStyleLbl="node4" presStyleIdx="16" presStyleCnt="20"/>
+      <dgm:prSet presAssocID="{35D396C7-832D-4310-9EFD-0CBA7534B49E}" presName="rootConnector" presStyleLbl="node4" presStyleIdx="27" presStyleCnt="31"/>
       <dgm:spPr/>
     </dgm:pt>
     <dgm:pt modelId="{C6CE1518-27B6-404B-99E1-54C509EB30D2}" type="pres">
       <dgm:prSet presAssocID="{35D396C7-832D-4310-9EFD-0CBA7534B49E}" presName="hierChild4" presStyleCnt="0"/>
       <dgm:spPr/>
     </dgm:pt>
-    <dgm:pt modelId="{C2E4F5E3-2A0B-42BD-8BFA-8E7CDCB5A754}" type="pres">
-      <dgm:prSet presAssocID="{455048BF-88A9-42EC-8893-BB00D9AEA4E4}" presName="Name64" presStyleLbl="parChTrans1D4" presStyleIdx="17" presStyleCnt="20"/>
+    <dgm:pt modelId="{B4F70755-F4D1-485F-892E-3C7B87066BCB}" type="pres">
+      <dgm:prSet presAssocID="{455048BF-88A9-42EC-8893-BB00D9AEA4E4}" presName="Name64" presStyleLbl="parChTrans1D4" presStyleIdx="28" presStyleCnt="31"/>
       <dgm:spPr/>
     </dgm:pt>
     <dgm:pt modelId="{ABFA4637-8EA1-4BB9-A524-2A1FE95E5257}" type="pres">
@@ -3608,7 +3967,7 @@
       <dgm:spPr/>
     </dgm:pt>
     <dgm:pt modelId="{9921040E-A9AE-4E20-B3A7-1033725EAB32}" type="pres">
-      <dgm:prSet presAssocID="{BD4CBB34-BFC3-4314-AC58-360CE3F828A3}" presName="rootText" presStyleLbl="node4" presStyleIdx="17" presStyleCnt="20">
+      <dgm:prSet presAssocID="{BD4CBB34-BFC3-4314-AC58-360CE3F828A3}" presName="rootText" presStyleLbl="node4" presStyleIdx="28" presStyleCnt="31">
         <dgm:presLayoutVars>
           <dgm:chPref val="3"/>
         </dgm:presLayoutVars>
@@ -3616,7 +3975,7 @@
       <dgm:spPr/>
     </dgm:pt>
     <dgm:pt modelId="{3374B034-7516-421E-BD23-9C0F9E320F00}" type="pres">
-      <dgm:prSet presAssocID="{BD4CBB34-BFC3-4314-AC58-360CE3F828A3}" presName="rootConnector" presStyleLbl="node4" presStyleIdx="17" presStyleCnt="20"/>
+      <dgm:prSet presAssocID="{BD4CBB34-BFC3-4314-AC58-360CE3F828A3}" presName="rootConnector" presStyleLbl="node4" presStyleIdx="28" presStyleCnt="31"/>
       <dgm:spPr/>
     </dgm:pt>
     <dgm:pt modelId="{33F80BDE-DC97-4638-BCF9-8B0A5C5B0084}" type="pres">
@@ -3627,8 +3986,8 @@
       <dgm:prSet presAssocID="{BD4CBB34-BFC3-4314-AC58-360CE3F828A3}" presName="hierChild5" presStyleCnt="0"/>
       <dgm:spPr/>
     </dgm:pt>
-    <dgm:pt modelId="{C23208CB-8112-4EC1-8E1A-4AE7807BED36}" type="pres">
-      <dgm:prSet presAssocID="{7D9BDDE8-7610-4C76-ACCC-5EF685046CB6}" presName="Name64" presStyleLbl="parChTrans1D4" presStyleIdx="18" presStyleCnt="20"/>
+    <dgm:pt modelId="{8DDA93F8-5C72-4B48-9D1D-CEE49333C83C}" type="pres">
+      <dgm:prSet presAssocID="{7D9BDDE8-7610-4C76-ACCC-5EF685046CB6}" presName="Name64" presStyleLbl="parChTrans1D4" presStyleIdx="29" presStyleCnt="31"/>
       <dgm:spPr/>
     </dgm:pt>
     <dgm:pt modelId="{2644546B-EA91-4559-89A5-D9CC3F2967A0}" type="pres">
@@ -3644,7 +4003,7 @@
       <dgm:spPr/>
     </dgm:pt>
     <dgm:pt modelId="{4C50E7F0-CBE9-462F-A0E5-5FFE1AE84F4E}" type="pres">
-      <dgm:prSet presAssocID="{D81506E7-9321-4CD6-B783-B535E14E9673}" presName="rootText" presStyleLbl="node4" presStyleIdx="18" presStyleCnt="20">
+      <dgm:prSet presAssocID="{D81506E7-9321-4CD6-B783-B535E14E9673}" presName="rootText" presStyleLbl="node4" presStyleIdx="29" presStyleCnt="31">
         <dgm:presLayoutVars>
           <dgm:chPref val="3"/>
         </dgm:presLayoutVars>
@@ -3652,7 +4011,7 @@
       <dgm:spPr/>
     </dgm:pt>
     <dgm:pt modelId="{86FF5A9C-E5F2-4B8C-83BD-290D4D4AB6AC}" type="pres">
-      <dgm:prSet presAssocID="{D81506E7-9321-4CD6-B783-B535E14E9673}" presName="rootConnector" presStyleLbl="node4" presStyleIdx="18" presStyleCnt="20"/>
+      <dgm:prSet presAssocID="{D81506E7-9321-4CD6-B783-B535E14E9673}" presName="rootConnector" presStyleLbl="node4" presStyleIdx="29" presStyleCnt="31"/>
       <dgm:spPr/>
     </dgm:pt>
     <dgm:pt modelId="{4816209B-7B93-4538-AC6F-995B7E78A1F7}" type="pres">
@@ -3667,8 +4026,8 @@
       <dgm:prSet presAssocID="{35D396C7-832D-4310-9EFD-0CBA7534B49E}" presName="hierChild5" presStyleCnt="0"/>
       <dgm:spPr/>
     </dgm:pt>
-    <dgm:pt modelId="{D13F91A7-7FA0-4602-8F83-D5787EBFEB98}" type="pres">
-      <dgm:prSet presAssocID="{320AF489-F490-4FB9-A435-9E69697CB6A1}" presName="Name64" presStyleLbl="parChTrans1D4" presStyleIdx="19" presStyleCnt="20"/>
+    <dgm:pt modelId="{4B5CDAF5-A7FE-436E-9DA3-25A539D89D1F}" type="pres">
+      <dgm:prSet presAssocID="{320AF489-F490-4FB9-A435-9E69697CB6A1}" presName="Name64" presStyleLbl="parChTrans1D4" presStyleIdx="30" presStyleCnt="31"/>
       <dgm:spPr/>
     </dgm:pt>
     <dgm:pt modelId="{B5E7DA6C-2B95-499E-967F-1829236E4839}" type="pres">
@@ -3684,7 +4043,7 @@
       <dgm:spPr/>
     </dgm:pt>
     <dgm:pt modelId="{E142E4F7-A4D2-449F-AA7F-C04C088A3C1F}" type="pres">
-      <dgm:prSet presAssocID="{73528B28-3862-4C56-BB94-20BFCA4D977C}" presName="rootText" presStyleLbl="node4" presStyleIdx="19" presStyleCnt="20">
+      <dgm:prSet presAssocID="{73528B28-3862-4C56-BB94-20BFCA4D977C}" presName="rootText" presStyleLbl="node4" presStyleIdx="30" presStyleCnt="31">
         <dgm:presLayoutVars>
           <dgm:chPref val="3"/>
         </dgm:presLayoutVars>
@@ -3692,7 +4051,7 @@
       <dgm:spPr/>
     </dgm:pt>
     <dgm:pt modelId="{74B77C7E-36E3-406E-BAC0-4831F4BABB3C}" type="pres">
-      <dgm:prSet presAssocID="{73528B28-3862-4C56-BB94-20BFCA4D977C}" presName="rootConnector" presStyleLbl="node4" presStyleIdx="19" presStyleCnt="20"/>
+      <dgm:prSet presAssocID="{73528B28-3862-4C56-BB94-20BFCA4D977C}" presName="rootConnector" presStyleLbl="node4" presStyleIdx="30" presStyleCnt="31"/>
       <dgm:spPr/>
     </dgm:pt>
     <dgm:pt modelId="{13C0BE53-A6FB-4FC3-BE13-CB6347CDFEC7}" type="pres">
@@ -3707,8 +4066,8 @@
       <dgm:prSet presAssocID="{C9E721F3-3509-40BA-945D-417CE334E5F2}" presName="hierChild5" presStyleCnt="0"/>
       <dgm:spPr/>
     </dgm:pt>
-    <dgm:pt modelId="{2CDAEA21-DCC4-4575-A028-8E48B86095C3}" type="pres">
-      <dgm:prSet presAssocID="{7607DCFD-2AEA-4454-AD75-99E4327A6DA2}" presName="Name64" presStyleLbl="parChTrans1D3" presStyleIdx="12" presStyleCnt="13"/>
+    <dgm:pt modelId="{E72137B5-59A0-4482-82E0-2CA84074B9ED}" type="pres">
+      <dgm:prSet presAssocID="{7607DCFD-2AEA-4454-AD75-99E4327A6DA2}" presName="Name64" presStyleLbl="parChTrans1D3" presStyleIdx="7" presStyleCnt="8"/>
       <dgm:spPr/>
     </dgm:pt>
     <dgm:pt modelId="{B39B5A8D-FDDB-4B5F-9592-FCF82ABC3E36}" type="pres">
@@ -3724,7 +4083,7 @@
       <dgm:spPr/>
     </dgm:pt>
     <dgm:pt modelId="{E4AFD26B-C7BB-41CA-A59C-D4C3576380A8}" type="pres">
-      <dgm:prSet presAssocID="{6C8E784B-F666-494C-B943-E6FE294FAEB1}" presName="rootText" presStyleLbl="node3" presStyleIdx="12" presStyleCnt="13">
+      <dgm:prSet presAssocID="{6C8E784B-F666-494C-B943-E6FE294FAEB1}" presName="rootText" presStyleLbl="node3" presStyleIdx="7" presStyleCnt="8">
         <dgm:presLayoutVars>
           <dgm:chPref val="3"/>
         </dgm:presLayoutVars>
@@ -3732,7 +4091,7 @@
       <dgm:spPr/>
     </dgm:pt>
     <dgm:pt modelId="{8700B5FB-1AEC-447F-A85A-B23DFECB41F1}" type="pres">
-      <dgm:prSet presAssocID="{6C8E784B-F666-494C-B943-E6FE294FAEB1}" presName="rootConnector" presStyleLbl="node3" presStyleIdx="12" presStyleCnt="13"/>
+      <dgm:prSet presAssocID="{6C8E784B-F666-494C-B943-E6FE294FAEB1}" presName="rootConnector" presStyleLbl="node3" presStyleIdx="7" presStyleCnt="8"/>
       <dgm:spPr/>
     </dgm:pt>
     <dgm:pt modelId="{035F8A94-9F71-4AA7-84F8-CC97894A38B2}" type="pres">
@@ -3743,444 +4102,499 @@
       <dgm:prSet presAssocID="{6C8E784B-F666-494C-B943-E6FE294FAEB1}" presName="hierChild5" presStyleCnt="0"/>
       <dgm:spPr/>
     </dgm:pt>
-    <dgm:pt modelId="{ECAD961D-EB82-4766-8C96-2C7D3A9B8785}" type="pres">
-      <dgm:prSet presAssocID="{3B3021F4-1B88-4824-8D12-7496727C461B}" presName="hierChild5" presStyleCnt="0"/>
-      <dgm:spPr/>
-    </dgm:pt>
-    <dgm:pt modelId="{7E677738-27E4-4BF5-B256-03F9FCCC2BC4}" type="pres">
-      <dgm:prSet presAssocID="{3CBB9B95-F2DE-4200-8B3A-58D04CAEA47D}" presName="hierChild3" presStyleCnt="0"/>
+    <dgm:pt modelId="{A267EB81-E463-4D76-BE76-C7894AF884CA}" type="pres">
+      <dgm:prSet presAssocID="{CA6200AF-7336-4AB8-A4E9-530BC5027306}" presName="hierChild5" presStyleCnt="0"/>
+      <dgm:spPr/>
+    </dgm:pt>
+    <dgm:pt modelId="{AF38169B-BDF1-4FB4-B1A3-205F3C8764D4}" type="pres">
+      <dgm:prSet presAssocID="{5AFEC8AD-8C3F-4724-85E3-77D8EA592781}" presName="hierChild3" presStyleCnt="0"/>
       <dgm:spPr/>
     </dgm:pt>
   </dgm:ptLst>
   <dgm:cxnLst>
-    <dgm:cxn modelId="{5618CA00-B14E-4406-B1B4-30009B439F6B}" type="presOf" srcId="{C270D4B2-63B3-44BE-90B2-A3B79110A5BC}" destId="{8B19CEE5-FC4A-40A5-A7B6-1FB7479BBBE5}" srcOrd="0" destOrd="0" presId="urn:microsoft.com/office/officeart/2009/3/layout/HorizontalOrganizationChart"/>
-    <dgm:cxn modelId="{8B080201-5CE4-4793-AC92-C3699C285B98}" type="presOf" srcId="{CD4954CC-F1E7-474A-9C14-897F60DC4DA4}" destId="{1D1D8692-63AE-448E-8E39-430F6A4B46BF}" srcOrd="0" destOrd="0" presId="urn:microsoft.com/office/officeart/2009/3/layout/HorizontalOrganizationChart"/>
-    <dgm:cxn modelId="{2B913802-E75C-45D7-9AC8-86164275F078}" type="presOf" srcId="{E0F095D0-0CDD-4899-95AE-C151B28DF4D1}" destId="{32F9F6CA-A9C9-4EC0-B487-8A6B1DDEE396}" srcOrd="1" destOrd="0" presId="urn:microsoft.com/office/officeart/2009/3/layout/HorizontalOrganizationChart"/>
-    <dgm:cxn modelId="{51ED0206-6E54-4CB6-A8FD-A58EF834EEA2}" type="presOf" srcId="{C9E721F3-3509-40BA-945D-417CE334E5F2}" destId="{D1162B1B-B769-48DB-B85B-AF3C1F73D58F}" srcOrd="1" destOrd="0" presId="urn:microsoft.com/office/officeart/2009/3/layout/HorizontalOrganizationChart"/>
-    <dgm:cxn modelId="{49923B06-DAFB-4E62-8763-DC76818758F7}" type="presOf" srcId="{6A27566D-5E2B-4C81-8C09-639ED0AF984B}" destId="{6B320540-8EFC-424C-87BB-7A322C848E8D}" srcOrd="1" destOrd="0" presId="urn:microsoft.com/office/officeart/2009/3/layout/HorizontalOrganizationChart"/>
-    <dgm:cxn modelId="{DE7D0709-9782-4852-8393-D34D9EF82832}" type="presOf" srcId="{24C79789-50A6-4247-997A-B75D020D2C6D}" destId="{9E916334-F27B-4E86-B949-E7079E77F959}" srcOrd="0" destOrd="0" presId="urn:microsoft.com/office/officeart/2009/3/layout/HorizontalOrganizationChart"/>
-    <dgm:cxn modelId="{3A315C0A-B5DE-4E07-8FB5-1CD50648992C}" srcId="{9A4F48F6-BCF9-4165-AF3C-7C7BA667FA27}" destId="{24C79789-50A6-4247-997A-B75D020D2C6D}" srcOrd="3" destOrd="0" parTransId="{4F864848-EEBF-4930-A161-A4A71CAED760}" sibTransId="{710B0101-9A84-4BC6-8C5A-657A5D29E445}"/>
-    <dgm:cxn modelId="{AA64500A-1A1F-41CE-B314-726F5560CC1E}" type="presOf" srcId="{37ECD93D-C6A9-4F2D-B4DF-3F071835E72F}" destId="{7E682426-9DD9-499F-8054-AD080EABE950}" srcOrd="0" destOrd="0" presId="urn:microsoft.com/office/officeart/2009/3/layout/HorizontalOrganizationChart"/>
-    <dgm:cxn modelId="{A4E4440B-8856-45E0-845E-7334A98BFC2B}" type="presOf" srcId="{3CBB9B95-F2DE-4200-8B3A-58D04CAEA47D}" destId="{70046D02-65D6-40DB-ACBF-E73D76169B62}" srcOrd="0" destOrd="0" presId="urn:microsoft.com/office/officeart/2009/3/layout/HorizontalOrganizationChart"/>
-    <dgm:cxn modelId="{E75ECA0D-D444-4C3A-AE77-8206A484188F}" type="presOf" srcId="{6C8E784B-F666-494C-B943-E6FE294FAEB1}" destId="{E4AFD26B-C7BB-41CA-A59C-D4C3576380A8}" srcOrd="0" destOrd="0" presId="urn:microsoft.com/office/officeart/2009/3/layout/HorizontalOrganizationChart"/>
+    <dgm:cxn modelId="{5F7F4002-AAAB-487D-A922-DE3C62EC2CEB}" type="presOf" srcId="{4F9DC5B4-E119-4273-B0C6-F44F279BA1CA}" destId="{BC5242FB-9811-49A0-A754-F9DF7804FA27}" srcOrd="1" destOrd="0" presId="urn:microsoft.com/office/officeart/2009/3/layout/HorizontalOrganizationChart"/>
+    <dgm:cxn modelId="{B87D8605-21F3-4A5B-9F6B-B69F9D77A2FA}" type="presOf" srcId="{455048BF-88A9-42EC-8893-BB00D9AEA4E4}" destId="{B4F70755-F4D1-485F-892E-3C7B87066BCB}" srcOrd="0" destOrd="0" presId="urn:microsoft.com/office/officeart/2009/3/layout/HorizontalOrganizationChart"/>
+    <dgm:cxn modelId="{21093C0A-C656-4228-8AE6-87D8DE598B46}" type="presOf" srcId="{9A5D99C4-3A63-4397-B386-EBF9464401C2}" destId="{0A14706F-1BC6-48E6-BDBA-7B500E589BAD}" srcOrd="0" destOrd="0" presId="urn:microsoft.com/office/officeart/2009/3/layout/HorizontalOrganizationChart"/>
+    <dgm:cxn modelId="{3A315C0A-B5DE-4E07-8FB5-1CD50648992C}" srcId="{9A4F48F6-BCF9-4165-AF3C-7C7BA667FA27}" destId="{24C79789-50A6-4247-997A-B75D020D2C6D}" srcOrd="6" destOrd="0" parTransId="{4F864848-EEBF-4930-A161-A4A71CAED760}" sibTransId="{710B0101-9A84-4BC6-8C5A-657A5D29E445}"/>
+    <dgm:cxn modelId="{7A651C0B-A30D-41A2-8512-08735A8212CA}" type="presOf" srcId="{2053DD24-1A05-4174-B3A2-006AF3B872F4}" destId="{B074A3F9-9B82-47D6-B99B-37FA4AD461B1}" srcOrd="0" destOrd="0" presId="urn:microsoft.com/office/officeart/2009/3/layout/HorizontalOrganizationChart"/>
     <dgm:cxn modelId="{9154D30D-EAA0-42E1-8C09-EB4FE655F630}" srcId="{C499CC0F-4E7A-4FEC-97EE-0BDE6BB4004A}" destId="{38A0B2E5-D90D-4428-806C-7CCE3CC93BD2}" srcOrd="0" destOrd="0" parTransId="{37ECD93D-C6A9-4F2D-B4DF-3F071835E72F}" sibTransId="{2EA43260-1DBE-427E-AE7E-F1D9881271AE}"/>
-    <dgm:cxn modelId="{751A140E-BD01-4228-9DD6-3DA5AD793CD2}" srcId="{9DFAA83C-0ED7-4C5D-908E-2A02657C3D57}" destId="{C499CC0F-4E7A-4FEC-97EE-0BDE6BB4004A}" srcOrd="2" destOrd="0" parTransId="{7F41646D-7809-44F5-B24B-6E191227AD5F}" sibTransId="{EA7DEC92-39F8-4663-8710-1BE6F53B5DCC}"/>
-    <dgm:cxn modelId="{30AA9617-A022-4D68-88C1-6F3478310F39}" type="presOf" srcId="{24C79789-50A6-4247-997A-B75D020D2C6D}" destId="{49F9D926-559F-4648-BFF5-79BEBC70A452}" srcOrd="1" destOrd="0" presId="urn:microsoft.com/office/officeart/2009/3/layout/HorizontalOrganizationChart"/>
-    <dgm:cxn modelId="{B2B91619-0202-49E8-8242-F21948C3F4F0}" type="presOf" srcId="{C499CC0F-4E7A-4FEC-97EE-0BDE6BB4004A}" destId="{3FD13D51-28CB-4ACA-8CF5-784F6B0C3075}" srcOrd="1" destOrd="0" presId="urn:microsoft.com/office/officeart/2009/3/layout/HorizontalOrganizationChart"/>
-    <dgm:cxn modelId="{E13BEB1A-FF7C-4C37-BBBF-C77E9BAEE796}" type="presOf" srcId="{7BFC5FFE-8955-4513-8485-C479782305F9}" destId="{13AAB80B-89C4-451F-A39D-CC96E0BE201C}" srcOrd="1" destOrd="0" presId="urn:microsoft.com/office/officeart/2009/3/layout/HorizontalOrganizationChart"/>
-    <dgm:cxn modelId="{A489641B-7E05-43AA-A191-C98075C9A8C6}" type="presOf" srcId="{B777D164-DD56-45DE-9496-BC18234B1690}" destId="{DF3D6495-4140-4D40-8D35-ABD35584EF53}" srcOrd="0" destOrd="0" presId="urn:microsoft.com/office/officeart/2009/3/layout/HorizontalOrganizationChart"/>
-    <dgm:cxn modelId="{6D13311C-CE16-4126-9C3B-DF73BCF4FBE6}" type="presOf" srcId="{35D396C7-832D-4310-9EFD-0CBA7534B49E}" destId="{15470CCD-2DC4-4446-952E-0EA1F9168293}" srcOrd="0" destOrd="0" presId="urn:microsoft.com/office/officeart/2009/3/layout/HorizontalOrganizationChart"/>
-    <dgm:cxn modelId="{F0F7441E-48BA-49A9-8A3D-F705EB1C77B5}" type="presOf" srcId="{CA6200AF-7336-4AB8-A4E9-530BC5027306}" destId="{2CB5E2D1-00D5-4B61-9756-D570A792B6B1}" srcOrd="1" destOrd="0" presId="urn:microsoft.com/office/officeart/2009/3/layout/HorizontalOrganizationChart"/>
-    <dgm:cxn modelId="{13265020-C2E5-4A8F-83A2-06677FD3A1B8}" type="presOf" srcId="{7170B3D7-7385-4271-BFDD-77BDCB4B9D7D}" destId="{75AB063C-95C2-4D08-BD75-E990F011A243}" srcOrd="1" destOrd="0" presId="urn:microsoft.com/office/officeart/2009/3/layout/HorizontalOrganizationChart"/>
-    <dgm:cxn modelId="{FC787A20-92E4-46C1-871F-956D85AFC3F7}" type="presOf" srcId="{A874BA0B-B7EF-479E-B1B8-17FB9E8D2868}" destId="{E4E142D8-98D9-4BB4-8826-8B27491F43B4}" srcOrd="0" destOrd="0" presId="urn:microsoft.com/office/officeart/2009/3/layout/HorizontalOrganizationChart"/>
-    <dgm:cxn modelId="{F902FA21-BCF1-4DA7-80FA-CA2ED5E29F33}" type="presOf" srcId="{13719A43-B673-4C88-9D1E-16D752C05E25}" destId="{3E0FA384-F7A7-4EF5-BB6C-325C5B877E93}" srcOrd="0" destOrd="0" presId="urn:microsoft.com/office/officeart/2009/3/layout/HorizontalOrganizationChart"/>
-    <dgm:cxn modelId="{C83AD222-65C1-4EC2-BDC0-4A7E8731A532}" type="presOf" srcId="{6C8E784B-F666-494C-B943-E6FE294FAEB1}" destId="{8700B5FB-1AEC-447F-A85A-B23DFECB41F1}" srcOrd="1" destOrd="0" presId="urn:microsoft.com/office/officeart/2009/3/layout/HorizontalOrganizationChart"/>
-    <dgm:cxn modelId="{F464E625-7C9E-487C-A146-749817666257}" type="presOf" srcId="{7607DCFD-2AEA-4454-AD75-99E4327A6DA2}" destId="{2CDAEA21-DCC4-4575-A028-8E48B86095C3}" srcOrd="0" destOrd="0" presId="urn:microsoft.com/office/officeart/2009/3/layout/HorizontalOrganizationChart"/>
-    <dgm:cxn modelId="{BD363A28-A522-4ACD-8D41-F80F05C05927}" type="presOf" srcId="{C4BC2D65-C06B-4D32-962C-942429050144}" destId="{87CE32BE-E790-4C1C-A724-8399427B532F}" srcOrd="0" destOrd="0" presId="urn:microsoft.com/office/officeart/2009/3/layout/HorizontalOrganizationChart"/>
-    <dgm:cxn modelId="{8618BC28-A8FA-40EB-8ACB-80DD764C857F}" type="presOf" srcId="{BCF3A011-CCE5-4332-B9BE-4DBB4EB90D3E}" destId="{DB5E1FBB-4766-4187-B99E-821C906B52A9}" srcOrd="0" destOrd="0" presId="urn:microsoft.com/office/officeart/2009/3/layout/HorizontalOrganizationChart"/>
-    <dgm:cxn modelId="{DA513029-0EE8-49F2-B310-38DDF7BDA18B}" type="presOf" srcId="{A5F5E471-F067-43AE-8556-402C42D66216}" destId="{A9FBC398-F630-4DAD-8DDB-C584F376881B}" srcOrd="0" destOrd="0" presId="urn:microsoft.com/office/officeart/2009/3/layout/HorizontalOrganizationChart"/>
-    <dgm:cxn modelId="{72B0D92B-94DE-49EA-8F94-323B7F845A6F}" type="presOf" srcId="{061809CC-87E0-4E97-84A6-384BF07724D8}" destId="{07CF39E6-9B2B-4A5F-B780-120DD8E62C9B}" srcOrd="0" destOrd="0" presId="urn:microsoft.com/office/officeart/2009/3/layout/HorizontalOrganizationChart"/>
-    <dgm:cxn modelId="{D083562D-5335-472C-AAD1-862A4EF15B30}" type="presOf" srcId="{35D396C7-832D-4310-9EFD-0CBA7534B49E}" destId="{C1FA8641-48D3-43B7-8727-7E323B1B501C}" srcOrd="1" destOrd="0" presId="urn:microsoft.com/office/officeart/2009/3/layout/HorizontalOrganizationChart"/>
-    <dgm:cxn modelId="{7B8A892D-5FB0-4F1A-B5DD-0F689B566A74}" type="presOf" srcId="{23D84297-71D0-47C1-8874-FF344216EAC8}" destId="{AC252788-612D-4E9E-AE60-64A72A6D6716}" srcOrd="1" destOrd="0" presId="urn:microsoft.com/office/officeart/2009/3/layout/HorizontalOrganizationChart"/>
-    <dgm:cxn modelId="{3E30E631-F4CE-48CA-BF7F-AECF7B0A7531}" type="presOf" srcId="{06F09080-0CCF-47DD-9F14-9B09338FC156}" destId="{77267FA6-0CDF-4F47-97BA-153747EF1791}" srcOrd="0" destOrd="0" presId="urn:microsoft.com/office/officeart/2009/3/layout/HorizontalOrganizationChart"/>
-    <dgm:cxn modelId="{3AAAF133-B64B-4E97-BB8B-AF3771C1E64A}" type="presOf" srcId="{73528B28-3862-4C56-BB94-20BFCA4D977C}" destId="{E142E4F7-A4D2-449F-AA7F-C04C088A3C1F}" srcOrd="0" destOrd="0" presId="urn:microsoft.com/office/officeart/2009/3/layout/HorizontalOrganizationChart"/>
-    <dgm:cxn modelId="{2BF16234-FB76-479B-A58F-B5CCBDE60605}" type="presOf" srcId="{880276D0-EB74-4489-85C7-23E81AC85430}" destId="{68ED52F3-D00D-4FBA-A7F0-19107FBE0261}" srcOrd="0" destOrd="0" presId="urn:microsoft.com/office/officeart/2009/3/layout/HorizontalOrganizationChart"/>
+    <dgm:cxn modelId="{751A140E-BD01-4228-9DD6-3DA5AD793CD2}" srcId="{E0F095D0-0CDD-4899-95AE-C151B28DF4D1}" destId="{C499CC0F-4E7A-4FEC-97EE-0BDE6BB4004A}" srcOrd="2" destOrd="0" parTransId="{7F41646D-7809-44F5-B24B-6E191227AD5F}" sibTransId="{EA7DEC92-39F8-4663-8710-1BE6F53B5DCC}"/>
+    <dgm:cxn modelId="{71325B10-288B-46F5-8CCD-19BCBD816DA1}" type="presOf" srcId="{9510750D-81D3-4DD1-BEEF-9ABF3212385B}" destId="{5D697390-7377-44AA-914E-7F34A506AC17}" srcOrd="0" destOrd="0" presId="urn:microsoft.com/office/officeart/2009/3/layout/HorizontalOrganizationChart"/>
+    <dgm:cxn modelId="{C6F24612-618B-4429-8087-6E33AE31D2B0}" type="presOf" srcId="{4ECE59B8-536D-4DBD-9298-39EEE1A4E2F2}" destId="{171F98E8-7A93-4667-99EC-A67EE133F035}" srcOrd="0" destOrd="0" presId="urn:microsoft.com/office/officeart/2009/3/layout/HorizontalOrganizationChart"/>
+    <dgm:cxn modelId="{0C446813-01CF-4A50-AB25-9D57AB1B8897}" type="presOf" srcId="{76476CBF-B102-41E4-9248-4221376F70AF}" destId="{AE91CF76-6598-4254-A5BF-61941E0FBFD6}" srcOrd="0" destOrd="0" presId="urn:microsoft.com/office/officeart/2009/3/layout/HorizontalOrganizationChart"/>
+    <dgm:cxn modelId="{A556BF14-73AB-4358-B285-B711A4B48A0E}" type="presOf" srcId="{9A4F48F6-BCF9-4165-AF3C-7C7BA667FA27}" destId="{BAE31ACF-752D-4EA8-8B6E-54DBD06D21AE}" srcOrd="0" destOrd="0" presId="urn:microsoft.com/office/officeart/2009/3/layout/HorizontalOrganizationChart"/>
+    <dgm:cxn modelId="{68EA8417-4719-460C-8D34-9D35288C7C06}" type="presOf" srcId="{7BFC5FFE-8955-4513-8485-C479782305F9}" destId="{B509227D-8391-4FEA-8798-380D7D9E41EE}" srcOrd="0" destOrd="0" presId="urn:microsoft.com/office/officeart/2009/3/layout/HorizontalOrganizationChart"/>
+    <dgm:cxn modelId="{0E2E9919-B78A-4EF9-B729-F8A4F450627E}" type="presOf" srcId="{B777D164-DD56-45DE-9496-BC18234B1690}" destId="{50A4060C-F737-4459-BC6A-B233FEC9432A}" srcOrd="0" destOrd="0" presId="urn:microsoft.com/office/officeart/2009/3/layout/HorizontalOrganizationChart"/>
+    <dgm:cxn modelId="{732BF519-8AF9-46E9-A605-D8B3016E8487}" srcId="{9A4F48F6-BCF9-4165-AF3C-7C7BA667FA27}" destId="{B9CE2267-5814-421B-8674-D202299E0DA9}" srcOrd="1" destOrd="0" parTransId="{8E55D407-483C-4F95-9E0F-F2F663299F50}" sibTransId="{6BDF92C9-5D8A-4F54-A8D5-BCAC6B9A57C3}"/>
+    <dgm:cxn modelId="{ADC9EB1A-EAA0-4413-99C2-6C78DCF66C47}" type="presOf" srcId="{23D84297-71D0-47C1-8874-FF344216EAC8}" destId="{8C63EC56-3637-4380-B189-D0B66ADCD3F7}" srcOrd="0" destOrd="0" presId="urn:microsoft.com/office/officeart/2009/3/layout/HorizontalOrganizationChart"/>
+    <dgm:cxn modelId="{9909391B-DA23-458C-845D-DFC7A6258A45}" type="presOf" srcId="{6D92348B-BF22-4F09-BD16-E4E9FEADFB32}" destId="{368DE4E4-C42A-435E-AD32-88164C04A62F}" srcOrd="1" destOrd="0" presId="urn:microsoft.com/office/officeart/2009/3/layout/HorizontalOrganizationChart"/>
+    <dgm:cxn modelId="{45EF7B1E-7AFC-4B41-ABFA-BE089431C67D}" type="presOf" srcId="{9A4F48F6-BCF9-4165-AF3C-7C7BA667FA27}" destId="{D46F3F0D-30A4-4DDE-884B-BD4A774332AE}" srcOrd="1" destOrd="0" presId="urn:microsoft.com/office/officeart/2009/3/layout/HorizontalOrganizationChart"/>
+    <dgm:cxn modelId="{298EC01E-98EA-4317-8BCB-5EEC17688623}" type="presOf" srcId="{BD4CBB34-BFC3-4314-AC58-360CE3F828A3}" destId="{9921040E-A9AE-4E20-B3A7-1033725EAB32}" srcOrd="0" destOrd="0" presId="urn:microsoft.com/office/officeart/2009/3/layout/HorizontalOrganizationChart"/>
+    <dgm:cxn modelId="{3DB9051F-96AB-4953-AF48-724E87CD80CD}" type="presOf" srcId="{8E55D407-483C-4F95-9E0F-F2F663299F50}" destId="{4CFCDFA8-E01C-4C6B-A731-226D0B6C2C76}" srcOrd="0" destOrd="0" presId="urn:microsoft.com/office/officeart/2009/3/layout/HorizontalOrganizationChart"/>
+    <dgm:cxn modelId="{28759523-A437-43C1-A9BB-7FAC025B6677}" type="presOf" srcId="{7D9BDDE8-7610-4C76-ACCC-5EF685046CB6}" destId="{8DDA93F8-5C72-4B48-9D1D-CEE49333C83C}" srcOrd="0" destOrd="0" presId="urn:microsoft.com/office/officeart/2009/3/layout/HorizontalOrganizationChart"/>
+    <dgm:cxn modelId="{971C8624-073D-432B-91AD-9AC714A8F52F}" type="presOf" srcId="{928CD5CC-816D-4B40-9D14-7256E32D7DFD}" destId="{171E7136-836A-486B-B91D-37B90AC43AE7}" srcOrd="0" destOrd="0" presId="urn:microsoft.com/office/officeart/2009/3/layout/HorizontalOrganizationChart"/>
+    <dgm:cxn modelId="{C20B4925-E18E-4EB5-8898-51B0093D7DDD}" type="presOf" srcId="{B0A38B96-90FF-402E-A24A-BEF06D54B9B6}" destId="{D5EFD006-A32B-489A-B809-E3D7E0386B88}" srcOrd="0" destOrd="0" presId="urn:microsoft.com/office/officeart/2009/3/layout/HorizontalOrganizationChart"/>
+    <dgm:cxn modelId="{B7CC2626-7B8F-4FB2-89CC-DE44A98C8849}" type="presOf" srcId="{B9CE2267-5814-421B-8674-D202299E0DA9}" destId="{33C6A336-A8D1-4674-9B6A-18C545834C69}" srcOrd="1" destOrd="0" presId="urn:microsoft.com/office/officeart/2009/3/layout/HorizontalOrganizationChart"/>
+    <dgm:cxn modelId="{06E83A27-AD94-4C9E-B91C-81BA65C337F2}" type="presOf" srcId="{73528B28-3862-4C56-BB94-20BFCA4D977C}" destId="{74B77C7E-36E3-406E-BAC0-4831F4BABB3C}" srcOrd="1" destOrd="0" presId="urn:microsoft.com/office/officeart/2009/3/layout/HorizontalOrganizationChart"/>
+    <dgm:cxn modelId="{CB62C827-67E5-4123-88C9-AC674D1D8A7E}" srcId="{5AFEC8AD-8C3F-4724-85E3-77D8EA592781}" destId="{3E6A9241-7ED7-4E1E-9A0C-FCCB8AFE0676}" srcOrd="0" destOrd="0" parTransId="{C3FB077C-2462-498E-B844-9538FDE898FE}" sibTransId="{CB332FBD-7E08-4152-AD88-22BA4367C068}"/>
+    <dgm:cxn modelId="{E6FA3029-BCAE-4787-B32C-97F513F5C215}" type="presOf" srcId="{764BB32F-0818-4190-8CBA-5BFD6043BFBC}" destId="{5CE68631-E50F-4A7D-A78E-B9848249D5F3}" srcOrd="0" destOrd="0" presId="urn:microsoft.com/office/officeart/2009/3/layout/HorizontalOrganizationChart"/>
+    <dgm:cxn modelId="{454CD22B-764C-406C-B10A-DDB93BD901C5}" type="presOf" srcId="{E0F095D0-0CDD-4899-95AE-C151B28DF4D1}" destId="{5ED98B15-1271-4C1B-BD70-D93D404A68CE}" srcOrd="0" destOrd="0" presId="urn:microsoft.com/office/officeart/2009/3/layout/HorizontalOrganizationChart"/>
+    <dgm:cxn modelId="{7B59A634-F433-4A07-AFCE-9B65DE03FE70}" type="presOf" srcId="{83D18EB3-F613-46C2-86CF-CF849473A283}" destId="{183240E7-EEA6-46D8-AE60-487B0566B9A2}" srcOrd="0" destOrd="0" presId="urn:microsoft.com/office/officeart/2009/3/layout/HorizontalOrganizationChart"/>
     <dgm:cxn modelId="{6620BD34-0599-4A37-843B-95E73982D995}" srcId="{9DFAA83C-0ED7-4C5D-908E-2A02657C3D57}" destId="{E0F095D0-0CDD-4899-95AE-C151B28DF4D1}" srcOrd="0" destOrd="0" parTransId="{A901081C-4D82-49A2-9AF0-FDB6D79D7219}" sibTransId="{A65C86A5-0AE7-4EEE-9D4F-A9803E1BE21B}"/>
-    <dgm:cxn modelId="{C019FA34-0432-4520-B347-F6F1D30FC003}" type="presOf" srcId="{6D92348B-BF22-4F09-BD16-E4E9FEADFB32}" destId="{CF184D97-6870-475F-82DD-C951C974B444}" srcOrd="0" destOrd="0" presId="urn:microsoft.com/office/officeart/2009/3/layout/HorizontalOrganizationChart"/>
-    <dgm:cxn modelId="{DA048835-4A0E-4CF5-86C6-63625723604A}" srcId="{E3AF1FB6-7793-4A4C-A846-4D8E2C079072}" destId="{0C931ACA-CC53-4D97-9D61-C471A807C39D}" srcOrd="0" destOrd="0" parTransId="{E13A3907-2F21-472C-B2F1-588C6FECF12C}" sibTransId="{FDBDD9A4-125D-461A-BF34-39CF6F29CC28}"/>
-    <dgm:cxn modelId="{B18FEF36-8601-4A45-89CC-C075C15F947B}" type="presOf" srcId="{83D18EB3-F613-46C2-86CF-CF849473A283}" destId="{37CB0559-0F9C-4E01-9395-9AF1D8335AB3}" srcOrd="0" destOrd="0" presId="urn:microsoft.com/office/officeart/2009/3/layout/HorizontalOrganizationChart"/>
-    <dgm:cxn modelId="{0C1F7A3C-10A8-4302-A188-6EB57BEC7BC9}" type="presOf" srcId="{38A0B2E5-D90D-4428-806C-7CCE3CC93BD2}" destId="{47B80075-7A99-4CC4-8E04-7AE4D94B5491}" srcOrd="1" destOrd="0" presId="urn:microsoft.com/office/officeart/2009/3/layout/HorizontalOrganizationChart"/>
+    <dgm:cxn modelId="{F70E783C-4981-4DD6-9698-7F39109CADA9}" type="presOf" srcId="{CD4954CC-F1E7-474A-9C14-897F60DC4DA4}" destId="{18E21695-07C6-4F19-99E8-D16CE3157C9B}" srcOrd="1" destOrd="0" presId="urn:microsoft.com/office/officeart/2009/3/layout/HorizontalOrganizationChart"/>
     <dgm:cxn modelId="{A50AE63F-71DF-4A50-9477-BB78123FEF7A}" srcId="{4ECE59B8-536D-4DBD-9298-39EEE1A4E2F2}" destId="{9AC9B081-25C5-4E83-B9FC-4EE1220C42CC}" srcOrd="0" destOrd="0" parTransId="{454A2903-42E9-4AD4-B32C-56480B741CA4}" sibTransId="{BFCB5B5C-D340-456B-9E1E-50850228EC60}"/>
-    <dgm:cxn modelId="{1531985C-03EF-49C2-8E08-19BB7D635F73}" srcId="{3CBB9B95-F2DE-4200-8B3A-58D04CAEA47D}" destId="{3B3021F4-1B88-4824-8D12-7496727C461B}" srcOrd="4" destOrd="0" parTransId="{76CB5FF8-DAAE-4108-8F27-58BE17CA5BF3}" sibTransId="{52291D77-3FC5-46EF-9F8F-91DE64AC9C4F}"/>
-    <dgm:cxn modelId="{025CEE5E-E7D6-4B78-A67D-5524E7DC8DF6}" type="presOf" srcId="{7D9BDDE8-7610-4C76-ACCC-5EF685046CB6}" destId="{C23208CB-8112-4EC1-8E1A-4AE7807BED36}" srcOrd="0" destOrd="0" presId="urn:microsoft.com/office/officeart/2009/3/layout/HorizontalOrganizationChart"/>
-    <dgm:cxn modelId="{EE240861-4150-4810-82A4-54BFBDE86757}" type="presOf" srcId="{73528B28-3862-4C56-BB94-20BFCA4D977C}" destId="{74B77C7E-36E3-406E-BAC0-4831F4BABB3C}" srcOrd="1" destOrd="0" presId="urn:microsoft.com/office/officeart/2009/3/layout/HorizontalOrganizationChart"/>
+    <dgm:cxn modelId="{50A0AC5D-9134-499A-BD17-8191D5159EB6}" type="presOf" srcId="{9242D754-7730-4B78-AB9C-A02DFB9723F4}" destId="{B0CC0030-18CD-4C76-8E04-002BB6D32A15}" srcOrd="0" destOrd="0" presId="urn:microsoft.com/office/officeart/2009/3/layout/HorizontalOrganizationChart"/>
+    <dgm:cxn modelId="{04F8C65E-115C-4784-89A0-4491AD529736}" srcId="{D5809694-423C-4057-A791-AE12D92AEFEC}" destId="{5AFEC8AD-8C3F-4724-85E3-77D8EA592781}" srcOrd="0" destOrd="0" parTransId="{8D4DADF3-A559-473F-B457-30AAF42C09D7}" sibTransId="{20C3EAD4-7885-4840-B357-8B0AE16E3E20}"/>
+    <dgm:cxn modelId="{2479AA60-8724-4253-B798-9CB835066611}" type="presOf" srcId="{6D41F822-3F5E-498D-8427-D9976FC14949}" destId="{89FD8EE9-AA60-48A6-9D40-0DBE92C02DE0}" srcOrd="1" destOrd="0" presId="urn:microsoft.com/office/officeart/2009/3/layout/HorizontalOrganizationChart"/>
     <dgm:cxn modelId="{92666C42-575A-458A-A537-6AF157077065}" srcId="{9A4F48F6-BCF9-4165-AF3C-7C7BA667FA27}" destId="{7170B3D7-7385-4271-BFDD-77BDCB4B9D7D}" srcOrd="5" destOrd="0" parTransId="{4A1ABC62-FD06-4AC0-BC51-20F24998E5FF}" sibTransId="{E0F509D1-F4E5-4341-B785-E6BE8356D007}"/>
-    <dgm:cxn modelId="{4B7F7562-9200-4480-9891-4F2DC78F6DE8}" type="presOf" srcId="{1BCF77AA-6B04-4D81-9D59-6F959F70F803}" destId="{B81833A2-355D-431A-B42B-FFB97F5DED7E}" srcOrd="1" destOrd="0" presId="urn:microsoft.com/office/officeart/2009/3/layout/HorizontalOrganizationChart"/>
-    <dgm:cxn modelId="{BFB71A43-456C-46CA-95EF-745E74229864}" type="presOf" srcId="{855297F2-A162-4EED-8FE7-B40916947E1F}" destId="{E9A97367-2565-4CA7-B81D-4E147657D835}" srcOrd="0" destOrd="0" presId="urn:microsoft.com/office/officeart/2009/3/layout/HorizontalOrganizationChart"/>
-    <dgm:cxn modelId="{9EB7D463-F3D1-42F2-B153-CF9EB7107E63}" type="presOf" srcId="{BD4CBB34-BFC3-4314-AC58-360CE3F828A3}" destId="{3374B034-7516-421E-BD23-9C0F9E320F00}" srcOrd="1" destOrd="0" presId="urn:microsoft.com/office/officeart/2009/3/layout/HorizontalOrganizationChart"/>
-    <dgm:cxn modelId="{415D2164-7823-4034-AAF3-84C0E669399B}" type="presOf" srcId="{0C931ACA-CC53-4D97-9D61-C471A807C39D}" destId="{39661304-84F2-4510-A80A-0ED0BF9B0CEA}" srcOrd="1" destOrd="0" presId="urn:microsoft.com/office/officeart/2009/3/layout/HorizontalOrganizationChart"/>
-    <dgm:cxn modelId="{A7F29244-660E-4EF8-A22F-F66119EE222E}" type="presOf" srcId="{6D92348B-BF22-4F09-BD16-E4E9FEADFB32}" destId="{368DE4E4-C42A-435E-AD32-88164C04A62F}" srcOrd="1" destOrd="0" presId="urn:microsoft.com/office/officeart/2009/3/layout/HorizontalOrganizationChart"/>
-    <dgm:cxn modelId="{8DBE3D66-4015-4C45-81A4-B5C50CAE5CD8}" type="presOf" srcId="{3B3021F4-1B88-4824-8D12-7496727C461B}" destId="{B027295A-93BB-4C19-A90B-553BB78E8D73}" srcOrd="0" destOrd="0" presId="urn:microsoft.com/office/officeart/2009/3/layout/HorizontalOrganizationChart"/>
-    <dgm:cxn modelId="{16B9E866-AFD2-46D4-9EC3-905EA8C64875}" type="presOf" srcId="{13719A43-B673-4C88-9D1E-16D752C05E25}" destId="{039EE693-846A-452B-938C-A79863754B50}" srcOrd="1" destOrd="0" presId="urn:microsoft.com/office/officeart/2009/3/layout/HorizontalOrganizationChart"/>
-    <dgm:cxn modelId="{2DF91147-7EB9-4F00-BA24-9E36F8708E4D}" type="presOf" srcId="{A396E0BF-DF91-4BCD-8AC5-B6EA0224F397}" destId="{0A0759F7-AEC9-45E6-B0C9-C7C1A3150A4F}" srcOrd="1" destOrd="0" presId="urn:microsoft.com/office/officeart/2009/3/layout/HorizontalOrganizationChart"/>
-    <dgm:cxn modelId="{29274A67-45AD-4C3C-86BD-0B4E6BACB0DB}" type="presOf" srcId="{95FA36E0-4680-4632-B27E-091BE020210A}" destId="{893463AD-E827-4ADB-B408-E38128099076}" srcOrd="0" destOrd="0" presId="urn:microsoft.com/office/officeart/2009/3/layout/HorizontalOrganizationChart"/>
-    <dgm:cxn modelId="{38A86048-E03C-452C-ABEA-6927C719E242}" type="presOf" srcId="{218DF31D-CF8B-459F-887A-8E793F7A6593}" destId="{0BA28261-1ED3-47EB-A7EA-310484F5DF09}" srcOrd="0" destOrd="0" presId="urn:microsoft.com/office/officeart/2009/3/layout/HorizontalOrganizationChart"/>
-    <dgm:cxn modelId="{B0CE5868-94D4-49A7-B962-BA3CE93AA65D}" type="presOf" srcId="{6D41F822-3F5E-498D-8427-D9976FC14949}" destId="{90D35EA2-A25D-449A-8C0B-91C81C67A50C}" srcOrd="0" destOrd="0" presId="urn:microsoft.com/office/officeart/2009/3/layout/HorizontalOrganizationChart"/>
-    <dgm:cxn modelId="{F5EEA168-12B5-4382-B67C-B8A81E842067}" type="presOf" srcId="{76476CBF-B102-41E4-9248-4221376F70AF}" destId="{95CF0774-536B-4F9D-A2E5-78BCC760D370}" srcOrd="0" destOrd="0" presId="urn:microsoft.com/office/officeart/2009/3/layout/HorizontalOrganizationChart"/>
-    <dgm:cxn modelId="{9F75A94A-C950-4913-BBB5-8D07E7CCFBA0}" type="presOf" srcId="{C499CC0F-4E7A-4FEC-97EE-0BDE6BB4004A}" destId="{FD314EC3-FAF3-42D4-B72F-81E23652E3D9}" srcOrd="0" destOrd="0" presId="urn:microsoft.com/office/officeart/2009/3/layout/HorizontalOrganizationChart"/>
-    <dgm:cxn modelId="{72C2CA4B-FD48-448B-B2A7-20A3A1B01D13}" type="presOf" srcId="{A901081C-4D82-49A2-9AF0-FDB6D79D7219}" destId="{6B2D008C-CA97-4972-8B5B-45081F19E3EC}" srcOrd="0" destOrd="0" presId="urn:microsoft.com/office/officeart/2009/3/layout/HorizontalOrganizationChart"/>
-    <dgm:cxn modelId="{FD57C86D-F61C-494B-807E-1C7E85C89BA3}" type="presOf" srcId="{C7EBEF87-5076-4181-B19B-8AD6A127BA45}" destId="{259DBE4E-D122-4206-8EBC-C98CAAF97ECC}" srcOrd="0" destOrd="0" presId="urn:microsoft.com/office/officeart/2009/3/layout/HorizontalOrganizationChart"/>
+    <dgm:cxn modelId="{EBB8BA63-CB30-47BF-9C3C-8659668948D4}" type="presOf" srcId="{880276D0-EB74-4489-85C7-23E81AC85430}" destId="{C7F7A17E-AF77-42CB-93B1-39B0770E3C79}" srcOrd="0" destOrd="0" presId="urn:microsoft.com/office/officeart/2009/3/layout/HorizontalOrganizationChart"/>
+    <dgm:cxn modelId="{1F209B64-49F2-4F4B-A304-49D36FA0231D}" type="presOf" srcId="{A396E0BF-DF91-4BCD-8AC5-B6EA0224F397}" destId="{0A0759F7-AEC9-45E6-B0C9-C7C1A3150A4F}" srcOrd="1" destOrd="0" presId="urn:microsoft.com/office/officeart/2009/3/layout/HorizontalOrganizationChart"/>
+    <dgm:cxn modelId="{99ED2365-AA58-4E74-BBAB-049EB6EBAE8F}" type="presOf" srcId="{03FC0ABC-78B9-4767-8291-52E8792ED142}" destId="{6D1FD870-2315-4054-B29C-39DF6F98439B}" srcOrd="0" destOrd="0" presId="urn:microsoft.com/office/officeart/2009/3/layout/HorizontalOrganizationChart"/>
+    <dgm:cxn modelId="{357ACD45-2BE6-452D-A42F-BC085E501C01}" type="presOf" srcId="{6A27566D-5E2B-4C81-8C09-639ED0AF984B}" destId="{6B320540-8EFC-424C-87BB-7A322C848E8D}" srcOrd="1" destOrd="0" presId="urn:microsoft.com/office/officeart/2009/3/layout/HorizontalOrganizationChart"/>
+    <dgm:cxn modelId="{2E38E245-170B-4B02-9DE1-AFCCE9F418EF}" type="presOf" srcId="{04012DFC-77A8-4A46-B858-7332CB8C84A1}" destId="{6EBCB12D-6D77-4447-9F58-D885806C37C1}" srcOrd="0" destOrd="0" presId="urn:microsoft.com/office/officeart/2009/3/layout/HorizontalOrganizationChart"/>
+    <dgm:cxn modelId="{263BD466-55EF-4C3E-B87D-2979FD87D387}" type="presOf" srcId="{D7660C3C-E08D-431C-8EE1-9AA78C89B4A5}" destId="{E64611E0-F76B-4B48-BD4A-3D9E4DE85202}" srcOrd="1" destOrd="0" presId="urn:microsoft.com/office/officeart/2009/3/layout/HorizontalOrganizationChart"/>
+    <dgm:cxn modelId="{CDD4A047-F4BF-4ABD-A4FB-2F7EC7FCA8CA}" type="presOf" srcId="{97A8E0E5-1256-46F5-BDCA-CBF242F3C57E}" destId="{B70E4C0E-1521-4091-B753-26370D64F4FD}" srcOrd="1" destOrd="0" presId="urn:microsoft.com/office/officeart/2009/3/layout/HorizontalOrganizationChart"/>
+    <dgm:cxn modelId="{3E22BB47-A0E4-425D-9F59-7CD72CC2B451}" type="presOf" srcId="{BCC45095-3A8B-4CB4-9AE4-6772688B37EF}" destId="{D56AF9D6-52CD-49B7-B03A-910C74477DFD}" srcOrd="0" destOrd="0" presId="urn:microsoft.com/office/officeart/2009/3/layout/HorizontalOrganizationChart"/>
+    <dgm:cxn modelId="{800EE247-EC32-48D2-A361-03622924637C}" type="presOf" srcId="{4ECE59B8-536D-4DBD-9298-39EEE1A4E2F2}" destId="{B4B0D416-48DF-4327-B6CB-95B60821634B}" srcOrd="1" destOrd="0" presId="urn:microsoft.com/office/officeart/2009/3/layout/HorizontalOrganizationChart"/>
+    <dgm:cxn modelId="{059FA869-55EA-4180-9A42-7A27FDC568B0}" type="presOf" srcId="{503A382B-1D5A-4546-833B-2164E945BC79}" destId="{B7E87C89-F2A3-40BE-A158-9348331D318D}" srcOrd="0" destOrd="0" presId="urn:microsoft.com/office/officeart/2009/3/layout/HorizontalOrganizationChart"/>
+    <dgm:cxn modelId="{2A9B7C4B-D978-4918-A408-6A548363CF3E}" srcId="{E0F095D0-0CDD-4899-95AE-C151B28DF4D1}" destId="{B9F7BE26-7120-4362-B07A-512CE293CF66}" srcOrd="0" destOrd="0" parTransId="{9510750D-81D3-4DD1-BEEF-9ABF3212385B}" sibTransId="{4522FBCC-88DD-42A2-A603-47CAAEA95766}"/>
+    <dgm:cxn modelId="{8CECBE6B-4095-4413-A9E3-6ECB6E167828}" type="presOf" srcId="{061809CC-87E0-4E97-84A6-384BF07724D8}" destId="{B2D69DCB-202B-46EC-819A-C954631D964B}" srcOrd="1" destOrd="0" presId="urn:microsoft.com/office/officeart/2009/3/layout/HorizontalOrganizationChart"/>
+    <dgm:cxn modelId="{C327066D-2ABE-4B55-9F1B-FF1110DCEEBE}" type="presOf" srcId="{A396E0BF-DF91-4BCD-8AC5-B6EA0224F397}" destId="{2A231453-FF0D-443D-87E8-87257BA9B0EE}" srcOrd="0" destOrd="0" presId="urn:microsoft.com/office/officeart/2009/3/layout/HorizontalOrganizationChart"/>
+    <dgm:cxn modelId="{9FA1FD4D-C0B6-46AF-8D1F-39D47A93FC1E}" type="presOf" srcId="{1BCF77AA-6B04-4D81-9D59-6F959F70F803}" destId="{B81833A2-355D-431A-B42B-FFB97F5DED7E}" srcOrd="1" destOrd="0" presId="urn:microsoft.com/office/officeart/2009/3/layout/HorizontalOrganizationChart"/>
+    <dgm:cxn modelId="{2D9FCC4E-C6C6-49FB-9B66-685C5A1233FC}" type="presOf" srcId="{6C8E784B-F666-494C-B943-E6FE294FAEB1}" destId="{E4AFD26B-C7BB-41CA-A59C-D4C3576380A8}" srcOrd="0" destOrd="0" presId="urn:microsoft.com/office/officeart/2009/3/layout/HorizontalOrganizationChart"/>
+    <dgm:cxn modelId="{A062E06E-BEA6-4826-9916-FE23DE38C25D}" type="presOf" srcId="{3CBB9B95-F2DE-4200-8B3A-58D04CAEA47D}" destId="{C2C48CC0-3A5A-4EE7-B580-FAF454A09CD8}" srcOrd="1" destOrd="0" presId="urn:microsoft.com/office/officeart/2009/3/layout/HorizontalOrganizationChart"/>
+    <dgm:cxn modelId="{B548EB4E-A18C-482C-9829-84F08B29B3CD}" type="presOf" srcId="{4A1ABC62-FD06-4AC0-BC51-20F24998E5FF}" destId="{34B1EDD2-BFE8-4A14-8948-7EEB84EDF964}" srcOrd="0" destOrd="0" presId="urn:microsoft.com/office/officeart/2009/3/layout/HorizontalOrganizationChart"/>
+    <dgm:cxn modelId="{29B3BB4F-B37B-4D27-B6ED-CFD6223B9DC0}" type="presOf" srcId="{C9E721F3-3509-40BA-945D-417CE334E5F2}" destId="{490BDFA8-D452-4BE4-9F81-245774E0D158}" srcOrd="0" destOrd="0" presId="urn:microsoft.com/office/officeart/2009/3/layout/HorizontalOrganizationChart"/>
+    <dgm:cxn modelId="{21695A70-3472-408A-A064-EB4ABD5C77F1}" type="presOf" srcId="{C7EBEF87-5076-4181-B19B-8AD6A127BA45}" destId="{16D33CAD-B597-414C-9523-47A079B2FFFB}" srcOrd="0" destOrd="0" presId="urn:microsoft.com/office/officeart/2009/3/layout/HorizontalOrganizationChart"/>
     <dgm:cxn modelId="{C5AE9650-7B23-40D6-AD75-0C98CFFC981C}" srcId="{13719A43-B673-4C88-9D1E-16D752C05E25}" destId="{764BB32F-0818-4190-8CBA-5BFD6043BFBC}" srcOrd="0" destOrd="0" parTransId="{B0A38B96-90FF-402E-A24A-BEF06D54B9B6}" sibTransId="{80C549BF-85F2-4AF0-82FE-EA09792BFF8F}"/>
     <dgm:cxn modelId="{1205B670-9953-4B26-AE11-939D8C0615D3}" srcId="{CD4954CC-F1E7-474A-9C14-897F60DC4DA4}" destId="{6D92348B-BF22-4F09-BD16-E4E9FEADFB32}" srcOrd="0" destOrd="0" parTransId="{04012DFC-77A8-4A46-B858-7332CB8C84A1}" sibTransId="{AAC775F1-969C-42B7-9AD1-47CC76C9852B}"/>
     <dgm:cxn modelId="{19B91C51-5562-44A2-9B1C-8BC4C261CCB6}" srcId="{D7660C3C-E08D-431C-8EE1-9AA78C89B4A5}" destId="{061809CC-87E0-4E97-84A6-384BF07724D8}" srcOrd="0" destOrd="0" parTransId="{BCF3A011-CCE5-4332-B9BE-4DBB4EB90D3E}" sibTransId="{56F3B771-1C0C-4C21-9EAF-35C1EBB1DB78}"/>
     <dgm:cxn modelId="{FF25C671-29E0-452F-800B-C8D83AAC5DA2}" srcId="{9A4F48F6-BCF9-4165-AF3C-7C7BA667FA27}" destId="{4ECE59B8-536D-4DBD-9298-39EEE1A4E2F2}" srcOrd="0" destOrd="0" parTransId="{6C4DA155-8243-4072-B293-EC0CBA97AD7C}" sibTransId="{F4455422-8EF8-4653-ACAA-E71029CF2328}"/>
     <dgm:cxn modelId="{A2B97172-721A-4303-8F66-6F662D34CC3E}" srcId="{061809CC-87E0-4E97-84A6-384BF07724D8}" destId="{F7D84224-A973-485F-ADAD-95BF5231A40B}" srcOrd="0" destOrd="0" parTransId="{2637AE1D-117E-454F-9D3F-416D113148BB}" sibTransId="{48D7C72E-85E8-400B-A2C7-9DB69FDA5390}"/>
     <dgm:cxn modelId="{4D6B2273-EC6F-44A1-8C0B-9E3F6EDFFD88}" srcId="{24C79789-50A6-4247-997A-B75D020D2C6D}" destId="{218DF31D-CF8B-459F-887A-8E793F7A6593}" srcOrd="0" destOrd="0" parTransId="{928CD5CC-816D-4B40-9D14-7256E32D7DFD}" sibTransId="{63F6D207-5CB3-4B31-B829-F97C6E8DF686}"/>
-    <dgm:cxn modelId="{1BD86853-FD24-4D34-B61E-65F705B5E3D8}" type="presOf" srcId="{97A8E0E5-1256-46F5-BDCA-CBF242F3C57E}" destId="{BEB5F23A-260D-4EA4-9C52-D29289AE19DF}" srcOrd="0" destOrd="0" presId="urn:microsoft.com/office/officeart/2009/3/layout/HorizontalOrganizationChart"/>
-    <dgm:cxn modelId="{F39F3754-C5AF-47AD-AA49-AC81893D0A1F}" type="presOf" srcId="{A396E0BF-DF91-4BCD-8AC5-B6EA0224F397}" destId="{2A231453-FF0D-443D-87E8-87257BA9B0EE}" srcOrd="0" destOrd="0" presId="urn:microsoft.com/office/officeart/2009/3/layout/HorizontalOrganizationChart"/>
     <dgm:cxn modelId="{8175DA54-2A32-4264-8F2E-AE304F0511C1}" srcId="{6A27566D-5E2B-4C81-8C09-639ED0AF984B}" destId="{A396E0BF-DF91-4BCD-8AC5-B6EA0224F397}" srcOrd="0" destOrd="0" parTransId="{76476CBF-B102-41E4-9248-4221376F70AF}" sibTransId="{E0E25494-38AF-49C6-9C83-A7EBB5DADB17}"/>
-    <dgm:cxn modelId="{22703375-5B00-4FAE-81A3-C0901154B346}" type="presOf" srcId="{6D41F822-3F5E-498D-8427-D9976FC14949}" destId="{89FD8EE9-AA60-48A6-9D40-0DBE92C02DE0}" srcOrd="1" destOrd="0" presId="urn:microsoft.com/office/officeart/2009/3/layout/HorizontalOrganizationChart"/>
-    <dgm:cxn modelId="{316EE856-67F3-456B-9B95-C6D77B07790B}" type="presOf" srcId="{061809CC-87E0-4E97-84A6-384BF07724D8}" destId="{B2D69DCB-202B-46EC-819A-C954631D964B}" srcOrd="1" destOrd="0" presId="urn:microsoft.com/office/officeart/2009/3/layout/HorizontalOrganizationChart"/>
-    <dgm:cxn modelId="{C17A2759-A1E0-419E-9992-B891FCA4A052}" srcId="{4ECE59B8-536D-4DBD-9298-39EEE1A4E2F2}" destId="{E92EBC15-E9D8-4B5F-B808-E2AAF4F94361}" srcOrd="1" destOrd="0" parTransId="{6187C6C3-B996-4ED1-9E29-1993D45E2169}" sibTransId="{8063460F-3FE9-46FF-8DF1-8EE5CB6EECE9}"/>
-    <dgm:cxn modelId="{F7F66479-CC5F-4B09-B282-07DA13ED0858}" type="presOf" srcId="{764BB32F-0818-4190-8CBA-5BFD6043BFBC}" destId="{5CE68631-E50F-4A7D-A78E-B9848249D5F3}" srcOrd="0" destOrd="0" presId="urn:microsoft.com/office/officeart/2009/3/layout/HorizontalOrganizationChart"/>
-    <dgm:cxn modelId="{5F7E8759-A321-4B77-B479-67DAFD115D92}" type="presOf" srcId="{45EF24BF-2957-4968-9E77-C679A38F2BE0}" destId="{A70F5440-1532-4A1D-A6B4-AF69FBE58D12}" srcOrd="0" destOrd="0" presId="urn:microsoft.com/office/officeart/2009/3/layout/HorizontalOrganizationChart"/>
-    <dgm:cxn modelId="{B3B9B979-48B8-450D-9EF7-DDFE9C4D2A38}" type="presOf" srcId="{ACF9E546-FC16-43CF-809C-930B68C88DB1}" destId="{10EB81BB-2FAE-4863-8B61-F4C17BFFA6D6}" srcOrd="0" destOrd="0" presId="urn:microsoft.com/office/officeart/2009/3/layout/HorizontalOrganizationChart"/>
-    <dgm:cxn modelId="{8693E359-4039-4912-8449-4B7E03AC255E}" type="presOf" srcId="{3CBB9B95-F2DE-4200-8B3A-58D04CAEA47D}" destId="{1E04B9EB-E6E0-4CAA-B858-CAD2D06C5A89}" srcOrd="1" destOrd="0" presId="urn:microsoft.com/office/officeart/2009/3/layout/HorizontalOrganizationChart"/>
-    <dgm:cxn modelId="{7C1C3A5A-65CA-4770-A418-58A1B2D35CD5}" type="presOf" srcId="{9AC9B081-25C5-4E83-B9FC-4EE1220C42CC}" destId="{4F157AFE-1A3E-4945-AFFE-3FBFDF773F45}" srcOrd="0" destOrd="0" presId="urn:microsoft.com/office/officeart/2009/3/layout/HorizontalOrganizationChart"/>
+    <dgm:cxn modelId="{29A6CD55-0479-475D-930B-770CD5D9F765}" type="presOf" srcId="{5AFEC8AD-8C3F-4724-85E3-77D8EA592781}" destId="{04C1E8F7-D7F2-4A83-90D5-2A24E89AE95F}" srcOrd="1" destOrd="0" presId="urn:microsoft.com/office/officeart/2009/3/layout/HorizontalOrganizationChart"/>
+    <dgm:cxn modelId="{F4ACDE77-00A4-4ED0-88AC-64D12E52333B}" type="presOf" srcId="{A5F5E471-F067-43AE-8556-402C42D66216}" destId="{7C3BC206-817E-47FC-AA4A-7E68D35E9CC7}" srcOrd="0" destOrd="0" presId="urn:microsoft.com/office/officeart/2009/3/layout/HorizontalOrganizationChart"/>
+    <dgm:cxn modelId="{D5E9F657-209B-4667-A841-FBDB87658C52}" type="presOf" srcId="{C4BC2D65-C06B-4D32-962C-942429050144}" destId="{11F963ED-B3F0-41A3-B824-325961929004}" srcOrd="0" destOrd="0" presId="urn:microsoft.com/office/officeart/2009/3/layout/HorizontalOrganizationChart"/>
+    <dgm:cxn modelId="{23961458-6448-4A27-851D-5D110D3C3E9B}" type="presOf" srcId="{C499CC0F-4E7A-4FEC-97EE-0BDE6BB4004A}" destId="{FD314EC3-FAF3-42D4-B72F-81E23652E3D9}" srcOrd="0" destOrd="0" presId="urn:microsoft.com/office/officeart/2009/3/layout/HorizontalOrganizationChart"/>
+    <dgm:cxn modelId="{6BC14278-E359-4CA3-82DF-1B3A120AC2FF}" type="presOf" srcId="{CD4954CC-F1E7-474A-9C14-897F60DC4DA4}" destId="{1D1D8692-63AE-448E-8E39-430F6A4B46BF}" srcOrd="0" destOrd="0" presId="urn:microsoft.com/office/officeart/2009/3/layout/HorizontalOrganizationChart"/>
+    <dgm:cxn modelId="{CA478C58-A7AC-4CBE-B48C-D5A4A8045F97}" type="presOf" srcId="{9DFAA83C-0ED7-4C5D-908E-2A02657C3D57}" destId="{110F79BE-B8CE-48C2-943A-1C7F5605B400}" srcOrd="0" destOrd="0" presId="urn:microsoft.com/office/officeart/2009/3/layout/HorizontalOrganizationChart"/>
+    <dgm:cxn modelId="{74EA1D59-CE25-4484-898B-D0B363CF7FF8}" srcId="{9DFAA83C-0ED7-4C5D-908E-2A02657C3D57}" destId="{A63AFC23-093E-44C6-B267-3891CF123A84}" srcOrd="1" destOrd="0" parTransId="{9388F973-CD46-4AFC-9454-5895E33035BE}" sibTransId="{1F61FF8D-23AE-4147-B5BA-4EC53E60A999}"/>
+    <dgm:cxn modelId="{B0544159-2B54-4B40-B794-E990ACD48374}" srcId="{B9CE2267-5814-421B-8674-D202299E0DA9}" destId="{915177A7-D4EB-4AE8-86BD-249E5278466B}" srcOrd="0" destOrd="0" parTransId="{B5BAD76A-7E9A-4668-B9E3-5A85C816283D}" sibTransId="{DF845212-58D8-452F-BDF5-6A66F33A5CFF}"/>
+    <dgm:cxn modelId="{008E2A5A-FC96-4448-989D-05380C61A955}" type="presOf" srcId="{D81506E7-9321-4CD6-B783-B535E14E9673}" destId="{86FF5A9C-E5F2-4B8C-83BD-290D4D4AB6AC}" srcOrd="1" destOrd="0" presId="urn:microsoft.com/office/officeart/2009/3/layout/HorizontalOrganizationChart"/>
     <dgm:cxn modelId="{1BC8F17B-2D29-4A0A-B853-6E01900B14BF}" srcId="{503A382B-1D5A-4546-833B-2164E945BC79}" destId="{1BCF77AA-6B04-4D81-9D59-6F959F70F803}" srcOrd="0" destOrd="0" parTransId="{95FA36E0-4680-4632-B27E-091BE020210A}" sibTransId="{3B701667-5E66-46AB-BDA3-3F2779701BE7}"/>
-    <dgm:cxn modelId="{0839247C-0398-46F7-A098-51A318F5A730}" type="presOf" srcId="{E3AF1FB6-7793-4A4C-A846-4D8E2C079072}" destId="{CBCC7696-EFAB-4F9F-8C0A-720224B8DCB6}" srcOrd="0" destOrd="0" presId="urn:microsoft.com/office/officeart/2009/3/layout/HorizontalOrganizationChart"/>
     <dgm:cxn modelId="{099CBF7E-623A-4E34-A8A8-237B6F145EF1}" srcId="{3CBB9B95-F2DE-4200-8B3A-58D04CAEA47D}" destId="{9A4F48F6-BCF9-4165-AF3C-7C7BA667FA27}" srcOrd="0" destOrd="0" parTransId="{9A5D99C4-3A63-4397-B386-EBF9464401C2}" sibTransId="{3D288AF2-D587-4DAC-A032-2120C9951061}"/>
-    <dgm:cxn modelId="{5B800C80-94B9-4F92-AF4B-4CEA866A56D6}" srcId="{3CBB9B95-F2DE-4200-8B3A-58D04CAEA47D}" destId="{CA6200AF-7336-4AB8-A4E9-530BC5027306}" srcOrd="3" destOrd="0" parTransId="{880276D0-EB74-4489-85C7-23E81AC85430}" sibTransId="{36022CDB-DAA5-4DCB-AB8C-CC60CF58AABA}"/>
-    <dgm:cxn modelId="{0A832B85-7CAE-4ECA-8B4D-53F075742ED9}" type="presOf" srcId="{76CB5FF8-DAAE-4108-8F27-58BE17CA5BF3}" destId="{C051B183-B590-41B4-8423-18A273DCC6CE}" srcOrd="0" destOrd="0" presId="urn:microsoft.com/office/officeart/2009/3/layout/HorizontalOrganizationChart"/>
-    <dgm:cxn modelId="{F8524985-F094-4671-B160-40B7D7670418}" type="presOf" srcId="{5CD82464-BD85-410D-9486-CDF630216295}" destId="{E53C180E-99C8-4878-A5D0-A54393670C21}" srcOrd="0" destOrd="0" presId="urn:microsoft.com/office/officeart/2009/3/layout/HorizontalOrganizationChart"/>
-    <dgm:cxn modelId="{0AD5DF85-98A3-4997-8077-69197978D659}" type="presOf" srcId="{855297F2-A162-4EED-8FE7-B40916947E1F}" destId="{2846335E-09B8-4070-8AE1-F4A8659BD36F}" srcOrd="1" destOrd="0" presId="urn:microsoft.com/office/officeart/2009/3/layout/HorizontalOrganizationChart"/>
-    <dgm:cxn modelId="{D595DF86-55CC-40E1-991D-096A4EDC08CB}" srcId="{9DFAA83C-0ED7-4C5D-908E-2A02657C3D57}" destId="{06F09080-0CCF-47DD-9F14-9B09338FC156}" srcOrd="4" destOrd="0" parTransId="{C270D4B2-63B3-44BE-90B2-A3B79110A5BC}" sibTransId="{CCEFAA32-A3AE-42BA-A24E-BFA35382DBF3}"/>
-    <dgm:cxn modelId="{D71C7287-F713-4C75-87F8-22ED08C8637E}" srcId="{D5809694-423C-4057-A791-AE12D92AEFEC}" destId="{3CBB9B95-F2DE-4200-8B3A-58D04CAEA47D}" srcOrd="0" destOrd="0" parTransId="{9242D754-7730-4B78-AB9C-A02DFB9723F4}" sibTransId="{66961319-D3B5-4BBF-B054-793B033D15B6}"/>
-    <dgm:cxn modelId="{99D97E88-742D-4B77-B7BA-9F2DC084B2FC}" srcId="{9DFAA83C-0ED7-4C5D-908E-2A02657C3D57}" destId="{D7660C3C-E08D-431C-8EE1-9AA78C89B4A5}" srcOrd="1" destOrd="0" parTransId="{A5F5E471-F067-43AE-8556-402C42D66216}" sibTransId="{2056AD32-03D3-4873-9D29-9396256F501C}"/>
-    <dgm:cxn modelId="{FE30208E-616F-4BD7-8472-8CCA178843A7}" type="presOf" srcId="{D7660C3C-E08D-431C-8EE1-9AA78C89B4A5}" destId="{E64611E0-F76B-4B48-BD4A-3D9E4DE85202}" srcOrd="1" destOrd="0" presId="urn:microsoft.com/office/officeart/2009/3/layout/HorizontalOrganizationChart"/>
+    <dgm:cxn modelId="{F025887F-2A22-4D69-9948-F4C6CA85D111}" type="presOf" srcId="{218DF31D-CF8B-459F-887A-8E793F7A6593}" destId="{0BA28261-1ED3-47EB-A7EA-310484F5DF09}" srcOrd="0" destOrd="0" presId="urn:microsoft.com/office/officeart/2009/3/layout/HorizontalOrganizationChart"/>
+    <dgm:cxn modelId="{A9C8CA7F-ED22-4315-9204-8028581C3F5F}" type="presOf" srcId="{3E6A9241-7ED7-4E1E-9A0C-FCCB8AFE0676}" destId="{1557FC18-F726-42E8-B0B5-F6D08A985014}" srcOrd="0" destOrd="0" presId="urn:microsoft.com/office/officeart/2009/3/layout/HorizontalOrganizationChart"/>
+    <dgm:cxn modelId="{2084E27F-86C7-464C-A56C-B5A8E841ED67}" type="presOf" srcId="{AE4652B3-3398-42D3-A9DE-FBC115B53A0D}" destId="{9D3EEB16-49D5-49C0-85BE-0CF3D3E7D9DC}" srcOrd="1" destOrd="0" presId="urn:microsoft.com/office/officeart/2009/3/layout/HorizontalOrganizationChart"/>
+    <dgm:cxn modelId="{5B800C80-94B9-4F92-AF4B-4CEA866A56D6}" srcId="{5AFEC8AD-8C3F-4724-85E3-77D8EA592781}" destId="{CA6200AF-7336-4AB8-A4E9-530BC5027306}" srcOrd="3" destOrd="0" parTransId="{880276D0-EB74-4489-85C7-23E81AC85430}" sibTransId="{36022CDB-DAA5-4DCB-AB8C-CC60CF58AABA}"/>
+    <dgm:cxn modelId="{DEA0D483-6702-41BA-9CC0-2EDED1E94763}" type="presOf" srcId="{9AC9B081-25C5-4E83-B9FC-4EE1220C42CC}" destId="{32B448BD-E161-46C8-A1F6-88A373738118}" srcOrd="1" destOrd="0" presId="urn:microsoft.com/office/officeart/2009/3/layout/HorizontalOrganizationChart"/>
+    <dgm:cxn modelId="{36CE1E84-4C4D-4176-8BB7-E633CBBF4631}" type="presOf" srcId="{2A323462-12B1-44A5-95A4-30F7D5E83E80}" destId="{ADACFA42-F20B-4E19-8623-C276B1FF0253}" srcOrd="1" destOrd="0" presId="urn:microsoft.com/office/officeart/2009/3/layout/HorizontalOrganizationChart"/>
+    <dgm:cxn modelId="{FE708485-FFDF-48BB-B0BC-165ED27709E5}" srcId="{AE4652B3-3398-42D3-A9DE-FBC115B53A0D}" destId="{4F9DC5B4-E119-4273-B0C6-F44F279BA1CA}" srcOrd="0" destOrd="0" parTransId="{471AAB30-6948-4AC5-A872-0315651955DF}" sibTransId="{2408ECCD-D6DE-4241-9433-C9D56DB2C8B8}"/>
+    <dgm:cxn modelId="{EC3D8886-B783-4ED8-8144-CE41B12FC531}" type="presOf" srcId="{3CBB9B95-F2DE-4200-8B3A-58D04CAEA47D}" destId="{61A0D4EF-EC3A-4279-BC51-4F36D0B52EB7}" srcOrd="0" destOrd="0" presId="urn:microsoft.com/office/officeart/2009/3/layout/HorizontalOrganizationChart"/>
+    <dgm:cxn modelId="{1D709486-917D-4E3E-A2B2-D152DB358277}" type="presOf" srcId="{915177A7-D4EB-4AE8-86BD-249E5278466B}" destId="{88A62553-AA35-4C7E-AEE4-0944A5577F9F}" srcOrd="0" destOrd="0" presId="urn:microsoft.com/office/officeart/2009/3/layout/HorizontalOrganizationChart"/>
+    <dgm:cxn modelId="{F7A39686-1557-4B57-B314-1DA187D30F6F}" type="presOf" srcId="{B9CE2267-5814-421B-8674-D202299E0DA9}" destId="{1ECE9F9F-A668-4333-B43A-1DABED3BF4C5}" srcOrd="0" destOrd="0" presId="urn:microsoft.com/office/officeart/2009/3/layout/HorizontalOrganizationChart"/>
+    <dgm:cxn modelId="{D595DF86-55CC-40E1-991D-096A4EDC08CB}" srcId="{E0F095D0-0CDD-4899-95AE-C151B28DF4D1}" destId="{06F09080-0CCF-47DD-9F14-9B09338FC156}" srcOrd="4" destOrd="0" parTransId="{C270D4B2-63B3-44BE-90B2-A3B79110A5BC}" sibTransId="{CCEFAA32-A3AE-42BA-A24E-BFA35382DBF3}"/>
+    <dgm:cxn modelId="{D71C7287-F713-4C75-87F8-22ED08C8637E}" srcId="{5AFEC8AD-8C3F-4724-85E3-77D8EA592781}" destId="{3CBB9B95-F2DE-4200-8B3A-58D04CAEA47D}" srcOrd="1" destOrd="0" parTransId="{9242D754-7730-4B78-AB9C-A02DFB9723F4}" sibTransId="{66961319-D3B5-4BBF-B054-793B033D15B6}"/>
+    <dgm:cxn modelId="{1FDD9787-B7EE-4F29-9B32-98FC63BF655D}" type="presOf" srcId="{C270D4B2-63B3-44BE-90B2-A3B79110A5BC}" destId="{43CC1C42-04AA-435A-979C-E62AFAAF4D5E}" srcOrd="0" destOrd="0" presId="urn:microsoft.com/office/officeart/2009/3/layout/HorizontalOrganizationChart"/>
+    <dgm:cxn modelId="{99D97E88-742D-4B77-B7BA-9F2DC084B2FC}" srcId="{E0F095D0-0CDD-4899-95AE-C151B28DF4D1}" destId="{D7660C3C-E08D-431C-8EE1-9AA78C89B4A5}" srcOrd="1" destOrd="0" parTransId="{A5F5E471-F067-43AE-8556-402C42D66216}" sibTransId="{2056AD32-03D3-4873-9D29-9396256F501C}"/>
+    <dgm:cxn modelId="{EE07448A-C93A-4E21-87A5-CC7C460E750D}" type="presOf" srcId="{503A382B-1D5A-4546-833B-2164E945BC79}" destId="{F4F402F9-353D-4DAF-A0B3-B8E72F14207C}" srcOrd="1" destOrd="0" presId="urn:microsoft.com/office/officeart/2009/3/layout/HorizontalOrganizationChart"/>
+    <dgm:cxn modelId="{1193068B-09F2-45B6-9C0A-CE53F3352ACD}" type="presOf" srcId="{C9E721F3-3509-40BA-945D-417CE334E5F2}" destId="{D1162B1B-B769-48DB-B85B-AF3C1F73D58F}" srcOrd="1" destOrd="0" presId="urn:microsoft.com/office/officeart/2009/3/layout/HorizontalOrganizationChart"/>
+    <dgm:cxn modelId="{BE22608B-B59E-4CE5-B117-E75C151BC162}" type="presOf" srcId="{38A0B2E5-D90D-4428-806C-7CCE3CC93BD2}" destId="{2CFF43AD-E638-48CC-A1A6-213BB3000388}" srcOrd="0" destOrd="0" presId="urn:microsoft.com/office/officeart/2009/3/layout/HorizontalOrganizationChart"/>
+    <dgm:cxn modelId="{0683D38B-7109-4322-A243-E865981057CE}" type="presOf" srcId="{A63AFC23-093E-44C6-B267-3891CF123A84}" destId="{4E262D70-023C-4E9D-82BC-E1D1DAA6E0E0}" srcOrd="1" destOrd="0" presId="urn:microsoft.com/office/officeart/2009/3/layout/HorizontalOrganizationChart"/>
     <dgm:cxn modelId="{55772C8E-448C-4DC9-A074-76F225A7B1A5}" srcId="{35D396C7-832D-4310-9EFD-0CBA7534B49E}" destId="{BD4CBB34-BFC3-4314-AC58-360CE3F828A3}" srcOrd="0" destOrd="0" parTransId="{455048BF-88A9-42EC-8893-BB00D9AEA4E4}" sibTransId="{1F5900FF-7037-4382-8E40-1F8FA4C91733}"/>
-    <dgm:cxn modelId="{B15BE38E-839B-4685-B7A0-02F96C8FD029}" type="presOf" srcId="{CA6200AF-7336-4AB8-A4E9-530BC5027306}" destId="{F727FD69-DA36-400A-9A17-E435D30B6294}" srcOrd="0" destOrd="0" presId="urn:microsoft.com/office/officeart/2009/3/layout/HorizontalOrganizationChart"/>
-    <dgm:cxn modelId="{4A52468F-FADF-4AD1-8BF8-227ED1BE1440}" srcId="{3CBB9B95-F2DE-4200-8B3A-58D04CAEA47D}" destId="{9DFAA83C-0ED7-4C5D-908E-2A02657C3D57}" srcOrd="2" destOrd="0" parTransId="{B6EFE756-66AC-4682-AE3E-4E5A980226A5}" sibTransId="{0FBCAEE9-6184-4B39-99B3-8073FB519715}"/>
-    <dgm:cxn modelId="{1F28D990-2F54-4A38-9B5D-AC470558BBC4}" type="presOf" srcId="{D81506E7-9321-4CD6-B783-B535E14E9673}" destId="{4C50E7F0-CBE9-462F-A0E5-5FFE1AE84F4E}" srcOrd="0" destOrd="0" presId="urn:microsoft.com/office/officeart/2009/3/layout/HorizontalOrganizationChart"/>
-    <dgm:cxn modelId="{AD57EF92-C37C-4DA1-9BC6-F111369AFE73}" type="presOf" srcId="{218DF31D-CF8B-459F-887A-8E793F7A6593}" destId="{1F3D57A6-91D2-48AA-B105-E07306DABA2F}" srcOrd="1" destOrd="0" presId="urn:microsoft.com/office/officeart/2009/3/layout/HorizontalOrganizationChart"/>
-    <dgm:cxn modelId="{A735F293-9B59-4D8A-8941-5EF99F9CE900}" type="presOf" srcId="{BD4CBB34-BFC3-4314-AC58-360CE3F828A3}" destId="{9921040E-A9AE-4E20-B3A7-1033725EAB32}" srcOrd="0" destOrd="0" presId="urn:microsoft.com/office/officeart/2009/3/layout/HorizontalOrganizationChart"/>
-    <dgm:cxn modelId="{5311809A-37D3-4B3B-B846-D618076E2A24}" type="presOf" srcId="{4A1ABC62-FD06-4AC0-BC51-20F24998E5FF}" destId="{5D734C8D-E40C-4BF2-A310-8A858AE1F314}" srcOrd="0" destOrd="0" presId="urn:microsoft.com/office/officeart/2009/3/layout/HorizontalOrganizationChart"/>
-    <dgm:cxn modelId="{CD3C019C-8C31-4A6E-9012-D36C5986171F}" type="presOf" srcId="{9AC9B081-25C5-4E83-B9FC-4EE1220C42CC}" destId="{32B448BD-E161-46C8-A1F6-88A373738118}" srcOrd="1" destOrd="0" presId="urn:microsoft.com/office/officeart/2009/3/layout/HorizontalOrganizationChart"/>
+    <dgm:cxn modelId="{4A52468F-FADF-4AD1-8BF8-227ED1BE1440}" srcId="{5AFEC8AD-8C3F-4724-85E3-77D8EA592781}" destId="{9DFAA83C-0ED7-4C5D-908E-2A02657C3D57}" srcOrd="2" destOrd="0" parTransId="{B6EFE756-66AC-4682-AE3E-4E5A980226A5}" sibTransId="{0FBCAEE9-6184-4B39-99B3-8073FB519715}"/>
+    <dgm:cxn modelId="{1144B990-88A9-42EB-846B-E8012E67860F}" type="presOf" srcId="{2637AE1D-117E-454F-9D3F-416D113148BB}" destId="{00A95A3F-3AAD-468F-908F-845C4ED90DA2}" srcOrd="0" destOrd="0" presId="urn:microsoft.com/office/officeart/2009/3/layout/HorizontalOrganizationChart"/>
+    <dgm:cxn modelId="{3E473E91-71BA-420D-88C3-60AB2A50E126}" type="presOf" srcId="{4EAB6B4E-4AE3-4DD0-93A3-0784ECF3F600}" destId="{172AD772-32C1-453D-A10B-AD2F2B8A156F}" srcOrd="0" destOrd="0" presId="urn:microsoft.com/office/officeart/2009/3/layout/HorizontalOrganizationChart"/>
+    <dgm:cxn modelId="{FE0B7E91-4D6B-470E-831C-16FEC3C727AD}" type="presOf" srcId="{13719A43-B673-4C88-9D1E-16D752C05E25}" destId="{3E0FA384-F7A7-4EF5-BB6C-325C5B877E93}" srcOrd="0" destOrd="0" presId="urn:microsoft.com/office/officeart/2009/3/layout/HorizontalOrganizationChart"/>
+    <dgm:cxn modelId="{FD43B093-1BA2-44A5-8B10-4E712C96DD10}" type="presOf" srcId="{6C4DA155-8243-4072-B293-EC0CBA97AD7C}" destId="{E7F095C9-0EEA-49B6-905E-AC74937B597A}" srcOrd="0" destOrd="0" presId="urn:microsoft.com/office/officeart/2009/3/layout/HorizontalOrganizationChart"/>
+    <dgm:cxn modelId="{211F0B96-D3FD-4748-8EB5-C9E671C9500D}" type="presOf" srcId="{35D396C7-832D-4310-9EFD-0CBA7534B49E}" destId="{15470CCD-2DC4-4446-952E-0EA1F9168293}" srcOrd="0" destOrd="0" presId="urn:microsoft.com/office/officeart/2009/3/layout/HorizontalOrganizationChart"/>
+    <dgm:cxn modelId="{15864D97-D1F2-47BF-9472-004D9D10A728}" type="presOf" srcId="{35D396C7-832D-4310-9EFD-0CBA7534B49E}" destId="{C1FA8641-48D3-43B7-8727-7E323B1B501C}" srcOrd="1" destOrd="0" presId="urn:microsoft.com/office/officeart/2009/3/layout/HorizontalOrganizationChart"/>
+    <dgm:cxn modelId="{3B5AF897-87F6-4AA8-A2AB-6811C6141BF7}" type="presOf" srcId="{A901081C-4D82-49A2-9AF0-FDB6D79D7219}" destId="{554A0E78-C210-4338-8B5C-48DD3D201C5A}" srcOrd="0" destOrd="0" presId="urn:microsoft.com/office/officeart/2009/3/layout/HorizontalOrganizationChart"/>
+    <dgm:cxn modelId="{3C99589B-58BB-4C92-B2D0-A5E935D1A605}" type="presOf" srcId="{4F864848-EEBF-4930-A161-A4A71CAED760}" destId="{26800CCF-2CF7-4C2B-BE5D-668243245262}" srcOrd="0" destOrd="0" presId="urn:microsoft.com/office/officeart/2009/3/layout/HorizontalOrganizationChart"/>
     <dgm:cxn modelId="{3FD8B39C-0640-4384-B97E-203A0CF8F63B}" srcId="{9A4F48F6-BCF9-4165-AF3C-7C7BA667FA27}" destId="{6A27566D-5E2B-4C81-8C09-639ED0AF984B}" srcOrd="4" destOrd="0" parTransId="{C7EBEF87-5076-4181-B19B-8AD6A127BA45}" sibTransId="{FC4E0FFA-63F1-4B37-95CB-4240840490FF}"/>
-    <dgm:cxn modelId="{E4CBFD9C-5BD9-4EA5-A645-4B66FC2C8FB6}" type="presOf" srcId="{503A382B-1D5A-4546-833B-2164E945BC79}" destId="{F4F402F9-353D-4DAF-A0B3-B8E72F14207C}" srcOrd="1" destOrd="0" presId="urn:microsoft.com/office/officeart/2009/3/layout/HorizontalOrganizationChart"/>
-    <dgm:cxn modelId="{0DA0C5A1-CB4E-4ACC-97E5-2853986B8FCD}" type="presOf" srcId="{06F09080-0CCF-47DD-9F14-9B09338FC156}" destId="{213124F1-A749-4DBC-85FE-5AC202AF5919}" srcOrd="1" destOrd="0" presId="urn:microsoft.com/office/officeart/2009/3/layout/HorizontalOrganizationChart"/>
+    <dgm:cxn modelId="{6CA5CA9D-FB00-4A4D-8AD3-D957C425516B}" type="presOf" srcId="{915177A7-D4EB-4AE8-86BD-249E5278466B}" destId="{B1A98113-5456-4FA2-978F-D9BF6518B3D2}" srcOrd="1" destOrd="0" presId="urn:microsoft.com/office/officeart/2009/3/layout/HorizontalOrganizationChart"/>
     <dgm:cxn modelId="{517039A2-AF71-40DF-BA14-7ECAA2110576}" srcId="{35D396C7-832D-4310-9EFD-0CBA7534B49E}" destId="{D81506E7-9321-4CD6-B783-B535E14E9673}" srcOrd="1" destOrd="0" parTransId="{7D9BDDE8-7610-4C76-ACCC-5EF685046CB6}" sibTransId="{33EBB137-5154-41C5-9AB1-B8A70F9210AB}"/>
-    <dgm:cxn modelId="{911720A3-CA50-44CC-A0B4-96C73197EC8C}" type="presOf" srcId="{928CD5CC-816D-4B40-9D14-7256E32D7DFD}" destId="{137A950C-A2C9-4E92-AA44-CCBE0A4712D0}" srcOrd="0" destOrd="0" presId="urn:microsoft.com/office/officeart/2009/3/layout/HorizontalOrganizationChart"/>
-    <dgm:cxn modelId="{FB2F17A5-326E-478F-B7CE-6735741B694D}" type="presOf" srcId="{6C4DA155-8243-4072-B293-EC0CBA97AD7C}" destId="{0AD372FC-0845-44C5-90A0-4A444CE67921}" srcOrd="0" destOrd="0" presId="urn:microsoft.com/office/officeart/2009/3/layout/HorizontalOrganizationChart"/>
-    <dgm:cxn modelId="{CD1646A8-D07F-4367-A4C9-D4CC4A4E962F}" type="presOf" srcId="{1BCF77AA-6B04-4D81-9D59-6F959F70F803}" destId="{FD27C63C-53AB-4EF5-B065-A5CCC6683CBC}" srcOrd="0" destOrd="0" presId="urn:microsoft.com/office/officeart/2009/3/layout/HorizontalOrganizationChart"/>
-    <dgm:cxn modelId="{46C200AC-B944-4955-B340-9F3F43565A59}" type="presOf" srcId="{3B3021F4-1B88-4824-8D12-7496727C461B}" destId="{15203896-4C7D-488D-B574-8B2BB4AE209F}" srcOrd="1" destOrd="0" presId="urn:microsoft.com/office/officeart/2009/3/layout/HorizontalOrganizationChart"/>
+    <dgm:cxn modelId="{9ABB5DA2-9E09-4498-9CBA-E87CEA76D57F}" type="presOf" srcId="{7BFC5FFE-8955-4513-8485-C479782305F9}" destId="{13AAB80B-89C4-451F-A39D-CC96E0BE201C}" srcOrd="1" destOrd="0" presId="urn:microsoft.com/office/officeart/2009/3/layout/HorizontalOrganizationChart"/>
+    <dgm:cxn modelId="{983A92A3-EF29-4954-A755-8D540079A70E}" srcId="{3E6A9241-7ED7-4E1E-9A0C-FCCB8AFE0676}" destId="{2A323462-12B1-44A5-95A4-30F7D5E83E80}" srcOrd="1" destOrd="0" parTransId="{4EAB6B4E-4AE3-4DD0-93A3-0784ECF3F600}" sibTransId="{A6DF5D9B-B3EB-49CE-B0F2-E2BA7CAB9FCB}"/>
+    <dgm:cxn modelId="{E25DCEA5-B6FA-4435-AD7D-BF37FDC43A71}" type="presOf" srcId="{37ECD93D-C6A9-4F2D-B4DF-3F071835E72F}" destId="{9296E3D5-989F-4B79-93AD-BF39EEE4C999}" srcOrd="0" destOrd="0" presId="urn:microsoft.com/office/officeart/2009/3/layout/HorizontalOrganizationChart"/>
+    <dgm:cxn modelId="{F602DDA6-26D3-4AEE-A764-D513467CE7D9}" type="presOf" srcId="{A3638297-C98E-49B2-935E-46CEF1892D42}" destId="{325B629F-ABB1-4EC6-9F54-565334BD27E2}" srcOrd="0" destOrd="0" presId="urn:microsoft.com/office/officeart/2009/3/layout/HorizontalOrganizationChart"/>
+    <dgm:cxn modelId="{8FD882A9-51FB-44B1-9AE0-D20723B5D415}" type="presOf" srcId="{AE4652B3-3398-42D3-A9DE-FBC115B53A0D}" destId="{8C383FB3-4D14-4CBA-A0C6-CFF4847BA3EC}" srcOrd="0" destOrd="0" presId="urn:microsoft.com/office/officeart/2009/3/layout/HorizontalOrganizationChart"/>
+    <dgm:cxn modelId="{4AED2DAA-86D7-4FCF-9DDC-4CD826CBB2D4}" type="presOf" srcId="{B9F7BE26-7120-4362-B07A-512CE293CF66}" destId="{6F9A1A66-336B-4BA9-A352-FD8CB9DA2042}" srcOrd="1" destOrd="0" presId="urn:microsoft.com/office/officeart/2009/3/layout/HorizontalOrganizationChart"/>
+    <dgm:cxn modelId="{275F19AB-FB94-4522-82C4-768168C950F8}" type="presOf" srcId="{9388F973-CD46-4AFC-9454-5895E33035BE}" destId="{5E890DBA-4975-4C75-941F-F0AF649459D5}" srcOrd="0" destOrd="0" presId="urn:microsoft.com/office/officeart/2009/3/layout/HorizontalOrganizationChart"/>
+    <dgm:cxn modelId="{5AA581AB-FA3C-46E1-8FE9-D2ACB9CD0344}" type="presOf" srcId="{D81506E7-9321-4CD6-B783-B535E14E9673}" destId="{4C50E7F0-CBE9-462F-A0E5-5FFE1AE84F4E}" srcOrd="0" destOrd="0" presId="urn:microsoft.com/office/officeart/2009/3/layout/HorizontalOrganizationChart"/>
+    <dgm:cxn modelId="{64831DAD-7865-465F-AF4B-735466EEA3DD}" type="presOf" srcId="{5AFEC8AD-8C3F-4724-85E3-77D8EA592781}" destId="{03A1BB14-9637-40F9-B5B5-81520F48315F}" srcOrd="0" destOrd="0" presId="urn:microsoft.com/office/officeart/2009/3/layout/HorizontalOrganizationChart"/>
+    <dgm:cxn modelId="{9882D6AF-E4FF-4057-AC54-C5C1EFDADCD9}" type="presOf" srcId="{855297F2-A162-4EED-8FE7-B40916947E1F}" destId="{2846335E-09B8-4070-8AE1-F4A8659BD36F}" srcOrd="1" destOrd="0" presId="urn:microsoft.com/office/officeart/2009/3/layout/HorizontalOrganizationChart"/>
     <dgm:cxn modelId="{3CBEDCAF-A3E4-4CE4-8384-220FCA09B055}" type="presOf" srcId="{D5809694-423C-4057-A791-AE12D92AEFEC}" destId="{58CB3A1D-119E-4A17-8333-D813B10F6904}" srcOrd="0" destOrd="0" presId="urn:microsoft.com/office/officeart/2009/3/layout/HorizontalOrganizationChart"/>
-    <dgm:cxn modelId="{479B14B0-2F5F-43B7-89F4-4143CAD3C035}" srcId="{855297F2-A162-4EED-8FE7-B40916947E1F}" destId="{E3AF1FB6-7793-4A4C-A846-4D8E2C079072}" srcOrd="0" destOrd="0" parTransId="{11D63282-5C42-403B-97BA-1AB59BBC2C41}" sibTransId="{8A78BB5C-7073-4BA7-947D-CBB9388C8BC5}"/>
-    <dgm:cxn modelId="{E7BCD7B0-3EBA-4BD7-8EFD-ACE4C5B96D46}" type="presOf" srcId="{D81506E7-9321-4CD6-B783-B535E14E9673}" destId="{86FF5A9C-E5F2-4B8C-83BD-290D4D4AB6AC}" srcOrd="1" destOrd="0" presId="urn:microsoft.com/office/officeart/2009/3/layout/HorizontalOrganizationChart"/>
-    <dgm:cxn modelId="{DA85C0B1-BCD3-42C7-A483-053140734D82}" type="presOf" srcId="{CD4954CC-F1E7-474A-9C14-897F60DC4DA4}" destId="{18E21695-07C6-4F19-99E8-D16CE3157C9B}" srcOrd="1" destOrd="0" presId="urn:microsoft.com/office/officeart/2009/3/layout/HorizontalOrganizationChart"/>
-    <dgm:cxn modelId="{1C9080B2-560B-4BCD-A365-75CEBD6586D8}" type="presOf" srcId="{E92EBC15-E9D8-4B5F-B808-E2AAF4F94361}" destId="{67AC6E1B-A339-4183-A794-6F8370D03B71}" srcOrd="1" destOrd="0" presId="urn:microsoft.com/office/officeart/2009/3/layout/HorizontalOrganizationChart"/>
+    <dgm:cxn modelId="{68668FB0-6D62-4FB7-B120-C1CE7C93395D}" type="presOf" srcId="{9DFAA83C-0ED7-4C5D-908E-2A02657C3D57}" destId="{B8476156-8F22-41DE-9C5C-CDA42789A7C4}" srcOrd="1" destOrd="0" presId="urn:microsoft.com/office/officeart/2009/3/layout/HorizontalOrganizationChart"/>
+    <dgm:cxn modelId="{DE927CB2-6046-4EF1-BCBA-9E93A812AD53}" type="presOf" srcId="{45EF24BF-2957-4968-9E77-C679A38F2BE0}" destId="{CA185CE9-65D3-4677-966D-33B7645E2257}" srcOrd="0" destOrd="0" presId="urn:microsoft.com/office/officeart/2009/3/layout/HorizontalOrganizationChart"/>
     <dgm:cxn modelId="{E191AEB2-9ECC-4400-A418-71A1D0DD24A4}" srcId="{218DF31D-CF8B-459F-887A-8E793F7A6593}" destId="{7BFC5FFE-8955-4513-8485-C479782305F9}" srcOrd="0" destOrd="0" parTransId="{BCC45095-3A8B-4CB4-9AE4-6772688B37EF}" sibTransId="{469377AA-6EAB-4AB7-93B9-E73437C88BD3}"/>
-    <dgm:cxn modelId="{470D6AB5-6326-40DE-A467-CB64CE2F4AE4}" type="presOf" srcId="{9DFAA83C-0ED7-4C5D-908E-2A02657C3D57}" destId="{110F79BE-B8CE-48C2-943A-1C7F5605B400}" srcOrd="0" destOrd="0" presId="urn:microsoft.com/office/officeart/2009/3/layout/HorizontalOrganizationChart"/>
+    <dgm:cxn modelId="{C51E00B3-6BC8-41FA-B11B-9EA9D8FB3307}" type="presOf" srcId="{97A8E0E5-1256-46F5-BDCA-CBF242F3C57E}" destId="{BEB5F23A-260D-4EA4-9C52-D29289AE19DF}" srcOrd="0" destOrd="0" presId="urn:microsoft.com/office/officeart/2009/3/layout/HorizontalOrganizationChart"/>
+    <dgm:cxn modelId="{862130B3-B160-49E6-BE4D-6FED61A2C0C1}" type="presOf" srcId="{5CD82464-BD85-410D-9486-CDF630216295}" destId="{AF9CAAFC-37A2-4187-8C63-BDC2E7B8A2E9}" srcOrd="0" destOrd="0" presId="urn:microsoft.com/office/officeart/2009/3/layout/HorizontalOrganizationChart"/>
+    <dgm:cxn modelId="{28CCA9B5-D7B0-4667-BFEF-DD03B81CFB3F}" type="presOf" srcId="{38A0B2E5-D90D-4428-806C-7CCE3CC93BD2}" destId="{47B80075-7A99-4CC4-8E04-7AE4D94B5491}" srcOrd="1" destOrd="0" presId="urn:microsoft.com/office/officeart/2009/3/layout/HorizontalOrganizationChart"/>
     <dgm:cxn modelId="{E314F4B5-40B5-447A-B126-45A7D8D28ED6}" srcId="{7170B3D7-7385-4271-BFDD-77BDCB4B9D7D}" destId="{6D41F822-3F5E-498D-8427-D9976FC14949}" srcOrd="0" destOrd="0" parTransId="{B777D164-DD56-45DE-9496-BC18234B1690}" sibTransId="{C03D6BDD-B589-42C4-86BE-8B4E25D47F0C}"/>
-    <dgm:cxn modelId="{C484FCB5-C3E5-4AE1-96C8-CD3EEE5E22F9}" type="presOf" srcId="{2637AE1D-117E-454F-9D3F-416D113148BB}" destId="{F4508D2D-CCAA-4B6E-AD9A-E2A8D4EBB379}" srcOrd="0" destOrd="0" presId="urn:microsoft.com/office/officeart/2009/3/layout/HorizontalOrganizationChart"/>
-    <dgm:cxn modelId="{EA0A20B9-7706-4D3B-B258-8F7364AFE779}" type="presOf" srcId="{E13A3907-2F21-472C-B2F1-588C6FECF12C}" destId="{2C4198AB-26E0-4488-A949-AC34DCA3B154}" srcOrd="0" destOrd="0" presId="urn:microsoft.com/office/officeart/2009/3/layout/HorizontalOrganizationChart"/>
-    <dgm:cxn modelId="{D9EC7BB9-9DB6-40F4-82BF-F8A158569AF7}" type="presOf" srcId="{4ECE59B8-536D-4DBD-9298-39EEE1A4E2F2}" destId="{171F98E8-7A93-4667-99EC-A67EE133F035}" srcOrd="0" destOrd="0" presId="urn:microsoft.com/office/officeart/2009/3/layout/HorizontalOrganizationChart"/>
-    <dgm:cxn modelId="{6549D3BB-0639-400C-A8A3-061904E6724A}" type="presOf" srcId="{2053DD24-1A05-4174-B3A2-006AF3B872F4}" destId="{26D6FA4F-D6A5-4878-8B80-5B29006D93F2}" srcOrd="0" destOrd="0" presId="urn:microsoft.com/office/officeart/2009/3/layout/HorizontalOrganizationChart"/>
-    <dgm:cxn modelId="{00B533BD-83A9-4644-B78B-524452BD5A5D}" type="presOf" srcId="{E0F095D0-0CDD-4899-95AE-C151B28DF4D1}" destId="{5ED98B15-1271-4C1B-BD70-D93D404A68CE}" srcOrd="0" destOrd="0" presId="urn:microsoft.com/office/officeart/2009/3/layout/HorizontalOrganizationChart"/>
-    <dgm:cxn modelId="{46E15ABD-6C35-4CBC-A24F-D16416213C91}" type="presOf" srcId="{F7D84224-A973-485F-ADAD-95BF5231A40B}" destId="{B652EFB0-A88E-48A1-836A-A245919707FD}" srcOrd="0" destOrd="0" presId="urn:microsoft.com/office/officeart/2009/3/layout/HorizontalOrganizationChart"/>
-    <dgm:cxn modelId="{EF826DC0-0B7C-45E1-B03F-FFC41BAF8AEE}" type="presOf" srcId="{7BFC5FFE-8955-4513-8485-C479782305F9}" destId="{B509227D-8391-4FEA-8798-380D7D9E41EE}" srcOrd="0" destOrd="0" presId="urn:microsoft.com/office/officeart/2009/3/layout/HorizontalOrganizationChart"/>
-    <dgm:cxn modelId="{E1C898C0-295A-4819-AB09-30C1797AC1C3}" type="presOf" srcId="{23D84297-71D0-47C1-8874-FF344216EAC8}" destId="{8C63EC56-3637-4380-B189-D0B66ADCD3F7}" srcOrd="0" destOrd="0" presId="urn:microsoft.com/office/officeart/2009/3/layout/HorizontalOrganizationChart"/>
-    <dgm:cxn modelId="{3CE795C1-3B44-4014-8D33-6CB1EEEB4FB8}" type="presOf" srcId="{B6EFE756-66AC-4682-AE3E-4E5A980226A5}" destId="{B62982CB-6890-46C2-886C-0FC435E2E88A}" srcOrd="0" destOrd="0" presId="urn:microsoft.com/office/officeart/2009/3/layout/HorizontalOrganizationChart"/>
+    <dgm:cxn modelId="{C7A992B7-A2A5-4554-BEF6-995687E7C961}" type="presOf" srcId="{CA6200AF-7336-4AB8-A4E9-530BC5027306}" destId="{2CB5E2D1-00D5-4B61-9756-D570A792B6B1}" srcOrd="1" destOrd="0" presId="urn:microsoft.com/office/officeart/2009/3/layout/HorizontalOrganizationChart"/>
+    <dgm:cxn modelId="{F3262CBC-3CE5-4362-8CFB-058FEE1D2988}" type="presOf" srcId="{F7D84224-A973-485F-ADAD-95BF5231A40B}" destId="{B652EFB0-A88E-48A1-836A-A245919707FD}" srcOrd="0" destOrd="0" presId="urn:microsoft.com/office/officeart/2009/3/layout/HorizontalOrganizationChart"/>
+    <dgm:cxn modelId="{9D1BD3BC-40FD-45CC-B7FD-65BA7FF6DA53}" type="presOf" srcId="{BD4CBB34-BFC3-4314-AC58-360CE3F828A3}" destId="{3374B034-7516-421E-BD23-9C0F9E320F00}" srcOrd="1" destOrd="0" presId="urn:microsoft.com/office/officeart/2009/3/layout/HorizontalOrganizationChart"/>
+    <dgm:cxn modelId="{A6CC44BF-B8E0-4DB8-8502-7006D6B12140}" type="presOf" srcId="{4F9DC5B4-E119-4273-B0C6-F44F279BA1CA}" destId="{8A071F50-0936-48EF-AE15-796B92F4F4A2}" srcOrd="0" destOrd="0" presId="urn:microsoft.com/office/officeart/2009/3/layout/HorizontalOrganizationChart"/>
+    <dgm:cxn modelId="{83FBF2BF-D738-4FD7-A175-4850320580AB}" type="presOf" srcId="{2A323462-12B1-44A5-95A4-30F7D5E83E80}" destId="{582577D3-050E-4B41-BF32-01AA487AE0ED}" srcOrd="0" destOrd="0" presId="urn:microsoft.com/office/officeart/2009/3/layout/HorizontalOrganizationChart"/>
+    <dgm:cxn modelId="{04AEC7C0-657E-41D6-B0FC-B1A337ED6A76}" type="presOf" srcId="{B6EFE756-66AC-4682-AE3E-4E5A980226A5}" destId="{3E53AB13-732C-4F83-9B8F-D6D7DB3860B6}" srcOrd="0" destOrd="0" presId="urn:microsoft.com/office/officeart/2009/3/layout/HorizontalOrganizationChart"/>
     <dgm:cxn modelId="{D897B6C1-26D4-4EBF-9545-D4DF4EB294AC}" srcId="{D7660C3C-E08D-431C-8EE1-9AA78C89B4A5}" destId="{CD4954CC-F1E7-474A-9C14-897F60DC4DA4}" srcOrd="1" destOrd="0" parTransId="{45EF24BF-2957-4968-9E77-C679A38F2BE0}" sibTransId="{B9DFB9A1-FCC7-46AA-8558-BC4D60E4B362}"/>
     <dgm:cxn modelId="{760621C2-E86C-4607-A302-CD20979C09E9}" srcId="{C9E721F3-3509-40BA-945D-417CE334E5F2}" destId="{97A8E0E5-1256-46F5-BDCA-CBF242F3C57E}" srcOrd="0" destOrd="0" parTransId="{5CD82464-BD85-410D-9486-CDF630216295}" sibTransId="{F2FF7060-498E-4C33-B37F-3A4AE0EED5E3}"/>
-    <dgm:cxn modelId="{AF3394C4-1CFA-4E46-BFEE-370F3CB40D69}" type="presOf" srcId="{9DFAA83C-0ED7-4C5D-908E-2A02657C3D57}" destId="{B8476156-8F22-41DE-9C5C-CDA42789A7C4}" srcOrd="1" destOrd="0" presId="urn:microsoft.com/office/officeart/2009/3/layout/HorizontalOrganizationChart"/>
-    <dgm:cxn modelId="{F3C15CC5-B1A2-4922-A563-1B1E88CE4216}" type="presOf" srcId="{0C931ACA-CC53-4D97-9D61-C471A807C39D}" destId="{AD980698-3B39-4F03-BC7B-E6CC415D37FF}" srcOrd="0" destOrd="0" presId="urn:microsoft.com/office/officeart/2009/3/layout/HorizontalOrganizationChart"/>
-    <dgm:cxn modelId="{17FA52C7-7A91-42DB-A217-2528E77D37EE}" type="presOf" srcId="{9A4F48F6-BCF9-4165-AF3C-7C7BA667FA27}" destId="{D46F3F0D-30A4-4DDE-884B-BD4A774332AE}" srcOrd="1" destOrd="0" presId="urn:microsoft.com/office/officeart/2009/3/layout/HorizontalOrganizationChart"/>
-    <dgm:cxn modelId="{C88656C7-1465-47F7-B887-69C2D0E17EC9}" type="presOf" srcId="{454A2903-42E9-4AD4-B32C-56480B741CA4}" destId="{0C48BBF9-D61A-49C3-9C4A-9F8E897BC526}" srcOrd="0" destOrd="0" presId="urn:microsoft.com/office/officeart/2009/3/layout/HorizontalOrganizationChart"/>
-    <dgm:cxn modelId="{77FDDBCA-03DD-4A95-96F4-7B9A8ADFB8F4}" type="presOf" srcId="{38A0B2E5-D90D-4428-806C-7CCE3CC93BD2}" destId="{2CFF43AD-E638-48CC-A1A6-213BB3000388}" srcOrd="0" destOrd="0" presId="urn:microsoft.com/office/officeart/2009/3/layout/HorizontalOrganizationChart"/>
-    <dgm:cxn modelId="{DD8B5ECC-CFAA-4473-8AC7-B8620BFB8929}" type="presOf" srcId="{B0A38B96-90FF-402E-A24A-BEF06D54B9B6}" destId="{B53F97DA-CD42-477B-978A-645AB0B3B0D8}" srcOrd="0" destOrd="0" presId="urn:microsoft.com/office/officeart/2009/3/layout/HorizontalOrganizationChart"/>
-    <dgm:cxn modelId="{00659ECF-D8C2-4D9B-A15F-648CBBC00FC8}" type="presOf" srcId="{D7660C3C-E08D-431C-8EE1-9AA78C89B4A5}" destId="{E3458C5F-4332-4439-96AF-FD966B7B137A}" srcOrd="0" destOrd="0" presId="urn:microsoft.com/office/officeart/2009/3/layout/HorizontalOrganizationChart"/>
-    <dgm:cxn modelId="{F7EB54D0-8F39-4150-88B8-2DE2D401553E}" type="presOf" srcId="{E3AF1FB6-7793-4A4C-A846-4D8E2C079072}" destId="{23D4DC71-764D-47BE-982C-F5FC61CA73F7}" srcOrd="1" destOrd="0" presId="urn:microsoft.com/office/officeart/2009/3/layout/HorizontalOrganizationChart"/>
+    <dgm:cxn modelId="{67D49FC7-06BA-46E8-81C2-ED49ED470F83}" type="presOf" srcId="{13719A43-B673-4C88-9D1E-16D752C05E25}" destId="{039EE693-846A-452B-938C-A79863754B50}" srcOrd="1" destOrd="0" presId="urn:microsoft.com/office/officeart/2009/3/layout/HorizontalOrganizationChart"/>
+    <dgm:cxn modelId="{423BC6C7-D534-4600-BF71-230FA9E14697}" type="presOf" srcId="{061809CC-87E0-4E97-84A6-384BF07724D8}" destId="{07CF39E6-9B2B-4A5F-B780-120DD8E62C9B}" srcOrd="0" destOrd="0" presId="urn:microsoft.com/office/officeart/2009/3/layout/HorizontalOrganizationChart"/>
+    <dgm:cxn modelId="{DBF9F3C7-8713-48F8-939E-02FE8C807189}" srcId="{3E6A9241-7ED7-4E1E-9A0C-FCCB8AFE0676}" destId="{AE4652B3-3398-42D3-A9DE-FBC115B53A0D}" srcOrd="0" destOrd="0" parTransId="{03FC0ABC-78B9-4767-8291-52E8792ED142}" sibTransId="{8BC6BC54-3043-424C-91DC-F945F6203B98}"/>
+    <dgm:cxn modelId="{E85E9BCC-1423-463F-A022-B73473935300}" type="presOf" srcId="{06F09080-0CCF-47DD-9F14-9B09338FC156}" destId="{77267FA6-0CDF-4F47-97BA-153747EF1791}" srcOrd="0" destOrd="0" presId="urn:microsoft.com/office/officeart/2009/3/layout/HorizontalOrganizationChart"/>
+    <dgm:cxn modelId="{923AA2CF-E25B-4F56-942F-D7DB4CF22EF0}" type="presOf" srcId="{06F09080-0CCF-47DD-9F14-9B09338FC156}" destId="{213124F1-A749-4DBC-85FE-5AC202AF5919}" srcOrd="1" destOrd="0" presId="urn:microsoft.com/office/officeart/2009/3/layout/HorizontalOrganizationChart"/>
+    <dgm:cxn modelId="{D66976D0-F36B-4CF1-BF84-4CE482A0D354}" type="presOf" srcId="{24C79789-50A6-4247-997A-B75D020D2C6D}" destId="{49F9D926-559F-4648-BFF5-79BEBC70A452}" srcOrd="1" destOrd="0" presId="urn:microsoft.com/office/officeart/2009/3/layout/HorizontalOrganizationChart"/>
+    <dgm:cxn modelId="{90681ED2-3EAC-49B8-95ED-7DF7EFAC3BD8}" type="presOf" srcId="{7F41646D-7809-44F5-B24B-6E191227AD5F}" destId="{418A319B-5CB8-4C1A-929A-A579AE777841}" srcOrd="0" destOrd="0" presId="urn:microsoft.com/office/officeart/2009/3/layout/HorizontalOrganizationChart"/>
     <dgm:cxn modelId="{196D6ED2-D91E-482C-B59B-AD2FEC248E9A}" srcId="{3CBB9B95-F2DE-4200-8B3A-58D04CAEA47D}" destId="{23D84297-71D0-47C1-8874-FF344216EAC8}" srcOrd="1" destOrd="0" parTransId="{C4BC2D65-C06B-4D32-962C-942429050144}" sibTransId="{5E828AE2-BCBB-4D2E-B901-535C4EEBD24B}"/>
-    <dgm:cxn modelId="{F159CDD2-8EC0-4BE1-9D7A-45331742F2A2}" type="presOf" srcId="{11D63282-5C42-403B-97BA-1AB59BBC2C41}" destId="{904226D0-5DE5-4039-A33D-3A3B483D2045}" srcOrd="0" destOrd="0" presId="urn:microsoft.com/office/officeart/2009/3/layout/HorizontalOrganizationChart"/>
-    <dgm:cxn modelId="{BEB180D5-6221-42B6-AB3C-2662BC411331}" type="presOf" srcId="{97A8E0E5-1256-46F5-BDCA-CBF242F3C57E}" destId="{B70E4C0E-1521-4091-B753-26370D64F4FD}" srcOrd="1" destOrd="0" presId="urn:microsoft.com/office/officeart/2009/3/layout/HorizontalOrganizationChart"/>
-    <dgm:cxn modelId="{BE6386D6-AE3E-4F0B-85A1-F180B6F5C202}" type="presOf" srcId="{A3638297-C98E-49B2-935E-46CEF1892D42}" destId="{51F75AAC-642B-48ED-B19B-2EA01A0D0209}" srcOrd="0" destOrd="0" presId="urn:microsoft.com/office/officeart/2009/3/layout/HorizontalOrganizationChart"/>
-    <dgm:cxn modelId="{3A62B7D9-3C40-4560-A73C-D23AD318741D}" srcId="{3B3021F4-1B88-4824-8D12-7496727C461B}" destId="{6C8E784B-F666-494C-B943-E6FE294FAEB1}" srcOrd="1" destOrd="0" parTransId="{7607DCFD-2AEA-4454-AD75-99E4327A6DA2}" sibTransId="{2125BE52-3AA7-429B-8CE3-D4E62C9DFFAC}"/>
-    <dgm:cxn modelId="{DB895BE1-C28C-41E8-B796-757FA9AAE687}" type="presOf" srcId="{9A5D99C4-3A63-4397-B386-EBF9464401C2}" destId="{3AAB2EC9-B2E4-493A-908E-ED4DAFB764DF}" srcOrd="0" destOrd="0" presId="urn:microsoft.com/office/officeart/2009/3/layout/HorizontalOrganizationChart"/>
-    <dgm:cxn modelId="{66707CE1-6D61-42AF-B521-A67EE524ACF9}" type="presOf" srcId="{6A27566D-5E2B-4C81-8C09-639ED0AF984B}" destId="{7E303F30-9711-4703-9E93-53900C059588}" srcOrd="0" destOrd="0" presId="urn:microsoft.com/office/officeart/2009/3/layout/HorizontalOrganizationChart"/>
+    <dgm:cxn modelId="{64D972D2-F918-428C-A5DD-3764FB480B80}" type="presOf" srcId="{D7660C3C-E08D-431C-8EE1-9AA78C89B4A5}" destId="{E3458C5F-4332-4439-96AF-FD966B7B137A}" srcOrd="0" destOrd="0" presId="urn:microsoft.com/office/officeart/2009/3/layout/HorizontalOrganizationChart"/>
+    <dgm:cxn modelId="{858DB3D2-169E-40AE-BCA1-C6201612F4CA}" type="presOf" srcId="{24C79789-50A6-4247-997A-B75D020D2C6D}" destId="{9E916334-F27B-4E86-B949-E7079E77F959}" srcOrd="0" destOrd="0" presId="urn:microsoft.com/office/officeart/2009/3/layout/HorizontalOrganizationChart"/>
+    <dgm:cxn modelId="{6242E6D4-1648-4C83-B536-E0319125103E}" type="presOf" srcId="{764BB32F-0818-4190-8CBA-5BFD6043BFBC}" destId="{313097A2-C9D5-4518-B29A-5B216269D568}" srcOrd="1" destOrd="0" presId="urn:microsoft.com/office/officeart/2009/3/layout/HorizontalOrganizationChart"/>
+    <dgm:cxn modelId="{4A685CD6-FBC9-4127-A0F5-37D3BCE66070}" type="presOf" srcId="{3E6A9241-7ED7-4E1E-9A0C-FCCB8AFE0676}" destId="{8E0DAD77-8259-47D3-8A7C-09406F1139F1}" srcOrd="1" destOrd="0" presId="urn:microsoft.com/office/officeart/2009/3/layout/HorizontalOrganizationChart"/>
+    <dgm:cxn modelId="{8E3770D7-0B35-45E9-B125-163D6B7F46EE}" type="presOf" srcId="{B5BAD76A-7E9A-4668-B9E3-5A85C816283D}" destId="{595CFFA0-B569-4A56-8175-567F57E3E286}" srcOrd="0" destOrd="0" presId="urn:microsoft.com/office/officeart/2009/3/layout/HorizontalOrganizationChart"/>
+    <dgm:cxn modelId="{F8341BD8-94E9-40AC-88B1-ACB42E4DEF42}" type="presOf" srcId="{A874BA0B-B7EF-479E-B1B8-17FB9E8D2868}" destId="{B8837C6A-8105-408D-9A2C-4FAA52810339}" srcOrd="0" destOrd="0" presId="urn:microsoft.com/office/officeart/2009/3/layout/HorizontalOrganizationChart"/>
+    <dgm:cxn modelId="{15DB7FD8-11C6-49D8-A70C-8DD53B254F44}" type="presOf" srcId="{A63AFC23-093E-44C6-B267-3891CF123A84}" destId="{3BF77DC6-A893-4A65-9C1E-D38F5E103AA5}" srcOrd="0" destOrd="0" presId="urn:microsoft.com/office/officeart/2009/3/layout/HorizontalOrganizationChart"/>
+    <dgm:cxn modelId="{F13991D9-D545-4270-8C27-75BEF434E4D6}" type="presOf" srcId="{95FA36E0-4680-4632-B27E-091BE020210A}" destId="{C1341CAE-26B4-413C-B659-B4133610AE2C}" srcOrd="0" destOrd="0" presId="urn:microsoft.com/office/officeart/2009/3/layout/HorizontalOrganizationChart"/>
+    <dgm:cxn modelId="{3A62B7D9-3C40-4560-A73C-D23AD318741D}" srcId="{CA6200AF-7336-4AB8-A4E9-530BC5027306}" destId="{6C8E784B-F666-494C-B943-E6FE294FAEB1}" srcOrd="1" destOrd="0" parTransId="{7607DCFD-2AEA-4454-AD75-99E4327A6DA2}" sibTransId="{2125BE52-3AA7-429B-8CE3-D4E62C9DFFAC}"/>
+    <dgm:cxn modelId="{7C2866DA-4492-4CCF-A299-C5835C143C87}" type="presOf" srcId="{218DF31D-CF8B-459F-887A-8E793F7A6593}" destId="{1F3D57A6-91D2-48AA-B105-E07306DABA2F}" srcOrd="1" destOrd="0" presId="urn:microsoft.com/office/officeart/2009/3/layout/HorizontalOrganizationChart"/>
+    <dgm:cxn modelId="{C2967EDA-9653-4F23-B3D4-61987FDA9C84}" type="presOf" srcId="{1BCF77AA-6B04-4D81-9D59-6F959F70F803}" destId="{FD27C63C-53AB-4EF5-B065-A5CCC6683CBC}" srcOrd="0" destOrd="0" presId="urn:microsoft.com/office/officeart/2009/3/layout/HorizontalOrganizationChart"/>
+    <dgm:cxn modelId="{49F000DB-4F28-4651-9617-7D64486B96ED}" type="presOf" srcId="{7607DCFD-2AEA-4454-AD75-99E4327A6DA2}" destId="{E72137B5-59A0-4482-82E0-2CA84074B9ED}" srcOrd="0" destOrd="0" presId="urn:microsoft.com/office/officeart/2009/3/layout/HorizontalOrganizationChart"/>
+    <dgm:cxn modelId="{1A151DDC-C358-45AA-8292-1D842FFCB969}" type="presOf" srcId="{6D41F822-3F5E-498D-8427-D9976FC14949}" destId="{90D35EA2-A25D-449A-8C0B-91C81C67A50C}" srcOrd="0" destOrd="0" presId="urn:microsoft.com/office/officeart/2009/3/layout/HorizontalOrganizationChart"/>
+    <dgm:cxn modelId="{C779CFDC-74B7-4D05-AE18-02800D090B81}" type="presOf" srcId="{23D84297-71D0-47C1-8874-FF344216EAC8}" destId="{AC252788-612D-4E9E-AE60-64A72A6D6716}" srcOrd="1" destOrd="0" presId="urn:microsoft.com/office/officeart/2009/3/layout/HorizontalOrganizationChart"/>
+    <dgm:cxn modelId="{C836C7E1-AC04-46B2-ADA8-E6B5747CBABE}" type="presOf" srcId="{454A2903-42E9-4AD4-B32C-56480B741CA4}" destId="{2086A9C7-9135-4192-911C-9FD307A3662E}" srcOrd="0" destOrd="0" presId="urn:microsoft.com/office/officeart/2009/3/layout/HorizontalOrganizationChart"/>
     <dgm:cxn modelId="{2C51EDE1-6CE8-4630-BABC-D0F8A19FB7D7}" srcId="{C9E721F3-3509-40BA-945D-417CE334E5F2}" destId="{35D396C7-832D-4310-9EFD-0CBA7534B49E}" srcOrd="1" destOrd="0" parTransId="{2053DD24-1A05-4174-B3A2-006AF3B872F4}" sibTransId="{0D904290-0D38-4707-88C1-2BE985B0DCCE}"/>
-    <dgm:cxn modelId="{A015CFE3-8D7A-47C7-A649-92ADDAAC4F57}" type="presOf" srcId="{BCC45095-3A8B-4CB4-9AE4-6772688B37EF}" destId="{DF5FB862-76EA-4FBD-97DB-876FA1B4C7A5}" srcOrd="0" destOrd="0" presId="urn:microsoft.com/office/officeart/2009/3/layout/HorizontalOrganizationChart"/>
-    <dgm:cxn modelId="{545AA9E8-7380-4B36-93B9-67A8FF3CAA69}" type="presOf" srcId="{4ECE59B8-536D-4DBD-9298-39EEE1A4E2F2}" destId="{B4B0D416-48DF-4327-B6CB-95B60821634B}" srcOrd="1" destOrd="0" presId="urn:microsoft.com/office/officeart/2009/3/layout/HorizontalOrganizationChart"/>
-    <dgm:cxn modelId="{2C1374EA-220A-4E4F-B86A-BFB07851CD91}" type="presOf" srcId="{7F41646D-7809-44F5-B24B-6E191227AD5F}" destId="{0F92594C-0E70-43C7-B781-9ACAC2BFB8E4}" srcOrd="0" destOrd="0" presId="urn:microsoft.com/office/officeart/2009/3/layout/HorizontalOrganizationChart"/>
-    <dgm:cxn modelId="{BCE029ED-898E-49BE-B72A-C48B1DEDE1C0}" type="presOf" srcId="{320AF489-F490-4FB9-A435-9E69697CB6A1}" destId="{D13F91A7-7FA0-4602-8F83-D5787EBFEB98}" srcOrd="0" destOrd="0" presId="urn:microsoft.com/office/officeart/2009/3/layout/HorizontalOrganizationChart"/>
-    <dgm:cxn modelId="{C85A03EE-5338-4053-8F41-D62CC54E3549}" type="presOf" srcId="{764BB32F-0818-4190-8CBA-5BFD6043BFBC}" destId="{313097A2-C9D5-4518-B29A-5B216269D568}" srcOrd="1" destOrd="0" presId="urn:microsoft.com/office/officeart/2009/3/layout/HorizontalOrganizationChart"/>
-    <dgm:cxn modelId="{30CCBCEE-6C5C-42DE-B1C3-C53210DE7090}" srcId="{3B3021F4-1B88-4824-8D12-7496727C461B}" destId="{C9E721F3-3509-40BA-945D-417CE334E5F2}" srcOrd="0" destOrd="0" parTransId="{ACF9E546-FC16-43CF-809C-930B68C88DB1}" sibTransId="{FEEFCB98-559B-4F6D-9142-483778425DB0}"/>
-    <dgm:cxn modelId="{DD96F1EE-74A5-4137-A105-20003B9B3DC1}" type="presOf" srcId="{455048BF-88A9-42EC-8893-BB00D9AEA4E4}" destId="{C2E4F5E3-2A0B-42BD-8BFA-8E7CDCB5A754}" srcOrd="0" destOrd="0" presId="urn:microsoft.com/office/officeart/2009/3/layout/HorizontalOrganizationChart"/>
-    <dgm:cxn modelId="{5C90DCEF-5ACC-4D4E-9056-410988D89BA0}" type="presOf" srcId="{C9E721F3-3509-40BA-945D-417CE334E5F2}" destId="{490BDFA8-D452-4BE4-9F81-245774E0D158}" srcOrd="0" destOrd="0" presId="urn:microsoft.com/office/officeart/2009/3/layout/HorizontalOrganizationChart"/>
-    <dgm:cxn modelId="{1A18F2F1-5300-4DDC-ACB6-78382C818A45}" type="presOf" srcId="{04012DFC-77A8-4A46-B858-7332CB8C84A1}" destId="{CA242517-F53F-48F5-B2BD-3695E5DF74DD}" srcOrd="0" destOrd="0" presId="urn:microsoft.com/office/officeart/2009/3/layout/HorizontalOrganizationChart"/>
-    <dgm:cxn modelId="{8A8C3FF3-A0C1-4EEA-98E5-737EA19B275E}" type="presOf" srcId="{7170B3D7-7385-4271-BFDD-77BDCB4B9D7D}" destId="{3D02A4C7-D3F8-46A9-BF13-B91E1207C679}" srcOrd="0" destOrd="0" presId="urn:microsoft.com/office/officeart/2009/3/layout/HorizontalOrganizationChart"/>
-    <dgm:cxn modelId="{A52C6BF4-361F-4DAA-A860-69FA8C88171F}" type="presOf" srcId="{503A382B-1D5A-4546-833B-2164E945BC79}" destId="{B7E87C89-F2A3-40BE-A158-9348331D318D}" srcOrd="0" destOrd="0" presId="urn:microsoft.com/office/officeart/2009/3/layout/HorizontalOrganizationChart"/>
-    <dgm:cxn modelId="{AD4C48F6-D1BF-454B-9E1C-9111D36AC05F}" srcId="{9A4F48F6-BCF9-4165-AF3C-7C7BA667FA27}" destId="{855297F2-A162-4EED-8FE7-B40916947E1F}" srcOrd="1" destOrd="0" parTransId="{83D18EB3-F613-46C2-86CF-CF849473A283}" sibTransId="{B3957AC8-05AC-4C73-A0A8-40D5AE41615E}"/>
-    <dgm:cxn modelId="{7048C3F6-F911-4F22-80A5-5E8586894B9A}" type="presOf" srcId="{9A4F48F6-BCF9-4165-AF3C-7C7BA667FA27}" destId="{BAE31ACF-752D-4EA8-8B6E-54DBD06D21AE}" srcOrd="0" destOrd="0" presId="urn:microsoft.com/office/officeart/2009/3/layout/HorizontalOrganizationChart"/>
-    <dgm:cxn modelId="{423FA7FB-73E0-4BCD-A13F-A99D2D9F6154}" srcId="{9DFAA83C-0ED7-4C5D-908E-2A02657C3D57}" destId="{503A382B-1D5A-4546-833B-2164E945BC79}" srcOrd="3" destOrd="0" parTransId="{A3638297-C98E-49B2-935E-46CEF1892D42}" sibTransId="{1D474A4F-185C-4214-81CF-5568DF079C10}"/>
-    <dgm:cxn modelId="{94709FFC-0987-4299-88DF-D5D4835DA08F}" type="presOf" srcId="{F7D84224-A973-485F-ADAD-95BF5231A40B}" destId="{DC81B629-CD82-4B25-9F47-C4E4D420D1AE}" srcOrd="1" destOrd="0" presId="urn:microsoft.com/office/officeart/2009/3/layout/HorizontalOrganizationChart"/>
-    <dgm:cxn modelId="{B1D3A3FD-088F-40F9-9B70-055A3F204E6B}" type="presOf" srcId="{E92EBC15-E9D8-4B5F-B808-E2AAF4F94361}" destId="{7EEBE634-507C-452D-8F74-93F7DA14811D}" srcOrd="0" destOrd="0" presId="urn:microsoft.com/office/officeart/2009/3/layout/HorizontalOrganizationChart"/>
-    <dgm:cxn modelId="{2BCC2BFE-860D-4265-965F-546BC830656E}" type="presOf" srcId="{4F864848-EEBF-4930-A161-A4A71CAED760}" destId="{422596F1-C75B-45F9-BFD0-9951F8F32EFB}" srcOrd="0" destOrd="0" presId="urn:microsoft.com/office/officeart/2009/3/layout/HorizontalOrganizationChart"/>
-    <dgm:cxn modelId="{64512EFF-FE16-4811-99ED-A308AC4F74E3}" srcId="{9A4F48F6-BCF9-4165-AF3C-7C7BA667FA27}" destId="{13719A43-B673-4C88-9D1E-16D752C05E25}" srcOrd="2" destOrd="0" parTransId="{A874BA0B-B7EF-479E-B1B8-17FB9E8D2868}" sibTransId="{212A347A-5399-4312-9400-C1BF5604C0A3}"/>
+    <dgm:cxn modelId="{36E676E2-5DC9-489E-8E77-AE0CE63D0E98}" type="presOf" srcId="{7170B3D7-7385-4271-BFDD-77BDCB4B9D7D}" destId="{75AB063C-95C2-4D08-BD75-E990F011A243}" srcOrd="1" destOrd="0" presId="urn:microsoft.com/office/officeart/2009/3/layout/HorizontalOrganizationChart"/>
+    <dgm:cxn modelId="{A53FD4E2-8707-469A-ADCB-40DE617D1E66}" type="presOf" srcId="{ACF9E546-FC16-43CF-809C-930B68C88DB1}" destId="{1BDA3CD5-F552-4A8E-AA99-3DA9469CB538}" srcOrd="0" destOrd="0" presId="urn:microsoft.com/office/officeart/2009/3/layout/HorizontalOrganizationChart"/>
+    <dgm:cxn modelId="{686A47E5-A54C-46A2-89A8-1C206315CC30}" type="presOf" srcId="{6A27566D-5E2B-4C81-8C09-639ED0AF984B}" destId="{7E303F30-9711-4703-9E93-53900C059588}" srcOrd="0" destOrd="0" presId="urn:microsoft.com/office/officeart/2009/3/layout/HorizontalOrganizationChart"/>
+    <dgm:cxn modelId="{4312D3E6-C624-4B8E-AE85-99B1376016E0}" type="presOf" srcId="{7170B3D7-7385-4271-BFDD-77BDCB4B9D7D}" destId="{3D02A4C7-D3F8-46A9-BF13-B91E1207C679}" srcOrd="0" destOrd="0" presId="urn:microsoft.com/office/officeart/2009/3/layout/HorizontalOrganizationChart"/>
+    <dgm:cxn modelId="{2E67DEE8-C969-404E-9443-B1550685DECE}" type="presOf" srcId="{BCF3A011-CCE5-4332-B9BE-4DBB4EB90D3E}" destId="{93F93993-47F1-428E-9F9E-450A331F894E}" srcOrd="0" destOrd="0" presId="urn:microsoft.com/office/officeart/2009/3/layout/HorizontalOrganizationChart"/>
+    <dgm:cxn modelId="{11DCFEE9-7CF2-4534-AE53-E99754A5C6C4}" type="presOf" srcId="{471AAB30-6948-4AC5-A872-0315651955DF}" destId="{5613D8DC-8394-4EB2-BEC0-4978BB2F3DA3}" srcOrd="0" destOrd="0" presId="urn:microsoft.com/office/officeart/2009/3/layout/HorizontalOrganizationChart"/>
+    <dgm:cxn modelId="{30C0C9EA-6F50-4C0A-8241-2267EAE25A62}" type="presOf" srcId="{E0F095D0-0CDD-4899-95AE-C151B28DF4D1}" destId="{32F9F6CA-A9C9-4EC0-B487-8A6B1DDEE396}" srcOrd="1" destOrd="0" presId="urn:microsoft.com/office/officeart/2009/3/layout/HorizontalOrganizationChart"/>
+    <dgm:cxn modelId="{30CCBCEE-6C5C-42DE-B1C3-C53210DE7090}" srcId="{CA6200AF-7336-4AB8-A4E9-530BC5027306}" destId="{C9E721F3-3509-40BA-945D-417CE334E5F2}" srcOrd="0" destOrd="0" parTransId="{ACF9E546-FC16-43CF-809C-930B68C88DB1}" sibTransId="{FEEFCB98-559B-4F6D-9142-483778425DB0}"/>
+    <dgm:cxn modelId="{5F71C4EE-DE86-4D3D-A586-A7EF0D7E8D25}" type="presOf" srcId="{855297F2-A162-4EED-8FE7-B40916947E1F}" destId="{E9A97367-2565-4CA7-B81D-4E147657D835}" srcOrd="0" destOrd="0" presId="urn:microsoft.com/office/officeart/2009/3/layout/HorizontalOrganizationChart"/>
+    <dgm:cxn modelId="{B64D05EF-FB2D-4372-977C-DE53C9B0C8FE}" type="presOf" srcId="{320AF489-F490-4FB9-A435-9E69697CB6A1}" destId="{4B5CDAF5-A7FE-436E-9DA3-25A539D89D1F}" srcOrd="0" destOrd="0" presId="urn:microsoft.com/office/officeart/2009/3/layout/HorizontalOrganizationChart"/>
+    <dgm:cxn modelId="{526800F2-737C-4995-9ADB-A89BFCE175C2}" type="presOf" srcId="{B9F7BE26-7120-4362-B07A-512CE293CF66}" destId="{DDF5EC19-41AE-4BDE-81B3-DB61285BD74A}" srcOrd="0" destOrd="0" presId="urn:microsoft.com/office/officeart/2009/3/layout/HorizontalOrganizationChart"/>
+    <dgm:cxn modelId="{7F8A03F2-7EA5-4C71-A334-A861E289C53A}" type="presOf" srcId="{6D92348B-BF22-4F09-BD16-E4E9FEADFB32}" destId="{CF184D97-6870-475F-82DD-C951C974B444}" srcOrd="0" destOrd="0" presId="urn:microsoft.com/office/officeart/2009/3/layout/HorizontalOrganizationChart"/>
+    <dgm:cxn modelId="{80EFA3F4-6790-452A-9BF5-C5D779877A64}" type="presOf" srcId="{C499CC0F-4E7A-4FEC-97EE-0BDE6BB4004A}" destId="{3FD13D51-28CB-4ACA-8CF5-784F6B0C3075}" srcOrd="1" destOrd="0" presId="urn:microsoft.com/office/officeart/2009/3/layout/HorizontalOrganizationChart"/>
+    <dgm:cxn modelId="{AD4C48F6-D1BF-454B-9E1C-9111D36AC05F}" srcId="{9A4F48F6-BCF9-4165-AF3C-7C7BA667FA27}" destId="{855297F2-A162-4EED-8FE7-B40916947E1F}" srcOrd="2" destOrd="0" parTransId="{83D18EB3-F613-46C2-86CF-CF849473A283}" sibTransId="{B3957AC8-05AC-4C73-A0A8-40D5AE41615E}"/>
+    <dgm:cxn modelId="{E87AAAF9-0B13-48F9-BE0F-7BA3B308A3C2}" type="presOf" srcId="{C3FB077C-2462-498E-B844-9538FDE898FE}" destId="{E35E075B-61F2-41BC-BC2A-69356E0D43EE}" srcOrd="0" destOrd="0" presId="urn:microsoft.com/office/officeart/2009/3/layout/HorizontalOrganizationChart"/>
+    <dgm:cxn modelId="{DA0883FA-D7EC-41F6-8FC5-923101C9BE62}" type="presOf" srcId="{73528B28-3862-4C56-BB94-20BFCA4D977C}" destId="{E142E4F7-A4D2-449F-AA7F-C04C088A3C1F}" srcOrd="0" destOrd="0" presId="urn:microsoft.com/office/officeart/2009/3/layout/HorizontalOrganizationChart"/>
+    <dgm:cxn modelId="{7E6A30FB-B133-4CA1-B077-25F8067ACA84}" type="presOf" srcId="{9AC9B081-25C5-4E83-B9FC-4EE1220C42CC}" destId="{4F157AFE-1A3E-4945-AFFE-3FBFDF773F45}" srcOrd="0" destOrd="0" presId="urn:microsoft.com/office/officeart/2009/3/layout/HorizontalOrganizationChart"/>
+    <dgm:cxn modelId="{423FA7FB-73E0-4BCD-A13F-A99D2D9F6154}" srcId="{E0F095D0-0CDD-4899-95AE-C151B28DF4D1}" destId="{503A382B-1D5A-4546-833B-2164E945BC79}" srcOrd="3" destOrd="0" parTransId="{A3638297-C98E-49B2-935E-46CEF1892D42}" sibTransId="{1D474A4F-185C-4214-81CF-5568DF079C10}"/>
+    <dgm:cxn modelId="{298FB6FD-6372-4943-BE8E-8023D8A2C70C}" type="presOf" srcId="{6C8E784B-F666-494C-B943-E6FE294FAEB1}" destId="{8700B5FB-1AEC-447F-A85A-B23DFECB41F1}" srcOrd="1" destOrd="0" presId="urn:microsoft.com/office/officeart/2009/3/layout/HorizontalOrganizationChart"/>
+    <dgm:cxn modelId="{A4A279FE-988A-4BA7-87C8-1954FFD9F6F8}" type="presOf" srcId="{F7D84224-A973-485F-ADAD-95BF5231A40B}" destId="{DC81B629-CD82-4B25-9F47-C4E4D420D1AE}" srcOrd="1" destOrd="0" presId="urn:microsoft.com/office/officeart/2009/3/layout/HorizontalOrganizationChart"/>
+    <dgm:cxn modelId="{64512EFF-FE16-4811-99ED-A308AC4F74E3}" srcId="{9A4F48F6-BCF9-4165-AF3C-7C7BA667FA27}" destId="{13719A43-B673-4C88-9D1E-16D752C05E25}" srcOrd="3" destOrd="0" parTransId="{A874BA0B-B7EF-479E-B1B8-17FB9E8D2868}" sibTransId="{212A347A-5399-4312-9400-C1BF5604C0A3}"/>
+    <dgm:cxn modelId="{074691FF-3BDB-4A1F-AC59-7D56E1497EFC}" type="presOf" srcId="{CA6200AF-7336-4AB8-A4E9-530BC5027306}" destId="{F727FD69-DA36-400A-9A17-E435D30B6294}" srcOrd="0" destOrd="0" presId="urn:microsoft.com/office/officeart/2009/3/layout/HorizontalOrganizationChart"/>
     <dgm:cxn modelId="{360BAAFF-63FD-43F2-9802-8A20EFFEA078}" srcId="{C9E721F3-3509-40BA-945D-417CE334E5F2}" destId="{73528B28-3862-4C56-BB94-20BFCA4D977C}" srcOrd="2" destOrd="0" parTransId="{320AF489-F490-4FB9-A435-9E69697CB6A1}" sibTransId="{D5F06BC4-1238-41A8-9412-D18B338823BA}"/>
-    <dgm:cxn modelId="{2D84D5FF-4628-40FD-BC86-A836DF0A3B1C}" type="presOf" srcId="{6187C6C3-B996-4ED1-9E29-1993D45E2169}" destId="{FEF5E04A-D12E-4CCE-A14B-A308CB2E3CFB}" srcOrd="0" destOrd="0" presId="urn:microsoft.com/office/officeart/2009/3/layout/HorizontalOrganizationChart"/>
-    <dgm:cxn modelId="{D0F0AE30-B487-482D-958C-B05B62F8E75C}" type="presParOf" srcId="{58CB3A1D-119E-4A17-8333-D813B10F6904}" destId="{B353C52D-BACF-435C-8EB5-9A8E19D70CDB}" srcOrd="0" destOrd="0" presId="urn:microsoft.com/office/officeart/2009/3/layout/HorizontalOrganizationChart"/>
-    <dgm:cxn modelId="{7EF405FC-8C87-4B48-B62C-4FF5CD59F686}" type="presParOf" srcId="{B353C52D-BACF-435C-8EB5-9A8E19D70CDB}" destId="{0F0BA860-8E2C-436A-9AD6-9C25C962289A}" srcOrd="0" destOrd="0" presId="urn:microsoft.com/office/officeart/2009/3/layout/HorizontalOrganizationChart"/>
-    <dgm:cxn modelId="{11840A0C-EF67-46C2-ACD1-FEF486D5E605}" type="presParOf" srcId="{0F0BA860-8E2C-436A-9AD6-9C25C962289A}" destId="{70046D02-65D6-40DB-ACBF-E73D76169B62}" srcOrd="0" destOrd="0" presId="urn:microsoft.com/office/officeart/2009/3/layout/HorizontalOrganizationChart"/>
-    <dgm:cxn modelId="{AE83E9A2-10BF-4970-B906-462B1ED6EF95}" type="presParOf" srcId="{0F0BA860-8E2C-436A-9AD6-9C25C962289A}" destId="{1E04B9EB-E6E0-4CAA-B858-CAD2D06C5A89}" srcOrd="1" destOrd="0" presId="urn:microsoft.com/office/officeart/2009/3/layout/HorizontalOrganizationChart"/>
-    <dgm:cxn modelId="{574F4F05-17C8-47D7-A280-19605D376DA6}" type="presParOf" srcId="{B353C52D-BACF-435C-8EB5-9A8E19D70CDB}" destId="{C516F576-9EA6-4A3E-BB9C-8700E1875F5A}" srcOrd="1" destOrd="0" presId="urn:microsoft.com/office/officeart/2009/3/layout/HorizontalOrganizationChart"/>
-    <dgm:cxn modelId="{2F3AB473-AB9D-4316-B3BA-5D61C91D9F78}" type="presParOf" srcId="{C516F576-9EA6-4A3E-BB9C-8700E1875F5A}" destId="{3AAB2EC9-B2E4-493A-908E-ED4DAFB764DF}" srcOrd="0" destOrd="0" presId="urn:microsoft.com/office/officeart/2009/3/layout/HorizontalOrganizationChart"/>
-    <dgm:cxn modelId="{720866D7-D3E8-437E-967A-A3754498ED35}" type="presParOf" srcId="{C516F576-9EA6-4A3E-BB9C-8700E1875F5A}" destId="{297A1475-871F-4B02-9E8C-FA3D011634A1}" srcOrd="1" destOrd="0" presId="urn:microsoft.com/office/officeart/2009/3/layout/HorizontalOrganizationChart"/>
-    <dgm:cxn modelId="{D42EC87A-FCA7-4936-8A06-C8C4E442FA25}" type="presParOf" srcId="{297A1475-871F-4B02-9E8C-FA3D011634A1}" destId="{E0F525B7-9159-4C99-B924-C6F3E9886623}" srcOrd="0" destOrd="0" presId="urn:microsoft.com/office/officeart/2009/3/layout/HorizontalOrganizationChart"/>
-    <dgm:cxn modelId="{6162D0B5-98E5-4D73-A38E-059226715AAD}" type="presParOf" srcId="{E0F525B7-9159-4C99-B924-C6F3E9886623}" destId="{BAE31ACF-752D-4EA8-8B6E-54DBD06D21AE}" srcOrd="0" destOrd="0" presId="urn:microsoft.com/office/officeart/2009/3/layout/HorizontalOrganizationChart"/>
-    <dgm:cxn modelId="{3D8A2806-AAB6-4565-A7DF-14AB0D15596A}" type="presParOf" srcId="{E0F525B7-9159-4C99-B924-C6F3E9886623}" destId="{D46F3F0D-30A4-4DDE-884B-BD4A774332AE}" srcOrd="1" destOrd="0" presId="urn:microsoft.com/office/officeart/2009/3/layout/HorizontalOrganizationChart"/>
-    <dgm:cxn modelId="{E3C34D93-435B-4E1F-A481-44375DDA5BCA}" type="presParOf" srcId="{297A1475-871F-4B02-9E8C-FA3D011634A1}" destId="{6322132C-78CD-43CA-BDB1-15934FC6847D}" srcOrd="1" destOrd="0" presId="urn:microsoft.com/office/officeart/2009/3/layout/HorizontalOrganizationChart"/>
-    <dgm:cxn modelId="{475E9457-566A-4EF4-B7DE-E686001605CA}" type="presParOf" srcId="{6322132C-78CD-43CA-BDB1-15934FC6847D}" destId="{0AD372FC-0845-44C5-90A0-4A444CE67921}" srcOrd="0" destOrd="0" presId="urn:microsoft.com/office/officeart/2009/3/layout/HorizontalOrganizationChart"/>
-    <dgm:cxn modelId="{D837FA63-E69C-4B0F-9AB0-18EF5AFF2078}" type="presParOf" srcId="{6322132C-78CD-43CA-BDB1-15934FC6847D}" destId="{2E752132-E630-4632-9600-9B043BD9E414}" srcOrd="1" destOrd="0" presId="urn:microsoft.com/office/officeart/2009/3/layout/HorizontalOrganizationChart"/>
-    <dgm:cxn modelId="{740374AE-188A-49FD-B614-0F30BAF4CF31}" type="presParOf" srcId="{2E752132-E630-4632-9600-9B043BD9E414}" destId="{9118CF5F-B9CB-4640-BAA2-6FDCB656E312}" srcOrd="0" destOrd="0" presId="urn:microsoft.com/office/officeart/2009/3/layout/HorizontalOrganizationChart"/>
-    <dgm:cxn modelId="{18B3C156-31D6-4E8F-B6E7-5009739C3E76}" type="presParOf" srcId="{9118CF5F-B9CB-4640-BAA2-6FDCB656E312}" destId="{171F98E8-7A93-4667-99EC-A67EE133F035}" srcOrd="0" destOrd="0" presId="urn:microsoft.com/office/officeart/2009/3/layout/HorizontalOrganizationChart"/>
-    <dgm:cxn modelId="{29184962-0015-45C3-A3C8-65FFAD8CC74E}" type="presParOf" srcId="{9118CF5F-B9CB-4640-BAA2-6FDCB656E312}" destId="{B4B0D416-48DF-4327-B6CB-95B60821634B}" srcOrd="1" destOrd="0" presId="urn:microsoft.com/office/officeart/2009/3/layout/HorizontalOrganizationChart"/>
-    <dgm:cxn modelId="{0A6D5094-8EB4-4253-8F5C-399D2E4839B7}" type="presParOf" srcId="{2E752132-E630-4632-9600-9B043BD9E414}" destId="{860F5D21-83EC-4D1B-83FE-010E6AAAD6E1}" srcOrd="1" destOrd="0" presId="urn:microsoft.com/office/officeart/2009/3/layout/HorizontalOrganizationChart"/>
-    <dgm:cxn modelId="{4ED62B3A-FBDF-463A-BD74-E5002F0C21AC}" type="presParOf" srcId="{860F5D21-83EC-4D1B-83FE-010E6AAAD6E1}" destId="{0C48BBF9-D61A-49C3-9C4A-9F8E897BC526}" srcOrd="0" destOrd="0" presId="urn:microsoft.com/office/officeart/2009/3/layout/HorizontalOrganizationChart"/>
-    <dgm:cxn modelId="{8CB81970-6D3B-4306-9301-9F5A8FC3267A}" type="presParOf" srcId="{860F5D21-83EC-4D1B-83FE-010E6AAAD6E1}" destId="{68B35679-26B2-422F-8E58-AD1E0E71C97A}" srcOrd="1" destOrd="0" presId="urn:microsoft.com/office/officeart/2009/3/layout/HorizontalOrganizationChart"/>
-    <dgm:cxn modelId="{050838AD-A28C-4638-9DAA-DB3FDCB2E8D5}" type="presParOf" srcId="{68B35679-26B2-422F-8E58-AD1E0E71C97A}" destId="{283CF7F0-2C2A-4996-86E8-B99611999D67}" srcOrd="0" destOrd="0" presId="urn:microsoft.com/office/officeart/2009/3/layout/HorizontalOrganizationChart"/>
-    <dgm:cxn modelId="{A6F722E6-9540-48C8-8EBA-1CDE9960A38D}" type="presParOf" srcId="{283CF7F0-2C2A-4996-86E8-B99611999D67}" destId="{4F157AFE-1A3E-4945-AFFE-3FBFDF773F45}" srcOrd="0" destOrd="0" presId="urn:microsoft.com/office/officeart/2009/3/layout/HorizontalOrganizationChart"/>
-    <dgm:cxn modelId="{E4038A5D-84F0-4E65-BD43-28BEFE74C2A4}" type="presParOf" srcId="{283CF7F0-2C2A-4996-86E8-B99611999D67}" destId="{32B448BD-E161-46C8-A1F6-88A373738118}" srcOrd="1" destOrd="0" presId="urn:microsoft.com/office/officeart/2009/3/layout/HorizontalOrganizationChart"/>
-    <dgm:cxn modelId="{793DD8D0-D22B-43A3-96B2-6A677F04E55B}" type="presParOf" srcId="{68B35679-26B2-422F-8E58-AD1E0E71C97A}" destId="{E336B98F-281B-4A8A-AE13-8063387C03E3}" srcOrd="1" destOrd="0" presId="urn:microsoft.com/office/officeart/2009/3/layout/HorizontalOrganizationChart"/>
-    <dgm:cxn modelId="{22B30E04-52B2-4E30-91D4-BE11C2FB4CA9}" type="presParOf" srcId="{68B35679-26B2-422F-8E58-AD1E0E71C97A}" destId="{38ADAED9-8891-4C7D-8154-C0E5F1C45FFB}" srcOrd="2" destOrd="0" presId="urn:microsoft.com/office/officeart/2009/3/layout/HorizontalOrganizationChart"/>
-    <dgm:cxn modelId="{28EF8893-5A72-4777-A41B-2A4339F2C1BD}" type="presParOf" srcId="{860F5D21-83EC-4D1B-83FE-010E6AAAD6E1}" destId="{FEF5E04A-D12E-4CCE-A14B-A308CB2E3CFB}" srcOrd="2" destOrd="0" presId="urn:microsoft.com/office/officeart/2009/3/layout/HorizontalOrganizationChart"/>
-    <dgm:cxn modelId="{C792832D-5547-471B-A693-84B92FF8B02C}" type="presParOf" srcId="{860F5D21-83EC-4D1B-83FE-010E6AAAD6E1}" destId="{DF3A6B01-9AF0-47D5-B2C6-4767265990E0}" srcOrd="3" destOrd="0" presId="urn:microsoft.com/office/officeart/2009/3/layout/HorizontalOrganizationChart"/>
-    <dgm:cxn modelId="{1DFAEBE0-850A-47BF-BA02-2AD290E394D4}" type="presParOf" srcId="{DF3A6B01-9AF0-47D5-B2C6-4767265990E0}" destId="{E0BBCED8-EF82-4B98-8005-DA81FE43F6E1}" srcOrd="0" destOrd="0" presId="urn:microsoft.com/office/officeart/2009/3/layout/HorizontalOrganizationChart"/>
-    <dgm:cxn modelId="{E55FE56E-2D17-443A-9630-3DC7BEECD9FA}" type="presParOf" srcId="{E0BBCED8-EF82-4B98-8005-DA81FE43F6E1}" destId="{7EEBE634-507C-452D-8F74-93F7DA14811D}" srcOrd="0" destOrd="0" presId="urn:microsoft.com/office/officeart/2009/3/layout/HorizontalOrganizationChart"/>
-    <dgm:cxn modelId="{DDF2C60B-4CDC-43A4-89AA-23ABBB6A8392}" type="presParOf" srcId="{E0BBCED8-EF82-4B98-8005-DA81FE43F6E1}" destId="{67AC6E1B-A339-4183-A794-6F8370D03B71}" srcOrd="1" destOrd="0" presId="urn:microsoft.com/office/officeart/2009/3/layout/HorizontalOrganizationChart"/>
-    <dgm:cxn modelId="{42B51934-4E46-44A2-9F8B-504A55CC8B33}" type="presParOf" srcId="{DF3A6B01-9AF0-47D5-B2C6-4767265990E0}" destId="{ECA1E168-5C42-4AB6-9EB7-EB069D860EC3}" srcOrd="1" destOrd="0" presId="urn:microsoft.com/office/officeart/2009/3/layout/HorizontalOrganizationChart"/>
-    <dgm:cxn modelId="{3C7B8D6B-5530-424F-A2C3-3C764AEAB871}" type="presParOf" srcId="{DF3A6B01-9AF0-47D5-B2C6-4767265990E0}" destId="{3EEBBF62-1428-45E5-AB17-40275F203E09}" srcOrd="2" destOrd="0" presId="urn:microsoft.com/office/officeart/2009/3/layout/HorizontalOrganizationChart"/>
-    <dgm:cxn modelId="{4CD4D566-339B-47B1-B49B-EB651C090910}" type="presParOf" srcId="{2E752132-E630-4632-9600-9B043BD9E414}" destId="{8A3A4087-C2D1-4E88-BA2C-FF26690A6263}" srcOrd="2" destOrd="0" presId="urn:microsoft.com/office/officeart/2009/3/layout/HorizontalOrganizationChart"/>
-    <dgm:cxn modelId="{898A9BA1-46D5-4815-917A-F75A223B63A5}" type="presParOf" srcId="{6322132C-78CD-43CA-BDB1-15934FC6847D}" destId="{37CB0559-0F9C-4E01-9395-9AF1D8335AB3}" srcOrd="2" destOrd="0" presId="urn:microsoft.com/office/officeart/2009/3/layout/HorizontalOrganizationChart"/>
-    <dgm:cxn modelId="{1848672A-57ED-49AA-AC2C-78E427EC948B}" type="presParOf" srcId="{6322132C-78CD-43CA-BDB1-15934FC6847D}" destId="{CFDB63F1-940F-405A-A9B4-7DDC93AF5869}" srcOrd="3" destOrd="0" presId="urn:microsoft.com/office/officeart/2009/3/layout/HorizontalOrganizationChart"/>
-    <dgm:cxn modelId="{49BFE3A6-6B5E-40FB-BDA3-4F097E24E2B4}" type="presParOf" srcId="{CFDB63F1-940F-405A-A9B4-7DDC93AF5869}" destId="{011E1183-F092-4EB8-9DFF-4332630ED2E5}" srcOrd="0" destOrd="0" presId="urn:microsoft.com/office/officeart/2009/3/layout/HorizontalOrganizationChart"/>
-    <dgm:cxn modelId="{00BD9257-DBB2-4458-BDDF-BB55650A99E3}" type="presParOf" srcId="{011E1183-F092-4EB8-9DFF-4332630ED2E5}" destId="{E9A97367-2565-4CA7-B81D-4E147657D835}" srcOrd="0" destOrd="0" presId="urn:microsoft.com/office/officeart/2009/3/layout/HorizontalOrganizationChart"/>
-    <dgm:cxn modelId="{8E90389A-6AF1-4B83-BF9C-3B8CFEB9B85E}" type="presParOf" srcId="{011E1183-F092-4EB8-9DFF-4332630ED2E5}" destId="{2846335E-09B8-4070-8AE1-F4A8659BD36F}" srcOrd="1" destOrd="0" presId="urn:microsoft.com/office/officeart/2009/3/layout/HorizontalOrganizationChart"/>
-    <dgm:cxn modelId="{D34DE188-41FA-4C90-A77D-217AB8C4A889}" type="presParOf" srcId="{CFDB63F1-940F-405A-A9B4-7DDC93AF5869}" destId="{D98298B5-4B34-459A-BC81-9CF46F584A90}" srcOrd="1" destOrd="0" presId="urn:microsoft.com/office/officeart/2009/3/layout/HorizontalOrganizationChart"/>
-    <dgm:cxn modelId="{148A9441-03DB-4A51-A1B3-9C7A5484B5DF}" type="presParOf" srcId="{D98298B5-4B34-459A-BC81-9CF46F584A90}" destId="{904226D0-5DE5-4039-A33D-3A3B483D2045}" srcOrd="0" destOrd="0" presId="urn:microsoft.com/office/officeart/2009/3/layout/HorizontalOrganizationChart"/>
-    <dgm:cxn modelId="{9C8BEA9C-6319-4910-9ED5-38A1BF3F2614}" type="presParOf" srcId="{D98298B5-4B34-459A-BC81-9CF46F584A90}" destId="{CFDFF4EB-FEE9-4245-894A-89F788BCC283}" srcOrd="1" destOrd="0" presId="urn:microsoft.com/office/officeart/2009/3/layout/HorizontalOrganizationChart"/>
-    <dgm:cxn modelId="{A6668BC7-2409-4B13-8DE8-B94AEAE55CE5}" type="presParOf" srcId="{CFDFF4EB-FEE9-4245-894A-89F788BCC283}" destId="{0C24B182-0E6A-4D77-80B6-2F0EFD2DF32A}" srcOrd="0" destOrd="0" presId="urn:microsoft.com/office/officeart/2009/3/layout/HorizontalOrganizationChart"/>
-    <dgm:cxn modelId="{06E1DB82-A2BE-46CF-BF2F-A56694CA93EF}" type="presParOf" srcId="{0C24B182-0E6A-4D77-80B6-2F0EFD2DF32A}" destId="{CBCC7696-EFAB-4F9F-8C0A-720224B8DCB6}" srcOrd="0" destOrd="0" presId="urn:microsoft.com/office/officeart/2009/3/layout/HorizontalOrganizationChart"/>
-    <dgm:cxn modelId="{8F60C674-865D-4DF7-AB83-18BC43A4585E}" type="presParOf" srcId="{0C24B182-0E6A-4D77-80B6-2F0EFD2DF32A}" destId="{23D4DC71-764D-47BE-982C-F5FC61CA73F7}" srcOrd="1" destOrd="0" presId="urn:microsoft.com/office/officeart/2009/3/layout/HorizontalOrganizationChart"/>
-    <dgm:cxn modelId="{4256F62B-0C32-45DD-994C-22333356D590}" type="presParOf" srcId="{CFDFF4EB-FEE9-4245-894A-89F788BCC283}" destId="{3E27F26B-6132-4147-8863-74AD7D9AB567}" srcOrd="1" destOrd="0" presId="urn:microsoft.com/office/officeart/2009/3/layout/HorizontalOrganizationChart"/>
-    <dgm:cxn modelId="{4DF371D3-2B66-4A75-A14A-2EDFD6FBB664}" type="presParOf" srcId="{3E27F26B-6132-4147-8863-74AD7D9AB567}" destId="{2C4198AB-26E0-4488-A949-AC34DCA3B154}" srcOrd="0" destOrd="0" presId="urn:microsoft.com/office/officeart/2009/3/layout/HorizontalOrganizationChart"/>
-    <dgm:cxn modelId="{FB430513-8AE8-4239-A1E8-FA712AC3CDD0}" type="presParOf" srcId="{3E27F26B-6132-4147-8863-74AD7D9AB567}" destId="{D474E4AE-4358-419C-9225-BC9E6D566826}" srcOrd="1" destOrd="0" presId="urn:microsoft.com/office/officeart/2009/3/layout/HorizontalOrganizationChart"/>
-    <dgm:cxn modelId="{C5A8369F-A3C9-497C-BCD6-E20571E8F5B5}" type="presParOf" srcId="{D474E4AE-4358-419C-9225-BC9E6D566826}" destId="{EF097900-7832-47D3-9D78-69FD0289B4AF}" srcOrd="0" destOrd="0" presId="urn:microsoft.com/office/officeart/2009/3/layout/HorizontalOrganizationChart"/>
-    <dgm:cxn modelId="{C750CB0E-966E-47E1-B9DD-824740A882DE}" type="presParOf" srcId="{EF097900-7832-47D3-9D78-69FD0289B4AF}" destId="{AD980698-3B39-4F03-BC7B-E6CC415D37FF}" srcOrd="0" destOrd="0" presId="urn:microsoft.com/office/officeart/2009/3/layout/HorizontalOrganizationChart"/>
-    <dgm:cxn modelId="{DC423352-1037-4D2D-A926-CE225B0E44F7}" type="presParOf" srcId="{EF097900-7832-47D3-9D78-69FD0289B4AF}" destId="{39661304-84F2-4510-A80A-0ED0BF9B0CEA}" srcOrd="1" destOrd="0" presId="urn:microsoft.com/office/officeart/2009/3/layout/HorizontalOrganizationChart"/>
-    <dgm:cxn modelId="{4554AC3C-87FF-496E-8908-67F0F94805F8}" type="presParOf" srcId="{D474E4AE-4358-419C-9225-BC9E6D566826}" destId="{065A812D-ABB5-4FA3-8F10-23657A25B85B}" srcOrd="1" destOrd="0" presId="urn:microsoft.com/office/officeart/2009/3/layout/HorizontalOrganizationChart"/>
-    <dgm:cxn modelId="{179AB93A-3D30-4408-A9A1-2121C25C9E15}" type="presParOf" srcId="{D474E4AE-4358-419C-9225-BC9E6D566826}" destId="{6942C355-73E2-4014-9379-D8E1C3BBB07F}" srcOrd="2" destOrd="0" presId="urn:microsoft.com/office/officeart/2009/3/layout/HorizontalOrganizationChart"/>
-    <dgm:cxn modelId="{536A3584-EB29-4360-B268-90A829E41E95}" type="presParOf" srcId="{CFDFF4EB-FEE9-4245-894A-89F788BCC283}" destId="{C273ABF5-E08A-4BE7-A63B-1BF59E20ADD2}" srcOrd="2" destOrd="0" presId="urn:microsoft.com/office/officeart/2009/3/layout/HorizontalOrganizationChart"/>
-    <dgm:cxn modelId="{7A38697E-8294-41FB-AC4C-FAA0933A7573}" type="presParOf" srcId="{CFDB63F1-940F-405A-A9B4-7DDC93AF5869}" destId="{51A25AF1-B8A8-40A6-BC8E-0E3A3D038724}" srcOrd="2" destOrd="0" presId="urn:microsoft.com/office/officeart/2009/3/layout/HorizontalOrganizationChart"/>
-    <dgm:cxn modelId="{B6EDAD64-2FD2-4800-83A2-0F1A03CB2221}" type="presParOf" srcId="{6322132C-78CD-43CA-BDB1-15934FC6847D}" destId="{E4E142D8-98D9-4BB4-8826-8B27491F43B4}" srcOrd="4" destOrd="0" presId="urn:microsoft.com/office/officeart/2009/3/layout/HorizontalOrganizationChart"/>
-    <dgm:cxn modelId="{D3EE0288-A168-439E-BB22-8CA8B86877DC}" type="presParOf" srcId="{6322132C-78CD-43CA-BDB1-15934FC6847D}" destId="{7D003827-466D-499B-9492-0D274854DE71}" srcOrd="5" destOrd="0" presId="urn:microsoft.com/office/officeart/2009/3/layout/HorizontalOrganizationChart"/>
-    <dgm:cxn modelId="{51073387-26D6-4C6B-95E3-3216B4BC37C6}" type="presParOf" srcId="{7D003827-466D-499B-9492-0D274854DE71}" destId="{8321FBBC-0B02-4D6A-B292-31DB58261631}" srcOrd="0" destOrd="0" presId="urn:microsoft.com/office/officeart/2009/3/layout/HorizontalOrganizationChart"/>
-    <dgm:cxn modelId="{A2354542-A03C-447E-A19D-6DAC3E6C4975}" type="presParOf" srcId="{8321FBBC-0B02-4D6A-B292-31DB58261631}" destId="{3E0FA384-F7A7-4EF5-BB6C-325C5B877E93}" srcOrd="0" destOrd="0" presId="urn:microsoft.com/office/officeart/2009/3/layout/HorizontalOrganizationChart"/>
-    <dgm:cxn modelId="{A783F753-712E-469E-BB26-95558BFFDB55}" type="presParOf" srcId="{8321FBBC-0B02-4D6A-B292-31DB58261631}" destId="{039EE693-846A-452B-938C-A79863754B50}" srcOrd="1" destOrd="0" presId="urn:microsoft.com/office/officeart/2009/3/layout/HorizontalOrganizationChart"/>
-    <dgm:cxn modelId="{CE49746A-E0DD-4440-9131-9D8D7FC69441}" type="presParOf" srcId="{7D003827-466D-499B-9492-0D274854DE71}" destId="{15438C47-FF5A-46A4-A923-94CF51153C82}" srcOrd="1" destOrd="0" presId="urn:microsoft.com/office/officeart/2009/3/layout/HorizontalOrganizationChart"/>
-    <dgm:cxn modelId="{4FD3FC33-12DA-450D-AB5A-F7CE303890E2}" type="presParOf" srcId="{15438C47-FF5A-46A4-A923-94CF51153C82}" destId="{B53F97DA-CD42-477B-978A-645AB0B3B0D8}" srcOrd="0" destOrd="0" presId="urn:microsoft.com/office/officeart/2009/3/layout/HorizontalOrganizationChart"/>
-    <dgm:cxn modelId="{FE82B32A-57B2-4E06-9AC1-08D0AA45FD47}" type="presParOf" srcId="{15438C47-FF5A-46A4-A923-94CF51153C82}" destId="{6D2D5EBF-D547-4528-A20C-8F5E2C9B880C}" srcOrd="1" destOrd="0" presId="urn:microsoft.com/office/officeart/2009/3/layout/HorizontalOrganizationChart"/>
-    <dgm:cxn modelId="{398DF832-F059-4B25-A7EE-64B2FF5BB2AE}" type="presParOf" srcId="{6D2D5EBF-D547-4528-A20C-8F5E2C9B880C}" destId="{10C34B34-3590-46BB-B6F2-FDE6907AB634}" srcOrd="0" destOrd="0" presId="urn:microsoft.com/office/officeart/2009/3/layout/HorizontalOrganizationChart"/>
-    <dgm:cxn modelId="{496DBB80-F609-4E87-9A6F-ED3296737E73}" type="presParOf" srcId="{10C34B34-3590-46BB-B6F2-FDE6907AB634}" destId="{5CE68631-E50F-4A7D-A78E-B9848249D5F3}" srcOrd="0" destOrd="0" presId="urn:microsoft.com/office/officeart/2009/3/layout/HorizontalOrganizationChart"/>
-    <dgm:cxn modelId="{1ADBFF21-8D8B-4B39-BB62-57A667AA128C}" type="presParOf" srcId="{10C34B34-3590-46BB-B6F2-FDE6907AB634}" destId="{313097A2-C9D5-4518-B29A-5B216269D568}" srcOrd="1" destOrd="0" presId="urn:microsoft.com/office/officeart/2009/3/layout/HorizontalOrganizationChart"/>
-    <dgm:cxn modelId="{25FF3E95-FBD3-462D-8977-8FCEB2C0CC96}" type="presParOf" srcId="{6D2D5EBF-D547-4528-A20C-8F5E2C9B880C}" destId="{23275A76-13D0-4464-8314-473BE340AD8F}" srcOrd="1" destOrd="0" presId="urn:microsoft.com/office/officeart/2009/3/layout/HorizontalOrganizationChart"/>
-    <dgm:cxn modelId="{999498DA-A6A3-4EA6-B781-162C4C7EED52}" type="presParOf" srcId="{6D2D5EBF-D547-4528-A20C-8F5E2C9B880C}" destId="{DB679513-DBB0-4A13-8DD4-A35C9E981A94}" srcOrd="2" destOrd="0" presId="urn:microsoft.com/office/officeart/2009/3/layout/HorizontalOrganizationChart"/>
-    <dgm:cxn modelId="{829A2BD7-E251-4766-9DA8-784E91CD6E94}" type="presParOf" srcId="{7D003827-466D-499B-9492-0D274854DE71}" destId="{0F2A9527-4341-4D91-B2A8-08268FCDC96C}" srcOrd="2" destOrd="0" presId="urn:microsoft.com/office/officeart/2009/3/layout/HorizontalOrganizationChart"/>
-    <dgm:cxn modelId="{2A937E75-0203-4610-9CCD-026F2E373B16}" type="presParOf" srcId="{6322132C-78CD-43CA-BDB1-15934FC6847D}" destId="{422596F1-C75B-45F9-BFD0-9951F8F32EFB}" srcOrd="6" destOrd="0" presId="urn:microsoft.com/office/officeart/2009/3/layout/HorizontalOrganizationChart"/>
-    <dgm:cxn modelId="{4A1813F7-362E-4DBC-87C9-E2E39D14ED30}" type="presParOf" srcId="{6322132C-78CD-43CA-BDB1-15934FC6847D}" destId="{2385C688-3F8F-43A2-A30A-2252C12C33E5}" srcOrd="7" destOrd="0" presId="urn:microsoft.com/office/officeart/2009/3/layout/HorizontalOrganizationChart"/>
-    <dgm:cxn modelId="{43EBB597-D849-4DDA-9FB0-64C1DB699DA6}" type="presParOf" srcId="{2385C688-3F8F-43A2-A30A-2252C12C33E5}" destId="{581FB53A-4B2E-4286-B82E-94AEB51C2972}" srcOrd="0" destOrd="0" presId="urn:microsoft.com/office/officeart/2009/3/layout/HorizontalOrganizationChart"/>
-    <dgm:cxn modelId="{0C7CCCBB-1727-4892-A665-9D93C5C89225}" type="presParOf" srcId="{581FB53A-4B2E-4286-B82E-94AEB51C2972}" destId="{9E916334-F27B-4E86-B949-E7079E77F959}" srcOrd="0" destOrd="0" presId="urn:microsoft.com/office/officeart/2009/3/layout/HorizontalOrganizationChart"/>
-    <dgm:cxn modelId="{40942A2E-DE01-4D6A-BCAB-967F12FA573A}" type="presParOf" srcId="{581FB53A-4B2E-4286-B82E-94AEB51C2972}" destId="{49F9D926-559F-4648-BFF5-79BEBC70A452}" srcOrd="1" destOrd="0" presId="urn:microsoft.com/office/officeart/2009/3/layout/HorizontalOrganizationChart"/>
-    <dgm:cxn modelId="{F3BC4C9C-DA44-488D-B40E-A2CFE3D00CB6}" type="presParOf" srcId="{2385C688-3F8F-43A2-A30A-2252C12C33E5}" destId="{16DEFBD3-D008-4B05-B2DD-39FF5F864F76}" srcOrd="1" destOrd="0" presId="urn:microsoft.com/office/officeart/2009/3/layout/HorizontalOrganizationChart"/>
-    <dgm:cxn modelId="{5FC75F9F-A912-43DA-B667-FA09237A22A9}" type="presParOf" srcId="{16DEFBD3-D008-4B05-B2DD-39FF5F864F76}" destId="{137A950C-A2C9-4E92-AA44-CCBE0A4712D0}" srcOrd="0" destOrd="0" presId="urn:microsoft.com/office/officeart/2009/3/layout/HorizontalOrganizationChart"/>
-    <dgm:cxn modelId="{C30C152A-2A62-40A6-8516-FB84E3690074}" type="presParOf" srcId="{16DEFBD3-D008-4B05-B2DD-39FF5F864F76}" destId="{642302D4-25F5-4191-A6BD-80A90EE256CB}" srcOrd="1" destOrd="0" presId="urn:microsoft.com/office/officeart/2009/3/layout/HorizontalOrganizationChart"/>
-    <dgm:cxn modelId="{72360CC8-18D4-4FB1-950A-C06B2C3A3537}" type="presParOf" srcId="{642302D4-25F5-4191-A6BD-80A90EE256CB}" destId="{B324F531-5460-45CD-AD63-4E1D583EC186}" srcOrd="0" destOrd="0" presId="urn:microsoft.com/office/officeart/2009/3/layout/HorizontalOrganizationChart"/>
-    <dgm:cxn modelId="{627854E0-630B-454B-98AC-8E602256C70C}" type="presParOf" srcId="{B324F531-5460-45CD-AD63-4E1D583EC186}" destId="{0BA28261-1ED3-47EB-A7EA-310484F5DF09}" srcOrd="0" destOrd="0" presId="urn:microsoft.com/office/officeart/2009/3/layout/HorizontalOrganizationChart"/>
-    <dgm:cxn modelId="{214D3176-9843-4DD3-A71A-37A8D62BA030}" type="presParOf" srcId="{B324F531-5460-45CD-AD63-4E1D583EC186}" destId="{1F3D57A6-91D2-48AA-B105-E07306DABA2F}" srcOrd="1" destOrd="0" presId="urn:microsoft.com/office/officeart/2009/3/layout/HorizontalOrganizationChart"/>
-    <dgm:cxn modelId="{47FABD7F-2B53-42F1-8E00-CBD27BAAA72C}" type="presParOf" srcId="{642302D4-25F5-4191-A6BD-80A90EE256CB}" destId="{E693CDA9-254D-4703-B79E-4F8CEA104BCE}" srcOrd="1" destOrd="0" presId="urn:microsoft.com/office/officeart/2009/3/layout/HorizontalOrganizationChart"/>
-    <dgm:cxn modelId="{98324829-6436-4796-A1E8-787E4B5425B1}" type="presParOf" srcId="{E693CDA9-254D-4703-B79E-4F8CEA104BCE}" destId="{DF5FB862-76EA-4FBD-97DB-876FA1B4C7A5}" srcOrd="0" destOrd="0" presId="urn:microsoft.com/office/officeart/2009/3/layout/HorizontalOrganizationChart"/>
-    <dgm:cxn modelId="{9D57E5B4-8D7C-45BE-B28D-2A906DA64A79}" type="presParOf" srcId="{E693CDA9-254D-4703-B79E-4F8CEA104BCE}" destId="{929D98B8-E1AF-4AB0-A72E-45EB1F9E4936}" srcOrd="1" destOrd="0" presId="urn:microsoft.com/office/officeart/2009/3/layout/HorizontalOrganizationChart"/>
-    <dgm:cxn modelId="{56CF1F2C-6909-41C0-A46B-205FCEE9F4CB}" type="presParOf" srcId="{929D98B8-E1AF-4AB0-A72E-45EB1F9E4936}" destId="{94CE8272-7C92-4520-8B2F-7E2EACAF34CA}" srcOrd="0" destOrd="0" presId="urn:microsoft.com/office/officeart/2009/3/layout/HorizontalOrganizationChart"/>
-    <dgm:cxn modelId="{C51CD23F-3098-4BCB-BDCB-473988463A21}" type="presParOf" srcId="{94CE8272-7C92-4520-8B2F-7E2EACAF34CA}" destId="{B509227D-8391-4FEA-8798-380D7D9E41EE}" srcOrd="0" destOrd="0" presId="urn:microsoft.com/office/officeart/2009/3/layout/HorizontalOrganizationChart"/>
-    <dgm:cxn modelId="{13C4A915-1C80-4C35-9769-D9C2B2BFF256}" type="presParOf" srcId="{94CE8272-7C92-4520-8B2F-7E2EACAF34CA}" destId="{13AAB80B-89C4-451F-A39D-CC96E0BE201C}" srcOrd="1" destOrd="0" presId="urn:microsoft.com/office/officeart/2009/3/layout/HorizontalOrganizationChart"/>
-    <dgm:cxn modelId="{15284E6A-78CE-4890-8648-44622BACBE91}" type="presParOf" srcId="{929D98B8-E1AF-4AB0-A72E-45EB1F9E4936}" destId="{037CCFC1-A766-48DA-8CDC-17C070D2D1E8}" srcOrd="1" destOrd="0" presId="urn:microsoft.com/office/officeart/2009/3/layout/HorizontalOrganizationChart"/>
-    <dgm:cxn modelId="{2268357A-9D6A-43F7-B0A2-DA691E56AFB1}" type="presParOf" srcId="{929D98B8-E1AF-4AB0-A72E-45EB1F9E4936}" destId="{0637968F-433B-4694-843C-7733D3911379}" srcOrd="2" destOrd="0" presId="urn:microsoft.com/office/officeart/2009/3/layout/HorizontalOrganizationChart"/>
-    <dgm:cxn modelId="{65CDDEC5-C79A-4ED2-8FB7-10F3E93D9CC9}" type="presParOf" srcId="{642302D4-25F5-4191-A6BD-80A90EE256CB}" destId="{2EBC82D9-8CA9-4573-B5A3-42C5FAEEF36B}" srcOrd="2" destOrd="0" presId="urn:microsoft.com/office/officeart/2009/3/layout/HorizontalOrganizationChart"/>
-    <dgm:cxn modelId="{F8942A24-8804-4E94-96A5-044475CA7931}" type="presParOf" srcId="{2385C688-3F8F-43A2-A30A-2252C12C33E5}" destId="{7B4852E4-0821-4A98-95F4-9B67008C205D}" srcOrd="2" destOrd="0" presId="urn:microsoft.com/office/officeart/2009/3/layout/HorizontalOrganizationChart"/>
-    <dgm:cxn modelId="{AF7DBD97-EAE1-403F-BCED-4A25FB51D390}" type="presParOf" srcId="{6322132C-78CD-43CA-BDB1-15934FC6847D}" destId="{259DBE4E-D122-4206-8EBC-C98CAAF97ECC}" srcOrd="8" destOrd="0" presId="urn:microsoft.com/office/officeart/2009/3/layout/HorizontalOrganizationChart"/>
-    <dgm:cxn modelId="{732E2C46-D2A8-4384-8AC2-3164CA496681}" type="presParOf" srcId="{6322132C-78CD-43CA-BDB1-15934FC6847D}" destId="{2768B59B-453A-42A2-85F9-75C2F9E31EB2}" srcOrd="9" destOrd="0" presId="urn:microsoft.com/office/officeart/2009/3/layout/HorizontalOrganizationChart"/>
-    <dgm:cxn modelId="{A6DEF01D-6051-4A29-AC74-985C274D6422}" type="presParOf" srcId="{2768B59B-453A-42A2-85F9-75C2F9E31EB2}" destId="{AA82314E-5F22-45DE-BE38-64D9F48D91DF}" srcOrd="0" destOrd="0" presId="urn:microsoft.com/office/officeart/2009/3/layout/HorizontalOrganizationChart"/>
-    <dgm:cxn modelId="{F27E926E-5AEA-454B-B2AD-13C2305D30E2}" type="presParOf" srcId="{AA82314E-5F22-45DE-BE38-64D9F48D91DF}" destId="{7E303F30-9711-4703-9E93-53900C059588}" srcOrd="0" destOrd="0" presId="urn:microsoft.com/office/officeart/2009/3/layout/HorizontalOrganizationChart"/>
-    <dgm:cxn modelId="{17CA64D8-7995-49A1-A8B9-F4D5519B8FE3}" type="presParOf" srcId="{AA82314E-5F22-45DE-BE38-64D9F48D91DF}" destId="{6B320540-8EFC-424C-87BB-7A322C848E8D}" srcOrd="1" destOrd="0" presId="urn:microsoft.com/office/officeart/2009/3/layout/HorizontalOrganizationChart"/>
-    <dgm:cxn modelId="{BEC962E0-FCDC-4978-BC02-6CA41646D36A}" type="presParOf" srcId="{2768B59B-453A-42A2-85F9-75C2F9E31EB2}" destId="{3A41FAFC-2989-4EED-BB19-C23AE601C621}" srcOrd="1" destOrd="0" presId="urn:microsoft.com/office/officeart/2009/3/layout/HorizontalOrganizationChart"/>
-    <dgm:cxn modelId="{D5E71807-DDCA-4727-B7FE-C503A4AB8E34}" type="presParOf" srcId="{3A41FAFC-2989-4EED-BB19-C23AE601C621}" destId="{95CF0774-536B-4F9D-A2E5-78BCC760D370}" srcOrd="0" destOrd="0" presId="urn:microsoft.com/office/officeart/2009/3/layout/HorizontalOrganizationChart"/>
-    <dgm:cxn modelId="{075513B2-DBC6-4187-A731-004735B83F72}" type="presParOf" srcId="{3A41FAFC-2989-4EED-BB19-C23AE601C621}" destId="{ECC1C45E-B00C-4A59-AEB9-1F953F5C00A3}" srcOrd="1" destOrd="0" presId="urn:microsoft.com/office/officeart/2009/3/layout/HorizontalOrganizationChart"/>
-    <dgm:cxn modelId="{F894AEC2-4A71-4658-BBDE-A5E4F24A3BF2}" type="presParOf" srcId="{ECC1C45E-B00C-4A59-AEB9-1F953F5C00A3}" destId="{08A8723F-9790-4D05-9A7F-A695DD54ADA0}" srcOrd="0" destOrd="0" presId="urn:microsoft.com/office/officeart/2009/3/layout/HorizontalOrganizationChart"/>
-    <dgm:cxn modelId="{E241A8CF-5D75-443C-A151-C167AE8BEA03}" type="presParOf" srcId="{08A8723F-9790-4D05-9A7F-A695DD54ADA0}" destId="{2A231453-FF0D-443D-87E8-87257BA9B0EE}" srcOrd="0" destOrd="0" presId="urn:microsoft.com/office/officeart/2009/3/layout/HorizontalOrganizationChart"/>
-    <dgm:cxn modelId="{591B32D6-798A-41A1-87C7-6A8154347DA5}" type="presParOf" srcId="{08A8723F-9790-4D05-9A7F-A695DD54ADA0}" destId="{0A0759F7-AEC9-45E6-B0C9-C7C1A3150A4F}" srcOrd="1" destOrd="0" presId="urn:microsoft.com/office/officeart/2009/3/layout/HorizontalOrganizationChart"/>
-    <dgm:cxn modelId="{3811B4BB-FE7F-4045-A713-0A8040C8ABEB}" type="presParOf" srcId="{ECC1C45E-B00C-4A59-AEB9-1F953F5C00A3}" destId="{F155B652-50D0-4E33-B58C-7DC296E2D5F0}" srcOrd="1" destOrd="0" presId="urn:microsoft.com/office/officeart/2009/3/layout/HorizontalOrganizationChart"/>
-    <dgm:cxn modelId="{65044E62-70FE-4995-9F41-CE3F53CFC7DD}" type="presParOf" srcId="{ECC1C45E-B00C-4A59-AEB9-1F953F5C00A3}" destId="{B3A37EE4-B0F0-4588-A807-3153A2E69F69}" srcOrd="2" destOrd="0" presId="urn:microsoft.com/office/officeart/2009/3/layout/HorizontalOrganizationChart"/>
-    <dgm:cxn modelId="{79845A5F-A5D6-4C09-A5F9-9AE1B50234AC}" type="presParOf" srcId="{2768B59B-453A-42A2-85F9-75C2F9E31EB2}" destId="{485D3EB7-314F-4C91-B2D4-8AB5126CF5BB}" srcOrd="2" destOrd="0" presId="urn:microsoft.com/office/officeart/2009/3/layout/HorizontalOrganizationChart"/>
-    <dgm:cxn modelId="{EF3FBCF5-038A-4EED-BFE5-6DEE43EBA214}" type="presParOf" srcId="{6322132C-78CD-43CA-BDB1-15934FC6847D}" destId="{5D734C8D-E40C-4BF2-A310-8A858AE1F314}" srcOrd="10" destOrd="0" presId="urn:microsoft.com/office/officeart/2009/3/layout/HorizontalOrganizationChart"/>
-    <dgm:cxn modelId="{09AEF06C-7D5B-428C-A78B-15386C856682}" type="presParOf" srcId="{6322132C-78CD-43CA-BDB1-15934FC6847D}" destId="{A6B1FB9B-052B-489F-9CB1-187B6E579E3C}" srcOrd="11" destOrd="0" presId="urn:microsoft.com/office/officeart/2009/3/layout/HorizontalOrganizationChart"/>
-    <dgm:cxn modelId="{1C4C06B1-B297-461A-8E87-B670796AA8DF}" type="presParOf" srcId="{A6B1FB9B-052B-489F-9CB1-187B6E579E3C}" destId="{FF477795-AE90-4627-9E54-30BBA876CAB3}" srcOrd="0" destOrd="0" presId="urn:microsoft.com/office/officeart/2009/3/layout/HorizontalOrganizationChart"/>
-    <dgm:cxn modelId="{7B16D815-AE88-47F5-B0C0-0AA415A3A3C9}" type="presParOf" srcId="{FF477795-AE90-4627-9E54-30BBA876CAB3}" destId="{3D02A4C7-D3F8-46A9-BF13-B91E1207C679}" srcOrd="0" destOrd="0" presId="urn:microsoft.com/office/officeart/2009/3/layout/HorizontalOrganizationChart"/>
-    <dgm:cxn modelId="{FFA9BDCC-7E4A-492E-A592-663B06C3AAE9}" type="presParOf" srcId="{FF477795-AE90-4627-9E54-30BBA876CAB3}" destId="{75AB063C-95C2-4D08-BD75-E990F011A243}" srcOrd="1" destOrd="0" presId="urn:microsoft.com/office/officeart/2009/3/layout/HorizontalOrganizationChart"/>
-    <dgm:cxn modelId="{F2376F1A-9AE8-4B6D-BD56-E5439125F78A}" type="presParOf" srcId="{A6B1FB9B-052B-489F-9CB1-187B6E579E3C}" destId="{896FC98F-C18B-48B6-9368-6A4224F8D339}" srcOrd="1" destOrd="0" presId="urn:microsoft.com/office/officeart/2009/3/layout/HorizontalOrganizationChart"/>
-    <dgm:cxn modelId="{AB4DD23D-CA6D-4E82-9827-B4F93690ABF1}" type="presParOf" srcId="{896FC98F-C18B-48B6-9368-6A4224F8D339}" destId="{DF3D6495-4140-4D40-8D35-ABD35584EF53}" srcOrd="0" destOrd="0" presId="urn:microsoft.com/office/officeart/2009/3/layout/HorizontalOrganizationChart"/>
-    <dgm:cxn modelId="{9C4D168A-7F61-4272-B2AD-84DF6CDF69AC}" type="presParOf" srcId="{896FC98F-C18B-48B6-9368-6A4224F8D339}" destId="{D14D68CC-E066-4447-90AF-4E5C4D91C745}" srcOrd="1" destOrd="0" presId="urn:microsoft.com/office/officeart/2009/3/layout/HorizontalOrganizationChart"/>
-    <dgm:cxn modelId="{D123A2FE-8A27-48DD-8B54-44FF2B2D56FC}" type="presParOf" srcId="{D14D68CC-E066-4447-90AF-4E5C4D91C745}" destId="{4CB1C44D-18C1-45B3-8B69-3E34236607C4}" srcOrd="0" destOrd="0" presId="urn:microsoft.com/office/officeart/2009/3/layout/HorizontalOrganizationChart"/>
-    <dgm:cxn modelId="{94B093A2-DF64-4D51-A34A-D91AB50205A6}" type="presParOf" srcId="{4CB1C44D-18C1-45B3-8B69-3E34236607C4}" destId="{90D35EA2-A25D-449A-8C0B-91C81C67A50C}" srcOrd="0" destOrd="0" presId="urn:microsoft.com/office/officeart/2009/3/layout/HorizontalOrganizationChart"/>
-    <dgm:cxn modelId="{6CB1B104-F3B1-458F-B77C-DDA0DC833AB3}" type="presParOf" srcId="{4CB1C44D-18C1-45B3-8B69-3E34236607C4}" destId="{89FD8EE9-AA60-48A6-9D40-0DBE92C02DE0}" srcOrd="1" destOrd="0" presId="urn:microsoft.com/office/officeart/2009/3/layout/HorizontalOrganizationChart"/>
-    <dgm:cxn modelId="{985C0393-D5A2-4A10-B16F-6CD1A9BEA76F}" type="presParOf" srcId="{D14D68CC-E066-4447-90AF-4E5C4D91C745}" destId="{53B6FEF6-D5AE-485A-8D43-4347859156E9}" srcOrd="1" destOrd="0" presId="urn:microsoft.com/office/officeart/2009/3/layout/HorizontalOrganizationChart"/>
-    <dgm:cxn modelId="{79B1761C-5E21-4C82-A4ED-E79D1C0DA8C5}" type="presParOf" srcId="{D14D68CC-E066-4447-90AF-4E5C4D91C745}" destId="{6077FBBF-C54E-456A-B261-7861B4F23FB0}" srcOrd="2" destOrd="0" presId="urn:microsoft.com/office/officeart/2009/3/layout/HorizontalOrganizationChart"/>
-    <dgm:cxn modelId="{98DF071B-A0FE-42C8-B1F8-833FE700CEC1}" type="presParOf" srcId="{A6B1FB9B-052B-489F-9CB1-187B6E579E3C}" destId="{293C3232-9283-4A76-99D0-ACC9F33364EB}" srcOrd="2" destOrd="0" presId="urn:microsoft.com/office/officeart/2009/3/layout/HorizontalOrganizationChart"/>
-    <dgm:cxn modelId="{697BED18-5E57-4C65-A43D-0DAAECFE687F}" type="presParOf" srcId="{297A1475-871F-4B02-9E8C-FA3D011634A1}" destId="{0B06169F-9F61-42D6-8ABC-16C0E3ADE867}" srcOrd="2" destOrd="0" presId="urn:microsoft.com/office/officeart/2009/3/layout/HorizontalOrganizationChart"/>
-    <dgm:cxn modelId="{CFA5BCB7-A9DE-43C9-90E4-7189710CEA24}" type="presParOf" srcId="{C516F576-9EA6-4A3E-BB9C-8700E1875F5A}" destId="{87CE32BE-E790-4C1C-A724-8399427B532F}" srcOrd="2" destOrd="0" presId="urn:microsoft.com/office/officeart/2009/3/layout/HorizontalOrganizationChart"/>
-    <dgm:cxn modelId="{F8B57E9E-ABFB-4FA2-B54E-2FE678E1065B}" type="presParOf" srcId="{C516F576-9EA6-4A3E-BB9C-8700E1875F5A}" destId="{DF6F6EFF-03DB-45D7-9A74-CFE192F02E5B}" srcOrd="3" destOrd="0" presId="urn:microsoft.com/office/officeart/2009/3/layout/HorizontalOrganizationChart"/>
-    <dgm:cxn modelId="{6A71ACE6-2F3F-49BB-A64D-0CD0D3C9DA53}" type="presParOf" srcId="{DF6F6EFF-03DB-45D7-9A74-CFE192F02E5B}" destId="{88B72410-4735-4833-900A-AE12330D8502}" srcOrd="0" destOrd="0" presId="urn:microsoft.com/office/officeart/2009/3/layout/HorizontalOrganizationChart"/>
-    <dgm:cxn modelId="{9F7B8210-BD3F-42D6-8E20-FF8D751D6952}" type="presParOf" srcId="{88B72410-4735-4833-900A-AE12330D8502}" destId="{8C63EC56-3637-4380-B189-D0B66ADCD3F7}" srcOrd="0" destOrd="0" presId="urn:microsoft.com/office/officeart/2009/3/layout/HorizontalOrganizationChart"/>
-    <dgm:cxn modelId="{21FE0D79-03C1-45B0-A724-E361C7A1D04A}" type="presParOf" srcId="{88B72410-4735-4833-900A-AE12330D8502}" destId="{AC252788-612D-4E9E-AE60-64A72A6D6716}" srcOrd="1" destOrd="0" presId="urn:microsoft.com/office/officeart/2009/3/layout/HorizontalOrganizationChart"/>
-    <dgm:cxn modelId="{C37BB0E4-D731-436D-AF49-E7E07A48EFB6}" type="presParOf" srcId="{DF6F6EFF-03DB-45D7-9A74-CFE192F02E5B}" destId="{7DC8C575-4697-4BB3-BD29-6296054E1F4E}" srcOrd="1" destOrd="0" presId="urn:microsoft.com/office/officeart/2009/3/layout/HorizontalOrganizationChart"/>
-    <dgm:cxn modelId="{69657B30-1AF0-4444-82EF-98E7A5DF5A10}" type="presParOf" srcId="{DF6F6EFF-03DB-45D7-9A74-CFE192F02E5B}" destId="{AA35ED9B-1545-493D-AB5A-2EF477C71C83}" srcOrd="2" destOrd="0" presId="urn:microsoft.com/office/officeart/2009/3/layout/HorizontalOrganizationChart"/>
-    <dgm:cxn modelId="{96DC796F-46CF-4902-9560-638FD4C47F70}" type="presParOf" srcId="{C516F576-9EA6-4A3E-BB9C-8700E1875F5A}" destId="{B62982CB-6890-46C2-886C-0FC435E2E88A}" srcOrd="4" destOrd="0" presId="urn:microsoft.com/office/officeart/2009/3/layout/HorizontalOrganizationChart"/>
-    <dgm:cxn modelId="{CC3C7392-601D-4DDE-A1EF-8654A3EBDC59}" type="presParOf" srcId="{C516F576-9EA6-4A3E-BB9C-8700E1875F5A}" destId="{2B3438B6-C4AF-4776-9B02-580A7BE79A50}" srcOrd="5" destOrd="0" presId="urn:microsoft.com/office/officeart/2009/3/layout/HorizontalOrganizationChart"/>
-    <dgm:cxn modelId="{57B06FF9-10A2-4B86-A9EB-9E3EBE9150B7}" type="presParOf" srcId="{2B3438B6-C4AF-4776-9B02-580A7BE79A50}" destId="{E7A4D92D-25D1-46AE-B1D5-E3B02045B764}" srcOrd="0" destOrd="0" presId="urn:microsoft.com/office/officeart/2009/3/layout/HorizontalOrganizationChart"/>
-    <dgm:cxn modelId="{6D0455FC-FC29-4829-A426-322DAA9F6ED9}" type="presParOf" srcId="{E7A4D92D-25D1-46AE-B1D5-E3B02045B764}" destId="{110F79BE-B8CE-48C2-943A-1C7F5605B400}" srcOrd="0" destOrd="0" presId="urn:microsoft.com/office/officeart/2009/3/layout/HorizontalOrganizationChart"/>
-    <dgm:cxn modelId="{A236AB38-C97C-418A-81C7-EB547D5CB14E}" type="presParOf" srcId="{E7A4D92D-25D1-46AE-B1D5-E3B02045B764}" destId="{B8476156-8F22-41DE-9C5C-CDA42789A7C4}" srcOrd="1" destOrd="0" presId="urn:microsoft.com/office/officeart/2009/3/layout/HorizontalOrganizationChart"/>
-    <dgm:cxn modelId="{C6E564D3-0BFB-42DF-915C-BE664EF1E66D}" type="presParOf" srcId="{2B3438B6-C4AF-4776-9B02-580A7BE79A50}" destId="{E94EFD84-5C54-40D8-9A8F-C38CEAB04081}" srcOrd="1" destOrd="0" presId="urn:microsoft.com/office/officeart/2009/3/layout/HorizontalOrganizationChart"/>
-    <dgm:cxn modelId="{D0D4A898-C56B-410F-B68A-42085BFAC185}" type="presParOf" srcId="{E94EFD84-5C54-40D8-9A8F-C38CEAB04081}" destId="{6B2D008C-CA97-4972-8B5B-45081F19E3EC}" srcOrd="0" destOrd="0" presId="urn:microsoft.com/office/officeart/2009/3/layout/HorizontalOrganizationChart"/>
-    <dgm:cxn modelId="{D88D24CF-3397-4005-9306-00CF6BA49643}" type="presParOf" srcId="{E94EFD84-5C54-40D8-9A8F-C38CEAB04081}" destId="{7D941C44-EDB9-43A1-8B0D-A42E00E86928}" srcOrd="1" destOrd="0" presId="urn:microsoft.com/office/officeart/2009/3/layout/HorizontalOrganizationChart"/>
-    <dgm:cxn modelId="{F6C6D1FD-AEEF-4F30-AE99-2BC7BF48FDBB}" type="presParOf" srcId="{7D941C44-EDB9-43A1-8B0D-A42E00E86928}" destId="{37131C8B-8B5A-45A5-BF77-ACCEECE3D803}" srcOrd="0" destOrd="0" presId="urn:microsoft.com/office/officeart/2009/3/layout/HorizontalOrganizationChart"/>
-    <dgm:cxn modelId="{B89184A9-AC1D-440D-8AB2-8FA43EB63B4D}" type="presParOf" srcId="{37131C8B-8B5A-45A5-BF77-ACCEECE3D803}" destId="{5ED98B15-1271-4C1B-BD70-D93D404A68CE}" srcOrd="0" destOrd="0" presId="urn:microsoft.com/office/officeart/2009/3/layout/HorizontalOrganizationChart"/>
-    <dgm:cxn modelId="{1370BC94-979D-4F7C-A4DB-78C16E8A9437}" type="presParOf" srcId="{37131C8B-8B5A-45A5-BF77-ACCEECE3D803}" destId="{32F9F6CA-A9C9-4EC0-B487-8A6B1DDEE396}" srcOrd="1" destOrd="0" presId="urn:microsoft.com/office/officeart/2009/3/layout/HorizontalOrganizationChart"/>
-    <dgm:cxn modelId="{802BFCB4-26CA-4D9D-9E45-D07D1B934C83}" type="presParOf" srcId="{7D941C44-EDB9-43A1-8B0D-A42E00E86928}" destId="{6072350C-6373-4705-A9DC-82BB2DD64A3A}" srcOrd="1" destOrd="0" presId="urn:microsoft.com/office/officeart/2009/3/layout/HorizontalOrganizationChart"/>
-    <dgm:cxn modelId="{1E1136A4-8FE1-4C63-ADF8-DA2B15A0FEB9}" type="presParOf" srcId="{7D941C44-EDB9-43A1-8B0D-A42E00E86928}" destId="{42B863AB-8FAF-4752-9099-E77932F0D395}" srcOrd="2" destOrd="0" presId="urn:microsoft.com/office/officeart/2009/3/layout/HorizontalOrganizationChart"/>
-    <dgm:cxn modelId="{F949F0ED-CCA0-46EC-BB93-C1370748F2B8}" type="presParOf" srcId="{E94EFD84-5C54-40D8-9A8F-C38CEAB04081}" destId="{A9FBC398-F630-4DAD-8DDB-C584F376881B}" srcOrd="2" destOrd="0" presId="urn:microsoft.com/office/officeart/2009/3/layout/HorizontalOrganizationChart"/>
-    <dgm:cxn modelId="{28B49D3F-3BE0-4568-844F-895DB49E9652}" type="presParOf" srcId="{E94EFD84-5C54-40D8-9A8F-C38CEAB04081}" destId="{CE404325-D390-4D1D-A6D6-0523ECB0D0C3}" srcOrd="3" destOrd="0" presId="urn:microsoft.com/office/officeart/2009/3/layout/HorizontalOrganizationChart"/>
-    <dgm:cxn modelId="{62166F77-A8C6-4C4A-A842-84AF59750FE5}" type="presParOf" srcId="{CE404325-D390-4D1D-A6D6-0523ECB0D0C3}" destId="{6857FE5E-590C-4932-8F31-20B61F623BF8}" srcOrd="0" destOrd="0" presId="urn:microsoft.com/office/officeart/2009/3/layout/HorizontalOrganizationChart"/>
-    <dgm:cxn modelId="{D6ECA9D9-D2B4-4633-A60D-EE4D870CC6D7}" type="presParOf" srcId="{6857FE5E-590C-4932-8F31-20B61F623BF8}" destId="{E3458C5F-4332-4439-96AF-FD966B7B137A}" srcOrd="0" destOrd="0" presId="urn:microsoft.com/office/officeart/2009/3/layout/HorizontalOrganizationChart"/>
-    <dgm:cxn modelId="{BCAEBB89-B14B-4F37-9479-9091C47F8FFF}" type="presParOf" srcId="{6857FE5E-590C-4932-8F31-20B61F623BF8}" destId="{E64611E0-F76B-4B48-BD4A-3D9E4DE85202}" srcOrd="1" destOrd="0" presId="urn:microsoft.com/office/officeart/2009/3/layout/HorizontalOrganizationChart"/>
-    <dgm:cxn modelId="{D5EAE7BC-A2AD-4D98-BB7E-1718D8B02E77}" type="presParOf" srcId="{CE404325-D390-4D1D-A6D6-0523ECB0D0C3}" destId="{178FB168-8EC0-4C39-B0F2-CBAC9954840C}" srcOrd="1" destOrd="0" presId="urn:microsoft.com/office/officeart/2009/3/layout/HorizontalOrganizationChart"/>
-    <dgm:cxn modelId="{A1E53933-B80F-418D-A1C6-87F3716507A6}" type="presParOf" srcId="{178FB168-8EC0-4C39-B0F2-CBAC9954840C}" destId="{DB5E1FBB-4766-4187-B99E-821C906B52A9}" srcOrd="0" destOrd="0" presId="urn:microsoft.com/office/officeart/2009/3/layout/HorizontalOrganizationChart"/>
-    <dgm:cxn modelId="{05ED4D5E-65DC-4D48-BFF7-F99EFC79B8FC}" type="presParOf" srcId="{178FB168-8EC0-4C39-B0F2-CBAC9954840C}" destId="{10C12785-5206-46A6-BA56-0F5E579E9E0C}" srcOrd="1" destOrd="0" presId="urn:microsoft.com/office/officeart/2009/3/layout/HorizontalOrganizationChart"/>
-    <dgm:cxn modelId="{6D777EA0-366D-43C3-ACA1-52257AC84914}" type="presParOf" srcId="{10C12785-5206-46A6-BA56-0F5E579E9E0C}" destId="{B50E8FAC-15A9-4F01-9686-6AD3A2985F93}" srcOrd="0" destOrd="0" presId="urn:microsoft.com/office/officeart/2009/3/layout/HorizontalOrganizationChart"/>
-    <dgm:cxn modelId="{A30EFCA1-894B-404E-B0DD-F4E48FAA96F3}" type="presParOf" srcId="{B50E8FAC-15A9-4F01-9686-6AD3A2985F93}" destId="{07CF39E6-9B2B-4A5F-B780-120DD8E62C9B}" srcOrd="0" destOrd="0" presId="urn:microsoft.com/office/officeart/2009/3/layout/HorizontalOrganizationChart"/>
-    <dgm:cxn modelId="{EE5339E6-57C3-4E22-8E08-D6D4083C8FC5}" type="presParOf" srcId="{B50E8FAC-15A9-4F01-9686-6AD3A2985F93}" destId="{B2D69DCB-202B-46EC-819A-C954631D964B}" srcOrd="1" destOrd="0" presId="urn:microsoft.com/office/officeart/2009/3/layout/HorizontalOrganizationChart"/>
-    <dgm:cxn modelId="{11A4F7B5-BCD6-470B-9366-AAF9E3145C66}" type="presParOf" srcId="{10C12785-5206-46A6-BA56-0F5E579E9E0C}" destId="{39477503-7022-4EFE-910A-4D9CD5006307}" srcOrd="1" destOrd="0" presId="urn:microsoft.com/office/officeart/2009/3/layout/HorizontalOrganizationChart"/>
-    <dgm:cxn modelId="{304800B1-691E-4D15-93D3-2FAE8D9D4954}" type="presParOf" srcId="{39477503-7022-4EFE-910A-4D9CD5006307}" destId="{F4508D2D-CCAA-4B6E-AD9A-E2A8D4EBB379}" srcOrd="0" destOrd="0" presId="urn:microsoft.com/office/officeart/2009/3/layout/HorizontalOrganizationChart"/>
-    <dgm:cxn modelId="{F735E35B-DD0B-49FB-BF2D-D7049308EE3D}" type="presParOf" srcId="{39477503-7022-4EFE-910A-4D9CD5006307}" destId="{A679DF6E-2E87-49EF-9331-294A3BA4327D}" srcOrd="1" destOrd="0" presId="urn:microsoft.com/office/officeart/2009/3/layout/HorizontalOrganizationChart"/>
-    <dgm:cxn modelId="{65F01DC6-FEA8-4C99-9021-8E5B10983BA1}" type="presParOf" srcId="{A679DF6E-2E87-49EF-9331-294A3BA4327D}" destId="{F436D6A1-1ADA-4670-B90C-DCE011D93A3B}" srcOrd="0" destOrd="0" presId="urn:microsoft.com/office/officeart/2009/3/layout/HorizontalOrganizationChart"/>
-    <dgm:cxn modelId="{3AAFCADA-9D86-4B4B-BF0B-7625C1B7E0D3}" type="presParOf" srcId="{F436D6A1-1ADA-4670-B90C-DCE011D93A3B}" destId="{B652EFB0-A88E-48A1-836A-A245919707FD}" srcOrd="0" destOrd="0" presId="urn:microsoft.com/office/officeart/2009/3/layout/HorizontalOrganizationChart"/>
-    <dgm:cxn modelId="{DDA3EA29-19AF-4555-B0FA-45687795EAD8}" type="presParOf" srcId="{F436D6A1-1ADA-4670-B90C-DCE011D93A3B}" destId="{DC81B629-CD82-4B25-9F47-C4E4D420D1AE}" srcOrd="1" destOrd="0" presId="urn:microsoft.com/office/officeart/2009/3/layout/HorizontalOrganizationChart"/>
-    <dgm:cxn modelId="{10E0F6E6-38B7-49DA-823B-9299BDAFDBF7}" type="presParOf" srcId="{A679DF6E-2E87-49EF-9331-294A3BA4327D}" destId="{6D88FD24-272B-4F88-85DA-3D20C3E257B3}" srcOrd="1" destOrd="0" presId="urn:microsoft.com/office/officeart/2009/3/layout/HorizontalOrganizationChart"/>
-    <dgm:cxn modelId="{8F413038-D9CF-4DB1-AF36-57A317738D9C}" type="presParOf" srcId="{A679DF6E-2E87-49EF-9331-294A3BA4327D}" destId="{06F8F34C-15EC-4471-A6D4-438E4D10EB3A}" srcOrd="2" destOrd="0" presId="urn:microsoft.com/office/officeart/2009/3/layout/HorizontalOrganizationChart"/>
-    <dgm:cxn modelId="{7C52C60C-DA55-4913-B28C-51D6B5BC6E1E}" type="presParOf" srcId="{10C12785-5206-46A6-BA56-0F5E579E9E0C}" destId="{B8B3B9BF-9701-4947-ACE9-1AEAD028B857}" srcOrd="2" destOrd="0" presId="urn:microsoft.com/office/officeart/2009/3/layout/HorizontalOrganizationChart"/>
-    <dgm:cxn modelId="{FDA0A6B9-A987-444B-8E4A-60B0F20A3823}" type="presParOf" srcId="{178FB168-8EC0-4C39-B0F2-CBAC9954840C}" destId="{A70F5440-1532-4A1D-A6B4-AF69FBE58D12}" srcOrd="2" destOrd="0" presId="urn:microsoft.com/office/officeart/2009/3/layout/HorizontalOrganizationChart"/>
-    <dgm:cxn modelId="{CD7548F7-1076-4C6C-8C34-70E5FA9F3F6C}" type="presParOf" srcId="{178FB168-8EC0-4C39-B0F2-CBAC9954840C}" destId="{EC40E019-0120-4F45-94FE-CCD6C60DCCFC}" srcOrd="3" destOrd="0" presId="urn:microsoft.com/office/officeart/2009/3/layout/HorizontalOrganizationChart"/>
-    <dgm:cxn modelId="{5DAFC41E-CB8A-41B7-9889-631E0803FD35}" type="presParOf" srcId="{EC40E019-0120-4F45-94FE-CCD6C60DCCFC}" destId="{E12CBF1C-8ECA-451E-8BF7-19C54F17F51C}" srcOrd="0" destOrd="0" presId="urn:microsoft.com/office/officeart/2009/3/layout/HorizontalOrganizationChart"/>
-    <dgm:cxn modelId="{43050EF7-F535-4876-868A-46C61EE1C102}" type="presParOf" srcId="{E12CBF1C-8ECA-451E-8BF7-19C54F17F51C}" destId="{1D1D8692-63AE-448E-8E39-430F6A4B46BF}" srcOrd="0" destOrd="0" presId="urn:microsoft.com/office/officeart/2009/3/layout/HorizontalOrganizationChart"/>
-    <dgm:cxn modelId="{17EFFBE7-EAAD-4960-ABD8-2C5E261F637D}" type="presParOf" srcId="{E12CBF1C-8ECA-451E-8BF7-19C54F17F51C}" destId="{18E21695-07C6-4F19-99E8-D16CE3157C9B}" srcOrd="1" destOrd="0" presId="urn:microsoft.com/office/officeart/2009/3/layout/HorizontalOrganizationChart"/>
-    <dgm:cxn modelId="{D9F6BF24-99ED-491F-92D1-E5545A09B034}" type="presParOf" srcId="{EC40E019-0120-4F45-94FE-CCD6C60DCCFC}" destId="{3BDF94F5-1D25-402E-8247-6F898723BBB9}" srcOrd="1" destOrd="0" presId="urn:microsoft.com/office/officeart/2009/3/layout/HorizontalOrganizationChart"/>
-    <dgm:cxn modelId="{E8F2BAEA-E443-4681-88EF-8FE1B8D260BA}" type="presParOf" srcId="{3BDF94F5-1D25-402E-8247-6F898723BBB9}" destId="{CA242517-F53F-48F5-B2BD-3695E5DF74DD}" srcOrd="0" destOrd="0" presId="urn:microsoft.com/office/officeart/2009/3/layout/HorizontalOrganizationChart"/>
-    <dgm:cxn modelId="{B687216E-36DE-4A44-A2BE-FAE8E5294314}" type="presParOf" srcId="{3BDF94F5-1D25-402E-8247-6F898723BBB9}" destId="{C4BC5194-FE1C-4020-9B78-BED164EFDC75}" srcOrd="1" destOrd="0" presId="urn:microsoft.com/office/officeart/2009/3/layout/HorizontalOrganizationChart"/>
-    <dgm:cxn modelId="{CFEF2DD9-D7BD-44EB-A207-F72D212013D1}" type="presParOf" srcId="{C4BC5194-FE1C-4020-9B78-BED164EFDC75}" destId="{6F6AD7DC-1E5E-41D5-81EA-F136CC76DE3B}" srcOrd="0" destOrd="0" presId="urn:microsoft.com/office/officeart/2009/3/layout/HorizontalOrganizationChart"/>
-    <dgm:cxn modelId="{E26FA173-E221-44A1-A1FF-DAD265886A17}" type="presParOf" srcId="{6F6AD7DC-1E5E-41D5-81EA-F136CC76DE3B}" destId="{CF184D97-6870-475F-82DD-C951C974B444}" srcOrd="0" destOrd="0" presId="urn:microsoft.com/office/officeart/2009/3/layout/HorizontalOrganizationChart"/>
-    <dgm:cxn modelId="{DA5E6C06-6915-45BD-AD2E-06D8D0F68554}" type="presParOf" srcId="{6F6AD7DC-1E5E-41D5-81EA-F136CC76DE3B}" destId="{368DE4E4-C42A-435E-AD32-88164C04A62F}" srcOrd="1" destOrd="0" presId="urn:microsoft.com/office/officeart/2009/3/layout/HorizontalOrganizationChart"/>
-    <dgm:cxn modelId="{4CE9A17A-C02F-4FD4-9AE3-BB4511C426D9}" type="presParOf" srcId="{C4BC5194-FE1C-4020-9B78-BED164EFDC75}" destId="{2F5EE40E-768E-468A-97CB-B7D089D3E5A6}" srcOrd="1" destOrd="0" presId="urn:microsoft.com/office/officeart/2009/3/layout/HorizontalOrganizationChart"/>
-    <dgm:cxn modelId="{DC74FCAA-D238-423C-8E6C-C3A0CB44FF4B}" type="presParOf" srcId="{C4BC5194-FE1C-4020-9B78-BED164EFDC75}" destId="{3527D649-6D94-44F6-949B-641733A2557F}" srcOrd="2" destOrd="0" presId="urn:microsoft.com/office/officeart/2009/3/layout/HorizontalOrganizationChart"/>
-    <dgm:cxn modelId="{EF15FA0C-66E2-408B-B409-B2481EEA2868}" type="presParOf" srcId="{EC40E019-0120-4F45-94FE-CCD6C60DCCFC}" destId="{A67D8E25-55D4-42F5-B7CB-B526BAD5CB0E}" srcOrd="2" destOrd="0" presId="urn:microsoft.com/office/officeart/2009/3/layout/HorizontalOrganizationChart"/>
-    <dgm:cxn modelId="{D9D097DD-5CAC-4AD8-9032-F542E483C70D}" type="presParOf" srcId="{CE404325-D390-4D1D-A6D6-0523ECB0D0C3}" destId="{D097B0BF-81C7-4309-9852-2E865B8B14EA}" srcOrd="2" destOrd="0" presId="urn:microsoft.com/office/officeart/2009/3/layout/HorizontalOrganizationChart"/>
-    <dgm:cxn modelId="{ED068D5C-FA4A-48BB-930C-B264463A0675}" type="presParOf" srcId="{E94EFD84-5C54-40D8-9A8F-C38CEAB04081}" destId="{0F92594C-0E70-43C7-B781-9ACAC2BFB8E4}" srcOrd="4" destOrd="0" presId="urn:microsoft.com/office/officeart/2009/3/layout/HorizontalOrganizationChart"/>
-    <dgm:cxn modelId="{42D52576-21B4-4C13-B9F8-700EAA61D673}" type="presParOf" srcId="{E94EFD84-5C54-40D8-9A8F-C38CEAB04081}" destId="{F49CA836-44E5-4C40-8AC4-2AE0EF430965}" srcOrd="5" destOrd="0" presId="urn:microsoft.com/office/officeart/2009/3/layout/HorizontalOrganizationChart"/>
-    <dgm:cxn modelId="{E86BCFB8-EFBE-4F2F-AED1-9F17E61CE3A4}" type="presParOf" srcId="{F49CA836-44E5-4C40-8AC4-2AE0EF430965}" destId="{FDE5C0D2-1D67-4212-86C6-397D790596CF}" srcOrd="0" destOrd="0" presId="urn:microsoft.com/office/officeart/2009/3/layout/HorizontalOrganizationChart"/>
-    <dgm:cxn modelId="{D542A836-3B00-43AA-A5A0-ECDD4698D82F}" type="presParOf" srcId="{FDE5C0D2-1D67-4212-86C6-397D790596CF}" destId="{FD314EC3-FAF3-42D4-B72F-81E23652E3D9}" srcOrd="0" destOrd="0" presId="urn:microsoft.com/office/officeart/2009/3/layout/HorizontalOrganizationChart"/>
-    <dgm:cxn modelId="{80FD769E-356C-4A57-A74C-6CA27AB1FDF2}" type="presParOf" srcId="{FDE5C0D2-1D67-4212-86C6-397D790596CF}" destId="{3FD13D51-28CB-4ACA-8CF5-784F6B0C3075}" srcOrd="1" destOrd="0" presId="urn:microsoft.com/office/officeart/2009/3/layout/HorizontalOrganizationChart"/>
-    <dgm:cxn modelId="{A9D22EF8-CA71-4C52-A610-227AEC5CF072}" type="presParOf" srcId="{F49CA836-44E5-4C40-8AC4-2AE0EF430965}" destId="{16EE9FFA-E407-4775-9823-E76B3F7213DD}" srcOrd="1" destOrd="0" presId="urn:microsoft.com/office/officeart/2009/3/layout/HorizontalOrganizationChart"/>
-    <dgm:cxn modelId="{6565E233-DB45-4BCB-B3BA-B9A7DF49D8A5}" type="presParOf" srcId="{16EE9FFA-E407-4775-9823-E76B3F7213DD}" destId="{7E682426-9DD9-499F-8054-AD080EABE950}" srcOrd="0" destOrd="0" presId="urn:microsoft.com/office/officeart/2009/3/layout/HorizontalOrganizationChart"/>
-    <dgm:cxn modelId="{4341A7C5-BF10-4824-80B1-467A59A447E2}" type="presParOf" srcId="{16EE9FFA-E407-4775-9823-E76B3F7213DD}" destId="{9AE62F2E-6CB3-4473-B405-A3BA1D9BFA8A}" srcOrd="1" destOrd="0" presId="urn:microsoft.com/office/officeart/2009/3/layout/HorizontalOrganizationChart"/>
-    <dgm:cxn modelId="{C17DEA8D-D3B3-4942-8367-7D852CAC6ECE}" type="presParOf" srcId="{9AE62F2E-6CB3-4473-B405-A3BA1D9BFA8A}" destId="{2D6DC72C-5D67-49D0-B044-6D2B7E2D9CA6}" srcOrd="0" destOrd="0" presId="urn:microsoft.com/office/officeart/2009/3/layout/HorizontalOrganizationChart"/>
-    <dgm:cxn modelId="{F477EE7F-0E5E-4A3E-8B05-F8CB832C9546}" type="presParOf" srcId="{2D6DC72C-5D67-49D0-B044-6D2B7E2D9CA6}" destId="{2CFF43AD-E638-48CC-A1A6-213BB3000388}" srcOrd="0" destOrd="0" presId="urn:microsoft.com/office/officeart/2009/3/layout/HorizontalOrganizationChart"/>
-    <dgm:cxn modelId="{91380170-D5BA-4CC7-81ED-49F9A089C88D}" type="presParOf" srcId="{2D6DC72C-5D67-49D0-B044-6D2B7E2D9CA6}" destId="{47B80075-7A99-4CC4-8E04-7AE4D94B5491}" srcOrd="1" destOrd="0" presId="urn:microsoft.com/office/officeart/2009/3/layout/HorizontalOrganizationChart"/>
-    <dgm:cxn modelId="{FF13077C-DF95-42B1-934C-F89B6E35A399}" type="presParOf" srcId="{9AE62F2E-6CB3-4473-B405-A3BA1D9BFA8A}" destId="{2B1F2EC5-D922-47CB-9075-5C58620A91A3}" srcOrd="1" destOrd="0" presId="urn:microsoft.com/office/officeart/2009/3/layout/HorizontalOrganizationChart"/>
-    <dgm:cxn modelId="{5DB3022A-52C4-4EAD-A7DE-CE92AEA34FD2}" type="presParOf" srcId="{9AE62F2E-6CB3-4473-B405-A3BA1D9BFA8A}" destId="{3CAB886C-4BD0-4321-8ECB-8E4B5608D104}" srcOrd="2" destOrd="0" presId="urn:microsoft.com/office/officeart/2009/3/layout/HorizontalOrganizationChart"/>
-    <dgm:cxn modelId="{A1A88FFE-39C1-4FC0-BC5C-FA1465803CA1}" type="presParOf" srcId="{F49CA836-44E5-4C40-8AC4-2AE0EF430965}" destId="{51EA36A6-1667-467C-86F8-B276FBB41886}" srcOrd="2" destOrd="0" presId="urn:microsoft.com/office/officeart/2009/3/layout/HorizontalOrganizationChart"/>
-    <dgm:cxn modelId="{FBC4A003-E192-414F-91DD-1C1975C07CA3}" type="presParOf" srcId="{E94EFD84-5C54-40D8-9A8F-C38CEAB04081}" destId="{51F75AAC-642B-48ED-B19B-2EA01A0D0209}" srcOrd="6" destOrd="0" presId="urn:microsoft.com/office/officeart/2009/3/layout/HorizontalOrganizationChart"/>
-    <dgm:cxn modelId="{A4539D51-1F0B-4C21-97E4-9E0A358A57F7}" type="presParOf" srcId="{E94EFD84-5C54-40D8-9A8F-C38CEAB04081}" destId="{BA8D7E82-10E0-4B5D-A7A8-5B403C181AAD}" srcOrd="7" destOrd="0" presId="urn:microsoft.com/office/officeart/2009/3/layout/HorizontalOrganizationChart"/>
-    <dgm:cxn modelId="{70C1E6AF-9A7C-4B9F-8596-C10CEE49F797}" type="presParOf" srcId="{BA8D7E82-10E0-4B5D-A7A8-5B403C181AAD}" destId="{ECA125E0-FC36-4EDC-B5F3-63E1C3C35BB0}" srcOrd="0" destOrd="0" presId="urn:microsoft.com/office/officeart/2009/3/layout/HorizontalOrganizationChart"/>
-    <dgm:cxn modelId="{E2558CFC-DEDF-43DB-84DC-ED60DBE49690}" type="presParOf" srcId="{ECA125E0-FC36-4EDC-B5F3-63E1C3C35BB0}" destId="{B7E87C89-F2A3-40BE-A158-9348331D318D}" srcOrd="0" destOrd="0" presId="urn:microsoft.com/office/officeart/2009/3/layout/HorizontalOrganizationChart"/>
-    <dgm:cxn modelId="{603F718B-DD20-40A6-A116-0A3F96347375}" type="presParOf" srcId="{ECA125E0-FC36-4EDC-B5F3-63E1C3C35BB0}" destId="{F4F402F9-353D-4DAF-A0B3-B8E72F14207C}" srcOrd="1" destOrd="0" presId="urn:microsoft.com/office/officeart/2009/3/layout/HorizontalOrganizationChart"/>
-    <dgm:cxn modelId="{2D281D45-165D-4061-83F3-0CAFBE964199}" type="presParOf" srcId="{BA8D7E82-10E0-4B5D-A7A8-5B403C181AAD}" destId="{75DC4A39-6C23-4835-9E4D-4BC7EA472591}" srcOrd="1" destOrd="0" presId="urn:microsoft.com/office/officeart/2009/3/layout/HorizontalOrganizationChart"/>
-    <dgm:cxn modelId="{0AD74773-7F03-47DB-AFFB-3F878213C23B}" type="presParOf" srcId="{75DC4A39-6C23-4835-9E4D-4BC7EA472591}" destId="{893463AD-E827-4ADB-B408-E38128099076}" srcOrd="0" destOrd="0" presId="urn:microsoft.com/office/officeart/2009/3/layout/HorizontalOrganizationChart"/>
-    <dgm:cxn modelId="{D8F6DDEB-15E4-49F7-B29C-43EA2A8F319D}" type="presParOf" srcId="{75DC4A39-6C23-4835-9E4D-4BC7EA472591}" destId="{34334FEB-0A74-4945-9E06-62902E13F72D}" srcOrd="1" destOrd="0" presId="urn:microsoft.com/office/officeart/2009/3/layout/HorizontalOrganizationChart"/>
-    <dgm:cxn modelId="{8C7E8574-73CB-4B3F-8C40-FB760C78ED80}" type="presParOf" srcId="{34334FEB-0A74-4945-9E06-62902E13F72D}" destId="{0A75E738-A60A-41CD-B3C2-B6F965160774}" srcOrd="0" destOrd="0" presId="urn:microsoft.com/office/officeart/2009/3/layout/HorizontalOrganizationChart"/>
-    <dgm:cxn modelId="{58D1B64F-61FD-4965-8A1E-B845279752A7}" type="presParOf" srcId="{0A75E738-A60A-41CD-B3C2-B6F965160774}" destId="{FD27C63C-53AB-4EF5-B065-A5CCC6683CBC}" srcOrd="0" destOrd="0" presId="urn:microsoft.com/office/officeart/2009/3/layout/HorizontalOrganizationChart"/>
-    <dgm:cxn modelId="{F84C77C3-87CF-40F2-B616-EA09F55B1C03}" type="presParOf" srcId="{0A75E738-A60A-41CD-B3C2-B6F965160774}" destId="{B81833A2-355D-431A-B42B-FFB97F5DED7E}" srcOrd="1" destOrd="0" presId="urn:microsoft.com/office/officeart/2009/3/layout/HorizontalOrganizationChart"/>
-    <dgm:cxn modelId="{981AC564-FD1E-4727-96D1-8A5089DCA584}" type="presParOf" srcId="{34334FEB-0A74-4945-9E06-62902E13F72D}" destId="{B75101D1-41FE-4F79-AE84-A03090A9821A}" srcOrd="1" destOrd="0" presId="urn:microsoft.com/office/officeart/2009/3/layout/HorizontalOrganizationChart"/>
-    <dgm:cxn modelId="{DEC6D3F0-B6C1-4ECE-B7D6-CA7374CFB8F0}" type="presParOf" srcId="{34334FEB-0A74-4945-9E06-62902E13F72D}" destId="{E2141735-2F07-4BB8-BD72-01BC72AD7827}" srcOrd="2" destOrd="0" presId="urn:microsoft.com/office/officeart/2009/3/layout/HorizontalOrganizationChart"/>
-    <dgm:cxn modelId="{FFC0EEFC-CA0A-47B5-9245-CF3686268A76}" type="presParOf" srcId="{BA8D7E82-10E0-4B5D-A7A8-5B403C181AAD}" destId="{F121FC04-6ABC-4471-9661-93ED72B93D39}" srcOrd="2" destOrd="0" presId="urn:microsoft.com/office/officeart/2009/3/layout/HorizontalOrganizationChart"/>
-    <dgm:cxn modelId="{E46B135D-65A9-4736-9ED0-84D671ED49C6}" type="presParOf" srcId="{E94EFD84-5C54-40D8-9A8F-C38CEAB04081}" destId="{8B19CEE5-FC4A-40A5-A7B6-1FB7479BBBE5}" srcOrd="8" destOrd="0" presId="urn:microsoft.com/office/officeart/2009/3/layout/HorizontalOrganizationChart"/>
-    <dgm:cxn modelId="{55A8B774-D64D-47CA-B16F-8DE456E2E66B}" type="presParOf" srcId="{E94EFD84-5C54-40D8-9A8F-C38CEAB04081}" destId="{44A8D897-8291-4E69-A253-691929D80E5E}" srcOrd="9" destOrd="0" presId="urn:microsoft.com/office/officeart/2009/3/layout/HorizontalOrganizationChart"/>
-    <dgm:cxn modelId="{B9E470B6-F09A-4C54-929D-EC120A1D65A9}" type="presParOf" srcId="{44A8D897-8291-4E69-A253-691929D80E5E}" destId="{B29E445C-130D-466D-9BC6-3401B845091F}" srcOrd="0" destOrd="0" presId="urn:microsoft.com/office/officeart/2009/3/layout/HorizontalOrganizationChart"/>
-    <dgm:cxn modelId="{1EAD8737-D571-4B48-A2A3-2F3219A59946}" type="presParOf" srcId="{B29E445C-130D-466D-9BC6-3401B845091F}" destId="{77267FA6-0CDF-4F47-97BA-153747EF1791}" srcOrd="0" destOrd="0" presId="urn:microsoft.com/office/officeart/2009/3/layout/HorizontalOrganizationChart"/>
-    <dgm:cxn modelId="{6DE5CAAB-30A4-48A2-91D4-A1DE30D7BD5F}" type="presParOf" srcId="{B29E445C-130D-466D-9BC6-3401B845091F}" destId="{213124F1-A749-4DBC-85FE-5AC202AF5919}" srcOrd="1" destOrd="0" presId="urn:microsoft.com/office/officeart/2009/3/layout/HorizontalOrganizationChart"/>
-    <dgm:cxn modelId="{26F18204-D2A7-48F0-8FD7-62CE39A4E079}" type="presParOf" srcId="{44A8D897-8291-4E69-A253-691929D80E5E}" destId="{6F0A908E-CE1D-48B7-9FC6-B9C6A134D0D8}" srcOrd="1" destOrd="0" presId="urn:microsoft.com/office/officeart/2009/3/layout/HorizontalOrganizationChart"/>
-    <dgm:cxn modelId="{47E66A5A-B631-4777-8301-B8D7712A6AB3}" type="presParOf" srcId="{44A8D897-8291-4E69-A253-691929D80E5E}" destId="{980D180F-0C13-4DC6-B9DC-1434889638D1}" srcOrd="2" destOrd="0" presId="urn:microsoft.com/office/officeart/2009/3/layout/HorizontalOrganizationChart"/>
-    <dgm:cxn modelId="{95F8F229-C057-47C3-9462-C82AE008CF58}" type="presParOf" srcId="{2B3438B6-C4AF-4776-9B02-580A7BE79A50}" destId="{0388B9DF-2E42-4F52-A48F-58CC2C71E622}" srcOrd="2" destOrd="0" presId="urn:microsoft.com/office/officeart/2009/3/layout/HorizontalOrganizationChart"/>
-    <dgm:cxn modelId="{D8641003-36BC-4919-B045-3B3C4CE79E5F}" type="presParOf" srcId="{C516F576-9EA6-4A3E-BB9C-8700E1875F5A}" destId="{68ED52F3-D00D-4FBA-A7F0-19107FBE0261}" srcOrd="6" destOrd="0" presId="urn:microsoft.com/office/officeart/2009/3/layout/HorizontalOrganizationChart"/>
-    <dgm:cxn modelId="{8F33EEED-C95C-413E-8722-CD964AE52562}" type="presParOf" srcId="{C516F576-9EA6-4A3E-BB9C-8700E1875F5A}" destId="{64BE223F-5889-4D6D-A0F4-BB63E949CCCB}" srcOrd="7" destOrd="0" presId="urn:microsoft.com/office/officeart/2009/3/layout/HorizontalOrganizationChart"/>
-    <dgm:cxn modelId="{66351CC2-9A6C-47AD-B52A-10B4878BF518}" type="presParOf" srcId="{64BE223F-5889-4D6D-A0F4-BB63E949CCCB}" destId="{0650E139-1253-4EAC-B9BF-AAABDAC4C50A}" srcOrd="0" destOrd="0" presId="urn:microsoft.com/office/officeart/2009/3/layout/HorizontalOrganizationChart"/>
-    <dgm:cxn modelId="{BF006590-131E-43D8-AF65-A61DC16276AC}" type="presParOf" srcId="{0650E139-1253-4EAC-B9BF-AAABDAC4C50A}" destId="{F727FD69-DA36-400A-9A17-E435D30B6294}" srcOrd="0" destOrd="0" presId="urn:microsoft.com/office/officeart/2009/3/layout/HorizontalOrganizationChart"/>
-    <dgm:cxn modelId="{3A0BDB2A-652B-4A32-815C-4389D322B97F}" type="presParOf" srcId="{0650E139-1253-4EAC-B9BF-AAABDAC4C50A}" destId="{2CB5E2D1-00D5-4B61-9756-D570A792B6B1}" srcOrd="1" destOrd="0" presId="urn:microsoft.com/office/officeart/2009/3/layout/HorizontalOrganizationChart"/>
-    <dgm:cxn modelId="{A234D6E1-352C-4191-BAEF-473D996A121F}" type="presParOf" srcId="{64BE223F-5889-4D6D-A0F4-BB63E949CCCB}" destId="{8C32301D-5FB8-498A-9CA5-A658480BBA39}" srcOrd="1" destOrd="0" presId="urn:microsoft.com/office/officeart/2009/3/layout/HorizontalOrganizationChart"/>
-    <dgm:cxn modelId="{CAD259C4-A393-40EA-BE65-14B216C3907C}" type="presParOf" srcId="{64BE223F-5889-4D6D-A0F4-BB63E949CCCB}" destId="{A267EB81-E463-4D76-BE76-C7894AF884CA}" srcOrd="2" destOrd="0" presId="urn:microsoft.com/office/officeart/2009/3/layout/HorizontalOrganizationChart"/>
-    <dgm:cxn modelId="{70F0BFC5-A577-4BCC-A9E5-B3143972A295}" type="presParOf" srcId="{C516F576-9EA6-4A3E-BB9C-8700E1875F5A}" destId="{C051B183-B590-41B4-8423-18A273DCC6CE}" srcOrd="8" destOrd="0" presId="urn:microsoft.com/office/officeart/2009/3/layout/HorizontalOrganizationChart"/>
-    <dgm:cxn modelId="{E58A7337-EBB2-40E3-98DB-CE054E9A77E0}" type="presParOf" srcId="{C516F576-9EA6-4A3E-BB9C-8700E1875F5A}" destId="{EF252ADE-8F24-4923-893F-2FEA501546F0}" srcOrd="9" destOrd="0" presId="urn:microsoft.com/office/officeart/2009/3/layout/HorizontalOrganizationChart"/>
-    <dgm:cxn modelId="{CCB5902E-E2F7-4D87-A8E6-0D64E40068B9}" type="presParOf" srcId="{EF252ADE-8F24-4923-893F-2FEA501546F0}" destId="{05D653B7-2F99-4133-A805-BCCCAE3E9BE3}" srcOrd="0" destOrd="0" presId="urn:microsoft.com/office/officeart/2009/3/layout/HorizontalOrganizationChart"/>
-    <dgm:cxn modelId="{5F535024-CAAE-47CE-95FD-275D8467E17F}" type="presParOf" srcId="{05D653B7-2F99-4133-A805-BCCCAE3E9BE3}" destId="{B027295A-93BB-4C19-A90B-553BB78E8D73}" srcOrd="0" destOrd="0" presId="urn:microsoft.com/office/officeart/2009/3/layout/HorizontalOrganizationChart"/>
-    <dgm:cxn modelId="{F60F04FA-DDDD-495F-B1F7-49C4EF68503F}" type="presParOf" srcId="{05D653B7-2F99-4133-A805-BCCCAE3E9BE3}" destId="{15203896-4C7D-488D-B574-8B2BB4AE209F}" srcOrd="1" destOrd="0" presId="urn:microsoft.com/office/officeart/2009/3/layout/HorizontalOrganizationChart"/>
-    <dgm:cxn modelId="{2B6E8BC1-530E-411D-AF16-48BA5F8E53F7}" type="presParOf" srcId="{EF252ADE-8F24-4923-893F-2FEA501546F0}" destId="{FC909073-6875-437B-8301-7329DF9D877D}" srcOrd="1" destOrd="0" presId="urn:microsoft.com/office/officeart/2009/3/layout/HorizontalOrganizationChart"/>
-    <dgm:cxn modelId="{8E25837F-9FBC-43D4-B2B5-FE3F9FAB4EA7}" type="presParOf" srcId="{FC909073-6875-437B-8301-7329DF9D877D}" destId="{10EB81BB-2FAE-4863-8B61-F4C17BFFA6D6}" srcOrd="0" destOrd="0" presId="urn:microsoft.com/office/officeart/2009/3/layout/HorizontalOrganizationChart"/>
-    <dgm:cxn modelId="{20F4D35F-91B5-46ED-8560-51C84B8F2C8B}" type="presParOf" srcId="{FC909073-6875-437B-8301-7329DF9D877D}" destId="{C46F1EF1-B875-4283-8030-8CE5A965CE21}" srcOrd="1" destOrd="0" presId="urn:microsoft.com/office/officeart/2009/3/layout/HorizontalOrganizationChart"/>
-    <dgm:cxn modelId="{00FEFC7E-DA61-4CAE-B050-A77CED513DD9}" type="presParOf" srcId="{C46F1EF1-B875-4283-8030-8CE5A965CE21}" destId="{CB9C4A04-7D15-4A43-8BA5-EB32A8B11500}" srcOrd="0" destOrd="0" presId="urn:microsoft.com/office/officeart/2009/3/layout/HorizontalOrganizationChart"/>
-    <dgm:cxn modelId="{00C8860F-C286-4C2B-8409-8FDE8AA4EA60}" type="presParOf" srcId="{CB9C4A04-7D15-4A43-8BA5-EB32A8B11500}" destId="{490BDFA8-D452-4BE4-9F81-245774E0D158}" srcOrd="0" destOrd="0" presId="urn:microsoft.com/office/officeart/2009/3/layout/HorizontalOrganizationChart"/>
-    <dgm:cxn modelId="{B982121A-FF24-4CE1-A032-3DB36733ACE2}" type="presParOf" srcId="{CB9C4A04-7D15-4A43-8BA5-EB32A8B11500}" destId="{D1162B1B-B769-48DB-B85B-AF3C1F73D58F}" srcOrd="1" destOrd="0" presId="urn:microsoft.com/office/officeart/2009/3/layout/HorizontalOrganizationChart"/>
-    <dgm:cxn modelId="{F6376106-EBB3-41A8-B453-DA3E33C5C192}" type="presParOf" srcId="{C46F1EF1-B875-4283-8030-8CE5A965CE21}" destId="{DF467D77-B7F9-4F62-89A6-51F4A7058AA6}" srcOrd="1" destOrd="0" presId="urn:microsoft.com/office/officeart/2009/3/layout/HorizontalOrganizationChart"/>
-    <dgm:cxn modelId="{C9245DE0-ED9D-41D0-84FD-C7992807FE08}" type="presParOf" srcId="{DF467D77-B7F9-4F62-89A6-51F4A7058AA6}" destId="{E53C180E-99C8-4878-A5D0-A54393670C21}" srcOrd="0" destOrd="0" presId="urn:microsoft.com/office/officeart/2009/3/layout/HorizontalOrganizationChart"/>
-    <dgm:cxn modelId="{B85B81A0-5803-477E-9D4E-8A9AC3332746}" type="presParOf" srcId="{DF467D77-B7F9-4F62-89A6-51F4A7058AA6}" destId="{2042EA74-39A6-4A01-BBF1-F23AE808212A}" srcOrd="1" destOrd="0" presId="urn:microsoft.com/office/officeart/2009/3/layout/HorizontalOrganizationChart"/>
-    <dgm:cxn modelId="{7E7F1373-DA71-47C3-81BE-D4A6ABDDF970}" type="presParOf" srcId="{2042EA74-39A6-4A01-BBF1-F23AE808212A}" destId="{5147FB01-2857-4113-ABC7-32880B1752A1}" srcOrd="0" destOrd="0" presId="urn:microsoft.com/office/officeart/2009/3/layout/HorizontalOrganizationChart"/>
-    <dgm:cxn modelId="{07A76F4E-4953-47E0-ABF6-6B2F7E6161C5}" type="presParOf" srcId="{5147FB01-2857-4113-ABC7-32880B1752A1}" destId="{BEB5F23A-260D-4EA4-9C52-D29289AE19DF}" srcOrd="0" destOrd="0" presId="urn:microsoft.com/office/officeart/2009/3/layout/HorizontalOrganizationChart"/>
-    <dgm:cxn modelId="{B7F99D6B-B37D-4591-BBE8-25B0E4A6E2BD}" type="presParOf" srcId="{5147FB01-2857-4113-ABC7-32880B1752A1}" destId="{B70E4C0E-1521-4091-B753-26370D64F4FD}" srcOrd="1" destOrd="0" presId="urn:microsoft.com/office/officeart/2009/3/layout/HorizontalOrganizationChart"/>
-    <dgm:cxn modelId="{CA16BC0A-CF12-4CEA-9192-E66990DFCF88}" type="presParOf" srcId="{2042EA74-39A6-4A01-BBF1-F23AE808212A}" destId="{59A16828-9F48-4DC0-B6AB-56DC66C5C14A}" srcOrd="1" destOrd="0" presId="urn:microsoft.com/office/officeart/2009/3/layout/HorizontalOrganizationChart"/>
-    <dgm:cxn modelId="{E10CF9BB-033C-40BF-9041-1F817AB41538}" type="presParOf" srcId="{2042EA74-39A6-4A01-BBF1-F23AE808212A}" destId="{64DA6633-6213-4B4C-9040-F2F6E0E07A92}" srcOrd="2" destOrd="0" presId="urn:microsoft.com/office/officeart/2009/3/layout/HorizontalOrganizationChart"/>
-    <dgm:cxn modelId="{B1128DFA-B716-402D-AB82-90A7A1B06906}" type="presParOf" srcId="{DF467D77-B7F9-4F62-89A6-51F4A7058AA6}" destId="{26D6FA4F-D6A5-4878-8B80-5B29006D93F2}" srcOrd="2" destOrd="0" presId="urn:microsoft.com/office/officeart/2009/3/layout/HorizontalOrganizationChart"/>
-    <dgm:cxn modelId="{F4542E52-9615-482F-98FA-3DBE40CB3953}" type="presParOf" srcId="{DF467D77-B7F9-4F62-89A6-51F4A7058AA6}" destId="{E5641DC2-99FE-4CFE-BBC9-8BC561313068}" srcOrd="3" destOrd="0" presId="urn:microsoft.com/office/officeart/2009/3/layout/HorizontalOrganizationChart"/>
-    <dgm:cxn modelId="{B9D472DE-DDB6-402E-833C-80043111D5A6}" type="presParOf" srcId="{E5641DC2-99FE-4CFE-BBC9-8BC561313068}" destId="{5C7EC92A-C4CB-4B99-BB1E-AAEF0913B482}" srcOrd="0" destOrd="0" presId="urn:microsoft.com/office/officeart/2009/3/layout/HorizontalOrganizationChart"/>
-    <dgm:cxn modelId="{8DAD8C84-60BD-4519-AF67-52ACFCD2ABC2}" type="presParOf" srcId="{5C7EC92A-C4CB-4B99-BB1E-AAEF0913B482}" destId="{15470CCD-2DC4-4446-952E-0EA1F9168293}" srcOrd="0" destOrd="0" presId="urn:microsoft.com/office/officeart/2009/3/layout/HorizontalOrganizationChart"/>
-    <dgm:cxn modelId="{1EE809B2-870D-492C-A6E6-2C5440FFD4A3}" type="presParOf" srcId="{5C7EC92A-C4CB-4B99-BB1E-AAEF0913B482}" destId="{C1FA8641-48D3-43B7-8727-7E323B1B501C}" srcOrd="1" destOrd="0" presId="urn:microsoft.com/office/officeart/2009/3/layout/HorizontalOrganizationChart"/>
-    <dgm:cxn modelId="{C1A7CEBB-3742-4D23-8DAA-F534D80CE96A}" type="presParOf" srcId="{E5641DC2-99FE-4CFE-BBC9-8BC561313068}" destId="{C6CE1518-27B6-404B-99E1-54C509EB30D2}" srcOrd="1" destOrd="0" presId="urn:microsoft.com/office/officeart/2009/3/layout/HorizontalOrganizationChart"/>
-    <dgm:cxn modelId="{2C0AAB28-7D8D-48D6-9668-9F82FCF5CC0C}" type="presParOf" srcId="{C6CE1518-27B6-404B-99E1-54C509EB30D2}" destId="{C2E4F5E3-2A0B-42BD-8BFA-8E7CDCB5A754}" srcOrd="0" destOrd="0" presId="urn:microsoft.com/office/officeart/2009/3/layout/HorizontalOrganizationChart"/>
-    <dgm:cxn modelId="{AD89C54D-122E-464B-A24F-82936DB58B3A}" type="presParOf" srcId="{C6CE1518-27B6-404B-99E1-54C509EB30D2}" destId="{ABFA4637-8EA1-4BB9-A524-2A1FE95E5257}" srcOrd="1" destOrd="0" presId="urn:microsoft.com/office/officeart/2009/3/layout/HorizontalOrganizationChart"/>
-    <dgm:cxn modelId="{307E966A-E53B-4AE3-A3AD-C1A1558ACB90}" type="presParOf" srcId="{ABFA4637-8EA1-4BB9-A524-2A1FE95E5257}" destId="{A6FDC029-0113-4C4A-9136-B1F1B01F0754}" srcOrd="0" destOrd="0" presId="urn:microsoft.com/office/officeart/2009/3/layout/HorizontalOrganizationChart"/>
-    <dgm:cxn modelId="{9B4ABD2C-7A1C-41D1-86EA-B8E55096F3A1}" type="presParOf" srcId="{A6FDC029-0113-4C4A-9136-B1F1B01F0754}" destId="{9921040E-A9AE-4E20-B3A7-1033725EAB32}" srcOrd="0" destOrd="0" presId="urn:microsoft.com/office/officeart/2009/3/layout/HorizontalOrganizationChart"/>
-    <dgm:cxn modelId="{2FE40C25-2110-4375-9ABC-05E0C7B7DF1F}" type="presParOf" srcId="{A6FDC029-0113-4C4A-9136-B1F1B01F0754}" destId="{3374B034-7516-421E-BD23-9C0F9E320F00}" srcOrd="1" destOrd="0" presId="urn:microsoft.com/office/officeart/2009/3/layout/HorizontalOrganizationChart"/>
-    <dgm:cxn modelId="{78A890D5-A2AC-450E-BBC9-885772A76946}" type="presParOf" srcId="{ABFA4637-8EA1-4BB9-A524-2A1FE95E5257}" destId="{33F80BDE-DC97-4638-BCF9-8B0A5C5B0084}" srcOrd="1" destOrd="0" presId="urn:microsoft.com/office/officeart/2009/3/layout/HorizontalOrganizationChart"/>
-    <dgm:cxn modelId="{A56BAE85-A213-4E1E-98D9-DD4F11BE8E44}" type="presParOf" srcId="{ABFA4637-8EA1-4BB9-A524-2A1FE95E5257}" destId="{D52B820B-8882-45A0-9A47-4DF787F724FF}" srcOrd="2" destOrd="0" presId="urn:microsoft.com/office/officeart/2009/3/layout/HorizontalOrganizationChart"/>
-    <dgm:cxn modelId="{891FD7BC-0621-4E09-832A-F5B75014638E}" type="presParOf" srcId="{C6CE1518-27B6-404B-99E1-54C509EB30D2}" destId="{C23208CB-8112-4EC1-8E1A-4AE7807BED36}" srcOrd="2" destOrd="0" presId="urn:microsoft.com/office/officeart/2009/3/layout/HorizontalOrganizationChart"/>
-    <dgm:cxn modelId="{C98B6873-ED9D-475E-8CD3-0AC5C27FF12E}" type="presParOf" srcId="{C6CE1518-27B6-404B-99E1-54C509EB30D2}" destId="{2644546B-EA91-4559-89A5-D9CC3F2967A0}" srcOrd="3" destOrd="0" presId="urn:microsoft.com/office/officeart/2009/3/layout/HorizontalOrganizationChart"/>
-    <dgm:cxn modelId="{A53CB60D-30B3-4EA8-971C-4A8FC84E3EA9}" type="presParOf" srcId="{2644546B-EA91-4559-89A5-D9CC3F2967A0}" destId="{289E3FC7-5A7E-4052-A541-0F4DFDE43E38}" srcOrd="0" destOrd="0" presId="urn:microsoft.com/office/officeart/2009/3/layout/HorizontalOrganizationChart"/>
-    <dgm:cxn modelId="{1960A25C-423E-4831-A3D9-A0B3DCDE9717}" type="presParOf" srcId="{289E3FC7-5A7E-4052-A541-0F4DFDE43E38}" destId="{4C50E7F0-CBE9-462F-A0E5-5FFE1AE84F4E}" srcOrd="0" destOrd="0" presId="urn:microsoft.com/office/officeart/2009/3/layout/HorizontalOrganizationChart"/>
-    <dgm:cxn modelId="{0C0F0F70-F32C-4786-9433-685C7573EF58}" type="presParOf" srcId="{289E3FC7-5A7E-4052-A541-0F4DFDE43E38}" destId="{86FF5A9C-E5F2-4B8C-83BD-290D4D4AB6AC}" srcOrd="1" destOrd="0" presId="urn:microsoft.com/office/officeart/2009/3/layout/HorizontalOrganizationChart"/>
-    <dgm:cxn modelId="{906F53BD-336C-40AF-A4ED-8CD81E120A69}" type="presParOf" srcId="{2644546B-EA91-4559-89A5-D9CC3F2967A0}" destId="{4816209B-7B93-4538-AC6F-995B7E78A1F7}" srcOrd="1" destOrd="0" presId="urn:microsoft.com/office/officeart/2009/3/layout/HorizontalOrganizationChart"/>
-    <dgm:cxn modelId="{23F40962-EE57-4DF0-A9A3-7B8EA9BCE8DF}" type="presParOf" srcId="{2644546B-EA91-4559-89A5-D9CC3F2967A0}" destId="{D1E7CE6F-9E8B-40AB-83D4-2BDDA3AAD06B}" srcOrd="2" destOrd="0" presId="urn:microsoft.com/office/officeart/2009/3/layout/HorizontalOrganizationChart"/>
-    <dgm:cxn modelId="{E9D3DA1A-3177-4CC5-8A97-0DBB6C0A9F73}" type="presParOf" srcId="{E5641DC2-99FE-4CFE-BBC9-8BC561313068}" destId="{57E71043-9BEF-45AB-827F-B88C2C0B8C64}" srcOrd="2" destOrd="0" presId="urn:microsoft.com/office/officeart/2009/3/layout/HorizontalOrganizationChart"/>
-    <dgm:cxn modelId="{8C2C6FD1-7FCD-4B57-B724-16C6E5B2BF28}" type="presParOf" srcId="{DF467D77-B7F9-4F62-89A6-51F4A7058AA6}" destId="{D13F91A7-7FA0-4602-8F83-D5787EBFEB98}" srcOrd="4" destOrd="0" presId="urn:microsoft.com/office/officeart/2009/3/layout/HorizontalOrganizationChart"/>
-    <dgm:cxn modelId="{CE40B6F7-668E-4D24-9953-0B239A13A370}" type="presParOf" srcId="{DF467D77-B7F9-4F62-89A6-51F4A7058AA6}" destId="{B5E7DA6C-2B95-499E-967F-1829236E4839}" srcOrd="5" destOrd="0" presId="urn:microsoft.com/office/officeart/2009/3/layout/HorizontalOrganizationChart"/>
-    <dgm:cxn modelId="{DD7FAFED-955E-4042-A46F-9AA3F2A4DBB7}" type="presParOf" srcId="{B5E7DA6C-2B95-499E-967F-1829236E4839}" destId="{28F73B73-C4A9-4875-95EE-9F6ED06FA340}" srcOrd="0" destOrd="0" presId="urn:microsoft.com/office/officeart/2009/3/layout/HorizontalOrganizationChart"/>
-    <dgm:cxn modelId="{D1A55854-C172-4A8C-95CE-DA3456FD2B2B}" type="presParOf" srcId="{28F73B73-C4A9-4875-95EE-9F6ED06FA340}" destId="{E142E4F7-A4D2-449F-AA7F-C04C088A3C1F}" srcOrd="0" destOrd="0" presId="urn:microsoft.com/office/officeart/2009/3/layout/HorizontalOrganizationChart"/>
-    <dgm:cxn modelId="{A24617F9-209A-4124-A3C2-FBC06AB727B9}" type="presParOf" srcId="{28F73B73-C4A9-4875-95EE-9F6ED06FA340}" destId="{74B77C7E-36E3-406E-BAC0-4831F4BABB3C}" srcOrd="1" destOrd="0" presId="urn:microsoft.com/office/officeart/2009/3/layout/HorizontalOrganizationChart"/>
-    <dgm:cxn modelId="{8439ECF1-0F75-4D0E-8039-A37D439EEF7A}" type="presParOf" srcId="{B5E7DA6C-2B95-499E-967F-1829236E4839}" destId="{13C0BE53-A6FB-4FC3-BE13-CB6347CDFEC7}" srcOrd="1" destOrd="0" presId="urn:microsoft.com/office/officeart/2009/3/layout/HorizontalOrganizationChart"/>
-    <dgm:cxn modelId="{126E752B-5D16-4268-8A1E-A0005B4A6DBD}" type="presParOf" srcId="{B5E7DA6C-2B95-499E-967F-1829236E4839}" destId="{AC1F50A9-4FB7-4695-9A1B-7F88EE7E2895}" srcOrd="2" destOrd="0" presId="urn:microsoft.com/office/officeart/2009/3/layout/HorizontalOrganizationChart"/>
-    <dgm:cxn modelId="{0315F5AD-9115-4FA2-BB24-94DAAFDA7618}" type="presParOf" srcId="{C46F1EF1-B875-4283-8030-8CE5A965CE21}" destId="{A5C0843B-BF8C-4CD8-BFB8-B34ABB30BC41}" srcOrd="2" destOrd="0" presId="urn:microsoft.com/office/officeart/2009/3/layout/HorizontalOrganizationChart"/>
-    <dgm:cxn modelId="{249C1950-1360-451C-8A14-ADD8FF834C91}" type="presParOf" srcId="{FC909073-6875-437B-8301-7329DF9D877D}" destId="{2CDAEA21-DCC4-4575-A028-8E48B86095C3}" srcOrd="2" destOrd="0" presId="urn:microsoft.com/office/officeart/2009/3/layout/HorizontalOrganizationChart"/>
-    <dgm:cxn modelId="{ADD43B81-E84E-4223-9BA0-60A5CF69B37D}" type="presParOf" srcId="{FC909073-6875-437B-8301-7329DF9D877D}" destId="{B39B5A8D-FDDB-4B5F-9592-FCF82ABC3E36}" srcOrd="3" destOrd="0" presId="urn:microsoft.com/office/officeart/2009/3/layout/HorizontalOrganizationChart"/>
-    <dgm:cxn modelId="{0F6D503E-6053-4C5F-92FC-E6A1D0D5B2B8}" type="presParOf" srcId="{B39B5A8D-FDDB-4B5F-9592-FCF82ABC3E36}" destId="{868FD3F8-36C2-40B9-A0C9-19560145CFAD}" srcOrd="0" destOrd="0" presId="urn:microsoft.com/office/officeart/2009/3/layout/HorizontalOrganizationChart"/>
-    <dgm:cxn modelId="{A5F7AA00-87C7-404C-B051-F839982965A3}" type="presParOf" srcId="{868FD3F8-36C2-40B9-A0C9-19560145CFAD}" destId="{E4AFD26B-C7BB-41CA-A59C-D4C3576380A8}" srcOrd="0" destOrd="0" presId="urn:microsoft.com/office/officeart/2009/3/layout/HorizontalOrganizationChart"/>
-    <dgm:cxn modelId="{494863F3-5749-44EB-9BFC-5184B7866B4D}" type="presParOf" srcId="{868FD3F8-36C2-40B9-A0C9-19560145CFAD}" destId="{8700B5FB-1AEC-447F-A85A-B23DFECB41F1}" srcOrd="1" destOrd="0" presId="urn:microsoft.com/office/officeart/2009/3/layout/HorizontalOrganizationChart"/>
-    <dgm:cxn modelId="{3589B936-59DD-4F99-BCB2-2B9AA85BCE47}" type="presParOf" srcId="{B39B5A8D-FDDB-4B5F-9592-FCF82ABC3E36}" destId="{035F8A94-9F71-4AA7-84F8-CC97894A38B2}" srcOrd="1" destOrd="0" presId="urn:microsoft.com/office/officeart/2009/3/layout/HorizontalOrganizationChart"/>
-    <dgm:cxn modelId="{E1ACCA55-999A-4BA4-8151-85A48A5C3CB1}" type="presParOf" srcId="{B39B5A8D-FDDB-4B5F-9592-FCF82ABC3E36}" destId="{D4F07FEA-5316-4290-9236-A3D544D64BD8}" srcOrd="2" destOrd="0" presId="urn:microsoft.com/office/officeart/2009/3/layout/HorizontalOrganizationChart"/>
-    <dgm:cxn modelId="{5DC74204-FDA8-48F4-B248-F27379BD7F0B}" type="presParOf" srcId="{EF252ADE-8F24-4923-893F-2FEA501546F0}" destId="{ECAD961D-EB82-4766-8C96-2C7D3A9B8785}" srcOrd="2" destOrd="0" presId="urn:microsoft.com/office/officeart/2009/3/layout/HorizontalOrganizationChart"/>
-    <dgm:cxn modelId="{F8BAEC23-B4BF-46B3-B525-804C316988D2}" type="presParOf" srcId="{B353C52D-BACF-435C-8EB5-9A8E19D70CDB}" destId="{7E677738-27E4-4BF5-B256-03F9FCCC2BC4}" srcOrd="2" destOrd="0" presId="urn:microsoft.com/office/officeart/2009/3/layout/HorizontalOrganizationChart"/>
+    <dgm:cxn modelId="{8515D4D8-AC8D-468F-8516-B3F8F6E104C6}" type="presParOf" srcId="{58CB3A1D-119E-4A17-8333-D813B10F6904}" destId="{72548BFA-9BBC-45A7-9143-4A33BB8882F9}" srcOrd="0" destOrd="0" presId="urn:microsoft.com/office/officeart/2009/3/layout/HorizontalOrganizationChart"/>
+    <dgm:cxn modelId="{AEEB19AE-F342-4D91-8D23-1907B7291660}" type="presParOf" srcId="{72548BFA-9BBC-45A7-9143-4A33BB8882F9}" destId="{C6E05D97-7EA0-48B5-B671-3A23A78C70BD}" srcOrd="0" destOrd="0" presId="urn:microsoft.com/office/officeart/2009/3/layout/HorizontalOrganizationChart"/>
+    <dgm:cxn modelId="{66F47CF2-A976-4672-8572-8D3A3BB57C7A}" type="presParOf" srcId="{C6E05D97-7EA0-48B5-B671-3A23A78C70BD}" destId="{03A1BB14-9637-40F9-B5B5-81520F48315F}" srcOrd="0" destOrd="0" presId="urn:microsoft.com/office/officeart/2009/3/layout/HorizontalOrganizationChart"/>
+    <dgm:cxn modelId="{9B37B43E-39A0-4166-A495-41BAE4D2CF8F}" type="presParOf" srcId="{C6E05D97-7EA0-48B5-B671-3A23A78C70BD}" destId="{04C1E8F7-D7F2-4A83-90D5-2A24E89AE95F}" srcOrd="1" destOrd="0" presId="urn:microsoft.com/office/officeart/2009/3/layout/HorizontalOrganizationChart"/>
+    <dgm:cxn modelId="{0DF39032-395B-4E7D-A20D-15161BC945D6}" type="presParOf" srcId="{72548BFA-9BBC-45A7-9143-4A33BB8882F9}" destId="{D843F3EE-B8EE-43C2-86E0-4F7E350611A9}" srcOrd="1" destOrd="0" presId="urn:microsoft.com/office/officeart/2009/3/layout/HorizontalOrganizationChart"/>
+    <dgm:cxn modelId="{8CBABCDB-49BB-469C-95B5-EE145AD0854A}" type="presParOf" srcId="{D843F3EE-B8EE-43C2-86E0-4F7E350611A9}" destId="{E35E075B-61F2-41BC-BC2A-69356E0D43EE}" srcOrd="0" destOrd="0" presId="urn:microsoft.com/office/officeart/2009/3/layout/HorizontalOrganizationChart"/>
+    <dgm:cxn modelId="{7172171C-6111-4A5A-A209-B40176BBAF51}" type="presParOf" srcId="{D843F3EE-B8EE-43C2-86E0-4F7E350611A9}" destId="{644D243D-C3FA-49AC-98C7-4A947FD5C596}" srcOrd="1" destOrd="0" presId="urn:microsoft.com/office/officeart/2009/3/layout/HorizontalOrganizationChart"/>
+    <dgm:cxn modelId="{B4FA4F3E-BF81-4A2B-A522-5A336B49AD59}" type="presParOf" srcId="{644D243D-C3FA-49AC-98C7-4A947FD5C596}" destId="{479C7696-5389-4F7E-AB80-043BC155F2EE}" srcOrd="0" destOrd="0" presId="urn:microsoft.com/office/officeart/2009/3/layout/HorizontalOrganizationChart"/>
+    <dgm:cxn modelId="{DB679A86-49AF-4698-B5F2-F081AD30544E}" type="presParOf" srcId="{479C7696-5389-4F7E-AB80-043BC155F2EE}" destId="{1557FC18-F726-42E8-B0B5-F6D08A985014}" srcOrd="0" destOrd="0" presId="urn:microsoft.com/office/officeart/2009/3/layout/HorizontalOrganizationChart"/>
+    <dgm:cxn modelId="{0539E231-159A-42DB-9D05-4F4BCE8B1661}" type="presParOf" srcId="{479C7696-5389-4F7E-AB80-043BC155F2EE}" destId="{8E0DAD77-8259-47D3-8A7C-09406F1139F1}" srcOrd="1" destOrd="0" presId="urn:microsoft.com/office/officeart/2009/3/layout/HorizontalOrganizationChart"/>
+    <dgm:cxn modelId="{A1863144-FD33-4ACE-B3CC-58A96BE52D66}" type="presParOf" srcId="{644D243D-C3FA-49AC-98C7-4A947FD5C596}" destId="{0580859A-50EF-453D-BFC8-CEC25E8395B7}" srcOrd="1" destOrd="0" presId="urn:microsoft.com/office/officeart/2009/3/layout/HorizontalOrganizationChart"/>
+    <dgm:cxn modelId="{FFEB4B80-E409-42C6-A104-09B75F781225}" type="presParOf" srcId="{0580859A-50EF-453D-BFC8-CEC25E8395B7}" destId="{6D1FD870-2315-4054-B29C-39DF6F98439B}" srcOrd="0" destOrd="0" presId="urn:microsoft.com/office/officeart/2009/3/layout/HorizontalOrganizationChart"/>
+    <dgm:cxn modelId="{A4BDC588-CEB2-4A56-A83A-74E8533F2518}" type="presParOf" srcId="{0580859A-50EF-453D-BFC8-CEC25E8395B7}" destId="{135CFCF6-872B-4789-9B65-2D8EAB952075}" srcOrd="1" destOrd="0" presId="urn:microsoft.com/office/officeart/2009/3/layout/HorizontalOrganizationChart"/>
+    <dgm:cxn modelId="{7A9AE036-A6C2-482B-9EED-FC61E0CFCC27}" type="presParOf" srcId="{135CFCF6-872B-4789-9B65-2D8EAB952075}" destId="{83157CDB-F484-4B87-8293-E4B564ADF99F}" srcOrd="0" destOrd="0" presId="urn:microsoft.com/office/officeart/2009/3/layout/HorizontalOrganizationChart"/>
+    <dgm:cxn modelId="{13456069-A429-41B5-A6DE-C23A89658E99}" type="presParOf" srcId="{83157CDB-F484-4B87-8293-E4B564ADF99F}" destId="{8C383FB3-4D14-4CBA-A0C6-CFF4847BA3EC}" srcOrd="0" destOrd="0" presId="urn:microsoft.com/office/officeart/2009/3/layout/HorizontalOrganizationChart"/>
+    <dgm:cxn modelId="{9143B5A9-3FB1-4AF0-BFF1-7F0A6D1F9D01}" type="presParOf" srcId="{83157CDB-F484-4B87-8293-E4B564ADF99F}" destId="{9D3EEB16-49D5-49C0-85BE-0CF3D3E7D9DC}" srcOrd="1" destOrd="0" presId="urn:microsoft.com/office/officeart/2009/3/layout/HorizontalOrganizationChart"/>
+    <dgm:cxn modelId="{E103090D-EE56-4904-B438-7A8866B40186}" type="presParOf" srcId="{135CFCF6-872B-4789-9B65-2D8EAB952075}" destId="{86E86BCC-29B6-43B0-A110-A4C382B83FA3}" srcOrd="1" destOrd="0" presId="urn:microsoft.com/office/officeart/2009/3/layout/HorizontalOrganizationChart"/>
+    <dgm:cxn modelId="{40C30F2F-832C-4B2E-BACE-EA5F39A1A0AC}" type="presParOf" srcId="{86E86BCC-29B6-43B0-A110-A4C382B83FA3}" destId="{5613D8DC-8394-4EB2-BEC0-4978BB2F3DA3}" srcOrd="0" destOrd="0" presId="urn:microsoft.com/office/officeart/2009/3/layout/HorizontalOrganizationChart"/>
+    <dgm:cxn modelId="{2EB4D8C8-21C0-409A-A34E-9259E78BD870}" type="presParOf" srcId="{86E86BCC-29B6-43B0-A110-A4C382B83FA3}" destId="{7C7902C3-EFB0-42BE-83D6-3EEF998E34AB}" srcOrd="1" destOrd="0" presId="urn:microsoft.com/office/officeart/2009/3/layout/HorizontalOrganizationChart"/>
+    <dgm:cxn modelId="{139067BC-EAB1-4181-A381-A2CFE75B01E2}" type="presParOf" srcId="{7C7902C3-EFB0-42BE-83D6-3EEF998E34AB}" destId="{8670FF6F-47A9-4179-A7EC-2F65366EB1A0}" srcOrd="0" destOrd="0" presId="urn:microsoft.com/office/officeart/2009/3/layout/HorizontalOrganizationChart"/>
+    <dgm:cxn modelId="{F4111C86-F46C-41F6-AFE3-3DC726CEDCF0}" type="presParOf" srcId="{8670FF6F-47A9-4179-A7EC-2F65366EB1A0}" destId="{8A071F50-0936-48EF-AE15-796B92F4F4A2}" srcOrd="0" destOrd="0" presId="urn:microsoft.com/office/officeart/2009/3/layout/HorizontalOrganizationChart"/>
+    <dgm:cxn modelId="{1F5993EB-443E-4F82-ADB7-48A635C255BF}" type="presParOf" srcId="{8670FF6F-47A9-4179-A7EC-2F65366EB1A0}" destId="{BC5242FB-9811-49A0-A754-F9DF7804FA27}" srcOrd="1" destOrd="0" presId="urn:microsoft.com/office/officeart/2009/3/layout/HorizontalOrganizationChart"/>
+    <dgm:cxn modelId="{94CEC1FF-A610-4853-821A-0EEE2E9E45E0}" type="presParOf" srcId="{7C7902C3-EFB0-42BE-83D6-3EEF998E34AB}" destId="{EC9AFF7F-5A8E-4CDA-BB48-AD6FD5B8B872}" srcOrd="1" destOrd="0" presId="urn:microsoft.com/office/officeart/2009/3/layout/HorizontalOrganizationChart"/>
+    <dgm:cxn modelId="{D70E3288-2D4D-43B0-8489-12A85989F81D}" type="presParOf" srcId="{7C7902C3-EFB0-42BE-83D6-3EEF998E34AB}" destId="{7243B122-BF38-47A9-A7FB-01F27DC5A255}" srcOrd="2" destOrd="0" presId="urn:microsoft.com/office/officeart/2009/3/layout/HorizontalOrganizationChart"/>
+    <dgm:cxn modelId="{160BB423-51AD-44F6-8271-1895CB78E58C}" type="presParOf" srcId="{135CFCF6-872B-4789-9B65-2D8EAB952075}" destId="{8948F03F-28E2-4589-96A6-4C0F659AB93C}" srcOrd="2" destOrd="0" presId="urn:microsoft.com/office/officeart/2009/3/layout/HorizontalOrganizationChart"/>
+    <dgm:cxn modelId="{21F0590F-1878-4C90-8CD8-703183F583B9}" type="presParOf" srcId="{0580859A-50EF-453D-BFC8-CEC25E8395B7}" destId="{172AD772-32C1-453D-A10B-AD2F2B8A156F}" srcOrd="2" destOrd="0" presId="urn:microsoft.com/office/officeart/2009/3/layout/HorizontalOrganizationChart"/>
+    <dgm:cxn modelId="{180CAE02-DF66-44D1-808E-D856614678A6}" type="presParOf" srcId="{0580859A-50EF-453D-BFC8-CEC25E8395B7}" destId="{B89BC2F4-8E12-4AAD-AE0E-8BD41F4F6A66}" srcOrd="3" destOrd="0" presId="urn:microsoft.com/office/officeart/2009/3/layout/HorizontalOrganizationChart"/>
+    <dgm:cxn modelId="{BAAA1C34-1102-41E5-A486-F4EB9D8DAF5F}" type="presParOf" srcId="{B89BC2F4-8E12-4AAD-AE0E-8BD41F4F6A66}" destId="{790B3243-67B0-44B6-8319-A1351FA4E1B0}" srcOrd="0" destOrd="0" presId="urn:microsoft.com/office/officeart/2009/3/layout/HorizontalOrganizationChart"/>
+    <dgm:cxn modelId="{615E033F-CD04-405D-86B3-72BF31A53A5E}" type="presParOf" srcId="{790B3243-67B0-44B6-8319-A1351FA4E1B0}" destId="{582577D3-050E-4B41-BF32-01AA487AE0ED}" srcOrd="0" destOrd="0" presId="urn:microsoft.com/office/officeart/2009/3/layout/HorizontalOrganizationChart"/>
+    <dgm:cxn modelId="{835F0052-87E4-4350-97FF-0EB7D059FF04}" type="presParOf" srcId="{790B3243-67B0-44B6-8319-A1351FA4E1B0}" destId="{ADACFA42-F20B-4E19-8623-C276B1FF0253}" srcOrd="1" destOrd="0" presId="urn:microsoft.com/office/officeart/2009/3/layout/HorizontalOrganizationChart"/>
+    <dgm:cxn modelId="{56A7AF53-BD43-48BD-932B-0A1A62BFE7B7}" type="presParOf" srcId="{B89BC2F4-8E12-4AAD-AE0E-8BD41F4F6A66}" destId="{FA7482C3-260F-4FD3-815C-AF4B1B75464D}" srcOrd="1" destOrd="0" presId="urn:microsoft.com/office/officeart/2009/3/layout/HorizontalOrganizationChart"/>
+    <dgm:cxn modelId="{580997DF-0A1C-490F-BD8D-42384E679AFC}" type="presParOf" srcId="{B89BC2F4-8E12-4AAD-AE0E-8BD41F4F6A66}" destId="{5E5EF9F5-E3CC-45C6-99DE-3ACA0A30BE43}" srcOrd="2" destOrd="0" presId="urn:microsoft.com/office/officeart/2009/3/layout/HorizontalOrganizationChart"/>
+    <dgm:cxn modelId="{6F18B700-D021-4C01-B024-09E724F6AB8A}" type="presParOf" srcId="{644D243D-C3FA-49AC-98C7-4A947FD5C596}" destId="{65807902-FF69-40E6-B197-480C58AD0E5A}" srcOrd="2" destOrd="0" presId="urn:microsoft.com/office/officeart/2009/3/layout/HorizontalOrganizationChart"/>
+    <dgm:cxn modelId="{3A8CB891-B71F-44F1-800B-D1AB16072E04}" type="presParOf" srcId="{D843F3EE-B8EE-43C2-86E0-4F7E350611A9}" destId="{B0CC0030-18CD-4C76-8E04-002BB6D32A15}" srcOrd="2" destOrd="0" presId="urn:microsoft.com/office/officeart/2009/3/layout/HorizontalOrganizationChart"/>
+    <dgm:cxn modelId="{D66C6916-FCFE-43C2-AB2B-E879667E0AD3}" type="presParOf" srcId="{D843F3EE-B8EE-43C2-86E0-4F7E350611A9}" destId="{309A1635-DE84-4660-81FA-431325D7FF2B}" srcOrd="3" destOrd="0" presId="urn:microsoft.com/office/officeart/2009/3/layout/HorizontalOrganizationChart"/>
+    <dgm:cxn modelId="{F3404AC2-DDA3-4BB3-A7A1-039EE39D3666}" type="presParOf" srcId="{309A1635-DE84-4660-81FA-431325D7FF2B}" destId="{0FC2F79D-D526-4E6A-A10F-B46305F486B9}" srcOrd="0" destOrd="0" presId="urn:microsoft.com/office/officeart/2009/3/layout/HorizontalOrganizationChart"/>
+    <dgm:cxn modelId="{F3444311-65A2-4AFB-9DB9-E36C2FDC4936}" type="presParOf" srcId="{0FC2F79D-D526-4E6A-A10F-B46305F486B9}" destId="{61A0D4EF-EC3A-4279-BC51-4F36D0B52EB7}" srcOrd="0" destOrd="0" presId="urn:microsoft.com/office/officeart/2009/3/layout/HorizontalOrganizationChart"/>
+    <dgm:cxn modelId="{6D5CCD96-F6CE-44EA-812F-4B7C7ED456FD}" type="presParOf" srcId="{0FC2F79D-D526-4E6A-A10F-B46305F486B9}" destId="{C2C48CC0-3A5A-4EE7-B580-FAF454A09CD8}" srcOrd="1" destOrd="0" presId="urn:microsoft.com/office/officeart/2009/3/layout/HorizontalOrganizationChart"/>
+    <dgm:cxn modelId="{4EA5A11D-AD83-4D31-A11C-6FEB910652E4}" type="presParOf" srcId="{309A1635-DE84-4660-81FA-431325D7FF2B}" destId="{21C05684-978E-4814-BFFD-06D294C8A223}" srcOrd="1" destOrd="0" presId="urn:microsoft.com/office/officeart/2009/3/layout/HorizontalOrganizationChart"/>
+    <dgm:cxn modelId="{561E09B8-23CF-4699-8700-75078E1600D1}" type="presParOf" srcId="{21C05684-978E-4814-BFFD-06D294C8A223}" destId="{0A14706F-1BC6-48E6-BDBA-7B500E589BAD}" srcOrd="0" destOrd="0" presId="urn:microsoft.com/office/officeart/2009/3/layout/HorizontalOrganizationChart"/>
+    <dgm:cxn modelId="{A6DEB45A-18AE-42CF-A77C-F6781717D0A7}" type="presParOf" srcId="{21C05684-978E-4814-BFFD-06D294C8A223}" destId="{297A1475-871F-4B02-9E8C-FA3D011634A1}" srcOrd="1" destOrd="0" presId="urn:microsoft.com/office/officeart/2009/3/layout/HorizontalOrganizationChart"/>
+    <dgm:cxn modelId="{91D028F1-0978-435B-899F-EA1663A2313B}" type="presParOf" srcId="{297A1475-871F-4B02-9E8C-FA3D011634A1}" destId="{E0F525B7-9159-4C99-B924-C6F3E9886623}" srcOrd="0" destOrd="0" presId="urn:microsoft.com/office/officeart/2009/3/layout/HorizontalOrganizationChart"/>
+    <dgm:cxn modelId="{319B3AD4-FC20-4DB6-9BC3-3DB97D36C1D3}" type="presParOf" srcId="{E0F525B7-9159-4C99-B924-C6F3E9886623}" destId="{BAE31ACF-752D-4EA8-8B6E-54DBD06D21AE}" srcOrd="0" destOrd="0" presId="urn:microsoft.com/office/officeart/2009/3/layout/HorizontalOrganizationChart"/>
+    <dgm:cxn modelId="{C5E22992-8E40-4C55-BECA-08EFDB566FCC}" type="presParOf" srcId="{E0F525B7-9159-4C99-B924-C6F3E9886623}" destId="{D46F3F0D-30A4-4DDE-884B-BD4A774332AE}" srcOrd="1" destOrd="0" presId="urn:microsoft.com/office/officeart/2009/3/layout/HorizontalOrganizationChart"/>
+    <dgm:cxn modelId="{3DC5E7BB-1719-4895-8770-23D90F133D9D}" type="presParOf" srcId="{297A1475-871F-4B02-9E8C-FA3D011634A1}" destId="{6322132C-78CD-43CA-BDB1-15934FC6847D}" srcOrd="1" destOrd="0" presId="urn:microsoft.com/office/officeart/2009/3/layout/HorizontalOrganizationChart"/>
+    <dgm:cxn modelId="{649180F8-F268-4217-9781-C2F41C065D31}" type="presParOf" srcId="{6322132C-78CD-43CA-BDB1-15934FC6847D}" destId="{E7F095C9-0EEA-49B6-905E-AC74937B597A}" srcOrd="0" destOrd="0" presId="urn:microsoft.com/office/officeart/2009/3/layout/HorizontalOrganizationChart"/>
+    <dgm:cxn modelId="{4779D7BE-49B4-42F2-8B96-87CD4F7075CD}" type="presParOf" srcId="{6322132C-78CD-43CA-BDB1-15934FC6847D}" destId="{2E752132-E630-4632-9600-9B043BD9E414}" srcOrd="1" destOrd="0" presId="urn:microsoft.com/office/officeart/2009/3/layout/HorizontalOrganizationChart"/>
+    <dgm:cxn modelId="{B030DADD-D107-435B-A63C-377AFDC023A9}" type="presParOf" srcId="{2E752132-E630-4632-9600-9B043BD9E414}" destId="{9118CF5F-B9CB-4640-BAA2-6FDCB656E312}" srcOrd="0" destOrd="0" presId="urn:microsoft.com/office/officeart/2009/3/layout/HorizontalOrganizationChart"/>
+    <dgm:cxn modelId="{B0AF62A6-FB93-4CE3-8D71-9A11DC157721}" type="presParOf" srcId="{9118CF5F-B9CB-4640-BAA2-6FDCB656E312}" destId="{171F98E8-7A93-4667-99EC-A67EE133F035}" srcOrd="0" destOrd="0" presId="urn:microsoft.com/office/officeart/2009/3/layout/HorizontalOrganizationChart"/>
+    <dgm:cxn modelId="{4AA342BC-6ABF-4F12-AD09-82F329AA0BD1}" type="presParOf" srcId="{9118CF5F-B9CB-4640-BAA2-6FDCB656E312}" destId="{B4B0D416-48DF-4327-B6CB-95B60821634B}" srcOrd="1" destOrd="0" presId="urn:microsoft.com/office/officeart/2009/3/layout/HorizontalOrganizationChart"/>
+    <dgm:cxn modelId="{D994EBA0-69C3-4395-86BA-D0D76597E5D3}" type="presParOf" srcId="{2E752132-E630-4632-9600-9B043BD9E414}" destId="{860F5D21-83EC-4D1B-83FE-010E6AAAD6E1}" srcOrd="1" destOrd="0" presId="urn:microsoft.com/office/officeart/2009/3/layout/HorizontalOrganizationChart"/>
+    <dgm:cxn modelId="{29587DE5-39C5-4D05-9C76-C8C1912AD39D}" type="presParOf" srcId="{860F5D21-83EC-4D1B-83FE-010E6AAAD6E1}" destId="{2086A9C7-9135-4192-911C-9FD307A3662E}" srcOrd="0" destOrd="0" presId="urn:microsoft.com/office/officeart/2009/3/layout/HorizontalOrganizationChart"/>
+    <dgm:cxn modelId="{380B6175-D2F8-4BA6-9D6B-B56963C5E836}" type="presParOf" srcId="{860F5D21-83EC-4D1B-83FE-010E6AAAD6E1}" destId="{68B35679-26B2-422F-8E58-AD1E0E71C97A}" srcOrd="1" destOrd="0" presId="urn:microsoft.com/office/officeart/2009/3/layout/HorizontalOrganizationChart"/>
+    <dgm:cxn modelId="{B14A1EA2-B6B9-4304-804F-BC1854F141A0}" type="presParOf" srcId="{68B35679-26B2-422F-8E58-AD1E0E71C97A}" destId="{283CF7F0-2C2A-4996-86E8-B99611999D67}" srcOrd="0" destOrd="0" presId="urn:microsoft.com/office/officeart/2009/3/layout/HorizontalOrganizationChart"/>
+    <dgm:cxn modelId="{452A9719-1390-4ACD-BB60-09DE245D96DF}" type="presParOf" srcId="{283CF7F0-2C2A-4996-86E8-B99611999D67}" destId="{4F157AFE-1A3E-4945-AFFE-3FBFDF773F45}" srcOrd="0" destOrd="0" presId="urn:microsoft.com/office/officeart/2009/3/layout/HorizontalOrganizationChart"/>
+    <dgm:cxn modelId="{C352BCFE-D4C3-42EE-AECD-FBCDDC419668}" type="presParOf" srcId="{283CF7F0-2C2A-4996-86E8-B99611999D67}" destId="{32B448BD-E161-46C8-A1F6-88A373738118}" srcOrd="1" destOrd="0" presId="urn:microsoft.com/office/officeart/2009/3/layout/HorizontalOrganizationChart"/>
+    <dgm:cxn modelId="{E4C975C4-08D3-4F4A-BFE4-81436F2FF118}" type="presParOf" srcId="{68B35679-26B2-422F-8E58-AD1E0E71C97A}" destId="{E336B98F-281B-4A8A-AE13-8063387C03E3}" srcOrd="1" destOrd="0" presId="urn:microsoft.com/office/officeart/2009/3/layout/HorizontalOrganizationChart"/>
+    <dgm:cxn modelId="{59F28106-689D-4A4A-BF08-CE7B4D6E15D0}" type="presParOf" srcId="{68B35679-26B2-422F-8E58-AD1E0E71C97A}" destId="{38ADAED9-8891-4C7D-8154-C0E5F1C45FFB}" srcOrd="2" destOrd="0" presId="urn:microsoft.com/office/officeart/2009/3/layout/HorizontalOrganizationChart"/>
+    <dgm:cxn modelId="{98089BAE-7C6B-48FF-A83A-28085638CD53}" type="presParOf" srcId="{2E752132-E630-4632-9600-9B043BD9E414}" destId="{8A3A4087-C2D1-4E88-BA2C-FF26690A6263}" srcOrd="2" destOrd="0" presId="urn:microsoft.com/office/officeart/2009/3/layout/HorizontalOrganizationChart"/>
+    <dgm:cxn modelId="{0F58CF65-0D3F-403C-8A73-4CA8233CFE5D}" type="presParOf" srcId="{6322132C-78CD-43CA-BDB1-15934FC6847D}" destId="{4CFCDFA8-E01C-4C6B-A731-226D0B6C2C76}" srcOrd="2" destOrd="0" presId="urn:microsoft.com/office/officeart/2009/3/layout/HorizontalOrganizationChart"/>
+    <dgm:cxn modelId="{9EA37A6E-20DB-48D6-9D5A-1EE8924059F0}" type="presParOf" srcId="{6322132C-78CD-43CA-BDB1-15934FC6847D}" destId="{8E96193A-7879-4C54-B22A-A2C9C6D1B243}" srcOrd="3" destOrd="0" presId="urn:microsoft.com/office/officeart/2009/3/layout/HorizontalOrganizationChart"/>
+    <dgm:cxn modelId="{2CCDED3A-9F05-40C6-B9E8-67AA74BC463A}" type="presParOf" srcId="{8E96193A-7879-4C54-B22A-A2C9C6D1B243}" destId="{E49EF6BC-879F-4C43-9032-39D4E59C1122}" srcOrd="0" destOrd="0" presId="urn:microsoft.com/office/officeart/2009/3/layout/HorizontalOrganizationChart"/>
+    <dgm:cxn modelId="{960AA2C0-59DA-4EA7-8B90-90B16D97306F}" type="presParOf" srcId="{E49EF6BC-879F-4C43-9032-39D4E59C1122}" destId="{1ECE9F9F-A668-4333-B43A-1DABED3BF4C5}" srcOrd="0" destOrd="0" presId="urn:microsoft.com/office/officeart/2009/3/layout/HorizontalOrganizationChart"/>
+    <dgm:cxn modelId="{A8534A0E-EBFE-41E3-820F-43687BDD8BFB}" type="presParOf" srcId="{E49EF6BC-879F-4C43-9032-39D4E59C1122}" destId="{33C6A336-A8D1-4674-9B6A-18C545834C69}" srcOrd="1" destOrd="0" presId="urn:microsoft.com/office/officeart/2009/3/layout/HorizontalOrganizationChart"/>
+    <dgm:cxn modelId="{9F7D26BD-CA04-48C1-8FE2-CA0D050F26F0}" type="presParOf" srcId="{8E96193A-7879-4C54-B22A-A2C9C6D1B243}" destId="{B7C1DC1A-E336-4BB4-9D9D-A520B288CB01}" srcOrd="1" destOrd="0" presId="urn:microsoft.com/office/officeart/2009/3/layout/HorizontalOrganizationChart"/>
+    <dgm:cxn modelId="{E4245FBF-C9DA-4D35-B617-B1FB09388ECC}" type="presParOf" srcId="{B7C1DC1A-E336-4BB4-9D9D-A520B288CB01}" destId="{595CFFA0-B569-4A56-8175-567F57E3E286}" srcOrd="0" destOrd="0" presId="urn:microsoft.com/office/officeart/2009/3/layout/HorizontalOrganizationChart"/>
+    <dgm:cxn modelId="{E216E782-2E2A-49C8-BDEE-3E2BD97E64B1}" type="presParOf" srcId="{B7C1DC1A-E336-4BB4-9D9D-A520B288CB01}" destId="{0409A85C-1F0E-4A89-987F-3851A7A68BDF}" srcOrd="1" destOrd="0" presId="urn:microsoft.com/office/officeart/2009/3/layout/HorizontalOrganizationChart"/>
+    <dgm:cxn modelId="{E8846104-E4C7-4A58-A789-BDCC9CF54854}" type="presParOf" srcId="{0409A85C-1F0E-4A89-987F-3851A7A68BDF}" destId="{3DBCD097-5046-4AD9-9F47-C3B6A8869991}" srcOrd="0" destOrd="0" presId="urn:microsoft.com/office/officeart/2009/3/layout/HorizontalOrganizationChart"/>
+    <dgm:cxn modelId="{C12DBB0B-C378-4A9D-94B9-4B841399BEDE}" type="presParOf" srcId="{3DBCD097-5046-4AD9-9F47-C3B6A8869991}" destId="{88A62553-AA35-4C7E-AEE4-0944A5577F9F}" srcOrd="0" destOrd="0" presId="urn:microsoft.com/office/officeart/2009/3/layout/HorizontalOrganizationChart"/>
+    <dgm:cxn modelId="{E8E3A88E-7A9B-4940-BA3B-0BE5DD1FA512}" type="presParOf" srcId="{3DBCD097-5046-4AD9-9F47-C3B6A8869991}" destId="{B1A98113-5456-4FA2-978F-D9BF6518B3D2}" srcOrd="1" destOrd="0" presId="urn:microsoft.com/office/officeart/2009/3/layout/HorizontalOrganizationChart"/>
+    <dgm:cxn modelId="{DEBC1C06-4DC3-4391-B8E1-7DF190C3E8E9}" type="presParOf" srcId="{0409A85C-1F0E-4A89-987F-3851A7A68BDF}" destId="{1AE67292-3C18-4CA8-AB74-0B8B6C5F7208}" srcOrd="1" destOrd="0" presId="urn:microsoft.com/office/officeart/2009/3/layout/HorizontalOrganizationChart"/>
+    <dgm:cxn modelId="{B36BAE4E-BF56-4126-A716-B249B03DF6BF}" type="presParOf" srcId="{0409A85C-1F0E-4A89-987F-3851A7A68BDF}" destId="{ED18E2C5-2C0C-470F-BF50-AE8352C26AD4}" srcOrd="2" destOrd="0" presId="urn:microsoft.com/office/officeart/2009/3/layout/HorizontalOrganizationChart"/>
+    <dgm:cxn modelId="{ED1E6831-D24D-433D-9CF4-67409EBAFF4A}" type="presParOf" srcId="{8E96193A-7879-4C54-B22A-A2C9C6D1B243}" destId="{E32B485E-A57D-472A-85FF-B48E86C2EA4B}" srcOrd="2" destOrd="0" presId="urn:microsoft.com/office/officeart/2009/3/layout/HorizontalOrganizationChart"/>
+    <dgm:cxn modelId="{12EFD440-3DE8-4043-94A7-E8898490A475}" type="presParOf" srcId="{6322132C-78CD-43CA-BDB1-15934FC6847D}" destId="{183240E7-EEA6-46D8-AE60-487B0566B9A2}" srcOrd="4" destOrd="0" presId="urn:microsoft.com/office/officeart/2009/3/layout/HorizontalOrganizationChart"/>
+    <dgm:cxn modelId="{870A35CC-5750-48CE-8BBF-F801158C3CF8}" type="presParOf" srcId="{6322132C-78CD-43CA-BDB1-15934FC6847D}" destId="{CFDB63F1-940F-405A-A9B4-7DDC93AF5869}" srcOrd="5" destOrd="0" presId="urn:microsoft.com/office/officeart/2009/3/layout/HorizontalOrganizationChart"/>
+    <dgm:cxn modelId="{5A93923B-61D9-42EE-A44F-9AAAB722C6D7}" type="presParOf" srcId="{CFDB63F1-940F-405A-A9B4-7DDC93AF5869}" destId="{011E1183-F092-4EB8-9DFF-4332630ED2E5}" srcOrd="0" destOrd="0" presId="urn:microsoft.com/office/officeart/2009/3/layout/HorizontalOrganizationChart"/>
+    <dgm:cxn modelId="{8DFAB989-69E0-4988-A587-CB28E4717A9E}" type="presParOf" srcId="{011E1183-F092-4EB8-9DFF-4332630ED2E5}" destId="{E9A97367-2565-4CA7-B81D-4E147657D835}" srcOrd="0" destOrd="0" presId="urn:microsoft.com/office/officeart/2009/3/layout/HorizontalOrganizationChart"/>
+    <dgm:cxn modelId="{88C64A4D-ABE0-4D8A-8242-0AE44B84E719}" type="presParOf" srcId="{011E1183-F092-4EB8-9DFF-4332630ED2E5}" destId="{2846335E-09B8-4070-8AE1-F4A8659BD36F}" srcOrd="1" destOrd="0" presId="urn:microsoft.com/office/officeart/2009/3/layout/HorizontalOrganizationChart"/>
+    <dgm:cxn modelId="{D96204A1-CFB7-40E6-BF5B-FC01CFD223A5}" type="presParOf" srcId="{CFDB63F1-940F-405A-A9B4-7DDC93AF5869}" destId="{D98298B5-4B34-459A-BC81-9CF46F584A90}" srcOrd="1" destOrd="0" presId="urn:microsoft.com/office/officeart/2009/3/layout/HorizontalOrganizationChart"/>
+    <dgm:cxn modelId="{4AD95CD2-6E52-4569-BEC4-AD34FD71CC57}" type="presParOf" srcId="{CFDB63F1-940F-405A-A9B4-7DDC93AF5869}" destId="{51A25AF1-B8A8-40A6-BC8E-0E3A3D038724}" srcOrd="2" destOrd="0" presId="urn:microsoft.com/office/officeart/2009/3/layout/HorizontalOrganizationChart"/>
+    <dgm:cxn modelId="{A1748AD2-6D0A-4548-BC45-9A3863F7989E}" type="presParOf" srcId="{6322132C-78CD-43CA-BDB1-15934FC6847D}" destId="{B8837C6A-8105-408D-9A2C-4FAA52810339}" srcOrd="6" destOrd="0" presId="urn:microsoft.com/office/officeart/2009/3/layout/HorizontalOrganizationChart"/>
+    <dgm:cxn modelId="{F63414D6-E179-4349-971C-3912F245FD8A}" type="presParOf" srcId="{6322132C-78CD-43CA-BDB1-15934FC6847D}" destId="{7D003827-466D-499B-9492-0D274854DE71}" srcOrd="7" destOrd="0" presId="urn:microsoft.com/office/officeart/2009/3/layout/HorizontalOrganizationChart"/>
+    <dgm:cxn modelId="{49AA19C1-C537-4514-8B3D-517714C1EADA}" type="presParOf" srcId="{7D003827-466D-499B-9492-0D274854DE71}" destId="{8321FBBC-0B02-4D6A-B292-31DB58261631}" srcOrd="0" destOrd="0" presId="urn:microsoft.com/office/officeart/2009/3/layout/HorizontalOrganizationChart"/>
+    <dgm:cxn modelId="{91F8334E-5690-459A-9F2D-CEFD28A6E945}" type="presParOf" srcId="{8321FBBC-0B02-4D6A-B292-31DB58261631}" destId="{3E0FA384-F7A7-4EF5-BB6C-325C5B877E93}" srcOrd="0" destOrd="0" presId="urn:microsoft.com/office/officeart/2009/3/layout/HorizontalOrganizationChart"/>
+    <dgm:cxn modelId="{79FB6999-E98E-4C80-962B-867CD8842453}" type="presParOf" srcId="{8321FBBC-0B02-4D6A-B292-31DB58261631}" destId="{039EE693-846A-452B-938C-A79863754B50}" srcOrd="1" destOrd="0" presId="urn:microsoft.com/office/officeart/2009/3/layout/HorizontalOrganizationChart"/>
+    <dgm:cxn modelId="{1619D4F8-7543-41F6-A486-6F966CB737F0}" type="presParOf" srcId="{7D003827-466D-499B-9492-0D274854DE71}" destId="{15438C47-FF5A-46A4-A923-94CF51153C82}" srcOrd="1" destOrd="0" presId="urn:microsoft.com/office/officeart/2009/3/layout/HorizontalOrganizationChart"/>
+    <dgm:cxn modelId="{DE583545-41E7-49DB-A13B-74608AFF9B19}" type="presParOf" srcId="{15438C47-FF5A-46A4-A923-94CF51153C82}" destId="{D5EFD006-A32B-489A-B809-E3D7E0386B88}" srcOrd="0" destOrd="0" presId="urn:microsoft.com/office/officeart/2009/3/layout/HorizontalOrganizationChart"/>
+    <dgm:cxn modelId="{44339FA5-A389-4C56-BC89-8FFF387EF6F5}" type="presParOf" srcId="{15438C47-FF5A-46A4-A923-94CF51153C82}" destId="{6D2D5EBF-D547-4528-A20C-8F5E2C9B880C}" srcOrd="1" destOrd="0" presId="urn:microsoft.com/office/officeart/2009/3/layout/HorizontalOrganizationChart"/>
+    <dgm:cxn modelId="{693CE7F6-283C-4C5F-ACA5-AA258E23B678}" type="presParOf" srcId="{6D2D5EBF-D547-4528-A20C-8F5E2C9B880C}" destId="{10C34B34-3590-46BB-B6F2-FDE6907AB634}" srcOrd="0" destOrd="0" presId="urn:microsoft.com/office/officeart/2009/3/layout/HorizontalOrganizationChart"/>
+    <dgm:cxn modelId="{D837DDEC-671A-4F44-B7CF-6EFA2CE18F9C}" type="presParOf" srcId="{10C34B34-3590-46BB-B6F2-FDE6907AB634}" destId="{5CE68631-E50F-4A7D-A78E-B9848249D5F3}" srcOrd="0" destOrd="0" presId="urn:microsoft.com/office/officeart/2009/3/layout/HorizontalOrganizationChart"/>
+    <dgm:cxn modelId="{AA6BDF1B-4319-4FDA-808D-86BA6D528620}" type="presParOf" srcId="{10C34B34-3590-46BB-B6F2-FDE6907AB634}" destId="{313097A2-C9D5-4518-B29A-5B216269D568}" srcOrd="1" destOrd="0" presId="urn:microsoft.com/office/officeart/2009/3/layout/HorizontalOrganizationChart"/>
+    <dgm:cxn modelId="{7873FAA0-C512-44B1-BB87-81FD01C34802}" type="presParOf" srcId="{6D2D5EBF-D547-4528-A20C-8F5E2C9B880C}" destId="{23275A76-13D0-4464-8314-473BE340AD8F}" srcOrd="1" destOrd="0" presId="urn:microsoft.com/office/officeart/2009/3/layout/HorizontalOrganizationChart"/>
+    <dgm:cxn modelId="{A7EBDAA9-BFA0-4B58-B8F5-094A6350171B}" type="presParOf" srcId="{6D2D5EBF-D547-4528-A20C-8F5E2C9B880C}" destId="{DB679513-DBB0-4A13-8DD4-A35C9E981A94}" srcOrd="2" destOrd="0" presId="urn:microsoft.com/office/officeart/2009/3/layout/HorizontalOrganizationChart"/>
+    <dgm:cxn modelId="{E541D282-89BB-48FC-9397-ED9E449AF99C}" type="presParOf" srcId="{7D003827-466D-499B-9492-0D274854DE71}" destId="{0F2A9527-4341-4D91-B2A8-08268FCDC96C}" srcOrd="2" destOrd="0" presId="urn:microsoft.com/office/officeart/2009/3/layout/HorizontalOrganizationChart"/>
+    <dgm:cxn modelId="{CA0A3597-4FDC-4445-A114-AEE2DDEFE265}" type="presParOf" srcId="{6322132C-78CD-43CA-BDB1-15934FC6847D}" destId="{16D33CAD-B597-414C-9523-47A079B2FFFB}" srcOrd="8" destOrd="0" presId="urn:microsoft.com/office/officeart/2009/3/layout/HorizontalOrganizationChart"/>
+    <dgm:cxn modelId="{66A905C6-9E9C-46C4-A676-AC1EA57D3E9F}" type="presParOf" srcId="{6322132C-78CD-43CA-BDB1-15934FC6847D}" destId="{2768B59B-453A-42A2-85F9-75C2F9E31EB2}" srcOrd="9" destOrd="0" presId="urn:microsoft.com/office/officeart/2009/3/layout/HorizontalOrganizationChart"/>
+    <dgm:cxn modelId="{3A5F7153-4951-4C5B-A106-C254A5FCE921}" type="presParOf" srcId="{2768B59B-453A-42A2-85F9-75C2F9E31EB2}" destId="{AA82314E-5F22-45DE-BE38-64D9F48D91DF}" srcOrd="0" destOrd="0" presId="urn:microsoft.com/office/officeart/2009/3/layout/HorizontalOrganizationChart"/>
+    <dgm:cxn modelId="{4F78B6C6-ACB1-4ABF-8522-BF9BAFF97E98}" type="presParOf" srcId="{AA82314E-5F22-45DE-BE38-64D9F48D91DF}" destId="{7E303F30-9711-4703-9E93-53900C059588}" srcOrd="0" destOrd="0" presId="urn:microsoft.com/office/officeart/2009/3/layout/HorizontalOrganizationChart"/>
+    <dgm:cxn modelId="{F0ED13A4-887F-44C9-8BD8-54951695CEBF}" type="presParOf" srcId="{AA82314E-5F22-45DE-BE38-64D9F48D91DF}" destId="{6B320540-8EFC-424C-87BB-7A322C848E8D}" srcOrd="1" destOrd="0" presId="urn:microsoft.com/office/officeart/2009/3/layout/HorizontalOrganizationChart"/>
+    <dgm:cxn modelId="{3C35DC6A-E395-4107-BD70-70350D81B698}" type="presParOf" srcId="{2768B59B-453A-42A2-85F9-75C2F9E31EB2}" destId="{3A41FAFC-2989-4EED-BB19-C23AE601C621}" srcOrd="1" destOrd="0" presId="urn:microsoft.com/office/officeart/2009/3/layout/HorizontalOrganizationChart"/>
+    <dgm:cxn modelId="{CAD5897A-0AF2-415E-86C9-A9C29BE89619}" type="presParOf" srcId="{3A41FAFC-2989-4EED-BB19-C23AE601C621}" destId="{AE91CF76-6598-4254-A5BF-61941E0FBFD6}" srcOrd="0" destOrd="0" presId="urn:microsoft.com/office/officeart/2009/3/layout/HorizontalOrganizationChart"/>
+    <dgm:cxn modelId="{0A8F93B3-DF0E-4552-ADD3-51053FA3852C}" type="presParOf" srcId="{3A41FAFC-2989-4EED-BB19-C23AE601C621}" destId="{ECC1C45E-B00C-4A59-AEB9-1F953F5C00A3}" srcOrd="1" destOrd="0" presId="urn:microsoft.com/office/officeart/2009/3/layout/HorizontalOrganizationChart"/>
+    <dgm:cxn modelId="{EA19F49A-FEE5-4494-9AC2-5B89CFDC5C34}" type="presParOf" srcId="{ECC1C45E-B00C-4A59-AEB9-1F953F5C00A3}" destId="{08A8723F-9790-4D05-9A7F-A695DD54ADA0}" srcOrd="0" destOrd="0" presId="urn:microsoft.com/office/officeart/2009/3/layout/HorizontalOrganizationChart"/>
+    <dgm:cxn modelId="{C5A4E98A-BC8B-4999-A6C9-AACEF21000BD}" type="presParOf" srcId="{08A8723F-9790-4D05-9A7F-A695DD54ADA0}" destId="{2A231453-FF0D-443D-87E8-87257BA9B0EE}" srcOrd="0" destOrd="0" presId="urn:microsoft.com/office/officeart/2009/3/layout/HorizontalOrganizationChart"/>
+    <dgm:cxn modelId="{1983D452-13DA-4598-A794-100E8DE4FCB2}" type="presParOf" srcId="{08A8723F-9790-4D05-9A7F-A695DD54ADA0}" destId="{0A0759F7-AEC9-45E6-B0C9-C7C1A3150A4F}" srcOrd="1" destOrd="0" presId="urn:microsoft.com/office/officeart/2009/3/layout/HorizontalOrganizationChart"/>
+    <dgm:cxn modelId="{704A58EB-BECA-4710-8690-337A3E05506D}" type="presParOf" srcId="{ECC1C45E-B00C-4A59-AEB9-1F953F5C00A3}" destId="{F155B652-50D0-4E33-B58C-7DC296E2D5F0}" srcOrd="1" destOrd="0" presId="urn:microsoft.com/office/officeart/2009/3/layout/HorizontalOrganizationChart"/>
+    <dgm:cxn modelId="{F381E3F3-4A1A-46B1-A972-1EE828CBDDC5}" type="presParOf" srcId="{ECC1C45E-B00C-4A59-AEB9-1F953F5C00A3}" destId="{B3A37EE4-B0F0-4588-A807-3153A2E69F69}" srcOrd="2" destOrd="0" presId="urn:microsoft.com/office/officeart/2009/3/layout/HorizontalOrganizationChart"/>
+    <dgm:cxn modelId="{7EE825D2-9413-4145-97C1-D354A5B101D1}" type="presParOf" srcId="{2768B59B-453A-42A2-85F9-75C2F9E31EB2}" destId="{485D3EB7-314F-4C91-B2D4-8AB5126CF5BB}" srcOrd="2" destOrd="0" presId="urn:microsoft.com/office/officeart/2009/3/layout/HorizontalOrganizationChart"/>
+    <dgm:cxn modelId="{7587869D-E5FA-46E5-BC4F-4DFF44CA41C5}" type="presParOf" srcId="{6322132C-78CD-43CA-BDB1-15934FC6847D}" destId="{34B1EDD2-BFE8-4A14-8948-7EEB84EDF964}" srcOrd="10" destOrd="0" presId="urn:microsoft.com/office/officeart/2009/3/layout/HorizontalOrganizationChart"/>
+    <dgm:cxn modelId="{02107F15-E828-4FE7-9E06-A508D4F98144}" type="presParOf" srcId="{6322132C-78CD-43CA-BDB1-15934FC6847D}" destId="{A6B1FB9B-052B-489F-9CB1-187B6E579E3C}" srcOrd="11" destOrd="0" presId="urn:microsoft.com/office/officeart/2009/3/layout/HorizontalOrganizationChart"/>
+    <dgm:cxn modelId="{4D2154EF-8793-4AF3-AA34-A450088179FC}" type="presParOf" srcId="{A6B1FB9B-052B-489F-9CB1-187B6E579E3C}" destId="{FF477795-AE90-4627-9E54-30BBA876CAB3}" srcOrd="0" destOrd="0" presId="urn:microsoft.com/office/officeart/2009/3/layout/HorizontalOrganizationChart"/>
+    <dgm:cxn modelId="{34408C30-CE00-4091-BFF4-FC4D3F91B6C8}" type="presParOf" srcId="{FF477795-AE90-4627-9E54-30BBA876CAB3}" destId="{3D02A4C7-D3F8-46A9-BF13-B91E1207C679}" srcOrd="0" destOrd="0" presId="urn:microsoft.com/office/officeart/2009/3/layout/HorizontalOrganizationChart"/>
+    <dgm:cxn modelId="{8E067FDF-C7F9-4833-AC0B-9BA00385A8F0}" type="presParOf" srcId="{FF477795-AE90-4627-9E54-30BBA876CAB3}" destId="{75AB063C-95C2-4D08-BD75-E990F011A243}" srcOrd="1" destOrd="0" presId="urn:microsoft.com/office/officeart/2009/3/layout/HorizontalOrganizationChart"/>
+    <dgm:cxn modelId="{DD2219C6-2E47-4B4E-9821-44C065B2E4CD}" type="presParOf" srcId="{A6B1FB9B-052B-489F-9CB1-187B6E579E3C}" destId="{896FC98F-C18B-48B6-9368-6A4224F8D339}" srcOrd="1" destOrd="0" presId="urn:microsoft.com/office/officeart/2009/3/layout/HorizontalOrganizationChart"/>
+    <dgm:cxn modelId="{A9ECCE64-AB0B-4122-ACA2-1D259F90A0AC}" type="presParOf" srcId="{896FC98F-C18B-48B6-9368-6A4224F8D339}" destId="{50A4060C-F737-4459-BC6A-B233FEC9432A}" srcOrd="0" destOrd="0" presId="urn:microsoft.com/office/officeart/2009/3/layout/HorizontalOrganizationChart"/>
+    <dgm:cxn modelId="{6ACD5032-D999-47ED-B0DD-B02E456A9C3D}" type="presParOf" srcId="{896FC98F-C18B-48B6-9368-6A4224F8D339}" destId="{D14D68CC-E066-4447-90AF-4E5C4D91C745}" srcOrd="1" destOrd="0" presId="urn:microsoft.com/office/officeart/2009/3/layout/HorizontalOrganizationChart"/>
+    <dgm:cxn modelId="{0D3B6164-663C-4F6D-9844-F1F9F3AAFAAC}" type="presParOf" srcId="{D14D68CC-E066-4447-90AF-4E5C4D91C745}" destId="{4CB1C44D-18C1-45B3-8B69-3E34236607C4}" srcOrd="0" destOrd="0" presId="urn:microsoft.com/office/officeart/2009/3/layout/HorizontalOrganizationChart"/>
+    <dgm:cxn modelId="{94A655F6-E5A5-420D-807D-AB0EF0E6B5C5}" type="presParOf" srcId="{4CB1C44D-18C1-45B3-8B69-3E34236607C4}" destId="{90D35EA2-A25D-449A-8C0B-91C81C67A50C}" srcOrd="0" destOrd="0" presId="urn:microsoft.com/office/officeart/2009/3/layout/HorizontalOrganizationChart"/>
+    <dgm:cxn modelId="{083C9064-72ED-42A4-9601-787085D08140}" type="presParOf" srcId="{4CB1C44D-18C1-45B3-8B69-3E34236607C4}" destId="{89FD8EE9-AA60-48A6-9D40-0DBE92C02DE0}" srcOrd="1" destOrd="0" presId="urn:microsoft.com/office/officeart/2009/3/layout/HorizontalOrganizationChart"/>
+    <dgm:cxn modelId="{F0B1BC6B-E6CE-4B92-B071-F82A4DB0B8D6}" type="presParOf" srcId="{D14D68CC-E066-4447-90AF-4E5C4D91C745}" destId="{53B6FEF6-D5AE-485A-8D43-4347859156E9}" srcOrd="1" destOrd="0" presId="urn:microsoft.com/office/officeart/2009/3/layout/HorizontalOrganizationChart"/>
+    <dgm:cxn modelId="{452C93B9-A173-491A-9CB8-BAEF40450749}" type="presParOf" srcId="{D14D68CC-E066-4447-90AF-4E5C4D91C745}" destId="{6077FBBF-C54E-456A-B261-7861B4F23FB0}" srcOrd="2" destOrd="0" presId="urn:microsoft.com/office/officeart/2009/3/layout/HorizontalOrganizationChart"/>
+    <dgm:cxn modelId="{756819BE-F4B8-4F26-B1D4-69F2AC8BAA49}" type="presParOf" srcId="{A6B1FB9B-052B-489F-9CB1-187B6E579E3C}" destId="{293C3232-9283-4A76-99D0-ACC9F33364EB}" srcOrd="2" destOrd="0" presId="urn:microsoft.com/office/officeart/2009/3/layout/HorizontalOrganizationChart"/>
+    <dgm:cxn modelId="{3BBD2BB6-7C59-455D-8F1A-99C380F2C2DF}" type="presParOf" srcId="{6322132C-78CD-43CA-BDB1-15934FC6847D}" destId="{26800CCF-2CF7-4C2B-BE5D-668243245262}" srcOrd="12" destOrd="0" presId="urn:microsoft.com/office/officeart/2009/3/layout/HorizontalOrganizationChart"/>
+    <dgm:cxn modelId="{FC6F429C-7B77-4E99-A4E0-51810AF88B9B}" type="presParOf" srcId="{6322132C-78CD-43CA-BDB1-15934FC6847D}" destId="{2385C688-3F8F-43A2-A30A-2252C12C33E5}" srcOrd="13" destOrd="0" presId="urn:microsoft.com/office/officeart/2009/3/layout/HorizontalOrganizationChart"/>
+    <dgm:cxn modelId="{1F81243E-C4CA-4E66-BFFC-0D0E89D766B0}" type="presParOf" srcId="{2385C688-3F8F-43A2-A30A-2252C12C33E5}" destId="{581FB53A-4B2E-4286-B82E-94AEB51C2972}" srcOrd="0" destOrd="0" presId="urn:microsoft.com/office/officeart/2009/3/layout/HorizontalOrganizationChart"/>
+    <dgm:cxn modelId="{D4C9C488-863E-49A8-B9DA-0032F38A44FF}" type="presParOf" srcId="{581FB53A-4B2E-4286-B82E-94AEB51C2972}" destId="{9E916334-F27B-4E86-B949-E7079E77F959}" srcOrd="0" destOrd="0" presId="urn:microsoft.com/office/officeart/2009/3/layout/HorizontalOrganizationChart"/>
+    <dgm:cxn modelId="{36B3DC13-98BF-4D8C-AFD2-D0B0949C1473}" type="presParOf" srcId="{581FB53A-4B2E-4286-B82E-94AEB51C2972}" destId="{49F9D926-559F-4648-BFF5-79BEBC70A452}" srcOrd="1" destOrd="0" presId="urn:microsoft.com/office/officeart/2009/3/layout/HorizontalOrganizationChart"/>
+    <dgm:cxn modelId="{20977D9C-BE3E-4EA9-98AA-A8A1F451D344}" type="presParOf" srcId="{2385C688-3F8F-43A2-A30A-2252C12C33E5}" destId="{16DEFBD3-D008-4B05-B2DD-39FF5F864F76}" srcOrd="1" destOrd="0" presId="urn:microsoft.com/office/officeart/2009/3/layout/HorizontalOrganizationChart"/>
+    <dgm:cxn modelId="{BAB35425-0E40-4F8A-8468-323A58549455}" type="presParOf" srcId="{16DEFBD3-D008-4B05-B2DD-39FF5F864F76}" destId="{171E7136-836A-486B-B91D-37B90AC43AE7}" srcOrd="0" destOrd="0" presId="urn:microsoft.com/office/officeart/2009/3/layout/HorizontalOrganizationChart"/>
+    <dgm:cxn modelId="{2E2832BA-154F-4646-AD80-4E99A8EC04E8}" type="presParOf" srcId="{16DEFBD3-D008-4B05-B2DD-39FF5F864F76}" destId="{642302D4-25F5-4191-A6BD-80A90EE256CB}" srcOrd="1" destOrd="0" presId="urn:microsoft.com/office/officeart/2009/3/layout/HorizontalOrganizationChart"/>
+    <dgm:cxn modelId="{1C211B05-712A-4E85-8883-9E41EE9135FE}" type="presParOf" srcId="{642302D4-25F5-4191-A6BD-80A90EE256CB}" destId="{B324F531-5460-45CD-AD63-4E1D583EC186}" srcOrd="0" destOrd="0" presId="urn:microsoft.com/office/officeart/2009/3/layout/HorizontalOrganizationChart"/>
+    <dgm:cxn modelId="{84D1FEC1-DB2D-4C57-8344-0025A9406559}" type="presParOf" srcId="{B324F531-5460-45CD-AD63-4E1D583EC186}" destId="{0BA28261-1ED3-47EB-A7EA-310484F5DF09}" srcOrd="0" destOrd="0" presId="urn:microsoft.com/office/officeart/2009/3/layout/HorizontalOrganizationChart"/>
+    <dgm:cxn modelId="{C7C54DD4-0279-42B3-AC9B-4EA41311156F}" type="presParOf" srcId="{B324F531-5460-45CD-AD63-4E1D583EC186}" destId="{1F3D57A6-91D2-48AA-B105-E07306DABA2F}" srcOrd="1" destOrd="0" presId="urn:microsoft.com/office/officeart/2009/3/layout/HorizontalOrganizationChart"/>
+    <dgm:cxn modelId="{1D6AB9EC-0094-47BD-AB46-F983F62BE848}" type="presParOf" srcId="{642302D4-25F5-4191-A6BD-80A90EE256CB}" destId="{E693CDA9-254D-4703-B79E-4F8CEA104BCE}" srcOrd="1" destOrd="0" presId="urn:microsoft.com/office/officeart/2009/3/layout/HorizontalOrganizationChart"/>
+    <dgm:cxn modelId="{AB013FC6-C57B-47BE-897E-688DBA4D24BF}" type="presParOf" srcId="{E693CDA9-254D-4703-B79E-4F8CEA104BCE}" destId="{D56AF9D6-52CD-49B7-B03A-910C74477DFD}" srcOrd="0" destOrd="0" presId="urn:microsoft.com/office/officeart/2009/3/layout/HorizontalOrganizationChart"/>
+    <dgm:cxn modelId="{3F4F6F0C-8F6F-4F08-A382-90174D64BB3B}" type="presParOf" srcId="{E693CDA9-254D-4703-B79E-4F8CEA104BCE}" destId="{929D98B8-E1AF-4AB0-A72E-45EB1F9E4936}" srcOrd="1" destOrd="0" presId="urn:microsoft.com/office/officeart/2009/3/layout/HorizontalOrganizationChart"/>
+    <dgm:cxn modelId="{D03B0645-489D-4172-9524-D66B1C7E2CE2}" type="presParOf" srcId="{929D98B8-E1AF-4AB0-A72E-45EB1F9E4936}" destId="{94CE8272-7C92-4520-8B2F-7E2EACAF34CA}" srcOrd="0" destOrd="0" presId="urn:microsoft.com/office/officeart/2009/3/layout/HorizontalOrganizationChart"/>
+    <dgm:cxn modelId="{CF7EBD8D-1321-4795-92D8-5F1E1B3802A5}" type="presParOf" srcId="{94CE8272-7C92-4520-8B2F-7E2EACAF34CA}" destId="{B509227D-8391-4FEA-8798-380D7D9E41EE}" srcOrd="0" destOrd="0" presId="urn:microsoft.com/office/officeart/2009/3/layout/HorizontalOrganizationChart"/>
+    <dgm:cxn modelId="{1FC0B09B-F7DA-4420-92B9-9AC4AEC51A80}" type="presParOf" srcId="{94CE8272-7C92-4520-8B2F-7E2EACAF34CA}" destId="{13AAB80B-89C4-451F-A39D-CC96E0BE201C}" srcOrd="1" destOrd="0" presId="urn:microsoft.com/office/officeart/2009/3/layout/HorizontalOrganizationChart"/>
+    <dgm:cxn modelId="{C2FF5D12-5364-4ADD-852A-851F134C968A}" type="presParOf" srcId="{929D98B8-E1AF-4AB0-A72E-45EB1F9E4936}" destId="{037CCFC1-A766-48DA-8CDC-17C070D2D1E8}" srcOrd="1" destOrd="0" presId="urn:microsoft.com/office/officeart/2009/3/layout/HorizontalOrganizationChart"/>
+    <dgm:cxn modelId="{E743CEA3-6CBD-46CA-ACC6-CFE82A607595}" type="presParOf" srcId="{929D98B8-E1AF-4AB0-A72E-45EB1F9E4936}" destId="{0637968F-433B-4694-843C-7733D3911379}" srcOrd="2" destOrd="0" presId="urn:microsoft.com/office/officeart/2009/3/layout/HorizontalOrganizationChart"/>
+    <dgm:cxn modelId="{B1E397FD-C179-4764-BB30-F1BE73C4A936}" type="presParOf" srcId="{642302D4-25F5-4191-A6BD-80A90EE256CB}" destId="{2EBC82D9-8CA9-4573-B5A3-42C5FAEEF36B}" srcOrd="2" destOrd="0" presId="urn:microsoft.com/office/officeart/2009/3/layout/HorizontalOrganizationChart"/>
+    <dgm:cxn modelId="{5545C949-F815-425C-8531-0719F2B46C8F}" type="presParOf" srcId="{2385C688-3F8F-43A2-A30A-2252C12C33E5}" destId="{7B4852E4-0821-4A98-95F4-9B67008C205D}" srcOrd="2" destOrd="0" presId="urn:microsoft.com/office/officeart/2009/3/layout/HorizontalOrganizationChart"/>
+    <dgm:cxn modelId="{E769F373-0FC8-4105-A4E2-BC37ED9447AD}" type="presParOf" srcId="{297A1475-871F-4B02-9E8C-FA3D011634A1}" destId="{0B06169F-9F61-42D6-8ABC-16C0E3ADE867}" srcOrd="2" destOrd="0" presId="urn:microsoft.com/office/officeart/2009/3/layout/HorizontalOrganizationChart"/>
+    <dgm:cxn modelId="{C0497DC9-FEE0-4C59-917E-9A32A048B174}" type="presParOf" srcId="{21C05684-978E-4814-BFFD-06D294C8A223}" destId="{11F963ED-B3F0-41A3-B824-325961929004}" srcOrd="2" destOrd="0" presId="urn:microsoft.com/office/officeart/2009/3/layout/HorizontalOrganizationChart"/>
+    <dgm:cxn modelId="{4A311015-90E6-4349-9E22-212D01FE4AAB}" type="presParOf" srcId="{21C05684-978E-4814-BFFD-06D294C8A223}" destId="{DF6F6EFF-03DB-45D7-9A74-CFE192F02E5B}" srcOrd="3" destOrd="0" presId="urn:microsoft.com/office/officeart/2009/3/layout/HorizontalOrganizationChart"/>
+    <dgm:cxn modelId="{8DF15BEB-32ED-4FEF-82E4-165F4A0446F2}" type="presParOf" srcId="{DF6F6EFF-03DB-45D7-9A74-CFE192F02E5B}" destId="{88B72410-4735-4833-900A-AE12330D8502}" srcOrd="0" destOrd="0" presId="urn:microsoft.com/office/officeart/2009/3/layout/HorizontalOrganizationChart"/>
+    <dgm:cxn modelId="{EFBE15D3-6B0B-47E8-A1CA-C78554A469BD}" type="presParOf" srcId="{88B72410-4735-4833-900A-AE12330D8502}" destId="{8C63EC56-3637-4380-B189-D0B66ADCD3F7}" srcOrd="0" destOrd="0" presId="urn:microsoft.com/office/officeart/2009/3/layout/HorizontalOrganizationChart"/>
+    <dgm:cxn modelId="{A1A7BD2A-A2F1-4CD2-B764-9780945BA667}" type="presParOf" srcId="{88B72410-4735-4833-900A-AE12330D8502}" destId="{AC252788-612D-4E9E-AE60-64A72A6D6716}" srcOrd="1" destOrd="0" presId="urn:microsoft.com/office/officeart/2009/3/layout/HorizontalOrganizationChart"/>
+    <dgm:cxn modelId="{5CE88CF4-7865-49B0-AB13-662E009E0C3F}" type="presParOf" srcId="{DF6F6EFF-03DB-45D7-9A74-CFE192F02E5B}" destId="{7DC8C575-4697-4BB3-BD29-6296054E1F4E}" srcOrd="1" destOrd="0" presId="urn:microsoft.com/office/officeart/2009/3/layout/HorizontalOrganizationChart"/>
+    <dgm:cxn modelId="{BF891F55-AF03-420B-B4E6-0B1593C3370C}" type="presParOf" srcId="{DF6F6EFF-03DB-45D7-9A74-CFE192F02E5B}" destId="{AA35ED9B-1545-493D-AB5A-2EF477C71C83}" srcOrd="2" destOrd="0" presId="urn:microsoft.com/office/officeart/2009/3/layout/HorizontalOrganizationChart"/>
+    <dgm:cxn modelId="{302DA3AD-1F2D-4E69-848A-2FF4F3C8FE98}" type="presParOf" srcId="{309A1635-DE84-4660-81FA-431325D7FF2B}" destId="{D580C470-8173-4D6F-8E9E-D5D672C1D4BB}" srcOrd="2" destOrd="0" presId="urn:microsoft.com/office/officeart/2009/3/layout/HorizontalOrganizationChart"/>
+    <dgm:cxn modelId="{7465504D-4D05-45BE-BC70-56AF4D6E9829}" type="presParOf" srcId="{D843F3EE-B8EE-43C2-86E0-4F7E350611A9}" destId="{3E53AB13-732C-4F83-9B8F-D6D7DB3860B6}" srcOrd="4" destOrd="0" presId="urn:microsoft.com/office/officeart/2009/3/layout/HorizontalOrganizationChart"/>
+    <dgm:cxn modelId="{840351AA-1D53-4F7F-975F-ACA0940728B6}" type="presParOf" srcId="{D843F3EE-B8EE-43C2-86E0-4F7E350611A9}" destId="{2B3438B6-C4AF-4776-9B02-580A7BE79A50}" srcOrd="5" destOrd="0" presId="urn:microsoft.com/office/officeart/2009/3/layout/HorizontalOrganizationChart"/>
+    <dgm:cxn modelId="{2DA46ADA-3722-4DBF-B758-9091CD3BEA63}" type="presParOf" srcId="{2B3438B6-C4AF-4776-9B02-580A7BE79A50}" destId="{E7A4D92D-25D1-46AE-B1D5-E3B02045B764}" srcOrd="0" destOrd="0" presId="urn:microsoft.com/office/officeart/2009/3/layout/HorizontalOrganizationChart"/>
+    <dgm:cxn modelId="{1877F689-375A-4CC7-8E8E-7F392C48AAEC}" type="presParOf" srcId="{E7A4D92D-25D1-46AE-B1D5-E3B02045B764}" destId="{110F79BE-B8CE-48C2-943A-1C7F5605B400}" srcOrd="0" destOrd="0" presId="urn:microsoft.com/office/officeart/2009/3/layout/HorizontalOrganizationChart"/>
+    <dgm:cxn modelId="{C28B04F5-3258-4B5C-B8A9-7E16F4D0BF78}" type="presParOf" srcId="{E7A4D92D-25D1-46AE-B1D5-E3B02045B764}" destId="{B8476156-8F22-41DE-9C5C-CDA42789A7C4}" srcOrd="1" destOrd="0" presId="urn:microsoft.com/office/officeart/2009/3/layout/HorizontalOrganizationChart"/>
+    <dgm:cxn modelId="{AEB68990-2265-4334-9AA1-FB254361D3AE}" type="presParOf" srcId="{2B3438B6-C4AF-4776-9B02-580A7BE79A50}" destId="{E94EFD84-5C54-40D8-9A8F-C38CEAB04081}" srcOrd="1" destOrd="0" presId="urn:microsoft.com/office/officeart/2009/3/layout/HorizontalOrganizationChart"/>
+    <dgm:cxn modelId="{66503FF9-3BF1-414D-8053-752A060322C4}" type="presParOf" srcId="{E94EFD84-5C54-40D8-9A8F-C38CEAB04081}" destId="{554A0E78-C210-4338-8B5C-48DD3D201C5A}" srcOrd="0" destOrd="0" presId="urn:microsoft.com/office/officeart/2009/3/layout/HorizontalOrganizationChart"/>
+    <dgm:cxn modelId="{5D85BF36-623D-487B-A283-14CB54AAF9EF}" type="presParOf" srcId="{E94EFD84-5C54-40D8-9A8F-C38CEAB04081}" destId="{7D941C44-EDB9-43A1-8B0D-A42E00E86928}" srcOrd="1" destOrd="0" presId="urn:microsoft.com/office/officeart/2009/3/layout/HorizontalOrganizationChart"/>
+    <dgm:cxn modelId="{2182DBAA-DAB2-49AE-8404-107F952EF6EA}" type="presParOf" srcId="{7D941C44-EDB9-43A1-8B0D-A42E00E86928}" destId="{37131C8B-8B5A-45A5-BF77-ACCEECE3D803}" srcOrd="0" destOrd="0" presId="urn:microsoft.com/office/officeart/2009/3/layout/HorizontalOrganizationChart"/>
+    <dgm:cxn modelId="{6A20854A-54EA-4368-AA32-BF45169754D7}" type="presParOf" srcId="{37131C8B-8B5A-45A5-BF77-ACCEECE3D803}" destId="{5ED98B15-1271-4C1B-BD70-D93D404A68CE}" srcOrd="0" destOrd="0" presId="urn:microsoft.com/office/officeart/2009/3/layout/HorizontalOrganizationChart"/>
+    <dgm:cxn modelId="{0A979476-738F-4BDB-90B6-A4EA94A72C13}" type="presParOf" srcId="{37131C8B-8B5A-45A5-BF77-ACCEECE3D803}" destId="{32F9F6CA-A9C9-4EC0-B487-8A6B1DDEE396}" srcOrd="1" destOrd="0" presId="urn:microsoft.com/office/officeart/2009/3/layout/HorizontalOrganizationChart"/>
+    <dgm:cxn modelId="{8A2E2B89-64D6-4ADD-9B67-B86B53EBFED7}" type="presParOf" srcId="{7D941C44-EDB9-43A1-8B0D-A42E00E86928}" destId="{6072350C-6373-4705-A9DC-82BB2DD64A3A}" srcOrd="1" destOrd="0" presId="urn:microsoft.com/office/officeart/2009/3/layout/HorizontalOrganizationChart"/>
+    <dgm:cxn modelId="{9AA87128-3276-4306-B763-0A7C35715E45}" type="presParOf" srcId="{6072350C-6373-4705-A9DC-82BB2DD64A3A}" destId="{5D697390-7377-44AA-914E-7F34A506AC17}" srcOrd="0" destOrd="0" presId="urn:microsoft.com/office/officeart/2009/3/layout/HorizontalOrganizationChart"/>
+    <dgm:cxn modelId="{B8F0C071-EE8A-453F-BE91-40B6DAEC7C69}" type="presParOf" srcId="{6072350C-6373-4705-A9DC-82BB2DD64A3A}" destId="{81A249B5-1F4D-4281-8CFD-E20AACD928D8}" srcOrd="1" destOrd="0" presId="urn:microsoft.com/office/officeart/2009/3/layout/HorizontalOrganizationChart"/>
+    <dgm:cxn modelId="{5F88D07F-1321-4D83-8C66-CFC9D0931671}" type="presParOf" srcId="{81A249B5-1F4D-4281-8CFD-E20AACD928D8}" destId="{02C783C3-9198-4864-8220-79C5B39D318A}" srcOrd="0" destOrd="0" presId="urn:microsoft.com/office/officeart/2009/3/layout/HorizontalOrganizationChart"/>
+    <dgm:cxn modelId="{993BD9CF-91CD-4DDF-85B2-033C2818F101}" type="presParOf" srcId="{02C783C3-9198-4864-8220-79C5B39D318A}" destId="{DDF5EC19-41AE-4BDE-81B3-DB61285BD74A}" srcOrd="0" destOrd="0" presId="urn:microsoft.com/office/officeart/2009/3/layout/HorizontalOrganizationChart"/>
+    <dgm:cxn modelId="{2E1C25F9-D08C-4F34-893E-647EC3C5BD8F}" type="presParOf" srcId="{02C783C3-9198-4864-8220-79C5B39D318A}" destId="{6F9A1A66-336B-4BA9-A352-FD8CB9DA2042}" srcOrd="1" destOrd="0" presId="urn:microsoft.com/office/officeart/2009/3/layout/HorizontalOrganizationChart"/>
+    <dgm:cxn modelId="{ADD70A42-3A38-496B-B6C7-81996704DFB6}" type="presParOf" srcId="{81A249B5-1F4D-4281-8CFD-E20AACD928D8}" destId="{D39E991D-3564-4C29-BDB1-716D94172FD1}" srcOrd="1" destOrd="0" presId="urn:microsoft.com/office/officeart/2009/3/layout/HorizontalOrganizationChart"/>
+    <dgm:cxn modelId="{392FBB16-B59A-4F59-87B9-98AC037342EB}" type="presParOf" srcId="{81A249B5-1F4D-4281-8CFD-E20AACD928D8}" destId="{826711E4-43F7-4415-BEE7-D30FE48D53F0}" srcOrd="2" destOrd="0" presId="urn:microsoft.com/office/officeart/2009/3/layout/HorizontalOrganizationChart"/>
+    <dgm:cxn modelId="{8864DC8D-29CB-4012-AC69-543286CDB1A6}" type="presParOf" srcId="{6072350C-6373-4705-A9DC-82BB2DD64A3A}" destId="{7C3BC206-817E-47FC-AA4A-7E68D35E9CC7}" srcOrd="2" destOrd="0" presId="urn:microsoft.com/office/officeart/2009/3/layout/HorizontalOrganizationChart"/>
+    <dgm:cxn modelId="{B36A016F-A52A-42B6-88AA-02E3781D88AF}" type="presParOf" srcId="{6072350C-6373-4705-A9DC-82BB2DD64A3A}" destId="{CE404325-D390-4D1D-A6D6-0523ECB0D0C3}" srcOrd="3" destOrd="0" presId="urn:microsoft.com/office/officeart/2009/3/layout/HorizontalOrganizationChart"/>
+    <dgm:cxn modelId="{CC010546-320D-4FE7-8E12-F64EEAA55BA8}" type="presParOf" srcId="{CE404325-D390-4D1D-A6D6-0523ECB0D0C3}" destId="{6857FE5E-590C-4932-8F31-20B61F623BF8}" srcOrd="0" destOrd="0" presId="urn:microsoft.com/office/officeart/2009/3/layout/HorizontalOrganizationChart"/>
+    <dgm:cxn modelId="{1E2A6686-5A3F-4029-A1C0-D177C5C3D6E1}" type="presParOf" srcId="{6857FE5E-590C-4932-8F31-20B61F623BF8}" destId="{E3458C5F-4332-4439-96AF-FD966B7B137A}" srcOrd="0" destOrd="0" presId="urn:microsoft.com/office/officeart/2009/3/layout/HorizontalOrganizationChart"/>
+    <dgm:cxn modelId="{71474BB5-A3D5-43A2-A907-A171473C9007}" type="presParOf" srcId="{6857FE5E-590C-4932-8F31-20B61F623BF8}" destId="{E64611E0-F76B-4B48-BD4A-3D9E4DE85202}" srcOrd="1" destOrd="0" presId="urn:microsoft.com/office/officeart/2009/3/layout/HorizontalOrganizationChart"/>
+    <dgm:cxn modelId="{5006AC3B-06DA-4F37-A796-20374507A9A1}" type="presParOf" srcId="{CE404325-D390-4D1D-A6D6-0523ECB0D0C3}" destId="{178FB168-8EC0-4C39-B0F2-CBAC9954840C}" srcOrd="1" destOrd="0" presId="urn:microsoft.com/office/officeart/2009/3/layout/HorizontalOrganizationChart"/>
+    <dgm:cxn modelId="{1AF2B4B7-9D27-4045-87DB-72CE64DA5134}" type="presParOf" srcId="{178FB168-8EC0-4C39-B0F2-CBAC9954840C}" destId="{93F93993-47F1-428E-9F9E-450A331F894E}" srcOrd="0" destOrd="0" presId="urn:microsoft.com/office/officeart/2009/3/layout/HorizontalOrganizationChart"/>
+    <dgm:cxn modelId="{D639D024-0DDB-4B31-B67A-F1F47D2107C7}" type="presParOf" srcId="{178FB168-8EC0-4C39-B0F2-CBAC9954840C}" destId="{10C12785-5206-46A6-BA56-0F5E579E9E0C}" srcOrd="1" destOrd="0" presId="urn:microsoft.com/office/officeart/2009/3/layout/HorizontalOrganizationChart"/>
+    <dgm:cxn modelId="{0C0E6D12-83D2-44C1-8877-5106CB412EF9}" type="presParOf" srcId="{10C12785-5206-46A6-BA56-0F5E579E9E0C}" destId="{B50E8FAC-15A9-4F01-9686-6AD3A2985F93}" srcOrd="0" destOrd="0" presId="urn:microsoft.com/office/officeart/2009/3/layout/HorizontalOrganizationChart"/>
+    <dgm:cxn modelId="{1088E71E-2DF6-4938-BFB8-F071D9A6D921}" type="presParOf" srcId="{B50E8FAC-15A9-4F01-9686-6AD3A2985F93}" destId="{07CF39E6-9B2B-4A5F-B780-120DD8E62C9B}" srcOrd="0" destOrd="0" presId="urn:microsoft.com/office/officeart/2009/3/layout/HorizontalOrganizationChart"/>
+    <dgm:cxn modelId="{69125712-D517-47CC-BEDC-B8088DF830F3}" type="presParOf" srcId="{B50E8FAC-15A9-4F01-9686-6AD3A2985F93}" destId="{B2D69DCB-202B-46EC-819A-C954631D964B}" srcOrd="1" destOrd="0" presId="urn:microsoft.com/office/officeart/2009/3/layout/HorizontalOrganizationChart"/>
+    <dgm:cxn modelId="{943331DC-2C9E-48E7-9F63-011EC3A8CB20}" type="presParOf" srcId="{10C12785-5206-46A6-BA56-0F5E579E9E0C}" destId="{39477503-7022-4EFE-910A-4D9CD5006307}" srcOrd="1" destOrd="0" presId="urn:microsoft.com/office/officeart/2009/3/layout/HorizontalOrganizationChart"/>
+    <dgm:cxn modelId="{DA8E1BC0-2FB1-4A9E-AB0E-8D67346C056E}" type="presParOf" srcId="{39477503-7022-4EFE-910A-4D9CD5006307}" destId="{00A95A3F-3AAD-468F-908F-845C4ED90DA2}" srcOrd="0" destOrd="0" presId="urn:microsoft.com/office/officeart/2009/3/layout/HorizontalOrganizationChart"/>
+    <dgm:cxn modelId="{C2C1C738-30A8-42AB-AE8F-B340995C180F}" type="presParOf" srcId="{39477503-7022-4EFE-910A-4D9CD5006307}" destId="{A679DF6E-2E87-49EF-9331-294A3BA4327D}" srcOrd="1" destOrd="0" presId="urn:microsoft.com/office/officeart/2009/3/layout/HorizontalOrganizationChart"/>
+    <dgm:cxn modelId="{CF5C0651-7B4D-4248-BFEA-504D8B23E6DB}" type="presParOf" srcId="{A679DF6E-2E87-49EF-9331-294A3BA4327D}" destId="{F436D6A1-1ADA-4670-B90C-DCE011D93A3B}" srcOrd="0" destOrd="0" presId="urn:microsoft.com/office/officeart/2009/3/layout/HorizontalOrganizationChart"/>
+    <dgm:cxn modelId="{1C622884-9A4D-4296-B800-0BC047550870}" type="presParOf" srcId="{F436D6A1-1ADA-4670-B90C-DCE011D93A3B}" destId="{B652EFB0-A88E-48A1-836A-A245919707FD}" srcOrd="0" destOrd="0" presId="urn:microsoft.com/office/officeart/2009/3/layout/HorizontalOrganizationChart"/>
+    <dgm:cxn modelId="{F8AA76E9-4646-4CFB-B2B7-34FBC5732EC1}" type="presParOf" srcId="{F436D6A1-1ADA-4670-B90C-DCE011D93A3B}" destId="{DC81B629-CD82-4B25-9F47-C4E4D420D1AE}" srcOrd="1" destOrd="0" presId="urn:microsoft.com/office/officeart/2009/3/layout/HorizontalOrganizationChart"/>
+    <dgm:cxn modelId="{C94C140D-C362-45A5-9DEF-2B6397BCDFCC}" type="presParOf" srcId="{A679DF6E-2E87-49EF-9331-294A3BA4327D}" destId="{6D88FD24-272B-4F88-85DA-3D20C3E257B3}" srcOrd="1" destOrd="0" presId="urn:microsoft.com/office/officeart/2009/3/layout/HorizontalOrganizationChart"/>
+    <dgm:cxn modelId="{C24B5BCD-2E82-450D-A6DF-858EF78264E7}" type="presParOf" srcId="{A679DF6E-2E87-49EF-9331-294A3BA4327D}" destId="{06F8F34C-15EC-4471-A6D4-438E4D10EB3A}" srcOrd="2" destOrd="0" presId="urn:microsoft.com/office/officeart/2009/3/layout/HorizontalOrganizationChart"/>
+    <dgm:cxn modelId="{60DE89E5-E678-4FF8-9FD2-8F5EB0B9D1B4}" type="presParOf" srcId="{10C12785-5206-46A6-BA56-0F5E579E9E0C}" destId="{B8B3B9BF-9701-4947-ACE9-1AEAD028B857}" srcOrd="2" destOrd="0" presId="urn:microsoft.com/office/officeart/2009/3/layout/HorizontalOrganizationChart"/>
+    <dgm:cxn modelId="{B87B38CB-B6CD-42F2-A6E5-F1D496AAD418}" type="presParOf" srcId="{178FB168-8EC0-4C39-B0F2-CBAC9954840C}" destId="{CA185CE9-65D3-4677-966D-33B7645E2257}" srcOrd="2" destOrd="0" presId="urn:microsoft.com/office/officeart/2009/3/layout/HorizontalOrganizationChart"/>
+    <dgm:cxn modelId="{881DA124-5387-42AF-89CC-76B5573ED7A1}" type="presParOf" srcId="{178FB168-8EC0-4C39-B0F2-CBAC9954840C}" destId="{EC40E019-0120-4F45-94FE-CCD6C60DCCFC}" srcOrd="3" destOrd="0" presId="urn:microsoft.com/office/officeart/2009/3/layout/HorizontalOrganizationChart"/>
+    <dgm:cxn modelId="{5E360286-01B0-4CF2-BB4D-0D5F40324EA3}" type="presParOf" srcId="{EC40E019-0120-4F45-94FE-CCD6C60DCCFC}" destId="{E12CBF1C-8ECA-451E-8BF7-19C54F17F51C}" srcOrd="0" destOrd="0" presId="urn:microsoft.com/office/officeart/2009/3/layout/HorizontalOrganizationChart"/>
+    <dgm:cxn modelId="{1254530C-8EDC-4DE3-8BB8-566997F89CE7}" type="presParOf" srcId="{E12CBF1C-8ECA-451E-8BF7-19C54F17F51C}" destId="{1D1D8692-63AE-448E-8E39-430F6A4B46BF}" srcOrd="0" destOrd="0" presId="urn:microsoft.com/office/officeart/2009/3/layout/HorizontalOrganizationChart"/>
+    <dgm:cxn modelId="{A2C111F4-4B56-4FC9-B2C1-368589A6060B}" type="presParOf" srcId="{E12CBF1C-8ECA-451E-8BF7-19C54F17F51C}" destId="{18E21695-07C6-4F19-99E8-D16CE3157C9B}" srcOrd="1" destOrd="0" presId="urn:microsoft.com/office/officeart/2009/3/layout/HorizontalOrganizationChart"/>
+    <dgm:cxn modelId="{3CD9584E-641C-43EB-A4FE-7126124EEACA}" type="presParOf" srcId="{EC40E019-0120-4F45-94FE-CCD6C60DCCFC}" destId="{3BDF94F5-1D25-402E-8247-6F898723BBB9}" srcOrd="1" destOrd="0" presId="urn:microsoft.com/office/officeart/2009/3/layout/HorizontalOrganizationChart"/>
+    <dgm:cxn modelId="{6CEF728F-4C01-4EFF-8E44-F34C49487948}" type="presParOf" srcId="{3BDF94F5-1D25-402E-8247-6F898723BBB9}" destId="{6EBCB12D-6D77-4447-9F58-D885806C37C1}" srcOrd="0" destOrd="0" presId="urn:microsoft.com/office/officeart/2009/3/layout/HorizontalOrganizationChart"/>
+    <dgm:cxn modelId="{C033A6B9-644D-428D-99CB-93937E854763}" type="presParOf" srcId="{3BDF94F5-1D25-402E-8247-6F898723BBB9}" destId="{C4BC5194-FE1C-4020-9B78-BED164EFDC75}" srcOrd="1" destOrd="0" presId="urn:microsoft.com/office/officeart/2009/3/layout/HorizontalOrganizationChart"/>
+    <dgm:cxn modelId="{8CEF1D7B-B654-444C-BCD2-688E88E816F6}" type="presParOf" srcId="{C4BC5194-FE1C-4020-9B78-BED164EFDC75}" destId="{6F6AD7DC-1E5E-41D5-81EA-F136CC76DE3B}" srcOrd="0" destOrd="0" presId="urn:microsoft.com/office/officeart/2009/3/layout/HorizontalOrganizationChart"/>
+    <dgm:cxn modelId="{29BCCA25-3643-48D7-916A-0EA32D3E40E3}" type="presParOf" srcId="{6F6AD7DC-1E5E-41D5-81EA-F136CC76DE3B}" destId="{CF184D97-6870-475F-82DD-C951C974B444}" srcOrd="0" destOrd="0" presId="urn:microsoft.com/office/officeart/2009/3/layout/HorizontalOrganizationChart"/>
+    <dgm:cxn modelId="{B1F2BF37-5266-4147-A967-7B7248614B35}" type="presParOf" srcId="{6F6AD7DC-1E5E-41D5-81EA-F136CC76DE3B}" destId="{368DE4E4-C42A-435E-AD32-88164C04A62F}" srcOrd="1" destOrd="0" presId="urn:microsoft.com/office/officeart/2009/3/layout/HorizontalOrganizationChart"/>
+    <dgm:cxn modelId="{C66BEE9D-A222-408D-9B20-684C5BA0197E}" type="presParOf" srcId="{C4BC5194-FE1C-4020-9B78-BED164EFDC75}" destId="{2F5EE40E-768E-468A-97CB-B7D089D3E5A6}" srcOrd="1" destOrd="0" presId="urn:microsoft.com/office/officeart/2009/3/layout/HorizontalOrganizationChart"/>
+    <dgm:cxn modelId="{CCD8381B-F891-4431-BEA0-32DB2CA8440D}" type="presParOf" srcId="{C4BC5194-FE1C-4020-9B78-BED164EFDC75}" destId="{3527D649-6D94-44F6-949B-641733A2557F}" srcOrd="2" destOrd="0" presId="urn:microsoft.com/office/officeart/2009/3/layout/HorizontalOrganizationChart"/>
+    <dgm:cxn modelId="{EC8F5814-611C-4D5D-8102-883FE70845C0}" type="presParOf" srcId="{EC40E019-0120-4F45-94FE-CCD6C60DCCFC}" destId="{A67D8E25-55D4-42F5-B7CB-B526BAD5CB0E}" srcOrd="2" destOrd="0" presId="urn:microsoft.com/office/officeart/2009/3/layout/HorizontalOrganizationChart"/>
+    <dgm:cxn modelId="{B50E5670-7867-4402-8557-6B053E5EAADF}" type="presParOf" srcId="{CE404325-D390-4D1D-A6D6-0523ECB0D0C3}" destId="{D097B0BF-81C7-4309-9852-2E865B8B14EA}" srcOrd="2" destOrd="0" presId="urn:microsoft.com/office/officeart/2009/3/layout/HorizontalOrganizationChart"/>
+    <dgm:cxn modelId="{10C1B9E5-F219-4C05-9080-058B79781184}" type="presParOf" srcId="{6072350C-6373-4705-A9DC-82BB2DD64A3A}" destId="{418A319B-5CB8-4C1A-929A-A579AE777841}" srcOrd="4" destOrd="0" presId="urn:microsoft.com/office/officeart/2009/3/layout/HorizontalOrganizationChart"/>
+    <dgm:cxn modelId="{91063CC3-53D4-4CB6-BEB2-9D7F68AE3514}" type="presParOf" srcId="{6072350C-6373-4705-A9DC-82BB2DD64A3A}" destId="{F49CA836-44E5-4C40-8AC4-2AE0EF430965}" srcOrd="5" destOrd="0" presId="urn:microsoft.com/office/officeart/2009/3/layout/HorizontalOrganizationChart"/>
+    <dgm:cxn modelId="{659675E5-4239-42E2-AA3F-74060F94DFB6}" type="presParOf" srcId="{F49CA836-44E5-4C40-8AC4-2AE0EF430965}" destId="{FDE5C0D2-1D67-4212-86C6-397D790596CF}" srcOrd="0" destOrd="0" presId="urn:microsoft.com/office/officeart/2009/3/layout/HorizontalOrganizationChart"/>
+    <dgm:cxn modelId="{AAABB6D0-4C0E-44FA-9DD6-5E4381C3C7D4}" type="presParOf" srcId="{FDE5C0D2-1D67-4212-86C6-397D790596CF}" destId="{FD314EC3-FAF3-42D4-B72F-81E23652E3D9}" srcOrd="0" destOrd="0" presId="urn:microsoft.com/office/officeart/2009/3/layout/HorizontalOrganizationChart"/>
+    <dgm:cxn modelId="{0E4747EF-9D07-4F8E-ABF2-331C106069A1}" type="presParOf" srcId="{FDE5C0D2-1D67-4212-86C6-397D790596CF}" destId="{3FD13D51-28CB-4ACA-8CF5-784F6B0C3075}" srcOrd="1" destOrd="0" presId="urn:microsoft.com/office/officeart/2009/3/layout/HorizontalOrganizationChart"/>
+    <dgm:cxn modelId="{BEFC2C34-8848-4827-A7F6-3DFD485F1E47}" type="presParOf" srcId="{F49CA836-44E5-4C40-8AC4-2AE0EF430965}" destId="{16EE9FFA-E407-4775-9823-E76B3F7213DD}" srcOrd="1" destOrd="0" presId="urn:microsoft.com/office/officeart/2009/3/layout/HorizontalOrganizationChart"/>
+    <dgm:cxn modelId="{CD79771F-423D-4F5E-B2B1-787391BE0F79}" type="presParOf" srcId="{16EE9FFA-E407-4775-9823-E76B3F7213DD}" destId="{9296E3D5-989F-4B79-93AD-BF39EEE4C999}" srcOrd="0" destOrd="0" presId="urn:microsoft.com/office/officeart/2009/3/layout/HorizontalOrganizationChart"/>
+    <dgm:cxn modelId="{3C500235-B4B8-4241-B972-FB11C243812D}" type="presParOf" srcId="{16EE9FFA-E407-4775-9823-E76B3F7213DD}" destId="{9AE62F2E-6CB3-4473-B405-A3BA1D9BFA8A}" srcOrd="1" destOrd="0" presId="urn:microsoft.com/office/officeart/2009/3/layout/HorizontalOrganizationChart"/>
+    <dgm:cxn modelId="{BA4FF887-7427-44DA-B75B-5FF20955A808}" type="presParOf" srcId="{9AE62F2E-6CB3-4473-B405-A3BA1D9BFA8A}" destId="{2D6DC72C-5D67-49D0-B044-6D2B7E2D9CA6}" srcOrd="0" destOrd="0" presId="urn:microsoft.com/office/officeart/2009/3/layout/HorizontalOrganizationChart"/>
+    <dgm:cxn modelId="{B48CD820-D38E-47A0-8C5E-3386D26C1D1C}" type="presParOf" srcId="{2D6DC72C-5D67-49D0-B044-6D2B7E2D9CA6}" destId="{2CFF43AD-E638-48CC-A1A6-213BB3000388}" srcOrd="0" destOrd="0" presId="urn:microsoft.com/office/officeart/2009/3/layout/HorizontalOrganizationChart"/>
+    <dgm:cxn modelId="{3C13C65C-5C4F-4D9A-BC33-2313F5B848BA}" type="presParOf" srcId="{2D6DC72C-5D67-49D0-B044-6D2B7E2D9CA6}" destId="{47B80075-7A99-4CC4-8E04-7AE4D94B5491}" srcOrd="1" destOrd="0" presId="urn:microsoft.com/office/officeart/2009/3/layout/HorizontalOrganizationChart"/>
+    <dgm:cxn modelId="{B77DDD4C-FEF0-4519-AEB5-8B909345737B}" type="presParOf" srcId="{9AE62F2E-6CB3-4473-B405-A3BA1D9BFA8A}" destId="{2B1F2EC5-D922-47CB-9075-5C58620A91A3}" srcOrd="1" destOrd="0" presId="urn:microsoft.com/office/officeart/2009/3/layout/HorizontalOrganizationChart"/>
+    <dgm:cxn modelId="{F5F90D0F-83A0-4AD5-A3D9-B7F297A0CBC2}" type="presParOf" srcId="{9AE62F2E-6CB3-4473-B405-A3BA1D9BFA8A}" destId="{3CAB886C-4BD0-4321-8ECB-8E4B5608D104}" srcOrd="2" destOrd="0" presId="urn:microsoft.com/office/officeart/2009/3/layout/HorizontalOrganizationChart"/>
+    <dgm:cxn modelId="{ACE2B376-A37B-4933-87E8-FC092768065C}" type="presParOf" srcId="{F49CA836-44E5-4C40-8AC4-2AE0EF430965}" destId="{51EA36A6-1667-467C-86F8-B276FBB41886}" srcOrd="2" destOrd="0" presId="urn:microsoft.com/office/officeart/2009/3/layout/HorizontalOrganizationChart"/>
+    <dgm:cxn modelId="{BD0460F3-D05D-4824-A521-89FBCB33E236}" type="presParOf" srcId="{6072350C-6373-4705-A9DC-82BB2DD64A3A}" destId="{325B629F-ABB1-4EC6-9F54-565334BD27E2}" srcOrd="6" destOrd="0" presId="urn:microsoft.com/office/officeart/2009/3/layout/HorizontalOrganizationChart"/>
+    <dgm:cxn modelId="{BB96F843-2C58-4DB5-994B-A687F27835A6}" type="presParOf" srcId="{6072350C-6373-4705-A9DC-82BB2DD64A3A}" destId="{BA8D7E82-10E0-4B5D-A7A8-5B403C181AAD}" srcOrd="7" destOrd="0" presId="urn:microsoft.com/office/officeart/2009/3/layout/HorizontalOrganizationChart"/>
+    <dgm:cxn modelId="{72021BB3-7BA3-4E11-A792-34647998035A}" type="presParOf" srcId="{BA8D7E82-10E0-4B5D-A7A8-5B403C181AAD}" destId="{ECA125E0-FC36-4EDC-B5F3-63E1C3C35BB0}" srcOrd="0" destOrd="0" presId="urn:microsoft.com/office/officeart/2009/3/layout/HorizontalOrganizationChart"/>
+    <dgm:cxn modelId="{5588BEA9-C64D-4A39-ABC3-64C0D966A924}" type="presParOf" srcId="{ECA125E0-FC36-4EDC-B5F3-63E1C3C35BB0}" destId="{B7E87C89-F2A3-40BE-A158-9348331D318D}" srcOrd="0" destOrd="0" presId="urn:microsoft.com/office/officeart/2009/3/layout/HorizontalOrganizationChart"/>
+    <dgm:cxn modelId="{ADA2D1F5-F2A6-43EA-BB95-89190B98855E}" type="presParOf" srcId="{ECA125E0-FC36-4EDC-B5F3-63E1C3C35BB0}" destId="{F4F402F9-353D-4DAF-A0B3-B8E72F14207C}" srcOrd="1" destOrd="0" presId="urn:microsoft.com/office/officeart/2009/3/layout/HorizontalOrganizationChart"/>
+    <dgm:cxn modelId="{AE8CA8D1-A01A-470F-8264-F0EE01A6E9E5}" type="presParOf" srcId="{BA8D7E82-10E0-4B5D-A7A8-5B403C181AAD}" destId="{75DC4A39-6C23-4835-9E4D-4BC7EA472591}" srcOrd="1" destOrd="0" presId="urn:microsoft.com/office/officeart/2009/3/layout/HorizontalOrganizationChart"/>
+    <dgm:cxn modelId="{080881A3-B495-462D-840E-6F8A47E836DF}" type="presParOf" srcId="{75DC4A39-6C23-4835-9E4D-4BC7EA472591}" destId="{C1341CAE-26B4-413C-B659-B4133610AE2C}" srcOrd="0" destOrd="0" presId="urn:microsoft.com/office/officeart/2009/3/layout/HorizontalOrganizationChart"/>
+    <dgm:cxn modelId="{D46A71F9-60AE-4F28-90A3-1E2DC46C9667}" type="presParOf" srcId="{75DC4A39-6C23-4835-9E4D-4BC7EA472591}" destId="{34334FEB-0A74-4945-9E06-62902E13F72D}" srcOrd="1" destOrd="0" presId="urn:microsoft.com/office/officeart/2009/3/layout/HorizontalOrganizationChart"/>
+    <dgm:cxn modelId="{4B09160F-4C0F-4F96-89E1-82B4EFFA9EF5}" type="presParOf" srcId="{34334FEB-0A74-4945-9E06-62902E13F72D}" destId="{0A75E738-A60A-41CD-B3C2-B6F965160774}" srcOrd="0" destOrd="0" presId="urn:microsoft.com/office/officeart/2009/3/layout/HorizontalOrganizationChart"/>
+    <dgm:cxn modelId="{A77CD9AF-E40D-47C2-8B20-3CF6FC863878}" type="presParOf" srcId="{0A75E738-A60A-41CD-B3C2-B6F965160774}" destId="{FD27C63C-53AB-4EF5-B065-A5CCC6683CBC}" srcOrd="0" destOrd="0" presId="urn:microsoft.com/office/officeart/2009/3/layout/HorizontalOrganizationChart"/>
+    <dgm:cxn modelId="{BCF70540-22A9-4F40-9F56-0AC00B376FBA}" type="presParOf" srcId="{0A75E738-A60A-41CD-B3C2-B6F965160774}" destId="{B81833A2-355D-431A-B42B-FFB97F5DED7E}" srcOrd="1" destOrd="0" presId="urn:microsoft.com/office/officeart/2009/3/layout/HorizontalOrganizationChart"/>
+    <dgm:cxn modelId="{D63B4BC4-A65D-40E1-B44A-80AD1AA2E2C9}" type="presParOf" srcId="{34334FEB-0A74-4945-9E06-62902E13F72D}" destId="{B75101D1-41FE-4F79-AE84-A03090A9821A}" srcOrd="1" destOrd="0" presId="urn:microsoft.com/office/officeart/2009/3/layout/HorizontalOrganizationChart"/>
+    <dgm:cxn modelId="{3F116754-8CA2-45E6-A9AA-84224D42E0A9}" type="presParOf" srcId="{34334FEB-0A74-4945-9E06-62902E13F72D}" destId="{E2141735-2F07-4BB8-BD72-01BC72AD7827}" srcOrd="2" destOrd="0" presId="urn:microsoft.com/office/officeart/2009/3/layout/HorizontalOrganizationChart"/>
+    <dgm:cxn modelId="{F5ED2324-FB7D-4ECC-9F27-EC5B3391B47B}" type="presParOf" srcId="{BA8D7E82-10E0-4B5D-A7A8-5B403C181AAD}" destId="{F121FC04-6ABC-4471-9661-93ED72B93D39}" srcOrd="2" destOrd="0" presId="urn:microsoft.com/office/officeart/2009/3/layout/HorizontalOrganizationChart"/>
+    <dgm:cxn modelId="{D88028B0-4590-4425-8C69-F7E5C1C81862}" type="presParOf" srcId="{6072350C-6373-4705-A9DC-82BB2DD64A3A}" destId="{43CC1C42-04AA-435A-979C-E62AFAAF4D5E}" srcOrd="8" destOrd="0" presId="urn:microsoft.com/office/officeart/2009/3/layout/HorizontalOrganizationChart"/>
+    <dgm:cxn modelId="{81914526-67D9-4799-B06E-CC510159200B}" type="presParOf" srcId="{6072350C-6373-4705-A9DC-82BB2DD64A3A}" destId="{44A8D897-8291-4E69-A253-691929D80E5E}" srcOrd="9" destOrd="0" presId="urn:microsoft.com/office/officeart/2009/3/layout/HorizontalOrganizationChart"/>
+    <dgm:cxn modelId="{6A482C4B-650F-4C02-9B69-FAE8B9F9A202}" type="presParOf" srcId="{44A8D897-8291-4E69-A253-691929D80E5E}" destId="{B29E445C-130D-466D-9BC6-3401B845091F}" srcOrd="0" destOrd="0" presId="urn:microsoft.com/office/officeart/2009/3/layout/HorizontalOrganizationChart"/>
+    <dgm:cxn modelId="{3DEDED4F-2483-41F8-B798-AD0A1B2B973D}" type="presParOf" srcId="{B29E445C-130D-466D-9BC6-3401B845091F}" destId="{77267FA6-0CDF-4F47-97BA-153747EF1791}" srcOrd="0" destOrd="0" presId="urn:microsoft.com/office/officeart/2009/3/layout/HorizontalOrganizationChart"/>
+    <dgm:cxn modelId="{787A5720-7C43-4A08-970A-E28F3C04CF0F}" type="presParOf" srcId="{B29E445C-130D-466D-9BC6-3401B845091F}" destId="{213124F1-A749-4DBC-85FE-5AC202AF5919}" srcOrd="1" destOrd="0" presId="urn:microsoft.com/office/officeart/2009/3/layout/HorizontalOrganizationChart"/>
+    <dgm:cxn modelId="{F82BE260-6B47-4142-8AF2-AA69838C0EC7}" type="presParOf" srcId="{44A8D897-8291-4E69-A253-691929D80E5E}" destId="{6F0A908E-CE1D-48B7-9FC6-B9C6A134D0D8}" srcOrd="1" destOrd="0" presId="urn:microsoft.com/office/officeart/2009/3/layout/HorizontalOrganizationChart"/>
+    <dgm:cxn modelId="{34832424-E2A8-4405-A02E-A0C55CD03F59}" type="presParOf" srcId="{44A8D897-8291-4E69-A253-691929D80E5E}" destId="{980D180F-0C13-4DC6-B9DC-1434889638D1}" srcOrd="2" destOrd="0" presId="urn:microsoft.com/office/officeart/2009/3/layout/HorizontalOrganizationChart"/>
+    <dgm:cxn modelId="{DA1214F1-8492-4E49-86D8-3E009136C315}" type="presParOf" srcId="{7D941C44-EDB9-43A1-8B0D-A42E00E86928}" destId="{42B863AB-8FAF-4752-9099-E77932F0D395}" srcOrd="2" destOrd="0" presId="urn:microsoft.com/office/officeart/2009/3/layout/HorizontalOrganizationChart"/>
+    <dgm:cxn modelId="{646FF172-3C73-4568-A9FA-B463E3F0FD93}" type="presParOf" srcId="{E94EFD84-5C54-40D8-9A8F-C38CEAB04081}" destId="{5E890DBA-4975-4C75-941F-F0AF649459D5}" srcOrd="2" destOrd="0" presId="urn:microsoft.com/office/officeart/2009/3/layout/HorizontalOrganizationChart"/>
+    <dgm:cxn modelId="{775C024F-FCBA-4228-9F86-CB5DD4C47670}" type="presParOf" srcId="{E94EFD84-5C54-40D8-9A8F-C38CEAB04081}" destId="{1457AC4E-F267-437E-877A-1B46D5336CAC}" srcOrd="3" destOrd="0" presId="urn:microsoft.com/office/officeart/2009/3/layout/HorizontalOrganizationChart"/>
+    <dgm:cxn modelId="{E4B71FB6-D99F-4537-BCEA-BACF9369D46B}" type="presParOf" srcId="{1457AC4E-F267-437E-877A-1B46D5336CAC}" destId="{D5D8FEA8-2FA9-46E7-936A-DE00846C26BC}" srcOrd="0" destOrd="0" presId="urn:microsoft.com/office/officeart/2009/3/layout/HorizontalOrganizationChart"/>
+    <dgm:cxn modelId="{A4BEFD4A-CA5D-46C3-89BA-E8E73E624BF2}" type="presParOf" srcId="{D5D8FEA8-2FA9-46E7-936A-DE00846C26BC}" destId="{3BF77DC6-A893-4A65-9C1E-D38F5E103AA5}" srcOrd="0" destOrd="0" presId="urn:microsoft.com/office/officeart/2009/3/layout/HorizontalOrganizationChart"/>
+    <dgm:cxn modelId="{8F8E587A-D35E-46E2-96BC-D34D85DB2BAC}" type="presParOf" srcId="{D5D8FEA8-2FA9-46E7-936A-DE00846C26BC}" destId="{4E262D70-023C-4E9D-82BC-E1D1DAA6E0E0}" srcOrd="1" destOrd="0" presId="urn:microsoft.com/office/officeart/2009/3/layout/HorizontalOrganizationChart"/>
+    <dgm:cxn modelId="{5A47BC96-5B44-4117-9433-C926BD38A20A}" type="presParOf" srcId="{1457AC4E-F267-437E-877A-1B46D5336CAC}" destId="{9F61D904-DB97-4461-AA89-0EBCDF58B28C}" srcOrd="1" destOrd="0" presId="urn:microsoft.com/office/officeart/2009/3/layout/HorizontalOrganizationChart"/>
+    <dgm:cxn modelId="{1C2E8E45-905B-480E-A0AC-446A70428116}" type="presParOf" srcId="{1457AC4E-F267-437E-877A-1B46D5336CAC}" destId="{E28180BC-C29F-4744-B670-C17F06C7EB26}" srcOrd="2" destOrd="0" presId="urn:microsoft.com/office/officeart/2009/3/layout/HorizontalOrganizationChart"/>
+    <dgm:cxn modelId="{07A3C5AA-62F0-4030-9EA7-CE42BB749E7D}" type="presParOf" srcId="{2B3438B6-C4AF-4776-9B02-580A7BE79A50}" destId="{0388B9DF-2E42-4F52-A48F-58CC2C71E622}" srcOrd="2" destOrd="0" presId="urn:microsoft.com/office/officeart/2009/3/layout/HorizontalOrganizationChart"/>
+    <dgm:cxn modelId="{5D0C1CED-9708-4778-9A1E-A71D732F7A9D}" type="presParOf" srcId="{D843F3EE-B8EE-43C2-86E0-4F7E350611A9}" destId="{C7F7A17E-AF77-42CB-93B1-39B0770E3C79}" srcOrd="6" destOrd="0" presId="urn:microsoft.com/office/officeart/2009/3/layout/HorizontalOrganizationChart"/>
+    <dgm:cxn modelId="{463F8187-F64C-4D1D-842D-D94B84FF95C8}" type="presParOf" srcId="{D843F3EE-B8EE-43C2-86E0-4F7E350611A9}" destId="{64BE223F-5889-4D6D-A0F4-BB63E949CCCB}" srcOrd="7" destOrd="0" presId="urn:microsoft.com/office/officeart/2009/3/layout/HorizontalOrganizationChart"/>
+    <dgm:cxn modelId="{DD32160D-1B7E-4B37-8120-39CF3CDBCC31}" type="presParOf" srcId="{64BE223F-5889-4D6D-A0F4-BB63E949CCCB}" destId="{0650E139-1253-4EAC-B9BF-AAABDAC4C50A}" srcOrd="0" destOrd="0" presId="urn:microsoft.com/office/officeart/2009/3/layout/HorizontalOrganizationChart"/>
+    <dgm:cxn modelId="{4249935D-D51E-473C-8BC1-59B3E7FF3E08}" type="presParOf" srcId="{0650E139-1253-4EAC-B9BF-AAABDAC4C50A}" destId="{F727FD69-DA36-400A-9A17-E435D30B6294}" srcOrd="0" destOrd="0" presId="urn:microsoft.com/office/officeart/2009/3/layout/HorizontalOrganizationChart"/>
+    <dgm:cxn modelId="{6F4C545A-1052-41FD-8219-4878C3DC41E5}" type="presParOf" srcId="{0650E139-1253-4EAC-B9BF-AAABDAC4C50A}" destId="{2CB5E2D1-00D5-4B61-9756-D570A792B6B1}" srcOrd="1" destOrd="0" presId="urn:microsoft.com/office/officeart/2009/3/layout/HorizontalOrganizationChart"/>
+    <dgm:cxn modelId="{530528F1-5691-4AE1-92D1-4705ADAC0129}" type="presParOf" srcId="{64BE223F-5889-4D6D-A0F4-BB63E949CCCB}" destId="{8C32301D-5FB8-498A-9CA5-A658480BBA39}" srcOrd="1" destOrd="0" presId="urn:microsoft.com/office/officeart/2009/3/layout/HorizontalOrganizationChart"/>
+    <dgm:cxn modelId="{7F8F806E-BE1C-484F-BE00-7AA0003E771E}" type="presParOf" srcId="{8C32301D-5FB8-498A-9CA5-A658480BBA39}" destId="{1BDA3CD5-F552-4A8E-AA99-3DA9469CB538}" srcOrd="0" destOrd="0" presId="urn:microsoft.com/office/officeart/2009/3/layout/HorizontalOrganizationChart"/>
+    <dgm:cxn modelId="{AA6958B4-9EE8-4D18-9756-3F7F567072C8}" type="presParOf" srcId="{8C32301D-5FB8-498A-9CA5-A658480BBA39}" destId="{C46F1EF1-B875-4283-8030-8CE5A965CE21}" srcOrd="1" destOrd="0" presId="urn:microsoft.com/office/officeart/2009/3/layout/HorizontalOrganizationChart"/>
+    <dgm:cxn modelId="{BE3763C7-8A46-4214-B105-CAF6436E6260}" type="presParOf" srcId="{C46F1EF1-B875-4283-8030-8CE5A965CE21}" destId="{CB9C4A04-7D15-4A43-8BA5-EB32A8B11500}" srcOrd="0" destOrd="0" presId="urn:microsoft.com/office/officeart/2009/3/layout/HorizontalOrganizationChart"/>
+    <dgm:cxn modelId="{93EC8A05-9A25-48B0-8BE1-86745D235B10}" type="presParOf" srcId="{CB9C4A04-7D15-4A43-8BA5-EB32A8B11500}" destId="{490BDFA8-D452-4BE4-9F81-245774E0D158}" srcOrd="0" destOrd="0" presId="urn:microsoft.com/office/officeart/2009/3/layout/HorizontalOrganizationChart"/>
+    <dgm:cxn modelId="{251C7E27-1128-4468-B344-038AC3D7A766}" type="presParOf" srcId="{CB9C4A04-7D15-4A43-8BA5-EB32A8B11500}" destId="{D1162B1B-B769-48DB-B85B-AF3C1F73D58F}" srcOrd="1" destOrd="0" presId="urn:microsoft.com/office/officeart/2009/3/layout/HorizontalOrganizationChart"/>
+    <dgm:cxn modelId="{7D38AF44-D623-457F-A669-7DD296E249D8}" type="presParOf" srcId="{C46F1EF1-B875-4283-8030-8CE5A965CE21}" destId="{DF467D77-B7F9-4F62-89A6-51F4A7058AA6}" srcOrd="1" destOrd="0" presId="urn:microsoft.com/office/officeart/2009/3/layout/HorizontalOrganizationChart"/>
+    <dgm:cxn modelId="{1040A12C-7C23-407F-87D8-25EA45EFEEC0}" type="presParOf" srcId="{DF467D77-B7F9-4F62-89A6-51F4A7058AA6}" destId="{AF9CAAFC-37A2-4187-8C63-BDC2E7B8A2E9}" srcOrd="0" destOrd="0" presId="urn:microsoft.com/office/officeart/2009/3/layout/HorizontalOrganizationChart"/>
+    <dgm:cxn modelId="{F0CA900D-AEF3-48F4-BD3F-955023F1A56E}" type="presParOf" srcId="{DF467D77-B7F9-4F62-89A6-51F4A7058AA6}" destId="{2042EA74-39A6-4A01-BBF1-F23AE808212A}" srcOrd="1" destOrd="0" presId="urn:microsoft.com/office/officeart/2009/3/layout/HorizontalOrganizationChart"/>
+    <dgm:cxn modelId="{535D3E40-82D6-46E5-8E41-7F9C2A5CACBE}" type="presParOf" srcId="{2042EA74-39A6-4A01-BBF1-F23AE808212A}" destId="{5147FB01-2857-4113-ABC7-32880B1752A1}" srcOrd="0" destOrd="0" presId="urn:microsoft.com/office/officeart/2009/3/layout/HorizontalOrganizationChart"/>
+    <dgm:cxn modelId="{DFD666C7-0E92-4C1F-809C-3E13540E13F9}" type="presParOf" srcId="{5147FB01-2857-4113-ABC7-32880B1752A1}" destId="{BEB5F23A-260D-4EA4-9C52-D29289AE19DF}" srcOrd="0" destOrd="0" presId="urn:microsoft.com/office/officeart/2009/3/layout/HorizontalOrganizationChart"/>
+    <dgm:cxn modelId="{DED66985-E65E-4BA3-BD07-83F29529D140}" type="presParOf" srcId="{5147FB01-2857-4113-ABC7-32880B1752A1}" destId="{B70E4C0E-1521-4091-B753-26370D64F4FD}" srcOrd="1" destOrd="0" presId="urn:microsoft.com/office/officeart/2009/3/layout/HorizontalOrganizationChart"/>
+    <dgm:cxn modelId="{E485D020-2A97-414D-A2A3-AACC357B489F}" type="presParOf" srcId="{2042EA74-39A6-4A01-BBF1-F23AE808212A}" destId="{59A16828-9F48-4DC0-B6AB-56DC66C5C14A}" srcOrd="1" destOrd="0" presId="urn:microsoft.com/office/officeart/2009/3/layout/HorizontalOrganizationChart"/>
+    <dgm:cxn modelId="{43A530B3-0340-4C24-988B-12988BA5953D}" type="presParOf" srcId="{2042EA74-39A6-4A01-BBF1-F23AE808212A}" destId="{64DA6633-6213-4B4C-9040-F2F6E0E07A92}" srcOrd="2" destOrd="0" presId="urn:microsoft.com/office/officeart/2009/3/layout/HorizontalOrganizationChart"/>
+    <dgm:cxn modelId="{E1927785-2C27-43D6-A2F8-1118688F8277}" type="presParOf" srcId="{DF467D77-B7F9-4F62-89A6-51F4A7058AA6}" destId="{B074A3F9-9B82-47D6-B99B-37FA4AD461B1}" srcOrd="2" destOrd="0" presId="urn:microsoft.com/office/officeart/2009/3/layout/HorizontalOrganizationChart"/>
+    <dgm:cxn modelId="{764B5D76-23D2-4123-B51F-FEB7A7F6FFB3}" type="presParOf" srcId="{DF467D77-B7F9-4F62-89A6-51F4A7058AA6}" destId="{E5641DC2-99FE-4CFE-BBC9-8BC561313068}" srcOrd="3" destOrd="0" presId="urn:microsoft.com/office/officeart/2009/3/layout/HorizontalOrganizationChart"/>
+    <dgm:cxn modelId="{6B0D1159-42F7-45A3-8EEA-4B94CF6F8DF9}" type="presParOf" srcId="{E5641DC2-99FE-4CFE-BBC9-8BC561313068}" destId="{5C7EC92A-C4CB-4B99-BB1E-AAEF0913B482}" srcOrd="0" destOrd="0" presId="urn:microsoft.com/office/officeart/2009/3/layout/HorizontalOrganizationChart"/>
+    <dgm:cxn modelId="{12990D80-765E-4887-AF3D-86F5D393B870}" type="presParOf" srcId="{5C7EC92A-C4CB-4B99-BB1E-AAEF0913B482}" destId="{15470CCD-2DC4-4446-952E-0EA1F9168293}" srcOrd="0" destOrd="0" presId="urn:microsoft.com/office/officeart/2009/3/layout/HorizontalOrganizationChart"/>
+    <dgm:cxn modelId="{CF6C6EF9-939B-40DD-8FCC-1FD1A9833ACA}" type="presParOf" srcId="{5C7EC92A-C4CB-4B99-BB1E-AAEF0913B482}" destId="{C1FA8641-48D3-43B7-8727-7E323B1B501C}" srcOrd="1" destOrd="0" presId="urn:microsoft.com/office/officeart/2009/3/layout/HorizontalOrganizationChart"/>
+    <dgm:cxn modelId="{E8821719-4940-4130-A33D-4AA6D88410EE}" type="presParOf" srcId="{E5641DC2-99FE-4CFE-BBC9-8BC561313068}" destId="{C6CE1518-27B6-404B-99E1-54C509EB30D2}" srcOrd="1" destOrd="0" presId="urn:microsoft.com/office/officeart/2009/3/layout/HorizontalOrganizationChart"/>
+    <dgm:cxn modelId="{6EC1300D-2FF6-4D25-BE28-B7855A88D5E3}" type="presParOf" srcId="{C6CE1518-27B6-404B-99E1-54C509EB30D2}" destId="{B4F70755-F4D1-485F-892E-3C7B87066BCB}" srcOrd="0" destOrd="0" presId="urn:microsoft.com/office/officeart/2009/3/layout/HorizontalOrganizationChart"/>
+    <dgm:cxn modelId="{5E16A379-EE1A-48C6-8244-B486D75C98DA}" type="presParOf" srcId="{C6CE1518-27B6-404B-99E1-54C509EB30D2}" destId="{ABFA4637-8EA1-4BB9-A524-2A1FE95E5257}" srcOrd="1" destOrd="0" presId="urn:microsoft.com/office/officeart/2009/3/layout/HorizontalOrganizationChart"/>
+    <dgm:cxn modelId="{7B78C7A0-4B83-43C9-AE2C-FB1186880DFA}" type="presParOf" srcId="{ABFA4637-8EA1-4BB9-A524-2A1FE95E5257}" destId="{A6FDC029-0113-4C4A-9136-B1F1B01F0754}" srcOrd="0" destOrd="0" presId="urn:microsoft.com/office/officeart/2009/3/layout/HorizontalOrganizationChart"/>
+    <dgm:cxn modelId="{90211361-907A-4C7B-B1B6-13894EAA466F}" type="presParOf" srcId="{A6FDC029-0113-4C4A-9136-B1F1B01F0754}" destId="{9921040E-A9AE-4E20-B3A7-1033725EAB32}" srcOrd="0" destOrd="0" presId="urn:microsoft.com/office/officeart/2009/3/layout/HorizontalOrganizationChart"/>
+    <dgm:cxn modelId="{96CCEAAB-ACE5-471E-976B-DD6EEFD071B4}" type="presParOf" srcId="{A6FDC029-0113-4C4A-9136-B1F1B01F0754}" destId="{3374B034-7516-421E-BD23-9C0F9E320F00}" srcOrd="1" destOrd="0" presId="urn:microsoft.com/office/officeart/2009/3/layout/HorizontalOrganizationChart"/>
+    <dgm:cxn modelId="{F23FEA52-EE51-4B95-9AFD-ACBB95424964}" type="presParOf" srcId="{ABFA4637-8EA1-4BB9-A524-2A1FE95E5257}" destId="{33F80BDE-DC97-4638-BCF9-8B0A5C5B0084}" srcOrd="1" destOrd="0" presId="urn:microsoft.com/office/officeart/2009/3/layout/HorizontalOrganizationChart"/>
+    <dgm:cxn modelId="{AF3A319F-4DED-49E9-A7A0-DDFDFC14722F}" type="presParOf" srcId="{ABFA4637-8EA1-4BB9-A524-2A1FE95E5257}" destId="{D52B820B-8882-45A0-9A47-4DF787F724FF}" srcOrd="2" destOrd="0" presId="urn:microsoft.com/office/officeart/2009/3/layout/HorizontalOrganizationChart"/>
+    <dgm:cxn modelId="{EE61F539-2891-4D23-A2B2-A124CD236A0D}" type="presParOf" srcId="{C6CE1518-27B6-404B-99E1-54C509EB30D2}" destId="{8DDA93F8-5C72-4B48-9D1D-CEE49333C83C}" srcOrd="2" destOrd="0" presId="urn:microsoft.com/office/officeart/2009/3/layout/HorizontalOrganizationChart"/>
+    <dgm:cxn modelId="{B74E0B37-9033-4FF8-A466-528CD62CF9F7}" type="presParOf" srcId="{C6CE1518-27B6-404B-99E1-54C509EB30D2}" destId="{2644546B-EA91-4559-89A5-D9CC3F2967A0}" srcOrd="3" destOrd="0" presId="urn:microsoft.com/office/officeart/2009/3/layout/HorizontalOrganizationChart"/>
+    <dgm:cxn modelId="{72A11EF6-6C16-4E45-9061-42FEEC04C71D}" type="presParOf" srcId="{2644546B-EA91-4559-89A5-D9CC3F2967A0}" destId="{289E3FC7-5A7E-4052-A541-0F4DFDE43E38}" srcOrd="0" destOrd="0" presId="urn:microsoft.com/office/officeart/2009/3/layout/HorizontalOrganizationChart"/>
+    <dgm:cxn modelId="{34D6EEC3-53BE-441C-9896-CB88A02FFD7C}" type="presParOf" srcId="{289E3FC7-5A7E-4052-A541-0F4DFDE43E38}" destId="{4C50E7F0-CBE9-462F-A0E5-5FFE1AE84F4E}" srcOrd="0" destOrd="0" presId="urn:microsoft.com/office/officeart/2009/3/layout/HorizontalOrganizationChart"/>
+    <dgm:cxn modelId="{213298C3-EE29-4D61-98DA-F3CD2CD9CB93}" type="presParOf" srcId="{289E3FC7-5A7E-4052-A541-0F4DFDE43E38}" destId="{86FF5A9C-E5F2-4B8C-83BD-290D4D4AB6AC}" srcOrd="1" destOrd="0" presId="urn:microsoft.com/office/officeart/2009/3/layout/HorizontalOrganizationChart"/>
+    <dgm:cxn modelId="{8E44D176-53C5-453F-B6F3-63243E7D9C76}" type="presParOf" srcId="{2644546B-EA91-4559-89A5-D9CC3F2967A0}" destId="{4816209B-7B93-4538-AC6F-995B7E78A1F7}" srcOrd="1" destOrd="0" presId="urn:microsoft.com/office/officeart/2009/3/layout/HorizontalOrganizationChart"/>
+    <dgm:cxn modelId="{75D5A281-FF22-409E-9A14-75D8B2DDB967}" type="presParOf" srcId="{2644546B-EA91-4559-89A5-D9CC3F2967A0}" destId="{D1E7CE6F-9E8B-40AB-83D4-2BDDA3AAD06B}" srcOrd="2" destOrd="0" presId="urn:microsoft.com/office/officeart/2009/3/layout/HorizontalOrganizationChart"/>
+    <dgm:cxn modelId="{28D84439-3282-441D-8654-EFC2335BCDCC}" type="presParOf" srcId="{E5641DC2-99FE-4CFE-BBC9-8BC561313068}" destId="{57E71043-9BEF-45AB-827F-B88C2C0B8C64}" srcOrd="2" destOrd="0" presId="urn:microsoft.com/office/officeart/2009/3/layout/HorizontalOrganizationChart"/>
+    <dgm:cxn modelId="{22566EE2-4BF8-4087-9BC6-D8EE1F0F0859}" type="presParOf" srcId="{DF467D77-B7F9-4F62-89A6-51F4A7058AA6}" destId="{4B5CDAF5-A7FE-436E-9DA3-25A539D89D1F}" srcOrd="4" destOrd="0" presId="urn:microsoft.com/office/officeart/2009/3/layout/HorizontalOrganizationChart"/>
+    <dgm:cxn modelId="{807B2118-75CE-48FE-85E6-C2EE4B6A1883}" type="presParOf" srcId="{DF467D77-B7F9-4F62-89A6-51F4A7058AA6}" destId="{B5E7DA6C-2B95-499E-967F-1829236E4839}" srcOrd="5" destOrd="0" presId="urn:microsoft.com/office/officeart/2009/3/layout/HorizontalOrganizationChart"/>
+    <dgm:cxn modelId="{80A630ED-9B2F-47ED-A8D1-80CE95EC7F24}" type="presParOf" srcId="{B5E7DA6C-2B95-499E-967F-1829236E4839}" destId="{28F73B73-C4A9-4875-95EE-9F6ED06FA340}" srcOrd="0" destOrd="0" presId="urn:microsoft.com/office/officeart/2009/3/layout/HorizontalOrganizationChart"/>
+    <dgm:cxn modelId="{C0F44248-184C-4024-97FD-738935B831DE}" type="presParOf" srcId="{28F73B73-C4A9-4875-95EE-9F6ED06FA340}" destId="{E142E4F7-A4D2-449F-AA7F-C04C088A3C1F}" srcOrd="0" destOrd="0" presId="urn:microsoft.com/office/officeart/2009/3/layout/HorizontalOrganizationChart"/>
+    <dgm:cxn modelId="{A2ADCBA5-F55A-484F-9ACD-3AD99C42AA76}" type="presParOf" srcId="{28F73B73-C4A9-4875-95EE-9F6ED06FA340}" destId="{74B77C7E-36E3-406E-BAC0-4831F4BABB3C}" srcOrd="1" destOrd="0" presId="urn:microsoft.com/office/officeart/2009/3/layout/HorizontalOrganizationChart"/>
+    <dgm:cxn modelId="{579F91BF-496B-4563-992B-8C3FF1BF6E3E}" type="presParOf" srcId="{B5E7DA6C-2B95-499E-967F-1829236E4839}" destId="{13C0BE53-A6FB-4FC3-BE13-CB6347CDFEC7}" srcOrd="1" destOrd="0" presId="urn:microsoft.com/office/officeart/2009/3/layout/HorizontalOrganizationChart"/>
+    <dgm:cxn modelId="{963E66E9-8C31-41A7-B626-0836DE0B16EE}" type="presParOf" srcId="{B5E7DA6C-2B95-499E-967F-1829236E4839}" destId="{AC1F50A9-4FB7-4695-9A1B-7F88EE7E2895}" srcOrd="2" destOrd="0" presId="urn:microsoft.com/office/officeart/2009/3/layout/HorizontalOrganizationChart"/>
+    <dgm:cxn modelId="{D739EE80-CCE3-48B1-B877-5D2CC199F351}" type="presParOf" srcId="{C46F1EF1-B875-4283-8030-8CE5A965CE21}" destId="{A5C0843B-BF8C-4CD8-BFB8-B34ABB30BC41}" srcOrd="2" destOrd="0" presId="urn:microsoft.com/office/officeart/2009/3/layout/HorizontalOrganizationChart"/>
+    <dgm:cxn modelId="{32CFD805-12B4-43F1-B55F-D745F7250C02}" type="presParOf" srcId="{8C32301D-5FB8-498A-9CA5-A658480BBA39}" destId="{E72137B5-59A0-4482-82E0-2CA84074B9ED}" srcOrd="2" destOrd="0" presId="urn:microsoft.com/office/officeart/2009/3/layout/HorizontalOrganizationChart"/>
+    <dgm:cxn modelId="{F40DEAB2-878C-4551-BABB-D8593B0D1946}" type="presParOf" srcId="{8C32301D-5FB8-498A-9CA5-A658480BBA39}" destId="{B39B5A8D-FDDB-4B5F-9592-FCF82ABC3E36}" srcOrd="3" destOrd="0" presId="urn:microsoft.com/office/officeart/2009/3/layout/HorizontalOrganizationChart"/>
+    <dgm:cxn modelId="{2377570C-8177-486B-AA49-20D7CE601341}" type="presParOf" srcId="{B39B5A8D-FDDB-4B5F-9592-FCF82ABC3E36}" destId="{868FD3F8-36C2-40B9-A0C9-19560145CFAD}" srcOrd="0" destOrd="0" presId="urn:microsoft.com/office/officeart/2009/3/layout/HorizontalOrganizationChart"/>
+    <dgm:cxn modelId="{6E051A10-16B6-4871-B6F8-BD312F3546B5}" type="presParOf" srcId="{868FD3F8-36C2-40B9-A0C9-19560145CFAD}" destId="{E4AFD26B-C7BB-41CA-A59C-D4C3576380A8}" srcOrd="0" destOrd="0" presId="urn:microsoft.com/office/officeart/2009/3/layout/HorizontalOrganizationChart"/>
+    <dgm:cxn modelId="{A30EBBA4-72F4-4AD1-A0B1-681DF575FC5D}" type="presParOf" srcId="{868FD3F8-36C2-40B9-A0C9-19560145CFAD}" destId="{8700B5FB-1AEC-447F-A85A-B23DFECB41F1}" srcOrd="1" destOrd="0" presId="urn:microsoft.com/office/officeart/2009/3/layout/HorizontalOrganizationChart"/>
+    <dgm:cxn modelId="{294CBE80-095A-4D8B-B77E-30B5B753023D}" type="presParOf" srcId="{B39B5A8D-FDDB-4B5F-9592-FCF82ABC3E36}" destId="{035F8A94-9F71-4AA7-84F8-CC97894A38B2}" srcOrd="1" destOrd="0" presId="urn:microsoft.com/office/officeart/2009/3/layout/HorizontalOrganizationChart"/>
+    <dgm:cxn modelId="{B7D7A5A3-B75B-4FFE-B5C8-AE1077FF7B7F}" type="presParOf" srcId="{B39B5A8D-FDDB-4B5F-9592-FCF82ABC3E36}" destId="{D4F07FEA-5316-4290-9236-A3D544D64BD8}" srcOrd="2" destOrd="0" presId="urn:microsoft.com/office/officeart/2009/3/layout/HorizontalOrganizationChart"/>
+    <dgm:cxn modelId="{20CFC434-632D-496B-8E4E-D1BA52E563E4}" type="presParOf" srcId="{64BE223F-5889-4D6D-A0F4-BB63E949CCCB}" destId="{A267EB81-E463-4D76-BE76-C7894AF884CA}" srcOrd="2" destOrd="0" presId="urn:microsoft.com/office/officeart/2009/3/layout/HorizontalOrganizationChart"/>
+    <dgm:cxn modelId="{B2922DCE-F5CC-4EB1-A0AE-4936725AAB8C}" type="presParOf" srcId="{72548BFA-9BBC-45A7-9143-4A33BB8882F9}" destId="{AF38169B-BDF1-4FB4-B1A3-205F3C8764D4}" srcOrd="2" destOrd="0" presId="urn:microsoft.com/office/officeart/2009/3/layout/HorizontalOrganizationChart"/>
   </dgm:cxnLst>
   <dgm:bg/>
   <dgm:whole/>
@@ -4200,15 +4614,15 @@
       <dsp:cNvGrpSpPr/>
     </dsp:nvGrpSpPr>
     <dsp:grpSpPr/>
-    <dsp:sp modelId="{2CDAEA21-DCC4-4575-A028-8E48B86095C3}">
+    <dsp:sp modelId="{E72137B5-59A0-4482-82E0-2CA84074B9ED}">
       <dsp:nvSpPr>
         <dsp:cNvPr id="0" name=""/>
         <dsp:cNvSpPr/>
       </dsp:nvSpPr>
       <dsp:spPr>
         <a:xfrm>
-          <a:off x="5078903" y="5769952"/>
-          <a:ext cx="200791" cy="215851"/>
+          <a:off x="4611859" y="5943921"/>
+          <a:ext cx="179971" cy="193469"/>
         </a:xfrm>
         <a:custGeom>
           <a:avLst/>
@@ -4222,13 +4636,13 @@
                 <a:pt x="0" y="0"/>
               </a:moveTo>
               <a:lnTo>
-                <a:pt x="100395" y="0"/>
+                <a:pt x="89985" y="0"/>
               </a:lnTo>
               <a:lnTo>
-                <a:pt x="100395" y="215851"/>
+                <a:pt x="89985" y="193469"/>
               </a:lnTo>
               <a:lnTo>
-                <a:pt x="200791" y="215851"/>
+                <a:pt x="179971" y="193469"/>
               </a:lnTo>
             </a:path>
           </a:pathLst>
@@ -4262,15 +4676,15 @@
         <a:fontRef idx="minor"/>
       </dsp:style>
     </dsp:sp>
-    <dsp:sp modelId="{D13F91A7-7FA0-4602-8F83-D5787EBFEB98}">
+    <dsp:sp modelId="{4B5CDAF5-A7FE-436E-9DA3-25A539D89D1F}">
       <dsp:nvSpPr>
         <dsp:cNvPr id="0" name=""/>
         <dsp:cNvSpPr/>
       </dsp:nvSpPr>
       <dsp:spPr>
         <a:xfrm>
-          <a:off x="6283654" y="5554101"/>
-          <a:ext cx="200791" cy="431702"/>
+          <a:off x="5691689" y="5750451"/>
+          <a:ext cx="179971" cy="386938"/>
         </a:xfrm>
         <a:custGeom>
           <a:avLst/>
@@ -4284,13 +4698,13 @@
                 <a:pt x="0" y="0"/>
               </a:moveTo>
               <a:lnTo>
-                <a:pt x="100395" y="0"/>
+                <a:pt x="89985" y="0"/>
               </a:lnTo>
               <a:lnTo>
-                <a:pt x="100395" y="431702"/>
+                <a:pt x="89985" y="386938"/>
               </a:lnTo>
               <a:lnTo>
-                <a:pt x="200791" y="431702"/>
+                <a:pt x="179971" y="386938"/>
               </a:lnTo>
             </a:path>
           </a:pathLst>
@@ -4324,15 +4738,15 @@
         <a:fontRef idx="minor"/>
       </dsp:style>
     </dsp:sp>
-    <dsp:sp modelId="{C23208CB-8112-4EC1-8E1A-4AE7807BED36}">
+    <dsp:sp modelId="{8DDA93F8-5C72-4B48-9D1D-CEE49333C83C}">
       <dsp:nvSpPr>
         <dsp:cNvPr id="0" name=""/>
         <dsp:cNvSpPr/>
       </dsp:nvSpPr>
       <dsp:spPr>
         <a:xfrm>
-          <a:off x="7488405" y="5554101"/>
-          <a:ext cx="200791" cy="215851"/>
+          <a:off x="6771518" y="5750451"/>
+          <a:ext cx="179971" cy="193469"/>
         </a:xfrm>
         <a:custGeom>
           <a:avLst/>
@@ -4346,13 +4760,13 @@
                 <a:pt x="0" y="0"/>
               </a:moveTo>
               <a:lnTo>
-                <a:pt x="100395" y="0"/>
+                <a:pt x="89985" y="0"/>
               </a:lnTo>
               <a:lnTo>
-                <a:pt x="100395" y="215851"/>
+                <a:pt x="89985" y="193469"/>
               </a:lnTo>
               <a:lnTo>
-                <a:pt x="200791" y="215851"/>
+                <a:pt x="179971" y="193469"/>
               </a:lnTo>
             </a:path>
           </a:pathLst>
@@ -4386,15 +4800,15 @@
         <a:fontRef idx="minor"/>
       </dsp:style>
     </dsp:sp>
-    <dsp:sp modelId="{C2E4F5E3-2A0B-42BD-8BFA-8E7CDCB5A754}">
+    <dsp:sp modelId="{B4F70755-F4D1-485F-892E-3C7B87066BCB}">
       <dsp:nvSpPr>
         <dsp:cNvPr id="0" name=""/>
         <dsp:cNvSpPr/>
       </dsp:nvSpPr>
       <dsp:spPr>
         <a:xfrm>
-          <a:off x="7488405" y="5338250"/>
-          <a:ext cx="200791" cy="215851"/>
+          <a:off x="6771518" y="5556982"/>
+          <a:ext cx="179971" cy="193469"/>
         </a:xfrm>
         <a:custGeom>
           <a:avLst/>
@@ -4405,16 +4819,16 @@
           <a:pathLst>
             <a:path>
               <a:moveTo>
-                <a:pt x="0" y="215851"/>
+                <a:pt x="0" y="193469"/>
               </a:moveTo>
               <a:lnTo>
-                <a:pt x="100395" y="215851"/>
+                <a:pt x="89985" y="193469"/>
               </a:lnTo>
               <a:lnTo>
-                <a:pt x="100395" y="0"/>
+                <a:pt x="89985" y="0"/>
               </a:lnTo>
               <a:lnTo>
-                <a:pt x="200791" y="0"/>
+                <a:pt x="179971" y="0"/>
               </a:lnTo>
             </a:path>
           </a:pathLst>
@@ -4448,15 +4862,15 @@
         <a:fontRef idx="minor"/>
       </dsp:style>
     </dsp:sp>
-    <dsp:sp modelId="{26D6FA4F-D6A5-4878-8B80-5B29006D93F2}">
+    <dsp:sp modelId="{B074A3F9-9B82-47D6-B99B-37FA4AD461B1}">
       <dsp:nvSpPr>
         <dsp:cNvPr id="0" name=""/>
         <dsp:cNvSpPr/>
       </dsp:nvSpPr>
       <dsp:spPr>
         <a:xfrm>
-          <a:off x="6283654" y="5508381"/>
-          <a:ext cx="200791" cy="91440"/>
+          <a:off x="5691689" y="5704731"/>
+          <a:ext cx="179971" cy="91440"/>
         </a:xfrm>
         <a:custGeom>
           <a:avLst/>
@@ -4470,7 +4884,7 @@
                 <a:pt x="0" y="45720"/>
               </a:moveTo>
               <a:lnTo>
-                <a:pt x="200791" y="45720"/>
+                <a:pt x="179971" y="45720"/>
               </a:lnTo>
             </a:path>
           </a:pathLst>
@@ -4504,15 +4918,15 @@
         <a:fontRef idx="minor"/>
       </dsp:style>
     </dsp:sp>
-    <dsp:sp modelId="{E53C180E-99C8-4878-A5D0-A54393670C21}">
+    <dsp:sp modelId="{AF9CAAFC-37A2-4187-8C63-BDC2E7B8A2E9}">
       <dsp:nvSpPr>
         <dsp:cNvPr id="0" name=""/>
         <dsp:cNvSpPr/>
       </dsp:nvSpPr>
       <dsp:spPr>
         <a:xfrm>
-          <a:off x="6283654" y="5122399"/>
-          <a:ext cx="200791" cy="431702"/>
+          <a:off x="5691689" y="5363513"/>
+          <a:ext cx="179971" cy="386938"/>
         </a:xfrm>
         <a:custGeom>
           <a:avLst/>
@@ -4523,16 +4937,16 @@
           <a:pathLst>
             <a:path>
               <a:moveTo>
-                <a:pt x="0" y="431702"/>
+                <a:pt x="0" y="386938"/>
               </a:moveTo>
               <a:lnTo>
-                <a:pt x="100395" y="431702"/>
+                <a:pt x="89985" y="386938"/>
               </a:lnTo>
               <a:lnTo>
-                <a:pt x="100395" y="0"/>
+                <a:pt x="89985" y="0"/>
               </a:lnTo>
               <a:lnTo>
-                <a:pt x="200791" y="0"/>
+                <a:pt x="179971" y="0"/>
               </a:lnTo>
             </a:path>
           </a:pathLst>
@@ -4566,15 +4980,15 @@
         <a:fontRef idx="minor"/>
       </dsp:style>
     </dsp:sp>
-    <dsp:sp modelId="{10EB81BB-2FAE-4863-8B61-F4C17BFFA6D6}">
+    <dsp:sp modelId="{1BDA3CD5-F552-4A8E-AA99-3DA9469CB538}">
       <dsp:nvSpPr>
         <dsp:cNvPr id="0" name=""/>
         <dsp:cNvSpPr/>
       </dsp:nvSpPr>
       <dsp:spPr>
         <a:xfrm>
-          <a:off x="5078903" y="5554101"/>
-          <a:ext cx="200791" cy="215851"/>
+          <a:off x="4611859" y="5750451"/>
+          <a:ext cx="179971" cy="193469"/>
         </a:xfrm>
         <a:custGeom>
           <a:avLst/>
@@ -4585,16 +4999,16 @@
           <a:pathLst>
             <a:path>
               <a:moveTo>
-                <a:pt x="0" y="215851"/>
+                <a:pt x="0" y="193469"/>
               </a:moveTo>
               <a:lnTo>
-                <a:pt x="100395" y="215851"/>
+                <a:pt x="89985" y="193469"/>
               </a:lnTo>
               <a:lnTo>
-                <a:pt x="100395" y="0"/>
+                <a:pt x="89985" y="0"/>
               </a:lnTo>
               <a:lnTo>
-                <a:pt x="200791" y="0"/>
+                <a:pt x="179971" y="0"/>
               </a:lnTo>
             </a:path>
           </a:pathLst>
@@ -4628,15 +5042,15 @@
         <a:fontRef idx="minor"/>
       </dsp:style>
     </dsp:sp>
-    <dsp:sp modelId="{C051B183-B590-41B4-8423-18A273DCC6CE}">
+    <dsp:sp modelId="{C7F7A17E-AF77-42CB-93B1-39B0770E3C79}">
       <dsp:nvSpPr>
         <dsp:cNvPr id="0" name=""/>
         <dsp:cNvSpPr/>
       </dsp:nvSpPr>
       <dsp:spPr>
         <a:xfrm>
-          <a:off x="3874152" y="3665403"/>
-          <a:ext cx="200791" cy="2104549"/>
+          <a:off x="3532030" y="3138614"/>
+          <a:ext cx="179971" cy="2805306"/>
         </a:xfrm>
         <a:custGeom>
           <a:avLst/>
@@ -4650,13 +5064,13 @@
                 <a:pt x="0" y="0"/>
               </a:moveTo>
               <a:lnTo>
-                <a:pt x="100395" y="0"/>
+                <a:pt x="89985" y="0"/>
               </a:lnTo>
               <a:lnTo>
-                <a:pt x="100395" y="2104549"/>
+                <a:pt x="89985" y="2805306"/>
               </a:lnTo>
               <a:lnTo>
-                <a:pt x="200791" y="2104549"/>
+                <a:pt x="179971" y="2805306"/>
               </a:lnTo>
             </a:path>
           </a:pathLst>
@@ -4690,15 +5104,15 @@
         <a:fontRef idx="minor"/>
       </dsp:style>
     </dsp:sp>
-    <dsp:sp modelId="{68ED52F3-D00D-4FBA-A7F0-19107FBE0261}">
+    <dsp:sp modelId="{5E890DBA-4975-4C75-941F-F0AF649459D5}">
       <dsp:nvSpPr>
         <dsp:cNvPr id="0" name=""/>
         <dsp:cNvSpPr/>
       </dsp:nvSpPr>
       <dsp:spPr>
         <a:xfrm>
-          <a:off x="3874152" y="3665403"/>
-          <a:ext cx="200791" cy="917367"/>
+          <a:off x="4611859" y="4299431"/>
+          <a:ext cx="179971" cy="193469"/>
         </a:xfrm>
         <a:custGeom>
           <a:avLst/>
@@ -4712,13 +5126,795 @@
                 <a:pt x="0" y="0"/>
               </a:moveTo>
               <a:lnTo>
-                <a:pt x="100395" y="0"/>
+                <a:pt x="89985" y="0"/>
               </a:lnTo>
               <a:lnTo>
-                <a:pt x="100395" y="917367"/>
+                <a:pt x="89985" y="193469"/>
               </a:lnTo>
               <a:lnTo>
-                <a:pt x="200791" y="917367"/>
+                <a:pt x="179971" y="193469"/>
+              </a:lnTo>
+            </a:path>
+          </a:pathLst>
+        </a:custGeom>
+        <a:noFill/>
+        <a:ln w="19050" cap="flat" cmpd="sng" algn="ctr">
+          <a:solidFill>
+            <a:schemeClr val="accent1">
+              <a:shade val="80000"/>
+              <a:hueOff val="0"/>
+              <a:satOff val="0"/>
+              <a:lumOff val="0"/>
+              <a:alphaOff val="0"/>
+            </a:schemeClr>
+          </a:solidFill>
+          <a:prstDash val="solid"/>
+          <a:miter lim="800000"/>
+        </a:ln>
+        <a:effectLst/>
+      </dsp:spPr>
+      <dsp:style>
+        <a:lnRef idx="2">
+          <a:scrgbClr r="0" g="0" b="0"/>
+        </a:lnRef>
+        <a:fillRef idx="0">
+          <a:scrgbClr r="0" g="0" b="0"/>
+        </a:fillRef>
+        <a:effectRef idx="0">
+          <a:scrgbClr r="0" g="0" b="0"/>
+        </a:effectRef>
+        <a:fontRef idx="minor"/>
+      </dsp:style>
+    </dsp:sp>
+    <dsp:sp modelId="{43CC1C42-04AA-435A-979C-E62AFAAF4D5E}">
+      <dsp:nvSpPr>
+        <dsp:cNvPr id="0" name=""/>
+        <dsp:cNvSpPr/>
+      </dsp:nvSpPr>
+      <dsp:spPr>
+        <a:xfrm>
+          <a:off x="5691689" y="4105961"/>
+          <a:ext cx="179971" cy="870612"/>
+        </a:xfrm>
+        <a:custGeom>
+          <a:avLst/>
+          <a:gdLst/>
+          <a:ahLst/>
+          <a:cxnLst/>
+          <a:rect l="0" t="0" r="0" b="0"/>
+          <a:pathLst>
+            <a:path>
+              <a:moveTo>
+                <a:pt x="0" y="0"/>
+              </a:moveTo>
+              <a:lnTo>
+                <a:pt x="89985" y="0"/>
+              </a:lnTo>
+              <a:lnTo>
+                <a:pt x="89985" y="870612"/>
+              </a:lnTo>
+              <a:lnTo>
+                <a:pt x="179971" y="870612"/>
+              </a:lnTo>
+            </a:path>
+          </a:pathLst>
+        </a:custGeom>
+        <a:noFill/>
+        <a:ln w="19050" cap="flat" cmpd="sng" algn="ctr">
+          <a:solidFill>
+            <a:schemeClr val="accent1">
+              <a:shade val="80000"/>
+              <a:hueOff val="0"/>
+              <a:satOff val="0"/>
+              <a:lumOff val="0"/>
+              <a:alphaOff val="0"/>
+            </a:schemeClr>
+          </a:solidFill>
+          <a:prstDash val="solid"/>
+          <a:miter lim="800000"/>
+        </a:ln>
+        <a:effectLst/>
+      </dsp:spPr>
+      <dsp:style>
+        <a:lnRef idx="2">
+          <a:scrgbClr r="0" g="0" b="0"/>
+        </a:lnRef>
+        <a:fillRef idx="0">
+          <a:scrgbClr r="0" g="0" b="0"/>
+        </a:fillRef>
+        <a:effectRef idx="0">
+          <a:scrgbClr r="0" g="0" b="0"/>
+        </a:effectRef>
+        <a:fontRef idx="minor"/>
+      </dsp:style>
+    </dsp:sp>
+    <dsp:sp modelId="{C1341CAE-26B4-413C-B659-B4133610AE2C}">
+      <dsp:nvSpPr>
+        <dsp:cNvPr id="0" name=""/>
+        <dsp:cNvSpPr/>
+      </dsp:nvSpPr>
+      <dsp:spPr>
+        <a:xfrm>
+          <a:off x="6771518" y="4543915"/>
+          <a:ext cx="179971" cy="91440"/>
+        </a:xfrm>
+        <a:custGeom>
+          <a:avLst/>
+          <a:gdLst/>
+          <a:ahLst/>
+          <a:cxnLst/>
+          <a:rect l="0" t="0" r="0" b="0"/>
+          <a:pathLst>
+            <a:path>
+              <a:moveTo>
+                <a:pt x="0" y="45720"/>
+              </a:moveTo>
+              <a:lnTo>
+                <a:pt x="179971" y="45720"/>
+              </a:lnTo>
+            </a:path>
+          </a:pathLst>
+        </a:custGeom>
+        <a:noFill/>
+        <a:ln w="19050" cap="flat" cmpd="sng" algn="ctr">
+          <a:solidFill>
+            <a:schemeClr val="accent1">
+              <a:shade val="80000"/>
+              <a:hueOff val="0"/>
+              <a:satOff val="0"/>
+              <a:lumOff val="0"/>
+              <a:alphaOff val="0"/>
+            </a:schemeClr>
+          </a:solidFill>
+          <a:prstDash val="solid"/>
+          <a:miter lim="800000"/>
+        </a:ln>
+        <a:effectLst/>
+      </dsp:spPr>
+      <dsp:style>
+        <a:lnRef idx="2">
+          <a:scrgbClr r="0" g="0" b="0"/>
+        </a:lnRef>
+        <a:fillRef idx="0">
+          <a:scrgbClr r="0" g="0" b="0"/>
+        </a:fillRef>
+        <a:effectRef idx="0">
+          <a:scrgbClr r="0" g="0" b="0"/>
+        </a:effectRef>
+        <a:fontRef idx="minor"/>
+      </dsp:style>
+    </dsp:sp>
+    <dsp:sp modelId="{325B629F-ABB1-4EC6-9F54-565334BD27E2}">
+      <dsp:nvSpPr>
+        <dsp:cNvPr id="0" name=""/>
+        <dsp:cNvSpPr/>
+      </dsp:nvSpPr>
+      <dsp:spPr>
+        <a:xfrm>
+          <a:off x="5691689" y="4105961"/>
+          <a:ext cx="179971" cy="483673"/>
+        </a:xfrm>
+        <a:custGeom>
+          <a:avLst/>
+          <a:gdLst/>
+          <a:ahLst/>
+          <a:cxnLst/>
+          <a:rect l="0" t="0" r="0" b="0"/>
+          <a:pathLst>
+            <a:path>
+              <a:moveTo>
+                <a:pt x="0" y="0"/>
+              </a:moveTo>
+              <a:lnTo>
+                <a:pt x="89985" y="0"/>
+              </a:lnTo>
+              <a:lnTo>
+                <a:pt x="89985" y="483673"/>
+              </a:lnTo>
+              <a:lnTo>
+                <a:pt x="179971" y="483673"/>
+              </a:lnTo>
+            </a:path>
+          </a:pathLst>
+        </a:custGeom>
+        <a:noFill/>
+        <a:ln w="19050" cap="flat" cmpd="sng" algn="ctr">
+          <a:solidFill>
+            <a:schemeClr val="accent1">
+              <a:shade val="80000"/>
+              <a:hueOff val="0"/>
+              <a:satOff val="0"/>
+              <a:lumOff val="0"/>
+              <a:alphaOff val="0"/>
+            </a:schemeClr>
+          </a:solidFill>
+          <a:prstDash val="solid"/>
+          <a:miter lim="800000"/>
+        </a:ln>
+        <a:effectLst/>
+      </dsp:spPr>
+      <dsp:style>
+        <a:lnRef idx="2">
+          <a:scrgbClr r="0" g="0" b="0"/>
+        </a:lnRef>
+        <a:fillRef idx="0">
+          <a:scrgbClr r="0" g="0" b="0"/>
+        </a:fillRef>
+        <a:effectRef idx="0">
+          <a:scrgbClr r="0" g="0" b="0"/>
+        </a:effectRef>
+        <a:fontRef idx="minor"/>
+      </dsp:style>
+    </dsp:sp>
+    <dsp:sp modelId="{9296E3D5-989F-4B79-93AD-BF39EEE4C999}">
+      <dsp:nvSpPr>
+        <dsp:cNvPr id="0" name=""/>
+        <dsp:cNvSpPr/>
+      </dsp:nvSpPr>
+      <dsp:spPr>
+        <a:xfrm>
+          <a:off x="6771518" y="4156976"/>
+          <a:ext cx="179971" cy="91440"/>
+        </a:xfrm>
+        <a:custGeom>
+          <a:avLst/>
+          <a:gdLst/>
+          <a:ahLst/>
+          <a:cxnLst/>
+          <a:rect l="0" t="0" r="0" b="0"/>
+          <a:pathLst>
+            <a:path>
+              <a:moveTo>
+                <a:pt x="0" y="45720"/>
+              </a:moveTo>
+              <a:lnTo>
+                <a:pt x="179971" y="45720"/>
+              </a:lnTo>
+            </a:path>
+          </a:pathLst>
+        </a:custGeom>
+        <a:noFill/>
+        <a:ln w="19050" cap="flat" cmpd="sng" algn="ctr">
+          <a:solidFill>
+            <a:schemeClr val="accent1">
+              <a:shade val="80000"/>
+              <a:hueOff val="0"/>
+              <a:satOff val="0"/>
+              <a:lumOff val="0"/>
+              <a:alphaOff val="0"/>
+            </a:schemeClr>
+          </a:solidFill>
+          <a:prstDash val="solid"/>
+          <a:miter lim="800000"/>
+        </a:ln>
+        <a:effectLst/>
+      </dsp:spPr>
+      <dsp:style>
+        <a:lnRef idx="2">
+          <a:scrgbClr r="0" g="0" b="0"/>
+        </a:lnRef>
+        <a:fillRef idx="0">
+          <a:scrgbClr r="0" g="0" b="0"/>
+        </a:fillRef>
+        <a:effectRef idx="0">
+          <a:scrgbClr r="0" g="0" b="0"/>
+        </a:effectRef>
+        <a:fontRef idx="minor"/>
+      </dsp:style>
+    </dsp:sp>
+    <dsp:sp modelId="{418A319B-5CB8-4C1A-929A-A579AE777841}">
+      <dsp:nvSpPr>
+        <dsp:cNvPr id="0" name=""/>
+        <dsp:cNvSpPr/>
+      </dsp:nvSpPr>
+      <dsp:spPr>
+        <a:xfrm>
+          <a:off x="5691689" y="4105961"/>
+          <a:ext cx="179971" cy="96734"/>
+        </a:xfrm>
+        <a:custGeom>
+          <a:avLst/>
+          <a:gdLst/>
+          <a:ahLst/>
+          <a:cxnLst/>
+          <a:rect l="0" t="0" r="0" b="0"/>
+          <a:pathLst>
+            <a:path>
+              <a:moveTo>
+                <a:pt x="0" y="0"/>
+              </a:moveTo>
+              <a:lnTo>
+                <a:pt x="89985" y="0"/>
+              </a:lnTo>
+              <a:lnTo>
+                <a:pt x="89985" y="96734"/>
+              </a:lnTo>
+              <a:lnTo>
+                <a:pt x="179971" y="96734"/>
+              </a:lnTo>
+            </a:path>
+          </a:pathLst>
+        </a:custGeom>
+        <a:noFill/>
+        <a:ln w="19050" cap="flat" cmpd="sng" algn="ctr">
+          <a:solidFill>
+            <a:schemeClr val="accent1">
+              <a:shade val="80000"/>
+              <a:hueOff val="0"/>
+              <a:satOff val="0"/>
+              <a:lumOff val="0"/>
+              <a:alphaOff val="0"/>
+            </a:schemeClr>
+          </a:solidFill>
+          <a:prstDash val="solid"/>
+          <a:miter lim="800000"/>
+        </a:ln>
+        <a:effectLst/>
+      </dsp:spPr>
+      <dsp:style>
+        <a:lnRef idx="2">
+          <a:scrgbClr r="0" g="0" b="0"/>
+        </a:lnRef>
+        <a:fillRef idx="0">
+          <a:scrgbClr r="0" g="0" b="0"/>
+        </a:fillRef>
+        <a:effectRef idx="0">
+          <a:scrgbClr r="0" g="0" b="0"/>
+        </a:effectRef>
+        <a:fontRef idx="minor"/>
+      </dsp:style>
+    </dsp:sp>
+    <dsp:sp modelId="{6EBCB12D-6D77-4447-9F58-D885806C37C1}">
+      <dsp:nvSpPr>
+        <dsp:cNvPr id="0" name=""/>
+        <dsp:cNvSpPr/>
+      </dsp:nvSpPr>
+      <dsp:spPr>
+        <a:xfrm>
+          <a:off x="7851348" y="3770037"/>
+          <a:ext cx="179971" cy="91440"/>
+        </a:xfrm>
+        <a:custGeom>
+          <a:avLst/>
+          <a:gdLst/>
+          <a:ahLst/>
+          <a:cxnLst/>
+          <a:rect l="0" t="0" r="0" b="0"/>
+          <a:pathLst>
+            <a:path>
+              <a:moveTo>
+                <a:pt x="0" y="45720"/>
+              </a:moveTo>
+              <a:lnTo>
+                <a:pt x="179971" y="45720"/>
+              </a:lnTo>
+            </a:path>
+          </a:pathLst>
+        </a:custGeom>
+        <a:noFill/>
+        <a:ln w="19050" cap="flat" cmpd="sng" algn="ctr">
+          <a:solidFill>
+            <a:schemeClr val="accent1">
+              <a:shade val="80000"/>
+              <a:hueOff val="0"/>
+              <a:satOff val="0"/>
+              <a:lumOff val="0"/>
+              <a:alphaOff val="0"/>
+            </a:schemeClr>
+          </a:solidFill>
+          <a:prstDash val="solid"/>
+          <a:miter lim="800000"/>
+        </a:ln>
+        <a:effectLst/>
+      </dsp:spPr>
+      <dsp:style>
+        <a:lnRef idx="2">
+          <a:scrgbClr r="0" g="0" b="0"/>
+        </a:lnRef>
+        <a:fillRef idx="0">
+          <a:scrgbClr r="0" g="0" b="0"/>
+        </a:fillRef>
+        <a:effectRef idx="0">
+          <a:scrgbClr r="0" g="0" b="0"/>
+        </a:effectRef>
+        <a:fontRef idx="minor"/>
+      </dsp:style>
+    </dsp:sp>
+    <dsp:sp modelId="{CA185CE9-65D3-4677-966D-33B7645E2257}">
+      <dsp:nvSpPr>
+        <dsp:cNvPr id="0" name=""/>
+        <dsp:cNvSpPr/>
+      </dsp:nvSpPr>
+      <dsp:spPr>
+        <a:xfrm>
+          <a:off x="6771518" y="3622288"/>
+          <a:ext cx="179971" cy="193469"/>
+        </a:xfrm>
+        <a:custGeom>
+          <a:avLst/>
+          <a:gdLst/>
+          <a:ahLst/>
+          <a:cxnLst/>
+          <a:rect l="0" t="0" r="0" b="0"/>
+          <a:pathLst>
+            <a:path>
+              <a:moveTo>
+                <a:pt x="0" y="0"/>
+              </a:moveTo>
+              <a:lnTo>
+                <a:pt x="89985" y="0"/>
+              </a:lnTo>
+              <a:lnTo>
+                <a:pt x="89985" y="193469"/>
+              </a:lnTo>
+              <a:lnTo>
+                <a:pt x="179971" y="193469"/>
+              </a:lnTo>
+            </a:path>
+          </a:pathLst>
+        </a:custGeom>
+        <a:noFill/>
+        <a:ln w="19050" cap="flat" cmpd="sng" algn="ctr">
+          <a:solidFill>
+            <a:schemeClr val="accent1">
+              <a:shade val="80000"/>
+              <a:hueOff val="0"/>
+              <a:satOff val="0"/>
+              <a:lumOff val="0"/>
+              <a:alphaOff val="0"/>
+            </a:schemeClr>
+          </a:solidFill>
+          <a:prstDash val="solid"/>
+          <a:miter lim="800000"/>
+        </a:ln>
+        <a:effectLst/>
+      </dsp:spPr>
+      <dsp:style>
+        <a:lnRef idx="2">
+          <a:scrgbClr r="0" g="0" b="0"/>
+        </a:lnRef>
+        <a:fillRef idx="0">
+          <a:scrgbClr r="0" g="0" b="0"/>
+        </a:fillRef>
+        <a:effectRef idx="0">
+          <a:scrgbClr r="0" g="0" b="0"/>
+        </a:effectRef>
+        <a:fontRef idx="minor"/>
+      </dsp:style>
+    </dsp:sp>
+    <dsp:sp modelId="{00A95A3F-3AAD-468F-908F-845C4ED90DA2}">
+      <dsp:nvSpPr>
+        <dsp:cNvPr id="0" name=""/>
+        <dsp:cNvSpPr/>
+      </dsp:nvSpPr>
+      <dsp:spPr>
+        <a:xfrm>
+          <a:off x="7851348" y="3383098"/>
+          <a:ext cx="179971" cy="91440"/>
+        </a:xfrm>
+        <a:custGeom>
+          <a:avLst/>
+          <a:gdLst/>
+          <a:ahLst/>
+          <a:cxnLst/>
+          <a:rect l="0" t="0" r="0" b="0"/>
+          <a:pathLst>
+            <a:path>
+              <a:moveTo>
+                <a:pt x="0" y="45720"/>
+              </a:moveTo>
+              <a:lnTo>
+                <a:pt x="179971" y="45720"/>
+              </a:lnTo>
+            </a:path>
+          </a:pathLst>
+        </a:custGeom>
+        <a:noFill/>
+        <a:ln w="19050" cap="flat" cmpd="sng" algn="ctr">
+          <a:solidFill>
+            <a:schemeClr val="accent1">
+              <a:shade val="80000"/>
+              <a:hueOff val="0"/>
+              <a:satOff val="0"/>
+              <a:lumOff val="0"/>
+              <a:alphaOff val="0"/>
+            </a:schemeClr>
+          </a:solidFill>
+          <a:prstDash val="solid"/>
+          <a:miter lim="800000"/>
+        </a:ln>
+        <a:effectLst/>
+      </dsp:spPr>
+      <dsp:style>
+        <a:lnRef idx="2">
+          <a:scrgbClr r="0" g="0" b="0"/>
+        </a:lnRef>
+        <a:fillRef idx="0">
+          <a:scrgbClr r="0" g="0" b="0"/>
+        </a:fillRef>
+        <a:effectRef idx="0">
+          <a:scrgbClr r="0" g="0" b="0"/>
+        </a:effectRef>
+        <a:fontRef idx="minor"/>
+      </dsp:style>
+    </dsp:sp>
+    <dsp:sp modelId="{93F93993-47F1-428E-9F9E-450A331F894E}">
+      <dsp:nvSpPr>
+        <dsp:cNvPr id="0" name=""/>
+        <dsp:cNvSpPr/>
+      </dsp:nvSpPr>
+      <dsp:spPr>
+        <a:xfrm>
+          <a:off x="6771518" y="3428818"/>
+          <a:ext cx="179971" cy="193469"/>
+        </a:xfrm>
+        <a:custGeom>
+          <a:avLst/>
+          <a:gdLst/>
+          <a:ahLst/>
+          <a:cxnLst/>
+          <a:rect l="0" t="0" r="0" b="0"/>
+          <a:pathLst>
+            <a:path>
+              <a:moveTo>
+                <a:pt x="0" y="193469"/>
+              </a:moveTo>
+              <a:lnTo>
+                <a:pt x="89985" y="193469"/>
+              </a:lnTo>
+              <a:lnTo>
+                <a:pt x="89985" y="0"/>
+              </a:lnTo>
+              <a:lnTo>
+                <a:pt x="179971" y="0"/>
+              </a:lnTo>
+            </a:path>
+          </a:pathLst>
+        </a:custGeom>
+        <a:noFill/>
+        <a:ln w="19050" cap="flat" cmpd="sng" algn="ctr">
+          <a:solidFill>
+            <a:schemeClr val="accent1">
+              <a:shade val="80000"/>
+              <a:hueOff val="0"/>
+              <a:satOff val="0"/>
+              <a:lumOff val="0"/>
+              <a:alphaOff val="0"/>
+            </a:schemeClr>
+          </a:solidFill>
+          <a:prstDash val="solid"/>
+          <a:miter lim="800000"/>
+        </a:ln>
+        <a:effectLst/>
+      </dsp:spPr>
+      <dsp:style>
+        <a:lnRef idx="2">
+          <a:scrgbClr r="0" g="0" b="0"/>
+        </a:lnRef>
+        <a:fillRef idx="0">
+          <a:scrgbClr r="0" g="0" b="0"/>
+        </a:fillRef>
+        <a:effectRef idx="0">
+          <a:scrgbClr r="0" g="0" b="0"/>
+        </a:effectRef>
+        <a:fontRef idx="minor"/>
+      </dsp:style>
+    </dsp:sp>
+    <dsp:sp modelId="{7C3BC206-817E-47FC-AA4A-7E68D35E9CC7}">
+      <dsp:nvSpPr>
+        <dsp:cNvPr id="0" name=""/>
+        <dsp:cNvSpPr/>
+      </dsp:nvSpPr>
+      <dsp:spPr>
+        <a:xfrm>
+          <a:off x="5691689" y="3622288"/>
+          <a:ext cx="179971" cy="483673"/>
+        </a:xfrm>
+        <a:custGeom>
+          <a:avLst/>
+          <a:gdLst/>
+          <a:ahLst/>
+          <a:cxnLst/>
+          <a:rect l="0" t="0" r="0" b="0"/>
+          <a:pathLst>
+            <a:path>
+              <a:moveTo>
+                <a:pt x="0" y="483673"/>
+              </a:moveTo>
+              <a:lnTo>
+                <a:pt x="89985" y="483673"/>
+              </a:lnTo>
+              <a:lnTo>
+                <a:pt x="89985" y="0"/>
+              </a:lnTo>
+              <a:lnTo>
+                <a:pt x="179971" y="0"/>
+              </a:lnTo>
+            </a:path>
+          </a:pathLst>
+        </a:custGeom>
+        <a:noFill/>
+        <a:ln w="19050" cap="flat" cmpd="sng" algn="ctr">
+          <a:solidFill>
+            <a:schemeClr val="accent1">
+              <a:shade val="80000"/>
+              <a:hueOff val="0"/>
+              <a:satOff val="0"/>
+              <a:lumOff val="0"/>
+              <a:alphaOff val="0"/>
+            </a:schemeClr>
+          </a:solidFill>
+          <a:prstDash val="solid"/>
+          <a:miter lim="800000"/>
+        </a:ln>
+        <a:effectLst/>
+      </dsp:spPr>
+      <dsp:style>
+        <a:lnRef idx="2">
+          <a:scrgbClr r="0" g="0" b="0"/>
+        </a:lnRef>
+        <a:fillRef idx="0">
+          <a:scrgbClr r="0" g="0" b="0"/>
+        </a:fillRef>
+        <a:effectRef idx="0">
+          <a:scrgbClr r="0" g="0" b="0"/>
+        </a:effectRef>
+        <a:fontRef idx="minor"/>
+      </dsp:style>
+    </dsp:sp>
+    <dsp:sp modelId="{5D697390-7377-44AA-914E-7F34A506AC17}">
+      <dsp:nvSpPr>
+        <dsp:cNvPr id="0" name=""/>
+        <dsp:cNvSpPr/>
+      </dsp:nvSpPr>
+      <dsp:spPr>
+        <a:xfrm>
+          <a:off x="5691689" y="3235349"/>
+          <a:ext cx="179971" cy="870612"/>
+        </a:xfrm>
+        <a:custGeom>
+          <a:avLst/>
+          <a:gdLst/>
+          <a:ahLst/>
+          <a:cxnLst/>
+          <a:rect l="0" t="0" r="0" b="0"/>
+          <a:pathLst>
+            <a:path>
+              <a:moveTo>
+                <a:pt x="0" y="870612"/>
+              </a:moveTo>
+              <a:lnTo>
+                <a:pt x="89985" y="870612"/>
+              </a:lnTo>
+              <a:lnTo>
+                <a:pt x="89985" y="0"/>
+              </a:lnTo>
+              <a:lnTo>
+                <a:pt x="179971" y="0"/>
+              </a:lnTo>
+            </a:path>
+          </a:pathLst>
+        </a:custGeom>
+        <a:noFill/>
+        <a:ln w="19050" cap="flat" cmpd="sng" algn="ctr">
+          <a:solidFill>
+            <a:schemeClr val="accent1">
+              <a:shade val="80000"/>
+              <a:hueOff val="0"/>
+              <a:satOff val="0"/>
+              <a:lumOff val="0"/>
+              <a:alphaOff val="0"/>
+            </a:schemeClr>
+          </a:solidFill>
+          <a:prstDash val="solid"/>
+          <a:miter lim="800000"/>
+        </a:ln>
+        <a:effectLst/>
+      </dsp:spPr>
+      <dsp:style>
+        <a:lnRef idx="2">
+          <a:scrgbClr r="0" g="0" b="0"/>
+        </a:lnRef>
+        <a:fillRef idx="0">
+          <a:scrgbClr r="0" g="0" b="0"/>
+        </a:fillRef>
+        <a:effectRef idx="0">
+          <a:scrgbClr r="0" g="0" b="0"/>
+        </a:effectRef>
+        <a:fontRef idx="minor"/>
+      </dsp:style>
+    </dsp:sp>
+    <dsp:sp modelId="{554A0E78-C210-4338-8B5C-48DD3D201C5A}">
+      <dsp:nvSpPr>
+        <dsp:cNvPr id="0" name=""/>
+        <dsp:cNvSpPr/>
+      </dsp:nvSpPr>
+      <dsp:spPr>
+        <a:xfrm>
+          <a:off x="4611859" y="4105961"/>
+          <a:ext cx="179971" cy="193469"/>
+        </a:xfrm>
+        <a:custGeom>
+          <a:avLst/>
+          <a:gdLst/>
+          <a:ahLst/>
+          <a:cxnLst/>
+          <a:rect l="0" t="0" r="0" b="0"/>
+          <a:pathLst>
+            <a:path>
+              <a:moveTo>
+                <a:pt x="0" y="193469"/>
+              </a:moveTo>
+              <a:lnTo>
+                <a:pt x="89985" y="193469"/>
+              </a:lnTo>
+              <a:lnTo>
+                <a:pt x="89985" y="0"/>
+              </a:lnTo>
+              <a:lnTo>
+                <a:pt x="179971" y="0"/>
+              </a:lnTo>
+            </a:path>
+          </a:pathLst>
+        </a:custGeom>
+        <a:noFill/>
+        <a:ln w="19050" cap="flat" cmpd="sng" algn="ctr">
+          <a:solidFill>
+            <a:schemeClr val="accent1">
+              <a:shade val="80000"/>
+              <a:hueOff val="0"/>
+              <a:satOff val="0"/>
+              <a:lumOff val="0"/>
+              <a:alphaOff val="0"/>
+            </a:schemeClr>
+          </a:solidFill>
+          <a:prstDash val="solid"/>
+          <a:miter lim="800000"/>
+        </a:ln>
+        <a:effectLst/>
+      </dsp:spPr>
+      <dsp:style>
+        <a:lnRef idx="2">
+          <a:scrgbClr r="0" g="0" b="0"/>
+        </a:lnRef>
+        <a:fillRef idx="0">
+          <a:scrgbClr r="0" g="0" b="0"/>
+        </a:fillRef>
+        <a:effectRef idx="0">
+          <a:scrgbClr r="0" g="0" b="0"/>
+        </a:effectRef>
+        <a:fontRef idx="minor"/>
+      </dsp:style>
+    </dsp:sp>
+    <dsp:sp modelId="{3E53AB13-732C-4F83-9B8F-D6D7DB3860B6}">
+      <dsp:nvSpPr>
+        <dsp:cNvPr id="0" name=""/>
+        <dsp:cNvSpPr/>
+      </dsp:nvSpPr>
+      <dsp:spPr>
+        <a:xfrm>
+          <a:off x="3532030" y="3138614"/>
+          <a:ext cx="179971" cy="1160816"/>
+        </a:xfrm>
+        <a:custGeom>
+          <a:avLst/>
+          <a:gdLst/>
+          <a:ahLst/>
+          <a:cxnLst/>
+          <a:rect l="0" t="0" r="0" b="0"/>
+          <a:pathLst>
+            <a:path>
+              <a:moveTo>
+                <a:pt x="0" y="0"/>
+              </a:moveTo>
+              <a:lnTo>
+                <a:pt x="89985" y="0"/>
+              </a:lnTo>
+              <a:lnTo>
+                <a:pt x="89985" y="1160816"/>
+              </a:lnTo>
+              <a:lnTo>
+                <a:pt x="179971" y="1160816"/>
               </a:lnTo>
             </a:path>
           </a:pathLst>
@@ -4752,15 +5948,15 @@
         <a:fontRef idx="minor"/>
       </dsp:style>
     </dsp:sp>
-    <dsp:sp modelId="{8B19CEE5-FC4A-40A5-A7B6-1FB7479BBBE5}">
+    <dsp:sp modelId="{11F963ED-B3F0-41A3-B824-325961929004}">
       <dsp:nvSpPr>
         <dsp:cNvPr id="0" name=""/>
         <dsp:cNvSpPr/>
       </dsp:nvSpPr>
       <dsp:spPr>
         <a:xfrm>
-          <a:off x="5078903" y="4151068"/>
-          <a:ext cx="200791" cy="971330"/>
+          <a:off x="4611859" y="1881063"/>
+          <a:ext cx="179971" cy="193469"/>
         </a:xfrm>
         <a:custGeom>
           <a:avLst/>
@@ -4774,13 +5970,13 @@
                 <a:pt x="0" y="0"/>
               </a:moveTo>
               <a:lnTo>
-                <a:pt x="100395" y="0"/>
+                <a:pt x="89985" y="0"/>
               </a:lnTo>
               <a:lnTo>
-                <a:pt x="100395" y="971330"/>
+                <a:pt x="89985" y="193469"/>
               </a:lnTo>
               <a:lnTo>
-                <a:pt x="200791" y="971330"/>
+                <a:pt x="179971" y="193469"/>
               </a:lnTo>
             </a:path>
           </a:pathLst>
@@ -4814,15 +6010,15 @@
         <a:fontRef idx="minor"/>
       </dsp:style>
     </dsp:sp>
-    <dsp:sp modelId="{893463AD-E827-4ADB-B408-E38128099076}">
+    <dsp:sp modelId="{D56AF9D6-52CD-49B7-B03A-910C74477DFD}">
       <dsp:nvSpPr>
         <dsp:cNvPr id="0" name=""/>
         <dsp:cNvSpPr/>
       </dsp:nvSpPr>
       <dsp:spPr>
         <a:xfrm>
-          <a:off x="6283654" y="4644976"/>
-          <a:ext cx="200791" cy="91440"/>
+          <a:off x="7851348" y="2802690"/>
+          <a:ext cx="179971" cy="91440"/>
         </a:xfrm>
         <a:custGeom>
           <a:avLst/>
@@ -4836,7 +6032,7 @@
                 <a:pt x="0" y="45720"/>
               </a:moveTo>
               <a:lnTo>
-                <a:pt x="200791" y="45720"/>
+                <a:pt x="179971" y="45720"/>
               </a:lnTo>
             </a:path>
           </a:pathLst>
@@ -4870,15 +6066,15 @@
         <a:fontRef idx="minor"/>
       </dsp:style>
     </dsp:sp>
-    <dsp:sp modelId="{51F75AAC-642B-48ED-B19B-2EA01A0D0209}">
+    <dsp:sp modelId="{171E7136-836A-486B-B91D-37B90AC43AE7}">
       <dsp:nvSpPr>
         <dsp:cNvPr id="0" name=""/>
         <dsp:cNvSpPr/>
       </dsp:nvSpPr>
       <dsp:spPr>
         <a:xfrm>
-          <a:off x="5078903" y="4151068"/>
-          <a:ext cx="200791" cy="539627"/>
+          <a:off x="6771518" y="2802690"/>
+          <a:ext cx="179971" cy="91440"/>
         </a:xfrm>
         <a:custGeom>
           <a:avLst/>
@@ -4889,16 +6085,10 @@
           <a:pathLst>
             <a:path>
               <a:moveTo>
-                <a:pt x="0" y="0"/>
+                <a:pt x="0" y="45720"/>
               </a:moveTo>
               <a:lnTo>
-                <a:pt x="100395" y="0"/>
-              </a:lnTo>
-              <a:lnTo>
-                <a:pt x="100395" y="539627"/>
-              </a:lnTo>
-              <a:lnTo>
-                <a:pt x="200791" y="539627"/>
+                <a:pt x="179971" y="45720"/>
               </a:lnTo>
             </a:path>
           </a:pathLst>
@@ -4932,15 +6122,15 @@
         <a:fontRef idx="minor"/>
       </dsp:style>
     </dsp:sp>
-    <dsp:sp modelId="{7E682426-9DD9-499F-8054-AD080EABE950}">
+    <dsp:sp modelId="{26800CCF-2CF7-4C2B-BE5D-668243245262}">
       <dsp:nvSpPr>
         <dsp:cNvPr id="0" name=""/>
         <dsp:cNvSpPr/>
       </dsp:nvSpPr>
       <dsp:spPr>
         <a:xfrm>
-          <a:off x="6283654" y="4213274"/>
-          <a:ext cx="200791" cy="91440"/>
+          <a:off x="5691689" y="1687593"/>
+          <a:ext cx="179971" cy="1160816"/>
         </a:xfrm>
         <a:custGeom>
           <a:avLst/>
@@ -4951,10 +6141,16 @@
           <a:pathLst>
             <a:path>
               <a:moveTo>
-                <a:pt x="0" y="45720"/>
+                <a:pt x="0" y="0"/>
               </a:moveTo>
               <a:lnTo>
-                <a:pt x="200791" y="45720"/>
+                <a:pt x="89985" y="0"/>
+              </a:lnTo>
+              <a:lnTo>
+                <a:pt x="89985" y="1160816"/>
+              </a:lnTo>
+              <a:lnTo>
+                <a:pt x="179971" y="1160816"/>
               </a:lnTo>
             </a:path>
           </a:pathLst>
@@ -4988,15 +6184,15 @@
         <a:fontRef idx="minor"/>
       </dsp:style>
     </dsp:sp>
-    <dsp:sp modelId="{0F92594C-0E70-43C7-B781-9ACAC2BFB8E4}">
+    <dsp:sp modelId="{50A4060C-F737-4459-BC6A-B233FEC9432A}">
       <dsp:nvSpPr>
         <dsp:cNvPr id="0" name=""/>
         <dsp:cNvSpPr/>
       </dsp:nvSpPr>
       <dsp:spPr>
         <a:xfrm>
-          <a:off x="5078903" y="4151068"/>
-          <a:ext cx="200791" cy="107925"/>
+          <a:off x="6771518" y="2415751"/>
+          <a:ext cx="179971" cy="91440"/>
         </a:xfrm>
         <a:custGeom>
           <a:avLst/>
@@ -5007,16 +6203,10 @@
           <a:pathLst>
             <a:path>
               <a:moveTo>
-                <a:pt x="0" y="0"/>
+                <a:pt x="0" y="45720"/>
               </a:moveTo>
               <a:lnTo>
-                <a:pt x="100395" y="0"/>
-              </a:lnTo>
-              <a:lnTo>
-                <a:pt x="100395" y="107925"/>
-              </a:lnTo>
-              <a:lnTo>
-                <a:pt x="200791" y="107925"/>
+                <a:pt x="179971" y="45720"/>
               </a:lnTo>
             </a:path>
           </a:pathLst>
@@ -5050,15 +6240,15 @@
         <a:fontRef idx="minor"/>
       </dsp:style>
     </dsp:sp>
-    <dsp:sp modelId="{CA242517-F53F-48F5-B2BD-3695E5DF74DD}">
+    <dsp:sp modelId="{34B1EDD2-BFE8-4A14-8948-7EEB84EDF964}">
       <dsp:nvSpPr>
         <dsp:cNvPr id="0" name=""/>
         <dsp:cNvSpPr/>
       </dsp:nvSpPr>
       <dsp:spPr>
         <a:xfrm>
-          <a:off x="7488405" y="3781572"/>
-          <a:ext cx="200791" cy="91440"/>
+          <a:off x="5691689" y="1687593"/>
+          <a:ext cx="179971" cy="773877"/>
         </a:xfrm>
         <a:custGeom>
           <a:avLst/>
@@ -5069,10 +6259,16 @@
           <a:pathLst>
             <a:path>
               <a:moveTo>
-                <a:pt x="0" y="45720"/>
+                <a:pt x="0" y="0"/>
               </a:moveTo>
               <a:lnTo>
-                <a:pt x="200791" y="45720"/>
+                <a:pt x="89985" y="0"/>
+              </a:lnTo>
+              <a:lnTo>
+                <a:pt x="89985" y="773877"/>
+              </a:lnTo>
+              <a:lnTo>
+                <a:pt x="179971" y="773877"/>
               </a:lnTo>
             </a:path>
           </a:pathLst>
@@ -5106,15 +6302,15 @@
         <a:fontRef idx="minor"/>
       </dsp:style>
     </dsp:sp>
-    <dsp:sp modelId="{A70F5440-1532-4A1D-A6B4-AF69FBE58D12}">
+    <dsp:sp modelId="{AE91CF76-6598-4254-A5BF-61941E0FBFD6}">
       <dsp:nvSpPr>
         <dsp:cNvPr id="0" name=""/>
         <dsp:cNvSpPr/>
       </dsp:nvSpPr>
       <dsp:spPr>
         <a:xfrm>
-          <a:off x="6283654" y="3611440"/>
-          <a:ext cx="200791" cy="215851"/>
+          <a:off x="6771518" y="2028812"/>
+          <a:ext cx="179971" cy="91440"/>
         </a:xfrm>
         <a:custGeom>
           <a:avLst/>
@@ -5125,16 +6321,10 @@
           <a:pathLst>
             <a:path>
               <a:moveTo>
-                <a:pt x="0" y="0"/>
+                <a:pt x="0" y="45720"/>
               </a:moveTo>
               <a:lnTo>
-                <a:pt x="100395" y="0"/>
-              </a:lnTo>
-              <a:lnTo>
-                <a:pt x="100395" y="215851"/>
-              </a:lnTo>
-              <a:lnTo>
-                <a:pt x="200791" y="215851"/>
+                <a:pt x="179971" y="45720"/>
               </a:lnTo>
             </a:path>
           </a:pathLst>
@@ -5168,15 +6358,15 @@
         <a:fontRef idx="minor"/>
       </dsp:style>
     </dsp:sp>
-    <dsp:sp modelId="{F4508D2D-CCAA-4B6E-AD9A-E2A8D4EBB379}">
+    <dsp:sp modelId="{16D33CAD-B597-414C-9523-47A079B2FFFB}">
       <dsp:nvSpPr>
         <dsp:cNvPr id="0" name=""/>
         <dsp:cNvSpPr/>
       </dsp:nvSpPr>
       <dsp:spPr>
         <a:xfrm>
-          <a:off x="7488405" y="3349869"/>
-          <a:ext cx="200791" cy="91440"/>
+          <a:off x="5691689" y="1687593"/>
+          <a:ext cx="179971" cy="386938"/>
         </a:xfrm>
         <a:custGeom>
           <a:avLst/>
@@ -5187,10 +6377,16 @@
           <a:pathLst>
             <a:path>
               <a:moveTo>
-                <a:pt x="0" y="45720"/>
+                <a:pt x="0" y="0"/>
               </a:moveTo>
               <a:lnTo>
-                <a:pt x="200791" y="45720"/>
+                <a:pt x="89985" y="0"/>
+              </a:lnTo>
+              <a:lnTo>
+                <a:pt x="89985" y="386938"/>
+              </a:lnTo>
+              <a:lnTo>
+                <a:pt x="179971" y="386938"/>
               </a:lnTo>
             </a:path>
           </a:pathLst>
@@ -5224,15 +6420,15 @@
         <a:fontRef idx="minor"/>
       </dsp:style>
     </dsp:sp>
-    <dsp:sp modelId="{DB5E1FBB-4766-4187-B99E-821C906B52A9}">
+    <dsp:sp modelId="{D5EFD006-A32B-489A-B809-E3D7E0386B88}">
       <dsp:nvSpPr>
         <dsp:cNvPr id="0" name=""/>
         <dsp:cNvSpPr/>
       </dsp:nvSpPr>
       <dsp:spPr>
         <a:xfrm>
-          <a:off x="6283654" y="3395589"/>
-          <a:ext cx="200791" cy="215851"/>
+          <a:off x="6771518" y="1641873"/>
+          <a:ext cx="179971" cy="91440"/>
         </a:xfrm>
         <a:custGeom>
           <a:avLst/>
@@ -5243,16 +6439,10 @@
           <a:pathLst>
             <a:path>
               <a:moveTo>
-                <a:pt x="0" y="215851"/>
+                <a:pt x="0" y="45720"/>
               </a:moveTo>
               <a:lnTo>
-                <a:pt x="100395" y="215851"/>
-              </a:lnTo>
-              <a:lnTo>
-                <a:pt x="100395" y="0"/>
-              </a:lnTo>
-              <a:lnTo>
-                <a:pt x="200791" y="0"/>
+                <a:pt x="179971" y="45720"/>
               </a:lnTo>
             </a:path>
           </a:pathLst>
@@ -5286,15 +6476,15 @@
         <a:fontRef idx="minor"/>
       </dsp:style>
     </dsp:sp>
-    <dsp:sp modelId="{A9FBC398-F630-4DAD-8DDB-C584F376881B}">
+    <dsp:sp modelId="{B8837C6A-8105-408D-9A2C-4FAA52810339}">
       <dsp:nvSpPr>
         <dsp:cNvPr id="0" name=""/>
         <dsp:cNvSpPr/>
       </dsp:nvSpPr>
       <dsp:spPr>
         <a:xfrm>
-          <a:off x="5078903" y="3611440"/>
-          <a:ext cx="200791" cy="539627"/>
+          <a:off x="5691689" y="1641873"/>
+          <a:ext cx="179971" cy="91440"/>
         </a:xfrm>
         <a:custGeom>
           <a:avLst/>
@@ -5305,16 +6495,10 @@
           <a:pathLst>
             <a:path>
               <a:moveTo>
-                <a:pt x="0" y="539627"/>
+                <a:pt x="0" y="45720"/>
               </a:moveTo>
               <a:lnTo>
-                <a:pt x="100395" y="539627"/>
-              </a:lnTo>
-              <a:lnTo>
-                <a:pt x="100395" y="0"/>
-              </a:lnTo>
-              <a:lnTo>
-                <a:pt x="200791" y="0"/>
+                <a:pt x="179971" y="45720"/>
               </a:lnTo>
             </a:path>
           </a:pathLst>
@@ -5348,15 +6532,15 @@
         <a:fontRef idx="minor"/>
       </dsp:style>
     </dsp:sp>
-    <dsp:sp modelId="{6B2D008C-CA97-4972-8B5B-45081F19E3EC}">
+    <dsp:sp modelId="{183240E7-EEA6-46D8-AE60-487B0566B9A2}">
       <dsp:nvSpPr>
         <dsp:cNvPr id="0" name=""/>
         <dsp:cNvSpPr/>
       </dsp:nvSpPr>
       <dsp:spPr>
         <a:xfrm>
-          <a:off x="5078903" y="3179738"/>
-          <a:ext cx="200791" cy="971330"/>
+          <a:off x="5691689" y="1300654"/>
+          <a:ext cx="179971" cy="386938"/>
         </a:xfrm>
         <a:custGeom>
           <a:avLst/>
@@ -5367,16 +6551,16 @@
           <a:pathLst>
             <a:path>
               <a:moveTo>
-                <a:pt x="0" y="971330"/>
+                <a:pt x="0" y="386938"/>
               </a:moveTo>
               <a:lnTo>
-                <a:pt x="100395" y="971330"/>
+                <a:pt x="89985" y="386938"/>
               </a:lnTo>
               <a:lnTo>
-                <a:pt x="100395" y="0"/>
+                <a:pt x="89985" y="0"/>
               </a:lnTo>
               <a:lnTo>
-                <a:pt x="200791" y="0"/>
+                <a:pt x="179971" y="0"/>
               </a:lnTo>
             </a:path>
           </a:pathLst>
@@ -5410,15 +6594,15 @@
         <a:fontRef idx="minor"/>
       </dsp:style>
     </dsp:sp>
-    <dsp:sp modelId="{B62982CB-6890-46C2-886C-0FC435E2E88A}">
+    <dsp:sp modelId="{595CFFA0-B569-4A56-8175-567F57E3E286}">
       <dsp:nvSpPr>
         <dsp:cNvPr id="0" name=""/>
         <dsp:cNvSpPr/>
       </dsp:nvSpPr>
       <dsp:spPr>
         <a:xfrm>
-          <a:off x="3874152" y="3665403"/>
-          <a:ext cx="200791" cy="485665"/>
+          <a:off x="6771518" y="867995"/>
+          <a:ext cx="179971" cy="91440"/>
         </a:xfrm>
         <a:custGeom>
           <a:avLst/>
@@ -5429,16 +6613,314 @@
           <a:pathLst>
             <a:path>
               <a:moveTo>
-                <a:pt x="0" y="0"/>
+                <a:pt x="0" y="45720"/>
               </a:moveTo>
               <a:lnTo>
-                <a:pt x="100395" y="0"/>
+                <a:pt x="179971" y="45720"/>
+              </a:lnTo>
+            </a:path>
+          </a:pathLst>
+        </a:custGeom>
+        <a:noFill/>
+        <a:ln w="19050" cap="flat" cmpd="sng" algn="ctr">
+          <a:solidFill>
+            <a:schemeClr val="accent1">
+              <a:shade val="80000"/>
+              <a:hueOff val="0"/>
+              <a:satOff val="0"/>
+              <a:lumOff val="0"/>
+              <a:alphaOff val="0"/>
+            </a:schemeClr>
+          </a:solidFill>
+          <a:prstDash val="solid"/>
+          <a:miter lim="800000"/>
+        </a:ln>
+        <a:effectLst/>
+      </dsp:spPr>
+      <dsp:style>
+        <a:lnRef idx="2">
+          <a:scrgbClr r="0" g="0" b="0"/>
+        </a:lnRef>
+        <a:fillRef idx="0">
+          <a:scrgbClr r="0" g="0" b="0"/>
+        </a:fillRef>
+        <a:effectRef idx="0">
+          <a:scrgbClr r="0" g="0" b="0"/>
+        </a:effectRef>
+        <a:fontRef idx="minor"/>
+      </dsp:style>
+    </dsp:sp>
+    <dsp:sp modelId="{4CFCDFA8-E01C-4C6B-A731-226D0B6C2C76}">
+      <dsp:nvSpPr>
+        <dsp:cNvPr id="0" name=""/>
+        <dsp:cNvSpPr/>
+      </dsp:nvSpPr>
+      <dsp:spPr>
+        <a:xfrm>
+          <a:off x="5691689" y="913715"/>
+          <a:ext cx="179971" cy="773877"/>
+        </a:xfrm>
+        <a:custGeom>
+          <a:avLst/>
+          <a:gdLst/>
+          <a:ahLst/>
+          <a:cxnLst/>
+          <a:rect l="0" t="0" r="0" b="0"/>
+          <a:pathLst>
+            <a:path>
+              <a:moveTo>
+                <a:pt x="0" y="773877"/>
+              </a:moveTo>
+              <a:lnTo>
+                <a:pt x="89985" y="773877"/>
               </a:lnTo>
               <a:lnTo>
-                <a:pt x="100395" y="485665"/>
+                <a:pt x="89985" y="0"/>
               </a:lnTo>
               <a:lnTo>
-                <a:pt x="200791" y="485665"/>
+                <a:pt x="179971" y="0"/>
+              </a:lnTo>
+            </a:path>
+          </a:pathLst>
+        </a:custGeom>
+        <a:noFill/>
+        <a:ln w="19050" cap="flat" cmpd="sng" algn="ctr">
+          <a:solidFill>
+            <a:schemeClr val="accent1">
+              <a:shade val="80000"/>
+              <a:hueOff val="0"/>
+              <a:satOff val="0"/>
+              <a:lumOff val="0"/>
+              <a:alphaOff val="0"/>
+            </a:schemeClr>
+          </a:solidFill>
+          <a:prstDash val="solid"/>
+          <a:miter lim="800000"/>
+        </a:ln>
+        <a:effectLst/>
+      </dsp:spPr>
+      <dsp:style>
+        <a:lnRef idx="2">
+          <a:scrgbClr r="0" g="0" b="0"/>
+        </a:lnRef>
+        <a:fillRef idx="0">
+          <a:scrgbClr r="0" g="0" b="0"/>
+        </a:fillRef>
+        <a:effectRef idx="0">
+          <a:scrgbClr r="0" g="0" b="0"/>
+        </a:effectRef>
+        <a:fontRef idx="minor"/>
+      </dsp:style>
+    </dsp:sp>
+    <dsp:sp modelId="{2086A9C7-9135-4192-911C-9FD307A3662E}">
+      <dsp:nvSpPr>
+        <dsp:cNvPr id="0" name=""/>
+        <dsp:cNvSpPr/>
+      </dsp:nvSpPr>
+      <dsp:spPr>
+        <a:xfrm>
+          <a:off x="6771518" y="481057"/>
+          <a:ext cx="179971" cy="91440"/>
+        </a:xfrm>
+        <a:custGeom>
+          <a:avLst/>
+          <a:gdLst/>
+          <a:ahLst/>
+          <a:cxnLst/>
+          <a:rect l="0" t="0" r="0" b="0"/>
+          <a:pathLst>
+            <a:path>
+              <a:moveTo>
+                <a:pt x="0" y="45720"/>
+              </a:moveTo>
+              <a:lnTo>
+                <a:pt x="179971" y="45720"/>
+              </a:lnTo>
+            </a:path>
+          </a:pathLst>
+        </a:custGeom>
+        <a:noFill/>
+        <a:ln w="19050" cap="flat" cmpd="sng" algn="ctr">
+          <a:solidFill>
+            <a:schemeClr val="accent1">
+              <a:shade val="80000"/>
+              <a:hueOff val="0"/>
+              <a:satOff val="0"/>
+              <a:lumOff val="0"/>
+              <a:alphaOff val="0"/>
+            </a:schemeClr>
+          </a:solidFill>
+          <a:prstDash val="solid"/>
+          <a:miter lim="800000"/>
+        </a:ln>
+        <a:effectLst/>
+      </dsp:spPr>
+      <dsp:style>
+        <a:lnRef idx="2">
+          <a:scrgbClr r="0" g="0" b="0"/>
+        </a:lnRef>
+        <a:fillRef idx="0">
+          <a:scrgbClr r="0" g="0" b="0"/>
+        </a:fillRef>
+        <a:effectRef idx="0">
+          <a:scrgbClr r="0" g="0" b="0"/>
+        </a:effectRef>
+        <a:fontRef idx="minor"/>
+      </dsp:style>
+    </dsp:sp>
+    <dsp:sp modelId="{E7F095C9-0EEA-49B6-905E-AC74937B597A}">
+      <dsp:nvSpPr>
+        <dsp:cNvPr id="0" name=""/>
+        <dsp:cNvSpPr/>
+      </dsp:nvSpPr>
+      <dsp:spPr>
+        <a:xfrm>
+          <a:off x="5691689" y="526777"/>
+          <a:ext cx="179971" cy="1160816"/>
+        </a:xfrm>
+        <a:custGeom>
+          <a:avLst/>
+          <a:gdLst/>
+          <a:ahLst/>
+          <a:cxnLst/>
+          <a:rect l="0" t="0" r="0" b="0"/>
+          <a:pathLst>
+            <a:path>
+              <a:moveTo>
+                <a:pt x="0" y="1160816"/>
+              </a:moveTo>
+              <a:lnTo>
+                <a:pt x="89985" y="1160816"/>
+              </a:lnTo>
+              <a:lnTo>
+                <a:pt x="89985" y="0"/>
+              </a:lnTo>
+              <a:lnTo>
+                <a:pt x="179971" y="0"/>
+              </a:lnTo>
+            </a:path>
+          </a:pathLst>
+        </a:custGeom>
+        <a:noFill/>
+        <a:ln w="19050" cap="flat" cmpd="sng" algn="ctr">
+          <a:solidFill>
+            <a:schemeClr val="accent1">
+              <a:shade val="80000"/>
+              <a:hueOff val="0"/>
+              <a:satOff val="0"/>
+              <a:lumOff val="0"/>
+              <a:alphaOff val="0"/>
+            </a:schemeClr>
+          </a:solidFill>
+          <a:prstDash val="solid"/>
+          <a:miter lim="800000"/>
+        </a:ln>
+        <a:effectLst/>
+      </dsp:spPr>
+      <dsp:style>
+        <a:lnRef idx="2">
+          <a:scrgbClr r="0" g="0" b="0"/>
+        </a:lnRef>
+        <a:fillRef idx="0">
+          <a:scrgbClr r="0" g="0" b="0"/>
+        </a:fillRef>
+        <a:effectRef idx="0">
+          <a:scrgbClr r="0" g="0" b="0"/>
+        </a:effectRef>
+        <a:fontRef idx="minor"/>
+      </dsp:style>
+    </dsp:sp>
+    <dsp:sp modelId="{0A14706F-1BC6-48E6-BDBA-7B500E589BAD}">
+      <dsp:nvSpPr>
+        <dsp:cNvPr id="0" name=""/>
+        <dsp:cNvSpPr/>
+      </dsp:nvSpPr>
+      <dsp:spPr>
+        <a:xfrm>
+          <a:off x="4611859" y="1687593"/>
+          <a:ext cx="179971" cy="193469"/>
+        </a:xfrm>
+        <a:custGeom>
+          <a:avLst/>
+          <a:gdLst/>
+          <a:ahLst/>
+          <a:cxnLst/>
+          <a:rect l="0" t="0" r="0" b="0"/>
+          <a:pathLst>
+            <a:path>
+              <a:moveTo>
+                <a:pt x="0" y="193469"/>
+              </a:moveTo>
+              <a:lnTo>
+                <a:pt x="89985" y="193469"/>
+              </a:lnTo>
+              <a:lnTo>
+                <a:pt x="89985" y="0"/>
+              </a:lnTo>
+              <a:lnTo>
+                <a:pt x="179971" y="0"/>
+              </a:lnTo>
+            </a:path>
+          </a:pathLst>
+        </a:custGeom>
+        <a:noFill/>
+        <a:ln w="19050" cap="flat" cmpd="sng" algn="ctr">
+          <a:solidFill>
+            <a:schemeClr val="accent1">
+              <a:shade val="80000"/>
+              <a:hueOff val="0"/>
+              <a:satOff val="0"/>
+              <a:lumOff val="0"/>
+              <a:alphaOff val="0"/>
+            </a:schemeClr>
+          </a:solidFill>
+          <a:prstDash val="solid"/>
+          <a:miter lim="800000"/>
+        </a:ln>
+        <a:effectLst/>
+      </dsp:spPr>
+      <dsp:style>
+        <a:lnRef idx="2">
+          <a:scrgbClr r="0" g="0" b="0"/>
+        </a:lnRef>
+        <a:fillRef idx="0">
+          <a:scrgbClr r="0" g="0" b="0"/>
+        </a:fillRef>
+        <a:effectRef idx="0">
+          <a:scrgbClr r="0" g="0" b="0"/>
+        </a:effectRef>
+        <a:fontRef idx="minor"/>
+      </dsp:style>
+    </dsp:sp>
+    <dsp:sp modelId="{B0CC0030-18CD-4C76-8E04-002BB6D32A15}">
+      <dsp:nvSpPr>
+        <dsp:cNvPr id="0" name=""/>
+        <dsp:cNvSpPr/>
+      </dsp:nvSpPr>
+      <dsp:spPr>
+        <a:xfrm>
+          <a:off x="3532030" y="1881063"/>
+          <a:ext cx="179971" cy="1257551"/>
+        </a:xfrm>
+        <a:custGeom>
+          <a:avLst/>
+          <a:gdLst/>
+          <a:ahLst/>
+          <a:cxnLst/>
+          <a:rect l="0" t="0" r="0" b="0"/>
+          <a:pathLst>
+            <a:path>
+              <a:moveTo>
+                <a:pt x="0" y="1257551"/>
+              </a:moveTo>
+              <a:lnTo>
+                <a:pt x="89985" y="1257551"/>
+              </a:lnTo>
+              <a:lnTo>
+                <a:pt x="89985" y="0"/>
+              </a:lnTo>
+              <a:lnTo>
+                <a:pt x="179971" y="0"/>
               </a:lnTo>
             </a:path>
           </a:pathLst>
@@ -5472,15 +6954,15 @@
         <a:fontRef idx="minor"/>
       </dsp:style>
     </dsp:sp>
-    <dsp:sp modelId="{87CE32BE-E790-4C1C-A724-8399427B532F}">
+    <dsp:sp modelId="{172AD772-32C1-453D-A10B-AD2F2B8A156F}">
       <dsp:nvSpPr>
         <dsp:cNvPr id="0" name=""/>
         <dsp:cNvSpPr/>
       </dsp:nvSpPr>
       <dsp:spPr>
         <a:xfrm>
-          <a:off x="3874152" y="1992557"/>
-          <a:ext cx="200791" cy="1672846"/>
+          <a:off x="4611859" y="137228"/>
+          <a:ext cx="169227" cy="356764"/>
         </a:xfrm>
         <a:custGeom>
           <a:avLst/>
@@ -5491,16 +6973,196 @@
           <a:pathLst>
             <a:path>
               <a:moveTo>
-                <a:pt x="0" y="1672846"/>
+                <a:pt x="0" y="0"/>
               </a:moveTo>
               <a:lnTo>
-                <a:pt x="100395" y="1672846"/>
+                <a:pt x="79241" y="0"/>
               </a:lnTo>
               <a:lnTo>
-                <a:pt x="100395" y="0"/>
+                <a:pt x="79241" y="356764"/>
               </a:lnTo>
               <a:lnTo>
-                <a:pt x="200791" y="0"/>
+                <a:pt x="169227" y="356764"/>
+              </a:lnTo>
+            </a:path>
+          </a:pathLst>
+        </a:custGeom>
+        <a:noFill/>
+        <a:ln w="19050" cap="flat" cmpd="sng" algn="ctr">
+          <a:solidFill>
+            <a:schemeClr val="accent1">
+              <a:shade val="80000"/>
+              <a:hueOff val="0"/>
+              <a:satOff val="0"/>
+              <a:lumOff val="0"/>
+              <a:alphaOff val="0"/>
+            </a:schemeClr>
+          </a:solidFill>
+          <a:prstDash val="solid"/>
+          <a:miter lim="800000"/>
+        </a:ln>
+        <a:effectLst/>
+      </dsp:spPr>
+      <dsp:style>
+        <a:lnRef idx="2">
+          <a:scrgbClr r="0" g="0" b="0"/>
+        </a:lnRef>
+        <a:fillRef idx="0">
+          <a:scrgbClr r="0" g="0" b="0"/>
+        </a:fillRef>
+        <a:effectRef idx="0">
+          <a:scrgbClr r="0" g="0" b="0"/>
+        </a:effectRef>
+        <a:fontRef idx="minor"/>
+      </dsp:style>
+    </dsp:sp>
+    <dsp:sp modelId="{5613D8DC-8394-4EB2-BEC0-4978BB2F3DA3}">
+      <dsp:nvSpPr>
+        <dsp:cNvPr id="0" name=""/>
+        <dsp:cNvSpPr/>
+      </dsp:nvSpPr>
+      <dsp:spPr>
+        <a:xfrm>
+          <a:off x="5680944" y="91508"/>
+          <a:ext cx="190715" cy="91440"/>
+        </a:xfrm>
+        <a:custGeom>
+          <a:avLst/>
+          <a:gdLst/>
+          <a:ahLst/>
+          <a:cxnLst/>
+          <a:rect l="0" t="0" r="0" b="0"/>
+          <a:pathLst>
+            <a:path>
+              <a:moveTo>
+                <a:pt x="0" y="45720"/>
+              </a:moveTo>
+              <a:lnTo>
+                <a:pt x="100730" y="45720"/>
+              </a:lnTo>
+              <a:lnTo>
+                <a:pt x="100730" y="48329"/>
+              </a:lnTo>
+              <a:lnTo>
+                <a:pt x="190715" y="48329"/>
+              </a:lnTo>
+            </a:path>
+          </a:pathLst>
+        </a:custGeom>
+        <a:noFill/>
+        <a:ln w="19050" cap="flat" cmpd="sng" algn="ctr">
+          <a:solidFill>
+            <a:schemeClr val="accent1">
+              <a:shade val="80000"/>
+              <a:hueOff val="0"/>
+              <a:satOff val="0"/>
+              <a:lumOff val="0"/>
+              <a:alphaOff val="0"/>
+            </a:schemeClr>
+          </a:solidFill>
+          <a:prstDash val="solid"/>
+          <a:miter lim="800000"/>
+        </a:ln>
+        <a:effectLst/>
+      </dsp:spPr>
+      <dsp:style>
+        <a:lnRef idx="2">
+          <a:scrgbClr r="0" g="0" b="0"/>
+        </a:lnRef>
+        <a:fillRef idx="0">
+          <a:scrgbClr r="0" g="0" b="0"/>
+        </a:fillRef>
+        <a:effectRef idx="0">
+          <a:scrgbClr r="0" g="0" b="0"/>
+        </a:effectRef>
+        <a:fontRef idx="minor"/>
+      </dsp:style>
+    </dsp:sp>
+    <dsp:sp modelId="{6D1FD870-2315-4054-B29C-39DF6F98439B}">
+      <dsp:nvSpPr>
+        <dsp:cNvPr id="0" name=""/>
+        <dsp:cNvSpPr/>
+      </dsp:nvSpPr>
+      <dsp:spPr>
+        <a:xfrm>
+          <a:off x="4611859" y="91508"/>
+          <a:ext cx="169227" cy="91440"/>
+        </a:xfrm>
+        <a:custGeom>
+          <a:avLst/>
+          <a:gdLst/>
+          <a:ahLst/>
+          <a:cxnLst/>
+          <a:rect l="0" t="0" r="0" b="0"/>
+          <a:pathLst>
+            <a:path>
+              <a:moveTo>
+                <a:pt x="0" y="45720"/>
+              </a:moveTo>
+              <a:lnTo>
+                <a:pt x="169227" y="45720"/>
+              </a:lnTo>
+            </a:path>
+          </a:pathLst>
+        </a:custGeom>
+        <a:noFill/>
+        <a:ln w="19050" cap="flat" cmpd="sng" algn="ctr">
+          <a:solidFill>
+            <a:schemeClr val="accent1">
+              <a:shade val="80000"/>
+              <a:hueOff val="0"/>
+              <a:satOff val="0"/>
+              <a:lumOff val="0"/>
+              <a:alphaOff val="0"/>
+            </a:schemeClr>
+          </a:solidFill>
+          <a:prstDash val="solid"/>
+          <a:miter lim="800000"/>
+        </a:ln>
+        <a:effectLst/>
+      </dsp:spPr>
+      <dsp:style>
+        <a:lnRef idx="2">
+          <a:scrgbClr r="0" g="0" b="0"/>
+        </a:lnRef>
+        <a:fillRef idx="0">
+          <a:scrgbClr r="0" g="0" b="0"/>
+        </a:fillRef>
+        <a:effectRef idx="0">
+          <a:scrgbClr r="0" g="0" b="0"/>
+        </a:effectRef>
+        <a:fontRef idx="minor"/>
+      </dsp:style>
+    </dsp:sp>
+    <dsp:sp modelId="{E35E075B-61F2-41BC-BC2A-69356E0D43EE}">
+      <dsp:nvSpPr>
+        <dsp:cNvPr id="0" name=""/>
+        <dsp:cNvSpPr/>
+      </dsp:nvSpPr>
+      <dsp:spPr>
+        <a:xfrm>
+          <a:off x="3532030" y="137228"/>
+          <a:ext cx="179971" cy="3001386"/>
+        </a:xfrm>
+        <a:custGeom>
+          <a:avLst/>
+          <a:gdLst/>
+          <a:ahLst/>
+          <a:cxnLst/>
+          <a:rect l="0" t="0" r="0" b="0"/>
+          <a:pathLst>
+            <a:path>
+              <a:moveTo>
+                <a:pt x="0" y="3001386"/>
+              </a:moveTo>
+              <a:lnTo>
+                <a:pt x="89985" y="3001386"/>
+              </a:lnTo>
+              <a:lnTo>
+                <a:pt x="89985" y="0"/>
+              </a:lnTo>
+              <a:lnTo>
+                <a:pt x="179971" y="0"/>
               </a:lnTo>
             </a:path>
           </a:pathLst>
@@ -5534,965 +7196,15 @@
         <a:fontRef idx="minor"/>
       </dsp:style>
     </dsp:sp>
-    <dsp:sp modelId="{DF3D6495-4140-4D40-8D35-ABD35584EF53}">
+    <dsp:sp modelId="{03A1BB14-9637-40F9-B5B5-81520F48315F}">
       <dsp:nvSpPr>
         <dsp:cNvPr id="0" name=""/>
         <dsp:cNvSpPr/>
       </dsp:nvSpPr>
       <dsp:spPr>
         <a:xfrm>
-          <a:off x="6283654" y="2702316"/>
-          <a:ext cx="200791" cy="91440"/>
-        </a:xfrm>
-        <a:custGeom>
-          <a:avLst/>
-          <a:gdLst/>
-          <a:ahLst/>
-          <a:cxnLst/>
-          <a:rect l="0" t="0" r="0" b="0"/>
-          <a:pathLst>
-            <a:path>
-              <a:moveTo>
-                <a:pt x="0" y="45720"/>
-              </a:moveTo>
-              <a:lnTo>
-                <a:pt x="200791" y="45720"/>
-              </a:lnTo>
-            </a:path>
-          </a:pathLst>
-        </a:custGeom>
-        <a:noFill/>
-        <a:ln w="19050" cap="flat" cmpd="sng" algn="ctr">
-          <a:solidFill>
-            <a:schemeClr val="accent1">
-              <a:shade val="80000"/>
-              <a:hueOff val="0"/>
-              <a:satOff val="0"/>
-              <a:lumOff val="0"/>
-              <a:alphaOff val="0"/>
-            </a:schemeClr>
-          </a:solidFill>
-          <a:prstDash val="solid"/>
-          <a:miter lim="800000"/>
-        </a:ln>
-        <a:effectLst/>
-      </dsp:spPr>
-      <dsp:style>
-        <a:lnRef idx="2">
-          <a:scrgbClr r="0" g="0" b="0"/>
-        </a:lnRef>
-        <a:fillRef idx="0">
-          <a:scrgbClr r="0" g="0" b="0"/>
-        </a:fillRef>
-        <a:effectRef idx="0">
-          <a:scrgbClr r="0" g="0" b="0"/>
-        </a:effectRef>
-        <a:fontRef idx="minor"/>
-      </dsp:style>
-    </dsp:sp>
-    <dsp:sp modelId="{5D734C8D-E40C-4BF2-A310-8A858AE1F314}">
-      <dsp:nvSpPr>
-        <dsp:cNvPr id="0" name=""/>
-        <dsp:cNvSpPr/>
-      </dsp:nvSpPr>
-      <dsp:spPr>
-        <a:xfrm>
-          <a:off x="5078903" y="1560854"/>
-          <a:ext cx="200791" cy="1187181"/>
-        </a:xfrm>
-        <a:custGeom>
-          <a:avLst/>
-          <a:gdLst/>
-          <a:ahLst/>
-          <a:cxnLst/>
-          <a:rect l="0" t="0" r="0" b="0"/>
-          <a:pathLst>
-            <a:path>
-              <a:moveTo>
-                <a:pt x="0" y="0"/>
-              </a:moveTo>
-              <a:lnTo>
-                <a:pt x="100395" y="0"/>
-              </a:lnTo>
-              <a:lnTo>
-                <a:pt x="100395" y="1187181"/>
-              </a:lnTo>
-              <a:lnTo>
-                <a:pt x="200791" y="1187181"/>
-              </a:lnTo>
-            </a:path>
-          </a:pathLst>
-        </a:custGeom>
-        <a:noFill/>
-        <a:ln w="19050" cap="flat" cmpd="sng" algn="ctr">
-          <a:solidFill>
-            <a:schemeClr val="accent1">
-              <a:shade val="80000"/>
-              <a:hueOff val="0"/>
-              <a:satOff val="0"/>
-              <a:lumOff val="0"/>
-              <a:alphaOff val="0"/>
-            </a:schemeClr>
-          </a:solidFill>
-          <a:prstDash val="solid"/>
-          <a:miter lim="800000"/>
-        </a:ln>
-        <a:effectLst/>
-      </dsp:spPr>
-      <dsp:style>
-        <a:lnRef idx="2">
-          <a:scrgbClr r="0" g="0" b="0"/>
-        </a:lnRef>
-        <a:fillRef idx="0">
-          <a:scrgbClr r="0" g="0" b="0"/>
-        </a:fillRef>
-        <a:effectRef idx="0">
-          <a:scrgbClr r="0" g="0" b="0"/>
-        </a:effectRef>
-        <a:fontRef idx="minor"/>
-      </dsp:style>
-    </dsp:sp>
-    <dsp:sp modelId="{95CF0774-536B-4F9D-A2E5-78BCC760D370}">
-      <dsp:nvSpPr>
-        <dsp:cNvPr id="0" name=""/>
-        <dsp:cNvSpPr/>
-      </dsp:nvSpPr>
-      <dsp:spPr>
-        <a:xfrm>
-          <a:off x="6283654" y="2270613"/>
-          <a:ext cx="200791" cy="91440"/>
-        </a:xfrm>
-        <a:custGeom>
-          <a:avLst/>
-          <a:gdLst/>
-          <a:ahLst/>
-          <a:cxnLst/>
-          <a:rect l="0" t="0" r="0" b="0"/>
-          <a:pathLst>
-            <a:path>
-              <a:moveTo>
-                <a:pt x="0" y="45720"/>
-              </a:moveTo>
-              <a:lnTo>
-                <a:pt x="200791" y="45720"/>
-              </a:lnTo>
-            </a:path>
-          </a:pathLst>
-        </a:custGeom>
-        <a:noFill/>
-        <a:ln w="19050" cap="flat" cmpd="sng" algn="ctr">
-          <a:solidFill>
-            <a:schemeClr val="accent1">
-              <a:shade val="80000"/>
-              <a:hueOff val="0"/>
-              <a:satOff val="0"/>
-              <a:lumOff val="0"/>
-              <a:alphaOff val="0"/>
-            </a:schemeClr>
-          </a:solidFill>
-          <a:prstDash val="solid"/>
-          <a:miter lim="800000"/>
-        </a:ln>
-        <a:effectLst/>
-      </dsp:spPr>
-      <dsp:style>
-        <a:lnRef idx="2">
-          <a:scrgbClr r="0" g="0" b="0"/>
-        </a:lnRef>
-        <a:fillRef idx="0">
-          <a:scrgbClr r="0" g="0" b="0"/>
-        </a:fillRef>
-        <a:effectRef idx="0">
-          <a:scrgbClr r="0" g="0" b="0"/>
-        </a:effectRef>
-        <a:fontRef idx="minor"/>
-      </dsp:style>
-    </dsp:sp>
-    <dsp:sp modelId="{259DBE4E-D122-4206-8EBC-C98CAAF97ECC}">
-      <dsp:nvSpPr>
-        <dsp:cNvPr id="0" name=""/>
-        <dsp:cNvSpPr/>
-      </dsp:nvSpPr>
-      <dsp:spPr>
-        <a:xfrm>
-          <a:off x="5078903" y="1560854"/>
-          <a:ext cx="200791" cy="755479"/>
-        </a:xfrm>
-        <a:custGeom>
-          <a:avLst/>
-          <a:gdLst/>
-          <a:ahLst/>
-          <a:cxnLst/>
-          <a:rect l="0" t="0" r="0" b="0"/>
-          <a:pathLst>
-            <a:path>
-              <a:moveTo>
-                <a:pt x="0" y="0"/>
-              </a:moveTo>
-              <a:lnTo>
-                <a:pt x="100395" y="0"/>
-              </a:lnTo>
-              <a:lnTo>
-                <a:pt x="100395" y="755479"/>
-              </a:lnTo>
-              <a:lnTo>
-                <a:pt x="200791" y="755479"/>
-              </a:lnTo>
-            </a:path>
-          </a:pathLst>
-        </a:custGeom>
-        <a:noFill/>
-        <a:ln w="19050" cap="flat" cmpd="sng" algn="ctr">
-          <a:solidFill>
-            <a:schemeClr val="accent1">
-              <a:shade val="80000"/>
-              <a:hueOff val="0"/>
-              <a:satOff val="0"/>
-              <a:lumOff val="0"/>
-              <a:alphaOff val="0"/>
-            </a:schemeClr>
-          </a:solidFill>
-          <a:prstDash val="solid"/>
-          <a:miter lim="800000"/>
-        </a:ln>
-        <a:effectLst/>
-      </dsp:spPr>
-      <dsp:style>
-        <a:lnRef idx="2">
-          <a:scrgbClr r="0" g="0" b="0"/>
-        </a:lnRef>
-        <a:fillRef idx="0">
-          <a:scrgbClr r="0" g="0" b="0"/>
-        </a:fillRef>
-        <a:effectRef idx="0">
-          <a:scrgbClr r="0" g="0" b="0"/>
-        </a:effectRef>
-        <a:fontRef idx="minor"/>
-      </dsp:style>
-    </dsp:sp>
-    <dsp:sp modelId="{DF5FB862-76EA-4FBD-97DB-876FA1B4C7A5}">
-      <dsp:nvSpPr>
-        <dsp:cNvPr id="0" name=""/>
-        <dsp:cNvSpPr/>
-      </dsp:nvSpPr>
-      <dsp:spPr>
-        <a:xfrm>
-          <a:off x="7488405" y="1838911"/>
-          <a:ext cx="200791" cy="91440"/>
-        </a:xfrm>
-        <a:custGeom>
-          <a:avLst/>
-          <a:gdLst/>
-          <a:ahLst/>
-          <a:cxnLst/>
-          <a:rect l="0" t="0" r="0" b="0"/>
-          <a:pathLst>
-            <a:path>
-              <a:moveTo>
-                <a:pt x="0" y="45720"/>
-              </a:moveTo>
-              <a:lnTo>
-                <a:pt x="200791" y="45720"/>
-              </a:lnTo>
-            </a:path>
-          </a:pathLst>
-        </a:custGeom>
-        <a:noFill/>
-        <a:ln w="19050" cap="flat" cmpd="sng" algn="ctr">
-          <a:solidFill>
-            <a:schemeClr val="accent1">
-              <a:shade val="80000"/>
-              <a:hueOff val="0"/>
-              <a:satOff val="0"/>
-              <a:lumOff val="0"/>
-              <a:alphaOff val="0"/>
-            </a:schemeClr>
-          </a:solidFill>
-          <a:prstDash val="solid"/>
-          <a:miter lim="800000"/>
-        </a:ln>
-        <a:effectLst/>
-      </dsp:spPr>
-      <dsp:style>
-        <a:lnRef idx="2">
-          <a:scrgbClr r="0" g="0" b="0"/>
-        </a:lnRef>
-        <a:fillRef idx="0">
-          <a:scrgbClr r="0" g="0" b="0"/>
-        </a:fillRef>
-        <a:effectRef idx="0">
-          <a:scrgbClr r="0" g="0" b="0"/>
-        </a:effectRef>
-        <a:fontRef idx="minor"/>
-      </dsp:style>
-    </dsp:sp>
-    <dsp:sp modelId="{137A950C-A2C9-4E92-AA44-CCBE0A4712D0}">
-      <dsp:nvSpPr>
-        <dsp:cNvPr id="0" name=""/>
-        <dsp:cNvSpPr/>
-      </dsp:nvSpPr>
-      <dsp:spPr>
-        <a:xfrm>
-          <a:off x="6283654" y="1838911"/>
-          <a:ext cx="200791" cy="91440"/>
-        </a:xfrm>
-        <a:custGeom>
-          <a:avLst/>
-          <a:gdLst/>
-          <a:ahLst/>
-          <a:cxnLst/>
-          <a:rect l="0" t="0" r="0" b="0"/>
-          <a:pathLst>
-            <a:path>
-              <a:moveTo>
-                <a:pt x="0" y="45720"/>
-              </a:moveTo>
-              <a:lnTo>
-                <a:pt x="200791" y="45720"/>
-              </a:lnTo>
-            </a:path>
-          </a:pathLst>
-        </a:custGeom>
-        <a:noFill/>
-        <a:ln w="19050" cap="flat" cmpd="sng" algn="ctr">
-          <a:solidFill>
-            <a:schemeClr val="accent1">
-              <a:shade val="80000"/>
-              <a:hueOff val="0"/>
-              <a:satOff val="0"/>
-              <a:lumOff val="0"/>
-              <a:alphaOff val="0"/>
-            </a:schemeClr>
-          </a:solidFill>
-          <a:prstDash val="solid"/>
-          <a:miter lim="800000"/>
-        </a:ln>
-        <a:effectLst/>
-      </dsp:spPr>
-      <dsp:style>
-        <a:lnRef idx="2">
-          <a:scrgbClr r="0" g="0" b="0"/>
-        </a:lnRef>
-        <a:fillRef idx="0">
-          <a:scrgbClr r="0" g="0" b="0"/>
-        </a:fillRef>
-        <a:effectRef idx="0">
-          <a:scrgbClr r="0" g="0" b="0"/>
-        </a:effectRef>
-        <a:fontRef idx="minor"/>
-      </dsp:style>
-    </dsp:sp>
-    <dsp:sp modelId="{422596F1-C75B-45F9-BFD0-9951F8F32EFB}">
-      <dsp:nvSpPr>
-        <dsp:cNvPr id="0" name=""/>
-        <dsp:cNvSpPr/>
-      </dsp:nvSpPr>
-      <dsp:spPr>
-        <a:xfrm>
-          <a:off x="5078903" y="1560854"/>
-          <a:ext cx="200791" cy="323776"/>
-        </a:xfrm>
-        <a:custGeom>
-          <a:avLst/>
-          <a:gdLst/>
-          <a:ahLst/>
-          <a:cxnLst/>
-          <a:rect l="0" t="0" r="0" b="0"/>
-          <a:pathLst>
-            <a:path>
-              <a:moveTo>
-                <a:pt x="0" y="0"/>
-              </a:moveTo>
-              <a:lnTo>
-                <a:pt x="100395" y="0"/>
-              </a:lnTo>
-              <a:lnTo>
-                <a:pt x="100395" y="323776"/>
-              </a:lnTo>
-              <a:lnTo>
-                <a:pt x="200791" y="323776"/>
-              </a:lnTo>
-            </a:path>
-          </a:pathLst>
-        </a:custGeom>
-        <a:noFill/>
-        <a:ln w="19050" cap="flat" cmpd="sng" algn="ctr">
-          <a:solidFill>
-            <a:schemeClr val="accent1">
-              <a:shade val="80000"/>
-              <a:hueOff val="0"/>
-              <a:satOff val="0"/>
-              <a:lumOff val="0"/>
-              <a:alphaOff val="0"/>
-            </a:schemeClr>
-          </a:solidFill>
-          <a:prstDash val="solid"/>
-          <a:miter lim="800000"/>
-        </a:ln>
-        <a:effectLst/>
-      </dsp:spPr>
-      <dsp:style>
-        <a:lnRef idx="2">
-          <a:scrgbClr r="0" g="0" b="0"/>
-        </a:lnRef>
-        <a:fillRef idx="0">
-          <a:scrgbClr r="0" g="0" b="0"/>
-        </a:fillRef>
-        <a:effectRef idx="0">
-          <a:scrgbClr r="0" g="0" b="0"/>
-        </a:effectRef>
-        <a:fontRef idx="minor"/>
-      </dsp:style>
-    </dsp:sp>
-    <dsp:sp modelId="{B53F97DA-CD42-477B-978A-645AB0B3B0D8}">
-      <dsp:nvSpPr>
-        <dsp:cNvPr id="0" name=""/>
-        <dsp:cNvSpPr/>
-      </dsp:nvSpPr>
-      <dsp:spPr>
-        <a:xfrm>
-          <a:off x="6283654" y="1407209"/>
-          <a:ext cx="200791" cy="91440"/>
-        </a:xfrm>
-        <a:custGeom>
-          <a:avLst/>
-          <a:gdLst/>
-          <a:ahLst/>
-          <a:cxnLst/>
-          <a:rect l="0" t="0" r="0" b="0"/>
-          <a:pathLst>
-            <a:path>
-              <a:moveTo>
-                <a:pt x="0" y="45720"/>
-              </a:moveTo>
-              <a:lnTo>
-                <a:pt x="200791" y="45720"/>
-              </a:lnTo>
-            </a:path>
-          </a:pathLst>
-        </a:custGeom>
-        <a:noFill/>
-        <a:ln w="19050" cap="flat" cmpd="sng" algn="ctr">
-          <a:solidFill>
-            <a:schemeClr val="accent1">
-              <a:shade val="80000"/>
-              <a:hueOff val="0"/>
-              <a:satOff val="0"/>
-              <a:lumOff val="0"/>
-              <a:alphaOff val="0"/>
-            </a:schemeClr>
-          </a:solidFill>
-          <a:prstDash val="solid"/>
-          <a:miter lim="800000"/>
-        </a:ln>
-        <a:effectLst/>
-      </dsp:spPr>
-      <dsp:style>
-        <a:lnRef idx="2">
-          <a:scrgbClr r="0" g="0" b="0"/>
-        </a:lnRef>
-        <a:fillRef idx="0">
-          <a:scrgbClr r="0" g="0" b="0"/>
-        </a:fillRef>
-        <a:effectRef idx="0">
-          <a:scrgbClr r="0" g="0" b="0"/>
-        </a:effectRef>
-        <a:fontRef idx="minor"/>
-      </dsp:style>
-    </dsp:sp>
-    <dsp:sp modelId="{E4E142D8-98D9-4BB4-8826-8B27491F43B4}">
-      <dsp:nvSpPr>
-        <dsp:cNvPr id="0" name=""/>
-        <dsp:cNvSpPr/>
-      </dsp:nvSpPr>
-      <dsp:spPr>
-        <a:xfrm>
-          <a:off x="5078903" y="1452929"/>
-          <a:ext cx="200791" cy="107925"/>
-        </a:xfrm>
-        <a:custGeom>
-          <a:avLst/>
-          <a:gdLst/>
-          <a:ahLst/>
-          <a:cxnLst/>
-          <a:rect l="0" t="0" r="0" b="0"/>
-          <a:pathLst>
-            <a:path>
-              <a:moveTo>
-                <a:pt x="0" y="107925"/>
-              </a:moveTo>
-              <a:lnTo>
-                <a:pt x="100395" y="107925"/>
-              </a:lnTo>
-              <a:lnTo>
-                <a:pt x="100395" y="0"/>
-              </a:lnTo>
-              <a:lnTo>
-                <a:pt x="200791" y="0"/>
-              </a:lnTo>
-            </a:path>
-          </a:pathLst>
-        </a:custGeom>
-        <a:noFill/>
-        <a:ln w="19050" cap="flat" cmpd="sng" algn="ctr">
-          <a:solidFill>
-            <a:schemeClr val="accent1">
-              <a:shade val="80000"/>
-              <a:hueOff val="0"/>
-              <a:satOff val="0"/>
-              <a:lumOff val="0"/>
-              <a:alphaOff val="0"/>
-            </a:schemeClr>
-          </a:solidFill>
-          <a:prstDash val="solid"/>
-          <a:miter lim="800000"/>
-        </a:ln>
-        <a:effectLst/>
-      </dsp:spPr>
-      <dsp:style>
-        <a:lnRef idx="2">
-          <a:scrgbClr r="0" g="0" b="0"/>
-        </a:lnRef>
-        <a:fillRef idx="0">
-          <a:scrgbClr r="0" g="0" b="0"/>
-        </a:fillRef>
-        <a:effectRef idx="0">
-          <a:scrgbClr r="0" g="0" b="0"/>
-        </a:effectRef>
-        <a:fontRef idx="minor"/>
-      </dsp:style>
-    </dsp:sp>
-    <dsp:sp modelId="{2C4198AB-26E0-4488-A949-AC34DCA3B154}">
-      <dsp:nvSpPr>
-        <dsp:cNvPr id="0" name=""/>
-        <dsp:cNvSpPr/>
-      </dsp:nvSpPr>
-      <dsp:spPr>
-        <a:xfrm>
-          <a:off x="7488405" y="975506"/>
-          <a:ext cx="200791" cy="91440"/>
-        </a:xfrm>
-        <a:custGeom>
-          <a:avLst/>
-          <a:gdLst/>
-          <a:ahLst/>
-          <a:cxnLst/>
-          <a:rect l="0" t="0" r="0" b="0"/>
-          <a:pathLst>
-            <a:path>
-              <a:moveTo>
-                <a:pt x="0" y="45720"/>
-              </a:moveTo>
-              <a:lnTo>
-                <a:pt x="200791" y="45720"/>
-              </a:lnTo>
-            </a:path>
-          </a:pathLst>
-        </a:custGeom>
-        <a:noFill/>
-        <a:ln w="19050" cap="flat" cmpd="sng" algn="ctr">
-          <a:solidFill>
-            <a:schemeClr val="accent1">
-              <a:shade val="80000"/>
-              <a:hueOff val="0"/>
-              <a:satOff val="0"/>
-              <a:lumOff val="0"/>
-              <a:alphaOff val="0"/>
-            </a:schemeClr>
-          </a:solidFill>
-          <a:prstDash val="solid"/>
-          <a:miter lim="800000"/>
-        </a:ln>
-        <a:effectLst/>
-      </dsp:spPr>
-      <dsp:style>
-        <a:lnRef idx="2">
-          <a:scrgbClr r="0" g="0" b="0"/>
-        </a:lnRef>
-        <a:fillRef idx="0">
-          <a:scrgbClr r="0" g="0" b="0"/>
-        </a:fillRef>
-        <a:effectRef idx="0">
-          <a:scrgbClr r="0" g="0" b="0"/>
-        </a:effectRef>
-        <a:fontRef idx="minor"/>
-      </dsp:style>
-    </dsp:sp>
-    <dsp:sp modelId="{904226D0-5DE5-4039-A33D-3A3B483D2045}">
-      <dsp:nvSpPr>
-        <dsp:cNvPr id="0" name=""/>
-        <dsp:cNvSpPr/>
-      </dsp:nvSpPr>
-      <dsp:spPr>
-        <a:xfrm>
-          <a:off x="6283654" y="975506"/>
-          <a:ext cx="200791" cy="91440"/>
-        </a:xfrm>
-        <a:custGeom>
-          <a:avLst/>
-          <a:gdLst/>
-          <a:ahLst/>
-          <a:cxnLst/>
-          <a:rect l="0" t="0" r="0" b="0"/>
-          <a:pathLst>
-            <a:path>
-              <a:moveTo>
-                <a:pt x="0" y="45720"/>
-              </a:moveTo>
-              <a:lnTo>
-                <a:pt x="200791" y="45720"/>
-              </a:lnTo>
-            </a:path>
-          </a:pathLst>
-        </a:custGeom>
-        <a:noFill/>
-        <a:ln w="19050" cap="flat" cmpd="sng" algn="ctr">
-          <a:solidFill>
-            <a:schemeClr val="accent1">
-              <a:shade val="80000"/>
-              <a:hueOff val="0"/>
-              <a:satOff val="0"/>
-              <a:lumOff val="0"/>
-              <a:alphaOff val="0"/>
-            </a:schemeClr>
-          </a:solidFill>
-          <a:prstDash val="solid"/>
-          <a:miter lim="800000"/>
-        </a:ln>
-        <a:effectLst/>
-      </dsp:spPr>
-      <dsp:style>
-        <a:lnRef idx="2">
-          <a:scrgbClr r="0" g="0" b="0"/>
-        </a:lnRef>
-        <a:fillRef idx="0">
-          <a:scrgbClr r="0" g="0" b="0"/>
-        </a:fillRef>
-        <a:effectRef idx="0">
-          <a:scrgbClr r="0" g="0" b="0"/>
-        </a:effectRef>
-        <a:fontRef idx="minor"/>
-      </dsp:style>
-    </dsp:sp>
-    <dsp:sp modelId="{37CB0559-0F9C-4E01-9395-9AF1D8335AB3}">
-      <dsp:nvSpPr>
-        <dsp:cNvPr id="0" name=""/>
-        <dsp:cNvSpPr/>
-      </dsp:nvSpPr>
-      <dsp:spPr>
-        <a:xfrm>
-          <a:off x="5078903" y="1021226"/>
-          <a:ext cx="200791" cy="539627"/>
-        </a:xfrm>
-        <a:custGeom>
-          <a:avLst/>
-          <a:gdLst/>
-          <a:ahLst/>
-          <a:cxnLst/>
-          <a:rect l="0" t="0" r="0" b="0"/>
-          <a:pathLst>
-            <a:path>
-              <a:moveTo>
-                <a:pt x="0" y="539627"/>
-              </a:moveTo>
-              <a:lnTo>
-                <a:pt x="100395" y="539627"/>
-              </a:lnTo>
-              <a:lnTo>
-                <a:pt x="100395" y="0"/>
-              </a:lnTo>
-              <a:lnTo>
-                <a:pt x="200791" y="0"/>
-              </a:lnTo>
-            </a:path>
-          </a:pathLst>
-        </a:custGeom>
-        <a:noFill/>
-        <a:ln w="19050" cap="flat" cmpd="sng" algn="ctr">
-          <a:solidFill>
-            <a:schemeClr val="accent1">
-              <a:shade val="80000"/>
-              <a:hueOff val="0"/>
-              <a:satOff val="0"/>
-              <a:lumOff val="0"/>
-              <a:alphaOff val="0"/>
-            </a:schemeClr>
-          </a:solidFill>
-          <a:prstDash val="solid"/>
-          <a:miter lim="800000"/>
-        </a:ln>
-        <a:effectLst/>
-      </dsp:spPr>
-      <dsp:style>
-        <a:lnRef idx="2">
-          <a:scrgbClr r="0" g="0" b="0"/>
-        </a:lnRef>
-        <a:fillRef idx="0">
-          <a:scrgbClr r="0" g="0" b="0"/>
-        </a:fillRef>
-        <a:effectRef idx="0">
-          <a:scrgbClr r="0" g="0" b="0"/>
-        </a:effectRef>
-        <a:fontRef idx="minor"/>
-      </dsp:style>
-    </dsp:sp>
-    <dsp:sp modelId="{FEF5E04A-D12E-4CCE-A14B-A308CB2E3CFB}">
-      <dsp:nvSpPr>
-        <dsp:cNvPr id="0" name=""/>
-        <dsp:cNvSpPr/>
-      </dsp:nvSpPr>
-      <dsp:spPr>
-        <a:xfrm>
-          <a:off x="6283654" y="373673"/>
-          <a:ext cx="200791" cy="215851"/>
-        </a:xfrm>
-        <a:custGeom>
-          <a:avLst/>
-          <a:gdLst/>
-          <a:ahLst/>
-          <a:cxnLst/>
-          <a:rect l="0" t="0" r="0" b="0"/>
-          <a:pathLst>
-            <a:path>
-              <a:moveTo>
-                <a:pt x="0" y="0"/>
-              </a:moveTo>
-              <a:lnTo>
-                <a:pt x="100395" y="0"/>
-              </a:lnTo>
-              <a:lnTo>
-                <a:pt x="100395" y="215851"/>
-              </a:lnTo>
-              <a:lnTo>
-                <a:pt x="200791" y="215851"/>
-              </a:lnTo>
-            </a:path>
-          </a:pathLst>
-        </a:custGeom>
-        <a:noFill/>
-        <a:ln w="19050" cap="flat" cmpd="sng" algn="ctr">
-          <a:solidFill>
-            <a:schemeClr val="accent1">
-              <a:shade val="80000"/>
-              <a:hueOff val="0"/>
-              <a:satOff val="0"/>
-              <a:lumOff val="0"/>
-              <a:alphaOff val="0"/>
-            </a:schemeClr>
-          </a:solidFill>
-          <a:prstDash val="solid"/>
-          <a:miter lim="800000"/>
-        </a:ln>
-        <a:effectLst/>
-      </dsp:spPr>
-      <dsp:style>
-        <a:lnRef idx="2">
-          <a:scrgbClr r="0" g="0" b="0"/>
-        </a:lnRef>
-        <a:fillRef idx="0">
-          <a:scrgbClr r="0" g="0" b="0"/>
-        </a:fillRef>
-        <a:effectRef idx="0">
-          <a:scrgbClr r="0" g="0" b="0"/>
-        </a:effectRef>
-        <a:fontRef idx="minor"/>
-      </dsp:style>
-    </dsp:sp>
-    <dsp:sp modelId="{0C48BBF9-D61A-49C3-9C4A-9F8E897BC526}">
-      <dsp:nvSpPr>
-        <dsp:cNvPr id="0" name=""/>
-        <dsp:cNvSpPr/>
-      </dsp:nvSpPr>
-      <dsp:spPr>
-        <a:xfrm>
-          <a:off x="6283654" y="157821"/>
-          <a:ext cx="200791" cy="215851"/>
-        </a:xfrm>
-        <a:custGeom>
-          <a:avLst/>
-          <a:gdLst/>
-          <a:ahLst/>
-          <a:cxnLst/>
-          <a:rect l="0" t="0" r="0" b="0"/>
-          <a:pathLst>
-            <a:path>
-              <a:moveTo>
-                <a:pt x="0" y="215851"/>
-              </a:moveTo>
-              <a:lnTo>
-                <a:pt x="100395" y="215851"/>
-              </a:lnTo>
-              <a:lnTo>
-                <a:pt x="100395" y="0"/>
-              </a:lnTo>
-              <a:lnTo>
-                <a:pt x="200791" y="0"/>
-              </a:lnTo>
-            </a:path>
-          </a:pathLst>
-        </a:custGeom>
-        <a:noFill/>
-        <a:ln w="19050" cap="flat" cmpd="sng" algn="ctr">
-          <a:solidFill>
-            <a:schemeClr val="accent1">
-              <a:shade val="80000"/>
-              <a:hueOff val="0"/>
-              <a:satOff val="0"/>
-              <a:lumOff val="0"/>
-              <a:alphaOff val="0"/>
-            </a:schemeClr>
-          </a:solidFill>
-          <a:prstDash val="solid"/>
-          <a:miter lim="800000"/>
-        </a:ln>
-        <a:effectLst/>
-      </dsp:spPr>
-      <dsp:style>
-        <a:lnRef idx="2">
-          <a:scrgbClr r="0" g="0" b="0"/>
-        </a:lnRef>
-        <a:fillRef idx="0">
-          <a:scrgbClr r="0" g="0" b="0"/>
-        </a:fillRef>
-        <a:effectRef idx="0">
-          <a:scrgbClr r="0" g="0" b="0"/>
-        </a:effectRef>
-        <a:fontRef idx="minor"/>
-      </dsp:style>
-    </dsp:sp>
-    <dsp:sp modelId="{0AD372FC-0845-44C5-90A0-4A444CE67921}">
-      <dsp:nvSpPr>
-        <dsp:cNvPr id="0" name=""/>
-        <dsp:cNvSpPr/>
-      </dsp:nvSpPr>
-      <dsp:spPr>
-        <a:xfrm>
-          <a:off x="5078903" y="373673"/>
-          <a:ext cx="200791" cy="1187181"/>
-        </a:xfrm>
-        <a:custGeom>
-          <a:avLst/>
-          <a:gdLst/>
-          <a:ahLst/>
-          <a:cxnLst/>
-          <a:rect l="0" t="0" r="0" b="0"/>
-          <a:pathLst>
-            <a:path>
-              <a:moveTo>
-                <a:pt x="0" y="1187181"/>
-              </a:moveTo>
-              <a:lnTo>
-                <a:pt x="100395" y="1187181"/>
-              </a:lnTo>
-              <a:lnTo>
-                <a:pt x="100395" y="0"/>
-              </a:lnTo>
-              <a:lnTo>
-                <a:pt x="200791" y="0"/>
-              </a:lnTo>
-            </a:path>
-          </a:pathLst>
-        </a:custGeom>
-        <a:noFill/>
-        <a:ln w="19050" cap="flat" cmpd="sng" algn="ctr">
-          <a:solidFill>
-            <a:schemeClr val="accent1">
-              <a:shade val="80000"/>
-              <a:hueOff val="0"/>
-              <a:satOff val="0"/>
-              <a:lumOff val="0"/>
-              <a:alphaOff val="0"/>
-            </a:schemeClr>
-          </a:solidFill>
-          <a:prstDash val="solid"/>
-          <a:miter lim="800000"/>
-        </a:ln>
-        <a:effectLst/>
-      </dsp:spPr>
-      <dsp:style>
-        <a:lnRef idx="2">
-          <a:scrgbClr r="0" g="0" b="0"/>
-        </a:lnRef>
-        <a:fillRef idx="0">
-          <a:scrgbClr r="0" g="0" b="0"/>
-        </a:fillRef>
-        <a:effectRef idx="0">
-          <a:scrgbClr r="0" g="0" b="0"/>
-        </a:effectRef>
-        <a:fontRef idx="minor"/>
-      </dsp:style>
-    </dsp:sp>
-    <dsp:sp modelId="{3AAB2EC9-B2E4-493A-908E-ED4DAFB764DF}">
-      <dsp:nvSpPr>
-        <dsp:cNvPr id="0" name=""/>
-        <dsp:cNvSpPr/>
-      </dsp:nvSpPr>
-      <dsp:spPr>
-        <a:xfrm>
-          <a:off x="3874152" y="1560854"/>
-          <a:ext cx="200791" cy="2104549"/>
-        </a:xfrm>
-        <a:custGeom>
-          <a:avLst/>
-          <a:gdLst/>
-          <a:ahLst/>
-          <a:cxnLst/>
-          <a:rect l="0" t="0" r="0" b="0"/>
-          <a:pathLst>
-            <a:path>
-              <a:moveTo>
-                <a:pt x="0" y="2104549"/>
-              </a:moveTo>
-              <a:lnTo>
-                <a:pt x="100395" y="2104549"/>
-              </a:lnTo>
-              <a:lnTo>
-                <a:pt x="100395" y="0"/>
-              </a:lnTo>
-              <a:lnTo>
-                <a:pt x="200791" y="0"/>
-              </a:lnTo>
-            </a:path>
-          </a:pathLst>
-        </a:custGeom>
-        <a:noFill/>
-        <a:ln w="19050" cap="flat" cmpd="sng" algn="ctr">
-          <a:solidFill>
-            <a:schemeClr val="accent1">
-              <a:shade val="60000"/>
-              <a:hueOff val="0"/>
-              <a:satOff val="0"/>
-              <a:lumOff val="0"/>
-              <a:alphaOff val="0"/>
-            </a:schemeClr>
-          </a:solidFill>
-          <a:prstDash val="solid"/>
-          <a:miter lim="800000"/>
-        </a:ln>
-        <a:effectLst/>
-      </dsp:spPr>
-      <dsp:style>
-        <a:lnRef idx="2">
-          <a:scrgbClr r="0" g="0" b="0"/>
-        </a:lnRef>
-        <a:fillRef idx="0">
-          <a:scrgbClr r="0" g="0" b="0"/>
-        </a:fillRef>
-        <a:effectRef idx="0">
-          <a:scrgbClr r="0" g="0" b="0"/>
-        </a:effectRef>
-        <a:fontRef idx="minor"/>
-      </dsp:style>
-    </dsp:sp>
-    <dsp:sp modelId="{70046D02-65D6-40DB-ACBF-E73D76169B62}">
-      <dsp:nvSpPr>
-        <dsp:cNvPr id="0" name=""/>
-        <dsp:cNvSpPr/>
-      </dsp:nvSpPr>
-      <dsp:spPr>
-        <a:xfrm>
-          <a:off x="2870193" y="3512300"/>
-          <a:ext cx="1003959" cy="306207"/>
+          <a:off x="2632172" y="3001386"/>
+          <a:ext cx="899857" cy="274456"/>
         </a:xfrm>
         <a:prstGeom prst="rect">
           <a:avLst/>
@@ -6534,12 +7246,12 @@
         </a:fontRef>
       </dsp:style>
       <dsp:txBody>
-        <a:bodyPr spcFirstLastPara="0" vert="horz" wrap="square" lIns="5715" tIns="5715" rIns="5715" bIns="5715" numCol="1" spcCol="1270" anchor="ctr" anchorCtr="0">
+        <a:bodyPr spcFirstLastPara="0" vert="horz" wrap="square" lIns="5080" tIns="5080" rIns="5080" bIns="5080" numCol="1" spcCol="1270" anchor="ctr" anchorCtr="0">
           <a:noAutofit/>
         </a:bodyPr>
         <a:lstStyle/>
         <a:p>
-          <a:pPr marL="0" lvl="0" indent="0" algn="ctr" defTabSz="400050">
+          <a:pPr marL="0" lvl="0" indent="0" algn="ctr" defTabSz="355600">
             <a:lnSpc>
               <a:spcPct val="90000"/>
             </a:lnSpc>
@@ -6552,25 +7264,25 @@
             <a:buNone/>
           </a:pPr>
           <a:r>
-            <a:rPr lang="en-US" sz="900" kern="1200" dirty="0"/>
+            <a:rPr lang="en-US" sz="800" kern="1200" dirty="0"/>
             <a:t>Museum</a:t>
           </a:r>
         </a:p>
       </dsp:txBody>
       <dsp:txXfrm>
-        <a:off x="2870193" y="3512300"/>
-        <a:ext cx="1003959" cy="306207"/>
+        <a:off x="2632172" y="3001386"/>
+        <a:ext cx="899857" cy="274456"/>
       </dsp:txXfrm>
     </dsp:sp>
-    <dsp:sp modelId="{BAE31ACF-752D-4EA8-8B6E-54DBD06D21AE}">
+    <dsp:sp modelId="{1557FC18-F726-42E8-B0B5-F6D08A985014}">
       <dsp:nvSpPr>
         <dsp:cNvPr id="0" name=""/>
         <dsp:cNvSpPr/>
       </dsp:nvSpPr>
       <dsp:spPr>
         <a:xfrm>
-          <a:off x="4074944" y="1407750"/>
-          <a:ext cx="1003959" cy="306207"/>
+          <a:off x="3712001" y="0"/>
+          <a:ext cx="899857" cy="274456"/>
         </a:xfrm>
         <a:prstGeom prst="rect">
           <a:avLst/>
@@ -6612,12 +7324,12 @@
         </a:fontRef>
       </dsp:style>
       <dsp:txBody>
-        <a:bodyPr spcFirstLastPara="0" vert="horz" wrap="square" lIns="5715" tIns="5715" rIns="5715" bIns="5715" numCol="1" spcCol="1270" anchor="ctr" anchorCtr="0">
+        <a:bodyPr spcFirstLastPara="0" vert="horz" wrap="square" lIns="5080" tIns="5080" rIns="5080" bIns="5080" numCol="1" spcCol="1270" anchor="ctr" anchorCtr="0">
           <a:noAutofit/>
         </a:bodyPr>
         <a:lstStyle/>
         <a:p>
-          <a:pPr marL="0" lvl="0" indent="0" algn="ctr" defTabSz="400050">
+          <a:pPr marL="0" lvl="0" indent="0" algn="ctr" defTabSz="355600">
             <a:lnSpc>
               <a:spcPct val="90000"/>
             </a:lnSpc>
@@ -6630,25 +7342,25 @@
             <a:buNone/>
           </a:pPr>
           <a:r>
-            <a:rPr lang="en-US" sz="900" kern="1200" dirty="0"/>
-            <a:t>Artifact Id#1</a:t>
+            <a:rPr lang="en-US" sz="800" kern="1200" dirty="0"/>
+            <a:t>Collections</a:t>
           </a:r>
         </a:p>
       </dsp:txBody>
       <dsp:txXfrm>
-        <a:off x="4074944" y="1407750"/>
-        <a:ext cx="1003959" cy="306207"/>
+        <a:off x="3712001" y="0"/>
+        <a:ext cx="899857" cy="274456"/>
       </dsp:txXfrm>
     </dsp:sp>
-    <dsp:sp modelId="{171F98E8-7A93-4667-99EC-A67EE133F035}">
+    <dsp:sp modelId="{8C383FB3-4D14-4CBA-A0C6-CFF4847BA3EC}">
       <dsp:nvSpPr>
         <dsp:cNvPr id="0" name=""/>
         <dsp:cNvSpPr/>
       </dsp:nvSpPr>
       <dsp:spPr>
         <a:xfrm>
-          <a:off x="5279695" y="220569"/>
-          <a:ext cx="1003959" cy="306207"/>
+          <a:off x="4781087" y="0"/>
+          <a:ext cx="899857" cy="274456"/>
         </a:xfrm>
         <a:prstGeom prst="rect">
           <a:avLst/>
@@ -6690,12 +7402,12 @@
         </a:fontRef>
       </dsp:style>
       <dsp:txBody>
-        <a:bodyPr spcFirstLastPara="0" vert="horz" wrap="square" lIns="5715" tIns="5715" rIns="5715" bIns="5715" numCol="1" spcCol="1270" anchor="ctr" anchorCtr="0">
+        <a:bodyPr spcFirstLastPara="0" vert="horz" wrap="square" lIns="5080" tIns="5080" rIns="5080" bIns="5080" numCol="1" spcCol="1270" anchor="ctr" anchorCtr="0">
           <a:noAutofit/>
         </a:bodyPr>
         <a:lstStyle/>
         <a:p>
-          <a:pPr marL="0" lvl="0" indent="0" algn="ctr" defTabSz="400050">
+          <a:pPr marL="0" lvl="0" indent="0" algn="ctr" defTabSz="355600">
             <a:lnSpc>
               <a:spcPct val="90000"/>
             </a:lnSpc>
@@ -6708,25 +7420,25 @@
             <a:buNone/>
           </a:pPr>
           <a:r>
-            <a:rPr lang="en-US" sz="900" kern="1200" dirty="0"/>
-            <a:t>Description</a:t>
+            <a:rPr lang="en-US" sz="800" kern="1200" dirty="0"/>
+            <a:t>Collection Id#1</a:t>
           </a:r>
         </a:p>
       </dsp:txBody>
       <dsp:txXfrm>
-        <a:off x="5279695" y="220569"/>
-        <a:ext cx="1003959" cy="306207"/>
+        <a:off x="4781087" y="0"/>
+        <a:ext cx="899857" cy="274456"/>
       </dsp:txXfrm>
     </dsp:sp>
-    <dsp:sp modelId="{4F157AFE-1A3E-4945-AFFE-3FBFDF773F45}">
+    <dsp:sp modelId="{8A071F50-0936-48EF-AE15-796B92F4F4A2}">
       <dsp:nvSpPr>
         <dsp:cNvPr id="0" name=""/>
         <dsp:cNvSpPr/>
       </dsp:nvSpPr>
       <dsp:spPr>
         <a:xfrm>
-          <a:off x="6484446" y="4718"/>
-          <a:ext cx="1003959" cy="306207"/>
+          <a:off x="5871660" y="2609"/>
+          <a:ext cx="899857" cy="274456"/>
         </a:xfrm>
         <a:prstGeom prst="rect">
           <a:avLst/>
@@ -6763,12 +7475,12 @@
         </a:fontRef>
       </dsp:style>
       <dsp:txBody>
-        <a:bodyPr spcFirstLastPara="0" vert="horz" wrap="square" lIns="5715" tIns="5715" rIns="5715" bIns="5715" numCol="1" spcCol="1270" anchor="ctr" anchorCtr="0">
+        <a:bodyPr spcFirstLastPara="0" vert="horz" wrap="square" lIns="5080" tIns="5080" rIns="5080" bIns="5080" numCol="1" spcCol="1270" anchor="ctr" anchorCtr="0">
           <a:noAutofit/>
         </a:bodyPr>
         <a:lstStyle/>
         <a:p>
-          <a:pPr marL="0" lvl="0" indent="0" algn="ctr" defTabSz="400050">
+          <a:pPr marL="0" lvl="0" indent="0" algn="ctr" defTabSz="355600">
             <a:lnSpc>
               <a:spcPct val="90000"/>
             </a:lnSpc>
@@ -6781,98 +7493,25 @@
             <a:buNone/>
           </a:pPr>
           <a:r>
-            <a:rPr lang="en-US" sz="900" kern="1200" dirty="0"/>
-            <a:t>Roaring Lion Bust</a:t>
+            <a:rPr lang="en-US" sz="800" kern="1200" dirty="0"/>
+            <a:t>Sculpture Antiquities</a:t>
           </a:r>
         </a:p>
       </dsp:txBody>
       <dsp:txXfrm>
-        <a:off x="6484446" y="4718"/>
-        <a:ext cx="1003959" cy="306207"/>
+        <a:off x="5871660" y="2609"/>
+        <a:ext cx="899857" cy="274456"/>
       </dsp:txXfrm>
     </dsp:sp>
-    <dsp:sp modelId="{7EEBE634-507C-452D-8F74-93F7DA14811D}">
+    <dsp:sp modelId="{582577D3-050E-4B41-BF32-01AA487AE0ED}">
       <dsp:nvSpPr>
         <dsp:cNvPr id="0" name=""/>
         <dsp:cNvSpPr/>
       </dsp:nvSpPr>
       <dsp:spPr>
         <a:xfrm>
-          <a:off x="6484446" y="436420"/>
-          <a:ext cx="1003959" cy="306207"/>
-        </a:xfrm>
-        <a:prstGeom prst="rect">
-          <a:avLst/>
-        </a:prstGeom>
-        <a:solidFill>
-          <a:srgbClr val="FFC000"/>
-        </a:solidFill>
-        <a:ln w="19050" cap="flat" cmpd="sng" algn="ctr">
-          <a:solidFill>
-            <a:schemeClr val="lt1">
-              <a:hueOff val="0"/>
-              <a:satOff val="0"/>
-              <a:lumOff val="0"/>
-              <a:alphaOff val="0"/>
-            </a:schemeClr>
-          </a:solidFill>
-          <a:prstDash val="solid"/>
-          <a:miter lim="800000"/>
-        </a:ln>
-        <a:effectLst/>
-      </dsp:spPr>
-      <dsp:style>
-        <a:lnRef idx="2">
-          <a:scrgbClr r="0" g="0" b="0"/>
-        </a:lnRef>
-        <a:fillRef idx="1">
-          <a:scrgbClr r="0" g="0" b="0"/>
-        </a:fillRef>
-        <a:effectRef idx="0">
-          <a:scrgbClr r="0" g="0" b="0"/>
-        </a:effectRef>
-        <a:fontRef idx="minor">
-          <a:schemeClr val="lt1"/>
-        </a:fontRef>
-      </dsp:style>
-      <dsp:txBody>
-        <a:bodyPr spcFirstLastPara="0" vert="horz" wrap="square" lIns="5715" tIns="5715" rIns="5715" bIns="5715" numCol="1" spcCol="1270" anchor="ctr" anchorCtr="0">
-          <a:noAutofit/>
-        </a:bodyPr>
-        <a:lstStyle/>
-        <a:p>
-          <a:pPr marL="0" lvl="0" indent="0" algn="ctr" defTabSz="400050">
-            <a:lnSpc>
-              <a:spcPct val="90000"/>
-            </a:lnSpc>
-            <a:spcBef>
-              <a:spcPct val="0"/>
-            </a:spcBef>
-            <a:spcAft>
-              <a:spcPct val="35000"/>
-            </a:spcAft>
-            <a:buNone/>
-          </a:pPr>
-          <a:r>
-            <a:rPr lang="en-US" sz="900" kern="1200" dirty="0"/>
-            <a:t>Limestone</a:t>
-          </a:r>
-        </a:p>
-      </dsp:txBody>
-      <dsp:txXfrm>
-        <a:off x="6484446" y="436420"/>
-        <a:ext cx="1003959" cy="306207"/>
-      </dsp:txXfrm>
-    </dsp:sp>
-    <dsp:sp modelId="{E9A97367-2565-4CA7-B81D-4E147657D835}">
-      <dsp:nvSpPr>
-        <dsp:cNvPr id="0" name=""/>
-        <dsp:cNvSpPr/>
-      </dsp:nvSpPr>
-      <dsp:spPr>
-        <a:xfrm>
-          <a:off x="5279695" y="868122"/>
-          <a:ext cx="1003959" cy="306207"/>
+          <a:off x="4781087" y="356764"/>
+          <a:ext cx="899857" cy="274456"/>
         </a:xfrm>
         <a:prstGeom prst="rect">
           <a:avLst/>
@@ -6914,12 +7553,12 @@
         </a:fontRef>
       </dsp:style>
       <dsp:txBody>
-        <a:bodyPr spcFirstLastPara="0" vert="horz" wrap="square" lIns="5715" tIns="5715" rIns="5715" bIns="5715" numCol="1" spcCol="1270" anchor="ctr" anchorCtr="0">
+        <a:bodyPr spcFirstLastPara="0" vert="horz" wrap="square" lIns="5080" tIns="5080" rIns="5080" bIns="5080" numCol="1" spcCol="1270" anchor="ctr" anchorCtr="0">
           <a:noAutofit/>
         </a:bodyPr>
         <a:lstStyle/>
         <a:p>
-          <a:pPr marL="0" lvl="0" indent="0" algn="ctr" defTabSz="400050">
+          <a:pPr marL="0" lvl="0" indent="0" algn="ctr" defTabSz="355600">
             <a:lnSpc>
               <a:spcPct val="90000"/>
             </a:lnSpc>
@@ -6932,25 +7571,25 @@
             <a:buNone/>
           </a:pPr>
           <a:r>
-            <a:rPr lang="en-US" sz="900" kern="1200" dirty="0"/>
-            <a:t>Collection Id#1</a:t>
+            <a:rPr lang="en-US" sz="800" kern="1200" dirty="0"/>
+            <a:t>Collection Id#2</a:t>
           </a:r>
         </a:p>
       </dsp:txBody>
       <dsp:txXfrm>
-        <a:off x="5279695" y="868122"/>
-        <a:ext cx="1003959" cy="306207"/>
+        <a:off x="4781087" y="356764"/>
+        <a:ext cx="899857" cy="274456"/>
       </dsp:txXfrm>
     </dsp:sp>
-    <dsp:sp modelId="{CBCC7696-EFAB-4F9F-8C0A-720224B8DCB6}">
+    <dsp:sp modelId="{61A0D4EF-EC3A-4279-BC51-4F36D0B52EB7}">
       <dsp:nvSpPr>
         <dsp:cNvPr id="0" name=""/>
         <dsp:cNvSpPr/>
       </dsp:nvSpPr>
       <dsp:spPr>
         <a:xfrm>
-          <a:off x="6484446" y="868122"/>
-          <a:ext cx="1003959" cy="306207"/>
+          <a:off x="3712001" y="1743834"/>
+          <a:ext cx="899857" cy="274456"/>
         </a:xfrm>
         <a:prstGeom prst="rect">
           <a:avLst/>
@@ -6992,12 +7631,12 @@
         </a:fontRef>
       </dsp:style>
       <dsp:txBody>
-        <a:bodyPr spcFirstLastPara="0" vert="horz" wrap="square" lIns="5715" tIns="5715" rIns="5715" bIns="5715" numCol="1" spcCol="1270" anchor="ctr" anchorCtr="0">
+        <a:bodyPr spcFirstLastPara="0" vert="horz" wrap="square" lIns="5080" tIns="5080" rIns="5080" bIns="5080" numCol="1" spcCol="1270" anchor="ctr" anchorCtr="0">
           <a:noAutofit/>
         </a:bodyPr>
         <a:lstStyle/>
         <a:p>
-          <a:pPr marL="0" lvl="0" indent="0" algn="ctr" defTabSz="400050">
+          <a:pPr marL="0" lvl="0" indent="0" algn="ctr" defTabSz="355600">
             <a:lnSpc>
               <a:spcPct val="90000"/>
             </a:lnSpc>
@@ -7010,99 +7649,25 @@
             <a:buNone/>
           </a:pPr>
           <a:r>
-            <a:rPr lang="en-US" sz="900" kern="1200" dirty="0"/>
-            <a:t>Sculpture</a:t>
+            <a:rPr lang="en-US" sz="800" kern="1200" dirty="0"/>
+            <a:t>Artifacts</a:t>
           </a:r>
         </a:p>
       </dsp:txBody>
       <dsp:txXfrm>
-        <a:off x="6484446" y="868122"/>
-        <a:ext cx="1003959" cy="306207"/>
+        <a:off x="3712001" y="1743834"/>
+        <a:ext cx="899857" cy="274456"/>
       </dsp:txXfrm>
     </dsp:sp>
-    <dsp:sp modelId="{AD980698-3B39-4F03-BC7B-E6CC415D37FF}">
+    <dsp:sp modelId="{BAE31ACF-752D-4EA8-8B6E-54DBD06D21AE}">
       <dsp:nvSpPr>
         <dsp:cNvPr id="0" name=""/>
         <dsp:cNvSpPr/>
       </dsp:nvSpPr>
       <dsp:spPr>
         <a:xfrm>
-          <a:off x="7689197" y="868122"/>
-          <a:ext cx="1003959" cy="306207"/>
-        </a:xfrm>
-        <a:prstGeom prst="rect">
-          <a:avLst/>
-        </a:prstGeom>
-        <a:solidFill>
-          <a:srgbClr val="FFC000"/>
-        </a:solidFill>
-        <a:ln w="19050" cap="flat" cmpd="sng" algn="ctr">
-          <a:solidFill>
-            <a:schemeClr val="lt1">
-              <a:hueOff val="0"/>
-              <a:satOff val="0"/>
-              <a:lumOff val="0"/>
-              <a:alphaOff val="0"/>
-            </a:schemeClr>
-          </a:solidFill>
-          <a:prstDash val="solid"/>
-          <a:miter lim="800000"/>
-        </a:ln>
-        <a:effectLst/>
-      </dsp:spPr>
-      <dsp:style>
-        <a:lnRef idx="2">
-          <a:scrgbClr r="0" g="0" b="0"/>
-        </a:lnRef>
-        <a:fillRef idx="1">
-          <a:scrgbClr r="0" g="0" b="0"/>
-        </a:fillRef>
-        <a:effectRef idx="0">
-          <a:scrgbClr r="0" g="0" b="0"/>
-        </a:effectRef>
-        <a:fontRef idx="minor">
-          <a:schemeClr val="lt1"/>
-        </a:fontRef>
-      </dsp:style>
-      <dsp:txBody>
-        <a:bodyPr spcFirstLastPara="0" vert="horz" wrap="square" lIns="5715" tIns="5715" rIns="5715" bIns="5715" numCol="1" spcCol="1270" anchor="ctr" anchorCtr="0">
-          <a:noAutofit/>
-        </a:bodyPr>
-        <a:lstStyle/>
-        <a:p>
-          <a:pPr marL="0" lvl="0" indent="0" algn="ctr" defTabSz="400050">
-            <a:lnSpc>
-              <a:spcPct val="90000"/>
-            </a:lnSpc>
-            <a:spcBef>
-              <a:spcPct val="0"/>
-            </a:spcBef>
-            <a:spcAft>
-              <a:spcPct val="35000"/>
-            </a:spcAft>
-            <a:buNone/>
-          </a:pPr>
-          <a:r>
-            <a:rPr lang="en-US" sz="900" kern="1200"/>
-            <a:t>Bust</a:t>
-          </a:r>
-          <a:endParaRPr lang="en-US" sz="900" kern="1200" dirty="0"/>
-        </a:p>
-      </dsp:txBody>
-      <dsp:txXfrm>
-        <a:off x="7689197" y="868122"/>
-        <a:ext cx="1003959" cy="306207"/>
-      </dsp:txXfrm>
-    </dsp:sp>
-    <dsp:sp modelId="{3E0FA384-F7A7-4EF5-BB6C-325C5B877E93}">
-      <dsp:nvSpPr>
-        <dsp:cNvPr id="0" name=""/>
-        <dsp:cNvSpPr/>
-      </dsp:nvSpPr>
-      <dsp:spPr>
-        <a:xfrm>
-          <a:off x="5279695" y="1299825"/>
-          <a:ext cx="1003959" cy="306207"/>
+          <a:off x="4791831" y="1550365"/>
+          <a:ext cx="899857" cy="274456"/>
         </a:xfrm>
         <a:prstGeom prst="rect">
           <a:avLst/>
@@ -7144,12 +7709,12 @@
         </a:fontRef>
       </dsp:style>
       <dsp:txBody>
-        <a:bodyPr spcFirstLastPara="0" vert="horz" wrap="square" lIns="5715" tIns="5715" rIns="5715" bIns="5715" numCol="1" spcCol="1270" anchor="ctr" anchorCtr="0">
+        <a:bodyPr spcFirstLastPara="0" vert="horz" wrap="square" lIns="5080" tIns="5080" rIns="5080" bIns="5080" numCol="1" spcCol="1270" anchor="ctr" anchorCtr="0">
           <a:noAutofit/>
         </a:bodyPr>
         <a:lstStyle/>
         <a:p>
-          <a:pPr marL="0" lvl="0" indent="0" algn="ctr" defTabSz="400050">
+          <a:pPr marL="0" lvl="0" indent="0" algn="ctr" defTabSz="355600">
             <a:lnSpc>
               <a:spcPct val="90000"/>
             </a:lnSpc>
@@ -7162,98 +7727,25 @@
             <a:buNone/>
           </a:pPr>
           <a:r>
-            <a:rPr lang="en-US" sz="900" kern="1200" dirty="0"/>
-            <a:t>Provenance</a:t>
+            <a:rPr lang="en-US" sz="800" kern="1200" dirty="0"/>
+            <a:t>Artifact Id#1</a:t>
           </a:r>
         </a:p>
       </dsp:txBody>
       <dsp:txXfrm>
-        <a:off x="5279695" y="1299825"/>
-        <a:ext cx="1003959" cy="306207"/>
+        <a:off x="4791831" y="1550365"/>
+        <a:ext cx="899857" cy="274456"/>
       </dsp:txXfrm>
     </dsp:sp>
-    <dsp:sp modelId="{5CE68631-E50F-4A7D-A78E-B9848249D5F3}">
+    <dsp:sp modelId="{171F98E8-7A93-4667-99EC-A67EE133F035}">
       <dsp:nvSpPr>
         <dsp:cNvPr id="0" name=""/>
         <dsp:cNvSpPr/>
       </dsp:nvSpPr>
       <dsp:spPr>
         <a:xfrm>
-          <a:off x="6484446" y="1299825"/>
-          <a:ext cx="1003959" cy="306207"/>
-        </a:xfrm>
-        <a:prstGeom prst="rect">
-          <a:avLst/>
-        </a:prstGeom>
-        <a:solidFill>
-          <a:srgbClr val="FFC000"/>
-        </a:solidFill>
-        <a:ln w="19050" cap="flat" cmpd="sng" algn="ctr">
-          <a:solidFill>
-            <a:schemeClr val="lt1">
-              <a:hueOff val="0"/>
-              <a:satOff val="0"/>
-              <a:lumOff val="0"/>
-              <a:alphaOff val="0"/>
-            </a:schemeClr>
-          </a:solidFill>
-          <a:prstDash val="solid"/>
-          <a:miter lim="800000"/>
-        </a:ln>
-        <a:effectLst/>
-      </dsp:spPr>
-      <dsp:style>
-        <a:lnRef idx="2">
-          <a:scrgbClr r="0" g="0" b="0"/>
-        </a:lnRef>
-        <a:fillRef idx="1">
-          <a:scrgbClr r="0" g="0" b="0"/>
-        </a:fillRef>
-        <a:effectRef idx="0">
-          <a:scrgbClr r="0" g="0" b="0"/>
-        </a:effectRef>
-        <a:fontRef idx="minor">
-          <a:schemeClr val="lt1"/>
-        </a:fontRef>
-      </dsp:style>
-      <dsp:txBody>
-        <a:bodyPr spcFirstLastPara="0" vert="horz" wrap="square" lIns="5715" tIns="5715" rIns="5715" bIns="5715" numCol="1" spcCol="1270" anchor="ctr" anchorCtr="0">
-          <a:noAutofit/>
-        </a:bodyPr>
-        <a:lstStyle/>
-        <a:p>
-          <a:pPr marL="0" lvl="0" indent="0" algn="ctr" defTabSz="400050">
-            <a:lnSpc>
-              <a:spcPct val="90000"/>
-            </a:lnSpc>
-            <a:spcBef>
-              <a:spcPct val="0"/>
-            </a:spcBef>
-            <a:spcAft>
-              <a:spcPct val="35000"/>
-            </a:spcAft>
-            <a:buNone/>
-          </a:pPr>
-          <a:r>
-            <a:rPr lang="en-US" sz="900" kern="1200" dirty="0"/>
-            <a:t>Persepolis</a:t>
-          </a:r>
-        </a:p>
-      </dsp:txBody>
-      <dsp:txXfrm>
-        <a:off x="6484446" y="1299825"/>
-        <a:ext cx="1003959" cy="306207"/>
-      </dsp:txXfrm>
-    </dsp:sp>
-    <dsp:sp modelId="{9E916334-F27B-4E86-B949-E7079E77F959}">
-      <dsp:nvSpPr>
-        <dsp:cNvPr id="0" name=""/>
-        <dsp:cNvSpPr/>
-      </dsp:nvSpPr>
-      <dsp:spPr>
-        <a:xfrm>
-          <a:off x="5279695" y="1731527"/>
-          <a:ext cx="1003959" cy="306207"/>
+          <a:off x="5871660" y="389548"/>
+          <a:ext cx="899857" cy="274456"/>
         </a:xfrm>
         <a:prstGeom prst="rect">
           <a:avLst/>
@@ -7295,12 +7787,12 @@
         </a:fontRef>
       </dsp:style>
       <dsp:txBody>
-        <a:bodyPr spcFirstLastPara="0" vert="horz" wrap="square" lIns="5715" tIns="5715" rIns="5715" bIns="5715" numCol="1" spcCol="1270" anchor="ctr" anchorCtr="0">
+        <a:bodyPr spcFirstLastPara="0" vert="horz" wrap="square" lIns="5080" tIns="5080" rIns="5080" bIns="5080" numCol="1" spcCol="1270" anchor="ctr" anchorCtr="0">
           <a:noAutofit/>
         </a:bodyPr>
         <a:lstStyle/>
         <a:p>
-          <a:pPr marL="0" lvl="0" indent="0" algn="ctr" defTabSz="400050">
+          <a:pPr marL="0" lvl="0" indent="0" algn="ctr" defTabSz="355600">
             <a:lnSpc>
               <a:spcPct val="90000"/>
             </a:lnSpc>
@@ -7313,25 +7805,98 @@
             <a:buNone/>
           </a:pPr>
           <a:r>
-            <a:rPr lang="en-US" sz="900" kern="1200" dirty="0"/>
-            <a:t>Restoration history</a:t>
+            <a:rPr lang="en-US" sz="800" kern="1200" dirty="0"/>
+            <a:t>Description</a:t>
           </a:r>
         </a:p>
       </dsp:txBody>
       <dsp:txXfrm>
-        <a:off x="5279695" y="1731527"/>
-        <a:ext cx="1003959" cy="306207"/>
+        <a:off x="5871660" y="389548"/>
+        <a:ext cx="899857" cy="274456"/>
       </dsp:txXfrm>
     </dsp:sp>
-    <dsp:sp modelId="{0BA28261-1ED3-47EB-A7EA-310484F5DF09}">
+    <dsp:sp modelId="{4F157AFE-1A3E-4945-AFFE-3FBFDF773F45}">
       <dsp:nvSpPr>
         <dsp:cNvPr id="0" name=""/>
         <dsp:cNvSpPr/>
       </dsp:nvSpPr>
       <dsp:spPr>
         <a:xfrm>
-          <a:off x="6484446" y="1731527"/>
-          <a:ext cx="1003959" cy="306207"/>
+          <a:off x="6951490" y="389548"/>
+          <a:ext cx="899857" cy="274456"/>
+        </a:xfrm>
+        <a:prstGeom prst="rect">
+          <a:avLst/>
+        </a:prstGeom>
+        <a:solidFill>
+          <a:srgbClr val="FFC000"/>
+        </a:solidFill>
+        <a:ln w="19050" cap="flat" cmpd="sng" algn="ctr">
+          <a:solidFill>
+            <a:schemeClr val="lt1">
+              <a:hueOff val="0"/>
+              <a:satOff val="0"/>
+              <a:lumOff val="0"/>
+              <a:alphaOff val="0"/>
+            </a:schemeClr>
+          </a:solidFill>
+          <a:prstDash val="solid"/>
+          <a:miter lim="800000"/>
+        </a:ln>
+        <a:effectLst/>
+      </dsp:spPr>
+      <dsp:style>
+        <a:lnRef idx="2">
+          <a:scrgbClr r="0" g="0" b="0"/>
+        </a:lnRef>
+        <a:fillRef idx="1">
+          <a:scrgbClr r="0" g="0" b="0"/>
+        </a:fillRef>
+        <a:effectRef idx="0">
+          <a:scrgbClr r="0" g="0" b="0"/>
+        </a:effectRef>
+        <a:fontRef idx="minor">
+          <a:schemeClr val="lt1"/>
+        </a:fontRef>
+      </dsp:style>
+      <dsp:txBody>
+        <a:bodyPr spcFirstLastPara="0" vert="horz" wrap="square" lIns="5080" tIns="5080" rIns="5080" bIns="5080" numCol="1" spcCol="1270" anchor="ctr" anchorCtr="0">
+          <a:noAutofit/>
+        </a:bodyPr>
+        <a:lstStyle/>
+        <a:p>
+          <a:pPr marL="0" lvl="0" indent="0" algn="ctr" defTabSz="355600">
+            <a:lnSpc>
+              <a:spcPct val="90000"/>
+            </a:lnSpc>
+            <a:spcBef>
+              <a:spcPct val="0"/>
+            </a:spcBef>
+            <a:spcAft>
+              <a:spcPct val="35000"/>
+            </a:spcAft>
+            <a:buNone/>
+          </a:pPr>
+          <a:r>
+            <a:rPr lang="en-US" sz="800" kern="1200" dirty="0"/>
+            <a:t>Roaring Lion Bust</a:t>
+          </a:r>
+        </a:p>
+      </dsp:txBody>
+      <dsp:txXfrm>
+        <a:off x="6951490" y="389548"/>
+        <a:ext cx="899857" cy="274456"/>
+      </dsp:txXfrm>
+    </dsp:sp>
+    <dsp:sp modelId="{1ECE9F9F-A668-4333-B43A-1DABED3BF4C5}">
+      <dsp:nvSpPr>
+        <dsp:cNvPr id="0" name=""/>
+        <dsp:cNvSpPr/>
+      </dsp:nvSpPr>
+      <dsp:spPr>
+        <a:xfrm>
+          <a:off x="5871660" y="776487"/>
+          <a:ext cx="899857" cy="274456"/>
         </a:xfrm>
         <a:prstGeom prst="rect">
           <a:avLst/>
@@ -7373,12 +7938,12 @@
         </a:fontRef>
       </dsp:style>
       <dsp:txBody>
-        <a:bodyPr spcFirstLastPara="0" vert="horz" wrap="square" lIns="5715" tIns="5715" rIns="5715" bIns="5715" numCol="1" spcCol="1270" anchor="ctr" anchorCtr="0">
+        <a:bodyPr spcFirstLastPara="0" vert="horz" wrap="square" lIns="5080" tIns="5080" rIns="5080" bIns="5080" numCol="1" spcCol="1270" anchor="ctr" anchorCtr="0">
           <a:noAutofit/>
         </a:bodyPr>
         <a:lstStyle/>
         <a:p>
-          <a:pPr marL="0" lvl="0" indent="0" algn="ctr" defTabSz="400050">
+          <a:pPr marL="0" lvl="0" indent="0" algn="ctr" defTabSz="355600">
             <a:lnSpc>
               <a:spcPct val="90000"/>
             </a:lnSpc>
@@ -7391,25 +7956,25 @@
             <a:buNone/>
           </a:pPr>
           <a:r>
-            <a:rPr lang="en-US" sz="900" kern="1200" dirty="0"/>
-            <a:t>Restored 3 times</a:t>
+            <a:rPr lang="en-US" sz="800" kern="1200" dirty="0"/>
+            <a:t>Material</a:t>
           </a:r>
         </a:p>
       </dsp:txBody>
       <dsp:txXfrm>
-        <a:off x="6484446" y="1731527"/>
-        <a:ext cx="1003959" cy="306207"/>
+        <a:off x="5871660" y="776487"/>
+        <a:ext cx="899857" cy="274456"/>
       </dsp:txXfrm>
     </dsp:sp>
-    <dsp:sp modelId="{B509227D-8391-4FEA-8798-380D7D9E41EE}">
+    <dsp:sp modelId="{88A62553-AA35-4C7E-AEE4-0944A5577F9F}">
       <dsp:nvSpPr>
         <dsp:cNvPr id="0" name=""/>
         <dsp:cNvSpPr/>
       </dsp:nvSpPr>
       <dsp:spPr>
         <a:xfrm>
-          <a:off x="7689197" y="1731527"/>
-          <a:ext cx="1003959" cy="306207"/>
+          <a:off x="6951490" y="776487"/>
+          <a:ext cx="899857" cy="274456"/>
         </a:xfrm>
         <a:prstGeom prst="rect">
           <a:avLst/>
@@ -7446,12 +8011,12 @@
         </a:fontRef>
       </dsp:style>
       <dsp:txBody>
-        <a:bodyPr spcFirstLastPara="0" vert="horz" wrap="square" lIns="5715" tIns="5715" rIns="5715" bIns="5715" numCol="1" spcCol="1270" anchor="ctr" anchorCtr="0">
+        <a:bodyPr spcFirstLastPara="0" vert="horz" wrap="square" lIns="5080" tIns="5080" rIns="5080" bIns="5080" numCol="1" spcCol="1270" anchor="ctr" anchorCtr="0">
           <a:noAutofit/>
         </a:bodyPr>
         <a:lstStyle/>
         <a:p>
-          <a:pPr marL="0" lvl="0" indent="0" algn="ctr" defTabSz="400050">
+          <a:pPr marL="0" lvl="0" indent="0" algn="ctr" defTabSz="355600">
             <a:lnSpc>
               <a:spcPct val="90000"/>
             </a:lnSpc>
@@ -7464,25 +8029,25 @@
             <a:buNone/>
           </a:pPr>
           <a:r>
-            <a:rPr lang="en-US" sz="900" kern="1200" dirty="0"/>
-            <a:t>Broken ear</a:t>
+            <a:rPr lang="en-US" sz="800" kern="1200" dirty="0"/>
+            <a:t>Limestone</a:t>
           </a:r>
         </a:p>
       </dsp:txBody>
       <dsp:txXfrm>
-        <a:off x="7689197" y="1731527"/>
-        <a:ext cx="1003959" cy="306207"/>
+        <a:off x="6951490" y="776487"/>
+        <a:ext cx="899857" cy="274456"/>
       </dsp:txXfrm>
     </dsp:sp>
-    <dsp:sp modelId="{7E303F30-9711-4703-9E93-53900C059588}">
+    <dsp:sp modelId="{E9A97367-2565-4CA7-B81D-4E147657D835}">
       <dsp:nvSpPr>
         <dsp:cNvPr id="0" name=""/>
         <dsp:cNvSpPr/>
       </dsp:nvSpPr>
       <dsp:spPr>
         <a:xfrm>
-          <a:off x="5279695" y="2163230"/>
-          <a:ext cx="1003959" cy="306207"/>
+          <a:off x="5871660" y="1163426"/>
+          <a:ext cx="899857" cy="274456"/>
         </a:xfrm>
         <a:prstGeom prst="rect">
           <a:avLst/>
@@ -7524,12 +8089,12 @@
         </a:fontRef>
       </dsp:style>
       <dsp:txBody>
-        <a:bodyPr spcFirstLastPara="0" vert="horz" wrap="square" lIns="5715" tIns="5715" rIns="5715" bIns="5715" numCol="1" spcCol="1270" anchor="ctr" anchorCtr="0">
+        <a:bodyPr spcFirstLastPara="0" vert="horz" wrap="square" lIns="5080" tIns="5080" rIns="5080" bIns="5080" numCol="1" spcCol="1270" anchor="ctr" anchorCtr="0">
           <a:noAutofit/>
         </a:bodyPr>
         <a:lstStyle/>
         <a:p>
-          <a:pPr marL="0" lvl="0" indent="0" algn="ctr" defTabSz="400050">
+          <a:pPr marL="0" lvl="0" indent="0" algn="ctr" defTabSz="355600">
             <a:lnSpc>
               <a:spcPct val="90000"/>
             </a:lnSpc>
@@ -7542,98 +8107,25 @@
             <a:buNone/>
           </a:pPr>
           <a:r>
-            <a:rPr lang="en-US" sz="900" kern="1200" dirty="0"/>
-            <a:t>Cultural heritage</a:t>
+            <a:rPr lang="en-US" sz="800" kern="1200" dirty="0"/>
+            <a:t>Collection ref#1</a:t>
           </a:r>
         </a:p>
       </dsp:txBody>
       <dsp:txXfrm>
-        <a:off x="5279695" y="2163230"/>
-        <a:ext cx="1003959" cy="306207"/>
+        <a:off x="5871660" y="1163426"/>
+        <a:ext cx="899857" cy="274456"/>
       </dsp:txXfrm>
     </dsp:sp>
-    <dsp:sp modelId="{2A231453-FF0D-443D-87E8-87257BA9B0EE}">
+    <dsp:sp modelId="{3E0FA384-F7A7-4EF5-BB6C-325C5B877E93}">
       <dsp:nvSpPr>
         <dsp:cNvPr id="0" name=""/>
         <dsp:cNvSpPr/>
       </dsp:nvSpPr>
       <dsp:spPr>
         <a:xfrm>
-          <a:off x="6484446" y="2163230"/>
-          <a:ext cx="1003959" cy="306207"/>
-        </a:xfrm>
-        <a:prstGeom prst="rect">
-          <a:avLst/>
-        </a:prstGeom>
-        <a:solidFill>
-          <a:srgbClr val="FFC000"/>
-        </a:solidFill>
-        <a:ln w="19050" cap="flat" cmpd="sng" algn="ctr">
-          <a:solidFill>
-            <a:schemeClr val="lt1">
-              <a:hueOff val="0"/>
-              <a:satOff val="0"/>
-              <a:lumOff val="0"/>
-              <a:alphaOff val="0"/>
-            </a:schemeClr>
-          </a:solidFill>
-          <a:prstDash val="solid"/>
-          <a:miter lim="800000"/>
-        </a:ln>
-        <a:effectLst/>
-      </dsp:spPr>
-      <dsp:style>
-        <a:lnRef idx="2">
-          <a:scrgbClr r="0" g="0" b="0"/>
-        </a:lnRef>
-        <a:fillRef idx="1">
-          <a:scrgbClr r="0" g="0" b="0"/>
-        </a:fillRef>
-        <a:effectRef idx="0">
-          <a:scrgbClr r="0" g="0" b="0"/>
-        </a:effectRef>
-        <a:fontRef idx="minor">
-          <a:schemeClr val="lt1"/>
-        </a:fontRef>
-      </dsp:style>
-      <dsp:txBody>
-        <a:bodyPr spcFirstLastPara="0" vert="horz" wrap="square" lIns="5715" tIns="5715" rIns="5715" bIns="5715" numCol="1" spcCol="1270" anchor="ctr" anchorCtr="0">
-          <a:noAutofit/>
-        </a:bodyPr>
-        <a:lstStyle/>
-        <a:p>
-          <a:pPr marL="0" lvl="0" indent="0" algn="ctr" defTabSz="400050">
-            <a:lnSpc>
-              <a:spcPct val="90000"/>
-            </a:lnSpc>
-            <a:spcBef>
-              <a:spcPct val="0"/>
-            </a:spcBef>
-            <a:spcAft>
-              <a:spcPct val="35000"/>
-            </a:spcAft>
-            <a:buNone/>
-          </a:pPr>
-          <a:r>
-            <a:rPr lang="en-US" sz="900" kern="1200" dirty="0"/>
-            <a:t>Persian (Achaemenid)</a:t>
-          </a:r>
-        </a:p>
-      </dsp:txBody>
-      <dsp:txXfrm>
-        <a:off x="6484446" y="2163230"/>
-        <a:ext cx="1003959" cy="306207"/>
-      </dsp:txXfrm>
-    </dsp:sp>
-    <dsp:sp modelId="{3D02A4C7-D3F8-46A9-BF13-B91E1207C679}">
-      <dsp:nvSpPr>
-        <dsp:cNvPr id="0" name=""/>
-        <dsp:cNvSpPr/>
-      </dsp:nvSpPr>
-      <dsp:spPr>
-        <a:xfrm>
-          <a:off x="5279695" y="2594932"/>
-          <a:ext cx="1003959" cy="306207"/>
+          <a:off x="5871660" y="1550365"/>
+          <a:ext cx="899857" cy="274456"/>
         </a:xfrm>
         <a:prstGeom prst="rect">
           <a:avLst/>
@@ -7675,12 +8167,12 @@
         </a:fontRef>
       </dsp:style>
       <dsp:txBody>
-        <a:bodyPr spcFirstLastPara="0" vert="horz" wrap="square" lIns="5715" tIns="5715" rIns="5715" bIns="5715" numCol="1" spcCol="1270" anchor="ctr" anchorCtr="0">
+        <a:bodyPr spcFirstLastPara="0" vert="horz" wrap="square" lIns="5080" tIns="5080" rIns="5080" bIns="5080" numCol="1" spcCol="1270" anchor="ctr" anchorCtr="0">
           <a:noAutofit/>
         </a:bodyPr>
         <a:lstStyle/>
         <a:p>
-          <a:pPr marL="0" lvl="0" indent="0" algn="ctr" defTabSz="400050">
+          <a:pPr marL="0" lvl="0" indent="0" algn="ctr" defTabSz="355600">
             <a:lnSpc>
               <a:spcPct val="90000"/>
             </a:lnSpc>
@@ -7693,25 +8185,25 @@
             <a:buNone/>
           </a:pPr>
           <a:r>
-            <a:rPr lang="en-US" sz="900" kern="1200" dirty="0"/>
-            <a:t>Historical period</a:t>
+            <a:rPr lang="en-US" sz="800" kern="1200" dirty="0"/>
+            <a:t>Provenance</a:t>
           </a:r>
         </a:p>
       </dsp:txBody>
       <dsp:txXfrm>
-        <a:off x="5279695" y="2594932"/>
-        <a:ext cx="1003959" cy="306207"/>
+        <a:off x="5871660" y="1550365"/>
+        <a:ext cx="899857" cy="274456"/>
       </dsp:txXfrm>
     </dsp:sp>
-    <dsp:sp modelId="{90D35EA2-A25D-449A-8C0B-91C81C67A50C}">
+    <dsp:sp modelId="{5CE68631-E50F-4A7D-A78E-B9848249D5F3}">
       <dsp:nvSpPr>
         <dsp:cNvPr id="0" name=""/>
         <dsp:cNvSpPr/>
       </dsp:nvSpPr>
       <dsp:spPr>
         <a:xfrm>
-          <a:off x="6484446" y="2594932"/>
-          <a:ext cx="1003959" cy="306207"/>
+          <a:off x="6951490" y="1550365"/>
+          <a:ext cx="899857" cy="274456"/>
         </a:xfrm>
         <a:prstGeom prst="rect">
           <a:avLst/>
@@ -7748,12 +8240,12 @@
         </a:fontRef>
       </dsp:style>
       <dsp:txBody>
-        <a:bodyPr spcFirstLastPara="0" vert="horz" wrap="square" lIns="5715" tIns="5715" rIns="5715" bIns="5715" numCol="1" spcCol="1270" anchor="ctr" anchorCtr="0">
+        <a:bodyPr spcFirstLastPara="0" vert="horz" wrap="square" lIns="5080" tIns="5080" rIns="5080" bIns="5080" numCol="1" spcCol="1270" anchor="ctr" anchorCtr="0">
           <a:noAutofit/>
         </a:bodyPr>
         <a:lstStyle/>
         <a:p>
-          <a:pPr marL="0" lvl="0" indent="0" algn="ctr" defTabSz="400050">
+          <a:pPr marL="0" lvl="0" indent="0" algn="ctr" defTabSz="355600">
             <a:lnSpc>
               <a:spcPct val="90000"/>
             </a:lnSpc>
@@ -7766,33 +8258,25 @@
             <a:buNone/>
           </a:pPr>
           <a:r>
-            <a:rPr lang="en-US" sz="900" kern="1200" dirty="0"/>
-            <a:t>5</a:t>
-          </a:r>
-          <a:r>
-            <a:rPr lang="en-US" sz="900" kern="1200" baseline="30000" dirty="0"/>
-            <a:t>th</a:t>
-          </a:r>
-          <a:r>
-            <a:rPr lang="en-US" sz="900" kern="1200" dirty="0"/>
-            <a:t> Century BC</a:t>
+            <a:rPr lang="en-US" sz="800" kern="1200" dirty="0"/>
+            <a:t>Persepolis</a:t>
           </a:r>
         </a:p>
       </dsp:txBody>
       <dsp:txXfrm>
-        <a:off x="6484446" y="2594932"/>
-        <a:ext cx="1003959" cy="306207"/>
+        <a:off x="6951490" y="1550365"/>
+        <a:ext cx="899857" cy="274456"/>
       </dsp:txXfrm>
     </dsp:sp>
-    <dsp:sp modelId="{8C63EC56-3637-4380-B189-D0B66ADCD3F7}">
+    <dsp:sp modelId="{7E303F30-9711-4703-9E93-53900C059588}">
       <dsp:nvSpPr>
         <dsp:cNvPr id="0" name=""/>
         <dsp:cNvSpPr/>
       </dsp:nvSpPr>
       <dsp:spPr>
         <a:xfrm>
-          <a:off x="4074944" y="1839453"/>
-          <a:ext cx="1003959" cy="306207"/>
+          <a:off x="5871660" y="1937304"/>
+          <a:ext cx="899857" cy="274456"/>
         </a:xfrm>
         <a:prstGeom prst="rect">
           <a:avLst/>
@@ -7834,12 +8318,12 @@
         </a:fontRef>
       </dsp:style>
       <dsp:txBody>
-        <a:bodyPr spcFirstLastPara="0" vert="horz" wrap="square" lIns="5715" tIns="5715" rIns="5715" bIns="5715" numCol="1" spcCol="1270" anchor="ctr" anchorCtr="0">
+        <a:bodyPr spcFirstLastPara="0" vert="horz" wrap="square" lIns="5080" tIns="5080" rIns="5080" bIns="5080" numCol="1" spcCol="1270" anchor="ctr" anchorCtr="0">
           <a:noAutofit/>
         </a:bodyPr>
         <a:lstStyle/>
         <a:p>
-          <a:pPr marL="0" lvl="0" indent="0" algn="ctr" defTabSz="400050">
+          <a:pPr marL="0" lvl="0" indent="0" algn="ctr" defTabSz="355600">
             <a:lnSpc>
               <a:spcPct val="90000"/>
             </a:lnSpc>
@@ -7852,25 +8336,98 @@
             <a:buNone/>
           </a:pPr>
           <a:r>
-            <a:rPr lang="en-US" sz="900" kern="1200" dirty="0"/>
-            <a:t>Artifact Id#2</a:t>
+            <a:rPr lang="en-US" sz="800" kern="1200" dirty="0"/>
+            <a:t>Cultural heritage</a:t>
           </a:r>
         </a:p>
       </dsp:txBody>
       <dsp:txXfrm>
-        <a:off x="4074944" y="1839453"/>
-        <a:ext cx="1003959" cy="306207"/>
+        <a:off x="5871660" y="1937304"/>
+        <a:ext cx="899857" cy="274456"/>
       </dsp:txXfrm>
     </dsp:sp>
-    <dsp:sp modelId="{110F79BE-B8CE-48C2-943A-1C7F5605B400}">
+    <dsp:sp modelId="{2A231453-FF0D-443D-87E8-87257BA9B0EE}">
       <dsp:nvSpPr>
         <dsp:cNvPr id="0" name=""/>
         <dsp:cNvSpPr/>
       </dsp:nvSpPr>
       <dsp:spPr>
         <a:xfrm>
-          <a:off x="4074944" y="3997965"/>
-          <a:ext cx="1003959" cy="306207"/>
+          <a:off x="6951490" y="1937304"/>
+          <a:ext cx="899857" cy="274456"/>
+        </a:xfrm>
+        <a:prstGeom prst="rect">
+          <a:avLst/>
+        </a:prstGeom>
+        <a:solidFill>
+          <a:srgbClr val="FFC000"/>
+        </a:solidFill>
+        <a:ln w="19050" cap="flat" cmpd="sng" algn="ctr">
+          <a:solidFill>
+            <a:schemeClr val="lt1">
+              <a:hueOff val="0"/>
+              <a:satOff val="0"/>
+              <a:lumOff val="0"/>
+              <a:alphaOff val="0"/>
+            </a:schemeClr>
+          </a:solidFill>
+          <a:prstDash val="solid"/>
+          <a:miter lim="800000"/>
+        </a:ln>
+        <a:effectLst/>
+      </dsp:spPr>
+      <dsp:style>
+        <a:lnRef idx="2">
+          <a:scrgbClr r="0" g="0" b="0"/>
+        </a:lnRef>
+        <a:fillRef idx="1">
+          <a:scrgbClr r="0" g="0" b="0"/>
+        </a:fillRef>
+        <a:effectRef idx="0">
+          <a:scrgbClr r="0" g="0" b="0"/>
+        </a:effectRef>
+        <a:fontRef idx="minor">
+          <a:schemeClr val="lt1"/>
+        </a:fontRef>
+      </dsp:style>
+      <dsp:txBody>
+        <a:bodyPr spcFirstLastPara="0" vert="horz" wrap="square" lIns="5080" tIns="5080" rIns="5080" bIns="5080" numCol="1" spcCol="1270" anchor="ctr" anchorCtr="0">
+          <a:noAutofit/>
+        </a:bodyPr>
+        <a:lstStyle/>
+        <a:p>
+          <a:pPr marL="0" lvl="0" indent="0" algn="ctr" defTabSz="355600">
+            <a:lnSpc>
+              <a:spcPct val="90000"/>
+            </a:lnSpc>
+            <a:spcBef>
+              <a:spcPct val="0"/>
+            </a:spcBef>
+            <a:spcAft>
+              <a:spcPct val="35000"/>
+            </a:spcAft>
+            <a:buNone/>
+          </a:pPr>
+          <a:r>
+            <a:rPr lang="en-US" sz="800" kern="1200" dirty="0"/>
+            <a:t>Persian (Achaemenid)</a:t>
+          </a:r>
+        </a:p>
+      </dsp:txBody>
+      <dsp:txXfrm>
+        <a:off x="6951490" y="1937304"/>
+        <a:ext cx="899857" cy="274456"/>
+      </dsp:txXfrm>
+    </dsp:sp>
+    <dsp:sp modelId="{3D02A4C7-D3F8-46A9-BF13-B91E1207C679}">
+      <dsp:nvSpPr>
+        <dsp:cNvPr id="0" name=""/>
+        <dsp:cNvSpPr/>
+      </dsp:nvSpPr>
+      <dsp:spPr>
+        <a:xfrm>
+          <a:off x="5871660" y="2324243"/>
+          <a:ext cx="899857" cy="274456"/>
         </a:xfrm>
         <a:prstGeom prst="rect">
           <a:avLst/>
@@ -7912,12 +8469,12 @@
         </a:fontRef>
       </dsp:style>
       <dsp:txBody>
-        <a:bodyPr spcFirstLastPara="0" vert="horz" wrap="square" lIns="5715" tIns="5715" rIns="5715" bIns="5715" numCol="1" spcCol="1270" anchor="ctr" anchorCtr="0">
+        <a:bodyPr spcFirstLastPara="0" vert="horz" wrap="square" lIns="5080" tIns="5080" rIns="5080" bIns="5080" numCol="1" spcCol="1270" anchor="ctr" anchorCtr="0">
           <a:noAutofit/>
         </a:bodyPr>
         <a:lstStyle/>
         <a:p>
-          <a:pPr marL="0" lvl="0" indent="0" algn="ctr" defTabSz="400050">
+          <a:pPr marL="0" lvl="0" indent="0" algn="ctr" defTabSz="355600">
             <a:lnSpc>
               <a:spcPct val="90000"/>
             </a:lnSpc>
@@ -7930,25 +8487,106 @@
             <a:buNone/>
           </a:pPr>
           <a:r>
-            <a:rPr lang="en-US" sz="900" kern="1200" dirty="0"/>
-            <a:t>Exhibition Id#1</a:t>
+            <a:rPr lang="en-US" sz="800" kern="1200" dirty="0"/>
+            <a:t>Historical period</a:t>
           </a:r>
         </a:p>
       </dsp:txBody>
       <dsp:txXfrm>
-        <a:off x="4074944" y="3997965"/>
-        <a:ext cx="1003959" cy="306207"/>
+        <a:off x="5871660" y="2324243"/>
+        <a:ext cx="899857" cy="274456"/>
       </dsp:txXfrm>
     </dsp:sp>
-    <dsp:sp modelId="{5ED98B15-1271-4C1B-BD70-D93D404A68CE}">
+    <dsp:sp modelId="{90D35EA2-A25D-449A-8C0B-91C81C67A50C}">
       <dsp:nvSpPr>
         <dsp:cNvPr id="0" name=""/>
         <dsp:cNvSpPr/>
       </dsp:nvSpPr>
       <dsp:spPr>
         <a:xfrm>
-          <a:off x="5279695" y="3026634"/>
-          <a:ext cx="1003959" cy="306207"/>
+          <a:off x="6951490" y="2324243"/>
+          <a:ext cx="899857" cy="274456"/>
+        </a:xfrm>
+        <a:prstGeom prst="rect">
+          <a:avLst/>
+        </a:prstGeom>
+        <a:solidFill>
+          <a:srgbClr val="FFC000"/>
+        </a:solidFill>
+        <a:ln w="19050" cap="flat" cmpd="sng" algn="ctr">
+          <a:solidFill>
+            <a:schemeClr val="lt1">
+              <a:hueOff val="0"/>
+              <a:satOff val="0"/>
+              <a:lumOff val="0"/>
+              <a:alphaOff val="0"/>
+            </a:schemeClr>
+          </a:solidFill>
+          <a:prstDash val="solid"/>
+          <a:miter lim="800000"/>
+        </a:ln>
+        <a:effectLst/>
+      </dsp:spPr>
+      <dsp:style>
+        <a:lnRef idx="2">
+          <a:scrgbClr r="0" g="0" b="0"/>
+        </a:lnRef>
+        <a:fillRef idx="1">
+          <a:scrgbClr r="0" g="0" b="0"/>
+        </a:fillRef>
+        <a:effectRef idx="0">
+          <a:scrgbClr r="0" g="0" b="0"/>
+        </a:effectRef>
+        <a:fontRef idx="minor">
+          <a:schemeClr val="lt1"/>
+        </a:fontRef>
+      </dsp:style>
+      <dsp:txBody>
+        <a:bodyPr spcFirstLastPara="0" vert="horz" wrap="square" lIns="5080" tIns="5080" rIns="5080" bIns="5080" numCol="1" spcCol="1270" anchor="ctr" anchorCtr="0">
+          <a:noAutofit/>
+        </a:bodyPr>
+        <a:lstStyle/>
+        <a:p>
+          <a:pPr marL="0" lvl="0" indent="0" algn="ctr" defTabSz="355600">
+            <a:lnSpc>
+              <a:spcPct val="90000"/>
+            </a:lnSpc>
+            <a:spcBef>
+              <a:spcPct val="0"/>
+            </a:spcBef>
+            <a:spcAft>
+              <a:spcPct val="35000"/>
+            </a:spcAft>
+            <a:buNone/>
+          </a:pPr>
+          <a:r>
+            <a:rPr lang="en-US" sz="800" kern="1200" dirty="0"/>
+            <a:t>05</a:t>
+          </a:r>
+          <a:r>
+            <a:rPr lang="en-US" sz="800" kern="1200" baseline="30000" dirty="0"/>
+            <a:t>th</a:t>
+          </a:r>
+          <a:r>
+            <a:rPr lang="en-US" sz="800" kern="1200" dirty="0"/>
+            <a:t> Century BC</a:t>
+          </a:r>
+        </a:p>
+      </dsp:txBody>
+      <dsp:txXfrm>
+        <a:off x="6951490" y="2324243"/>
+        <a:ext cx="899857" cy="274456"/>
+      </dsp:txXfrm>
+    </dsp:sp>
+    <dsp:sp modelId="{9E916334-F27B-4E86-B949-E7079E77F959}">
+      <dsp:nvSpPr>
+        <dsp:cNvPr id="0" name=""/>
+        <dsp:cNvSpPr/>
+      </dsp:nvSpPr>
+      <dsp:spPr>
+        <a:xfrm>
+          <a:off x="5871660" y="2711182"/>
+          <a:ext cx="899857" cy="274456"/>
         </a:xfrm>
         <a:prstGeom prst="rect">
           <a:avLst/>
@@ -7990,12 +8628,12 @@
         </a:fontRef>
       </dsp:style>
       <dsp:txBody>
-        <a:bodyPr spcFirstLastPara="0" vert="horz" wrap="square" lIns="5715" tIns="5715" rIns="5715" bIns="5715" numCol="1" spcCol="1270" anchor="ctr" anchorCtr="0">
+        <a:bodyPr spcFirstLastPara="0" vert="horz" wrap="square" lIns="5080" tIns="5080" rIns="5080" bIns="5080" numCol="1" spcCol="1270" anchor="ctr" anchorCtr="0">
           <a:noAutofit/>
         </a:bodyPr>
         <a:lstStyle/>
         <a:p>
-          <a:pPr marL="0" lvl="0" indent="0" algn="ctr" defTabSz="400050">
+          <a:pPr marL="0" lvl="0" indent="0" algn="ctr" defTabSz="355600">
             <a:lnSpc>
               <a:spcPct val="90000"/>
             </a:lnSpc>
@@ -8008,25 +8646,25 @@
             <a:buNone/>
           </a:pPr>
           <a:r>
-            <a:rPr lang="en-US" sz="900" kern="1200" dirty="0"/>
-            <a:t>Schedule</a:t>
+            <a:rPr lang="en-US" sz="800" kern="1200" dirty="0"/>
+            <a:t>Restoration history</a:t>
           </a:r>
         </a:p>
       </dsp:txBody>
       <dsp:txXfrm>
-        <a:off x="5279695" y="3026634"/>
-        <a:ext cx="1003959" cy="306207"/>
+        <a:off x="5871660" y="2711182"/>
+        <a:ext cx="899857" cy="274456"/>
       </dsp:txXfrm>
     </dsp:sp>
-    <dsp:sp modelId="{E3458C5F-4332-4439-96AF-FD966B7B137A}">
+    <dsp:sp modelId="{0BA28261-1ED3-47EB-A7EA-310484F5DF09}">
       <dsp:nvSpPr>
         <dsp:cNvPr id="0" name=""/>
         <dsp:cNvSpPr/>
       </dsp:nvSpPr>
       <dsp:spPr>
         <a:xfrm>
-          <a:off x="5279695" y="3458337"/>
-          <a:ext cx="1003959" cy="306207"/>
+          <a:off x="6951490" y="2711182"/>
+          <a:ext cx="899857" cy="274456"/>
         </a:xfrm>
         <a:prstGeom prst="rect">
           <a:avLst/>
@@ -8068,12 +8706,12 @@
         </a:fontRef>
       </dsp:style>
       <dsp:txBody>
-        <a:bodyPr spcFirstLastPara="0" vert="horz" wrap="square" lIns="5715" tIns="5715" rIns="5715" bIns="5715" numCol="1" spcCol="1270" anchor="ctr" anchorCtr="0">
+        <a:bodyPr spcFirstLastPara="0" vert="horz" wrap="square" lIns="5080" tIns="5080" rIns="5080" bIns="5080" numCol="1" spcCol="1270" anchor="ctr" anchorCtr="0">
           <a:noAutofit/>
         </a:bodyPr>
         <a:lstStyle/>
         <a:p>
-          <a:pPr marL="0" lvl="0" indent="0" algn="ctr" defTabSz="400050">
+          <a:pPr marL="0" lvl="0" indent="0" algn="ctr" defTabSz="355600">
             <a:lnSpc>
               <a:spcPct val="90000"/>
             </a:lnSpc>
@@ -8086,25 +8724,98 @@
             <a:buNone/>
           </a:pPr>
           <a:r>
-            <a:rPr lang="en-US" sz="900" kern="1200" dirty="0"/>
-            <a:t>Visitors per day</a:t>
+            <a:rPr lang="en-US" sz="800" kern="1200" dirty="0"/>
+            <a:t>Restored 3 times</a:t>
           </a:r>
         </a:p>
       </dsp:txBody>
       <dsp:txXfrm>
-        <a:off x="5279695" y="3458337"/>
-        <a:ext cx="1003959" cy="306207"/>
+        <a:off x="6951490" y="2711182"/>
+        <a:ext cx="899857" cy="274456"/>
       </dsp:txXfrm>
     </dsp:sp>
-    <dsp:sp modelId="{07CF39E6-9B2B-4A5F-B780-120DD8E62C9B}">
+    <dsp:sp modelId="{B509227D-8391-4FEA-8798-380D7D9E41EE}">
       <dsp:nvSpPr>
         <dsp:cNvPr id="0" name=""/>
         <dsp:cNvSpPr/>
       </dsp:nvSpPr>
       <dsp:spPr>
         <a:xfrm>
-          <a:off x="6484446" y="3242486"/>
-          <a:ext cx="1003959" cy="306207"/>
+          <a:off x="8031319" y="2711182"/>
+          <a:ext cx="899857" cy="274456"/>
+        </a:xfrm>
+        <a:prstGeom prst="rect">
+          <a:avLst/>
+        </a:prstGeom>
+        <a:solidFill>
+          <a:srgbClr val="FFC000"/>
+        </a:solidFill>
+        <a:ln w="19050" cap="flat" cmpd="sng" algn="ctr">
+          <a:solidFill>
+            <a:schemeClr val="lt1">
+              <a:hueOff val="0"/>
+              <a:satOff val="0"/>
+              <a:lumOff val="0"/>
+              <a:alphaOff val="0"/>
+            </a:schemeClr>
+          </a:solidFill>
+          <a:prstDash val="solid"/>
+          <a:miter lim="800000"/>
+        </a:ln>
+        <a:effectLst/>
+      </dsp:spPr>
+      <dsp:style>
+        <a:lnRef idx="2">
+          <a:scrgbClr r="0" g="0" b="0"/>
+        </a:lnRef>
+        <a:fillRef idx="1">
+          <a:scrgbClr r="0" g="0" b="0"/>
+        </a:fillRef>
+        <a:effectRef idx="0">
+          <a:scrgbClr r="0" g="0" b="0"/>
+        </a:effectRef>
+        <a:fontRef idx="minor">
+          <a:schemeClr val="lt1"/>
+        </a:fontRef>
+      </dsp:style>
+      <dsp:txBody>
+        <a:bodyPr spcFirstLastPara="0" vert="horz" wrap="square" lIns="5080" tIns="5080" rIns="5080" bIns="5080" numCol="1" spcCol="1270" anchor="ctr" anchorCtr="0">
+          <a:noAutofit/>
+        </a:bodyPr>
+        <a:lstStyle/>
+        <a:p>
+          <a:pPr marL="0" lvl="0" indent="0" algn="ctr" defTabSz="355600">
+            <a:lnSpc>
+              <a:spcPct val="90000"/>
+            </a:lnSpc>
+            <a:spcBef>
+              <a:spcPct val="0"/>
+            </a:spcBef>
+            <a:spcAft>
+              <a:spcPct val="35000"/>
+            </a:spcAft>
+            <a:buNone/>
+          </a:pPr>
+          <a:r>
+            <a:rPr lang="en-US" sz="800" kern="1200" dirty="0"/>
+            <a:t>Broken ear</a:t>
+          </a:r>
+        </a:p>
+      </dsp:txBody>
+      <dsp:txXfrm>
+        <a:off x="8031319" y="2711182"/>
+        <a:ext cx="899857" cy="274456"/>
+      </dsp:txXfrm>
+    </dsp:sp>
+    <dsp:sp modelId="{8C63EC56-3637-4380-B189-D0B66ADCD3F7}">
+      <dsp:nvSpPr>
+        <dsp:cNvPr id="0" name=""/>
+        <dsp:cNvSpPr/>
+      </dsp:nvSpPr>
+      <dsp:spPr>
+        <a:xfrm>
+          <a:off x="4791831" y="1937304"/>
+          <a:ext cx="899857" cy="274456"/>
         </a:xfrm>
         <a:prstGeom prst="rect">
           <a:avLst/>
@@ -8146,12 +8857,12 @@
         </a:fontRef>
       </dsp:style>
       <dsp:txBody>
-        <a:bodyPr spcFirstLastPara="0" vert="horz" wrap="square" lIns="5715" tIns="5715" rIns="5715" bIns="5715" numCol="1" spcCol="1270" anchor="ctr" anchorCtr="0">
+        <a:bodyPr spcFirstLastPara="0" vert="horz" wrap="square" lIns="5080" tIns="5080" rIns="5080" bIns="5080" numCol="1" spcCol="1270" anchor="ctr" anchorCtr="0">
           <a:noAutofit/>
         </a:bodyPr>
         <a:lstStyle/>
         <a:p>
-          <a:pPr marL="0" lvl="0" indent="0" algn="ctr" defTabSz="400050">
+          <a:pPr marL="0" lvl="0" indent="0" algn="ctr" defTabSz="355600">
             <a:lnSpc>
               <a:spcPct val="90000"/>
             </a:lnSpc>
@@ -8164,98 +8875,25 @@
             <a:buNone/>
           </a:pPr>
           <a:r>
-            <a:rPr lang="en-US" sz="900" kern="1200" dirty="0"/>
-            <a:t>Adult</a:t>
+            <a:rPr lang="en-US" sz="800" kern="1200" dirty="0"/>
+            <a:t>Artifact Id#2</a:t>
           </a:r>
         </a:p>
       </dsp:txBody>
       <dsp:txXfrm>
-        <a:off x="6484446" y="3242486"/>
-        <a:ext cx="1003959" cy="306207"/>
+        <a:off x="4791831" y="1937304"/>
+        <a:ext cx="899857" cy="274456"/>
       </dsp:txXfrm>
     </dsp:sp>
-    <dsp:sp modelId="{B652EFB0-A88E-48A1-836A-A245919707FD}">
+    <dsp:sp modelId="{110F79BE-B8CE-48C2-943A-1C7F5605B400}">
       <dsp:nvSpPr>
         <dsp:cNvPr id="0" name=""/>
         <dsp:cNvSpPr/>
       </dsp:nvSpPr>
       <dsp:spPr>
         <a:xfrm>
-          <a:off x="7689197" y="3242486"/>
-          <a:ext cx="1003959" cy="306207"/>
-        </a:xfrm>
-        <a:prstGeom prst="rect">
-          <a:avLst/>
-        </a:prstGeom>
-        <a:solidFill>
-          <a:srgbClr val="FFC000"/>
-        </a:solidFill>
-        <a:ln w="19050" cap="flat" cmpd="sng" algn="ctr">
-          <a:solidFill>
-            <a:schemeClr val="lt1">
-              <a:hueOff val="0"/>
-              <a:satOff val="0"/>
-              <a:lumOff val="0"/>
-              <a:alphaOff val="0"/>
-            </a:schemeClr>
-          </a:solidFill>
-          <a:prstDash val="solid"/>
-          <a:miter lim="800000"/>
-        </a:ln>
-        <a:effectLst/>
-      </dsp:spPr>
-      <dsp:style>
-        <a:lnRef idx="2">
-          <a:scrgbClr r="0" g="0" b="0"/>
-        </a:lnRef>
-        <a:fillRef idx="1">
-          <a:scrgbClr r="0" g="0" b="0"/>
-        </a:fillRef>
-        <a:effectRef idx="0">
-          <a:scrgbClr r="0" g="0" b="0"/>
-        </a:effectRef>
-        <a:fontRef idx="minor">
-          <a:schemeClr val="lt1"/>
-        </a:fontRef>
-      </dsp:style>
-      <dsp:txBody>
-        <a:bodyPr spcFirstLastPara="0" vert="horz" wrap="square" lIns="5715" tIns="5715" rIns="5715" bIns="5715" numCol="1" spcCol="1270" anchor="ctr" anchorCtr="0">
-          <a:noAutofit/>
-        </a:bodyPr>
-        <a:lstStyle/>
-        <a:p>
-          <a:pPr marL="0" lvl="0" indent="0" algn="ctr" defTabSz="400050">
-            <a:lnSpc>
-              <a:spcPct val="90000"/>
-            </a:lnSpc>
-            <a:spcBef>
-              <a:spcPct val="0"/>
-            </a:spcBef>
-            <a:spcAft>
-              <a:spcPct val="35000"/>
-            </a:spcAft>
-            <a:buNone/>
-          </a:pPr>
-          <a:r>
-            <a:rPr lang="en-US" sz="900" kern="1200" dirty="0"/>
-            <a:t>345 visitors/day</a:t>
-          </a:r>
-        </a:p>
-      </dsp:txBody>
-      <dsp:txXfrm>
-        <a:off x="7689197" y="3242486"/>
-        <a:ext cx="1003959" cy="306207"/>
-      </dsp:txXfrm>
-    </dsp:sp>
-    <dsp:sp modelId="{1D1D8692-63AE-448E-8E39-430F6A4B46BF}">
-      <dsp:nvSpPr>
-        <dsp:cNvPr id="0" name=""/>
-        <dsp:cNvSpPr/>
-      </dsp:nvSpPr>
-      <dsp:spPr>
-        <a:xfrm>
-          <a:off x="6484446" y="3674188"/>
-          <a:ext cx="1003959" cy="306207"/>
+          <a:off x="3712001" y="4162202"/>
+          <a:ext cx="899857" cy="274456"/>
         </a:xfrm>
         <a:prstGeom prst="rect">
           <a:avLst/>
@@ -8297,12 +8935,12 @@
         </a:fontRef>
       </dsp:style>
       <dsp:txBody>
-        <a:bodyPr spcFirstLastPara="0" vert="horz" wrap="square" lIns="5715" tIns="5715" rIns="5715" bIns="5715" numCol="1" spcCol="1270" anchor="ctr" anchorCtr="0">
+        <a:bodyPr spcFirstLastPara="0" vert="horz" wrap="square" lIns="5080" tIns="5080" rIns="5080" bIns="5080" numCol="1" spcCol="1270" anchor="ctr" anchorCtr="0">
           <a:noAutofit/>
         </a:bodyPr>
         <a:lstStyle/>
         <a:p>
-          <a:pPr marL="0" lvl="0" indent="0" algn="ctr" defTabSz="400050">
+          <a:pPr marL="0" lvl="0" indent="0" algn="ctr" defTabSz="355600">
             <a:lnSpc>
               <a:spcPct val="90000"/>
             </a:lnSpc>
@@ -8315,98 +8953,25 @@
             <a:buNone/>
           </a:pPr>
           <a:r>
-            <a:rPr lang="en-US" sz="900" kern="1200" dirty="0"/>
-            <a:t>Under 12</a:t>
+            <a:rPr lang="en-US" sz="800" kern="1200" dirty="0"/>
+            <a:t>Exhibitions</a:t>
           </a:r>
         </a:p>
       </dsp:txBody>
       <dsp:txXfrm>
-        <a:off x="6484446" y="3674188"/>
-        <a:ext cx="1003959" cy="306207"/>
+        <a:off x="3712001" y="4162202"/>
+        <a:ext cx="899857" cy="274456"/>
       </dsp:txXfrm>
     </dsp:sp>
-    <dsp:sp modelId="{CF184D97-6870-475F-82DD-C951C974B444}">
+    <dsp:sp modelId="{5ED98B15-1271-4C1B-BD70-D93D404A68CE}">
       <dsp:nvSpPr>
         <dsp:cNvPr id="0" name=""/>
         <dsp:cNvSpPr/>
       </dsp:nvSpPr>
       <dsp:spPr>
         <a:xfrm>
-          <a:off x="7689197" y="3674188"/>
-          <a:ext cx="1003959" cy="306207"/>
-        </a:xfrm>
-        <a:prstGeom prst="rect">
-          <a:avLst/>
-        </a:prstGeom>
-        <a:solidFill>
-          <a:srgbClr val="FFC000"/>
-        </a:solidFill>
-        <a:ln w="19050" cap="flat" cmpd="sng" algn="ctr">
-          <a:solidFill>
-            <a:schemeClr val="lt1">
-              <a:hueOff val="0"/>
-              <a:satOff val="0"/>
-              <a:lumOff val="0"/>
-              <a:alphaOff val="0"/>
-            </a:schemeClr>
-          </a:solidFill>
-          <a:prstDash val="solid"/>
-          <a:miter lim="800000"/>
-        </a:ln>
-        <a:effectLst/>
-      </dsp:spPr>
-      <dsp:style>
-        <a:lnRef idx="2">
-          <a:scrgbClr r="0" g="0" b="0"/>
-        </a:lnRef>
-        <a:fillRef idx="1">
-          <a:scrgbClr r="0" g="0" b="0"/>
-        </a:fillRef>
-        <a:effectRef idx="0">
-          <a:scrgbClr r="0" g="0" b="0"/>
-        </a:effectRef>
-        <a:fontRef idx="minor">
-          <a:schemeClr val="lt1"/>
-        </a:fontRef>
-      </dsp:style>
-      <dsp:txBody>
-        <a:bodyPr spcFirstLastPara="0" vert="horz" wrap="square" lIns="5715" tIns="5715" rIns="5715" bIns="5715" numCol="1" spcCol="1270" anchor="ctr" anchorCtr="0">
-          <a:noAutofit/>
-        </a:bodyPr>
-        <a:lstStyle/>
-        <a:p>
-          <a:pPr marL="0" lvl="0" indent="0" algn="ctr" defTabSz="400050">
-            <a:lnSpc>
-              <a:spcPct val="90000"/>
-            </a:lnSpc>
-            <a:spcBef>
-              <a:spcPct val="0"/>
-            </a:spcBef>
-            <a:spcAft>
-              <a:spcPct val="35000"/>
-            </a:spcAft>
-            <a:buNone/>
-          </a:pPr>
-          <a:r>
-            <a:rPr lang="en-US" sz="900" kern="1200" dirty="0"/>
-            <a:t>120 visitors/day</a:t>
-          </a:r>
-        </a:p>
-      </dsp:txBody>
-      <dsp:txXfrm>
-        <a:off x="7689197" y="3674188"/>
-        <a:ext cx="1003959" cy="306207"/>
-      </dsp:txXfrm>
-    </dsp:sp>
-    <dsp:sp modelId="{FD314EC3-FAF3-42D4-B72F-81E23652E3D9}">
-      <dsp:nvSpPr>
-        <dsp:cNvPr id="0" name=""/>
-        <dsp:cNvSpPr/>
-      </dsp:nvSpPr>
-      <dsp:spPr>
-        <a:xfrm>
-          <a:off x="5279695" y="4105890"/>
-          <a:ext cx="1003959" cy="306207"/>
+          <a:off x="4791831" y="3968733"/>
+          <a:ext cx="899857" cy="274456"/>
         </a:xfrm>
         <a:prstGeom prst="rect">
           <a:avLst/>
@@ -8448,12 +9013,12 @@
         </a:fontRef>
       </dsp:style>
       <dsp:txBody>
-        <a:bodyPr spcFirstLastPara="0" vert="horz" wrap="square" lIns="5715" tIns="5715" rIns="5715" bIns="5715" numCol="1" spcCol="1270" anchor="ctr" anchorCtr="0">
+        <a:bodyPr spcFirstLastPara="0" vert="horz" wrap="square" lIns="5080" tIns="5080" rIns="5080" bIns="5080" numCol="1" spcCol="1270" anchor="ctr" anchorCtr="0">
           <a:noAutofit/>
         </a:bodyPr>
         <a:lstStyle/>
         <a:p>
-          <a:pPr marL="0" lvl="0" indent="0" algn="ctr" defTabSz="400050">
+          <a:pPr marL="0" lvl="0" indent="0" algn="ctr" defTabSz="355600">
             <a:lnSpc>
               <a:spcPct val="90000"/>
             </a:lnSpc>
@@ -8466,98 +9031,25 @@
             <a:buNone/>
           </a:pPr>
           <a:r>
-            <a:rPr lang="en-US" sz="900" kern="1200" dirty="0"/>
-            <a:t>Artist</a:t>
+            <a:rPr lang="en-US" sz="800" kern="1200" dirty="0"/>
+            <a:t>Exhibition Id#1</a:t>
           </a:r>
         </a:p>
       </dsp:txBody>
       <dsp:txXfrm>
-        <a:off x="5279695" y="4105890"/>
-        <a:ext cx="1003959" cy="306207"/>
+        <a:off x="4791831" y="3968733"/>
+        <a:ext cx="899857" cy="274456"/>
       </dsp:txXfrm>
     </dsp:sp>
-    <dsp:sp modelId="{2CFF43AD-E638-48CC-A1A6-213BB3000388}">
+    <dsp:sp modelId="{DDF5EC19-41AE-4BDE-81B3-DB61285BD74A}">
       <dsp:nvSpPr>
         <dsp:cNvPr id="0" name=""/>
         <dsp:cNvSpPr/>
       </dsp:nvSpPr>
       <dsp:spPr>
         <a:xfrm>
-          <a:off x="6484446" y="4105890"/>
-          <a:ext cx="1003959" cy="306207"/>
-        </a:xfrm>
-        <a:prstGeom prst="rect">
-          <a:avLst/>
-        </a:prstGeom>
-        <a:solidFill>
-          <a:srgbClr val="FFC000"/>
-        </a:solidFill>
-        <a:ln w="19050" cap="flat" cmpd="sng" algn="ctr">
-          <a:solidFill>
-            <a:schemeClr val="lt1">
-              <a:hueOff val="0"/>
-              <a:satOff val="0"/>
-              <a:lumOff val="0"/>
-              <a:alphaOff val="0"/>
-            </a:schemeClr>
-          </a:solidFill>
-          <a:prstDash val="solid"/>
-          <a:miter lim="800000"/>
-        </a:ln>
-        <a:effectLst/>
-      </dsp:spPr>
-      <dsp:style>
-        <a:lnRef idx="2">
-          <a:scrgbClr r="0" g="0" b="0"/>
-        </a:lnRef>
-        <a:fillRef idx="1">
-          <a:scrgbClr r="0" g="0" b="0"/>
-        </a:fillRef>
-        <a:effectRef idx="0">
-          <a:scrgbClr r="0" g="0" b="0"/>
-        </a:effectRef>
-        <a:fontRef idx="minor">
-          <a:schemeClr val="lt1"/>
-        </a:fontRef>
-      </dsp:style>
-      <dsp:txBody>
-        <a:bodyPr spcFirstLastPara="0" vert="horz" wrap="square" lIns="5715" tIns="5715" rIns="5715" bIns="5715" numCol="1" spcCol="1270" anchor="ctr" anchorCtr="0">
-          <a:noAutofit/>
-        </a:bodyPr>
-        <a:lstStyle/>
-        <a:p>
-          <a:pPr marL="0" lvl="0" indent="0" algn="ctr" defTabSz="400050">
-            <a:lnSpc>
-              <a:spcPct val="90000"/>
-            </a:lnSpc>
-            <a:spcBef>
-              <a:spcPct val="0"/>
-            </a:spcBef>
-            <a:spcAft>
-              <a:spcPct val="35000"/>
-            </a:spcAft>
-            <a:buNone/>
-          </a:pPr>
-          <a:r>
-            <a:rPr lang="en-US" sz="900" kern="1200" dirty="0"/>
-            <a:t>Sound and Light Engineer</a:t>
-          </a:r>
-        </a:p>
-      </dsp:txBody>
-      <dsp:txXfrm>
-        <a:off x="6484446" y="4105890"/>
-        <a:ext cx="1003959" cy="306207"/>
-      </dsp:txXfrm>
-    </dsp:sp>
-    <dsp:sp modelId="{B7E87C89-F2A3-40BE-A158-9348331D318D}">
-      <dsp:nvSpPr>
-        <dsp:cNvPr id="0" name=""/>
-        <dsp:cNvSpPr/>
-      </dsp:nvSpPr>
-      <dsp:spPr>
-        <a:xfrm>
-          <a:off x="5279695" y="4537593"/>
-          <a:ext cx="1003959" cy="306207"/>
+          <a:off x="5871660" y="3098120"/>
+          <a:ext cx="899857" cy="274456"/>
         </a:xfrm>
         <a:prstGeom prst="rect">
           <a:avLst/>
@@ -8599,12 +9091,12 @@
         </a:fontRef>
       </dsp:style>
       <dsp:txBody>
-        <a:bodyPr spcFirstLastPara="0" vert="horz" wrap="square" lIns="5715" tIns="5715" rIns="5715" bIns="5715" numCol="1" spcCol="1270" anchor="ctr" anchorCtr="0">
+        <a:bodyPr spcFirstLastPara="0" vert="horz" wrap="square" lIns="5080" tIns="5080" rIns="5080" bIns="5080" numCol="1" spcCol="1270" anchor="ctr" anchorCtr="0">
           <a:noAutofit/>
         </a:bodyPr>
         <a:lstStyle/>
         <a:p>
-          <a:pPr marL="0" lvl="0" indent="0" algn="ctr" defTabSz="400050">
+          <a:pPr marL="0" lvl="0" indent="0" algn="ctr" defTabSz="355600">
             <a:lnSpc>
               <a:spcPct val="90000"/>
             </a:lnSpc>
@@ -8617,98 +9109,25 @@
             <a:buNone/>
           </a:pPr>
           <a:r>
-            <a:rPr lang="en-US" sz="900" kern="1200" dirty="0"/>
-            <a:t>Theme/Culture</a:t>
+            <a:rPr lang="en-US" sz="800" kern="1200" dirty="0"/>
+            <a:t>Schedule</a:t>
           </a:r>
         </a:p>
       </dsp:txBody>
       <dsp:txXfrm>
-        <a:off x="5279695" y="4537593"/>
-        <a:ext cx="1003959" cy="306207"/>
+        <a:off x="5871660" y="3098120"/>
+        <a:ext cx="899857" cy="274456"/>
       </dsp:txXfrm>
     </dsp:sp>
-    <dsp:sp modelId="{FD27C63C-53AB-4EF5-B065-A5CCC6683CBC}">
+    <dsp:sp modelId="{E3458C5F-4332-4439-96AF-FD966B7B137A}">
       <dsp:nvSpPr>
         <dsp:cNvPr id="0" name=""/>
         <dsp:cNvSpPr/>
       </dsp:nvSpPr>
       <dsp:spPr>
         <a:xfrm>
-          <a:off x="6484446" y="4537593"/>
-          <a:ext cx="1003959" cy="306207"/>
-        </a:xfrm>
-        <a:prstGeom prst="rect">
-          <a:avLst/>
-        </a:prstGeom>
-        <a:solidFill>
-          <a:srgbClr val="FFC000"/>
-        </a:solidFill>
-        <a:ln w="19050" cap="flat" cmpd="sng" algn="ctr">
-          <a:solidFill>
-            <a:schemeClr val="lt1">
-              <a:hueOff val="0"/>
-              <a:satOff val="0"/>
-              <a:lumOff val="0"/>
-              <a:alphaOff val="0"/>
-            </a:schemeClr>
-          </a:solidFill>
-          <a:prstDash val="solid"/>
-          <a:miter lim="800000"/>
-        </a:ln>
-        <a:effectLst/>
-      </dsp:spPr>
-      <dsp:style>
-        <a:lnRef idx="2">
-          <a:scrgbClr r="0" g="0" b="0"/>
-        </a:lnRef>
-        <a:fillRef idx="1">
-          <a:scrgbClr r="0" g="0" b="0"/>
-        </a:fillRef>
-        <a:effectRef idx="0">
-          <a:scrgbClr r="0" g="0" b="0"/>
-        </a:effectRef>
-        <a:fontRef idx="minor">
-          <a:schemeClr val="lt1"/>
-        </a:fontRef>
-      </dsp:style>
-      <dsp:txBody>
-        <a:bodyPr spcFirstLastPara="0" vert="horz" wrap="square" lIns="5715" tIns="5715" rIns="5715" bIns="5715" numCol="1" spcCol="1270" anchor="ctr" anchorCtr="0">
-          <a:noAutofit/>
-        </a:bodyPr>
-        <a:lstStyle/>
-        <a:p>
-          <a:pPr marL="0" lvl="0" indent="0" algn="ctr" defTabSz="400050">
-            <a:lnSpc>
-              <a:spcPct val="90000"/>
-            </a:lnSpc>
-            <a:spcBef>
-              <a:spcPct val="0"/>
-            </a:spcBef>
-            <a:spcAft>
-              <a:spcPct val="35000"/>
-            </a:spcAft>
-            <a:buNone/>
-          </a:pPr>
-          <a:r>
-            <a:rPr lang="en-US" sz="900" kern="1200" dirty="0"/>
-            <a:t>Ancient Egypt</a:t>
-          </a:r>
-        </a:p>
-      </dsp:txBody>
-      <dsp:txXfrm>
-        <a:off x="6484446" y="4537593"/>
-        <a:ext cx="1003959" cy="306207"/>
-      </dsp:txXfrm>
-    </dsp:sp>
-    <dsp:sp modelId="{77267FA6-0CDF-4F47-97BA-153747EF1791}">
-      <dsp:nvSpPr>
-        <dsp:cNvPr id="0" name=""/>
-        <dsp:cNvSpPr/>
-      </dsp:nvSpPr>
-      <dsp:spPr>
-        <a:xfrm>
-          <a:off x="5279695" y="4969295"/>
-          <a:ext cx="1003959" cy="306207"/>
+          <a:off x="5871660" y="3485059"/>
+          <a:ext cx="899857" cy="274456"/>
         </a:xfrm>
         <a:prstGeom prst="rect">
           <a:avLst/>
@@ -8750,12 +9169,12 @@
         </a:fontRef>
       </dsp:style>
       <dsp:txBody>
-        <a:bodyPr spcFirstLastPara="0" vert="horz" wrap="square" lIns="5715" tIns="5715" rIns="5715" bIns="5715" numCol="1" spcCol="1270" anchor="ctr" anchorCtr="0">
+        <a:bodyPr spcFirstLastPara="0" vert="horz" wrap="square" lIns="5080" tIns="5080" rIns="5080" bIns="5080" numCol="1" spcCol="1270" anchor="ctr" anchorCtr="0">
           <a:noAutofit/>
         </a:bodyPr>
         <a:lstStyle/>
         <a:p>
-          <a:pPr marL="0" lvl="0" indent="0" algn="ctr" defTabSz="400050">
+          <a:pPr marL="0" lvl="0" indent="0" algn="ctr" defTabSz="355600">
             <a:lnSpc>
               <a:spcPct val="90000"/>
             </a:lnSpc>
@@ -8768,25 +9187,25 @@
             <a:buNone/>
           </a:pPr>
           <a:r>
-            <a:rPr lang="en-US" sz="900" kern="1200" dirty="0"/>
-            <a:t>Historical Period</a:t>
+            <a:rPr lang="en-US" sz="800" kern="1200" dirty="0"/>
+            <a:t>Visitors per day</a:t>
           </a:r>
         </a:p>
       </dsp:txBody>
       <dsp:txXfrm>
-        <a:off x="5279695" y="4969295"/>
-        <a:ext cx="1003959" cy="306207"/>
+        <a:off x="5871660" y="3485059"/>
+        <a:ext cx="899857" cy="274456"/>
       </dsp:txXfrm>
     </dsp:sp>
-    <dsp:sp modelId="{F727FD69-DA36-400A-9A17-E435D30B6294}">
+    <dsp:sp modelId="{07CF39E6-9B2B-4A5F-B780-120DD8E62C9B}">
       <dsp:nvSpPr>
         <dsp:cNvPr id="0" name=""/>
         <dsp:cNvSpPr/>
       </dsp:nvSpPr>
       <dsp:spPr>
         <a:xfrm>
-          <a:off x="4074944" y="4429667"/>
-          <a:ext cx="1003959" cy="306207"/>
+          <a:off x="6951490" y="3291590"/>
+          <a:ext cx="899857" cy="274456"/>
         </a:xfrm>
         <a:prstGeom prst="rect">
           <a:avLst/>
@@ -8828,12 +9247,12 @@
         </a:fontRef>
       </dsp:style>
       <dsp:txBody>
-        <a:bodyPr spcFirstLastPara="0" vert="horz" wrap="square" lIns="5715" tIns="5715" rIns="5715" bIns="5715" numCol="1" spcCol="1270" anchor="ctr" anchorCtr="0">
+        <a:bodyPr spcFirstLastPara="0" vert="horz" wrap="square" lIns="5080" tIns="5080" rIns="5080" bIns="5080" numCol="1" spcCol="1270" anchor="ctr" anchorCtr="0">
           <a:noAutofit/>
         </a:bodyPr>
         <a:lstStyle/>
         <a:p>
-          <a:pPr marL="0" lvl="0" indent="0" algn="ctr" defTabSz="400050">
+          <a:pPr marL="0" lvl="0" indent="0" algn="ctr" defTabSz="355600">
             <a:lnSpc>
               <a:spcPct val="90000"/>
             </a:lnSpc>
@@ -8846,25 +9265,98 @@
             <a:buNone/>
           </a:pPr>
           <a:r>
-            <a:rPr lang="en-US" sz="900" kern="1200" dirty="0"/>
-            <a:t>Exhibition Id#2</a:t>
+            <a:rPr lang="en-US" sz="800" kern="1200" dirty="0"/>
+            <a:t>Adult</a:t>
           </a:r>
         </a:p>
       </dsp:txBody>
       <dsp:txXfrm>
-        <a:off x="4074944" y="4429667"/>
-        <a:ext cx="1003959" cy="306207"/>
+        <a:off x="6951490" y="3291590"/>
+        <a:ext cx="899857" cy="274456"/>
       </dsp:txXfrm>
     </dsp:sp>
-    <dsp:sp modelId="{B027295A-93BB-4C19-A90B-553BB78E8D73}">
+    <dsp:sp modelId="{B652EFB0-A88E-48A1-836A-A245919707FD}">
       <dsp:nvSpPr>
         <dsp:cNvPr id="0" name=""/>
         <dsp:cNvSpPr/>
       </dsp:nvSpPr>
       <dsp:spPr>
         <a:xfrm>
-          <a:off x="4074944" y="5616849"/>
-          <a:ext cx="1003959" cy="306207"/>
+          <a:off x="8031319" y="3291590"/>
+          <a:ext cx="899857" cy="274456"/>
+        </a:xfrm>
+        <a:prstGeom prst="rect">
+          <a:avLst/>
+        </a:prstGeom>
+        <a:solidFill>
+          <a:srgbClr val="FFC000"/>
+        </a:solidFill>
+        <a:ln w="19050" cap="flat" cmpd="sng" algn="ctr">
+          <a:solidFill>
+            <a:schemeClr val="lt1">
+              <a:hueOff val="0"/>
+              <a:satOff val="0"/>
+              <a:lumOff val="0"/>
+              <a:alphaOff val="0"/>
+            </a:schemeClr>
+          </a:solidFill>
+          <a:prstDash val="solid"/>
+          <a:miter lim="800000"/>
+        </a:ln>
+        <a:effectLst/>
+      </dsp:spPr>
+      <dsp:style>
+        <a:lnRef idx="2">
+          <a:scrgbClr r="0" g="0" b="0"/>
+        </a:lnRef>
+        <a:fillRef idx="1">
+          <a:scrgbClr r="0" g="0" b="0"/>
+        </a:fillRef>
+        <a:effectRef idx="0">
+          <a:scrgbClr r="0" g="0" b="0"/>
+        </a:effectRef>
+        <a:fontRef idx="minor">
+          <a:schemeClr val="lt1"/>
+        </a:fontRef>
+      </dsp:style>
+      <dsp:txBody>
+        <a:bodyPr spcFirstLastPara="0" vert="horz" wrap="square" lIns="5080" tIns="5080" rIns="5080" bIns="5080" numCol="1" spcCol="1270" anchor="ctr" anchorCtr="0">
+          <a:noAutofit/>
+        </a:bodyPr>
+        <a:lstStyle/>
+        <a:p>
+          <a:pPr marL="0" lvl="0" indent="0" algn="ctr" defTabSz="355600">
+            <a:lnSpc>
+              <a:spcPct val="90000"/>
+            </a:lnSpc>
+            <a:spcBef>
+              <a:spcPct val="0"/>
+            </a:spcBef>
+            <a:spcAft>
+              <a:spcPct val="35000"/>
+            </a:spcAft>
+            <a:buNone/>
+          </a:pPr>
+          <a:r>
+            <a:rPr lang="en-US" sz="800" kern="1200" dirty="0"/>
+            <a:t>345 visitors/day</a:t>
+          </a:r>
+        </a:p>
+      </dsp:txBody>
+      <dsp:txXfrm>
+        <a:off x="8031319" y="3291590"/>
+        <a:ext cx="899857" cy="274456"/>
+      </dsp:txXfrm>
+    </dsp:sp>
+    <dsp:sp modelId="{1D1D8692-63AE-448E-8E39-430F6A4B46BF}">
+      <dsp:nvSpPr>
+        <dsp:cNvPr id="0" name=""/>
+        <dsp:cNvSpPr/>
+      </dsp:nvSpPr>
+      <dsp:spPr>
+        <a:xfrm>
+          <a:off x="6951490" y="3678529"/>
+          <a:ext cx="899857" cy="274456"/>
         </a:xfrm>
         <a:prstGeom prst="rect">
           <a:avLst/>
@@ -8906,12 +9398,12 @@
         </a:fontRef>
       </dsp:style>
       <dsp:txBody>
-        <a:bodyPr spcFirstLastPara="0" vert="horz" wrap="square" lIns="5715" tIns="5715" rIns="5715" bIns="5715" numCol="1" spcCol="1270" anchor="ctr" anchorCtr="0">
+        <a:bodyPr spcFirstLastPara="0" vert="horz" wrap="square" lIns="5080" tIns="5080" rIns="5080" bIns="5080" numCol="1" spcCol="1270" anchor="ctr" anchorCtr="0">
           <a:noAutofit/>
         </a:bodyPr>
         <a:lstStyle/>
         <a:p>
-          <a:pPr marL="0" lvl="0" indent="0" algn="ctr" defTabSz="400050">
+          <a:pPr marL="0" lvl="0" indent="0" algn="ctr" defTabSz="355600">
             <a:lnSpc>
               <a:spcPct val="90000"/>
             </a:lnSpc>
@@ -8924,25 +9416,98 @@
             <a:buNone/>
           </a:pPr>
           <a:r>
-            <a:rPr lang="en-US" sz="900" kern="1200" dirty="0"/>
-            <a:t>Restoration</a:t>
+            <a:rPr lang="en-US" sz="800" kern="1200" dirty="0"/>
+            <a:t>Under 12</a:t>
           </a:r>
         </a:p>
       </dsp:txBody>
       <dsp:txXfrm>
-        <a:off x="4074944" y="5616849"/>
-        <a:ext cx="1003959" cy="306207"/>
+        <a:off x="6951490" y="3678529"/>
+        <a:ext cx="899857" cy="274456"/>
       </dsp:txXfrm>
     </dsp:sp>
-    <dsp:sp modelId="{490BDFA8-D452-4BE4-9F81-245774E0D158}">
+    <dsp:sp modelId="{CF184D97-6870-475F-82DD-C951C974B444}">
       <dsp:nvSpPr>
         <dsp:cNvPr id="0" name=""/>
         <dsp:cNvSpPr/>
       </dsp:nvSpPr>
       <dsp:spPr>
         <a:xfrm>
-          <a:off x="5279695" y="5400998"/>
-          <a:ext cx="1003959" cy="306207"/>
+          <a:off x="8031319" y="3678529"/>
+          <a:ext cx="899857" cy="274456"/>
+        </a:xfrm>
+        <a:prstGeom prst="rect">
+          <a:avLst/>
+        </a:prstGeom>
+        <a:solidFill>
+          <a:srgbClr val="FFC000"/>
+        </a:solidFill>
+        <a:ln w="19050" cap="flat" cmpd="sng" algn="ctr">
+          <a:solidFill>
+            <a:schemeClr val="lt1">
+              <a:hueOff val="0"/>
+              <a:satOff val="0"/>
+              <a:lumOff val="0"/>
+              <a:alphaOff val="0"/>
+            </a:schemeClr>
+          </a:solidFill>
+          <a:prstDash val="solid"/>
+          <a:miter lim="800000"/>
+        </a:ln>
+        <a:effectLst/>
+      </dsp:spPr>
+      <dsp:style>
+        <a:lnRef idx="2">
+          <a:scrgbClr r="0" g="0" b="0"/>
+        </a:lnRef>
+        <a:fillRef idx="1">
+          <a:scrgbClr r="0" g="0" b="0"/>
+        </a:fillRef>
+        <a:effectRef idx="0">
+          <a:scrgbClr r="0" g="0" b="0"/>
+        </a:effectRef>
+        <a:fontRef idx="minor">
+          <a:schemeClr val="lt1"/>
+        </a:fontRef>
+      </dsp:style>
+      <dsp:txBody>
+        <a:bodyPr spcFirstLastPara="0" vert="horz" wrap="square" lIns="5080" tIns="5080" rIns="5080" bIns="5080" numCol="1" spcCol="1270" anchor="ctr" anchorCtr="0">
+          <a:noAutofit/>
+        </a:bodyPr>
+        <a:lstStyle/>
+        <a:p>
+          <a:pPr marL="0" lvl="0" indent="0" algn="ctr" defTabSz="355600">
+            <a:lnSpc>
+              <a:spcPct val="90000"/>
+            </a:lnSpc>
+            <a:spcBef>
+              <a:spcPct val="0"/>
+            </a:spcBef>
+            <a:spcAft>
+              <a:spcPct val="35000"/>
+            </a:spcAft>
+            <a:buNone/>
+          </a:pPr>
+          <a:r>
+            <a:rPr lang="en-US" sz="800" kern="1200" dirty="0"/>
+            <a:t>120 visitors/day</a:t>
+          </a:r>
+        </a:p>
+      </dsp:txBody>
+      <dsp:txXfrm>
+        <a:off x="8031319" y="3678529"/>
+        <a:ext cx="899857" cy="274456"/>
+      </dsp:txXfrm>
+    </dsp:sp>
+    <dsp:sp modelId="{FD314EC3-FAF3-42D4-B72F-81E23652E3D9}">
+      <dsp:nvSpPr>
+        <dsp:cNvPr id="0" name=""/>
+        <dsp:cNvSpPr/>
+      </dsp:nvSpPr>
+      <dsp:spPr>
+        <a:xfrm>
+          <a:off x="5871660" y="4065468"/>
+          <a:ext cx="899857" cy="274456"/>
         </a:xfrm>
         <a:prstGeom prst="rect">
           <a:avLst/>
@@ -8984,12 +9549,12 @@
         </a:fontRef>
       </dsp:style>
       <dsp:txBody>
-        <a:bodyPr spcFirstLastPara="0" vert="horz" wrap="square" lIns="5715" tIns="5715" rIns="5715" bIns="5715" numCol="1" spcCol="1270" anchor="ctr" anchorCtr="0">
+        <a:bodyPr spcFirstLastPara="0" vert="horz" wrap="square" lIns="5080" tIns="5080" rIns="5080" bIns="5080" numCol="1" spcCol="1270" anchor="ctr" anchorCtr="0">
           <a:noAutofit/>
         </a:bodyPr>
         <a:lstStyle/>
         <a:p>
-          <a:pPr marL="0" lvl="0" indent="0" algn="ctr" defTabSz="400050">
+          <a:pPr marL="0" lvl="0" indent="0" algn="ctr" defTabSz="355600">
             <a:lnSpc>
               <a:spcPct val="90000"/>
             </a:lnSpc>
@@ -9002,25 +9567,98 @@
             <a:buNone/>
           </a:pPr>
           <a:r>
-            <a:rPr lang="en-US" sz="900" kern="1200" dirty="0"/>
-            <a:t>Project #1</a:t>
+            <a:rPr lang="en-US" sz="800" kern="1200" dirty="0"/>
+            <a:t>Artist</a:t>
           </a:r>
         </a:p>
       </dsp:txBody>
       <dsp:txXfrm>
-        <a:off x="5279695" y="5400998"/>
-        <a:ext cx="1003959" cy="306207"/>
+        <a:off x="5871660" y="4065468"/>
+        <a:ext cx="899857" cy="274456"/>
       </dsp:txXfrm>
     </dsp:sp>
-    <dsp:sp modelId="{BEB5F23A-260D-4EA4-9C52-D29289AE19DF}">
+    <dsp:sp modelId="{2CFF43AD-E638-48CC-A1A6-213BB3000388}">
       <dsp:nvSpPr>
         <dsp:cNvPr id="0" name=""/>
         <dsp:cNvSpPr/>
       </dsp:nvSpPr>
       <dsp:spPr>
         <a:xfrm>
-          <a:off x="6484446" y="4969295"/>
-          <a:ext cx="1003959" cy="306207"/>
+          <a:off x="6951490" y="4065468"/>
+          <a:ext cx="899857" cy="274456"/>
+        </a:xfrm>
+        <a:prstGeom prst="rect">
+          <a:avLst/>
+        </a:prstGeom>
+        <a:solidFill>
+          <a:srgbClr val="FFC000"/>
+        </a:solidFill>
+        <a:ln w="19050" cap="flat" cmpd="sng" algn="ctr">
+          <a:solidFill>
+            <a:schemeClr val="lt1">
+              <a:hueOff val="0"/>
+              <a:satOff val="0"/>
+              <a:lumOff val="0"/>
+              <a:alphaOff val="0"/>
+            </a:schemeClr>
+          </a:solidFill>
+          <a:prstDash val="solid"/>
+          <a:miter lim="800000"/>
+        </a:ln>
+        <a:effectLst/>
+      </dsp:spPr>
+      <dsp:style>
+        <a:lnRef idx="2">
+          <a:scrgbClr r="0" g="0" b="0"/>
+        </a:lnRef>
+        <a:fillRef idx="1">
+          <a:scrgbClr r="0" g="0" b="0"/>
+        </a:fillRef>
+        <a:effectRef idx="0">
+          <a:scrgbClr r="0" g="0" b="0"/>
+        </a:effectRef>
+        <a:fontRef idx="minor">
+          <a:schemeClr val="lt1"/>
+        </a:fontRef>
+      </dsp:style>
+      <dsp:txBody>
+        <a:bodyPr spcFirstLastPara="0" vert="horz" wrap="square" lIns="5080" tIns="5080" rIns="5080" bIns="5080" numCol="1" spcCol="1270" anchor="ctr" anchorCtr="0">
+          <a:noAutofit/>
+        </a:bodyPr>
+        <a:lstStyle/>
+        <a:p>
+          <a:pPr marL="0" lvl="0" indent="0" algn="ctr" defTabSz="355600">
+            <a:lnSpc>
+              <a:spcPct val="90000"/>
+            </a:lnSpc>
+            <a:spcBef>
+              <a:spcPct val="0"/>
+            </a:spcBef>
+            <a:spcAft>
+              <a:spcPct val="35000"/>
+            </a:spcAft>
+            <a:buNone/>
+          </a:pPr>
+          <a:r>
+            <a:rPr lang="en-US" sz="800" kern="1200" dirty="0"/>
+            <a:t>Sound and Light Engineer</a:t>
+          </a:r>
+        </a:p>
+      </dsp:txBody>
+      <dsp:txXfrm>
+        <a:off x="6951490" y="4065468"/>
+        <a:ext cx="899857" cy="274456"/>
+      </dsp:txXfrm>
+    </dsp:sp>
+    <dsp:sp modelId="{B7E87C89-F2A3-40BE-A158-9348331D318D}">
+      <dsp:nvSpPr>
+        <dsp:cNvPr id="0" name=""/>
+        <dsp:cNvSpPr/>
+      </dsp:nvSpPr>
+      <dsp:spPr>
+        <a:xfrm>
+          <a:off x="5871660" y="4452406"/>
+          <a:ext cx="899857" cy="274456"/>
         </a:xfrm>
         <a:prstGeom prst="rect">
           <a:avLst/>
@@ -9062,12 +9700,12 @@
         </a:fontRef>
       </dsp:style>
       <dsp:txBody>
-        <a:bodyPr spcFirstLastPara="0" vert="horz" wrap="square" lIns="5715" tIns="5715" rIns="5715" bIns="5715" numCol="1" spcCol="1270" anchor="ctr" anchorCtr="0">
+        <a:bodyPr spcFirstLastPara="0" vert="horz" wrap="square" lIns="5080" tIns="5080" rIns="5080" bIns="5080" numCol="1" spcCol="1270" anchor="ctr" anchorCtr="0">
           <a:noAutofit/>
         </a:bodyPr>
         <a:lstStyle/>
         <a:p>
-          <a:pPr marL="0" lvl="0" indent="0" algn="ctr" defTabSz="400050">
+          <a:pPr marL="0" lvl="0" indent="0" algn="ctr" defTabSz="355600">
             <a:lnSpc>
               <a:spcPct val="90000"/>
             </a:lnSpc>
@@ -9080,25 +9718,98 @@
             <a:buNone/>
           </a:pPr>
           <a:r>
-            <a:rPr lang="en-US" sz="900" kern="1200" dirty="0"/>
-            <a:t>Loan</a:t>
+            <a:rPr lang="en-US" sz="800" kern="1200" dirty="0"/>
+            <a:t>Theme/Culture</a:t>
           </a:r>
         </a:p>
       </dsp:txBody>
       <dsp:txXfrm>
-        <a:off x="6484446" y="4969295"/>
-        <a:ext cx="1003959" cy="306207"/>
+        <a:off x="5871660" y="4452406"/>
+        <a:ext cx="899857" cy="274456"/>
       </dsp:txXfrm>
     </dsp:sp>
-    <dsp:sp modelId="{15470CCD-2DC4-4446-952E-0EA1F9168293}">
+    <dsp:sp modelId="{FD27C63C-53AB-4EF5-B065-A5CCC6683CBC}">
       <dsp:nvSpPr>
         <dsp:cNvPr id="0" name=""/>
         <dsp:cNvSpPr/>
       </dsp:nvSpPr>
       <dsp:spPr>
         <a:xfrm>
-          <a:off x="6484446" y="5400998"/>
-          <a:ext cx="1003959" cy="306207"/>
+          <a:off x="6951490" y="4452406"/>
+          <a:ext cx="899857" cy="274456"/>
+        </a:xfrm>
+        <a:prstGeom prst="rect">
+          <a:avLst/>
+        </a:prstGeom>
+        <a:solidFill>
+          <a:srgbClr val="FFC000"/>
+        </a:solidFill>
+        <a:ln w="19050" cap="flat" cmpd="sng" algn="ctr">
+          <a:solidFill>
+            <a:schemeClr val="lt1">
+              <a:hueOff val="0"/>
+              <a:satOff val="0"/>
+              <a:lumOff val="0"/>
+              <a:alphaOff val="0"/>
+            </a:schemeClr>
+          </a:solidFill>
+          <a:prstDash val="solid"/>
+          <a:miter lim="800000"/>
+        </a:ln>
+        <a:effectLst/>
+      </dsp:spPr>
+      <dsp:style>
+        <a:lnRef idx="2">
+          <a:scrgbClr r="0" g="0" b="0"/>
+        </a:lnRef>
+        <a:fillRef idx="1">
+          <a:scrgbClr r="0" g="0" b="0"/>
+        </a:fillRef>
+        <a:effectRef idx="0">
+          <a:scrgbClr r="0" g="0" b="0"/>
+        </a:effectRef>
+        <a:fontRef idx="minor">
+          <a:schemeClr val="lt1"/>
+        </a:fontRef>
+      </dsp:style>
+      <dsp:txBody>
+        <a:bodyPr spcFirstLastPara="0" vert="horz" wrap="square" lIns="5080" tIns="5080" rIns="5080" bIns="5080" numCol="1" spcCol="1270" anchor="ctr" anchorCtr="0">
+          <a:noAutofit/>
+        </a:bodyPr>
+        <a:lstStyle/>
+        <a:p>
+          <a:pPr marL="0" lvl="0" indent="0" algn="ctr" defTabSz="355600">
+            <a:lnSpc>
+              <a:spcPct val="90000"/>
+            </a:lnSpc>
+            <a:spcBef>
+              <a:spcPct val="0"/>
+            </a:spcBef>
+            <a:spcAft>
+              <a:spcPct val="35000"/>
+            </a:spcAft>
+            <a:buNone/>
+          </a:pPr>
+          <a:r>
+            <a:rPr lang="en-US" sz="800" kern="1200" dirty="0"/>
+            <a:t>Ancient Egypt</a:t>
+          </a:r>
+        </a:p>
+      </dsp:txBody>
+      <dsp:txXfrm>
+        <a:off x="6951490" y="4452406"/>
+        <a:ext cx="899857" cy="274456"/>
+      </dsp:txXfrm>
+    </dsp:sp>
+    <dsp:sp modelId="{77267FA6-0CDF-4F47-97BA-153747EF1791}">
+      <dsp:nvSpPr>
+        <dsp:cNvPr id="0" name=""/>
+        <dsp:cNvSpPr/>
+      </dsp:nvSpPr>
+      <dsp:spPr>
+        <a:xfrm>
+          <a:off x="5871660" y="4839345"/>
+          <a:ext cx="899857" cy="274456"/>
         </a:xfrm>
         <a:prstGeom prst="rect">
           <a:avLst/>
@@ -9140,12 +9851,12 @@
         </a:fontRef>
       </dsp:style>
       <dsp:txBody>
-        <a:bodyPr spcFirstLastPara="0" vert="horz" wrap="square" lIns="5715" tIns="5715" rIns="5715" bIns="5715" numCol="1" spcCol="1270" anchor="ctr" anchorCtr="0">
+        <a:bodyPr spcFirstLastPara="0" vert="horz" wrap="square" lIns="5080" tIns="5080" rIns="5080" bIns="5080" numCol="1" spcCol="1270" anchor="ctr" anchorCtr="0">
           <a:noAutofit/>
         </a:bodyPr>
         <a:lstStyle/>
         <a:p>
-          <a:pPr marL="0" lvl="0" indent="0" algn="ctr" defTabSz="400050">
+          <a:pPr marL="0" lvl="0" indent="0" algn="ctr" defTabSz="355600">
             <a:lnSpc>
               <a:spcPct val="90000"/>
             </a:lnSpc>
@@ -9158,171 +9869,25 @@
             <a:buNone/>
           </a:pPr>
           <a:r>
-            <a:rPr lang="en-US" sz="900" kern="1200" dirty="0"/>
-            <a:t>Collection/Artifacts</a:t>
+            <a:rPr lang="en-US" sz="800" kern="1200" dirty="0"/>
+            <a:t>Historical Period</a:t>
           </a:r>
         </a:p>
       </dsp:txBody>
       <dsp:txXfrm>
-        <a:off x="6484446" y="5400998"/>
-        <a:ext cx="1003959" cy="306207"/>
+        <a:off x="5871660" y="4839345"/>
+        <a:ext cx="899857" cy="274456"/>
       </dsp:txXfrm>
     </dsp:sp>
-    <dsp:sp modelId="{9921040E-A9AE-4E20-B3A7-1033725EAB32}">
+    <dsp:sp modelId="{3BF77DC6-A893-4A65-9C1E-D38F5E103AA5}">
       <dsp:nvSpPr>
         <dsp:cNvPr id="0" name=""/>
         <dsp:cNvSpPr/>
       </dsp:nvSpPr>
       <dsp:spPr>
         <a:xfrm>
-          <a:off x="7689197" y="5185146"/>
-          <a:ext cx="1003959" cy="306207"/>
-        </a:xfrm>
-        <a:prstGeom prst="rect">
-          <a:avLst/>
-        </a:prstGeom>
-        <a:solidFill>
-          <a:srgbClr val="FFC000"/>
-        </a:solidFill>
-        <a:ln w="19050" cap="flat" cmpd="sng" algn="ctr">
-          <a:solidFill>
-            <a:schemeClr val="lt1">
-              <a:hueOff val="0"/>
-              <a:satOff val="0"/>
-              <a:lumOff val="0"/>
-              <a:alphaOff val="0"/>
-            </a:schemeClr>
-          </a:solidFill>
-          <a:prstDash val="solid"/>
-          <a:miter lim="800000"/>
-        </a:ln>
-        <a:effectLst/>
-      </dsp:spPr>
-      <dsp:style>
-        <a:lnRef idx="2">
-          <a:scrgbClr r="0" g="0" b="0"/>
-        </a:lnRef>
-        <a:fillRef idx="1">
-          <a:scrgbClr r="0" g="0" b="0"/>
-        </a:fillRef>
-        <a:effectRef idx="0">
-          <a:scrgbClr r="0" g="0" b="0"/>
-        </a:effectRef>
-        <a:fontRef idx="minor">
-          <a:schemeClr val="lt1"/>
-        </a:fontRef>
-      </dsp:style>
-      <dsp:txBody>
-        <a:bodyPr spcFirstLastPara="0" vert="horz" wrap="square" lIns="5715" tIns="5715" rIns="5715" bIns="5715" numCol="1" spcCol="1270" anchor="ctr" anchorCtr="0">
-          <a:noAutofit/>
-        </a:bodyPr>
-        <a:lstStyle/>
-        <a:p>
-          <a:pPr marL="0" lvl="0" indent="0" algn="ctr" defTabSz="400050">
-            <a:lnSpc>
-              <a:spcPct val="90000"/>
-            </a:lnSpc>
-            <a:spcBef>
-              <a:spcPct val="0"/>
-            </a:spcBef>
-            <a:spcAft>
-              <a:spcPct val="35000"/>
-            </a:spcAft>
-            <a:buNone/>
-          </a:pPr>
-          <a:r>
-            <a:rPr lang="en-US" sz="900" kern="1200" dirty="0"/>
-            <a:t>Collection Id#1</a:t>
-          </a:r>
-        </a:p>
-      </dsp:txBody>
-      <dsp:txXfrm>
-        <a:off x="7689197" y="5185146"/>
-        <a:ext cx="1003959" cy="306207"/>
-      </dsp:txXfrm>
-    </dsp:sp>
-    <dsp:sp modelId="{4C50E7F0-CBE9-462F-A0E5-5FFE1AE84F4E}">
-      <dsp:nvSpPr>
-        <dsp:cNvPr id="0" name=""/>
-        <dsp:cNvSpPr/>
-      </dsp:nvSpPr>
-      <dsp:spPr>
-        <a:xfrm>
-          <a:off x="7689197" y="5616849"/>
-          <a:ext cx="1003959" cy="306207"/>
-        </a:xfrm>
-        <a:prstGeom prst="rect">
-          <a:avLst/>
-        </a:prstGeom>
-        <a:solidFill>
-          <a:srgbClr val="FFC000"/>
-        </a:solidFill>
-        <a:ln w="19050" cap="flat" cmpd="sng" algn="ctr">
-          <a:solidFill>
-            <a:schemeClr val="lt1">
-              <a:hueOff val="0"/>
-              <a:satOff val="0"/>
-              <a:lumOff val="0"/>
-              <a:alphaOff val="0"/>
-            </a:schemeClr>
-          </a:solidFill>
-          <a:prstDash val="solid"/>
-          <a:miter lim="800000"/>
-        </a:ln>
-        <a:effectLst/>
-      </dsp:spPr>
-      <dsp:style>
-        <a:lnRef idx="2">
-          <a:scrgbClr r="0" g="0" b="0"/>
-        </a:lnRef>
-        <a:fillRef idx="1">
-          <a:scrgbClr r="0" g="0" b="0"/>
-        </a:fillRef>
-        <a:effectRef idx="0">
-          <a:scrgbClr r="0" g="0" b="0"/>
-        </a:effectRef>
-        <a:fontRef idx="minor">
-          <a:schemeClr val="lt1"/>
-        </a:fontRef>
-      </dsp:style>
-      <dsp:txBody>
-        <a:bodyPr spcFirstLastPara="0" vert="horz" wrap="square" lIns="5715" tIns="5715" rIns="5715" bIns="5715" numCol="1" spcCol="1270" anchor="ctr" anchorCtr="0">
-          <a:noAutofit/>
-        </a:bodyPr>
-        <a:lstStyle/>
-        <a:p>
-          <a:pPr marL="0" lvl="0" indent="0" algn="ctr" defTabSz="400050">
-            <a:lnSpc>
-              <a:spcPct val="90000"/>
-            </a:lnSpc>
-            <a:spcBef>
-              <a:spcPct val="0"/>
-            </a:spcBef>
-            <a:spcAft>
-              <a:spcPct val="35000"/>
-            </a:spcAft>
-            <a:buNone/>
-          </a:pPr>
-          <a:r>
-            <a:rPr lang="en-US" sz="900" kern="1200" dirty="0"/>
-            <a:t>Artifact #1</a:t>
-          </a:r>
-        </a:p>
-      </dsp:txBody>
-      <dsp:txXfrm>
-        <a:off x="7689197" y="5616849"/>
-        <a:ext cx="1003959" cy="306207"/>
-      </dsp:txXfrm>
-    </dsp:sp>
-    <dsp:sp modelId="{E142E4F7-A4D2-449F-AA7F-C04C088A3C1F}">
-      <dsp:nvSpPr>
-        <dsp:cNvPr id="0" name=""/>
-        <dsp:cNvSpPr/>
-      </dsp:nvSpPr>
-      <dsp:spPr>
-        <a:xfrm>
-          <a:off x="6484446" y="5832700"/>
-          <a:ext cx="1003959" cy="306207"/>
+          <a:off x="4791831" y="4355672"/>
+          <a:ext cx="899857" cy="274456"/>
         </a:xfrm>
         <a:prstGeom prst="rect">
           <a:avLst/>
@@ -9364,12 +9929,12 @@
         </a:fontRef>
       </dsp:style>
       <dsp:txBody>
-        <a:bodyPr spcFirstLastPara="0" vert="horz" wrap="square" lIns="5715" tIns="5715" rIns="5715" bIns="5715" numCol="1" spcCol="1270" anchor="ctr" anchorCtr="0">
+        <a:bodyPr spcFirstLastPara="0" vert="horz" wrap="square" lIns="5080" tIns="5080" rIns="5080" bIns="5080" numCol="1" spcCol="1270" anchor="ctr" anchorCtr="0">
           <a:noAutofit/>
         </a:bodyPr>
         <a:lstStyle/>
         <a:p>
-          <a:pPr marL="0" lvl="0" indent="0" algn="ctr" defTabSz="400050">
+          <a:pPr marL="0" lvl="0" indent="0" algn="ctr" defTabSz="355600">
             <a:lnSpc>
               <a:spcPct val="90000"/>
             </a:lnSpc>
@@ -9382,25 +9947,25 @@
             <a:buNone/>
           </a:pPr>
           <a:r>
-            <a:rPr lang="en-US" sz="900" kern="1200" dirty="0"/>
-            <a:t>Responsible / Team</a:t>
+            <a:rPr lang="en-US" sz="800" kern="1200" dirty="0"/>
+            <a:t>Exhibition Id#2</a:t>
           </a:r>
         </a:p>
       </dsp:txBody>
       <dsp:txXfrm>
-        <a:off x="6484446" y="5832700"/>
-        <a:ext cx="1003959" cy="306207"/>
+        <a:off x="4791831" y="4355672"/>
+        <a:ext cx="899857" cy="274456"/>
       </dsp:txXfrm>
     </dsp:sp>
-    <dsp:sp modelId="{E4AFD26B-C7BB-41CA-A59C-D4C3576380A8}">
+    <dsp:sp modelId="{F727FD69-DA36-400A-9A17-E435D30B6294}">
       <dsp:nvSpPr>
         <dsp:cNvPr id="0" name=""/>
         <dsp:cNvSpPr/>
       </dsp:nvSpPr>
       <dsp:spPr>
         <a:xfrm>
-          <a:off x="5279695" y="5832700"/>
-          <a:ext cx="1003959" cy="306207"/>
+          <a:off x="3712001" y="5806693"/>
+          <a:ext cx="899857" cy="274456"/>
         </a:xfrm>
         <a:prstGeom prst="rect">
           <a:avLst/>
@@ -9442,12 +10007,12 @@
         </a:fontRef>
       </dsp:style>
       <dsp:txBody>
-        <a:bodyPr spcFirstLastPara="0" vert="horz" wrap="square" lIns="5715" tIns="5715" rIns="5715" bIns="5715" numCol="1" spcCol="1270" anchor="ctr" anchorCtr="0">
+        <a:bodyPr spcFirstLastPara="0" vert="horz" wrap="square" lIns="5080" tIns="5080" rIns="5080" bIns="5080" numCol="1" spcCol="1270" anchor="ctr" anchorCtr="0">
           <a:noAutofit/>
         </a:bodyPr>
         <a:lstStyle/>
         <a:p>
-          <a:pPr marL="0" lvl="0" indent="0" algn="ctr" defTabSz="400050">
+          <a:pPr marL="0" lvl="0" indent="0" algn="ctr" defTabSz="355600">
             <a:lnSpc>
               <a:spcPct val="90000"/>
             </a:lnSpc>
@@ -9460,14 +10025,550 @@
             <a:buNone/>
           </a:pPr>
           <a:r>
-            <a:rPr lang="en-US" sz="900" kern="1200" dirty="0"/>
+            <a:rPr lang="en-US" sz="800" kern="1200" dirty="0"/>
+            <a:t>Restoration</a:t>
+          </a:r>
+        </a:p>
+      </dsp:txBody>
+      <dsp:txXfrm>
+        <a:off x="3712001" y="5806693"/>
+        <a:ext cx="899857" cy="274456"/>
+      </dsp:txXfrm>
+    </dsp:sp>
+    <dsp:sp modelId="{490BDFA8-D452-4BE4-9F81-245774E0D158}">
+      <dsp:nvSpPr>
+        <dsp:cNvPr id="0" name=""/>
+        <dsp:cNvSpPr/>
+      </dsp:nvSpPr>
+      <dsp:spPr>
+        <a:xfrm>
+          <a:off x="4791831" y="5613223"/>
+          <a:ext cx="899857" cy="274456"/>
+        </a:xfrm>
+        <a:prstGeom prst="rect">
+          <a:avLst/>
+        </a:prstGeom>
+        <a:solidFill>
+          <a:schemeClr val="accent1">
+            <a:hueOff val="0"/>
+            <a:satOff val="0"/>
+            <a:lumOff val="0"/>
+            <a:alphaOff val="0"/>
+          </a:schemeClr>
+        </a:solidFill>
+        <a:ln w="19050" cap="flat" cmpd="sng" algn="ctr">
+          <a:solidFill>
+            <a:schemeClr val="lt1">
+              <a:hueOff val="0"/>
+              <a:satOff val="0"/>
+              <a:lumOff val="0"/>
+              <a:alphaOff val="0"/>
+            </a:schemeClr>
+          </a:solidFill>
+          <a:prstDash val="solid"/>
+          <a:miter lim="800000"/>
+        </a:ln>
+        <a:effectLst/>
+      </dsp:spPr>
+      <dsp:style>
+        <a:lnRef idx="2">
+          <a:scrgbClr r="0" g="0" b="0"/>
+        </a:lnRef>
+        <a:fillRef idx="1">
+          <a:scrgbClr r="0" g="0" b="0"/>
+        </a:fillRef>
+        <a:effectRef idx="0">
+          <a:scrgbClr r="0" g="0" b="0"/>
+        </a:effectRef>
+        <a:fontRef idx="minor">
+          <a:schemeClr val="lt1"/>
+        </a:fontRef>
+      </dsp:style>
+      <dsp:txBody>
+        <a:bodyPr spcFirstLastPara="0" vert="horz" wrap="square" lIns="5080" tIns="5080" rIns="5080" bIns="5080" numCol="1" spcCol="1270" anchor="ctr" anchorCtr="0">
+          <a:noAutofit/>
+        </a:bodyPr>
+        <a:lstStyle/>
+        <a:p>
+          <a:pPr marL="0" lvl="0" indent="0" algn="ctr" defTabSz="355600">
+            <a:lnSpc>
+              <a:spcPct val="90000"/>
+            </a:lnSpc>
+            <a:spcBef>
+              <a:spcPct val="0"/>
+            </a:spcBef>
+            <a:spcAft>
+              <a:spcPct val="35000"/>
+            </a:spcAft>
+            <a:buNone/>
+          </a:pPr>
+          <a:r>
+            <a:rPr lang="en-US" sz="800" kern="1200" dirty="0"/>
+            <a:t>Project #1</a:t>
+          </a:r>
+        </a:p>
+      </dsp:txBody>
+      <dsp:txXfrm>
+        <a:off x="4791831" y="5613223"/>
+        <a:ext cx="899857" cy="274456"/>
+      </dsp:txXfrm>
+    </dsp:sp>
+    <dsp:sp modelId="{BEB5F23A-260D-4EA4-9C52-D29289AE19DF}">
+      <dsp:nvSpPr>
+        <dsp:cNvPr id="0" name=""/>
+        <dsp:cNvSpPr/>
+      </dsp:nvSpPr>
+      <dsp:spPr>
+        <a:xfrm>
+          <a:off x="5871660" y="5226284"/>
+          <a:ext cx="899857" cy="274456"/>
+        </a:xfrm>
+        <a:prstGeom prst="rect">
+          <a:avLst/>
+        </a:prstGeom>
+        <a:solidFill>
+          <a:schemeClr val="accent1">
+            <a:hueOff val="0"/>
+            <a:satOff val="0"/>
+            <a:lumOff val="0"/>
+            <a:alphaOff val="0"/>
+          </a:schemeClr>
+        </a:solidFill>
+        <a:ln w="19050" cap="flat" cmpd="sng" algn="ctr">
+          <a:solidFill>
+            <a:schemeClr val="lt1">
+              <a:hueOff val="0"/>
+              <a:satOff val="0"/>
+              <a:lumOff val="0"/>
+              <a:alphaOff val="0"/>
+            </a:schemeClr>
+          </a:solidFill>
+          <a:prstDash val="solid"/>
+          <a:miter lim="800000"/>
+        </a:ln>
+        <a:effectLst/>
+      </dsp:spPr>
+      <dsp:style>
+        <a:lnRef idx="2">
+          <a:scrgbClr r="0" g="0" b="0"/>
+        </a:lnRef>
+        <a:fillRef idx="1">
+          <a:scrgbClr r="0" g="0" b="0"/>
+        </a:fillRef>
+        <a:effectRef idx="0">
+          <a:scrgbClr r="0" g="0" b="0"/>
+        </a:effectRef>
+        <a:fontRef idx="minor">
+          <a:schemeClr val="lt1"/>
+        </a:fontRef>
+      </dsp:style>
+      <dsp:txBody>
+        <a:bodyPr spcFirstLastPara="0" vert="horz" wrap="square" lIns="5080" tIns="5080" rIns="5080" bIns="5080" numCol="1" spcCol="1270" anchor="ctr" anchorCtr="0">
+          <a:noAutofit/>
+        </a:bodyPr>
+        <a:lstStyle/>
+        <a:p>
+          <a:pPr marL="0" lvl="0" indent="0" algn="ctr" defTabSz="355600">
+            <a:lnSpc>
+              <a:spcPct val="90000"/>
+            </a:lnSpc>
+            <a:spcBef>
+              <a:spcPct val="0"/>
+            </a:spcBef>
+            <a:spcAft>
+              <a:spcPct val="35000"/>
+            </a:spcAft>
+            <a:buNone/>
+          </a:pPr>
+          <a:r>
+            <a:rPr lang="en-US" sz="800" kern="1200" dirty="0"/>
+            <a:t>Loan</a:t>
+          </a:r>
+        </a:p>
+      </dsp:txBody>
+      <dsp:txXfrm>
+        <a:off x="5871660" y="5226284"/>
+        <a:ext cx="899857" cy="274456"/>
+      </dsp:txXfrm>
+    </dsp:sp>
+    <dsp:sp modelId="{15470CCD-2DC4-4446-952E-0EA1F9168293}">
+      <dsp:nvSpPr>
+        <dsp:cNvPr id="0" name=""/>
+        <dsp:cNvSpPr/>
+      </dsp:nvSpPr>
+      <dsp:spPr>
+        <a:xfrm>
+          <a:off x="5871660" y="5613223"/>
+          <a:ext cx="899857" cy="274456"/>
+        </a:xfrm>
+        <a:prstGeom prst="rect">
+          <a:avLst/>
+        </a:prstGeom>
+        <a:solidFill>
+          <a:schemeClr val="accent1">
+            <a:hueOff val="0"/>
+            <a:satOff val="0"/>
+            <a:lumOff val="0"/>
+            <a:alphaOff val="0"/>
+          </a:schemeClr>
+        </a:solidFill>
+        <a:ln w="19050" cap="flat" cmpd="sng" algn="ctr">
+          <a:solidFill>
+            <a:schemeClr val="lt1">
+              <a:hueOff val="0"/>
+              <a:satOff val="0"/>
+              <a:lumOff val="0"/>
+              <a:alphaOff val="0"/>
+            </a:schemeClr>
+          </a:solidFill>
+          <a:prstDash val="solid"/>
+          <a:miter lim="800000"/>
+        </a:ln>
+        <a:effectLst/>
+      </dsp:spPr>
+      <dsp:style>
+        <a:lnRef idx="2">
+          <a:scrgbClr r="0" g="0" b="0"/>
+        </a:lnRef>
+        <a:fillRef idx="1">
+          <a:scrgbClr r="0" g="0" b="0"/>
+        </a:fillRef>
+        <a:effectRef idx="0">
+          <a:scrgbClr r="0" g="0" b="0"/>
+        </a:effectRef>
+        <a:fontRef idx="minor">
+          <a:schemeClr val="lt1"/>
+        </a:fontRef>
+      </dsp:style>
+      <dsp:txBody>
+        <a:bodyPr spcFirstLastPara="0" vert="horz" wrap="square" lIns="5080" tIns="5080" rIns="5080" bIns="5080" numCol="1" spcCol="1270" anchor="ctr" anchorCtr="0">
+          <a:noAutofit/>
+        </a:bodyPr>
+        <a:lstStyle/>
+        <a:p>
+          <a:pPr marL="0" lvl="0" indent="0" algn="ctr" defTabSz="355600">
+            <a:lnSpc>
+              <a:spcPct val="90000"/>
+            </a:lnSpc>
+            <a:spcBef>
+              <a:spcPct val="0"/>
+            </a:spcBef>
+            <a:spcAft>
+              <a:spcPct val="35000"/>
+            </a:spcAft>
+            <a:buNone/>
+          </a:pPr>
+          <a:r>
+            <a:rPr lang="en-US" sz="800" kern="1200" dirty="0"/>
+            <a:t>Collection/Artifacts</a:t>
+          </a:r>
+        </a:p>
+      </dsp:txBody>
+      <dsp:txXfrm>
+        <a:off x="5871660" y="5613223"/>
+        <a:ext cx="899857" cy="274456"/>
+      </dsp:txXfrm>
+    </dsp:sp>
+    <dsp:sp modelId="{9921040E-A9AE-4E20-B3A7-1033725EAB32}">
+      <dsp:nvSpPr>
+        <dsp:cNvPr id="0" name=""/>
+        <dsp:cNvSpPr/>
+      </dsp:nvSpPr>
+      <dsp:spPr>
+        <a:xfrm>
+          <a:off x="6951490" y="5419754"/>
+          <a:ext cx="899857" cy="274456"/>
+        </a:xfrm>
+        <a:prstGeom prst="rect">
+          <a:avLst/>
+        </a:prstGeom>
+        <a:solidFill>
+          <a:srgbClr val="FFC000"/>
+        </a:solidFill>
+        <a:ln w="19050" cap="flat" cmpd="sng" algn="ctr">
+          <a:solidFill>
+            <a:schemeClr val="lt1">
+              <a:hueOff val="0"/>
+              <a:satOff val="0"/>
+              <a:lumOff val="0"/>
+              <a:alphaOff val="0"/>
+            </a:schemeClr>
+          </a:solidFill>
+          <a:prstDash val="solid"/>
+          <a:miter lim="800000"/>
+        </a:ln>
+        <a:effectLst/>
+      </dsp:spPr>
+      <dsp:style>
+        <a:lnRef idx="2">
+          <a:scrgbClr r="0" g="0" b="0"/>
+        </a:lnRef>
+        <a:fillRef idx="1">
+          <a:scrgbClr r="0" g="0" b="0"/>
+        </a:fillRef>
+        <a:effectRef idx="0">
+          <a:scrgbClr r="0" g="0" b="0"/>
+        </a:effectRef>
+        <a:fontRef idx="minor">
+          <a:schemeClr val="lt1"/>
+        </a:fontRef>
+      </dsp:style>
+      <dsp:txBody>
+        <a:bodyPr spcFirstLastPara="0" vert="horz" wrap="square" lIns="5080" tIns="5080" rIns="5080" bIns="5080" numCol="1" spcCol="1270" anchor="ctr" anchorCtr="0">
+          <a:noAutofit/>
+        </a:bodyPr>
+        <a:lstStyle/>
+        <a:p>
+          <a:pPr marL="0" lvl="0" indent="0" algn="ctr" defTabSz="355600">
+            <a:lnSpc>
+              <a:spcPct val="90000"/>
+            </a:lnSpc>
+            <a:spcBef>
+              <a:spcPct val="0"/>
+            </a:spcBef>
+            <a:spcAft>
+              <a:spcPct val="35000"/>
+            </a:spcAft>
+            <a:buNone/>
+          </a:pPr>
+          <a:r>
+            <a:rPr lang="en-US" sz="800" kern="1200" dirty="0"/>
+            <a:t>Collection Id#1</a:t>
+          </a:r>
+        </a:p>
+      </dsp:txBody>
+      <dsp:txXfrm>
+        <a:off x="6951490" y="5419754"/>
+        <a:ext cx="899857" cy="274456"/>
+      </dsp:txXfrm>
+    </dsp:sp>
+    <dsp:sp modelId="{4C50E7F0-CBE9-462F-A0E5-5FFE1AE84F4E}">
+      <dsp:nvSpPr>
+        <dsp:cNvPr id="0" name=""/>
+        <dsp:cNvSpPr/>
+      </dsp:nvSpPr>
+      <dsp:spPr>
+        <a:xfrm>
+          <a:off x="6951490" y="5806693"/>
+          <a:ext cx="899857" cy="274456"/>
+        </a:xfrm>
+        <a:prstGeom prst="rect">
+          <a:avLst/>
+        </a:prstGeom>
+        <a:solidFill>
+          <a:srgbClr val="FFC000"/>
+        </a:solidFill>
+        <a:ln w="19050" cap="flat" cmpd="sng" algn="ctr">
+          <a:solidFill>
+            <a:schemeClr val="lt1">
+              <a:hueOff val="0"/>
+              <a:satOff val="0"/>
+              <a:lumOff val="0"/>
+              <a:alphaOff val="0"/>
+            </a:schemeClr>
+          </a:solidFill>
+          <a:prstDash val="solid"/>
+          <a:miter lim="800000"/>
+        </a:ln>
+        <a:effectLst/>
+      </dsp:spPr>
+      <dsp:style>
+        <a:lnRef idx="2">
+          <a:scrgbClr r="0" g="0" b="0"/>
+        </a:lnRef>
+        <a:fillRef idx="1">
+          <a:scrgbClr r="0" g="0" b="0"/>
+        </a:fillRef>
+        <a:effectRef idx="0">
+          <a:scrgbClr r="0" g="0" b="0"/>
+        </a:effectRef>
+        <a:fontRef idx="minor">
+          <a:schemeClr val="lt1"/>
+        </a:fontRef>
+      </dsp:style>
+      <dsp:txBody>
+        <a:bodyPr spcFirstLastPara="0" vert="horz" wrap="square" lIns="5080" tIns="5080" rIns="5080" bIns="5080" numCol="1" spcCol="1270" anchor="ctr" anchorCtr="0">
+          <a:noAutofit/>
+        </a:bodyPr>
+        <a:lstStyle/>
+        <a:p>
+          <a:pPr marL="0" lvl="0" indent="0" algn="ctr" defTabSz="355600">
+            <a:lnSpc>
+              <a:spcPct val="90000"/>
+            </a:lnSpc>
+            <a:spcBef>
+              <a:spcPct val="0"/>
+            </a:spcBef>
+            <a:spcAft>
+              <a:spcPct val="35000"/>
+            </a:spcAft>
+            <a:buNone/>
+          </a:pPr>
+          <a:r>
+            <a:rPr lang="en-US" sz="800" kern="1200" dirty="0"/>
+            <a:t>Artifact #1</a:t>
+          </a:r>
+        </a:p>
+      </dsp:txBody>
+      <dsp:txXfrm>
+        <a:off x="6951490" y="5806693"/>
+        <a:ext cx="899857" cy="274456"/>
+      </dsp:txXfrm>
+    </dsp:sp>
+    <dsp:sp modelId="{E142E4F7-A4D2-449F-AA7F-C04C088A3C1F}">
+      <dsp:nvSpPr>
+        <dsp:cNvPr id="0" name=""/>
+        <dsp:cNvSpPr/>
+      </dsp:nvSpPr>
+      <dsp:spPr>
+        <a:xfrm>
+          <a:off x="5871660" y="6000162"/>
+          <a:ext cx="899857" cy="274456"/>
+        </a:xfrm>
+        <a:prstGeom prst="rect">
+          <a:avLst/>
+        </a:prstGeom>
+        <a:solidFill>
+          <a:schemeClr val="accent1">
+            <a:hueOff val="0"/>
+            <a:satOff val="0"/>
+            <a:lumOff val="0"/>
+            <a:alphaOff val="0"/>
+          </a:schemeClr>
+        </a:solidFill>
+        <a:ln w="19050" cap="flat" cmpd="sng" algn="ctr">
+          <a:solidFill>
+            <a:schemeClr val="lt1">
+              <a:hueOff val="0"/>
+              <a:satOff val="0"/>
+              <a:lumOff val="0"/>
+              <a:alphaOff val="0"/>
+            </a:schemeClr>
+          </a:solidFill>
+          <a:prstDash val="solid"/>
+          <a:miter lim="800000"/>
+        </a:ln>
+        <a:effectLst/>
+      </dsp:spPr>
+      <dsp:style>
+        <a:lnRef idx="2">
+          <a:scrgbClr r="0" g="0" b="0"/>
+        </a:lnRef>
+        <a:fillRef idx="1">
+          <a:scrgbClr r="0" g="0" b="0"/>
+        </a:fillRef>
+        <a:effectRef idx="0">
+          <a:scrgbClr r="0" g="0" b="0"/>
+        </a:effectRef>
+        <a:fontRef idx="minor">
+          <a:schemeClr val="lt1"/>
+        </a:fontRef>
+      </dsp:style>
+      <dsp:txBody>
+        <a:bodyPr spcFirstLastPara="0" vert="horz" wrap="square" lIns="5080" tIns="5080" rIns="5080" bIns="5080" numCol="1" spcCol="1270" anchor="ctr" anchorCtr="0">
+          <a:noAutofit/>
+        </a:bodyPr>
+        <a:lstStyle/>
+        <a:p>
+          <a:pPr marL="0" lvl="0" indent="0" algn="ctr" defTabSz="355600">
+            <a:lnSpc>
+              <a:spcPct val="90000"/>
+            </a:lnSpc>
+            <a:spcBef>
+              <a:spcPct val="0"/>
+            </a:spcBef>
+            <a:spcAft>
+              <a:spcPct val="35000"/>
+            </a:spcAft>
+            <a:buNone/>
+          </a:pPr>
+          <a:r>
+            <a:rPr lang="en-US" sz="800" kern="1200" dirty="0"/>
+            <a:t>Responsible / Team</a:t>
+          </a:r>
+        </a:p>
+      </dsp:txBody>
+      <dsp:txXfrm>
+        <a:off x="5871660" y="6000162"/>
+        <a:ext cx="899857" cy="274456"/>
+      </dsp:txXfrm>
+    </dsp:sp>
+    <dsp:sp modelId="{E4AFD26B-C7BB-41CA-A59C-D4C3576380A8}">
+      <dsp:nvSpPr>
+        <dsp:cNvPr id="0" name=""/>
+        <dsp:cNvSpPr/>
+      </dsp:nvSpPr>
+      <dsp:spPr>
+        <a:xfrm>
+          <a:off x="4791831" y="6000162"/>
+          <a:ext cx="899857" cy="274456"/>
+        </a:xfrm>
+        <a:prstGeom prst="rect">
+          <a:avLst/>
+        </a:prstGeom>
+        <a:solidFill>
+          <a:schemeClr val="accent1">
+            <a:hueOff val="0"/>
+            <a:satOff val="0"/>
+            <a:lumOff val="0"/>
+            <a:alphaOff val="0"/>
+          </a:schemeClr>
+        </a:solidFill>
+        <a:ln w="19050" cap="flat" cmpd="sng" algn="ctr">
+          <a:solidFill>
+            <a:schemeClr val="lt1">
+              <a:hueOff val="0"/>
+              <a:satOff val="0"/>
+              <a:lumOff val="0"/>
+              <a:alphaOff val="0"/>
+            </a:schemeClr>
+          </a:solidFill>
+          <a:prstDash val="solid"/>
+          <a:miter lim="800000"/>
+        </a:ln>
+        <a:effectLst/>
+      </dsp:spPr>
+      <dsp:style>
+        <a:lnRef idx="2">
+          <a:scrgbClr r="0" g="0" b="0"/>
+        </a:lnRef>
+        <a:fillRef idx="1">
+          <a:scrgbClr r="0" g="0" b="0"/>
+        </a:fillRef>
+        <a:effectRef idx="0">
+          <a:scrgbClr r="0" g="0" b="0"/>
+        </a:effectRef>
+        <a:fontRef idx="minor">
+          <a:schemeClr val="lt1"/>
+        </a:fontRef>
+      </dsp:style>
+      <dsp:txBody>
+        <a:bodyPr spcFirstLastPara="0" vert="horz" wrap="square" lIns="5080" tIns="5080" rIns="5080" bIns="5080" numCol="1" spcCol="1270" anchor="ctr" anchorCtr="0">
+          <a:noAutofit/>
+        </a:bodyPr>
+        <a:lstStyle/>
+        <a:p>
+          <a:pPr marL="0" lvl="0" indent="0" algn="ctr" defTabSz="355600">
+            <a:lnSpc>
+              <a:spcPct val="90000"/>
+            </a:lnSpc>
+            <a:spcBef>
+              <a:spcPct val="0"/>
+            </a:spcBef>
+            <a:spcAft>
+              <a:spcPct val="35000"/>
+            </a:spcAft>
+            <a:buNone/>
+          </a:pPr>
+          <a:r>
+            <a:rPr lang="en-US" sz="800" kern="1200" dirty="0"/>
             <a:t>Project #2</a:t>
           </a:r>
         </a:p>
       </dsp:txBody>
       <dsp:txXfrm>
-        <a:off x="5279695" y="5832700"/>
-        <a:ext cx="1003959" cy="306207"/>
+        <a:off x="4791831" y="6000162"/>
+        <a:ext cx="899857" cy="274456"/>
       </dsp:txXfrm>
     </dsp:sp>
   </dsp:spTree>
@@ -11839,7 +12940,7 @@
           <a:p>
             <a:fld id="{EA69702F-6818-46E6-8DD7-EE5C5CC7738E}" type="datetimeFigureOut">
               <a:rPr lang="en-US" smtClean="0"/>
-              <a:t>6/27/2026</a:t>
+              <a:t>7/17/2026</a:t>
             </a:fld>
             <a:endParaRPr lang="en-US"/>
           </a:p>
@@ -12037,7 +13138,7 @@
           <a:p>
             <a:fld id="{EA69702F-6818-46E6-8DD7-EE5C5CC7738E}" type="datetimeFigureOut">
               <a:rPr lang="en-US" smtClean="0"/>
-              <a:t>6/27/2026</a:t>
+              <a:t>7/17/2026</a:t>
             </a:fld>
             <a:endParaRPr lang="en-US"/>
           </a:p>
@@ -12245,7 +13346,7 @@
           <a:p>
             <a:fld id="{EA69702F-6818-46E6-8DD7-EE5C5CC7738E}" type="datetimeFigureOut">
               <a:rPr lang="en-US" smtClean="0"/>
-              <a:t>6/27/2026</a:t>
+              <a:t>7/17/2026</a:t>
             </a:fld>
             <a:endParaRPr lang="en-US"/>
           </a:p>
@@ -12443,7 +13544,7 @@
           <a:p>
             <a:fld id="{EA69702F-6818-46E6-8DD7-EE5C5CC7738E}" type="datetimeFigureOut">
               <a:rPr lang="en-US" smtClean="0"/>
-              <a:t>6/27/2026</a:t>
+              <a:t>7/17/2026</a:t>
             </a:fld>
             <a:endParaRPr lang="en-US"/>
           </a:p>
@@ -12718,7 +13819,7 @@
           <a:p>
             <a:fld id="{EA69702F-6818-46E6-8DD7-EE5C5CC7738E}" type="datetimeFigureOut">
               <a:rPr lang="en-US" smtClean="0"/>
-              <a:t>6/27/2026</a:t>
+              <a:t>7/17/2026</a:t>
             </a:fld>
             <a:endParaRPr lang="en-US"/>
           </a:p>
@@ -12983,7 +14084,7 @@
           <a:p>
             <a:fld id="{EA69702F-6818-46E6-8DD7-EE5C5CC7738E}" type="datetimeFigureOut">
               <a:rPr lang="en-US" smtClean="0"/>
-              <a:t>6/27/2026</a:t>
+              <a:t>7/17/2026</a:t>
             </a:fld>
             <a:endParaRPr lang="en-US"/>
           </a:p>
@@ -13395,7 +14496,7 @@
           <a:p>
             <a:fld id="{EA69702F-6818-46E6-8DD7-EE5C5CC7738E}" type="datetimeFigureOut">
               <a:rPr lang="en-US" smtClean="0"/>
-              <a:t>6/27/2026</a:t>
+              <a:t>7/17/2026</a:t>
             </a:fld>
             <a:endParaRPr lang="en-US"/>
           </a:p>
@@ -13536,7 +14637,7 @@
           <a:p>
             <a:fld id="{EA69702F-6818-46E6-8DD7-EE5C5CC7738E}" type="datetimeFigureOut">
               <a:rPr lang="en-US" smtClean="0"/>
-              <a:t>6/27/2026</a:t>
+              <a:t>7/17/2026</a:t>
             </a:fld>
             <a:endParaRPr lang="en-US"/>
           </a:p>
@@ -13649,7 +14750,7 @@
           <a:p>
             <a:fld id="{EA69702F-6818-46E6-8DD7-EE5C5CC7738E}" type="datetimeFigureOut">
               <a:rPr lang="en-US" smtClean="0"/>
-              <a:t>6/27/2026</a:t>
+              <a:t>7/17/2026</a:t>
             </a:fld>
             <a:endParaRPr lang="en-US"/>
           </a:p>
@@ -13960,7 +15061,7 @@
           <a:p>
             <a:fld id="{EA69702F-6818-46E6-8DD7-EE5C5CC7738E}" type="datetimeFigureOut">
               <a:rPr lang="en-US" smtClean="0"/>
-              <a:t>6/27/2026</a:t>
+              <a:t>7/17/2026</a:t>
             </a:fld>
             <a:endParaRPr lang="en-US"/>
           </a:p>
@@ -14248,7 +15349,7 @@
           <a:p>
             <a:fld id="{EA69702F-6818-46E6-8DD7-EE5C5CC7738E}" type="datetimeFigureOut">
               <a:rPr lang="en-US" smtClean="0"/>
-              <a:t>6/27/2026</a:t>
+              <a:t>7/17/2026</a:t>
             </a:fld>
             <a:endParaRPr lang="en-US"/>
           </a:p>
@@ -14489,7 +15590,7 @@
           <a:p>
             <a:fld id="{EA69702F-6818-46E6-8DD7-EE5C5CC7738E}" type="datetimeFigureOut">
               <a:rPr lang="en-US" smtClean="0"/>
-              <a:t>6/27/2026</a:t>
+              <a:t>7/17/2026</a:t>
             </a:fld>
             <a:endParaRPr lang="en-US"/>
           </a:p>
@@ -14919,14 +16020,14 @@
           <p:nvPr>
             <p:extLst>
               <p:ext uri="{D42A27DB-BD31-4B8C-83A1-F6EECF244321}">
-                <p14:modId xmlns:p14="http://schemas.microsoft.com/office/powerpoint/2010/main" val="3776202343"/>
+                <p14:modId xmlns:p14="http://schemas.microsoft.com/office/powerpoint/2010/main" val="1639666339"/>
               </p:ext>
             </p:extLst>
           </p:nvPr>
         </p:nvGraphicFramePr>
         <p:xfrm>
-          <a:off x="304800" y="714374"/>
-          <a:ext cx="11563350" cy="6143626"/>
+          <a:off x="304800" y="580771"/>
+          <a:ext cx="11563350" cy="6277229"/>
         </p:xfrm>
         <a:graphic>
           <a:graphicData uri="http://schemas.openxmlformats.org/drawingml/2006/diagram">

--- a/Delivrables/Graph model.pptx
+++ b/Delivrables/Graph model.pptx
@@ -116,7 +116,7 @@
 </file>
 
 <file path=ppt/diagrams/colors1.xml><?xml version="1.0" encoding="utf-8"?>
-<dgm:colorsDef xmlns:dgm="http://schemas.openxmlformats.org/drawingml/2006/diagram" xmlns:a="http://schemas.openxmlformats.org/drawingml/2006/main" uniqueId="urn:microsoft.com/office/officeart/2005/8/colors/accent1_2">
+<dgm:colorsDef xmlns:dgm="http://schemas.openxmlformats.org/drawingml/2006/diagram" xmlns:a="http://schemas.openxmlformats.org/drawingml/2006/main" uniqueId="urn:microsoft.com/office/officeart/2005/8/colors/accent1_2#1">
   <dgm:title val=""/>
   <dgm:desc val=""/>
   <dgm:catLst>
@@ -866,7 +866,7 @@
 <dgm:dataModel xmlns:dgm="http://schemas.openxmlformats.org/drawingml/2006/diagram" xmlns:a="http://schemas.openxmlformats.org/drawingml/2006/main">
   <dgm:ptLst>
     <dgm:pt modelId="{D5809694-423C-4057-A791-AE12D92AEFEC}" type="doc">
-      <dgm:prSet loTypeId="urn:microsoft.com/office/officeart/2009/3/layout/HorizontalOrganizationChart" loCatId="hierarchy" qsTypeId="urn:microsoft.com/office/officeart/2005/8/quickstyle/simple1" qsCatId="simple" csTypeId="urn:microsoft.com/office/officeart/2005/8/colors/accent1_2" csCatId="accent1" phldr="1"/>
+      <dgm:prSet loTypeId="urn:microsoft.com/office/officeart/2009/3/layout/HorizontalOrganizationChart" loCatId="hierarchy" qsTypeId="urn:microsoft.com/office/officeart/2005/8/quickstyle/simple1#1" qsCatId="simple" csTypeId="urn:microsoft.com/office/officeart/2005/8/colors/accent1_2#1" csCatId="accent1" phldr="1"/>
       <dgm:spPr/>
       <dgm:t>
         <a:bodyPr/>
@@ -1226,42 +1226,6 @@
       </dgm:t>
     </dgm:pt>
     <dgm:pt modelId="{EA7DEC92-39F8-4663-8710-1BE6F53B5DCC}" type="sibTrans" cxnId="{751A140E-BD01-4228-9DD6-3DA5AD793CD2}">
-      <dgm:prSet/>
-      <dgm:spPr/>
-      <dgm:t>
-        <a:bodyPr/>
-        <a:lstStyle/>
-        <a:p>
-          <a:endParaRPr lang="en-US"/>
-        </a:p>
-      </dgm:t>
-    </dgm:pt>
-    <dgm:pt modelId="{503A382B-1D5A-4546-833B-2164E945BC79}">
-      <dgm:prSet phldrT="[Text]" phldr="0"/>
-      <dgm:spPr/>
-      <dgm:t>
-        <a:bodyPr/>
-        <a:lstStyle/>
-        <a:p>
-          <a:r>
-            <a:rPr lang="en-US" dirty="0"/>
-            <a:t>Collection</a:t>
-          </a:r>
-        </a:p>
-      </dgm:t>
-    </dgm:pt>
-    <dgm:pt modelId="{A3638297-C98E-49B2-935E-46CEF1892D42}" type="parTrans" cxnId="{423FA7FB-73E0-4BCD-A13F-A99D2D9F6154}">
-      <dgm:prSet/>
-      <dgm:spPr/>
-      <dgm:t>
-        <a:bodyPr/>
-        <a:lstStyle/>
-        <a:p>
-          <a:endParaRPr lang="en-US"/>
-        </a:p>
-      </dgm:t>
-    </dgm:pt>
-    <dgm:pt modelId="{1D474A4F-185C-4214-81CF-5568DF079C10}" type="sibTrans" cxnId="{423FA7FB-73E0-4BCD-A13F-A99D2D9F6154}">
       <dgm:prSet/>
       <dgm:spPr/>
       <dgm:t>
@@ -2032,46 +1996,6 @@
         </a:p>
       </dgm:t>
     </dgm:pt>
-    <dgm:pt modelId="{1BCF77AA-6B04-4D81-9D59-6F959F70F803}">
-      <dgm:prSet phldrT="[Text]" phldr="0"/>
-      <dgm:spPr>
-        <a:solidFill>
-          <a:srgbClr val="FFC000"/>
-        </a:solidFill>
-      </dgm:spPr>
-      <dgm:t>
-        <a:bodyPr/>
-        <a:lstStyle/>
-        <a:p>
-          <a:r>
-            <a:rPr lang="en-US" i="1" dirty="0"/>
-            <a:t>Optional…</a:t>
-          </a:r>
-        </a:p>
-      </dgm:t>
-    </dgm:pt>
-    <dgm:pt modelId="{95FA36E0-4680-4632-B27E-091BE020210A}" type="parTrans" cxnId="{1BC8F17B-2D29-4A0A-B853-6E01900B14BF}">
-      <dgm:prSet/>
-      <dgm:spPr/>
-      <dgm:t>
-        <a:bodyPr/>
-        <a:lstStyle/>
-        <a:p>
-          <a:endParaRPr lang="en-US"/>
-        </a:p>
-      </dgm:t>
-    </dgm:pt>
-    <dgm:pt modelId="{3B701667-5E66-46AB-BDA3-3F2779701BE7}" type="sibTrans" cxnId="{1BC8F17B-2D29-4A0A-B853-6E01900B14BF}">
-      <dgm:prSet/>
-      <dgm:spPr/>
-      <dgm:t>
-        <a:bodyPr/>
-        <a:lstStyle/>
-        <a:p>
-          <a:endParaRPr lang="en-US"/>
-        </a:p>
-      </dgm:t>
-    </dgm:pt>
     <dgm:pt modelId="{5AFEC8AD-8C3F-4724-85E3-77D8EA592781}">
       <dgm:prSet phldrT="[Text]" phldr="0"/>
       <dgm:spPr/>
@@ -3229,7 +3153,7 @@
       <dgm:spPr/>
     </dgm:pt>
     <dgm:pt modelId="{ECBCB50C-17E3-4E08-8F2D-57A84F25E402}" type="pres">
-      <dgm:prSet presAssocID="{0ACC1CDC-D329-4C80-97F4-AA1E9B6A19A6}" presName="Name64" presStyleLbl="parChTrans1D4" presStyleIdx="0" presStyleCnt="43"/>
+      <dgm:prSet presAssocID="{0ACC1CDC-D329-4C80-97F4-AA1E9B6A19A6}" presName="Name64" presStyleLbl="parChTrans1D4" presStyleIdx="0" presStyleCnt="41"/>
       <dgm:spPr/>
     </dgm:pt>
     <dgm:pt modelId="{560D9B1F-AA2D-4B3F-BD25-E4FE8EDD1AE0}" type="pres">
@@ -3245,7 +3169,7 @@
       <dgm:spPr/>
     </dgm:pt>
     <dgm:pt modelId="{7E24B55B-C21F-479D-AF16-BA5BFBEF12B2}" type="pres">
-      <dgm:prSet presAssocID="{768BDCFE-CD21-473E-826D-5BE41E521370}" presName="rootText" presStyleLbl="node4" presStyleIdx="0" presStyleCnt="43">
+      <dgm:prSet presAssocID="{768BDCFE-CD21-473E-826D-5BE41E521370}" presName="rootText" presStyleLbl="node4" presStyleIdx="0" presStyleCnt="41">
         <dgm:presLayoutVars>
           <dgm:chPref val="3"/>
         </dgm:presLayoutVars>
@@ -3253,7 +3177,7 @@
       <dgm:spPr/>
     </dgm:pt>
     <dgm:pt modelId="{4F292608-C5F5-4478-8FBB-148E0E496D72}" type="pres">
-      <dgm:prSet presAssocID="{768BDCFE-CD21-473E-826D-5BE41E521370}" presName="rootConnector" presStyleLbl="node4" presStyleIdx="0" presStyleCnt="43"/>
+      <dgm:prSet presAssocID="{768BDCFE-CD21-473E-826D-5BE41E521370}" presName="rootConnector" presStyleLbl="node4" presStyleIdx="0" presStyleCnt="41"/>
       <dgm:spPr/>
     </dgm:pt>
     <dgm:pt modelId="{700D2C43-562C-4CB3-A3B0-5862186F34D8}" type="pres">
@@ -3337,7 +3261,7 @@
       <dgm:spPr/>
     </dgm:pt>
     <dgm:pt modelId="{5613D8DC-8394-4EB2-BEC0-4978BB2F3DA3}" type="pres">
-      <dgm:prSet presAssocID="{471AAB30-6948-4AC5-A872-0315651955DF}" presName="Name64" presStyleLbl="parChTrans1D4" presStyleIdx="1" presStyleCnt="43"/>
+      <dgm:prSet presAssocID="{471AAB30-6948-4AC5-A872-0315651955DF}" presName="Name64" presStyleLbl="parChTrans1D4" presStyleIdx="1" presStyleCnt="41"/>
       <dgm:spPr/>
     </dgm:pt>
     <dgm:pt modelId="{7C7902C3-EFB0-42BE-83D6-3EEF998E34AB}" type="pres">
@@ -3353,7 +3277,7 @@
       <dgm:spPr/>
     </dgm:pt>
     <dgm:pt modelId="{8A071F50-0936-48EF-AE15-796B92F4F4A2}" type="pres">
-      <dgm:prSet presAssocID="{4F9DC5B4-E119-4273-B0C6-F44F279BA1CA}" presName="rootText" presStyleLbl="node4" presStyleIdx="1" presStyleCnt="43" custLinFactNeighborX="-36264">
+      <dgm:prSet presAssocID="{4F9DC5B4-E119-4273-B0C6-F44F279BA1CA}" presName="rootText" presStyleLbl="node4" presStyleIdx="1" presStyleCnt="41" custLinFactNeighborX="-36264">
         <dgm:presLayoutVars>
           <dgm:chPref val="3"/>
         </dgm:presLayoutVars>
@@ -3361,7 +3285,7 @@
       <dgm:spPr/>
     </dgm:pt>
     <dgm:pt modelId="{BC5242FB-9811-49A0-A754-F9DF7804FA27}" type="pres">
-      <dgm:prSet presAssocID="{4F9DC5B4-E119-4273-B0C6-F44F279BA1CA}" presName="rootConnector" presStyleLbl="node4" presStyleIdx="1" presStyleCnt="43"/>
+      <dgm:prSet presAssocID="{4F9DC5B4-E119-4273-B0C6-F44F279BA1CA}" presName="rootConnector" presStyleLbl="node4" presStyleIdx="1" presStyleCnt="41"/>
       <dgm:spPr/>
     </dgm:pt>
     <dgm:pt modelId="{EC9AFF7F-5A8E-4CDA-BB48-AD6FD5B8B872}" type="pres">
@@ -3481,7 +3405,7 @@
       <dgm:spPr/>
     </dgm:pt>
     <dgm:pt modelId="{E7F095C9-0EEA-49B6-905E-AC74937B597A}" type="pres">
-      <dgm:prSet presAssocID="{6C4DA155-8243-4072-B293-EC0CBA97AD7C}" presName="Name64" presStyleLbl="parChTrans1D4" presStyleIdx="2" presStyleCnt="43"/>
+      <dgm:prSet presAssocID="{6C4DA155-8243-4072-B293-EC0CBA97AD7C}" presName="Name64" presStyleLbl="parChTrans1D4" presStyleIdx="2" presStyleCnt="41"/>
       <dgm:spPr/>
     </dgm:pt>
     <dgm:pt modelId="{2E752132-E630-4632-9600-9B043BD9E414}" type="pres">
@@ -3497,7 +3421,7 @@
       <dgm:spPr/>
     </dgm:pt>
     <dgm:pt modelId="{171F98E8-7A93-4667-99EC-A67EE133F035}" type="pres">
-      <dgm:prSet presAssocID="{4ECE59B8-536D-4DBD-9298-39EEE1A4E2F2}" presName="rootText" presStyleLbl="node4" presStyleIdx="2" presStyleCnt="43" custLinFactNeighborX="-36264">
+      <dgm:prSet presAssocID="{4ECE59B8-536D-4DBD-9298-39EEE1A4E2F2}" presName="rootText" presStyleLbl="node4" presStyleIdx="2" presStyleCnt="41" custLinFactNeighborX="-36264">
         <dgm:presLayoutVars>
           <dgm:chPref val="3"/>
         </dgm:presLayoutVars>
@@ -3505,7 +3429,7 @@
       <dgm:spPr/>
     </dgm:pt>
     <dgm:pt modelId="{B4B0D416-48DF-4327-B6CB-95B60821634B}" type="pres">
-      <dgm:prSet presAssocID="{4ECE59B8-536D-4DBD-9298-39EEE1A4E2F2}" presName="rootConnector" presStyleLbl="node4" presStyleIdx="2" presStyleCnt="43"/>
+      <dgm:prSet presAssocID="{4ECE59B8-536D-4DBD-9298-39EEE1A4E2F2}" presName="rootConnector" presStyleLbl="node4" presStyleIdx="2" presStyleCnt="41"/>
       <dgm:spPr/>
     </dgm:pt>
     <dgm:pt modelId="{860F5D21-83EC-4D1B-83FE-010E6AAAD6E1}" type="pres">
@@ -3513,7 +3437,7 @@
       <dgm:spPr/>
     </dgm:pt>
     <dgm:pt modelId="{2086A9C7-9135-4192-911C-9FD307A3662E}" type="pres">
-      <dgm:prSet presAssocID="{454A2903-42E9-4AD4-B32C-56480B741CA4}" presName="Name64" presStyleLbl="parChTrans1D4" presStyleIdx="3" presStyleCnt="43"/>
+      <dgm:prSet presAssocID="{454A2903-42E9-4AD4-B32C-56480B741CA4}" presName="Name64" presStyleLbl="parChTrans1D4" presStyleIdx="3" presStyleCnt="41"/>
       <dgm:spPr/>
     </dgm:pt>
     <dgm:pt modelId="{68B35679-26B2-422F-8E58-AD1E0E71C97A}" type="pres">
@@ -3529,7 +3453,7 @@
       <dgm:spPr/>
     </dgm:pt>
     <dgm:pt modelId="{4F157AFE-1A3E-4945-AFFE-3FBFDF773F45}" type="pres">
-      <dgm:prSet presAssocID="{9AC9B081-25C5-4E83-B9FC-4EE1220C42CC}" presName="rootText" presStyleLbl="node4" presStyleIdx="3" presStyleCnt="43" custLinFactNeighborX="-36264">
+      <dgm:prSet presAssocID="{9AC9B081-25C5-4E83-B9FC-4EE1220C42CC}" presName="rootText" presStyleLbl="node4" presStyleIdx="3" presStyleCnt="41" custLinFactNeighborX="-36264">
         <dgm:presLayoutVars>
           <dgm:chPref val="3"/>
         </dgm:presLayoutVars>
@@ -3537,7 +3461,7 @@
       <dgm:spPr/>
     </dgm:pt>
     <dgm:pt modelId="{32B448BD-E161-46C8-A1F6-88A373738118}" type="pres">
-      <dgm:prSet presAssocID="{9AC9B081-25C5-4E83-B9FC-4EE1220C42CC}" presName="rootConnector" presStyleLbl="node4" presStyleIdx="3" presStyleCnt="43"/>
+      <dgm:prSet presAssocID="{9AC9B081-25C5-4E83-B9FC-4EE1220C42CC}" presName="rootConnector" presStyleLbl="node4" presStyleIdx="3" presStyleCnt="41"/>
       <dgm:spPr/>
     </dgm:pt>
     <dgm:pt modelId="{E336B98F-281B-4A8A-AE13-8063387C03E3}" type="pres">
@@ -3553,7 +3477,7 @@
       <dgm:spPr/>
     </dgm:pt>
     <dgm:pt modelId="{4CFCDFA8-E01C-4C6B-A731-226D0B6C2C76}" type="pres">
-      <dgm:prSet presAssocID="{8E55D407-483C-4F95-9E0F-F2F663299F50}" presName="Name64" presStyleLbl="parChTrans1D4" presStyleIdx="4" presStyleCnt="43"/>
+      <dgm:prSet presAssocID="{8E55D407-483C-4F95-9E0F-F2F663299F50}" presName="Name64" presStyleLbl="parChTrans1D4" presStyleIdx="4" presStyleCnt="41"/>
       <dgm:spPr/>
     </dgm:pt>
     <dgm:pt modelId="{8E96193A-7879-4C54-B22A-A2C9C6D1B243}" type="pres">
@@ -3569,7 +3493,7 @@
       <dgm:spPr/>
     </dgm:pt>
     <dgm:pt modelId="{1ECE9F9F-A668-4333-B43A-1DABED3BF4C5}" type="pres">
-      <dgm:prSet presAssocID="{B9CE2267-5814-421B-8674-D202299E0DA9}" presName="rootText" presStyleLbl="node4" presStyleIdx="4" presStyleCnt="43" custLinFactNeighborX="-36264">
+      <dgm:prSet presAssocID="{B9CE2267-5814-421B-8674-D202299E0DA9}" presName="rootText" presStyleLbl="node4" presStyleIdx="4" presStyleCnt="41" custLinFactNeighborX="-36264">
         <dgm:presLayoutVars>
           <dgm:chPref val="3"/>
         </dgm:presLayoutVars>
@@ -3577,7 +3501,7 @@
       <dgm:spPr/>
     </dgm:pt>
     <dgm:pt modelId="{33C6A336-A8D1-4674-9B6A-18C545834C69}" type="pres">
-      <dgm:prSet presAssocID="{B9CE2267-5814-421B-8674-D202299E0DA9}" presName="rootConnector" presStyleLbl="node4" presStyleIdx="4" presStyleCnt="43"/>
+      <dgm:prSet presAssocID="{B9CE2267-5814-421B-8674-D202299E0DA9}" presName="rootConnector" presStyleLbl="node4" presStyleIdx="4" presStyleCnt="41"/>
       <dgm:spPr/>
     </dgm:pt>
     <dgm:pt modelId="{B7C1DC1A-E336-4BB4-9D9D-A520B288CB01}" type="pres">
@@ -3585,7 +3509,7 @@
       <dgm:spPr/>
     </dgm:pt>
     <dgm:pt modelId="{595CFFA0-B569-4A56-8175-567F57E3E286}" type="pres">
-      <dgm:prSet presAssocID="{B5BAD76A-7E9A-4668-B9E3-5A85C816283D}" presName="Name64" presStyleLbl="parChTrans1D4" presStyleIdx="5" presStyleCnt="43"/>
+      <dgm:prSet presAssocID="{B5BAD76A-7E9A-4668-B9E3-5A85C816283D}" presName="Name64" presStyleLbl="parChTrans1D4" presStyleIdx="5" presStyleCnt="41"/>
       <dgm:spPr/>
     </dgm:pt>
     <dgm:pt modelId="{0409A85C-1F0E-4A89-987F-3851A7A68BDF}" type="pres">
@@ -3601,7 +3525,7 @@
       <dgm:spPr/>
     </dgm:pt>
     <dgm:pt modelId="{88A62553-AA35-4C7E-AEE4-0944A5577F9F}" type="pres">
-      <dgm:prSet presAssocID="{915177A7-D4EB-4AE8-86BD-249E5278466B}" presName="rootText" presStyleLbl="node4" presStyleIdx="5" presStyleCnt="43" custLinFactNeighborX="-36264">
+      <dgm:prSet presAssocID="{915177A7-D4EB-4AE8-86BD-249E5278466B}" presName="rootText" presStyleLbl="node4" presStyleIdx="5" presStyleCnt="41" custLinFactNeighborX="-36264">
         <dgm:presLayoutVars>
           <dgm:chPref val="3"/>
         </dgm:presLayoutVars>
@@ -3609,7 +3533,7 @@
       <dgm:spPr/>
     </dgm:pt>
     <dgm:pt modelId="{B1A98113-5456-4FA2-978F-D9BF6518B3D2}" type="pres">
-      <dgm:prSet presAssocID="{915177A7-D4EB-4AE8-86BD-249E5278466B}" presName="rootConnector" presStyleLbl="node4" presStyleIdx="5" presStyleCnt="43"/>
+      <dgm:prSet presAssocID="{915177A7-D4EB-4AE8-86BD-249E5278466B}" presName="rootConnector" presStyleLbl="node4" presStyleIdx="5" presStyleCnt="41"/>
       <dgm:spPr/>
     </dgm:pt>
     <dgm:pt modelId="{1AE67292-3C18-4CA8-AB74-0B8B6C5F7208}" type="pres">
@@ -3625,7 +3549,7 @@
       <dgm:spPr/>
     </dgm:pt>
     <dgm:pt modelId="{183240E7-EEA6-46D8-AE60-487B0566B9A2}" type="pres">
-      <dgm:prSet presAssocID="{83D18EB3-F613-46C2-86CF-CF849473A283}" presName="Name64" presStyleLbl="parChTrans1D4" presStyleIdx="6" presStyleCnt="43"/>
+      <dgm:prSet presAssocID="{83D18EB3-F613-46C2-86CF-CF849473A283}" presName="Name64" presStyleLbl="parChTrans1D4" presStyleIdx="6" presStyleCnt="41"/>
       <dgm:spPr/>
     </dgm:pt>
     <dgm:pt modelId="{CFDB63F1-940F-405A-A9B4-7DDC93AF5869}" type="pres">
@@ -3641,7 +3565,7 @@
       <dgm:spPr/>
     </dgm:pt>
     <dgm:pt modelId="{E9A97367-2565-4CA7-B81D-4E147657D835}" type="pres">
-      <dgm:prSet presAssocID="{855297F2-A162-4EED-8FE7-B40916947E1F}" presName="rootText" presStyleLbl="node4" presStyleIdx="6" presStyleCnt="43" custLinFactNeighborX="-36264">
+      <dgm:prSet presAssocID="{855297F2-A162-4EED-8FE7-B40916947E1F}" presName="rootText" presStyleLbl="node4" presStyleIdx="6" presStyleCnt="41" custLinFactNeighborX="-36264">
         <dgm:presLayoutVars>
           <dgm:chPref val="3"/>
         </dgm:presLayoutVars>
@@ -3649,7 +3573,7 @@
       <dgm:spPr/>
     </dgm:pt>
     <dgm:pt modelId="{2846335E-09B8-4070-8AE1-F4A8659BD36F}" type="pres">
-      <dgm:prSet presAssocID="{855297F2-A162-4EED-8FE7-B40916947E1F}" presName="rootConnector" presStyleLbl="node4" presStyleIdx="6" presStyleCnt="43"/>
+      <dgm:prSet presAssocID="{855297F2-A162-4EED-8FE7-B40916947E1F}" presName="rootConnector" presStyleLbl="node4" presStyleIdx="6" presStyleCnt="41"/>
       <dgm:spPr/>
     </dgm:pt>
     <dgm:pt modelId="{D98298B5-4B34-459A-BC81-9CF46F584A90}" type="pres">
@@ -3661,7 +3585,7 @@
       <dgm:spPr/>
     </dgm:pt>
     <dgm:pt modelId="{B8837C6A-8105-408D-9A2C-4FAA52810339}" type="pres">
-      <dgm:prSet presAssocID="{A874BA0B-B7EF-479E-B1B8-17FB9E8D2868}" presName="Name64" presStyleLbl="parChTrans1D4" presStyleIdx="7" presStyleCnt="43"/>
+      <dgm:prSet presAssocID="{A874BA0B-B7EF-479E-B1B8-17FB9E8D2868}" presName="Name64" presStyleLbl="parChTrans1D4" presStyleIdx="7" presStyleCnt="41"/>
       <dgm:spPr/>
     </dgm:pt>
     <dgm:pt modelId="{7D003827-466D-499B-9492-0D274854DE71}" type="pres">
@@ -3677,7 +3601,7 @@
       <dgm:spPr/>
     </dgm:pt>
     <dgm:pt modelId="{3E0FA384-F7A7-4EF5-BB6C-325C5B877E93}" type="pres">
-      <dgm:prSet presAssocID="{13719A43-B673-4C88-9D1E-16D752C05E25}" presName="rootText" presStyleLbl="node4" presStyleIdx="7" presStyleCnt="43" custLinFactNeighborX="-36264">
+      <dgm:prSet presAssocID="{13719A43-B673-4C88-9D1E-16D752C05E25}" presName="rootText" presStyleLbl="node4" presStyleIdx="7" presStyleCnt="41" custLinFactNeighborX="-36264">
         <dgm:presLayoutVars>
           <dgm:chPref val="3"/>
         </dgm:presLayoutVars>
@@ -3685,7 +3609,7 @@
       <dgm:spPr/>
     </dgm:pt>
     <dgm:pt modelId="{039EE693-846A-452B-938C-A79863754B50}" type="pres">
-      <dgm:prSet presAssocID="{13719A43-B673-4C88-9D1E-16D752C05E25}" presName="rootConnector" presStyleLbl="node4" presStyleIdx="7" presStyleCnt="43"/>
+      <dgm:prSet presAssocID="{13719A43-B673-4C88-9D1E-16D752C05E25}" presName="rootConnector" presStyleLbl="node4" presStyleIdx="7" presStyleCnt="41"/>
       <dgm:spPr/>
     </dgm:pt>
     <dgm:pt modelId="{15438C47-FF5A-46A4-A923-94CF51153C82}" type="pres">
@@ -3693,7 +3617,7 @@
       <dgm:spPr/>
     </dgm:pt>
     <dgm:pt modelId="{D5EFD006-A32B-489A-B809-E3D7E0386B88}" type="pres">
-      <dgm:prSet presAssocID="{B0A38B96-90FF-402E-A24A-BEF06D54B9B6}" presName="Name64" presStyleLbl="parChTrans1D4" presStyleIdx="8" presStyleCnt="43"/>
+      <dgm:prSet presAssocID="{B0A38B96-90FF-402E-A24A-BEF06D54B9B6}" presName="Name64" presStyleLbl="parChTrans1D4" presStyleIdx="8" presStyleCnt="41"/>
       <dgm:spPr/>
     </dgm:pt>
     <dgm:pt modelId="{6D2D5EBF-D547-4528-A20C-8F5E2C9B880C}" type="pres">
@@ -3709,7 +3633,7 @@
       <dgm:spPr/>
     </dgm:pt>
     <dgm:pt modelId="{5CE68631-E50F-4A7D-A78E-B9848249D5F3}" type="pres">
-      <dgm:prSet presAssocID="{764BB32F-0818-4190-8CBA-5BFD6043BFBC}" presName="rootText" presStyleLbl="node4" presStyleIdx="8" presStyleCnt="43" custLinFactNeighborX="-36264">
+      <dgm:prSet presAssocID="{764BB32F-0818-4190-8CBA-5BFD6043BFBC}" presName="rootText" presStyleLbl="node4" presStyleIdx="8" presStyleCnt="41" custLinFactNeighborX="-36264">
         <dgm:presLayoutVars>
           <dgm:chPref val="3"/>
         </dgm:presLayoutVars>
@@ -3717,7 +3641,7 @@
       <dgm:spPr/>
     </dgm:pt>
     <dgm:pt modelId="{313097A2-C9D5-4518-B29A-5B216269D568}" type="pres">
-      <dgm:prSet presAssocID="{764BB32F-0818-4190-8CBA-5BFD6043BFBC}" presName="rootConnector" presStyleLbl="node4" presStyleIdx="8" presStyleCnt="43"/>
+      <dgm:prSet presAssocID="{764BB32F-0818-4190-8CBA-5BFD6043BFBC}" presName="rootConnector" presStyleLbl="node4" presStyleIdx="8" presStyleCnt="41"/>
       <dgm:spPr/>
     </dgm:pt>
     <dgm:pt modelId="{23275A76-13D0-4464-8314-473BE340AD8F}" type="pres">
@@ -3733,7 +3657,7 @@
       <dgm:spPr/>
     </dgm:pt>
     <dgm:pt modelId="{16D33CAD-B597-414C-9523-47A079B2FFFB}" type="pres">
-      <dgm:prSet presAssocID="{C7EBEF87-5076-4181-B19B-8AD6A127BA45}" presName="Name64" presStyleLbl="parChTrans1D4" presStyleIdx="9" presStyleCnt="43"/>
+      <dgm:prSet presAssocID="{C7EBEF87-5076-4181-B19B-8AD6A127BA45}" presName="Name64" presStyleLbl="parChTrans1D4" presStyleIdx="9" presStyleCnt="41"/>
       <dgm:spPr/>
     </dgm:pt>
     <dgm:pt modelId="{2768B59B-453A-42A2-85F9-75C2F9E31EB2}" type="pres">
@@ -3749,7 +3673,7 @@
       <dgm:spPr/>
     </dgm:pt>
     <dgm:pt modelId="{7E303F30-9711-4703-9E93-53900C059588}" type="pres">
-      <dgm:prSet presAssocID="{6A27566D-5E2B-4C81-8C09-639ED0AF984B}" presName="rootText" presStyleLbl="node4" presStyleIdx="9" presStyleCnt="43" custScaleX="129118" custLinFactNeighborX="-36264">
+      <dgm:prSet presAssocID="{6A27566D-5E2B-4C81-8C09-639ED0AF984B}" presName="rootText" presStyleLbl="node4" presStyleIdx="9" presStyleCnt="41" custScaleX="129118" custLinFactNeighborX="-36264">
         <dgm:presLayoutVars>
           <dgm:chPref val="3"/>
         </dgm:presLayoutVars>
@@ -3757,7 +3681,7 @@
       <dgm:spPr/>
     </dgm:pt>
     <dgm:pt modelId="{6B320540-8EFC-424C-87BB-7A322C848E8D}" type="pres">
-      <dgm:prSet presAssocID="{6A27566D-5E2B-4C81-8C09-639ED0AF984B}" presName="rootConnector" presStyleLbl="node4" presStyleIdx="9" presStyleCnt="43"/>
+      <dgm:prSet presAssocID="{6A27566D-5E2B-4C81-8C09-639ED0AF984B}" presName="rootConnector" presStyleLbl="node4" presStyleIdx="9" presStyleCnt="41"/>
       <dgm:spPr/>
     </dgm:pt>
     <dgm:pt modelId="{3A41FAFC-2989-4EED-BB19-C23AE601C621}" type="pres">
@@ -3769,7 +3693,7 @@
       <dgm:spPr/>
     </dgm:pt>
     <dgm:pt modelId="{34B1EDD2-BFE8-4A14-8948-7EEB84EDF964}" type="pres">
-      <dgm:prSet presAssocID="{4A1ABC62-FD06-4AC0-BC51-20F24998E5FF}" presName="Name64" presStyleLbl="parChTrans1D4" presStyleIdx="10" presStyleCnt="43"/>
+      <dgm:prSet presAssocID="{4A1ABC62-FD06-4AC0-BC51-20F24998E5FF}" presName="Name64" presStyleLbl="parChTrans1D4" presStyleIdx="10" presStyleCnt="41"/>
       <dgm:spPr/>
     </dgm:pt>
     <dgm:pt modelId="{A6B1FB9B-052B-489F-9CB1-187B6E579E3C}" type="pres">
@@ -3785,7 +3709,7 @@
       <dgm:spPr/>
     </dgm:pt>
     <dgm:pt modelId="{3D02A4C7-D3F8-46A9-BF13-B91E1207C679}" type="pres">
-      <dgm:prSet presAssocID="{7170B3D7-7385-4271-BFDD-77BDCB4B9D7D}" presName="rootText" presStyleLbl="node4" presStyleIdx="10" presStyleCnt="43" custLinFactNeighborX="-36264">
+      <dgm:prSet presAssocID="{7170B3D7-7385-4271-BFDD-77BDCB4B9D7D}" presName="rootText" presStyleLbl="node4" presStyleIdx="10" presStyleCnt="41" custLinFactNeighborX="-36264">
         <dgm:presLayoutVars>
           <dgm:chPref val="3"/>
         </dgm:presLayoutVars>
@@ -3793,7 +3717,7 @@
       <dgm:spPr/>
     </dgm:pt>
     <dgm:pt modelId="{75AB063C-95C2-4D08-BD75-E990F011A243}" type="pres">
-      <dgm:prSet presAssocID="{7170B3D7-7385-4271-BFDD-77BDCB4B9D7D}" presName="rootConnector" presStyleLbl="node4" presStyleIdx="10" presStyleCnt="43"/>
+      <dgm:prSet presAssocID="{7170B3D7-7385-4271-BFDD-77BDCB4B9D7D}" presName="rootConnector" presStyleLbl="node4" presStyleIdx="10" presStyleCnt="41"/>
       <dgm:spPr/>
     </dgm:pt>
     <dgm:pt modelId="{896FC98F-C18B-48B6-9368-6A4224F8D339}" type="pres">
@@ -3801,7 +3725,7 @@
       <dgm:spPr/>
     </dgm:pt>
     <dgm:pt modelId="{50A4060C-F737-4459-BC6A-B233FEC9432A}" type="pres">
-      <dgm:prSet presAssocID="{B777D164-DD56-45DE-9496-BC18234B1690}" presName="Name64" presStyleLbl="parChTrans1D4" presStyleIdx="11" presStyleCnt="43"/>
+      <dgm:prSet presAssocID="{B777D164-DD56-45DE-9496-BC18234B1690}" presName="Name64" presStyleLbl="parChTrans1D4" presStyleIdx="11" presStyleCnt="41"/>
       <dgm:spPr/>
     </dgm:pt>
     <dgm:pt modelId="{D14D68CC-E066-4447-90AF-4E5C4D91C745}" type="pres">
@@ -3817,7 +3741,7 @@
       <dgm:spPr/>
     </dgm:pt>
     <dgm:pt modelId="{90D35EA2-A25D-449A-8C0B-91C81C67A50C}" type="pres">
-      <dgm:prSet presAssocID="{6D41F822-3F5E-498D-8427-D9976FC14949}" presName="rootText" presStyleLbl="node4" presStyleIdx="11" presStyleCnt="43" custLinFactNeighborX="-36264">
+      <dgm:prSet presAssocID="{6D41F822-3F5E-498D-8427-D9976FC14949}" presName="rootText" presStyleLbl="node4" presStyleIdx="11" presStyleCnt="41" custLinFactNeighborX="-36264">
         <dgm:presLayoutVars>
           <dgm:chPref val="3"/>
         </dgm:presLayoutVars>
@@ -3825,7 +3749,7 @@
       <dgm:spPr/>
     </dgm:pt>
     <dgm:pt modelId="{89FD8EE9-AA60-48A6-9D40-0DBE92C02DE0}" type="pres">
-      <dgm:prSet presAssocID="{6D41F822-3F5E-498D-8427-D9976FC14949}" presName="rootConnector" presStyleLbl="node4" presStyleIdx="11" presStyleCnt="43"/>
+      <dgm:prSet presAssocID="{6D41F822-3F5E-498D-8427-D9976FC14949}" presName="rootConnector" presStyleLbl="node4" presStyleIdx="11" presStyleCnt="41"/>
       <dgm:spPr/>
     </dgm:pt>
     <dgm:pt modelId="{53B6FEF6-D5AE-485A-8D43-4347859156E9}" type="pres">
@@ -3841,7 +3765,7 @@
       <dgm:spPr/>
     </dgm:pt>
     <dgm:pt modelId="{26800CCF-2CF7-4C2B-BE5D-668243245262}" type="pres">
-      <dgm:prSet presAssocID="{4F864848-EEBF-4930-A161-A4A71CAED760}" presName="Name64" presStyleLbl="parChTrans1D4" presStyleIdx="12" presStyleCnt="43"/>
+      <dgm:prSet presAssocID="{4F864848-EEBF-4930-A161-A4A71CAED760}" presName="Name64" presStyleLbl="parChTrans1D4" presStyleIdx="12" presStyleCnt="41"/>
       <dgm:spPr/>
     </dgm:pt>
     <dgm:pt modelId="{2385C688-3F8F-43A2-A30A-2252C12C33E5}" type="pres">
@@ -3857,7 +3781,7 @@
       <dgm:spPr/>
     </dgm:pt>
     <dgm:pt modelId="{9E916334-F27B-4E86-B949-E7079E77F959}" type="pres">
-      <dgm:prSet presAssocID="{24C79789-50A6-4247-997A-B75D020D2C6D}" presName="rootText" presStyleLbl="node4" presStyleIdx="12" presStyleCnt="43" custLinFactNeighborX="-36264">
+      <dgm:prSet presAssocID="{24C79789-50A6-4247-997A-B75D020D2C6D}" presName="rootText" presStyleLbl="node4" presStyleIdx="12" presStyleCnt="41" custLinFactNeighborX="-36264">
         <dgm:presLayoutVars>
           <dgm:chPref val="3"/>
         </dgm:presLayoutVars>
@@ -3865,7 +3789,7 @@
       <dgm:spPr/>
     </dgm:pt>
     <dgm:pt modelId="{49F9D926-559F-4648-BFF5-79BEBC70A452}" type="pres">
-      <dgm:prSet presAssocID="{24C79789-50A6-4247-997A-B75D020D2C6D}" presName="rootConnector" presStyleLbl="node4" presStyleIdx="12" presStyleCnt="43"/>
+      <dgm:prSet presAssocID="{24C79789-50A6-4247-997A-B75D020D2C6D}" presName="rootConnector" presStyleLbl="node4" presStyleIdx="12" presStyleCnt="41"/>
       <dgm:spPr/>
     </dgm:pt>
     <dgm:pt modelId="{16DEFBD3-D008-4B05-B2DD-39FF5F864F76}" type="pres">
@@ -3873,7 +3797,7 @@
       <dgm:spPr/>
     </dgm:pt>
     <dgm:pt modelId="{171E7136-836A-486B-B91D-37B90AC43AE7}" type="pres">
-      <dgm:prSet presAssocID="{928CD5CC-816D-4B40-9D14-7256E32D7DFD}" presName="Name64" presStyleLbl="parChTrans1D4" presStyleIdx="13" presStyleCnt="43"/>
+      <dgm:prSet presAssocID="{928CD5CC-816D-4B40-9D14-7256E32D7DFD}" presName="Name64" presStyleLbl="parChTrans1D4" presStyleIdx="13" presStyleCnt="41"/>
       <dgm:spPr/>
     </dgm:pt>
     <dgm:pt modelId="{642302D4-25F5-4191-A6BD-80A90EE256CB}" type="pres">
@@ -3889,7 +3813,7 @@
       <dgm:spPr/>
     </dgm:pt>
     <dgm:pt modelId="{0BA28261-1ED3-47EB-A7EA-310484F5DF09}" type="pres">
-      <dgm:prSet presAssocID="{218DF31D-CF8B-459F-887A-8E793F7A6593}" presName="rootText" presStyleLbl="node4" presStyleIdx="13" presStyleCnt="43" custLinFactNeighborX="-36264">
+      <dgm:prSet presAssocID="{218DF31D-CF8B-459F-887A-8E793F7A6593}" presName="rootText" presStyleLbl="node4" presStyleIdx="13" presStyleCnt="41" custLinFactNeighborX="-36264">
         <dgm:presLayoutVars>
           <dgm:chPref val="3"/>
         </dgm:presLayoutVars>
@@ -3897,7 +3821,7 @@
       <dgm:spPr/>
     </dgm:pt>
     <dgm:pt modelId="{1F3D57A6-91D2-48AA-B105-E07306DABA2F}" type="pres">
-      <dgm:prSet presAssocID="{218DF31D-CF8B-459F-887A-8E793F7A6593}" presName="rootConnector" presStyleLbl="node4" presStyleIdx="13" presStyleCnt="43"/>
+      <dgm:prSet presAssocID="{218DF31D-CF8B-459F-887A-8E793F7A6593}" presName="rootConnector" presStyleLbl="node4" presStyleIdx="13" presStyleCnt="41"/>
       <dgm:spPr/>
     </dgm:pt>
     <dgm:pt modelId="{E693CDA9-254D-4703-B79E-4F8CEA104BCE}" type="pres">
@@ -3905,7 +3829,7 @@
       <dgm:spPr/>
     </dgm:pt>
     <dgm:pt modelId="{D56AF9D6-52CD-49B7-B03A-910C74477DFD}" type="pres">
-      <dgm:prSet presAssocID="{BCC45095-3A8B-4CB4-9AE4-6772688B37EF}" presName="Name64" presStyleLbl="parChTrans1D4" presStyleIdx="14" presStyleCnt="43"/>
+      <dgm:prSet presAssocID="{BCC45095-3A8B-4CB4-9AE4-6772688B37EF}" presName="Name64" presStyleLbl="parChTrans1D4" presStyleIdx="14" presStyleCnt="41"/>
       <dgm:spPr/>
     </dgm:pt>
     <dgm:pt modelId="{929D98B8-E1AF-4AB0-A72E-45EB1F9E4936}" type="pres">
@@ -3921,7 +3845,7 @@
       <dgm:spPr/>
     </dgm:pt>
     <dgm:pt modelId="{B509227D-8391-4FEA-8798-380D7D9E41EE}" type="pres">
-      <dgm:prSet presAssocID="{7BFC5FFE-8955-4513-8485-C479782305F9}" presName="rootText" presStyleLbl="node4" presStyleIdx="14" presStyleCnt="43" custLinFactNeighborX="-36264">
+      <dgm:prSet presAssocID="{7BFC5FFE-8955-4513-8485-C479782305F9}" presName="rootText" presStyleLbl="node4" presStyleIdx="14" presStyleCnt="41" custLinFactNeighborX="-36264">
         <dgm:presLayoutVars>
           <dgm:chPref val="3"/>
         </dgm:presLayoutVars>
@@ -3929,7 +3853,7 @@
       <dgm:spPr/>
     </dgm:pt>
     <dgm:pt modelId="{13AAB80B-89C4-451F-A39D-CC96E0BE201C}" type="pres">
-      <dgm:prSet presAssocID="{7BFC5FFE-8955-4513-8485-C479782305F9}" presName="rootConnector" presStyleLbl="node4" presStyleIdx="14" presStyleCnt="43"/>
+      <dgm:prSet presAssocID="{7BFC5FFE-8955-4513-8485-C479782305F9}" presName="rootConnector" presStyleLbl="node4" presStyleIdx="14" presStyleCnt="41"/>
       <dgm:spPr/>
     </dgm:pt>
     <dgm:pt modelId="{037CCFC1-A766-48DA-8CDC-17C070D2D1E8}" type="pres">
@@ -3945,7 +3869,7 @@
       <dgm:spPr/>
     </dgm:pt>
     <dgm:pt modelId="{C6ABE6A2-C04F-4482-BB5C-769C7DA9CC1F}" type="pres">
-      <dgm:prSet presAssocID="{F01EE7C7-3AF0-44DD-B4FB-CD1567C85CA2}" presName="Name64" presStyleLbl="parChTrans1D4" presStyleIdx="15" presStyleCnt="43"/>
+      <dgm:prSet presAssocID="{F01EE7C7-3AF0-44DD-B4FB-CD1567C85CA2}" presName="Name64" presStyleLbl="parChTrans1D4" presStyleIdx="15" presStyleCnt="41"/>
       <dgm:spPr/>
     </dgm:pt>
     <dgm:pt modelId="{7E7D0AF3-3D68-4BC7-819C-2DC468BFAB41}" type="pres">
@@ -3961,7 +3885,7 @@
       <dgm:spPr/>
     </dgm:pt>
     <dgm:pt modelId="{E6FC81B0-8E90-4371-B499-DD25029D4106}" type="pres">
-      <dgm:prSet presAssocID="{56EC93F9-5B3F-429B-86A1-8A8E1DFA402A}" presName="rootText" presStyleLbl="node4" presStyleIdx="15" presStyleCnt="43" custScaleX="123296" custLinFactNeighborX="-36402" custLinFactNeighborY="6641">
+      <dgm:prSet presAssocID="{56EC93F9-5B3F-429B-86A1-8A8E1DFA402A}" presName="rootText" presStyleLbl="node4" presStyleIdx="15" presStyleCnt="41" custScaleX="123296" custLinFactNeighborX="-36402" custLinFactNeighborY="6641">
         <dgm:presLayoutVars>
           <dgm:chPref val="3"/>
         </dgm:presLayoutVars>
@@ -3969,7 +3893,7 @@
       <dgm:spPr/>
     </dgm:pt>
     <dgm:pt modelId="{3729B9CF-D6CF-4BE1-8EFC-47B1B1E16A87}" type="pres">
-      <dgm:prSet presAssocID="{56EC93F9-5B3F-429B-86A1-8A8E1DFA402A}" presName="rootConnector" presStyleLbl="node4" presStyleIdx="15" presStyleCnt="43"/>
+      <dgm:prSet presAssocID="{56EC93F9-5B3F-429B-86A1-8A8E1DFA402A}" presName="rootConnector" presStyleLbl="node4" presStyleIdx="15" presStyleCnt="41"/>
       <dgm:spPr/>
     </dgm:pt>
     <dgm:pt modelId="{D93F53B6-074A-4D5A-979D-0C82D3AD726E}" type="pres">
@@ -3977,7 +3901,7 @@
       <dgm:spPr/>
     </dgm:pt>
     <dgm:pt modelId="{CE327CA8-163F-4708-9400-03AD1F0721B6}" type="pres">
-      <dgm:prSet presAssocID="{7D64C45E-B538-4C0F-A6F0-5A4AF0A1F48E}" presName="Name64" presStyleLbl="parChTrans1D4" presStyleIdx="16" presStyleCnt="43"/>
+      <dgm:prSet presAssocID="{7D64C45E-B538-4C0F-A6F0-5A4AF0A1F48E}" presName="Name64" presStyleLbl="parChTrans1D4" presStyleIdx="16" presStyleCnt="41"/>
       <dgm:spPr/>
     </dgm:pt>
     <dgm:pt modelId="{762FE8D3-049A-4264-A57D-60CFBAB02451}" type="pres">
@@ -3993,7 +3917,7 @@
       <dgm:spPr/>
     </dgm:pt>
     <dgm:pt modelId="{B7BA8FDA-69EF-4F26-A438-76A43EC08BE5}" type="pres">
-      <dgm:prSet presAssocID="{F44BEF34-C38D-4E4B-A196-CBEC387270FB}" presName="rootText" presStyleLbl="node4" presStyleIdx="16" presStyleCnt="43" custLinFactNeighborX="-39500" custLinFactNeighborY="6641">
+      <dgm:prSet presAssocID="{F44BEF34-C38D-4E4B-A196-CBEC387270FB}" presName="rootText" presStyleLbl="node4" presStyleIdx="16" presStyleCnt="41" custLinFactNeighborX="-39500" custLinFactNeighborY="6641">
         <dgm:presLayoutVars>
           <dgm:chPref val="3"/>
         </dgm:presLayoutVars>
@@ -4001,7 +3925,7 @@
       <dgm:spPr/>
     </dgm:pt>
     <dgm:pt modelId="{A72FD0C0-48C0-4E54-856B-3170033DFC5D}" type="pres">
-      <dgm:prSet presAssocID="{F44BEF34-C38D-4E4B-A196-CBEC387270FB}" presName="rootConnector" presStyleLbl="node4" presStyleIdx="16" presStyleCnt="43"/>
+      <dgm:prSet presAssocID="{F44BEF34-C38D-4E4B-A196-CBEC387270FB}" presName="rootConnector" presStyleLbl="node4" presStyleIdx="16" presStyleCnt="41"/>
       <dgm:spPr/>
     </dgm:pt>
     <dgm:pt modelId="{2A335662-822A-4758-9498-08B103A50DAD}" type="pres">
@@ -4129,7 +4053,7 @@
       <dgm:spPr/>
     </dgm:pt>
     <dgm:pt modelId="{5D697390-7377-44AA-914E-7F34A506AC17}" type="pres">
-      <dgm:prSet presAssocID="{9510750D-81D3-4DD1-BEEF-9ABF3212385B}" presName="Name64" presStyleLbl="parChTrans1D4" presStyleIdx="17" presStyleCnt="43"/>
+      <dgm:prSet presAssocID="{9510750D-81D3-4DD1-BEEF-9ABF3212385B}" presName="Name64" presStyleLbl="parChTrans1D4" presStyleIdx="17" presStyleCnt="41"/>
       <dgm:spPr/>
     </dgm:pt>
     <dgm:pt modelId="{81A249B5-1F4D-4281-8CFD-E20AACD928D8}" type="pres">
@@ -4145,7 +4069,7 @@
       <dgm:spPr/>
     </dgm:pt>
     <dgm:pt modelId="{DDF5EC19-41AE-4BDE-81B3-DB61285BD74A}" type="pres">
-      <dgm:prSet presAssocID="{B9F7BE26-7120-4362-B07A-512CE293CF66}" presName="rootText" presStyleLbl="node4" presStyleIdx="17" presStyleCnt="43" custLinFactNeighborX="-36264">
+      <dgm:prSet presAssocID="{B9F7BE26-7120-4362-B07A-512CE293CF66}" presName="rootText" presStyleLbl="node4" presStyleIdx="17" presStyleCnt="41" custLinFactNeighborX="-36264">
         <dgm:presLayoutVars>
           <dgm:chPref val="3"/>
         </dgm:presLayoutVars>
@@ -4153,7 +4077,7 @@
       <dgm:spPr/>
     </dgm:pt>
     <dgm:pt modelId="{6F9A1A66-336B-4BA9-A352-FD8CB9DA2042}" type="pres">
-      <dgm:prSet presAssocID="{B9F7BE26-7120-4362-B07A-512CE293CF66}" presName="rootConnector" presStyleLbl="node4" presStyleIdx="17" presStyleCnt="43"/>
+      <dgm:prSet presAssocID="{B9F7BE26-7120-4362-B07A-512CE293CF66}" presName="rootConnector" presStyleLbl="node4" presStyleIdx="17" presStyleCnt="41"/>
       <dgm:spPr/>
     </dgm:pt>
     <dgm:pt modelId="{D39E991D-3564-4C29-BDB1-716D94172FD1}" type="pres">
@@ -4165,7 +4089,7 @@
       <dgm:spPr/>
     </dgm:pt>
     <dgm:pt modelId="{F686DFC4-1641-4092-9BC6-E8FB9D38AF0D}" type="pres">
-      <dgm:prSet presAssocID="{58D39D66-5F5D-488E-863E-42F8DC846F18}" presName="Name64" presStyleLbl="parChTrans1D4" presStyleIdx="18" presStyleCnt="43"/>
+      <dgm:prSet presAssocID="{58D39D66-5F5D-488E-863E-42F8DC846F18}" presName="Name64" presStyleLbl="parChTrans1D4" presStyleIdx="18" presStyleCnt="41"/>
       <dgm:spPr/>
     </dgm:pt>
     <dgm:pt modelId="{C5318AC6-72DC-4E05-87F0-3D4F3B6BCD68}" type="pres">
@@ -4181,7 +4105,7 @@
       <dgm:spPr/>
     </dgm:pt>
     <dgm:pt modelId="{63612422-7E15-4BE2-8B4F-9279878BDF71}" type="pres">
-      <dgm:prSet presAssocID="{62881DA1-0B6F-4136-9B25-E6FCF3BF8AD6}" presName="rootText" presStyleLbl="node4" presStyleIdx="18" presStyleCnt="43" custLinFactNeighborX="-36264">
+      <dgm:prSet presAssocID="{62881DA1-0B6F-4136-9B25-E6FCF3BF8AD6}" presName="rootText" presStyleLbl="node4" presStyleIdx="18" presStyleCnt="41" custLinFactNeighborX="-36264">
         <dgm:presLayoutVars>
           <dgm:chPref val="3"/>
         </dgm:presLayoutVars>
@@ -4189,7 +4113,7 @@
       <dgm:spPr/>
     </dgm:pt>
     <dgm:pt modelId="{7F717562-A311-4DB7-812C-096B45328B34}" type="pres">
-      <dgm:prSet presAssocID="{62881DA1-0B6F-4136-9B25-E6FCF3BF8AD6}" presName="rootConnector" presStyleLbl="node4" presStyleIdx="18" presStyleCnt="43"/>
+      <dgm:prSet presAssocID="{62881DA1-0B6F-4136-9B25-E6FCF3BF8AD6}" presName="rootConnector" presStyleLbl="node4" presStyleIdx="18" presStyleCnt="41"/>
       <dgm:spPr/>
     </dgm:pt>
     <dgm:pt modelId="{5B99FEC8-C73E-4E34-ABEB-62E1DB9B4251}" type="pres">
@@ -4197,7 +4121,7 @@
       <dgm:spPr/>
     </dgm:pt>
     <dgm:pt modelId="{8ACA028D-62C9-4546-BC43-59E86544747D}" type="pres">
-      <dgm:prSet presAssocID="{743011D7-778B-4476-8059-AF91320A80F3}" presName="Name64" presStyleLbl="parChTrans1D4" presStyleIdx="19" presStyleCnt="43"/>
+      <dgm:prSet presAssocID="{743011D7-778B-4476-8059-AF91320A80F3}" presName="Name64" presStyleLbl="parChTrans1D4" presStyleIdx="19" presStyleCnt="41"/>
       <dgm:spPr/>
     </dgm:pt>
     <dgm:pt modelId="{A78B865B-BE22-4284-BB40-B7B954B4FAA5}" type="pres">
@@ -4213,7 +4137,7 @@
       <dgm:spPr/>
     </dgm:pt>
     <dgm:pt modelId="{7232D9FE-A60D-4159-AA76-300C305B2795}" type="pres">
-      <dgm:prSet presAssocID="{0E222E41-7105-414B-AD1A-B5BD5691A59C}" presName="rootText" presStyleLbl="node4" presStyleIdx="19" presStyleCnt="43" custLinFactNeighborX="-36264">
+      <dgm:prSet presAssocID="{0E222E41-7105-414B-AD1A-B5BD5691A59C}" presName="rootText" presStyleLbl="node4" presStyleIdx="19" presStyleCnt="41" custLinFactNeighborX="-36264">
         <dgm:presLayoutVars>
           <dgm:chPref val="3"/>
         </dgm:presLayoutVars>
@@ -4221,7 +4145,7 @@
       <dgm:spPr/>
     </dgm:pt>
     <dgm:pt modelId="{7CBC7139-AF67-482D-8C1D-FF62350879D7}" type="pres">
-      <dgm:prSet presAssocID="{0E222E41-7105-414B-AD1A-B5BD5691A59C}" presName="rootConnector" presStyleLbl="node4" presStyleIdx="19" presStyleCnt="43"/>
+      <dgm:prSet presAssocID="{0E222E41-7105-414B-AD1A-B5BD5691A59C}" presName="rootConnector" presStyleLbl="node4" presStyleIdx="19" presStyleCnt="41"/>
       <dgm:spPr/>
     </dgm:pt>
     <dgm:pt modelId="{6D16712D-74DC-4766-BE5A-DDDD55BA7080}" type="pres">
@@ -4233,7 +4157,7 @@
       <dgm:spPr/>
     </dgm:pt>
     <dgm:pt modelId="{63BFDF2F-6F11-4980-A631-1D0C6BCF6E65}" type="pres">
-      <dgm:prSet presAssocID="{C5D295AB-C033-40A2-BD5A-51CF31B0DAF1}" presName="Name64" presStyleLbl="parChTrans1D4" presStyleIdx="20" presStyleCnt="43"/>
+      <dgm:prSet presAssocID="{C5D295AB-C033-40A2-BD5A-51CF31B0DAF1}" presName="Name64" presStyleLbl="parChTrans1D4" presStyleIdx="20" presStyleCnt="41"/>
       <dgm:spPr/>
     </dgm:pt>
     <dgm:pt modelId="{8C46F3B9-03ED-4C88-8B12-E656985E334C}" type="pres">
@@ -4249,7 +4173,7 @@
       <dgm:spPr/>
     </dgm:pt>
     <dgm:pt modelId="{69A556CA-411A-4BA8-88C1-CAB47DCD97EC}" type="pres">
-      <dgm:prSet presAssocID="{0636E8E0-99C0-4A6E-96DB-7AF7640C7E9C}" presName="rootText" presStyleLbl="node4" presStyleIdx="20" presStyleCnt="43" custLinFactNeighborX="-36264">
+      <dgm:prSet presAssocID="{0636E8E0-99C0-4A6E-96DB-7AF7640C7E9C}" presName="rootText" presStyleLbl="node4" presStyleIdx="20" presStyleCnt="41" custLinFactNeighborX="-36264">
         <dgm:presLayoutVars>
           <dgm:chPref val="3"/>
         </dgm:presLayoutVars>
@@ -4257,7 +4181,7 @@
       <dgm:spPr/>
     </dgm:pt>
     <dgm:pt modelId="{500808C6-E96D-4E78-BE52-A4202778FC93}" type="pres">
-      <dgm:prSet presAssocID="{0636E8E0-99C0-4A6E-96DB-7AF7640C7E9C}" presName="rootConnector" presStyleLbl="node4" presStyleIdx="20" presStyleCnt="43"/>
+      <dgm:prSet presAssocID="{0636E8E0-99C0-4A6E-96DB-7AF7640C7E9C}" presName="rootConnector" presStyleLbl="node4" presStyleIdx="20" presStyleCnt="41"/>
       <dgm:spPr/>
     </dgm:pt>
     <dgm:pt modelId="{CE3E5402-47F2-4A5F-B89F-B62AC8E45468}" type="pres">
@@ -4273,7 +4197,7 @@
       <dgm:spPr/>
     </dgm:pt>
     <dgm:pt modelId="{418A319B-5CB8-4C1A-929A-A579AE777841}" type="pres">
-      <dgm:prSet presAssocID="{7F41646D-7809-44F5-B24B-6E191227AD5F}" presName="Name64" presStyleLbl="parChTrans1D4" presStyleIdx="21" presStyleCnt="43"/>
+      <dgm:prSet presAssocID="{7F41646D-7809-44F5-B24B-6E191227AD5F}" presName="Name64" presStyleLbl="parChTrans1D4" presStyleIdx="21" presStyleCnt="41"/>
       <dgm:spPr/>
     </dgm:pt>
     <dgm:pt modelId="{F49CA836-44E5-4C40-8AC4-2AE0EF430965}" type="pres">
@@ -4289,7 +4213,7 @@
       <dgm:spPr/>
     </dgm:pt>
     <dgm:pt modelId="{FD314EC3-FAF3-42D4-B72F-81E23652E3D9}" type="pres">
-      <dgm:prSet presAssocID="{C499CC0F-4E7A-4FEC-97EE-0BDE6BB4004A}" presName="rootText" presStyleLbl="node4" presStyleIdx="21" presStyleCnt="43" custLinFactNeighborX="-36264" custLinFactNeighborY="400">
+      <dgm:prSet presAssocID="{C499CC0F-4E7A-4FEC-97EE-0BDE6BB4004A}" presName="rootText" presStyleLbl="node4" presStyleIdx="21" presStyleCnt="41" custLinFactNeighborX="-36264" custLinFactNeighborY="400">
         <dgm:presLayoutVars>
           <dgm:chPref val="3"/>
         </dgm:presLayoutVars>
@@ -4297,7 +4221,7 @@
       <dgm:spPr/>
     </dgm:pt>
     <dgm:pt modelId="{3FD13D51-28CB-4ACA-8CF5-784F6B0C3075}" type="pres">
-      <dgm:prSet presAssocID="{C499CC0F-4E7A-4FEC-97EE-0BDE6BB4004A}" presName="rootConnector" presStyleLbl="node4" presStyleIdx="21" presStyleCnt="43"/>
+      <dgm:prSet presAssocID="{C499CC0F-4E7A-4FEC-97EE-0BDE6BB4004A}" presName="rootConnector" presStyleLbl="node4" presStyleIdx="21" presStyleCnt="41"/>
       <dgm:spPr/>
     </dgm:pt>
     <dgm:pt modelId="{16EE9FFA-E407-4775-9823-E76B3F7213DD}" type="pres">
@@ -4305,7 +4229,7 @@
       <dgm:spPr/>
     </dgm:pt>
     <dgm:pt modelId="{37C7B046-E658-4728-A5FD-08A2F893709B}" type="pres">
-      <dgm:prSet presAssocID="{15D45A7A-4E59-4C7F-ABBD-61460C5C3DB2}" presName="Name64" presStyleLbl="parChTrans1D4" presStyleIdx="22" presStyleCnt="43"/>
+      <dgm:prSet presAssocID="{15D45A7A-4E59-4C7F-ABBD-61460C5C3DB2}" presName="Name64" presStyleLbl="parChTrans1D4" presStyleIdx="22" presStyleCnt="41"/>
       <dgm:spPr/>
     </dgm:pt>
     <dgm:pt modelId="{C9D6CD28-7D23-4B05-A502-31DCA3484F7E}" type="pres">
@@ -4321,7 +4245,7 @@
       <dgm:spPr/>
     </dgm:pt>
     <dgm:pt modelId="{5EB259C4-E4BD-45AD-8D91-75E7ABF1EFB4}" type="pres">
-      <dgm:prSet presAssocID="{37E0214C-29B5-4A4F-B604-EECED1F69AA7}" presName="rootText" presStyleLbl="node4" presStyleIdx="22" presStyleCnt="43" custLinFactNeighborX="-36264">
+      <dgm:prSet presAssocID="{37E0214C-29B5-4A4F-B604-EECED1F69AA7}" presName="rootText" presStyleLbl="node4" presStyleIdx="22" presStyleCnt="41" custLinFactNeighborX="-36264">
         <dgm:presLayoutVars>
           <dgm:chPref val="3"/>
         </dgm:presLayoutVars>
@@ -4329,7 +4253,7 @@
       <dgm:spPr/>
     </dgm:pt>
     <dgm:pt modelId="{36009CD3-F077-400A-9614-F0B171CB3F65}" type="pres">
-      <dgm:prSet presAssocID="{37E0214C-29B5-4A4F-B604-EECED1F69AA7}" presName="rootConnector" presStyleLbl="node4" presStyleIdx="22" presStyleCnt="43"/>
+      <dgm:prSet presAssocID="{37E0214C-29B5-4A4F-B604-EECED1F69AA7}" presName="rootConnector" presStyleLbl="node4" presStyleIdx="22" presStyleCnt="41"/>
       <dgm:spPr/>
     </dgm:pt>
     <dgm:pt modelId="{4492D2DB-B01E-403E-B9CC-B23A14B477DA}" type="pres">
@@ -4341,7 +4265,7 @@
       <dgm:spPr/>
     </dgm:pt>
     <dgm:pt modelId="{C58B2589-D93B-4FFD-B4D1-1C34B012D6DE}" type="pres">
-      <dgm:prSet presAssocID="{F5F715A1-32B9-4EDD-9788-21AAB2E1BF15}" presName="Name64" presStyleLbl="parChTrans1D4" presStyleIdx="23" presStyleCnt="43"/>
+      <dgm:prSet presAssocID="{F5F715A1-32B9-4EDD-9788-21AAB2E1BF15}" presName="Name64" presStyleLbl="parChTrans1D4" presStyleIdx="23" presStyleCnt="41"/>
       <dgm:spPr/>
     </dgm:pt>
     <dgm:pt modelId="{FB6DC599-E083-4507-8655-B8843A03BA24}" type="pres">
@@ -4357,7 +4281,7 @@
       <dgm:spPr/>
     </dgm:pt>
     <dgm:pt modelId="{8AB01EF0-ED64-478D-BD9E-3C5B414E81F6}" type="pres">
-      <dgm:prSet presAssocID="{77F152BA-1702-42D0-9AAF-CA97B4D146AE}" presName="rootText" presStyleLbl="node4" presStyleIdx="23" presStyleCnt="43" custLinFactNeighborX="-36264">
+      <dgm:prSet presAssocID="{77F152BA-1702-42D0-9AAF-CA97B4D146AE}" presName="rootText" presStyleLbl="node4" presStyleIdx="23" presStyleCnt="41" custLinFactNeighborX="-36264">
         <dgm:presLayoutVars>
           <dgm:chPref val="3"/>
         </dgm:presLayoutVars>
@@ -4365,7 +4289,7 @@
       <dgm:spPr/>
     </dgm:pt>
     <dgm:pt modelId="{B4B53097-535C-48B5-B1F5-66FFB2818E17}" type="pres">
-      <dgm:prSet presAssocID="{77F152BA-1702-42D0-9AAF-CA97B4D146AE}" presName="rootConnector" presStyleLbl="node4" presStyleIdx="23" presStyleCnt="43"/>
+      <dgm:prSet presAssocID="{77F152BA-1702-42D0-9AAF-CA97B4D146AE}" presName="rootConnector" presStyleLbl="node4" presStyleIdx="23" presStyleCnt="41"/>
       <dgm:spPr/>
     </dgm:pt>
     <dgm:pt modelId="{95DC8839-302A-43E9-8001-F23771822265}" type="pres">
@@ -4377,7 +4301,7 @@
       <dgm:spPr/>
     </dgm:pt>
     <dgm:pt modelId="{19C56599-44F2-4063-BC5C-5748142D59CB}" type="pres">
-      <dgm:prSet presAssocID="{2E19E6D7-316D-4B72-865E-9132A5133ED0}" presName="Name64" presStyleLbl="parChTrans1D4" presStyleIdx="24" presStyleCnt="43"/>
+      <dgm:prSet presAssocID="{2E19E6D7-316D-4B72-865E-9132A5133ED0}" presName="Name64" presStyleLbl="parChTrans1D4" presStyleIdx="24" presStyleCnt="41"/>
       <dgm:spPr/>
     </dgm:pt>
     <dgm:pt modelId="{E2339977-544D-4803-B502-2D0230BDE041}" type="pres">
@@ -4393,7 +4317,7 @@
       <dgm:spPr/>
     </dgm:pt>
     <dgm:pt modelId="{B2752A28-996B-46DB-B7DE-DC0CC42081C8}" type="pres">
-      <dgm:prSet presAssocID="{E530C472-7561-4AEE-B0C2-C508C6994A85}" presName="rootText" presStyleLbl="node4" presStyleIdx="24" presStyleCnt="43" custLinFactNeighborX="-36264">
+      <dgm:prSet presAssocID="{E530C472-7561-4AEE-B0C2-C508C6994A85}" presName="rootText" presStyleLbl="node4" presStyleIdx="24" presStyleCnt="41" custLinFactNeighborX="-36264">
         <dgm:presLayoutVars>
           <dgm:chPref val="3"/>
         </dgm:presLayoutVars>
@@ -4401,7 +4325,7 @@
       <dgm:spPr/>
     </dgm:pt>
     <dgm:pt modelId="{A0066D63-44FC-47D0-A615-BEA5BAB51686}" type="pres">
-      <dgm:prSet presAssocID="{E530C472-7561-4AEE-B0C2-C508C6994A85}" presName="rootConnector" presStyleLbl="node4" presStyleIdx="24" presStyleCnt="43"/>
+      <dgm:prSet presAssocID="{E530C472-7561-4AEE-B0C2-C508C6994A85}" presName="rootConnector" presStyleLbl="node4" presStyleIdx="24" presStyleCnt="41"/>
       <dgm:spPr/>
     </dgm:pt>
     <dgm:pt modelId="{8F48AF82-B7B7-4236-BA88-568321270E43}" type="pres">
@@ -4416,80 +4340,8 @@
       <dgm:prSet presAssocID="{C499CC0F-4E7A-4FEC-97EE-0BDE6BB4004A}" presName="hierChild5" presStyleCnt="0"/>
       <dgm:spPr/>
     </dgm:pt>
-    <dgm:pt modelId="{325B629F-ABB1-4EC6-9F54-565334BD27E2}" type="pres">
-      <dgm:prSet presAssocID="{A3638297-C98E-49B2-935E-46CEF1892D42}" presName="Name64" presStyleLbl="parChTrans1D4" presStyleIdx="25" presStyleCnt="43"/>
-      <dgm:spPr/>
-    </dgm:pt>
-    <dgm:pt modelId="{BA8D7E82-10E0-4B5D-A7A8-5B403C181AAD}" type="pres">
-      <dgm:prSet presAssocID="{503A382B-1D5A-4546-833B-2164E945BC79}" presName="hierRoot2" presStyleCnt="0">
-        <dgm:presLayoutVars>
-          <dgm:hierBranch val="init"/>
-        </dgm:presLayoutVars>
-      </dgm:prSet>
-      <dgm:spPr/>
-    </dgm:pt>
-    <dgm:pt modelId="{ECA125E0-FC36-4EDC-B5F3-63E1C3C35BB0}" type="pres">
-      <dgm:prSet presAssocID="{503A382B-1D5A-4546-833B-2164E945BC79}" presName="rootComposite" presStyleCnt="0"/>
-      <dgm:spPr/>
-    </dgm:pt>
-    <dgm:pt modelId="{B7E87C89-F2A3-40BE-A158-9348331D318D}" type="pres">
-      <dgm:prSet presAssocID="{503A382B-1D5A-4546-833B-2164E945BC79}" presName="rootText" presStyleLbl="node4" presStyleIdx="25" presStyleCnt="43" custLinFactNeighborX="-36264">
-        <dgm:presLayoutVars>
-          <dgm:chPref val="3"/>
-        </dgm:presLayoutVars>
-      </dgm:prSet>
-      <dgm:spPr/>
-    </dgm:pt>
-    <dgm:pt modelId="{F4F402F9-353D-4DAF-A0B3-B8E72F14207C}" type="pres">
-      <dgm:prSet presAssocID="{503A382B-1D5A-4546-833B-2164E945BC79}" presName="rootConnector" presStyleLbl="node4" presStyleIdx="25" presStyleCnt="43"/>
-      <dgm:spPr/>
-    </dgm:pt>
-    <dgm:pt modelId="{75DC4A39-6C23-4835-9E4D-4BC7EA472591}" type="pres">
-      <dgm:prSet presAssocID="{503A382B-1D5A-4546-833B-2164E945BC79}" presName="hierChild4" presStyleCnt="0"/>
-      <dgm:spPr/>
-    </dgm:pt>
-    <dgm:pt modelId="{C1341CAE-26B4-413C-B659-B4133610AE2C}" type="pres">
-      <dgm:prSet presAssocID="{95FA36E0-4680-4632-B27E-091BE020210A}" presName="Name64" presStyleLbl="parChTrans1D4" presStyleIdx="26" presStyleCnt="43"/>
-      <dgm:spPr/>
-    </dgm:pt>
-    <dgm:pt modelId="{34334FEB-0A74-4945-9E06-62902E13F72D}" type="pres">
-      <dgm:prSet presAssocID="{1BCF77AA-6B04-4D81-9D59-6F959F70F803}" presName="hierRoot2" presStyleCnt="0">
-        <dgm:presLayoutVars>
-          <dgm:hierBranch val="init"/>
-        </dgm:presLayoutVars>
-      </dgm:prSet>
-      <dgm:spPr/>
-    </dgm:pt>
-    <dgm:pt modelId="{0A75E738-A60A-41CD-B3C2-B6F965160774}" type="pres">
-      <dgm:prSet presAssocID="{1BCF77AA-6B04-4D81-9D59-6F959F70F803}" presName="rootComposite" presStyleCnt="0"/>
-      <dgm:spPr/>
-    </dgm:pt>
-    <dgm:pt modelId="{FD27C63C-53AB-4EF5-B065-A5CCC6683CBC}" type="pres">
-      <dgm:prSet presAssocID="{1BCF77AA-6B04-4D81-9D59-6F959F70F803}" presName="rootText" presStyleLbl="node4" presStyleIdx="26" presStyleCnt="43" custLinFactNeighborX="-36264">
-        <dgm:presLayoutVars>
-          <dgm:chPref val="3"/>
-        </dgm:presLayoutVars>
-      </dgm:prSet>
-      <dgm:spPr/>
-    </dgm:pt>
-    <dgm:pt modelId="{B81833A2-355D-431A-B42B-FFB97F5DED7E}" type="pres">
-      <dgm:prSet presAssocID="{1BCF77AA-6B04-4D81-9D59-6F959F70F803}" presName="rootConnector" presStyleLbl="node4" presStyleIdx="26" presStyleCnt="43"/>
-      <dgm:spPr/>
-    </dgm:pt>
-    <dgm:pt modelId="{B75101D1-41FE-4F79-AE84-A03090A9821A}" type="pres">
-      <dgm:prSet presAssocID="{1BCF77AA-6B04-4D81-9D59-6F959F70F803}" presName="hierChild4" presStyleCnt="0"/>
-      <dgm:spPr/>
-    </dgm:pt>
-    <dgm:pt modelId="{E2141735-2F07-4BB8-BD72-01BC72AD7827}" type="pres">
-      <dgm:prSet presAssocID="{1BCF77AA-6B04-4D81-9D59-6F959F70F803}" presName="hierChild5" presStyleCnt="0"/>
-      <dgm:spPr/>
-    </dgm:pt>
-    <dgm:pt modelId="{F121FC04-6ABC-4471-9661-93ED72B93D39}" type="pres">
-      <dgm:prSet presAssocID="{503A382B-1D5A-4546-833B-2164E945BC79}" presName="hierChild5" presStyleCnt="0"/>
-      <dgm:spPr/>
-    </dgm:pt>
     <dgm:pt modelId="{7C3BC206-817E-47FC-AA4A-7E68D35E9CC7}" type="pres">
-      <dgm:prSet presAssocID="{A5F5E471-F067-43AE-8556-402C42D66216}" presName="Name64" presStyleLbl="parChTrans1D4" presStyleIdx="27" presStyleCnt="43"/>
+      <dgm:prSet presAssocID="{A5F5E471-F067-43AE-8556-402C42D66216}" presName="Name64" presStyleLbl="parChTrans1D4" presStyleIdx="25" presStyleCnt="41"/>
       <dgm:spPr/>
     </dgm:pt>
     <dgm:pt modelId="{CE404325-D390-4D1D-A6D6-0523ECB0D0C3}" type="pres">
@@ -4505,7 +4357,7 @@
       <dgm:spPr/>
     </dgm:pt>
     <dgm:pt modelId="{E3458C5F-4332-4439-96AF-FD966B7B137A}" type="pres">
-      <dgm:prSet presAssocID="{D7660C3C-E08D-431C-8EE1-9AA78C89B4A5}" presName="rootText" presStyleLbl="node4" presStyleIdx="27" presStyleCnt="43" custLinFactNeighborX="-36264">
+      <dgm:prSet presAssocID="{D7660C3C-E08D-431C-8EE1-9AA78C89B4A5}" presName="rootText" presStyleLbl="node4" presStyleIdx="25" presStyleCnt="41" custLinFactNeighborX="-36264">
         <dgm:presLayoutVars>
           <dgm:chPref val="3"/>
         </dgm:presLayoutVars>
@@ -4513,7 +4365,7 @@
       <dgm:spPr/>
     </dgm:pt>
     <dgm:pt modelId="{E64611E0-F76B-4B48-BD4A-3D9E4DE85202}" type="pres">
-      <dgm:prSet presAssocID="{D7660C3C-E08D-431C-8EE1-9AA78C89B4A5}" presName="rootConnector" presStyleLbl="node4" presStyleIdx="27" presStyleCnt="43"/>
+      <dgm:prSet presAssocID="{D7660C3C-E08D-431C-8EE1-9AA78C89B4A5}" presName="rootConnector" presStyleLbl="node4" presStyleIdx="25" presStyleCnt="41"/>
       <dgm:spPr/>
     </dgm:pt>
     <dgm:pt modelId="{178FB168-8EC0-4C39-B0F2-CBAC9954840C}" type="pres">
@@ -4521,7 +4373,7 @@
       <dgm:spPr/>
     </dgm:pt>
     <dgm:pt modelId="{93F93993-47F1-428E-9F9E-450A331F894E}" type="pres">
-      <dgm:prSet presAssocID="{BCF3A011-CCE5-4332-B9BE-4DBB4EB90D3E}" presName="Name64" presStyleLbl="parChTrans1D4" presStyleIdx="28" presStyleCnt="43"/>
+      <dgm:prSet presAssocID="{BCF3A011-CCE5-4332-B9BE-4DBB4EB90D3E}" presName="Name64" presStyleLbl="parChTrans1D4" presStyleIdx="26" presStyleCnt="41"/>
       <dgm:spPr/>
     </dgm:pt>
     <dgm:pt modelId="{10C12785-5206-46A6-BA56-0F5E579E9E0C}" type="pres">
@@ -4537,7 +4389,7 @@
       <dgm:spPr/>
     </dgm:pt>
     <dgm:pt modelId="{07CF39E6-9B2B-4A5F-B780-120DD8E62C9B}" type="pres">
-      <dgm:prSet presAssocID="{061809CC-87E0-4E97-84A6-384BF07724D8}" presName="rootText" presStyleLbl="node4" presStyleIdx="28" presStyleCnt="43" custLinFactNeighborX="-36264">
+      <dgm:prSet presAssocID="{061809CC-87E0-4E97-84A6-384BF07724D8}" presName="rootText" presStyleLbl="node4" presStyleIdx="26" presStyleCnt="41" custLinFactNeighborX="-36264">
         <dgm:presLayoutVars>
           <dgm:chPref val="3"/>
         </dgm:presLayoutVars>
@@ -4545,7 +4397,7 @@
       <dgm:spPr/>
     </dgm:pt>
     <dgm:pt modelId="{B2D69DCB-202B-46EC-819A-C954631D964B}" type="pres">
-      <dgm:prSet presAssocID="{061809CC-87E0-4E97-84A6-384BF07724D8}" presName="rootConnector" presStyleLbl="node4" presStyleIdx="28" presStyleCnt="43"/>
+      <dgm:prSet presAssocID="{061809CC-87E0-4E97-84A6-384BF07724D8}" presName="rootConnector" presStyleLbl="node4" presStyleIdx="26" presStyleCnt="41"/>
       <dgm:spPr/>
     </dgm:pt>
     <dgm:pt modelId="{39477503-7022-4EFE-910A-4D9CD5006307}" type="pres">
@@ -4553,7 +4405,7 @@
       <dgm:spPr/>
     </dgm:pt>
     <dgm:pt modelId="{00A95A3F-3AAD-468F-908F-845C4ED90DA2}" type="pres">
-      <dgm:prSet presAssocID="{2637AE1D-117E-454F-9D3F-416D113148BB}" presName="Name64" presStyleLbl="parChTrans1D4" presStyleIdx="29" presStyleCnt="43"/>
+      <dgm:prSet presAssocID="{2637AE1D-117E-454F-9D3F-416D113148BB}" presName="Name64" presStyleLbl="parChTrans1D4" presStyleIdx="27" presStyleCnt="41"/>
       <dgm:spPr/>
     </dgm:pt>
     <dgm:pt modelId="{A679DF6E-2E87-49EF-9331-294A3BA4327D}" type="pres">
@@ -4569,7 +4421,7 @@
       <dgm:spPr/>
     </dgm:pt>
     <dgm:pt modelId="{B652EFB0-A88E-48A1-836A-A245919707FD}" type="pres">
-      <dgm:prSet presAssocID="{F7D84224-A973-485F-ADAD-95BF5231A40B}" presName="rootText" presStyleLbl="node4" presStyleIdx="29" presStyleCnt="43" custLinFactNeighborX="-36264">
+      <dgm:prSet presAssocID="{F7D84224-A973-485F-ADAD-95BF5231A40B}" presName="rootText" presStyleLbl="node4" presStyleIdx="27" presStyleCnt="41" custLinFactNeighborX="-36264">
         <dgm:presLayoutVars>
           <dgm:chPref val="3"/>
         </dgm:presLayoutVars>
@@ -4577,7 +4429,7 @@
       <dgm:spPr/>
     </dgm:pt>
     <dgm:pt modelId="{DC81B629-CD82-4B25-9F47-C4E4D420D1AE}" type="pres">
-      <dgm:prSet presAssocID="{F7D84224-A973-485F-ADAD-95BF5231A40B}" presName="rootConnector" presStyleLbl="node4" presStyleIdx="29" presStyleCnt="43"/>
+      <dgm:prSet presAssocID="{F7D84224-A973-485F-ADAD-95BF5231A40B}" presName="rootConnector" presStyleLbl="node4" presStyleIdx="27" presStyleCnt="41"/>
       <dgm:spPr/>
     </dgm:pt>
     <dgm:pt modelId="{6D88FD24-272B-4F88-85DA-3D20C3E257B3}" type="pres">
@@ -4593,7 +4445,7 @@
       <dgm:spPr/>
     </dgm:pt>
     <dgm:pt modelId="{CA185CE9-65D3-4677-966D-33B7645E2257}" type="pres">
-      <dgm:prSet presAssocID="{45EF24BF-2957-4968-9E77-C679A38F2BE0}" presName="Name64" presStyleLbl="parChTrans1D4" presStyleIdx="30" presStyleCnt="43"/>
+      <dgm:prSet presAssocID="{45EF24BF-2957-4968-9E77-C679A38F2BE0}" presName="Name64" presStyleLbl="parChTrans1D4" presStyleIdx="28" presStyleCnt="41"/>
       <dgm:spPr/>
     </dgm:pt>
     <dgm:pt modelId="{EC40E019-0120-4F45-94FE-CCD6C60DCCFC}" type="pres">
@@ -4609,7 +4461,7 @@
       <dgm:spPr/>
     </dgm:pt>
     <dgm:pt modelId="{1D1D8692-63AE-448E-8E39-430F6A4B46BF}" type="pres">
-      <dgm:prSet presAssocID="{CD4954CC-F1E7-474A-9C14-897F60DC4DA4}" presName="rootText" presStyleLbl="node4" presStyleIdx="30" presStyleCnt="43" custLinFactNeighborX="-36264">
+      <dgm:prSet presAssocID="{CD4954CC-F1E7-474A-9C14-897F60DC4DA4}" presName="rootText" presStyleLbl="node4" presStyleIdx="28" presStyleCnt="41" custLinFactNeighborX="-36264">
         <dgm:presLayoutVars>
           <dgm:chPref val="3"/>
         </dgm:presLayoutVars>
@@ -4617,7 +4469,7 @@
       <dgm:spPr/>
     </dgm:pt>
     <dgm:pt modelId="{18E21695-07C6-4F19-99E8-D16CE3157C9B}" type="pres">
-      <dgm:prSet presAssocID="{CD4954CC-F1E7-474A-9C14-897F60DC4DA4}" presName="rootConnector" presStyleLbl="node4" presStyleIdx="30" presStyleCnt="43"/>
+      <dgm:prSet presAssocID="{CD4954CC-F1E7-474A-9C14-897F60DC4DA4}" presName="rootConnector" presStyleLbl="node4" presStyleIdx="28" presStyleCnt="41"/>
       <dgm:spPr/>
     </dgm:pt>
     <dgm:pt modelId="{3BDF94F5-1D25-402E-8247-6F898723BBB9}" type="pres">
@@ -4625,7 +4477,7 @@
       <dgm:spPr/>
     </dgm:pt>
     <dgm:pt modelId="{6EBCB12D-6D77-4447-9F58-D885806C37C1}" type="pres">
-      <dgm:prSet presAssocID="{04012DFC-77A8-4A46-B858-7332CB8C84A1}" presName="Name64" presStyleLbl="parChTrans1D4" presStyleIdx="31" presStyleCnt="43"/>
+      <dgm:prSet presAssocID="{04012DFC-77A8-4A46-B858-7332CB8C84A1}" presName="Name64" presStyleLbl="parChTrans1D4" presStyleIdx="29" presStyleCnt="41"/>
       <dgm:spPr/>
     </dgm:pt>
     <dgm:pt modelId="{C4BC5194-FE1C-4020-9B78-BED164EFDC75}" type="pres">
@@ -4641,7 +4493,7 @@
       <dgm:spPr/>
     </dgm:pt>
     <dgm:pt modelId="{CF184D97-6870-475F-82DD-C951C974B444}" type="pres">
-      <dgm:prSet presAssocID="{6D92348B-BF22-4F09-BD16-E4E9FEADFB32}" presName="rootText" presStyleLbl="node4" presStyleIdx="31" presStyleCnt="43" custLinFactNeighborX="-36264">
+      <dgm:prSet presAssocID="{6D92348B-BF22-4F09-BD16-E4E9FEADFB32}" presName="rootText" presStyleLbl="node4" presStyleIdx="29" presStyleCnt="41" custLinFactNeighborX="-36264">
         <dgm:presLayoutVars>
           <dgm:chPref val="3"/>
         </dgm:presLayoutVars>
@@ -4649,7 +4501,7 @@
       <dgm:spPr/>
     </dgm:pt>
     <dgm:pt modelId="{368DE4E4-C42A-435E-AD32-88164C04A62F}" type="pres">
-      <dgm:prSet presAssocID="{6D92348B-BF22-4F09-BD16-E4E9FEADFB32}" presName="rootConnector" presStyleLbl="node4" presStyleIdx="31" presStyleCnt="43"/>
+      <dgm:prSet presAssocID="{6D92348B-BF22-4F09-BD16-E4E9FEADFB32}" presName="rootConnector" presStyleLbl="node4" presStyleIdx="29" presStyleCnt="41"/>
       <dgm:spPr/>
     </dgm:pt>
     <dgm:pt modelId="{2F5EE40E-768E-468A-97CB-B7D089D3E5A6}" type="pres">
@@ -4777,7 +4629,7 @@
       <dgm:spPr/>
     </dgm:pt>
     <dgm:pt modelId="{AF9CAAFC-37A2-4187-8C63-BDC2E7B8A2E9}" type="pres">
-      <dgm:prSet presAssocID="{5CD82464-BD85-410D-9486-CDF630216295}" presName="Name64" presStyleLbl="parChTrans1D4" presStyleIdx="32" presStyleCnt="43"/>
+      <dgm:prSet presAssocID="{5CD82464-BD85-410D-9486-CDF630216295}" presName="Name64" presStyleLbl="parChTrans1D4" presStyleIdx="30" presStyleCnt="41"/>
       <dgm:spPr/>
     </dgm:pt>
     <dgm:pt modelId="{2042EA74-39A6-4A01-BBF1-F23AE808212A}" type="pres">
@@ -4793,7 +4645,7 @@
       <dgm:spPr/>
     </dgm:pt>
     <dgm:pt modelId="{BEB5F23A-260D-4EA4-9C52-D29289AE19DF}" type="pres">
-      <dgm:prSet presAssocID="{97A8E0E5-1256-46F5-BDCA-CBF242F3C57E}" presName="rootText" presStyleLbl="node4" presStyleIdx="32" presStyleCnt="43" custLinFactNeighborX="-36264">
+      <dgm:prSet presAssocID="{97A8E0E5-1256-46F5-BDCA-CBF242F3C57E}" presName="rootText" presStyleLbl="node4" presStyleIdx="30" presStyleCnt="41" custLinFactNeighborX="-36264">
         <dgm:presLayoutVars>
           <dgm:chPref val="3"/>
         </dgm:presLayoutVars>
@@ -4801,7 +4653,7 @@
       <dgm:spPr/>
     </dgm:pt>
     <dgm:pt modelId="{B70E4C0E-1521-4091-B753-26370D64F4FD}" type="pres">
-      <dgm:prSet presAssocID="{97A8E0E5-1256-46F5-BDCA-CBF242F3C57E}" presName="rootConnector" presStyleLbl="node4" presStyleIdx="32" presStyleCnt="43"/>
+      <dgm:prSet presAssocID="{97A8E0E5-1256-46F5-BDCA-CBF242F3C57E}" presName="rootConnector" presStyleLbl="node4" presStyleIdx="30" presStyleCnt="41"/>
       <dgm:spPr/>
     </dgm:pt>
     <dgm:pt modelId="{59A16828-9F48-4DC0-B6AB-56DC66C5C14A}" type="pres">
@@ -4813,7 +4665,7 @@
       <dgm:spPr/>
     </dgm:pt>
     <dgm:pt modelId="{B074A3F9-9B82-47D6-B99B-37FA4AD461B1}" type="pres">
-      <dgm:prSet presAssocID="{2053DD24-1A05-4174-B3A2-006AF3B872F4}" presName="Name64" presStyleLbl="parChTrans1D4" presStyleIdx="33" presStyleCnt="43"/>
+      <dgm:prSet presAssocID="{2053DD24-1A05-4174-B3A2-006AF3B872F4}" presName="Name64" presStyleLbl="parChTrans1D4" presStyleIdx="31" presStyleCnt="41"/>
       <dgm:spPr/>
     </dgm:pt>
     <dgm:pt modelId="{E5641DC2-99FE-4CFE-BBC9-8BC561313068}" type="pres">
@@ -4829,7 +4681,7 @@
       <dgm:spPr/>
     </dgm:pt>
     <dgm:pt modelId="{15470CCD-2DC4-4446-952E-0EA1F9168293}" type="pres">
-      <dgm:prSet presAssocID="{35D396C7-832D-4310-9EFD-0CBA7534B49E}" presName="rootText" presStyleLbl="node4" presStyleIdx="33" presStyleCnt="43" custLinFactNeighborX="-36264">
+      <dgm:prSet presAssocID="{35D396C7-832D-4310-9EFD-0CBA7534B49E}" presName="rootText" presStyleLbl="node4" presStyleIdx="31" presStyleCnt="41" custLinFactNeighborX="-36264">
         <dgm:presLayoutVars>
           <dgm:chPref val="3"/>
         </dgm:presLayoutVars>
@@ -4837,7 +4689,7 @@
       <dgm:spPr/>
     </dgm:pt>
     <dgm:pt modelId="{C1FA8641-48D3-43B7-8727-7E323B1B501C}" type="pres">
-      <dgm:prSet presAssocID="{35D396C7-832D-4310-9EFD-0CBA7534B49E}" presName="rootConnector" presStyleLbl="node4" presStyleIdx="33" presStyleCnt="43"/>
+      <dgm:prSet presAssocID="{35D396C7-832D-4310-9EFD-0CBA7534B49E}" presName="rootConnector" presStyleLbl="node4" presStyleIdx="31" presStyleCnt="41"/>
       <dgm:spPr/>
     </dgm:pt>
     <dgm:pt modelId="{C6CE1518-27B6-404B-99E1-54C509EB30D2}" type="pres">
@@ -4845,7 +4697,7 @@
       <dgm:spPr/>
     </dgm:pt>
     <dgm:pt modelId="{B4F70755-F4D1-485F-892E-3C7B87066BCB}" type="pres">
-      <dgm:prSet presAssocID="{455048BF-88A9-42EC-8893-BB00D9AEA4E4}" presName="Name64" presStyleLbl="parChTrans1D4" presStyleIdx="34" presStyleCnt="43"/>
+      <dgm:prSet presAssocID="{455048BF-88A9-42EC-8893-BB00D9AEA4E4}" presName="Name64" presStyleLbl="parChTrans1D4" presStyleIdx="32" presStyleCnt="41"/>
       <dgm:spPr/>
     </dgm:pt>
     <dgm:pt modelId="{ABFA4637-8EA1-4BB9-A524-2A1FE95E5257}" type="pres">
@@ -4861,7 +4713,7 @@
       <dgm:spPr/>
     </dgm:pt>
     <dgm:pt modelId="{9921040E-A9AE-4E20-B3A7-1033725EAB32}" type="pres">
-      <dgm:prSet presAssocID="{BD4CBB34-BFC3-4314-AC58-360CE3F828A3}" presName="rootText" presStyleLbl="node4" presStyleIdx="34" presStyleCnt="43" custLinFactNeighborX="-36264">
+      <dgm:prSet presAssocID="{BD4CBB34-BFC3-4314-AC58-360CE3F828A3}" presName="rootText" presStyleLbl="node4" presStyleIdx="32" presStyleCnt="41" custLinFactNeighborX="-36264">
         <dgm:presLayoutVars>
           <dgm:chPref val="3"/>
         </dgm:presLayoutVars>
@@ -4869,7 +4721,7 @@
       <dgm:spPr/>
     </dgm:pt>
     <dgm:pt modelId="{3374B034-7516-421E-BD23-9C0F9E320F00}" type="pres">
-      <dgm:prSet presAssocID="{BD4CBB34-BFC3-4314-AC58-360CE3F828A3}" presName="rootConnector" presStyleLbl="node4" presStyleIdx="34" presStyleCnt="43"/>
+      <dgm:prSet presAssocID="{BD4CBB34-BFC3-4314-AC58-360CE3F828A3}" presName="rootConnector" presStyleLbl="node4" presStyleIdx="32" presStyleCnt="41"/>
       <dgm:spPr/>
     </dgm:pt>
     <dgm:pt modelId="{33F80BDE-DC97-4638-BCF9-8B0A5C5B0084}" type="pres">
@@ -4881,7 +4733,7 @@
       <dgm:spPr/>
     </dgm:pt>
     <dgm:pt modelId="{8DDA93F8-5C72-4B48-9D1D-CEE49333C83C}" type="pres">
-      <dgm:prSet presAssocID="{7D9BDDE8-7610-4C76-ACCC-5EF685046CB6}" presName="Name64" presStyleLbl="parChTrans1D4" presStyleIdx="35" presStyleCnt="43"/>
+      <dgm:prSet presAssocID="{7D9BDDE8-7610-4C76-ACCC-5EF685046CB6}" presName="Name64" presStyleLbl="parChTrans1D4" presStyleIdx="33" presStyleCnt="41"/>
       <dgm:spPr/>
     </dgm:pt>
     <dgm:pt modelId="{2644546B-EA91-4559-89A5-D9CC3F2967A0}" type="pres">
@@ -4897,7 +4749,7 @@
       <dgm:spPr/>
     </dgm:pt>
     <dgm:pt modelId="{4C50E7F0-CBE9-462F-A0E5-5FFE1AE84F4E}" type="pres">
-      <dgm:prSet presAssocID="{D81506E7-9321-4CD6-B783-B535E14E9673}" presName="rootText" presStyleLbl="node4" presStyleIdx="35" presStyleCnt="43" custLinFactNeighborX="-36264">
+      <dgm:prSet presAssocID="{D81506E7-9321-4CD6-B783-B535E14E9673}" presName="rootText" presStyleLbl="node4" presStyleIdx="33" presStyleCnt="41" custLinFactNeighborX="-36264">
         <dgm:presLayoutVars>
           <dgm:chPref val="3"/>
         </dgm:presLayoutVars>
@@ -4905,7 +4757,7 @@
       <dgm:spPr/>
     </dgm:pt>
     <dgm:pt modelId="{86FF5A9C-E5F2-4B8C-83BD-290D4D4AB6AC}" type="pres">
-      <dgm:prSet presAssocID="{D81506E7-9321-4CD6-B783-B535E14E9673}" presName="rootConnector" presStyleLbl="node4" presStyleIdx="35" presStyleCnt="43"/>
+      <dgm:prSet presAssocID="{D81506E7-9321-4CD6-B783-B535E14E9673}" presName="rootConnector" presStyleLbl="node4" presStyleIdx="33" presStyleCnt="41"/>
       <dgm:spPr/>
     </dgm:pt>
     <dgm:pt modelId="{4816209B-7B93-4538-AC6F-995B7E78A1F7}" type="pres">
@@ -4921,7 +4773,7 @@
       <dgm:spPr/>
     </dgm:pt>
     <dgm:pt modelId="{4B5CDAF5-A7FE-436E-9DA3-25A539D89D1F}" type="pres">
-      <dgm:prSet presAssocID="{320AF489-F490-4FB9-A435-9E69697CB6A1}" presName="Name64" presStyleLbl="parChTrans1D4" presStyleIdx="36" presStyleCnt="43"/>
+      <dgm:prSet presAssocID="{320AF489-F490-4FB9-A435-9E69697CB6A1}" presName="Name64" presStyleLbl="parChTrans1D4" presStyleIdx="34" presStyleCnt="41"/>
       <dgm:spPr/>
     </dgm:pt>
     <dgm:pt modelId="{B5E7DA6C-2B95-499E-967F-1829236E4839}" type="pres">
@@ -4937,7 +4789,7 @@
       <dgm:spPr/>
     </dgm:pt>
     <dgm:pt modelId="{E142E4F7-A4D2-449F-AA7F-C04C088A3C1F}" type="pres">
-      <dgm:prSet presAssocID="{73528B28-3862-4C56-BB94-20BFCA4D977C}" presName="rootText" presStyleLbl="node4" presStyleIdx="36" presStyleCnt="43" custLinFactNeighborX="-36264" custLinFactNeighborY="5624">
+      <dgm:prSet presAssocID="{73528B28-3862-4C56-BB94-20BFCA4D977C}" presName="rootText" presStyleLbl="node4" presStyleIdx="34" presStyleCnt="41" custLinFactNeighborX="-36264" custLinFactNeighborY="5624">
         <dgm:presLayoutVars>
           <dgm:chPref val="3"/>
         </dgm:presLayoutVars>
@@ -4945,7 +4797,7 @@
       <dgm:spPr/>
     </dgm:pt>
     <dgm:pt modelId="{74B77C7E-36E3-406E-BAC0-4831F4BABB3C}" type="pres">
-      <dgm:prSet presAssocID="{73528B28-3862-4C56-BB94-20BFCA4D977C}" presName="rootConnector" presStyleLbl="node4" presStyleIdx="36" presStyleCnt="43"/>
+      <dgm:prSet presAssocID="{73528B28-3862-4C56-BB94-20BFCA4D977C}" presName="rootConnector" presStyleLbl="node4" presStyleIdx="34" presStyleCnt="41"/>
       <dgm:spPr/>
     </dgm:pt>
     <dgm:pt modelId="{13C0BE53-A6FB-4FC3-BE13-CB6347CDFEC7}" type="pres">
@@ -4953,7 +4805,7 @@
       <dgm:spPr/>
     </dgm:pt>
     <dgm:pt modelId="{5576216A-3077-45AB-A127-F30F0DED6DB4}" type="pres">
-      <dgm:prSet presAssocID="{7EAE4E30-3B2B-4BF1-AF19-64FF953D8F19}" presName="Name64" presStyleLbl="parChTrans1D4" presStyleIdx="37" presStyleCnt="43"/>
+      <dgm:prSet presAssocID="{7EAE4E30-3B2B-4BF1-AF19-64FF953D8F19}" presName="Name64" presStyleLbl="parChTrans1D4" presStyleIdx="35" presStyleCnt="41"/>
       <dgm:spPr/>
     </dgm:pt>
     <dgm:pt modelId="{9BF33097-DE0B-4D20-B6F4-517CD37DF75A}" type="pres">
@@ -4969,7 +4821,7 @@
       <dgm:spPr/>
     </dgm:pt>
     <dgm:pt modelId="{077C8107-272A-4607-AB45-2B402815F473}" type="pres">
-      <dgm:prSet presAssocID="{EA7A0999-7E11-469C-B351-825D5B14346C}" presName="rootText" presStyleLbl="node4" presStyleIdx="37" presStyleCnt="43" custLinFactNeighborX="-36264" custLinFactNeighborY="-13399">
+      <dgm:prSet presAssocID="{EA7A0999-7E11-469C-B351-825D5B14346C}" presName="rootText" presStyleLbl="node4" presStyleIdx="35" presStyleCnt="41" custLinFactNeighborX="-36264" custLinFactNeighborY="-13399">
         <dgm:presLayoutVars>
           <dgm:chPref val="3"/>
         </dgm:presLayoutVars>
@@ -4977,7 +4829,7 @@
       <dgm:spPr/>
     </dgm:pt>
     <dgm:pt modelId="{344161FC-D582-44F8-A0C8-A2B85FDD4A39}" type="pres">
-      <dgm:prSet presAssocID="{EA7A0999-7E11-469C-B351-825D5B14346C}" presName="rootConnector" presStyleLbl="node4" presStyleIdx="37" presStyleCnt="43"/>
+      <dgm:prSet presAssocID="{EA7A0999-7E11-469C-B351-825D5B14346C}" presName="rootConnector" presStyleLbl="node4" presStyleIdx="35" presStyleCnt="41"/>
       <dgm:spPr/>
     </dgm:pt>
     <dgm:pt modelId="{BA9C9CE7-3ABD-4FF3-AF12-1BC70E8C15BD}" type="pres">
@@ -4985,7 +4837,7 @@
       <dgm:spPr/>
     </dgm:pt>
     <dgm:pt modelId="{778DAB78-F42A-4C33-B206-904EFB14DFD2}" type="pres">
-      <dgm:prSet presAssocID="{FC591F30-D81A-4461-B913-3123C1B3970E}" presName="Name64" presStyleLbl="parChTrans1D4" presStyleIdx="38" presStyleCnt="43"/>
+      <dgm:prSet presAssocID="{FC591F30-D81A-4461-B913-3123C1B3970E}" presName="Name64" presStyleLbl="parChTrans1D4" presStyleIdx="36" presStyleCnt="41"/>
       <dgm:spPr/>
     </dgm:pt>
     <dgm:pt modelId="{922766CF-61AE-4415-9246-1882CE811E53}" type="pres">
@@ -5001,7 +4853,7 @@
       <dgm:spPr/>
     </dgm:pt>
     <dgm:pt modelId="{5E1565E1-8DBB-4A62-B412-DA531FDF40C5}" type="pres">
-      <dgm:prSet presAssocID="{F288657A-3E95-4264-946F-655DEA89BC1B}" presName="rootText" presStyleLbl="node4" presStyleIdx="38" presStyleCnt="43" custLinFactNeighborX="-36499" custLinFactNeighborY="-14031">
+      <dgm:prSet presAssocID="{F288657A-3E95-4264-946F-655DEA89BC1B}" presName="rootText" presStyleLbl="node4" presStyleIdx="36" presStyleCnt="41" custLinFactNeighborX="-36499" custLinFactNeighborY="-14031">
         <dgm:presLayoutVars>
           <dgm:chPref val="3"/>
         </dgm:presLayoutVars>
@@ -5009,7 +4861,7 @@
       <dgm:spPr/>
     </dgm:pt>
     <dgm:pt modelId="{81F10789-09DC-4F70-9ED3-E842524E292C}" type="pres">
-      <dgm:prSet presAssocID="{F288657A-3E95-4264-946F-655DEA89BC1B}" presName="rootConnector" presStyleLbl="node4" presStyleIdx="38" presStyleCnt="43"/>
+      <dgm:prSet presAssocID="{F288657A-3E95-4264-946F-655DEA89BC1B}" presName="rootConnector" presStyleLbl="node4" presStyleIdx="36" presStyleCnt="41"/>
       <dgm:spPr/>
     </dgm:pt>
     <dgm:pt modelId="{2856BBF8-3BC6-4E3B-9F06-2E57931860AE}" type="pres">
@@ -5025,7 +4877,7 @@
       <dgm:spPr/>
     </dgm:pt>
     <dgm:pt modelId="{AC36F323-9781-49C2-AC9D-9FE0D0914471}" type="pres">
-      <dgm:prSet presAssocID="{0A82A9F9-F8DB-48E6-BE95-9938B72AE66A}" presName="Name64" presStyleLbl="parChTrans1D4" presStyleIdx="39" presStyleCnt="43"/>
+      <dgm:prSet presAssocID="{0A82A9F9-F8DB-48E6-BE95-9938B72AE66A}" presName="Name64" presStyleLbl="parChTrans1D4" presStyleIdx="37" presStyleCnt="41"/>
       <dgm:spPr/>
     </dgm:pt>
     <dgm:pt modelId="{A623A603-E9EF-4FBE-94F3-60ED4154EEA3}" type="pres">
@@ -5041,7 +4893,7 @@
       <dgm:spPr/>
     </dgm:pt>
     <dgm:pt modelId="{5DE52887-637E-4373-B534-4602DEAB0BD9}" type="pres">
-      <dgm:prSet presAssocID="{DCD0A810-0B3E-43AF-9F79-6C4A668A5E35}" presName="rootText" presStyleLbl="node4" presStyleIdx="39" presStyleCnt="43" custLinFactNeighborX="-36499" custLinFactNeighborY="6719">
+      <dgm:prSet presAssocID="{DCD0A810-0B3E-43AF-9F79-6C4A668A5E35}" presName="rootText" presStyleLbl="node4" presStyleIdx="37" presStyleCnt="41" custLinFactNeighborX="-36499" custLinFactNeighborY="6719">
         <dgm:presLayoutVars>
           <dgm:chPref val="3"/>
         </dgm:presLayoutVars>
@@ -5049,7 +4901,7 @@
       <dgm:spPr/>
     </dgm:pt>
     <dgm:pt modelId="{D25F030A-0E76-4787-8E45-0D8630311C8E}" type="pres">
-      <dgm:prSet presAssocID="{DCD0A810-0B3E-43AF-9F79-6C4A668A5E35}" presName="rootConnector" presStyleLbl="node4" presStyleIdx="39" presStyleCnt="43"/>
+      <dgm:prSet presAssocID="{DCD0A810-0B3E-43AF-9F79-6C4A668A5E35}" presName="rootConnector" presStyleLbl="node4" presStyleIdx="37" presStyleCnt="41"/>
       <dgm:spPr/>
     </dgm:pt>
     <dgm:pt modelId="{00408B1E-AE36-4605-B19F-C6F5494CD256}" type="pres">
@@ -5057,7 +4909,7 @@
       <dgm:spPr/>
     </dgm:pt>
     <dgm:pt modelId="{83BD61C6-04D5-45F9-B857-526E2040AED7}" type="pres">
-      <dgm:prSet presAssocID="{091DE579-AA3E-4BAF-93C8-F3A0F7081FA3}" presName="Name64" presStyleLbl="parChTrans1D4" presStyleIdx="40" presStyleCnt="43"/>
+      <dgm:prSet presAssocID="{091DE579-AA3E-4BAF-93C8-F3A0F7081FA3}" presName="Name64" presStyleLbl="parChTrans1D4" presStyleIdx="38" presStyleCnt="41"/>
       <dgm:spPr/>
     </dgm:pt>
     <dgm:pt modelId="{CA826B94-811A-42B7-B4C7-8871688360B0}" type="pres">
@@ -5073,7 +4925,7 @@
       <dgm:spPr/>
     </dgm:pt>
     <dgm:pt modelId="{E3B5D82B-AC9E-4D78-9879-707CC20D19D9}" type="pres">
-      <dgm:prSet presAssocID="{E0980975-400D-419C-9155-50E81827743F}" presName="rootText" presStyleLbl="node4" presStyleIdx="40" presStyleCnt="43" custLinFactNeighborX="-33360" custLinFactNeighborY="7458">
+      <dgm:prSet presAssocID="{E0980975-400D-419C-9155-50E81827743F}" presName="rootText" presStyleLbl="node4" presStyleIdx="38" presStyleCnt="41" custLinFactNeighborX="-33360" custLinFactNeighborY="7458">
         <dgm:presLayoutVars>
           <dgm:chPref val="3"/>
         </dgm:presLayoutVars>
@@ -5081,7 +4933,7 @@
       <dgm:spPr/>
     </dgm:pt>
     <dgm:pt modelId="{506B6D35-0A73-4492-B07D-5FEFBBD02FC5}" type="pres">
-      <dgm:prSet presAssocID="{E0980975-400D-419C-9155-50E81827743F}" presName="rootConnector" presStyleLbl="node4" presStyleIdx="40" presStyleCnt="43"/>
+      <dgm:prSet presAssocID="{E0980975-400D-419C-9155-50E81827743F}" presName="rootConnector" presStyleLbl="node4" presStyleIdx="38" presStyleCnt="41"/>
       <dgm:spPr/>
     </dgm:pt>
     <dgm:pt modelId="{D4EE9BE4-5874-46B3-ABCA-A012AEE03C79}" type="pres">
@@ -5097,7 +4949,7 @@
       <dgm:spPr/>
     </dgm:pt>
     <dgm:pt modelId="{1080A977-02D6-46CB-9E9A-F0CCB3AFC0E0}" type="pres">
-      <dgm:prSet presAssocID="{FEF77FE8-4A4E-4157-95A8-111A1FA87F78}" presName="Name64" presStyleLbl="parChTrans1D4" presStyleIdx="41" presStyleCnt="43"/>
+      <dgm:prSet presAssocID="{FEF77FE8-4A4E-4157-95A8-111A1FA87F78}" presName="Name64" presStyleLbl="parChTrans1D4" presStyleIdx="39" presStyleCnt="41"/>
       <dgm:spPr/>
     </dgm:pt>
     <dgm:pt modelId="{989A74D4-DB01-46C5-98BD-3FFF2B78B07B}" type="pres">
@@ -5113,7 +4965,7 @@
       <dgm:spPr/>
     </dgm:pt>
     <dgm:pt modelId="{BFC464B6-E6B9-483D-BEE4-D79A9462E3E9}" type="pres">
-      <dgm:prSet presAssocID="{7A7E87E6-0B7C-4CCF-A557-E773A9C92185}" presName="rootText" presStyleLbl="node4" presStyleIdx="41" presStyleCnt="43" custLinFactNeighborX="-36499" custLinFactNeighborY="-1777">
+      <dgm:prSet presAssocID="{7A7E87E6-0B7C-4CCF-A557-E773A9C92185}" presName="rootText" presStyleLbl="node4" presStyleIdx="39" presStyleCnt="41" custLinFactNeighborX="-36499" custLinFactNeighborY="-1777">
         <dgm:presLayoutVars>
           <dgm:chPref val="3"/>
         </dgm:presLayoutVars>
@@ -5121,7 +4973,7 @@
       <dgm:spPr/>
     </dgm:pt>
     <dgm:pt modelId="{F9BBD577-B359-4A17-AE01-E426CC635ACF}" type="pres">
-      <dgm:prSet presAssocID="{7A7E87E6-0B7C-4CCF-A557-E773A9C92185}" presName="rootConnector" presStyleLbl="node4" presStyleIdx="41" presStyleCnt="43"/>
+      <dgm:prSet presAssocID="{7A7E87E6-0B7C-4CCF-A557-E773A9C92185}" presName="rootConnector" presStyleLbl="node4" presStyleIdx="39" presStyleCnt="41"/>
       <dgm:spPr/>
     </dgm:pt>
     <dgm:pt modelId="{BE23A337-EBBC-4628-82C3-7F40908C3FFA}" type="pres">
@@ -5129,7 +4981,7 @@
       <dgm:spPr/>
     </dgm:pt>
     <dgm:pt modelId="{7F1B5AF2-5075-410B-9D3C-F200774C2ADD}" type="pres">
-      <dgm:prSet presAssocID="{2E2633E2-E124-4687-AA9E-0EA186E27085}" presName="Name64" presStyleLbl="parChTrans1D4" presStyleIdx="42" presStyleCnt="43"/>
+      <dgm:prSet presAssocID="{2E2633E2-E124-4687-AA9E-0EA186E27085}" presName="Name64" presStyleLbl="parChTrans1D4" presStyleIdx="40" presStyleCnt="41"/>
       <dgm:spPr/>
     </dgm:pt>
     <dgm:pt modelId="{F04300AB-B196-4F69-9BE4-7FCDA0C3FA15}" type="pres">
@@ -5145,7 +4997,7 @@
       <dgm:spPr/>
     </dgm:pt>
     <dgm:pt modelId="{DE3D38DB-1546-46F2-860A-4E7282F74001}" type="pres">
-      <dgm:prSet presAssocID="{CC1EFDC7-86F3-4887-88EA-223D23596123}" presName="rootText" presStyleLbl="node4" presStyleIdx="42" presStyleCnt="43" custLinFactNeighborX="-33361" custLinFactNeighborY="-2744">
+      <dgm:prSet presAssocID="{CC1EFDC7-86F3-4887-88EA-223D23596123}" presName="rootText" presStyleLbl="node4" presStyleIdx="40" presStyleCnt="41" custLinFactNeighborX="-33361" custLinFactNeighborY="-2744">
         <dgm:presLayoutVars>
           <dgm:chPref val="3"/>
         </dgm:presLayoutVars>
@@ -5153,7 +5005,7 @@
       <dgm:spPr/>
     </dgm:pt>
     <dgm:pt modelId="{C3DC5A35-5833-4BBB-A712-9B1B947A0D56}" type="pres">
-      <dgm:prSet presAssocID="{CC1EFDC7-86F3-4887-88EA-223D23596123}" presName="rootConnector" presStyleLbl="node4" presStyleIdx="42" presStyleCnt="43"/>
+      <dgm:prSet presAssocID="{CC1EFDC7-86F3-4887-88EA-223D23596123}" presName="rootConnector" presStyleLbl="node4" presStyleIdx="40" presStyleCnt="41"/>
       <dgm:spPr/>
     </dgm:pt>
     <dgm:pt modelId="{98C464F9-F67D-42C7-8A92-6FCFB636257B}" type="pres">
@@ -5261,8 +5113,6 @@
     <dgm:cxn modelId="{050E422D-A686-4A41-A65B-6FAF0E8F0184}" srcId="{349A07B7-081A-4EBA-92A1-108795F6D016}" destId="{2416F51D-D42D-4108-9BF5-530DF3163B93}" srcOrd="1" destOrd="0" parTransId="{4256B732-665D-485E-ADD0-C4042B6F1A5A}" sibTransId="{27BB07DE-E114-4436-A88C-D8CA85D534AA}"/>
     <dgm:cxn modelId="{6270392E-63EB-4A30-B5F8-E9B46995C2D4}" type="presOf" srcId="{9388F973-CD46-4AFC-9454-5895E33035BE}" destId="{5E890DBA-4975-4C75-941F-F0AF649459D5}" srcOrd="0" destOrd="0" presId="urn:microsoft.com/office/officeart/2009/3/layout/HorizontalOrganizationChart"/>
     <dgm:cxn modelId="{45741630-B550-41EA-9C64-1C7F9E9CD3CD}" type="presOf" srcId="{2E19E6D7-316D-4B72-865E-9132A5133ED0}" destId="{19C56599-44F2-4063-BC5C-5748142D59CB}" srcOrd="0" destOrd="0" presId="urn:microsoft.com/office/officeart/2009/3/layout/HorizontalOrganizationChart"/>
-    <dgm:cxn modelId="{5D5B6032-6B16-4905-B2F1-FFA7FBEEB9FD}" type="presOf" srcId="{1BCF77AA-6B04-4D81-9D59-6F959F70F803}" destId="{FD27C63C-53AB-4EF5-B065-A5CCC6683CBC}" srcOrd="0" destOrd="0" presId="urn:microsoft.com/office/officeart/2009/3/layout/HorizontalOrganizationChart"/>
-    <dgm:cxn modelId="{54C12033-4AE6-4160-917E-C194A62219E7}" type="presOf" srcId="{A3638297-C98E-49B2-935E-46CEF1892D42}" destId="{325B629F-ABB1-4EC6-9F54-565334BD27E2}" srcOrd="0" destOrd="0" presId="urn:microsoft.com/office/officeart/2009/3/layout/HorizontalOrganizationChart"/>
     <dgm:cxn modelId="{6620BD34-0599-4A37-843B-95E73982D995}" srcId="{9DFAA83C-0ED7-4C5D-908E-2A02657C3D57}" destId="{E0F095D0-0CDD-4899-95AE-C151B28DF4D1}" srcOrd="0" destOrd="0" parTransId="{A901081C-4D82-49A2-9AF0-FDB6D79D7219}" sibTransId="{A65C86A5-0AE7-4EEE-9D4F-A9803E1BE21B}"/>
     <dgm:cxn modelId="{B1C02935-AD52-4254-80B1-67D7B6A48C25}" type="presOf" srcId="{ACF9E546-FC16-43CF-809C-930B68C88DB1}" destId="{1BDA3CD5-F552-4A8E-AA99-3DA9469CB538}" srcOrd="0" destOrd="0" presId="urn:microsoft.com/office/officeart/2009/3/layout/HorizontalOrganizationChart"/>
     <dgm:cxn modelId="{EC3B2037-A4E3-4E4F-9A1C-550B9E573386}" type="presOf" srcId="{FC591F30-D81A-4461-B913-3123C1B3970E}" destId="{778DAB78-F42A-4C33-B206-904EFB14DFD2}" srcOrd="0" destOrd="0" presId="urn:microsoft.com/office/officeart/2009/3/layout/HorizontalOrganizationChart"/>
@@ -5318,7 +5168,6 @@
     <dgm:cxn modelId="{74EA1D59-CE25-4484-898B-D0B363CF7FF8}" srcId="{9DFAA83C-0ED7-4C5D-908E-2A02657C3D57}" destId="{A63AFC23-093E-44C6-B267-3891CF123A84}" srcOrd="1" destOrd="0" parTransId="{9388F973-CD46-4AFC-9454-5895E33035BE}" sibTransId="{1F61FF8D-23AE-4147-B5BA-4EC53E60A999}"/>
     <dgm:cxn modelId="{B0544159-2B54-4B40-B794-E990ACD48374}" srcId="{B9CE2267-5814-421B-8674-D202299E0DA9}" destId="{915177A7-D4EB-4AE8-86BD-249E5278466B}" srcOrd="0" destOrd="0" parTransId="{B5BAD76A-7E9A-4668-B9E3-5A85C816283D}" sibTransId="{DF845212-58D8-452F-BDF5-6A66F33A5CFF}"/>
     <dgm:cxn modelId="{CEF94559-FE38-461D-B4F6-D8BC2ED0C97C}" type="presOf" srcId="{7170B3D7-7385-4271-BFDD-77BDCB4B9D7D}" destId="{75AB063C-95C2-4D08-BD75-E990F011A243}" srcOrd="1" destOrd="0" presId="urn:microsoft.com/office/officeart/2009/3/layout/HorizontalOrganizationChart"/>
-    <dgm:cxn modelId="{1BC8F17B-2D29-4A0A-B853-6E01900B14BF}" srcId="{503A382B-1D5A-4546-833B-2164E945BC79}" destId="{1BCF77AA-6B04-4D81-9D59-6F959F70F803}" srcOrd="0" destOrd="0" parTransId="{95FA36E0-4680-4632-B27E-091BE020210A}" sibTransId="{3B701667-5E66-46AB-BDA3-3F2779701BE7}"/>
     <dgm:cxn modelId="{1F62557C-913A-48D6-A365-FD28FDA37EC9}" srcId="{5AFEC8AD-8C3F-4724-85E3-77D8EA592781}" destId="{349A07B7-081A-4EBA-92A1-108795F6D016}" srcOrd="0" destOrd="0" parTransId="{F97366AF-AF4E-40B4-BFF5-B872BC5F7F08}" sibTransId="{AD679511-1AE4-4C22-9CF9-4450AC357D10}"/>
     <dgm:cxn modelId="{099CBF7E-623A-4E34-A8A8-237B6F145EF1}" srcId="{3CBB9B95-F2DE-4200-8B3A-58D04CAEA47D}" destId="{9A4F48F6-BCF9-4165-AF3C-7C7BA667FA27}" srcOrd="0" destOrd="0" parTransId="{9A5D99C4-3A63-4397-B386-EBF9464401C2}" sibTransId="{3D288AF2-D587-4DAC-A032-2120C9951061}"/>
     <dgm:cxn modelId="{5B800C80-94B9-4F92-AF4B-4CEA866A56D6}" srcId="{5AFEC8AD-8C3F-4724-85E3-77D8EA592781}" destId="{CA6200AF-7336-4AB8-A4E9-530BC5027306}" srcOrd="4" destOrd="0" parTransId="{880276D0-EB74-4489-85C7-23E81AC85430}" sibTransId="{36022CDB-DAA5-4DCB-AB8C-CC60CF58AABA}"/>
@@ -5332,7 +5181,7 @@
     <dgm:cxn modelId="{D71C7287-F713-4C75-87F8-22ED08C8637E}" srcId="{5AFEC8AD-8C3F-4724-85E3-77D8EA592781}" destId="{3CBB9B95-F2DE-4200-8B3A-58D04CAEA47D}" srcOrd="2" destOrd="0" parTransId="{9242D754-7730-4B78-AB9C-A02DFB9723F4}" sibTransId="{66961319-D3B5-4BBF-B054-793B033D15B6}"/>
     <dgm:cxn modelId="{51AECE87-61F5-457F-922D-D7A8328DBED4}" type="presOf" srcId="{7D9BDDE8-7610-4C76-ACCC-5EF685046CB6}" destId="{8DDA93F8-5C72-4B48-9D1D-CEE49333C83C}" srcOrd="0" destOrd="0" presId="urn:microsoft.com/office/officeart/2009/3/layout/HorizontalOrganizationChart"/>
     <dgm:cxn modelId="{0BF22188-348C-42B9-A6FE-06D3443C2168}" type="presOf" srcId="{9A4F48F6-BCF9-4165-AF3C-7C7BA667FA27}" destId="{D46F3F0D-30A4-4DDE-884B-BD4A774332AE}" srcOrd="1" destOrd="0" presId="urn:microsoft.com/office/officeart/2009/3/layout/HorizontalOrganizationChart"/>
-    <dgm:cxn modelId="{99D97E88-742D-4B77-B7BA-9F2DC084B2FC}" srcId="{E0F095D0-0CDD-4899-95AE-C151B28DF4D1}" destId="{D7660C3C-E08D-431C-8EE1-9AA78C89B4A5}" srcOrd="4" destOrd="0" parTransId="{A5F5E471-F067-43AE-8556-402C42D66216}" sibTransId="{2056AD32-03D3-4873-9D29-9396256F501C}"/>
+    <dgm:cxn modelId="{99D97E88-742D-4B77-B7BA-9F2DC084B2FC}" srcId="{E0F095D0-0CDD-4899-95AE-C151B28DF4D1}" destId="{D7660C3C-E08D-431C-8EE1-9AA78C89B4A5}" srcOrd="3" destOrd="0" parTransId="{A5F5E471-F067-43AE-8556-402C42D66216}" sibTransId="{2056AD32-03D3-4873-9D29-9396256F501C}"/>
     <dgm:cxn modelId="{837B948A-5D1B-4EDD-BC62-2639ABDB57C4}" type="presOf" srcId="{349A07B7-081A-4EBA-92A1-108795F6D016}" destId="{361EB6FF-B859-4244-8485-2C0FEA5D265B}" srcOrd="0" destOrd="0" presId="urn:microsoft.com/office/officeart/2009/3/layout/HorizontalOrganizationChart"/>
     <dgm:cxn modelId="{FEB05E8B-9578-4E39-8D9E-2719D74392E6}" type="presOf" srcId="{37E0214C-29B5-4A4F-B604-EECED1F69AA7}" destId="{36009CD3-F077-400A-9614-F0B171CB3F65}" srcOrd="1" destOrd="0" presId="urn:microsoft.com/office/officeart/2009/3/layout/HorizontalOrganizationChart"/>
     <dgm:cxn modelId="{93D67E8C-4DBF-4BA0-840E-5E675A9E7426}" type="presOf" srcId="{2FE3F8DB-D87E-4926-B5ED-317648B1128B}" destId="{C389EBCD-1328-466D-B1CA-18486ECA26EF}" srcOrd="1" destOrd="0" presId="urn:microsoft.com/office/officeart/2009/3/layout/HorizontalOrganizationChart"/>
@@ -5355,10 +5204,8 @@
     <dgm:cxn modelId="{E0EA0DA3-930B-4A38-AC3A-5FBC3FE44266}" type="presOf" srcId="{9A5D99C4-3A63-4397-B386-EBF9464401C2}" destId="{0A14706F-1BC6-48E6-BDBA-7B500E589BAD}" srcOrd="0" destOrd="0" presId="urn:microsoft.com/office/officeart/2009/3/layout/HorizontalOrganizationChart"/>
     <dgm:cxn modelId="{983A92A3-EF29-4954-A755-8D540079A70E}" srcId="{3E6A9241-7ED7-4E1E-9A0C-FCCB8AFE0676}" destId="{2A323462-12B1-44A5-95A4-30F7D5E83E80}" srcOrd="1" destOrd="0" parTransId="{4EAB6B4E-4AE3-4DD0-93A3-0784ECF3F600}" sibTransId="{A6DF5D9B-B3EB-49CE-B0F2-E2BA7CAB9FCB}"/>
     <dgm:cxn modelId="{90DFB8A3-9BFA-4215-A781-EE3F47536BF0}" type="presOf" srcId="{764BB32F-0818-4190-8CBA-5BFD6043BFBC}" destId="{5CE68631-E50F-4A7D-A78E-B9848249D5F3}" srcOrd="0" destOrd="0" presId="urn:microsoft.com/office/officeart/2009/3/layout/HorizontalOrganizationChart"/>
-    <dgm:cxn modelId="{2DC050A4-DC79-4896-BDF2-D0AD881DBDFA}" type="presOf" srcId="{503A382B-1D5A-4546-833B-2164E945BC79}" destId="{F4F402F9-353D-4DAF-A0B3-B8E72F14207C}" srcOrd="1" destOrd="0" presId="urn:microsoft.com/office/officeart/2009/3/layout/HorizontalOrganizationChart"/>
     <dgm:cxn modelId="{FB6E58A4-23AD-4997-BB17-94647E52CBCA}" type="presOf" srcId="{BD4CBB34-BFC3-4314-AC58-360CE3F828A3}" destId="{9921040E-A9AE-4E20-B3A7-1033725EAB32}" srcOrd="0" destOrd="0" presId="urn:microsoft.com/office/officeart/2009/3/layout/HorizontalOrganizationChart"/>
     <dgm:cxn modelId="{2CED9CA4-43CF-4345-ABA5-1CBDC70CBE4B}" type="presOf" srcId="{C9E721F3-3509-40BA-945D-417CE334E5F2}" destId="{490BDFA8-D452-4BE4-9F81-245774E0D158}" srcOrd="0" destOrd="0" presId="urn:microsoft.com/office/officeart/2009/3/layout/HorizontalOrganizationChart"/>
-    <dgm:cxn modelId="{E6620DA6-0D64-4016-8901-7D485CEC337A}" type="presOf" srcId="{95FA36E0-4680-4632-B27E-091BE020210A}" destId="{C1341CAE-26B4-413C-B659-B4133610AE2C}" srcOrd="0" destOrd="0" presId="urn:microsoft.com/office/officeart/2009/3/layout/HorizontalOrganizationChart"/>
     <dgm:cxn modelId="{D41938A6-CCEA-4CD4-AB29-361FA6BECC00}" type="presOf" srcId="{0ACC1CDC-D329-4C80-97F4-AA1E9B6A19A6}" destId="{ECBCB50C-17E3-4E08-8F2D-57A84F25E402}" srcOrd="0" destOrd="0" presId="urn:microsoft.com/office/officeart/2009/3/layout/HorizontalOrganizationChart"/>
     <dgm:cxn modelId="{06EEA3A7-A77A-4A74-BF88-CCAC4DB66610}" type="presOf" srcId="{E0980975-400D-419C-9155-50E81827743F}" destId="{506B6D35-0A73-4492-B07D-5FEFBBD02FC5}" srcOrd="1" destOrd="0" presId="urn:microsoft.com/office/officeart/2009/3/layout/HorizontalOrganizationChart"/>
     <dgm:cxn modelId="{0C60E2A7-2BEB-41C0-8AAB-C4500FE3CE58}" type="presOf" srcId="{7170B3D7-7385-4271-BFDD-77BDCB4B9D7D}" destId="{3D02A4C7-D3F8-46A9-BF13-B91E1207C679}" srcOrd="0" destOrd="0" presId="urn:microsoft.com/office/officeart/2009/3/layout/HorizontalOrganizationChart"/>
@@ -5387,7 +5234,6 @@
     <dgm:cxn modelId="{D897B6C1-26D4-4EBF-9545-D4DF4EB294AC}" srcId="{D7660C3C-E08D-431C-8EE1-9AA78C89B4A5}" destId="{CD4954CC-F1E7-474A-9C14-897F60DC4DA4}" srcOrd="1" destOrd="0" parTransId="{45EF24BF-2957-4968-9E77-C679A38F2BE0}" sibTransId="{B9DFB9A1-FCC7-46AA-8558-BC4D60E4B362}"/>
     <dgm:cxn modelId="{760621C2-E86C-4607-A302-CD20979C09E9}" srcId="{C9E721F3-3509-40BA-945D-417CE334E5F2}" destId="{97A8E0E5-1256-46F5-BDCA-CBF242F3C57E}" srcOrd="0" destOrd="0" parTransId="{5CD82464-BD85-410D-9486-CDF630216295}" sibTransId="{F2FF7060-498E-4C33-B37F-3A4AE0EED5E3}"/>
     <dgm:cxn modelId="{C6BB0AC3-EEAC-457E-AA11-9222C967F0D2}" type="presOf" srcId="{15D45A7A-4E59-4C7F-ABBD-61460C5C3DB2}" destId="{37C7B046-E658-4728-A5FD-08A2F893709B}" srcOrd="0" destOrd="0" presId="urn:microsoft.com/office/officeart/2009/3/layout/HorizontalOrganizationChart"/>
-    <dgm:cxn modelId="{563943C3-FC56-4515-BB4A-0E30DD801C10}" type="presOf" srcId="{1BCF77AA-6B04-4D81-9D59-6F959F70F803}" destId="{B81833A2-355D-431A-B42B-FFB97F5DED7E}" srcOrd="1" destOrd="0" presId="urn:microsoft.com/office/officeart/2009/3/layout/HorizontalOrganizationChart"/>
     <dgm:cxn modelId="{FD5D84C3-5C50-4803-A425-72D28EA3A154}" type="presOf" srcId="{E0980975-400D-419C-9155-50E81827743F}" destId="{E3B5D82B-AC9E-4D78-9879-707CC20D19D9}" srcOrd="0" destOrd="0" presId="urn:microsoft.com/office/officeart/2009/3/layout/HorizontalOrganizationChart"/>
     <dgm:cxn modelId="{372F4AC4-A999-44D8-9A34-D2E9B8654F74}" type="presOf" srcId="{45EF24BF-2957-4968-9E77-C679A38F2BE0}" destId="{CA185CE9-65D3-4677-966D-33B7645E2257}" srcOrd="0" destOrd="0" presId="urn:microsoft.com/office/officeart/2009/3/layout/HorizontalOrganizationChart"/>
     <dgm:cxn modelId="{C7EC1CC5-021F-4301-8A4A-7214D656481E}" type="presOf" srcId="{C5D295AB-C033-40A2-BD5A-51CF31B0DAF1}" destId="{63BFDF2F-6F11-4980-A631-1D0C6BCF6E65}" srcOrd="0" destOrd="0" presId="urn:microsoft.com/office/officeart/2009/3/layout/HorizontalOrganizationChart"/>
@@ -5448,13 +5294,11 @@
     <dgm:cxn modelId="{6C70FDF2-A732-487A-80CD-4ED96EA582A0}" type="presOf" srcId="{6A27566D-5E2B-4C81-8C09-639ED0AF984B}" destId="{6B320540-8EFC-424C-87BB-7A322C848E8D}" srcOrd="1" destOrd="0" presId="urn:microsoft.com/office/officeart/2009/3/layout/HorizontalOrganizationChart"/>
     <dgm:cxn modelId="{A314F0F4-0D88-4F1C-BEB6-21F796FAECBE}" type="presOf" srcId="{A5F5E471-F067-43AE-8556-402C42D66216}" destId="{7C3BC206-817E-47FC-AA4A-7E68D35E9CC7}" srcOrd="0" destOrd="0" presId="urn:microsoft.com/office/officeart/2009/3/layout/HorizontalOrganizationChart"/>
     <dgm:cxn modelId="{067588F5-7863-4CEE-B475-21F702808A1C}" srcId="{C499CC0F-4E7A-4FEC-97EE-0BDE6BB4004A}" destId="{E530C472-7561-4AEE-B0C2-C508C6994A85}" srcOrd="2" destOrd="0" parTransId="{2E19E6D7-316D-4B72-865E-9132A5133ED0}" sibTransId="{2998DF06-ED3F-4259-BF4A-9D257A93303A}"/>
-    <dgm:cxn modelId="{E00A1BF6-3F70-4F0B-9473-B8777A2356B9}" type="presOf" srcId="{503A382B-1D5A-4546-833B-2164E945BC79}" destId="{B7E87C89-F2A3-40BE-A158-9348331D318D}" srcOrd="0" destOrd="0" presId="urn:microsoft.com/office/officeart/2009/3/layout/HorizontalOrganizationChart"/>
     <dgm:cxn modelId="{AD4C48F6-D1BF-454B-9E1C-9111D36AC05F}" srcId="{9A4F48F6-BCF9-4165-AF3C-7C7BA667FA27}" destId="{855297F2-A162-4EED-8FE7-B40916947E1F}" srcOrd="2" destOrd="0" parTransId="{83D18EB3-F613-46C2-86CF-CF849473A283}" sibTransId="{B3957AC8-05AC-4C73-A0A8-40D5AE41615E}"/>
     <dgm:cxn modelId="{9C951EF7-F07D-49CD-A616-2415A71A89CA}" type="presOf" srcId="{349A07B7-081A-4EBA-92A1-108795F6D016}" destId="{0E825310-4ECF-4F8B-A088-F53A2FA572C7}" srcOrd="1" destOrd="0" presId="urn:microsoft.com/office/officeart/2009/3/layout/HorizontalOrganizationChart"/>
     <dgm:cxn modelId="{752C22F9-9E6F-41D6-A3EA-7EFFDD6E269A}" type="presOf" srcId="{F44BEF34-C38D-4E4B-A196-CBEC387270FB}" destId="{B7BA8FDA-69EF-4F26-A438-76A43EC08BE5}" srcOrd="0" destOrd="0" presId="urn:microsoft.com/office/officeart/2009/3/layout/HorizontalOrganizationChart"/>
     <dgm:cxn modelId="{BC0BD3F9-B188-4DA6-9ED7-9848AC0BDA3D}" type="presOf" srcId="{E530C472-7561-4AEE-B0C2-C508C6994A85}" destId="{A0066D63-44FC-47D0-A615-BEA5BAB51686}" srcOrd="1" destOrd="0" presId="urn:microsoft.com/office/officeart/2009/3/layout/HorizontalOrganizationChart"/>
     <dgm:cxn modelId="{71876BFA-07C8-423B-8F42-634794270C8C}" type="presOf" srcId="{F288657A-3E95-4264-946F-655DEA89BC1B}" destId="{5E1565E1-8DBB-4A62-B412-DA531FDF40C5}" srcOrd="0" destOrd="0" presId="urn:microsoft.com/office/officeart/2009/3/layout/HorizontalOrganizationChart"/>
-    <dgm:cxn modelId="{423FA7FB-73E0-4BCD-A13F-A99D2D9F6154}" srcId="{E0F095D0-0CDD-4899-95AE-C151B28DF4D1}" destId="{503A382B-1D5A-4546-833B-2164E945BC79}" srcOrd="3" destOrd="0" parTransId="{A3638297-C98E-49B2-935E-46CEF1892D42}" sibTransId="{1D474A4F-185C-4214-81CF-5568DF079C10}"/>
     <dgm:cxn modelId="{51C9E4FD-CD59-487B-B526-434053D5B0A2}" type="presOf" srcId="{B0A38B96-90FF-402E-A24A-BEF06D54B9B6}" destId="{D5EFD006-A32B-489A-B809-E3D7E0386B88}" srcOrd="0" destOrd="0" presId="urn:microsoft.com/office/officeart/2009/3/layout/HorizontalOrganizationChart"/>
     <dgm:cxn modelId="{64512EFF-FE16-4811-99ED-A308AC4F74E3}" srcId="{9A4F48F6-BCF9-4165-AF3C-7C7BA667FA27}" destId="{13719A43-B673-4C88-9D1E-16D752C05E25}" srcOrd="3" destOrd="0" parTransId="{A874BA0B-B7EF-479E-B1B8-17FB9E8D2868}" sibTransId="{212A347A-5399-4312-9400-C1BF5604C0A3}"/>
     <dgm:cxn modelId="{360BAAFF-63FD-43F2-9802-8A20EFFEA078}" srcId="{C9E721F3-3509-40BA-945D-417CE334E5F2}" destId="{73528B28-3862-4C56-BB94-20BFCA4D977C}" srcOrd="2" destOrd="0" parTransId="{320AF489-F490-4FB9-A435-9E69697CB6A1}" sibTransId="{D5F06BC4-1238-41A8-9412-D18B338823BA}"/>
@@ -5713,22 +5557,8 @@
     <dgm:cxn modelId="{0277C32D-BC80-451D-8114-52ABE6BC9A6F}" type="presParOf" srcId="{E2339977-544D-4803-B502-2D0230BDE041}" destId="{8F48AF82-B7B7-4236-BA88-568321270E43}" srcOrd="1" destOrd="0" presId="urn:microsoft.com/office/officeart/2009/3/layout/HorizontalOrganizationChart"/>
     <dgm:cxn modelId="{149AB961-0E68-4835-99C7-1B936F9E6682}" type="presParOf" srcId="{E2339977-544D-4803-B502-2D0230BDE041}" destId="{26810E43-B4D2-4332-A7AA-37123D44A41D}" srcOrd="2" destOrd="0" presId="urn:microsoft.com/office/officeart/2009/3/layout/HorizontalOrganizationChart"/>
     <dgm:cxn modelId="{59A18E93-A6D9-449D-885A-BA783825FEE9}" type="presParOf" srcId="{F49CA836-44E5-4C40-8AC4-2AE0EF430965}" destId="{51EA36A6-1667-467C-86F8-B276FBB41886}" srcOrd="2" destOrd="0" presId="urn:microsoft.com/office/officeart/2009/3/layout/HorizontalOrganizationChart"/>
-    <dgm:cxn modelId="{D5F9182F-B6B7-4084-952B-758ACCBF6711}" type="presParOf" srcId="{6072350C-6373-4705-A9DC-82BB2DD64A3A}" destId="{325B629F-ABB1-4EC6-9F54-565334BD27E2}" srcOrd="6" destOrd="0" presId="urn:microsoft.com/office/officeart/2009/3/layout/HorizontalOrganizationChart"/>
-    <dgm:cxn modelId="{137BFBD1-782D-4A9A-9993-3B444550CFF7}" type="presParOf" srcId="{6072350C-6373-4705-A9DC-82BB2DD64A3A}" destId="{BA8D7E82-10E0-4B5D-A7A8-5B403C181AAD}" srcOrd="7" destOrd="0" presId="urn:microsoft.com/office/officeart/2009/3/layout/HorizontalOrganizationChart"/>
-    <dgm:cxn modelId="{E3F8AB3D-A22F-4015-908E-F6E781CDFD8E}" type="presParOf" srcId="{BA8D7E82-10E0-4B5D-A7A8-5B403C181AAD}" destId="{ECA125E0-FC36-4EDC-B5F3-63E1C3C35BB0}" srcOrd="0" destOrd="0" presId="urn:microsoft.com/office/officeart/2009/3/layout/HorizontalOrganizationChart"/>
-    <dgm:cxn modelId="{8B3ECA7E-D809-48C3-B460-C36AA723F5A3}" type="presParOf" srcId="{ECA125E0-FC36-4EDC-B5F3-63E1C3C35BB0}" destId="{B7E87C89-F2A3-40BE-A158-9348331D318D}" srcOrd="0" destOrd="0" presId="urn:microsoft.com/office/officeart/2009/3/layout/HorizontalOrganizationChart"/>
-    <dgm:cxn modelId="{EB941450-5ACD-44F6-80B2-CFE23AE97AFF}" type="presParOf" srcId="{ECA125E0-FC36-4EDC-B5F3-63E1C3C35BB0}" destId="{F4F402F9-353D-4DAF-A0B3-B8E72F14207C}" srcOrd="1" destOrd="0" presId="urn:microsoft.com/office/officeart/2009/3/layout/HorizontalOrganizationChart"/>
-    <dgm:cxn modelId="{C950B91E-3DE3-4AEE-979B-F7676EA263B4}" type="presParOf" srcId="{BA8D7E82-10E0-4B5D-A7A8-5B403C181AAD}" destId="{75DC4A39-6C23-4835-9E4D-4BC7EA472591}" srcOrd="1" destOrd="0" presId="urn:microsoft.com/office/officeart/2009/3/layout/HorizontalOrganizationChart"/>
-    <dgm:cxn modelId="{73E0671B-034F-4FFC-9920-2BA8D8812AFF}" type="presParOf" srcId="{75DC4A39-6C23-4835-9E4D-4BC7EA472591}" destId="{C1341CAE-26B4-413C-B659-B4133610AE2C}" srcOrd="0" destOrd="0" presId="urn:microsoft.com/office/officeart/2009/3/layout/HorizontalOrganizationChart"/>
-    <dgm:cxn modelId="{50C4C41F-5C1E-4E04-9385-C7DC6B57CBAE}" type="presParOf" srcId="{75DC4A39-6C23-4835-9E4D-4BC7EA472591}" destId="{34334FEB-0A74-4945-9E06-62902E13F72D}" srcOrd="1" destOrd="0" presId="urn:microsoft.com/office/officeart/2009/3/layout/HorizontalOrganizationChart"/>
-    <dgm:cxn modelId="{A32D9EA1-F605-4D5B-BE06-37F8448E72B6}" type="presParOf" srcId="{34334FEB-0A74-4945-9E06-62902E13F72D}" destId="{0A75E738-A60A-41CD-B3C2-B6F965160774}" srcOrd="0" destOrd="0" presId="urn:microsoft.com/office/officeart/2009/3/layout/HorizontalOrganizationChart"/>
-    <dgm:cxn modelId="{AEDE847E-94D2-47C1-BAF1-39A2DB3E51DD}" type="presParOf" srcId="{0A75E738-A60A-41CD-B3C2-B6F965160774}" destId="{FD27C63C-53AB-4EF5-B065-A5CCC6683CBC}" srcOrd="0" destOrd="0" presId="urn:microsoft.com/office/officeart/2009/3/layout/HorizontalOrganizationChart"/>
-    <dgm:cxn modelId="{43F74E2E-72C0-4892-AF68-DBFB5A08A36E}" type="presParOf" srcId="{0A75E738-A60A-41CD-B3C2-B6F965160774}" destId="{B81833A2-355D-431A-B42B-FFB97F5DED7E}" srcOrd="1" destOrd="0" presId="urn:microsoft.com/office/officeart/2009/3/layout/HorizontalOrganizationChart"/>
-    <dgm:cxn modelId="{9C73BFA3-24B3-412B-B1AE-90FC38880BF9}" type="presParOf" srcId="{34334FEB-0A74-4945-9E06-62902E13F72D}" destId="{B75101D1-41FE-4F79-AE84-A03090A9821A}" srcOrd="1" destOrd="0" presId="urn:microsoft.com/office/officeart/2009/3/layout/HorizontalOrganizationChart"/>
-    <dgm:cxn modelId="{8777D722-EBE9-499E-9F10-4D83F965FBF2}" type="presParOf" srcId="{34334FEB-0A74-4945-9E06-62902E13F72D}" destId="{E2141735-2F07-4BB8-BD72-01BC72AD7827}" srcOrd="2" destOrd="0" presId="urn:microsoft.com/office/officeart/2009/3/layout/HorizontalOrganizationChart"/>
-    <dgm:cxn modelId="{57B0F9DF-47B1-457B-BDDE-FB6536F627DB}" type="presParOf" srcId="{BA8D7E82-10E0-4B5D-A7A8-5B403C181AAD}" destId="{F121FC04-6ABC-4471-9661-93ED72B93D39}" srcOrd="2" destOrd="0" presId="urn:microsoft.com/office/officeart/2009/3/layout/HorizontalOrganizationChart"/>
-    <dgm:cxn modelId="{3BD52577-8295-4B64-B2E6-DA4698268851}" type="presParOf" srcId="{6072350C-6373-4705-A9DC-82BB2DD64A3A}" destId="{7C3BC206-817E-47FC-AA4A-7E68D35E9CC7}" srcOrd="8" destOrd="0" presId="urn:microsoft.com/office/officeart/2009/3/layout/HorizontalOrganizationChart"/>
-    <dgm:cxn modelId="{D14CDF02-F870-41B0-B99B-DD0825512B3A}" type="presParOf" srcId="{6072350C-6373-4705-A9DC-82BB2DD64A3A}" destId="{CE404325-D390-4D1D-A6D6-0523ECB0D0C3}" srcOrd="9" destOrd="0" presId="urn:microsoft.com/office/officeart/2009/3/layout/HorizontalOrganizationChart"/>
+    <dgm:cxn modelId="{3BD52577-8295-4B64-B2E6-DA4698268851}" type="presParOf" srcId="{6072350C-6373-4705-A9DC-82BB2DD64A3A}" destId="{7C3BC206-817E-47FC-AA4A-7E68D35E9CC7}" srcOrd="6" destOrd="0" presId="urn:microsoft.com/office/officeart/2009/3/layout/HorizontalOrganizationChart"/>
+    <dgm:cxn modelId="{D14CDF02-F870-41B0-B99B-DD0825512B3A}" type="presParOf" srcId="{6072350C-6373-4705-A9DC-82BB2DD64A3A}" destId="{CE404325-D390-4D1D-A6D6-0523ECB0D0C3}" srcOrd="7" destOrd="0" presId="urn:microsoft.com/office/officeart/2009/3/layout/HorizontalOrganizationChart"/>
     <dgm:cxn modelId="{45E6F169-EBD1-40CC-8BB6-DB4498391651}" type="presParOf" srcId="{CE404325-D390-4D1D-A6D6-0523ECB0D0C3}" destId="{6857FE5E-590C-4932-8F31-20B61F623BF8}" srcOrd="0" destOrd="0" presId="urn:microsoft.com/office/officeart/2009/3/layout/HorizontalOrganizationChart"/>
     <dgm:cxn modelId="{3B5839A0-7778-48BA-A875-B97616D0CC57}" type="presParOf" srcId="{6857FE5E-590C-4932-8F31-20B61F623BF8}" destId="{E3458C5F-4332-4439-96AF-FD966B7B137A}" srcOrd="0" destOrd="0" presId="urn:microsoft.com/office/officeart/2009/3/layout/HorizontalOrganizationChart"/>
     <dgm:cxn modelId="{0D9A2410-E4E9-4AAC-9C17-211D07E660DD}" type="presParOf" srcId="{6857FE5E-590C-4932-8F31-20B61F623BF8}" destId="{E64611E0-F76B-4B48-BD4A-3D9E4DE85202}" srcOrd="1" destOrd="0" presId="urn:microsoft.com/office/officeart/2009/3/layout/HorizontalOrganizationChart"/>
@@ -5896,8 +5726,8 @@
       </dsp:nvSpPr>
       <dsp:spPr>
         <a:xfrm>
-          <a:off x="4687688" y="5553359"/>
-          <a:ext cx="122980" cy="306681"/>
+          <a:off x="4639032" y="5522674"/>
+          <a:ext cx="128450" cy="320321"/>
         </a:xfrm>
         <a:custGeom>
           <a:avLst/>
@@ -5911,13 +5741,13 @@
                 <a:pt x="0" y="0"/>
               </a:moveTo>
               <a:lnTo>
-                <a:pt x="61490" y="0"/>
+                <a:pt x="64225" y="0"/>
               </a:lnTo>
               <a:lnTo>
-                <a:pt x="61490" y="306681"/>
+                <a:pt x="64225" y="320321"/>
               </a:lnTo>
               <a:lnTo>
-                <a:pt x="122980" y="306681"/>
+                <a:pt x="128450" y="320321"/>
               </a:lnTo>
             </a:path>
           </a:pathLst>
@@ -5958,8 +5788,8 @@
       </dsp:nvSpPr>
       <dsp:spPr>
         <a:xfrm>
-          <a:off x="6899894" y="6128442"/>
-          <a:ext cx="142276" cy="91440"/>
+          <a:off x="6949628" y="6125368"/>
+          <a:ext cx="148604" cy="91440"/>
         </a:xfrm>
         <a:custGeom>
           <a:avLst/>
@@ -5970,16 +5800,16 @@
           <a:pathLst>
             <a:path>
               <a:moveTo>
-                <a:pt x="0" y="47533"/>
+                <a:pt x="0" y="47614"/>
               </a:moveTo>
               <a:lnTo>
-                <a:pt x="80785" y="47533"/>
+                <a:pt x="84379" y="47614"/>
               </a:lnTo>
               <a:lnTo>
-                <a:pt x="80785" y="45720"/>
+                <a:pt x="84379" y="45720"/>
               </a:lnTo>
               <a:lnTo>
-                <a:pt x="142276" y="45720"/>
+                <a:pt x="148604" y="45720"/>
               </a:lnTo>
             </a:path>
           </a:pathLst>
@@ -6020,8 +5850,8 @@
       </dsp:nvSpPr>
       <dsp:spPr>
         <a:xfrm>
-          <a:off x="6163455" y="5925448"/>
-          <a:ext cx="121535" cy="250528"/>
+          <a:off x="6180436" y="5911312"/>
+          <a:ext cx="126941" cy="261670"/>
         </a:xfrm>
         <a:custGeom>
           <a:avLst/>
@@ -6035,13 +5865,13 @@
                 <a:pt x="0" y="0"/>
               </a:moveTo>
               <a:lnTo>
-                <a:pt x="60045" y="0"/>
+                <a:pt x="62715" y="0"/>
               </a:lnTo>
               <a:lnTo>
-                <a:pt x="60045" y="250528"/>
+                <a:pt x="62715" y="261670"/>
               </a:lnTo>
               <a:lnTo>
-                <a:pt x="121535" y="250528"/>
+                <a:pt x="126941" y="261670"/>
               </a:lnTo>
             </a:path>
           </a:pathLst>
@@ -6082,8 +5912,8 @@
       </dsp:nvSpPr>
       <dsp:spPr>
         <a:xfrm>
-          <a:off x="6899894" y="5881782"/>
-          <a:ext cx="142282" cy="91440"/>
+          <a:off x="6949628" y="5867737"/>
+          <a:ext cx="148610" cy="91440"/>
         </a:xfrm>
         <a:custGeom>
           <a:avLst/>
@@ -6097,13 +5927,13 @@
                 <a:pt x="0" y="45720"/>
               </a:moveTo>
               <a:lnTo>
-                <a:pt x="80792" y="45720"/>
+                <a:pt x="84385" y="45720"/>
               </a:lnTo>
               <a:lnTo>
-                <a:pt x="80792" y="47105"/>
+                <a:pt x="84385" y="47167"/>
               </a:lnTo>
               <a:lnTo>
-                <a:pt x="142282" y="47105"/>
+                <a:pt x="148610" y="47167"/>
               </a:lnTo>
             </a:path>
           </a:pathLst>
@@ -6144,8 +5974,8 @@
       </dsp:nvSpPr>
       <dsp:spPr>
         <a:xfrm>
-          <a:off x="6163455" y="5879728"/>
-          <a:ext cx="121535" cy="91440"/>
+          <a:off x="6180436" y="5865592"/>
+          <a:ext cx="126941" cy="91440"/>
         </a:xfrm>
         <a:custGeom>
           <a:avLst/>
@@ -6159,13 +5989,13 @@
                 <a:pt x="0" y="45720"/>
               </a:moveTo>
               <a:lnTo>
-                <a:pt x="60045" y="45720"/>
+                <a:pt x="62715" y="45720"/>
               </a:lnTo>
               <a:lnTo>
-                <a:pt x="60045" y="47773"/>
+                <a:pt x="62715" y="47864"/>
               </a:lnTo>
               <a:lnTo>
-                <a:pt x="121535" y="47773"/>
+                <a:pt x="126941" y="47864"/>
               </a:lnTo>
             </a:path>
           </a:pathLst>
@@ -6206,8 +6036,8 @@
       </dsp:nvSpPr>
       <dsp:spPr>
         <a:xfrm>
-          <a:off x="6901339" y="5578458"/>
-          <a:ext cx="121535" cy="91440"/>
+          <a:off x="6951137" y="5550922"/>
+          <a:ext cx="126941" cy="91440"/>
         </a:xfrm>
         <a:custGeom>
           <a:avLst/>
@@ -6218,16 +6048,16 @@
           <a:pathLst>
             <a:path>
               <a:moveTo>
-                <a:pt x="0" y="46905"/>
+                <a:pt x="0" y="46958"/>
               </a:moveTo>
               <a:lnTo>
-                <a:pt x="60045" y="46905"/>
+                <a:pt x="62715" y="46958"/>
               </a:lnTo>
               <a:lnTo>
-                <a:pt x="60045" y="45720"/>
+                <a:pt x="62715" y="45720"/>
               </a:lnTo>
               <a:lnTo>
-                <a:pt x="121535" y="45720"/>
+                <a:pt x="126941" y="45720"/>
               </a:lnTo>
             </a:path>
           </a:pathLst>
@@ -6268,8 +6098,8 @@
       </dsp:nvSpPr>
       <dsp:spPr>
         <a:xfrm>
-          <a:off x="6163455" y="5625363"/>
-          <a:ext cx="122980" cy="300084"/>
+          <a:off x="6180436" y="5597880"/>
+          <a:ext cx="128450" cy="313431"/>
         </a:xfrm>
         <a:custGeom>
           <a:avLst/>
@@ -6280,16 +6110,16 @@
           <a:pathLst>
             <a:path>
               <a:moveTo>
-                <a:pt x="0" y="300084"/>
+                <a:pt x="0" y="313431"/>
               </a:moveTo>
               <a:lnTo>
-                <a:pt x="61490" y="300084"/>
+                <a:pt x="64225" y="313431"/>
               </a:lnTo>
               <a:lnTo>
-                <a:pt x="61490" y="0"/>
+                <a:pt x="64225" y="0"/>
               </a:lnTo>
               <a:lnTo>
-                <a:pt x="122980" y="0"/>
+                <a:pt x="128450" y="0"/>
               </a:lnTo>
             </a:path>
           </a:pathLst>
@@ -6330,8 +6160,8 @@
       </dsp:nvSpPr>
       <dsp:spPr>
         <a:xfrm>
-          <a:off x="5425572" y="5452186"/>
-          <a:ext cx="122980" cy="473261"/>
+          <a:off x="5409734" y="5417001"/>
+          <a:ext cx="128450" cy="494310"/>
         </a:xfrm>
         <a:custGeom>
           <a:avLst/>
@@ -6345,13 +6175,13 @@
                 <a:pt x="0" y="0"/>
               </a:moveTo>
               <a:lnTo>
-                <a:pt x="61490" y="0"/>
+                <a:pt x="64225" y="0"/>
               </a:lnTo>
               <a:lnTo>
-                <a:pt x="61490" y="473261"/>
+                <a:pt x="64225" y="494310"/>
               </a:lnTo>
               <a:lnTo>
-                <a:pt x="122980" y="473261"/>
+                <a:pt x="128450" y="494310"/>
               </a:lnTo>
             </a:path>
           </a:pathLst>
@@ -6392,8 +6222,8 @@
       </dsp:nvSpPr>
       <dsp:spPr>
         <a:xfrm>
-          <a:off x="6163455" y="5253880"/>
-          <a:ext cx="122980" cy="132204"/>
+          <a:off x="6180436" y="5209875"/>
+          <a:ext cx="128450" cy="138084"/>
         </a:xfrm>
         <a:custGeom>
           <a:avLst/>
@@ -6407,13 +6237,13 @@
                 <a:pt x="0" y="0"/>
               </a:moveTo>
               <a:lnTo>
-                <a:pt x="61490" y="0"/>
+                <a:pt x="64225" y="0"/>
               </a:lnTo>
               <a:lnTo>
-                <a:pt x="61490" y="132204"/>
+                <a:pt x="64225" y="138084"/>
               </a:lnTo>
               <a:lnTo>
-                <a:pt x="122980" y="132204"/>
+                <a:pt x="128450" y="138084"/>
               </a:lnTo>
             </a:path>
           </a:pathLst>
@@ -6454,8 +6284,8 @@
       </dsp:nvSpPr>
       <dsp:spPr>
         <a:xfrm>
-          <a:off x="6163455" y="5121676"/>
-          <a:ext cx="122980" cy="132204"/>
+          <a:off x="6180436" y="5071791"/>
+          <a:ext cx="128450" cy="138084"/>
         </a:xfrm>
         <a:custGeom>
           <a:avLst/>
@@ -6466,16 +6296,16 @@
           <a:pathLst>
             <a:path>
               <a:moveTo>
-                <a:pt x="0" y="132204"/>
+                <a:pt x="0" y="138084"/>
               </a:moveTo>
               <a:lnTo>
-                <a:pt x="61490" y="132204"/>
+                <a:pt x="64225" y="138084"/>
               </a:lnTo>
               <a:lnTo>
-                <a:pt x="61490" y="0"/>
+                <a:pt x="64225" y="0"/>
               </a:lnTo>
               <a:lnTo>
-                <a:pt x="122980" y="0"/>
+                <a:pt x="128450" y="0"/>
               </a:lnTo>
             </a:path>
           </a:pathLst>
@@ -6516,8 +6346,8 @@
       </dsp:nvSpPr>
       <dsp:spPr>
         <a:xfrm>
-          <a:off x="5425572" y="5253880"/>
-          <a:ext cx="122980" cy="198306"/>
+          <a:off x="5409734" y="5209875"/>
+          <a:ext cx="128450" cy="207126"/>
         </a:xfrm>
         <a:custGeom>
           <a:avLst/>
@@ -6528,16 +6358,16 @@
           <a:pathLst>
             <a:path>
               <a:moveTo>
-                <a:pt x="0" y="198306"/>
+                <a:pt x="0" y="207126"/>
               </a:moveTo>
               <a:lnTo>
-                <a:pt x="61490" y="198306"/>
+                <a:pt x="64225" y="207126"/>
               </a:lnTo>
               <a:lnTo>
-                <a:pt x="61490" y="0"/>
+                <a:pt x="64225" y="0"/>
               </a:lnTo>
               <a:lnTo>
-                <a:pt x="122980" y="0"/>
+                <a:pt x="128450" y="0"/>
               </a:lnTo>
             </a:path>
           </a:pathLst>
@@ -6578,8 +6408,8 @@
       </dsp:nvSpPr>
       <dsp:spPr>
         <a:xfrm>
-          <a:off x="5425572" y="4989472"/>
-          <a:ext cx="122980" cy="462714"/>
+          <a:off x="5409734" y="4933707"/>
+          <a:ext cx="128450" cy="483294"/>
         </a:xfrm>
         <a:custGeom>
           <a:avLst/>
@@ -6590,16 +6420,16 @@
           <a:pathLst>
             <a:path>
               <a:moveTo>
-                <a:pt x="0" y="462714"/>
+                <a:pt x="0" y="483294"/>
               </a:moveTo>
               <a:lnTo>
-                <a:pt x="61490" y="462714"/>
+                <a:pt x="64225" y="483294"/>
               </a:lnTo>
               <a:lnTo>
-                <a:pt x="61490" y="0"/>
+                <a:pt x="64225" y="0"/>
               </a:lnTo>
               <a:lnTo>
-                <a:pt x="122980" y="0"/>
+                <a:pt x="128450" y="0"/>
               </a:lnTo>
             </a:path>
           </a:pathLst>
@@ -6640,8 +6470,8 @@
       </dsp:nvSpPr>
       <dsp:spPr>
         <a:xfrm>
-          <a:off x="4687688" y="5452186"/>
-          <a:ext cx="122980" cy="101172"/>
+          <a:off x="4639032" y="5417001"/>
+          <a:ext cx="128450" cy="105672"/>
         </a:xfrm>
         <a:custGeom>
           <a:avLst/>
@@ -6652,16 +6482,16 @@
           <a:pathLst>
             <a:path>
               <a:moveTo>
-                <a:pt x="0" y="101172"/>
+                <a:pt x="0" y="105672"/>
               </a:moveTo>
               <a:lnTo>
-                <a:pt x="61490" y="101172"/>
+                <a:pt x="64225" y="105672"/>
               </a:lnTo>
               <a:lnTo>
-                <a:pt x="61490" y="0"/>
+                <a:pt x="64225" y="0"/>
               </a:lnTo>
               <a:lnTo>
-                <a:pt x="122980" y="0"/>
+                <a:pt x="128450" y="0"/>
               </a:lnTo>
             </a:path>
           </a:pathLst>
@@ -6702,8 +6532,8 @@
       </dsp:nvSpPr>
       <dsp:spPr>
         <a:xfrm>
-          <a:off x="3949805" y="2907257"/>
-          <a:ext cx="122980" cy="2646102"/>
+          <a:off x="3868330" y="2896967"/>
+          <a:ext cx="128450" cy="2625706"/>
         </a:xfrm>
         <a:custGeom>
           <a:avLst/>
@@ -6717,13 +6547,13 @@
                 <a:pt x="0" y="0"/>
               </a:moveTo>
               <a:lnTo>
-                <a:pt x="61490" y="0"/>
+                <a:pt x="64225" y="0"/>
               </a:lnTo>
               <a:lnTo>
-                <a:pt x="61490" y="2646102"/>
+                <a:pt x="64225" y="2625706"/>
               </a:lnTo>
               <a:lnTo>
-                <a:pt x="122980" y="2646102"/>
+                <a:pt x="128450" y="2625706"/>
               </a:lnTo>
             </a:path>
           </a:pathLst>
@@ -6764,8 +6594,8 @@
       </dsp:nvSpPr>
       <dsp:spPr>
         <a:xfrm>
-          <a:off x="4687688" y="3931839"/>
-          <a:ext cx="122980" cy="132204"/>
+          <a:off x="4639032" y="3967118"/>
+          <a:ext cx="128450" cy="138084"/>
         </a:xfrm>
         <a:custGeom>
           <a:avLst/>
@@ -6779,13 +6609,13 @@
                 <a:pt x="0" y="0"/>
               </a:moveTo>
               <a:lnTo>
-                <a:pt x="61490" y="0"/>
+                <a:pt x="64225" y="0"/>
               </a:lnTo>
               <a:lnTo>
-                <a:pt x="61490" y="132204"/>
+                <a:pt x="64225" y="138084"/>
               </a:lnTo>
               <a:lnTo>
-                <a:pt x="122980" y="132204"/>
+                <a:pt x="128450" y="138084"/>
               </a:lnTo>
             </a:path>
           </a:pathLst>
@@ -6826,8 +6656,8 @@
       </dsp:nvSpPr>
       <dsp:spPr>
         <a:xfrm>
-          <a:off x="6901339" y="4811548"/>
-          <a:ext cx="122980" cy="91440"/>
+          <a:off x="6951137" y="4749903"/>
+          <a:ext cx="128450" cy="91440"/>
         </a:xfrm>
         <a:custGeom>
           <a:avLst/>
@@ -6841,7 +6671,7 @@
                 <a:pt x="0" y="45720"/>
               </a:moveTo>
               <a:lnTo>
-                <a:pt x="122980" y="45720"/>
+                <a:pt x="128450" y="45720"/>
               </a:lnTo>
             </a:path>
           </a:pathLst>
@@ -6882,8 +6712,8 @@
       </dsp:nvSpPr>
       <dsp:spPr>
         <a:xfrm>
-          <a:off x="6163455" y="4725063"/>
-          <a:ext cx="122980" cy="132204"/>
+          <a:off x="6180436" y="4657539"/>
+          <a:ext cx="128450" cy="138084"/>
         </a:xfrm>
         <a:custGeom>
           <a:avLst/>
@@ -6897,13 +6727,13 @@
                 <a:pt x="0" y="0"/>
               </a:moveTo>
               <a:lnTo>
-                <a:pt x="61490" y="0"/>
+                <a:pt x="64225" y="0"/>
               </a:lnTo>
               <a:lnTo>
-                <a:pt x="61490" y="132204"/>
+                <a:pt x="64225" y="138084"/>
               </a:lnTo>
               <a:lnTo>
-                <a:pt x="122980" y="132204"/>
+                <a:pt x="128450" y="138084"/>
               </a:lnTo>
             </a:path>
           </a:pathLst>
@@ -6944,8 +6774,8 @@
       </dsp:nvSpPr>
       <dsp:spPr>
         <a:xfrm>
-          <a:off x="6901339" y="4547139"/>
-          <a:ext cx="122980" cy="91440"/>
+          <a:off x="6951137" y="4473735"/>
+          <a:ext cx="128450" cy="91440"/>
         </a:xfrm>
         <a:custGeom>
           <a:avLst/>
@@ -6959,7 +6789,7 @@
                 <a:pt x="0" y="45720"/>
               </a:moveTo>
               <a:lnTo>
-                <a:pt x="122980" y="45720"/>
+                <a:pt x="128450" y="45720"/>
               </a:lnTo>
             </a:path>
           </a:pathLst>
@@ -7000,8 +6830,8 @@
       </dsp:nvSpPr>
       <dsp:spPr>
         <a:xfrm>
-          <a:off x="6163455" y="4592859"/>
-          <a:ext cx="122980" cy="132204"/>
+          <a:off x="6180436" y="4519455"/>
+          <a:ext cx="128450" cy="138084"/>
         </a:xfrm>
         <a:custGeom>
           <a:avLst/>
@@ -7012,16 +6842,16 @@
           <a:pathLst>
             <a:path>
               <a:moveTo>
-                <a:pt x="0" y="132204"/>
+                <a:pt x="0" y="138084"/>
               </a:moveTo>
               <a:lnTo>
-                <a:pt x="61490" y="132204"/>
+                <a:pt x="64225" y="138084"/>
               </a:lnTo>
               <a:lnTo>
-                <a:pt x="61490" y="0"/>
+                <a:pt x="64225" y="0"/>
               </a:lnTo>
               <a:lnTo>
-                <a:pt x="122980" y="0"/>
+                <a:pt x="128450" y="0"/>
               </a:lnTo>
             </a:path>
           </a:pathLst>
@@ -7062,8 +6892,8 @@
       </dsp:nvSpPr>
       <dsp:spPr>
         <a:xfrm>
-          <a:off x="5425572" y="3799635"/>
-          <a:ext cx="122980" cy="925428"/>
+          <a:off x="5409734" y="3829034"/>
+          <a:ext cx="128450" cy="828504"/>
         </a:xfrm>
         <a:custGeom>
           <a:avLst/>
@@ -7077,13 +6907,13 @@
                 <a:pt x="0" y="0"/>
               </a:moveTo>
               <a:lnTo>
-                <a:pt x="61490" y="0"/>
+                <a:pt x="64225" y="0"/>
               </a:lnTo>
               <a:lnTo>
-                <a:pt x="61490" y="925428"/>
+                <a:pt x="64225" y="828504"/>
               </a:lnTo>
               <a:lnTo>
-                <a:pt x="122980" y="925428"/>
+                <a:pt x="128450" y="828504"/>
               </a:lnTo>
             </a:path>
           </a:pathLst>
@@ -7117,15 +6947,15 @@
         <a:fontRef idx="minor"/>
       </dsp:style>
     </dsp:sp>
-    <dsp:sp modelId="{C1341CAE-26B4-413C-B659-B4133610AE2C}">
+    <dsp:sp modelId="{19C56599-44F2-4063-BC5C-5748142D59CB}">
       <dsp:nvSpPr>
         <dsp:cNvPr id="0" name=""/>
         <dsp:cNvSpPr/>
       </dsp:nvSpPr>
       <dsp:spPr>
         <a:xfrm>
-          <a:off x="6163455" y="4282731"/>
-          <a:ext cx="122980" cy="91440"/>
+          <a:off x="6180436" y="3967902"/>
+          <a:ext cx="128450" cy="275384"/>
         </a:xfrm>
         <a:custGeom>
           <a:avLst/>
@@ -7136,10 +6966,16 @@
           <a:pathLst>
             <a:path>
               <a:moveTo>
-                <a:pt x="0" y="45720"/>
+                <a:pt x="0" y="0"/>
               </a:moveTo>
               <a:lnTo>
-                <a:pt x="122980" y="45720"/>
+                <a:pt x="64225" y="0"/>
+              </a:lnTo>
+              <a:lnTo>
+                <a:pt x="64225" y="275384"/>
+              </a:lnTo>
+              <a:lnTo>
+                <a:pt x="128450" y="275384"/>
               </a:lnTo>
             </a:path>
           </a:pathLst>
@@ -7173,15 +7009,15 @@
         <a:fontRef idx="minor"/>
       </dsp:style>
     </dsp:sp>
-    <dsp:sp modelId="{325B629F-ABB1-4EC6-9F54-565334BD27E2}">
+    <dsp:sp modelId="{C58B2589-D93B-4FFD-B4D1-1C34B012D6DE}">
       <dsp:nvSpPr>
         <dsp:cNvPr id="0" name=""/>
         <dsp:cNvSpPr/>
       </dsp:nvSpPr>
       <dsp:spPr>
         <a:xfrm>
-          <a:off x="5425572" y="3799635"/>
-          <a:ext cx="122980" cy="528816"/>
+          <a:off x="6180436" y="3921398"/>
+          <a:ext cx="128450" cy="91440"/>
         </a:xfrm>
         <a:custGeom>
           <a:avLst/>
@@ -7192,16 +7028,16 @@
           <a:pathLst>
             <a:path>
               <a:moveTo>
-                <a:pt x="0" y="0"/>
+                <a:pt x="0" y="46503"/>
               </a:moveTo>
               <a:lnTo>
-                <a:pt x="61490" y="0"/>
+                <a:pt x="64225" y="46503"/>
               </a:lnTo>
               <a:lnTo>
-                <a:pt x="61490" y="528816"/>
+                <a:pt x="64225" y="45720"/>
               </a:lnTo>
               <a:lnTo>
-                <a:pt x="122980" y="528816"/>
+                <a:pt x="128450" y="45720"/>
               </a:lnTo>
             </a:path>
           </a:pathLst>
@@ -7235,15 +7071,15 @@
         <a:fontRef idx="minor"/>
       </dsp:style>
     </dsp:sp>
-    <dsp:sp modelId="{19C56599-44F2-4063-BC5C-5748142D59CB}">
+    <dsp:sp modelId="{37C7B046-E658-4728-A5FD-08A2F893709B}">
       <dsp:nvSpPr>
         <dsp:cNvPr id="0" name=""/>
         <dsp:cNvSpPr/>
       </dsp:nvSpPr>
       <dsp:spPr>
         <a:xfrm>
-          <a:off x="6163455" y="3800385"/>
-          <a:ext cx="122980" cy="263658"/>
+          <a:off x="6180436" y="3690950"/>
+          <a:ext cx="128450" cy="276951"/>
         </a:xfrm>
         <a:custGeom>
           <a:avLst/>
@@ -7254,16 +7090,16 @@
           <a:pathLst>
             <a:path>
               <a:moveTo>
-                <a:pt x="0" y="0"/>
+                <a:pt x="0" y="276951"/>
               </a:moveTo>
               <a:lnTo>
-                <a:pt x="61490" y="0"/>
+                <a:pt x="64225" y="276951"/>
               </a:lnTo>
               <a:lnTo>
-                <a:pt x="61490" y="263658"/>
+                <a:pt x="64225" y="0"/>
               </a:lnTo>
               <a:lnTo>
-                <a:pt x="122980" y="263658"/>
+                <a:pt x="128450" y="0"/>
               </a:lnTo>
             </a:path>
           </a:pathLst>
@@ -7297,15 +7133,15 @@
         <a:fontRef idx="minor"/>
       </dsp:style>
     </dsp:sp>
-    <dsp:sp modelId="{C58B2589-D93B-4FFD-B4D1-1C34B012D6DE}">
+    <dsp:sp modelId="{418A319B-5CB8-4C1A-929A-A579AE777841}">
       <dsp:nvSpPr>
         <dsp:cNvPr id="0" name=""/>
         <dsp:cNvSpPr/>
       </dsp:nvSpPr>
       <dsp:spPr>
         <a:xfrm>
-          <a:off x="6163455" y="3753915"/>
-          <a:ext cx="122980" cy="91440"/>
+          <a:off x="5409734" y="3829034"/>
+          <a:ext cx="128450" cy="138867"/>
         </a:xfrm>
         <a:custGeom>
           <a:avLst/>
@@ -7316,16 +7152,16 @@
           <a:pathLst>
             <a:path>
               <a:moveTo>
-                <a:pt x="0" y="46470"/>
+                <a:pt x="0" y="0"/>
               </a:moveTo>
               <a:lnTo>
-                <a:pt x="61490" y="46470"/>
+                <a:pt x="64225" y="0"/>
               </a:lnTo>
               <a:lnTo>
-                <a:pt x="61490" y="45720"/>
+                <a:pt x="64225" y="138867"/>
               </a:lnTo>
               <a:lnTo>
-                <a:pt x="122980" y="45720"/>
+                <a:pt x="128450" y="138867"/>
               </a:lnTo>
             </a:path>
           </a:pathLst>
@@ -7359,15 +7195,15 @@
         <a:fontRef idx="minor"/>
       </dsp:style>
     </dsp:sp>
-    <dsp:sp modelId="{37C7B046-E658-4728-A5FD-08A2F893709B}">
+    <dsp:sp modelId="{63BFDF2F-6F11-4980-A631-1D0C6BCF6E65}">
       <dsp:nvSpPr>
         <dsp:cNvPr id="0" name=""/>
         <dsp:cNvSpPr/>
       </dsp:nvSpPr>
       <dsp:spPr>
         <a:xfrm>
-          <a:off x="6163455" y="3535226"/>
-          <a:ext cx="122980" cy="265158"/>
+          <a:off x="6180436" y="3276698"/>
+          <a:ext cx="128450" cy="138084"/>
         </a:xfrm>
         <a:custGeom>
           <a:avLst/>
@@ -7378,16 +7214,16 @@
           <a:pathLst>
             <a:path>
               <a:moveTo>
-                <a:pt x="0" y="265158"/>
+                <a:pt x="0" y="0"/>
               </a:moveTo>
               <a:lnTo>
-                <a:pt x="61490" y="265158"/>
+                <a:pt x="64225" y="0"/>
               </a:lnTo>
               <a:lnTo>
-                <a:pt x="61490" y="0"/>
+                <a:pt x="64225" y="138084"/>
               </a:lnTo>
               <a:lnTo>
-                <a:pt x="122980" y="0"/>
+                <a:pt x="128450" y="138084"/>
               </a:lnTo>
             </a:path>
           </a:pathLst>
@@ -7421,15 +7257,15 @@
         <a:fontRef idx="minor"/>
       </dsp:style>
     </dsp:sp>
-    <dsp:sp modelId="{418A319B-5CB8-4C1A-929A-A579AE777841}">
+    <dsp:sp modelId="{8ACA028D-62C9-4546-BC43-59E86544747D}">
       <dsp:nvSpPr>
         <dsp:cNvPr id="0" name=""/>
         <dsp:cNvSpPr/>
       </dsp:nvSpPr>
       <dsp:spPr>
         <a:xfrm>
-          <a:off x="5425572" y="3753915"/>
-          <a:ext cx="122980" cy="91440"/>
+          <a:off x="6180436" y="3138614"/>
+          <a:ext cx="128450" cy="138084"/>
         </a:xfrm>
         <a:custGeom>
           <a:avLst/>
@@ -7440,16 +7276,16 @@
           <a:pathLst>
             <a:path>
               <a:moveTo>
-                <a:pt x="0" y="45720"/>
+                <a:pt x="0" y="138084"/>
               </a:moveTo>
               <a:lnTo>
-                <a:pt x="61490" y="45720"/>
+                <a:pt x="64225" y="138084"/>
               </a:lnTo>
               <a:lnTo>
-                <a:pt x="61490" y="46470"/>
+                <a:pt x="64225" y="0"/>
               </a:lnTo>
               <a:lnTo>
-                <a:pt x="122980" y="46470"/>
+                <a:pt x="128450" y="0"/>
               </a:lnTo>
             </a:path>
           </a:pathLst>
@@ -7483,15 +7319,15 @@
         <a:fontRef idx="minor"/>
       </dsp:style>
     </dsp:sp>
-    <dsp:sp modelId="{63BFDF2F-6F11-4980-A631-1D0C6BCF6E65}">
+    <dsp:sp modelId="{F686DFC4-1641-4092-9BC6-E8FB9D38AF0D}">
       <dsp:nvSpPr>
         <dsp:cNvPr id="0" name=""/>
         <dsp:cNvSpPr/>
       </dsp:nvSpPr>
       <dsp:spPr>
         <a:xfrm>
-          <a:off x="6163455" y="3138614"/>
-          <a:ext cx="122980" cy="132204"/>
+          <a:off x="5409734" y="3276698"/>
+          <a:ext cx="128450" cy="552336"/>
         </a:xfrm>
         <a:custGeom>
           <a:avLst/>
@@ -7502,16 +7338,16 @@
           <a:pathLst>
             <a:path>
               <a:moveTo>
-                <a:pt x="0" y="0"/>
+                <a:pt x="0" y="552336"/>
               </a:moveTo>
               <a:lnTo>
-                <a:pt x="61490" y="0"/>
+                <a:pt x="64225" y="552336"/>
               </a:lnTo>
               <a:lnTo>
-                <a:pt x="61490" y="132204"/>
+                <a:pt x="64225" y="0"/>
               </a:lnTo>
               <a:lnTo>
-                <a:pt x="122980" y="132204"/>
+                <a:pt x="128450" y="0"/>
               </a:lnTo>
             </a:path>
           </a:pathLst>
@@ -7545,15 +7381,15 @@
         <a:fontRef idx="minor"/>
       </dsp:style>
     </dsp:sp>
-    <dsp:sp modelId="{8ACA028D-62C9-4546-BC43-59E86544747D}">
+    <dsp:sp modelId="{5D697390-7377-44AA-914E-7F34A506AC17}">
       <dsp:nvSpPr>
         <dsp:cNvPr id="0" name=""/>
         <dsp:cNvSpPr/>
       </dsp:nvSpPr>
       <dsp:spPr>
         <a:xfrm>
-          <a:off x="6163455" y="3006410"/>
-          <a:ext cx="122980" cy="132204"/>
+          <a:off x="5409734" y="3000530"/>
+          <a:ext cx="128450" cy="828504"/>
         </a:xfrm>
         <a:custGeom>
           <a:avLst/>
@@ -7564,16 +7400,16 @@
           <a:pathLst>
             <a:path>
               <a:moveTo>
-                <a:pt x="0" y="132204"/>
+                <a:pt x="0" y="828504"/>
               </a:moveTo>
               <a:lnTo>
-                <a:pt x="61490" y="132204"/>
+                <a:pt x="64225" y="828504"/>
               </a:lnTo>
               <a:lnTo>
-                <a:pt x="61490" y="0"/>
+                <a:pt x="64225" y="0"/>
               </a:lnTo>
               <a:lnTo>
-                <a:pt x="122980" y="0"/>
+                <a:pt x="128450" y="0"/>
               </a:lnTo>
             </a:path>
           </a:pathLst>
@@ -7607,15 +7443,15 @@
         <a:fontRef idx="minor"/>
       </dsp:style>
     </dsp:sp>
-    <dsp:sp modelId="{F686DFC4-1641-4092-9BC6-E8FB9D38AF0D}">
+    <dsp:sp modelId="{554A0E78-C210-4338-8B5C-48DD3D201C5A}">
       <dsp:nvSpPr>
         <dsp:cNvPr id="0" name=""/>
         <dsp:cNvSpPr/>
       </dsp:nvSpPr>
       <dsp:spPr>
         <a:xfrm>
-          <a:off x="5425572" y="3138614"/>
-          <a:ext cx="122980" cy="661020"/>
+          <a:off x="4639032" y="3829034"/>
+          <a:ext cx="128450" cy="138084"/>
         </a:xfrm>
         <a:custGeom>
           <a:avLst/>
@@ -7626,16 +7462,16 @@
           <a:pathLst>
             <a:path>
               <a:moveTo>
-                <a:pt x="0" y="661020"/>
+                <a:pt x="0" y="138084"/>
               </a:moveTo>
               <a:lnTo>
-                <a:pt x="61490" y="661020"/>
+                <a:pt x="64225" y="138084"/>
               </a:lnTo>
               <a:lnTo>
-                <a:pt x="61490" y="0"/>
+                <a:pt x="64225" y="0"/>
               </a:lnTo>
               <a:lnTo>
-                <a:pt x="122980" y="0"/>
+                <a:pt x="128450" y="0"/>
               </a:lnTo>
             </a:path>
           </a:pathLst>
@@ -7669,15 +7505,15 @@
         <a:fontRef idx="minor"/>
       </dsp:style>
     </dsp:sp>
-    <dsp:sp modelId="{5D697390-7377-44AA-914E-7F34A506AC17}">
+    <dsp:sp modelId="{3E53AB13-732C-4F83-9B8F-D6D7DB3860B6}">
       <dsp:nvSpPr>
         <dsp:cNvPr id="0" name=""/>
         <dsp:cNvSpPr/>
       </dsp:nvSpPr>
       <dsp:spPr>
         <a:xfrm>
-          <a:off x="5425572" y="2874206"/>
-          <a:ext cx="122980" cy="925428"/>
+          <a:off x="3868330" y="2896967"/>
+          <a:ext cx="128450" cy="1070151"/>
         </a:xfrm>
         <a:custGeom>
           <a:avLst/>
@@ -7688,16 +7524,78 @@
           <a:pathLst>
             <a:path>
               <a:moveTo>
-                <a:pt x="0" y="925428"/>
+                <a:pt x="0" y="0"/>
               </a:moveTo>
               <a:lnTo>
-                <a:pt x="61490" y="925428"/>
+                <a:pt x="64225" y="0"/>
               </a:lnTo>
               <a:lnTo>
-                <a:pt x="61490" y="0"/>
+                <a:pt x="64225" y="1070151"/>
               </a:lnTo>
               <a:lnTo>
-                <a:pt x="122980" y="0"/>
+                <a:pt x="128450" y="1070151"/>
+              </a:lnTo>
+            </a:path>
+          </a:pathLst>
+        </a:custGeom>
+        <a:noFill/>
+        <a:ln w="19050" cap="flat" cmpd="sng" algn="ctr">
+          <a:solidFill>
+            <a:schemeClr val="accent1">
+              <a:shade val="60000"/>
+              <a:hueOff val="0"/>
+              <a:satOff val="0"/>
+              <a:lumOff val="0"/>
+              <a:alphaOff val="0"/>
+            </a:schemeClr>
+          </a:solidFill>
+          <a:prstDash val="solid"/>
+          <a:miter lim="800000"/>
+        </a:ln>
+        <a:effectLst/>
+      </dsp:spPr>
+      <dsp:style>
+        <a:lnRef idx="2">
+          <a:scrgbClr r="0" g="0" b="0"/>
+        </a:lnRef>
+        <a:fillRef idx="0">
+          <a:scrgbClr r="0" g="0" b="0"/>
+        </a:fillRef>
+        <a:effectRef idx="0">
+          <a:scrgbClr r="0" g="0" b="0"/>
+        </a:effectRef>
+        <a:fontRef idx="minor"/>
+      </dsp:style>
+    </dsp:sp>
+    <dsp:sp modelId="{11F963ED-B3F0-41A3-B824-325961929004}">
+      <dsp:nvSpPr>
+        <dsp:cNvPr id="0" name=""/>
+        <dsp:cNvSpPr/>
+      </dsp:nvSpPr>
+      <dsp:spPr>
+        <a:xfrm>
+          <a:off x="4639032" y="1964899"/>
+          <a:ext cx="128450" cy="138084"/>
+        </a:xfrm>
+        <a:custGeom>
+          <a:avLst/>
+          <a:gdLst/>
+          <a:ahLst/>
+          <a:cxnLst/>
+          <a:rect l="0" t="0" r="0" b="0"/>
+          <a:pathLst>
+            <a:path>
+              <a:moveTo>
+                <a:pt x="0" y="0"/>
+              </a:moveTo>
+              <a:lnTo>
+                <a:pt x="64225" y="0"/>
+              </a:lnTo>
+              <a:lnTo>
+                <a:pt x="64225" y="138084"/>
+              </a:lnTo>
+              <a:lnTo>
+                <a:pt x="128450" y="138084"/>
               </a:lnTo>
             </a:path>
           </a:pathLst>
@@ -7731,15 +7629,15 @@
         <a:fontRef idx="minor"/>
       </dsp:style>
     </dsp:sp>
-    <dsp:sp modelId="{554A0E78-C210-4338-8B5C-48DD3D201C5A}">
+    <dsp:sp modelId="{CE327CA8-163F-4708-9400-03AD1F0721B6}">
       <dsp:nvSpPr>
         <dsp:cNvPr id="0" name=""/>
         <dsp:cNvSpPr/>
       </dsp:nvSpPr>
       <dsp:spPr>
         <a:xfrm>
-          <a:off x="4687688" y="3799635"/>
-          <a:ext cx="122980" cy="132204"/>
+          <a:off x="7099870" y="2829735"/>
+          <a:ext cx="108553" cy="91440"/>
         </a:xfrm>
         <a:custGeom>
           <a:avLst/>
@@ -7750,16 +7648,10 @@
           <a:pathLst>
             <a:path>
               <a:moveTo>
-                <a:pt x="0" y="132204"/>
+                <a:pt x="0" y="45720"/>
               </a:moveTo>
               <a:lnTo>
-                <a:pt x="61490" y="132204"/>
-              </a:lnTo>
-              <a:lnTo>
-                <a:pt x="61490" y="0"/>
-              </a:lnTo>
-              <a:lnTo>
-                <a:pt x="122980" y="0"/>
+                <a:pt x="108553" y="45720"/>
               </a:lnTo>
             </a:path>
           </a:pathLst>
@@ -7793,15 +7685,15 @@
         <a:fontRef idx="minor"/>
       </dsp:style>
     </dsp:sp>
-    <dsp:sp modelId="{3E53AB13-732C-4F83-9B8F-D6D7DB3860B6}">
+    <dsp:sp modelId="{C6ABE6A2-C04F-4482-BB5C-769C7DA9CC1F}">
       <dsp:nvSpPr>
         <dsp:cNvPr id="0" name=""/>
         <dsp:cNvSpPr/>
       </dsp:nvSpPr>
       <dsp:spPr>
         <a:xfrm>
-          <a:off x="3949805" y="2907257"/>
-          <a:ext cx="122980" cy="1024581"/>
+          <a:off x="6180436" y="2724362"/>
+          <a:ext cx="127563" cy="151092"/>
         </a:xfrm>
         <a:custGeom>
           <a:avLst/>
@@ -7815,13 +7707,913 @@
                 <a:pt x="0" y="0"/>
               </a:moveTo>
               <a:lnTo>
-                <a:pt x="61490" y="0"/>
+                <a:pt x="63338" y="0"/>
               </a:lnTo>
               <a:lnTo>
-                <a:pt x="61490" y="1024581"/>
+                <a:pt x="63338" y="151092"/>
               </a:lnTo>
               <a:lnTo>
-                <a:pt x="122980" y="1024581"/>
+                <a:pt x="127563" y="151092"/>
+              </a:lnTo>
+            </a:path>
+          </a:pathLst>
+        </a:custGeom>
+        <a:noFill/>
+        <a:ln w="19050" cap="flat" cmpd="sng" algn="ctr">
+          <a:solidFill>
+            <a:schemeClr val="accent1">
+              <a:shade val="80000"/>
+              <a:hueOff val="0"/>
+              <a:satOff val="0"/>
+              <a:lumOff val="0"/>
+              <a:alphaOff val="0"/>
+            </a:schemeClr>
+          </a:solidFill>
+          <a:prstDash val="solid"/>
+          <a:miter lim="800000"/>
+        </a:ln>
+        <a:effectLst/>
+      </dsp:spPr>
+      <dsp:style>
+        <a:lnRef idx="2">
+          <a:scrgbClr r="0" g="0" b="0"/>
+        </a:lnRef>
+        <a:fillRef idx="0">
+          <a:scrgbClr r="0" g="0" b="0"/>
+        </a:fillRef>
+        <a:effectRef idx="0">
+          <a:scrgbClr r="0" g="0" b="0"/>
+        </a:effectRef>
+        <a:fontRef idx="minor"/>
+      </dsp:style>
+    </dsp:sp>
+    <dsp:sp modelId="{D56AF9D6-52CD-49B7-B03A-910C74477DFD}">
+      <dsp:nvSpPr>
+        <dsp:cNvPr id="0" name=""/>
+        <dsp:cNvSpPr/>
+      </dsp:nvSpPr>
+      <dsp:spPr>
+        <a:xfrm>
+          <a:off x="6951137" y="2540558"/>
+          <a:ext cx="128450" cy="91440"/>
+        </a:xfrm>
+        <a:custGeom>
+          <a:avLst/>
+          <a:gdLst/>
+          <a:ahLst/>
+          <a:cxnLst/>
+          <a:rect l="0" t="0" r="0" b="0"/>
+          <a:pathLst>
+            <a:path>
+              <a:moveTo>
+                <a:pt x="0" y="45720"/>
+              </a:moveTo>
+              <a:lnTo>
+                <a:pt x="128450" y="45720"/>
+              </a:lnTo>
+            </a:path>
+          </a:pathLst>
+        </a:custGeom>
+        <a:noFill/>
+        <a:ln w="19050" cap="flat" cmpd="sng" algn="ctr">
+          <a:solidFill>
+            <a:schemeClr val="accent1">
+              <a:shade val="80000"/>
+              <a:hueOff val="0"/>
+              <a:satOff val="0"/>
+              <a:lumOff val="0"/>
+              <a:alphaOff val="0"/>
+            </a:schemeClr>
+          </a:solidFill>
+          <a:prstDash val="solid"/>
+          <a:miter lim="800000"/>
+        </a:ln>
+        <a:effectLst/>
+      </dsp:spPr>
+      <dsp:style>
+        <a:lnRef idx="2">
+          <a:scrgbClr r="0" g="0" b="0"/>
+        </a:lnRef>
+        <a:fillRef idx="0">
+          <a:scrgbClr r="0" g="0" b="0"/>
+        </a:fillRef>
+        <a:effectRef idx="0">
+          <a:scrgbClr r="0" g="0" b="0"/>
+        </a:effectRef>
+        <a:fontRef idx="minor"/>
+      </dsp:style>
+    </dsp:sp>
+    <dsp:sp modelId="{171E7136-836A-486B-B91D-37B90AC43AE7}">
+      <dsp:nvSpPr>
+        <dsp:cNvPr id="0" name=""/>
+        <dsp:cNvSpPr/>
+      </dsp:nvSpPr>
+      <dsp:spPr>
+        <a:xfrm>
+          <a:off x="6180436" y="2586278"/>
+          <a:ext cx="128450" cy="138084"/>
+        </a:xfrm>
+        <a:custGeom>
+          <a:avLst/>
+          <a:gdLst/>
+          <a:ahLst/>
+          <a:cxnLst/>
+          <a:rect l="0" t="0" r="0" b="0"/>
+          <a:pathLst>
+            <a:path>
+              <a:moveTo>
+                <a:pt x="0" y="138084"/>
+              </a:moveTo>
+              <a:lnTo>
+                <a:pt x="64225" y="138084"/>
+              </a:lnTo>
+              <a:lnTo>
+                <a:pt x="64225" y="0"/>
+              </a:lnTo>
+              <a:lnTo>
+                <a:pt x="128450" y="0"/>
+              </a:lnTo>
+            </a:path>
+          </a:pathLst>
+        </a:custGeom>
+        <a:noFill/>
+        <a:ln w="19050" cap="flat" cmpd="sng" algn="ctr">
+          <a:solidFill>
+            <a:schemeClr val="accent1">
+              <a:shade val="80000"/>
+              <a:hueOff val="0"/>
+              <a:satOff val="0"/>
+              <a:lumOff val="0"/>
+              <a:alphaOff val="0"/>
+            </a:schemeClr>
+          </a:solidFill>
+          <a:prstDash val="solid"/>
+          <a:miter lim="800000"/>
+        </a:ln>
+        <a:effectLst/>
+      </dsp:spPr>
+      <dsp:style>
+        <a:lnRef idx="2">
+          <a:scrgbClr r="0" g="0" b="0"/>
+        </a:lnRef>
+        <a:fillRef idx="0">
+          <a:scrgbClr r="0" g="0" b="0"/>
+        </a:fillRef>
+        <a:effectRef idx="0">
+          <a:scrgbClr r="0" g="0" b="0"/>
+        </a:effectRef>
+        <a:fontRef idx="minor"/>
+      </dsp:style>
+    </dsp:sp>
+    <dsp:sp modelId="{26800CCF-2CF7-4C2B-BE5D-668243245262}">
+      <dsp:nvSpPr>
+        <dsp:cNvPr id="0" name=""/>
+        <dsp:cNvSpPr/>
+      </dsp:nvSpPr>
+      <dsp:spPr>
+        <a:xfrm>
+          <a:off x="5409734" y="1826815"/>
+          <a:ext cx="128450" cy="897546"/>
+        </a:xfrm>
+        <a:custGeom>
+          <a:avLst/>
+          <a:gdLst/>
+          <a:ahLst/>
+          <a:cxnLst/>
+          <a:rect l="0" t="0" r="0" b="0"/>
+          <a:pathLst>
+            <a:path>
+              <a:moveTo>
+                <a:pt x="0" y="0"/>
+              </a:moveTo>
+              <a:lnTo>
+                <a:pt x="64225" y="0"/>
+              </a:lnTo>
+              <a:lnTo>
+                <a:pt x="64225" y="897546"/>
+              </a:lnTo>
+              <a:lnTo>
+                <a:pt x="128450" y="897546"/>
+              </a:lnTo>
+            </a:path>
+          </a:pathLst>
+        </a:custGeom>
+        <a:noFill/>
+        <a:ln w="19050" cap="flat" cmpd="sng" algn="ctr">
+          <a:solidFill>
+            <a:schemeClr val="accent1">
+              <a:shade val="80000"/>
+              <a:hueOff val="0"/>
+              <a:satOff val="0"/>
+              <a:lumOff val="0"/>
+              <a:alphaOff val="0"/>
+            </a:schemeClr>
+          </a:solidFill>
+          <a:prstDash val="solid"/>
+          <a:miter lim="800000"/>
+        </a:ln>
+        <a:effectLst/>
+      </dsp:spPr>
+      <dsp:style>
+        <a:lnRef idx="2">
+          <a:scrgbClr r="0" g="0" b="0"/>
+        </a:lnRef>
+        <a:fillRef idx="0">
+          <a:scrgbClr r="0" g="0" b="0"/>
+        </a:fillRef>
+        <a:effectRef idx="0">
+          <a:scrgbClr r="0" g="0" b="0"/>
+        </a:effectRef>
+        <a:fontRef idx="minor"/>
+      </dsp:style>
+    </dsp:sp>
+    <dsp:sp modelId="{50A4060C-F737-4459-BC6A-B233FEC9432A}">
+      <dsp:nvSpPr>
+        <dsp:cNvPr id="0" name=""/>
+        <dsp:cNvSpPr/>
+      </dsp:nvSpPr>
+      <dsp:spPr>
+        <a:xfrm>
+          <a:off x="6180436" y="2264390"/>
+          <a:ext cx="128450" cy="91440"/>
+        </a:xfrm>
+        <a:custGeom>
+          <a:avLst/>
+          <a:gdLst/>
+          <a:ahLst/>
+          <a:cxnLst/>
+          <a:rect l="0" t="0" r="0" b="0"/>
+          <a:pathLst>
+            <a:path>
+              <a:moveTo>
+                <a:pt x="0" y="45720"/>
+              </a:moveTo>
+              <a:lnTo>
+                <a:pt x="128450" y="45720"/>
+              </a:lnTo>
+            </a:path>
+          </a:pathLst>
+        </a:custGeom>
+        <a:noFill/>
+        <a:ln w="19050" cap="flat" cmpd="sng" algn="ctr">
+          <a:solidFill>
+            <a:schemeClr val="accent1">
+              <a:shade val="80000"/>
+              <a:hueOff val="0"/>
+              <a:satOff val="0"/>
+              <a:lumOff val="0"/>
+              <a:alphaOff val="0"/>
+            </a:schemeClr>
+          </a:solidFill>
+          <a:prstDash val="solid"/>
+          <a:miter lim="800000"/>
+        </a:ln>
+        <a:effectLst/>
+      </dsp:spPr>
+      <dsp:style>
+        <a:lnRef idx="2">
+          <a:scrgbClr r="0" g="0" b="0"/>
+        </a:lnRef>
+        <a:fillRef idx="0">
+          <a:scrgbClr r="0" g="0" b="0"/>
+        </a:fillRef>
+        <a:effectRef idx="0">
+          <a:scrgbClr r="0" g="0" b="0"/>
+        </a:effectRef>
+        <a:fontRef idx="minor"/>
+      </dsp:style>
+    </dsp:sp>
+    <dsp:sp modelId="{34B1EDD2-BFE8-4A14-8948-7EEB84EDF964}">
+      <dsp:nvSpPr>
+        <dsp:cNvPr id="0" name=""/>
+        <dsp:cNvSpPr/>
+      </dsp:nvSpPr>
+      <dsp:spPr>
+        <a:xfrm>
+          <a:off x="5409734" y="1826815"/>
+          <a:ext cx="128450" cy="483294"/>
+        </a:xfrm>
+        <a:custGeom>
+          <a:avLst/>
+          <a:gdLst/>
+          <a:ahLst/>
+          <a:cxnLst/>
+          <a:rect l="0" t="0" r="0" b="0"/>
+          <a:pathLst>
+            <a:path>
+              <a:moveTo>
+                <a:pt x="0" y="0"/>
+              </a:moveTo>
+              <a:lnTo>
+                <a:pt x="64225" y="0"/>
+              </a:lnTo>
+              <a:lnTo>
+                <a:pt x="64225" y="483294"/>
+              </a:lnTo>
+              <a:lnTo>
+                <a:pt x="128450" y="483294"/>
+              </a:lnTo>
+            </a:path>
+          </a:pathLst>
+        </a:custGeom>
+        <a:noFill/>
+        <a:ln w="19050" cap="flat" cmpd="sng" algn="ctr">
+          <a:solidFill>
+            <a:schemeClr val="accent1">
+              <a:shade val="80000"/>
+              <a:hueOff val="0"/>
+              <a:satOff val="0"/>
+              <a:lumOff val="0"/>
+              <a:alphaOff val="0"/>
+            </a:schemeClr>
+          </a:solidFill>
+          <a:prstDash val="solid"/>
+          <a:miter lim="800000"/>
+        </a:ln>
+        <a:effectLst/>
+      </dsp:spPr>
+      <dsp:style>
+        <a:lnRef idx="2">
+          <a:scrgbClr r="0" g="0" b="0"/>
+        </a:lnRef>
+        <a:fillRef idx="0">
+          <a:scrgbClr r="0" g="0" b="0"/>
+        </a:fillRef>
+        <a:effectRef idx="0">
+          <a:scrgbClr r="0" g="0" b="0"/>
+        </a:effectRef>
+        <a:fontRef idx="minor"/>
+      </dsp:style>
+    </dsp:sp>
+    <dsp:sp modelId="{16D33CAD-B597-414C-9523-47A079B2FFFB}">
+      <dsp:nvSpPr>
+        <dsp:cNvPr id="0" name=""/>
+        <dsp:cNvSpPr/>
+      </dsp:nvSpPr>
+      <dsp:spPr>
+        <a:xfrm>
+          <a:off x="5409734" y="1826815"/>
+          <a:ext cx="128450" cy="207126"/>
+        </a:xfrm>
+        <a:custGeom>
+          <a:avLst/>
+          <a:gdLst/>
+          <a:ahLst/>
+          <a:cxnLst/>
+          <a:rect l="0" t="0" r="0" b="0"/>
+          <a:pathLst>
+            <a:path>
+              <a:moveTo>
+                <a:pt x="0" y="0"/>
+              </a:moveTo>
+              <a:lnTo>
+                <a:pt x="64225" y="0"/>
+              </a:lnTo>
+              <a:lnTo>
+                <a:pt x="64225" y="207126"/>
+              </a:lnTo>
+              <a:lnTo>
+                <a:pt x="128450" y="207126"/>
+              </a:lnTo>
+            </a:path>
+          </a:pathLst>
+        </a:custGeom>
+        <a:noFill/>
+        <a:ln w="19050" cap="flat" cmpd="sng" algn="ctr">
+          <a:solidFill>
+            <a:schemeClr val="accent1">
+              <a:shade val="80000"/>
+              <a:hueOff val="0"/>
+              <a:satOff val="0"/>
+              <a:lumOff val="0"/>
+              <a:alphaOff val="0"/>
+            </a:schemeClr>
+          </a:solidFill>
+          <a:prstDash val="solid"/>
+          <a:miter lim="800000"/>
+        </a:ln>
+        <a:effectLst/>
+      </dsp:spPr>
+      <dsp:style>
+        <a:lnRef idx="2">
+          <a:scrgbClr r="0" g="0" b="0"/>
+        </a:lnRef>
+        <a:fillRef idx="0">
+          <a:scrgbClr r="0" g="0" b="0"/>
+        </a:fillRef>
+        <a:effectRef idx="0">
+          <a:scrgbClr r="0" g="0" b="0"/>
+        </a:effectRef>
+        <a:fontRef idx="minor"/>
+      </dsp:style>
+    </dsp:sp>
+    <dsp:sp modelId="{D5EFD006-A32B-489A-B809-E3D7E0386B88}">
+      <dsp:nvSpPr>
+        <dsp:cNvPr id="0" name=""/>
+        <dsp:cNvSpPr/>
+      </dsp:nvSpPr>
+      <dsp:spPr>
+        <a:xfrm>
+          <a:off x="6180436" y="1712053"/>
+          <a:ext cx="128450" cy="91440"/>
+        </a:xfrm>
+        <a:custGeom>
+          <a:avLst/>
+          <a:gdLst/>
+          <a:ahLst/>
+          <a:cxnLst/>
+          <a:rect l="0" t="0" r="0" b="0"/>
+          <a:pathLst>
+            <a:path>
+              <a:moveTo>
+                <a:pt x="0" y="45720"/>
+              </a:moveTo>
+              <a:lnTo>
+                <a:pt x="128450" y="45720"/>
+              </a:lnTo>
+            </a:path>
+          </a:pathLst>
+        </a:custGeom>
+        <a:noFill/>
+        <a:ln w="19050" cap="flat" cmpd="sng" algn="ctr">
+          <a:solidFill>
+            <a:schemeClr val="accent1">
+              <a:shade val="80000"/>
+              <a:hueOff val="0"/>
+              <a:satOff val="0"/>
+              <a:lumOff val="0"/>
+              <a:alphaOff val="0"/>
+            </a:schemeClr>
+          </a:solidFill>
+          <a:prstDash val="solid"/>
+          <a:miter lim="800000"/>
+        </a:ln>
+        <a:effectLst/>
+      </dsp:spPr>
+      <dsp:style>
+        <a:lnRef idx="2">
+          <a:scrgbClr r="0" g="0" b="0"/>
+        </a:lnRef>
+        <a:fillRef idx="0">
+          <a:scrgbClr r="0" g="0" b="0"/>
+        </a:fillRef>
+        <a:effectRef idx="0">
+          <a:scrgbClr r="0" g="0" b="0"/>
+        </a:effectRef>
+        <a:fontRef idx="minor"/>
+      </dsp:style>
+    </dsp:sp>
+    <dsp:sp modelId="{B8837C6A-8105-408D-9A2C-4FAA52810339}">
+      <dsp:nvSpPr>
+        <dsp:cNvPr id="0" name=""/>
+        <dsp:cNvSpPr/>
+      </dsp:nvSpPr>
+      <dsp:spPr>
+        <a:xfrm>
+          <a:off x="5409734" y="1712053"/>
+          <a:ext cx="128450" cy="91440"/>
+        </a:xfrm>
+        <a:custGeom>
+          <a:avLst/>
+          <a:gdLst/>
+          <a:ahLst/>
+          <a:cxnLst/>
+          <a:rect l="0" t="0" r="0" b="0"/>
+          <a:pathLst>
+            <a:path>
+              <a:moveTo>
+                <a:pt x="0" y="114762"/>
+              </a:moveTo>
+              <a:lnTo>
+                <a:pt x="64225" y="114762"/>
+              </a:lnTo>
+              <a:lnTo>
+                <a:pt x="64225" y="45720"/>
+              </a:lnTo>
+              <a:lnTo>
+                <a:pt x="128450" y="45720"/>
+              </a:lnTo>
+            </a:path>
+          </a:pathLst>
+        </a:custGeom>
+        <a:noFill/>
+        <a:ln w="19050" cap="flat" cmpd="sng" algn="ctr">
+          <a:solidFill>
+            <a:schemeClr val="accent1">
+              <a:shade val="80000"/>
+              <a:hueOff val="0"/>
+              <a:satOff val="0"/>
+              <a:lumOff val="0"/>
+              <a:alphaOff val="0"/>
+            </a:schemeClr>
+          </a:solidFill>
+          <a:prstDash val="solid"/>
+          <a:miter lim="800000"/>
+        </a:ln>
+        <a:effectLst/>
+      </dsp:spPr>
+      <dsp:style>
+        <a:lnRef idx="2">
+          <a:scrgbClr r="0" g="0" b="0"/>
+        </a:lnRef>
+        <a:fillRef idx="0">
+          <a:scrgbClr r="0" g="0" b="0"/>
+        </a:fillRef>
+        <a:effectRef idx="0">
+          <a:scrgbClr r="0" g="0" b="0"/>
+        </a:effectRef>
+        <a:fontRef idx="minor"/>
+      </dsp:style>
+    </dsp:sp>
+    <dsp:sp modelId="{183240E7-EEA6-46D8-AE60-487B0566B9A2}">
+      <dsp:nvSpPr>
+        <dsp:cNvPr id="0" name=""/>
+        <dsp:cNvSpPr/>
+      </dsp:nvSpPr>
+      <dsp:spPr>
+        <a:xfrm>
+          <a:off x="5409734" y="1481605"/>
+          <a:ext cx="128450" cy="345210"/>
+        </a:xfrm>
+        <a:custGeom>
+          <a:avLst/>
+          <a:gdLst/>
+          <a:ahLst/>
+          <a:cxnLst/>
+          <a:rect l="0" t="0" r="0" b="0"/>
+          <a:pathLst>
+            <a:path>
+              <a:moveTo>
+                <a:pt x="0" y="345210"/>
+              </a:moveTo>
+              <a:lnTo>
+                <a:pt x="64225" y="345210"/>
+              </a:lnTo>
+              <a:lnTo>
+                <a:pt x="64225" y="0"/>
+              </a:lnTo>
+              <a:lnTo>
+                <a:pt x="128450" y="0"/>
+              </a:lnTo>
+            </a:path>
+          </a:pathLst>
+        </a:custGeom>
+        <a:noFill/>
+        <a:ln w="19050" cap="flat" cmpd="sng" algn="ctr">
+          <a:solidFill>
+            <a:schemeClr val="accent1">
+              <a:shade val="80000"/>
+              <a:hueOff val="0"/>
+              <a:satOff val="0"/>
+              <a:lumOff val="0"/>
+              <a:alphaOff val="0"/>
+            </a:schemeClr>
+          </a:solidFill>
+          <a:prstDash val="solid"/>
+          <a:miter lim="800000"/>
+        </a:ln>
+        <a:effectLst/>
+      </dsp:spPr>
+      <dsp:style>
+        <a:lnRef idx="2">
+          <a:scrgbClr r="0" g="0" b="0"/>
+        </a:lnRef>
+        <a:fillRef idx="0">
+          <a:scrgbClr r="0" g="0" b="0"/>
+        </a:fillRef>
+        <a:effectRef idx="0">
+          <a:scrgbClr r="0" g="0" b="0"/>
+        </a:effectRef>
+        <a:fontRef idx="minor"/>
+      </dsp:style>
+    </dsp:sp>
+    <dsp:sp modelId="{595CFFA0-B569-4A56-8175-567F57E3E286}">
+      <dsp:nvSpPr>
+        <dsp:cNvPr id="0" name=""/>
+        <dsp:cNvSpPr/>
+      </dsp:nvSpPr>
+      <dsp:spPr>
+        <a:xfrm>
+          <a:off x="6180436" y="1159717"/>
+          <a:ext cx="128450" cy="91440"/>
+        </a:xfrm>
+        <a:custGeom>
+          <a:avLst/>
+          <a:gdLst/>
+          <a:ahLst/>
+          <a:cxnLst/>
+          <a:rect l="0" t="0" r="0" b="0"/>
+          <a:pathLst>
+            <a:path>
+              <a:moveTo>
+                <a:pt x="0" y="45720"/>
+              </a:moveTo>
+              <a:lnTo>
+                <a:pt x="128450" y="45720"/>
+              </a:lnTo>
+            </a:path>
+          </a:pathLst>
+        </a:custGeom>
+        <a:noFill/>
+        <a:ln w="19050" cap="flat" cmpd="sng" algn="ctr">
+          <a:solidFill>
+            <a:schemeClr val="accent1">
+              <a:shade val="80000"/>
+              <a:hueOff val="0"/>
+              <a:satOff val="0"/>
+              <a:lumOff val="0"/>
+              <a:alphaOff val="0"/>
+            </a:schemeClr>
+          </a:solidFill>
+          <a:prstDash val="solid"/>
+          <a:miter lim="800000"/>
+        </a:ln>
+        <a:effectLst/>
+      </dsp:spPr>
+      <dsp:style>
+        <a:lnRef idx="2">
+          <a:scrgbClr r="0" g="0" b="0"/>
+        </a:lnRef>
+        <a:fillRef idx="0">
+          <a:scrgbClr r="0" g="0" b="0"/>
+        </a:fillRef>
+        <a:effectRef idx="0">
+          <a:scrgbClr r="0" g="0" b="0"/>
+        </a:effectRef>
+        <a:fontRef idx="minor"/>
+      </dsp:style>
+    </dsp:sp>
+    <dsp:sp modelId="{4CFCDFA8-E01C-4C6B-A731-226D0B6C2C76}">
+      <dsp:nvSpPr>
+        <dsp:cNvPr id="0" name=""/>
+        <dsp:cNvSpPr/>
+      </dsp:nvSpPr>
+      <dsp:spPr>
+        <a:xfrm>
+          <a:off x="5409734" y="1205437"/>
+          <a:ext cx="128450" cy="621378"/>
+        </a:xfrm>
+        <a:custGeom>
+          <a:avLst/>
+          <a:gdLst/>
+          <a:ahLst/>
+          <a:cxnLst/>
+          <a:rect l="0" t="0" r="0" b="0"/>
+          <a:pathLst>
+            <a:path>
+              <a:moveTo>
+                <a:pt x="0" y="621378"/>
+              </a:moveTo>
+              <a:lnTo>
+                <a:pt x="64225" y="621378"/>
+              </a:lnTo>
+              <a:lnTo>
+                <a:pt x="64225" y="0"/>
+              </a:lnTo>
+              <a:lnTo>
+                <a:pt x="128450" y="0"/>
+              </a:lnTo>
+            </a:path>
+          </a:pathLst>
+        </a:custGeom>
+        <a:noFill/>
+        <a:ln w="19050" cap="flat" cmpd="sng" algn="ctr">
+          <a:solidFill>
+            <a:schemeClr val="accent1">
+              <a:shade val="80000"/>
+              <a:hueOff val="0"/>
+              <a:satOff val="0"/>
+              <a:lumOff val="0"/>
+              <a:alphaOff val="0"/>
+            </a:schemeClr>
+          </a:solidFill>
+          <a:prstDash val="solid"/>
+          <a:miter lim="800000"/>
+        </a:ln>
+        <a:effectLst/>
+      </dsp:spPr>
+      <dsp:style>
+        <a:lnRef idx="2">
+          <a:scrgbClr r="0" g="0" b="0"/>
+        </a:lnRef>
+        <a:fillRef idx="0">
+          <a:scrgbClr r="0" g="0" b="0"/>
+        </a:fillRef>
+        <a:effectRef idx="0">
+          <a:scrgbClr r="0" g="0" b="0"/>
+        </a:effectRef>
+        <a:fontRef idx="minor"/>
+      </dsp:style>
+    </dsp:sp>
+    <dsp:sp modelId="{2086A9C7-9135-4192-911C-9FD307A3662E}">
+      <dsp:nvSpPr>
+        <dsp:cNvPr id="0" name=""/>
+        <dsp:cNvSpPr/>
+      </dsp:nvSpPr>
+      <dsp:spPr>
+        <a:xfrm>
+          <a:off x="6180436" y="883549"/>
+          <a:ext cx="128450" cy="91440"/>
+        </a:xfrm>
+        <a:custGeom>
+          <a:avLst/>
+          <a:gdLst/>
+          <a:ahLst/>
+          <a:cxnLst/>
+          <a:rect l="0" t="0" r="0" b="0"/>
+          <a:pathLst>
+            <a:path>
+              <a:moveTo>
+                <a:pt x="0" y="45720"/>
+              </a:moveTo>
+              <a:lnTo>
+                <a:pt x="128450" y="45720"/>
+              </a:lnTo>
+            </a:path>
+          </a:pathLst>
+        </a:custGeom>
+        <a:noFill/>
+        <a:ln w="19050" cap="flat" cmpd="sng" algn="ctr">
+          <a:solidFill>
+            <a:schemeClr val="accent1">
+              <a:shade val="80000"/>
+              <a:hueOff val="0"/>
+              <a:satOff val="0"/>
+              <a:lumOff val="0"/>
+              <a:alphaOff val="0"/>
+            </a:schemeClr>
+          </a:solidFill>
+          <a:prstDash val="solid"/>
+          <a:miter lim="800000"/>
+        </a:ln>
+        <a:effectLst/>
+      </dsp:spPr>
+      <dsp:style>
+        <a:lnRef idx="2">
+          <a:scrgbClr r="0" g="0" b="0"/>
+        </a:lnRef>
+        <a:fillRef idx="0">
+          <a:scrgbClr r="0" g="0" b="0"/>
+        </a:fillRef>
+        <a:effectRef idx="0">
+          <a:scrgbClr r="0" g="0" b="0"/>
+        </a:effectRef>
+        <a:fontRef idx="minor"/>
+      </dsp:style>
+    </dsp:sp>
+    <dsp:sp modelId="{E7F095C9-0EEA-49B6-905E-AC74937B597A}">
+      <dsp:nvSpPr>
+        <dsp:cNvPr id="0" name=""/>
+        <dsp:cNvSpPr/>
+      </dsp:nvSpPr>
+      <dsp:spPr>
+        <a:xfrm>
+          <a:off x="5409734" y="929269"/>
+          <a:ext cx="128450" cy="897546"/>
+        </a:xfrm>
+        <a:custGeom>
+          <a:avLst/>
+          <a:gdLst/>
+          <a:ahLst/>
+          <a:cxnLst/>
+          <a:rect l="0" t="0" r="0" b="0"/>
+          <a:pathLst>
+            <a:path>
+              <a:moveTo>
+                <a:pt x="0" y="897546"/>
+              </a:moveTo>
+              <a:lnTo>
+                <a:pt x="64225" y="897546"/>
+              </a:lnTo>
+              <a:lnTo>
+                <a:pt x="64225" y="0"/>
+              </a:lnTo>
+              <a:lnTo>
+                <a:pt x="128450" y="0"/>
+              </a:lnTo>
+            </a:path>
+          </a:pathLst>
+        </a:custGeom>
+        <a:noFill/>
+        <a:ln w="19050" cap="flat" cmpd="sng" algn="ctr">
+          <a:solidFill>
+            <a:schemeClr val="accent1">
+              <a:shade val="80000"/>
+              <a:hueOff val="0"/>
+              <a:satOff val="0"/>
+              <a:lumOff val="0"/>
+              <a:alphaOff val="0"/>
+            </a:schemeClr>
+          </a:solidFill>
+          <a:prstDash val="solid"/>
+          <a:miter lim="800000"/>
+        </a:ln>
+        <a:effectLst/>
+      </dsp:spPr>
+      <dsp:style>
+        <a:lnRef idx="2">
+          <a:scrgbClr r="0" g="0" b="0"/>
+        </a:lnRef>
+        <a:fillRef idx="0">
+          <a:scrgbClr r="0" g="0" b="0"/>
+        </a:fillRef>
+        <a:effectRef idx="0">
+          <a:scrgbClr r="0" g="0" b="0"/>
+        </a:effectRef>
+        <a:fontRef idx="minor"/>
+      </dsp:style>
+    </dsp:sp>
+    <dsp:sp modelId="{0A14706F-1BC6-48E6-BDBA-7B500E589BAD}">
+      <dsp:nvSpPr>
+        <dsp:cNvPr id="0" name=""/>
+        <dsp:cNvSpPr/>
+      </dsp:nvSpPr>
+      <dsp:spPr>
+        <a:xfrm>
+          <a:off x="4639032" y="1826815"/>
+          <a:ext cx="128450" cy="138084"/>
+        </a:xfrm>
+        <a:custGeom>
+          <a:avLst/>
+          <a:gdLst/>
+          <a:ahLst/>
+          <a:cxnLst/>
+          <a:rect l="0" t="0" r="0" b="0"/>
+          <a:pathLst>
+            <a:path>
+              <a:moveTo>
+                <a:pt x="0" y="138084"/>
+              </a:moveTo>
+              <a:lnTo>
+                <a:pt x="64225" y="138084"/>
+              </a:lnTo>
+              <a:lnTo>
+                <a:pt x="64225" y="0"/>
+              </a:lnTo>
+              <a:lnTo>
+                <a:pt x="128450" y="0"/>
+              </a:lnTo>
+            </a:path>
+          </a:pathLst>
+        </a:custGeom>
+        <a:noFill/>
+        <a:ln w="19050" cap="flat" cmpd="sng" algn="ctr">
+          <a:solidFill>
+            <a:schemeClr val="accent1">
+              <a:shade val="80000"/>
+              <a:hueOff val="0"/>
+              <a:satOff val="0"/>
+              <a:lumOff val="0"/>
+              <a:alphaOff val="0"/>
+            </a:schemeClr>
+          </a:solidFill>
+          <a:prstDash val="solid"/>
+          <a:miter lim="800000"/>
+        </a:ln>
+        <a:effectLst/>
+      </dsp:spPr>
+      <dsp:style>
+        <a:lnRef idx="2">
+          <a:scrgbClr r="0" g="0" b="0"/>
+        </a:lnRef>
+        <a:fillRef idx="0">
+          <a:scrgbClr r="0" g="0" b="0"/>
+        </a:fillRef>
+        <a:effectRef idx="0">
+          <a:scrgbClr r="0" g="0" b="0"/>
+        </a:effectRef>
+        <a:fontRef idx="minor"/>
+      </dsp:style>
+    </dsp:sp>
+    <dsp:sp modelId="{B0CC0030-18CD-4C76-8E04-002BB6D32A15}">
+      <dsp:nvSpPr>
+        <dsp:cNvPr id="0" name=""/>
+        <dsp:cNvSpPr/>
+      </dsp:nvSpPr>
+      <dsp:spPr>
+        <a:xfrm>
+          <a:off x="3868330" y="1964899"/>
+          <a:ext cx="128450" cy="932067"/>
+        </a:xfrm>
+        <a:custGeom>
+          <a:avLst/>
+          <a:gdLst/>
+          <a:ahLst/>
+          <a:cxnLst/>
+          <a:rect l="0" t="0" r="0" b="0"/>
+          <a:pathLst>
+            <a:path>
+              <a:moveTo>
+                <a:pt x="0" y="932067"/>
+              </a:moveTo>
+              <a:lnTo>
+                <a:pt x="64225" y="932067"/>
+              </a:lnTo>
+              <a:lnTo>
+                <a:pt x="64225" y="0"/>
+              </a:lnTo>
+              <a:lnTo>
+                <a:pt x="128450" y="0"/>
               </a:lnTo>
             </a:path>
           </a:pathLst>
@@ -7855,15 +8647,15 @@
         <a:fontRef idx="minor"/>
       </dsp:style>
     </dsp:sp>
-    <dsp:sp modelId="{11F963ED-B3F0-41A3-B824-325961929004}">
+    <dsp:sp modelId="{172AD772-32C1-453D-A10B-AD2F2B8A156F}">
       <dsp:nvSpPr>
         <dsp:cNvPr id="0" name=""/>
         <dsp:cNvSpPr/>
       </dsp:nvSpPr>
       <dsp:spPr>
         <a:xfrm>
-          <a:off x="4687688" y="1882675"/>
-          <a:ext cx="122980" cy="132204"/>
+          <a:off x="4639032" y="652238"/>
+          <a:ext cx="120781" cy="253631"/>
         </a:xfrm>
         <a:custGeom>
           <a:avLst/>
@@ -7877,13 +8669,13 @@
                 <a:pt x="0" y="0"/>
               </a:moveTo>
               <a:lnTo>
-                <a:pt x="61490" y="0"/>
+                <a:pt x="56556" y="0"/>
               </a:lnTo>
               <a:lnTo>
-                <a:pt x="61490" y="132204"/>
+                <a:pt x="56556" y="253631"/>
               </a:lnTo>
               <a:lnTo>
-                <a:pt x="122980" y="132204"/>
+                <a:pt x="120781" y="253631"/>
               </a:lnTo>
             </a:path>
           </a:pathLst>
@@ -7917,15 +8709,15 @@
         <a:fontRef idx="minor"/>
       </dsp:style>
     </dsp:sp>
-    <dsp:sp modelId="{CE327CA8-163F-4708-9400-03AD1F0721B6}">
+    <dsp:sp modelId="{5613D8DC-8394-4EB2-BEC0-4978BB2F3DA3}">
       <dsp:nvSpPr>
         <dsp:cNvPr id="0" name=""/>
         <dsp:cNvSpPr/>
       </dsp:nvSpPr>
       <dsp:spPr>
         <a:xfrm>
-          <a:off x="7043738" y="2708737"/>
-          <a:ext cx="103930" cy="91440"/>
+          <a:off x="5402065" y="606519"/>
+          <a:ext cx="136118" cy="91440"/>
         </a:xfrm>
         <a:custGeom>
           <a:avLst/>
@@ -7939,7 +8731,13 @@
                 <a:pt x="0" y="45720"/>
               </a:moveTo>
               <a:lnTo>
-                <a:pt x="103930" y="45720"/>
+                <a:pt x="71893" y="45720"/>
+              </a:lnTo>
+              <a:lnTo>
+                <a:pt x="71893" y="46581"/>
+              </a:lnTo>
+              <a:lnTo>
+                <a:pt x="136118" y="46581"/>
               </a:lnTo>
             </a:path>
           </a:pathLst>
@@ -7973,15 +8771,15 @@
         <a:fontRef idx="minor"/>
       </dsp:style>
     </dsp:sp>
-    <dsp:sp modelId="{C6ABE6A2-C04F-4482-BB5C-769C7DA9CC1F}">
+    <dsp:sp modelId="{6D1FD870-2315-4054-B29C-39DF6F98439B}">
       <dsp:nvSpPr>
         <dsp:cNvPr id="0" name=""/>
         <dsp:cNvSpPr/>
       </dsp:nvSpPr>
       <dsp:spPr>
         <a:xfrm>
-          <a:off x="6163455" y="2609798"/>
-          <a:ext cx="122132" cy="144659"/>
+          <a:off x="4639032" y="606518"/>
+          <a:ext cx="120781" cy="91440"/>
         </a:xfrm>
         <a:custGeom>
           <a:avLst/>
@@ -7992,16 +8790,16 @@
           <a:pathLst>
             <a:path>
               <a:moveTo>
-                <a:pt x="0" y="0"/>
+                <a:pt x="0" y="45720"/>
               </a:moveTo>
               <a:lnTo>
-                <a:pt x="60641" y="0"/>
+                <a:pt x="56556" y="45720"/>
               </a:lnTo>
               <a:lnTo>
-                <a:pt x="60641" y="144659"/>
+                <a:pt x="56556" y="45720"/>
               </a:lnTo>
               <a:lnTo>
-                <a:pt x="122132" y="144659"/>
+                <a:pt x="120781" y="45720"/>
               </a:lnTo>
             </a:path>
           </a:pathLst>
@@ -8035,15 +8833,77 @@
         <a:fontRef idx="minor"/>
       </dsp:style>
     </dsp:sp>
-    <dsp:sp modelId="{D56AF9D6-52CD-49B7-B03A-910C74477DFD}">
+    <dsp:sp modelId="{E35E075B-61F2-41BC-BC2A-69356E0D43EE}">
       <dsp:nvSpPr>
         <dsp:cNvPr id="0" name=""/>
         <dsp:cNvSpPr/>
       </dsp:nvSpPr>
       <dsp:spPr>
         <a:xfrm>
-          <a:off x="6901339" y="2431873"/>
-          <a:ext cx="122980" cy="91440"/>
+          <a:off x="3868330" y="652238"/>
+          <a:ext cx="128450" cy="2244728"/>
+        </a:xfrm>
+        <a:custGeom>
+          <a:avLst/>
+          <a:gdLst/>
+          <a:ahLst/>
+          <a:cxnLst/>
+          <a:rect l="0" t="0" r="0" b="0"/>
+          <a:pathLst>
+            <a:path>
+              <a:moveTo>
+                <a:pt x="0" y="2244728"/>
+              </a:moveTo>
+              <a:lnTo>
+                <a:pt x="64225" y="2244728"/>
+              </a:lnTo>
+              <a:lnTo>
+                <a:pt x="64225" y="0"/>
+              </a:lnTo>
+              <a:lnTo>
+                <a:pt x="128450" y="0"/>
+              </a:lnTo>
+            </a:path>
+          </a:pathLst>
+        </a:custGeom>
+        <a:noFill/>
+        <a:ln w="19050" cap="flat" cmpd="sng" algn="ctr">
+          <a:solidFill>
+            <a:schemeClr val="accent1">
+              <a:shade val="60000"/>
+              <a:hueOff val="0"/>
+              <a:satOff val="0"/>
+              <a:lumOff val="0"/>
+              <a:alphaOff val="0"/>
+            </a:schemeClr>
+          </a:solidFill>
+          <a:prstDash val="solid"/>
+          <a:miter lim="800000"/>
+        </a:ln>
+        <a:effectLst/>
+      </dsp:spPr>
+      <dsp:style>
+        <a:lnRef idx="2">
+          <a:scrgbClr r="0" g="0" b="0"/>
+        </a:lnRef>
+        <a:fillRef idx="0">
+          <a:scrgbClr r="0" g="0" b="0"/>
+        </a:fillRef>
+        <a:effectRef idx="0">
+          <a:scrgbClr r="0" g="0" b="0"/>
+        </a:effectRef>
+        <a:fontRef idx="minor"/>
+      </dsp:style>
+    </dsp:sp>
+    <dsp:sp modelId="{ECBCB50C-17E3-4E08-8F2D-57A84F25E402}">
+      <dsp:nvSpPr>
+        <dsp:cNvPr id="0" name=""/>
+        <dsp:cNvSpPr/>
+      </dsp:nvSpPr>
+      <dsp:spPr>
+        <a:xfrm>
+          <a:off x="5642640" y="331213"/>
+          <a:ext cx="128450" cy="91440"/>
         </a:xfrm>
         <a:custGeom>
           <a:avLst/>
@@ -8057,7 +8917,7 @@
                 <a:pt x="0" y="45720"/>
               </a:moveTo>
               <a:lnTo>
-                <a:pt x="122980" y="45720"/>
+                <a:pt x="128450" y="45720"/>
               </a:lnTo>
             </a:path>
           </a:pathLst>
@@ -8091,15 +8951,15 @@
         <a:fontRef idx="minor"/>
       </dsp:style>
     </dsp:sp>
-    <dsp:sp modelId="{171E7136-836A-486B-B91D-37B90AC43AE7}">
+    <dsp:sp modelId="{020B6BC5-D316-46FF-9657-FB38EAFCA478}">
       <dsp:nvSpPr>
         <dsp:cNvPr id="0" name=""/>
         <dsp:cNvSpPr/>
       </dsp:nvSpPr>
       <dsp:spPr>
         <a:xfrm>
-          <a:off x="6163455" y="2477593"/>
-          <a:ext cx="122980" cy="132204"/>
+          <a:off x="4633213" y="238848"/>
+          <a:ext cx="367175" cy="138084"/>
         </a:xfrm>
         <a:custGeom>
           <a:avLst/>
@@ -8110,16 +8970,16 @@
           <a:pathLst>
             <a:path>
               <a:moveTo>
-                <a:pt x="0" y="132204"/>
+                <a:pt x="0" y="0"/>
               </a:moveTo>
               <a:lnTo>
-                <a:pt x="61490" y="132204"/>
+                <a:pt x="302950" y="0"/>
               </a:lnTo>
               <a:lnTo>
-                <a:pt x="61490" y="0"/>
+                <a:pt x="302950" y="138084"/>
               </a:lnTo>
               <a:lnTo>
-                <a:pt x="122980" y="0"/>
+                <a:pt x="367175" y="138084"/>
               </a:lnTo>
             </a:path>
           </a:pathLst>
@@ -8153,15 +9013,15 @@
         <a:fontRef idx="minor"/>
       </dsp:style>
     </dsp:sp>
-    <dsp:sp modelId="{26800CCF-2CF7-4C2B-BE5D-668243245262}">
+    <dsp:sp modelId="{8734EB56-5A9C-44D3-8046-4D4FDD398AAC}">
       <dsp:nvSpPr>
         <dsp:cNvPr id="0" name=""/>
         <dsp:cNvSpPr/>
       </dsp:nvSpPr>
       <dsp:spPr>
         <a:xfrm>
-          <a:off x="5425572" y="1750471"/>
-          <a:ext cx="122980" cy="859326"/>
+          <a:off x="4633213" y="100764"/>
+          <a:ext cx="367175" cy="138084"/>
         </a:xfrm>
         <a:custGeom>
           <a:avLst/>
@@ -8172,16 +9032,16 @@
           <a:pathLst>
             <a:path>
               <a:moveTo>
-                <a:pt x="0" y="0"/>
+                <a:pt x="0" y="138084"/>
               </a:moveTo>
               <a:lnTo>
-                <a:pt x="61490" y="0"/>
+                <a:pt x="302950" y="138084"/>
               </a:lnTo>
               <a:lnTo>
-                <a:pt x="61490" y="859326"/>
+                <a:pt x="302950" y="0"/>
               </a:lnTo>
               <a:lnTo>
-                <a:pt x="122980" y="859326"/>
+                <a:pt x="367175" y="0"/>
               </a:lnTo>
             </a:path>
           </a:pathLst>
@@ -8215,15 +9075,15 @@
         <a:fontRef idx="minor"/>
       </dsp:style>
     </dsp:sp>
-    <dsp:sp modelId="{50A4060C-F737-4459-BC6A-B233FEC9432A}">
+    <dsp:sp modelId="{BF5293E0-96D7-49FD-81EA-757AF582D648}">
       <dsp:nvSpPr>
         <dsp:cNvPr id="0" name=""/>
         <dsp:cNvSpPr/>
       </dsp:nvSpPr>
       <dsp:spPr>
         <a:xfrm>
-          <a:off x="6163455" y="2167465"/>
-          <a:ext cx="122980" cy="91440"/>
+          <a:off x="3868330" y="238848"/>
+          <a:ext cx="122631" cy="2658118"/>
         </a:xfrm>
         <a:custGeom>
           <a:avLst/>
@@ -8234,674 +9094,16 @@
           <a:pathLst>
             <a:path>
               <a:moveTo>
-                <a:pt x="0" y="45720"/>
+                <a:pt x="0" y="2658118"/>
               </a:moveTo>
               <a:lnTo>
-                <a:pt x="122980" y="45720"/>
-              </a:lnTo>
-            </a:path>
-          </a:pathLst>
-        </a:custGeom>
-        <a:noFill/>
-        <a:ln w="19050" cap="flat" cmpd="sng" algn="ctr">
-          <a:solidFill>
-            <a:schemeClr val="accent1">
-              <a:shade val="80000"/>
-              <a:hueOff val="0"/>
-              <a:satOff val="0"/>
-              <a:lumOff val="0"/>
-              <a:alphaOff val="0"/>
-            </a:schemeClr>
-          </a:solidFill>
-          <a:prstDash val="solid"/>
-          <a:miter lim="800000"/>
-        </a:ln>
-        <a:effectLst/>
-      </dsp:spPr>
-      <dsp:style>
-        <a:lnRef idx="2">
-          <a:scrgbClr r="0" g="0" b="0"/>
-        </a:lnRef>
-        <a:fillRef idx="0">
-          <a:scrgbClr r="0" g="0" b="0"/>
-        </a:fillRef>
-        <a:effectRef idx="0">
-          <a:scrgbClr r="0" g="0" b="0"/>
-        </a:effectRef>
-        <a:fontRef idx="minor"/>
-      </dsp:style>
-    </dsp:sp>
-    <dsp:sp modelId="{34B1EDD2-BFE8-4A14-8948-7EEB84EDF964}">
-      <dsp:nvSpPr>
-        <dsp:cNvPr id="0" name=""/>
-        <dsp:cNvSpPr/>
-      </dsp:nvSpPr>
-      <dsp:spPr>
-        <a:xfrm>
-          <a:off x="5425572" y="1750471"/>
-          <a:ext cx="122980" cy="462714"/>
-        </a:xfrm>
-        <a:custGeom>
-          <a:avLst/>
-          <a:gdLst/>
-          <a:ahLst/>
-          <a:cxnLst/>
-          <a:rect l="0" t="0" r="0" b="0"/>
-          <a:pathLst>
-            <a:path>
-              <a:moveTo>
-                <a:pt x="0" y="0"/>
-              </a:moveTo>
-              <a:lnTo>
-                <a:pt x="61490" y="0"/>
+                <a:pt x="58406" y="2658118"/>
               </a:lnTo>
               <a:lnTo>
-                <a:pt x="61490" y="462714"/>
+                <a:pt x="58406" y="0"/>
               </a:lnTo>
               <a:lnTo>
-                <a:pt x="122980" y="462714"/>
-              </a:lnTo>
-            </a:path>
-          </a:pathLst>
-        </a:custGeom>
-        <a:noFill/>
-        <a:ln w="19050" cap="flat" cmpd="sng" algn="ctr">
-          <a:solidFill>
-            <a:schemeClr val="accent1">
-              <a:shade val="80000"/>
-              <a:hueOff val="0"/>
-              <a:satOff val="0"/>
-              <a:lumOff val="0"/>
-              <a:alphaOff val="0"/>
-            </a:schemeClr>
-          </a:solidFill>
-          <a:prstDash val="solid"/>
-          <a:miter lim="800000"/>
-        </a:ln>
-        <a:effectLst/>
-      </dsp:spPr>
-      <dsp:style>
-        <a:lnRef idx="2">
-          <a:scrgbClr r="0" g="0" b="0"/>
-        </a:lnRef>
-        <a:fillRef idx="0">
-          <a:scrgbClr r="0" g="0" b="0"/>
-        </a:fillRef>
-        <a:effectRef idx="0">
-          <a:scrgbClr r="0" g="0" b="0"/>
-        </a:effectRef>
-        <a:fontRef idx="minor"/>
-      </dsp:style>
-    </dsp:sp>
-    <dsp:sp modelId="{16D33CAD-B597-414C-9523-47A079B2FFFB}">
-      <dsp:nvSpPr>
-        <dsp:cNvPr id="0" name=""/>
-        <dsp:cNvSpPr/>
-      </dsp:nvSpPr>
-      <dsp:spPr>
-        <a:xfrm>
-          <a:off x="5425572" y="1750471"/>
-          <a:ext cx="122980" cy="198306"/>
-        </a:xfrm>
-        <a:custGeom>
-          <a:avLst/>
-          <a:gdLst/>
-          <a:ahLst/>
-          <a:cxnLst/>
-          <a:rect l="0" t="0" r="0" b="0"/>
-          <a:pathLst>
-            <a:path>
-              <a:moveTo>
-                <a:pt x="0" y="0"/>
-              </a:moveTo>
-              <a:lnTo>
-                <a:pt x="61490" y="0"/>
-              </a:lnTo>
-              <a:lnTo>
-                <a:pt x="61490" y="198306"/>
-              </a:lnTo>
-              <a:lnTo>
-                <a:pt x="122980" y="198306"/>
-              </a:lnTo>
-            </a:path>
-          </a:pathLst>
-        </a:custGeom>
-        <a:noFill/>
-        <a:ln w="19050" cap="flat" cmpd="sng" algn="ctr">
-          <a:solidFill>
-            <a:schemeClr val="accent1">
-              <a:shade val="80000"/>
-              <a:hueOff val="0"/>
-              <a:satOff val="0"/>
-              <a:lumOff val="0"/>
-              <a:alphaOff val="0"/>
-            </a:schemeClr>
-          </a:solidFill>
-          <a:prstDash val="solid"/>
-          <a:miter lim="800000"/>
-        </a:ln>
-        <a:effectLst/>
-      </dsp:spPr>
-      <dsp:style>
-        <a:lnRef idx="2">
-          <a:scrgbClr r="0" g="0" b="0"/>
-        </a:lnRef>
-        <a:fillRef idx="0">
-          <a:scrgbClr r="0" g="0" b="0"/>
-        </a:fillRef>
-        <a:effectRef idx="0">
-          <a:scrgbClr r="0" g="0" b="0"/>
-        </a:effectRef>
-        <a:fontRef idx="minor"/>
-      </dsp:style>
-    </dsp:sp>
-    <dsp:sp modelId="{D5EFD006-A32B-489A-B809-E3D7E0386B88}">
-      <dsp:nvSpPr>
-        <dsp:cNvPr id="0" name=""/>
-        <dsp:cNvSpPr/>
-      </dsp:nvSpPr>
-      <dsp:spPr>
-        <a:xfrm>
-          <a:off x="6163455" y="1638649"/>
-          <a:ext cx="122980" cy="91440"/>
-        </a:xfrm>
-        <a:custGeom>
-          <a:avLst/>
-          <a:gdLst/>
-          <a:ahLst/>
-          <a:cxnLst/>
-          <a:rect l="0" t="0" r="0" b="0"/>
-          <a:pathLst>
-            <a:path>
-              <a:moveTo>
-                <a:pt x="0" y="45720"/>
-              </a:moveTo>
-              <a:lnTo>
-                <a:pt x="122980" y="45720"/>
-              </a:lnTo>
-            </a:path>
-          </a:pathLst>
-        </a:custGeom>
-        <a:noFill/>
-        <a:ln w="19050" cap="flat" cmpd="sng" algn="ctr">
-          <a:solidFill>
-            <a:schemeClr val="accent1">
-              <a:shade val="80000"/>
-              <a:hueOff val="0"/>
-              <a:satOff val="0"/>
-              <a:lumOff val="0"/>
-              <a:alphaOff val="0"/>
-            </a:schemeClr>
-          </a:solidFill>
-          <a:prstDash val="solid"/>
-          <a:miter lim="800000"/>
-        </a:ln>
-        <a:effectLst/>
-      </dsp:spPr>
-      <dsp:style>
-        <a:lnRef idx="2">
-          <a:scrgbClr r="0" g="0" b="0"/>
-        </a:lnRef>
-        <a:fillRef idx="0">
-          <a:scrgbClr r="0" g="0" b="0"/>
-        </a:fillRef>
-        <a:effectRef idx="0">
-          <a:scrgbClr r="0" g="0" b="0"/>
-        </a:effectRef>
-        <a:fontRef idx="minor"/>
-      </dsp:style>
-    </dsp:sp>
-    <dsp:sp modelId="{B8837C6A-8105-408D-9A2C-4FAA52810339}">
-      <dsp:nvSpPr>
-        <dsp:cNvPr id="0" name=""/>
-        <dsp:cNvSpPr/>
-      </dsp:nvSpPr>
-      <dsp:spPr>
-        <a:xfrm>
-          <a:off x="5425572" y="1638649"/>
-          <a:ext cx="122980" cy="91440"/>
-        </a:xfrm>
-        <a:custGeom>
-          <a:avLst/>
-          <a:gdLst/>
-          <a:ahLst/>
-          <a:cxnLst/>
-          <a:rect l="0" t="0" r="0" b="0"/>
-          <a:pathLst>
-            <a:path>
-              <a:moveTo>
-                <a:pt x="0" y="111822"/>
-              </a:moveTo>
-              <a:lnTo>
-                <a:pt x="61490" y="111822"/>
-              </a:lnTo>
-              <a:lnTo>
-                <a:pt x="61490" y="45720"/>
-              </a:lnTo>
-              <a:lnTo>
-                <a:pt x="122980" y="45720"/>
-              </a:lnTo>
-            </a:path>
-          </a:pathLst>
-        </a:custGeom>
-        <a:noFill/>
-        <a:ln w="19050" cap="flat" cmpd="sng" algn="ctr">
-          <a:solidFill>
-            <a:schemeClr val="accent1">
-              <a:shade val="80000"/>
-              <a:hueOff val="0"/>
-              <a:satOff val="0"/>
-              <a:lumOff val="0"/>
-              <a:alphaOff val="0"/>
-            </a:schemeClr>
-          </a:solidFill>
-          <a:prstDash val="solid"/>
-          <a:miter lim="800000"/>
-        </a:ln>
-        <a:effectLst/>
-      </dsp:spPr>
-      <dsp:style>
-        <a:lnRef idx="2">
-          <a:scrgbClr r="0" g="0" b="0"/>
-        </a:lnRef>
-        <a:fillRef idx="0">
-          <a:scrgbClr r="0" g="0" b="0"/>
-        </a:fillRef>
-        <a:effectRef idx="0">
-          <a:scrgbClr r="0" g="0" b="0"/>
-        </a:effectRef>
-        <a:fontRef idx="minor"/>
-      </dsp:style>
-    </dsp:sp>
-    <dsp:sp modelId="{183240E7-EEA6-46D8-AE60-487B0566B9A2}">
-      <dsp:nvSpPr>
-        <dsp:cNvPr id="0" name=""/>
-        <dsp:cNvSpPr/>
-      </dsp:nvSpPr>
-      <dsp:spPr>
-        <a:xfrm>
-          <a:off x="5425572" y="1419960"/>
-          <a:ext cx="122980" cy="330510"/>
-        </a:xfrm>
-        <a:custGeom>
-          <a:avLst/>
-          <a:gdLst/>
-          <a:ahLst/>
-          <a:cxnLst/>
-          <a:rect l="0" t="0" r="0" b="0"/>
-          <a:pathLst>
-            <a:path>
-              <a:moveTo>
-                <a:pt x="0" y="330510"/>
-              </a:moveTo>
-              <a:lnTo>
-                <a:pt x="61490" y="330510"/>
-              </a:lnTo>
-              <a:lnTo>
-                <a:pt x="61490" y="0"/>
-              </a:lnTo>
-              <a:lnTo>
-                <a:pt x="122980" y="0"/>
-              </a:lnTo>
-            </a:path>
-          </a:pathLst>
-        </a:custGeom>
-        <a:noFill/>
-        <a:ln w="19050" cap="flat" cmpd="sng" algn="ctr">
-          <a:solidFill>
-            <a:schemeClr val="accent1">
-              <a:shade val="80000"/>
-              <a:hueOff val="0"/>
-              <a:satOff val="0"/>
-              <a:lumOff val="0"/>
-              <a:alphaOff val="0"/>
-            </a:schemeClr>
-          </a:solidFill>
-          <a:prstDash val="solid"/>
-          <a:miter lim="800000"/>
-        </a:ln>
-        <a:effectLst/>
-      </dsp:spPr>
-      <dsp:style>
-        <a:lnRef idx="2">
-          <a:scrgbClr r="0" g="0" b="0"/>
-        </a:lnRef>
-        <a:fillRef idx="0">
-          <a:scrgbClr r="0" g="0" b="0"/>
-        </a:fillRef>
-        <a:effectRef idx="0">
-          <a:scrgbClr r="0" g="0" b="0"/>
-        </a:effectRef>
-        <a:fontRef idx="minor"/>
-      </dsp:style>
-    </dsp:sp>
-    <dsp:sp modelId="{595CFFA0-B569-4A56-8175-567F57E3E286}">
-      <dsp:nvSpPr>
-        <dsp:cNvPr id="0" name=""/>
-        <dsp:cNvSpPr/>
-      </dsp:nvSpPr>
-      <dsp:spPr>
-        <a:xfrm>
-          <a:off x="6163455" y="1109832"/>
-          <a:ext cx="122980" cy="91440"/>
-        </a:xfrm>
-        <a:custGeom>
-          <a:avLst/>
-          <a:gdLst/>
-          <a:ahLst/>
-          <a:cxnLst/>
-          <a:rect l="0" t="0" r="0" b="0"/>
-          <a:pathLst>
-            <a:path>
-              <a:moveTo>
-                <a:pt x="0" y="45720"/>
-              </a:moveTo>
-              <a:lnTo>
-                <a:pt x="122980" y="45720"/>
-              </a:lnTo>
-            </a:path>
-          </a:pathLst>
-        </a:custGeom>
-        <a:noFill/>
-        <a:ln w="19050" cap="flat" cmpd="sng" algn="ctr">
-          <a:solidFill>
-            <a:schemeClr val="accent1">
-              <a:shade val="80000"/>
-              <a:hueOff val="0"/>
-              <a:satOff val="0"/>
-              <a:lumOff val="0"/>
-              <a:alphaOff val="0"/>
-            </a:schemeClr>
-          </a:solidFill>
-          <a:prstDash val="solid"/>
-          <a:miter lim="800000"/>
-        </a:ln>
-        <a:effectLst/>
-      </dsp:spPr>
-      <dsp:style>
-        <a:lnRef idx="2">
-          <a:scrgbClr r="0" g="0" b="0"/>
-        </a:lnRef>
-        <a:fillRef idx="0">
-          <a:scrgbClr r="0" g="0" b="0"/>
-        </a:fillRef>
-        <a:effectRef idx="0">
-          <a:scrgbClr r="0" g="0" b="0"/>
-        </a:effectRef>
-        <a:fontRef idx="minor"/>
-      </dsp:style>
-    </dsp:sp>
-    <dsp:sp modelId="{4CFCDFA8-E01C-4C6B-A731-226D0B6C2C76}">
-      <dsp:nvSpPr>
-        <dsp:cNvPr id="0" name=""/>
-        <dsp:cNvSpPr/>
-      </dsp:nvSpPr>
-      <dsp:spPr>
-        <a:xfrm>
-          <a:off x="5425572" y="1155552"/>
-          <a:ext cx="122980" cy="594918"/>
-        </a:xfrm>
-        <a:custGeom>
-          <a:avLst/>
-          <a:gdLst/>
-          <a:ahLst/>
-          <a:cxnLst/>
-          <a:rect l="0" t="0" r="0" b="0"/>
-          <a:pathLst>
-            <a:path>
-              <a:moveTo>
-                <a:pt x="0" y="594918"/>
-              </a:moveTo>
-              <a:lnTo>
-                <a:pt x="61490" y="594918"/>
-              </a:lnTo>
-              <a:lnTo>
-                <a:pt x="61490" y="0"/>
-              </a:lnTo>
-              <a:lnTo>
-                <a:pt x="122980" y="0"/>
-              </a:lnTo>
-            </a:path>
-          </a:pathLst>
-        </a:custGeom>
-        <a:noFill/>
-        <a:ln w="19050" cap="flat" cmpd="sng" algn="ctr">
-          <a:solidFill>
-            <a:schemeClr val="accent1">
-              <a:shade val="80000"/>
-              <a:hueOff val="0"/>
-              <a:satOff val="0"/>
-              <a:lumOff val="0"/>
-              <a:alphaOff val="0"/>
-            </a:schemeClr>
-          </a:solidFill>
-          <a:prstDash val="solid"/>
-          <a:miter lim="800000"/>
-        </a:ln>
-        <a:effectLst/>
-      </dsp:spPr>
-      <dsp:style>
-        <a:lnRef idx="2">
-          <a:scrgbClr r="0" g="0" b="0"/>
-        </a:lnRef>
-        <a:fillRef idx="0">
-          <a:scrgbClr r="0" g="0" b="0"/>
-        </a:fillRef>
-        <a:effectRef idx="0">
-          <a:scrgbClr r="0" g="0" b="0"/>
-        </a:effectRef>
-        <a:fontRef idx="minor"/>
-      </dsp:style>
-    </dsp:sp>
-    <dsp:sp modelId="{2086A9C7-9135-4192-911C-9FD307A3662E}">
-      <dsp:nvSpPr>
-        <dsp:cNvPr id="0" name=""/>
-        <dsp:cNvSpPr/>
-      </dsp:nvSpPr>
-      <dsp:spPr>
-        <a:xfrm>
-          <a:off x="6163455" y="845424"/>
-          <a:ext cx="122980" cy="91440"/>
-        </a:xfrm>
-        <a:custGeom>
-          <a:avLst/>
-          <a:gdLst/>
-          <a:ahLst/>
-          <a:cxnLst/>
-          <a:rect l="0" t="0" r="0" b="0"/>
-          <a:pathLst>
-            <a:path>
-              <a:moveTo>
-                <a:pt x="0" y="45720"/>
-              </a:moveTo>
-              <a:lnTo>
-                <a:pt x="122980" y="45720"/>
-              </a:lnTo>
-            </a:path>
-          </a:pathLst>
-        </a:custGeom>
-        <a:noFill/>
-        <a:ln w="19050" cap="flat" cmpd="sng" algn="ctr">
-          <a:solidFill>
-            <a:schemeClr val="accent1">
-              <a:shade val="80000"/>
-              <a:hueOff val="0"/>
-              <a:satOff val="0"/>
-              <a:lumOff val="0"/>
-              <a:alphaOff val="0"/>
-            </a:schemeClr>
-          </a:solidFill>
-          <a:prstDash val="solid"/>
-          <a:miter lim="800000"/>
-        </a:ln>
-        <a:effectLst/>
-      </dsp:spPr>
-      <dsp:style>
-        <a:lnRef idx="2">
-          <a:scrgbClr r="0" g="0" b="0"/>
-        </a:lnRef>
-        <a:fillRef idx="0">
-          <a:scrgbClr r="0" g="0" b="0"/>
-        </a:fillRef>
-        <a:effectRef idx="0">
-          <a:scrgbClr r="0" g="0" b="0"/>
-        </a:effectRef>
-        <a:fontRef idx="minor"/>
-      </dsp:style>
-    </dsp:sp>
-    <dsp:sp modelId="{E7F095C9-0EEA-49B6-905E-AC74937B597A}">
-      <dsp:nvSpPr>
-        <dsp:cNvPr id="0" name=""/>
-        <dsp:cNvSpPr/>
-      </dsp:nvSpPr>
-      <dsp:spPr>
-        <a:xfrm>
-          <a:off x="5425572" y="891144"/>
-          <a:ext cx="122980" cy="859326"/>
-        </a:xfrm>
-        <a:custGeom>
-          <a:avLst/>
-          <a:gdLst/>
-          <a:ahLst/>
-          <a:cxnLst/>
-          <a:rect l="0" t="0" r="0" b="0"/>
-          <a:pathLst>
-            <a:path>
-              <a:moveTo>
-                <a:pt x="0" y="859326"/>
-              </a:moveTo>
-              <a:lnTo>
-                <a:pt x="61490" y="859326"/>
-              </a:lnTo>
-              <a:lnTo>
-                <a:pt x="61490" y="0"/>
-              </a:lnTo>
-              <a:lnTo>
-                <a:pt x="122980" y="0"/>
-              </a:lnTo>
-            </a:path>
-          </a:pathLst>
-        </a:custGeom>
-        <a:noFill/>
-        <a:ln w="19050" cap="flat" cmpd="sng" algn="ctr">
-          <a:solidFill>
-            <a:schemeClr val="accent1">
-              <a:shade val="80000"/>
-              <a:hueOff val="0"/>
-              <a:satOff val="0"/>
-              <a:lumOff val="0"/>
-              <a:alphaOff val="0"/>
-            </a:schemeClr>
-          </a:solidFill>
-          <a:prstDash val="solid"/>
-          <a:miter lim="800000"/>
-        </a:ln>
-        <a:effectLst/>
-      </dsp:spPr>
-      <dsp:style>
-        <a:lnRef idx="2">
-          <a:scrgbClr r="0" g="0" b="0"/>
-        </a:lnRef>
-        <a:fillRef idx="0">
-          <a:scrgbClr r="0" g="0" b="0"/>
-        </a:fillRef>
-        <a:effectRef idx="0">
-          <a:scrgbClr r="0" g="0" b="0"/>
-        </a:effectRef>
-        <a:fontRef idx="minor"/>
-      </dsp:style>
-    </dsp:sp>
-    <dsp:sp modelId="{0A14706F-1BC6-48E6-BDBA-7B500E589BAD}">
-      <dsp:nvSpPr>
-        <dsp:cNvPr id="0" name=""/>
-        <dsp:cNvSpPr/>
-      </dsp:nvSpPr>
-      <dsp:spPr>
-        <a:xfrm>
-          <a:off x="4687688" y="1750471"/>
-          <a:ext cx="122980" cy="132204"/>
-        </a:xfrm>
-        <a:custGeom>
-          <a:avLst/>
-          <a:gdLst/>
-          <a:ahLst/>
-          <a:cxnLst/>
-          <a:rect l="0" t="0" r="0" b="0"/>
-          <a:pathLst>
-            <a:path>
-              <a:moveTo>
-                <a:pt x="0" y="132204"/>
-              </a:moveTo>
-              <a:lnTo>
-                <a:pt x="61490" y="132204"/>
-              </a:lnTo>
-              <a:lnTo>
-                <a:pt x="61490" y="0"/>
-              </a:lnTo>
-              <a:lnTo>
-                <a:pt x="122980" y="0"/>
-              </a:lnTo>
-            </a:path>
-          </a:pathLst>
-        </a:custGeom>
-        <a:noFill/>
-        <a:ln w="19050" cap="flat" cmpd="sng" algn="ctr">
-          <a:solidFill>
-            <a:schemeClr val="accent1">
-              <a:shade val="80000"/>
-              <a:hueOff val="0"/>
-              <a:satOff val="0"/>
-              <a:lumOff val="0"/>
-              <a:alphaOff val="0"/>
-            </a:schemeClr>
-          </a:solidFill>
-          <a:prstDash val="solid"/>
-          <a:miter lim="800000"/>
-        </a:ln>
-        <a:effectLst/>
-      </dsp:spPr>
-      <dsp:style>
-        <a:lnRef idx="2">
-          <a:scrgbClr r="0" g="0" b="0"/>
-        </a:lnRef>
-        <a:fillRef idx="0">
-          <a:scrgbClr r="0" g="0" b="0"/>
-        </a:fillRef>
-        <a:effectRef idx="0">
-          <a:scrgbClr r="0" g="0" b="0"/>
-        </a:effectRef>
-        <a:fontRef idx="minor"/>
-      </dsp:style>
-    </dsp:sp>
-    <dsp:sp modelId="{B0CC0030-18CD-4C76-8E04-002BB6D32A15}">
-      <dsp:nvSpPr>
-        <dsp:cNvPr id="0" name=""/>
-        <dsp:cNvSpPr/>
-      </dsp:nvSpPr>
-      <dsp:spPr>
-        <a:xfrm>
-          <a:off x="3949805" y="1882675"/>
-          <a:ext cx="122980" cy="1024581"/>
-        </a:xfrm>
-        <a:custGeom>
-          <a:avLst/>
-          <a:gdLst/>
-          <a:ahLst/>
-          <a:cxnLst/>
-          <a:rect l="0" t="0" r="0" b="0"/>
-          <a:pathLst>
-            <a:path>
-              <a:moveTo>
-                <a:pt x="0" y="1024581"/>
-              </a:moveTo>
-              <a:lnTo>
-                <a:pt x="61490" y="1024581"/>
-              </a:lnTo>
-              <a:lnTo>
-                <a:pt x="61490" y="0"/>
-              </a:lnTo>
-              <a:lnTo>
-                <a:pt x="122980" y="0"/>
+                <a:pt x="122631" y="0"/>
               </a:lnTo>
             </a:path>
           </a:pathLst>
@@ -8935,496 +9137,6 @@
         <a:fontRef idx="minor"/>
       </dsp:style>
     </dsp:sp>
-    <dsp:sp modelId="{172AD772-32C1-453D-A10B-AD2F2B8A156F}">
-      <dsp:nvSpPr>
-        <dsp:cNvPr id="0" name=""/>
-        <dsp:cNvSpPr/>
-      </dsp:nvSpPr>
-      <dsp:spPr>
-        <a:xfrm>
-          <a:off x="4687688" y="625910"/>
-          <a:ext cx="115638" cy="242831"/>
-        </a:xfrm>
-        <a:custGeom>
-          <a:avLst/>
-          <a:gdLst/>
-          <a:ahLst/>
-          <a:cxnLst/>
-          <a:rect l="0" t="0" r="0" b="0"/>
-          <a:pathLst>
-            <a:path>
-              <a:moveTo>
-                <a:pt x="0" y="0"/>
-              </a:moveTo>
-              <a:lnTo>
-                <a:pt x="54148" y="0"/>
-              </a:lnTo>
-              <a:lnTo>
-                <a:pt x="54148" y="242831"/>
-              </a:lnTo>
-              <a:lnTo>
-                <a:pt x="115638" y="242831"/>
-              </a:lnTo>
-            </a:path>
-          </a:pathLst>
-        </a:custGeom>
-        <a:noFill/>
-        <a:ln w="19050" cap="flat" cmpd="sng" algn="ctr">
-          <a:solidFill>
-            <a:schemeClr val="accent1">
-              <a:shade val="80000"/>
-              <a:hueOff val="0"/>
-              <a:satOff val="0"/>
-              <a:lumOff val="0"/>
-              <a:alphaOff val="0"/>
-            </a:schemeClr>
-          </a:solidFill>
-          <a:prstDash val="solid"/>
-          <a:miter lim="800000"/>
-        </a:ln>
-        <a:effectLst/>
-      </dsp:spPr>
-      <dsp:style>
-        <a:lnRef idx="2">
-          <a:scrgbClr r="0" g="0" b="0"/>
-        </a:lnRef>
-        <a:fillRef idx="0">
-          <a:scrgbClr r="0" g="0" b="0"/>
-        </a:fillRef>
-        <a:effectRef idx="0">
-          <a:scrgbClr r="0" g="0" b="0"/>
-        </a:effectRef>
-        <a:fontRef idx="minor"/>
-      </dsp:style>
-    </dsp:sp>
-    <dsp:sp modelId="{5613D8DC-8394-4EB2-BEC0-4978BB2F3DA3}">
-      <dsp:nvSpPr>
-        <dsp:cNvPr id="0" name=""/>
-        <dsp:cNvSpPr/>
-      </dsp:nvSpPr>
-      <dsp:spPr>
-        <a:xfrm>
-          <a:off x="5418230" y="580191"/>
-          <a:ext cx="130322" cy="91440"/>
-        </a:xfrm>
-        <a:custGeom>
-          <a:avLst/>
-          <a:gdLst/>
-          <a:ahLst/>
-          <a:cxnLst/>
-          <a:rect l="0" t="0" r="0" b="0"/>
-          <a:pathLst>
-            <a:path>
-              <a:moveTo>
-                <a:pt x="0" y="45720"/>
-              </a:moveTo>
-              <a:lnTo>
-                <a:pt x="68832" y="45720"/>
-              </a:lnTo>
-              <a:lnTo>
-                <a:pt x="68832" y="46545"/>
-              </a:lnTo>
-              <a:lnTo>
-                <a:pt x="130322" y="46545"/>
-              </a:lnTo>
-            </a:path>
-          </a:pathLst>
-        </a:custGeom>
-        <a:noFill/>
-        <a:ln w="19050" cap="flat" cmpd="sng" algn="ctr">
-          <a:solidFill>
-            <a:schemeClr val="accent1">
-              <a:shade val="80000"/>
-              <a:hueOff val="0"/>
-              <a:satOff val="0"/>
-              <a:lumOff val="0"/>
-              <a:alphaOff val="0"/>
-            </a:schemeClr>
-          </a:solidFill>
-          <a:prstDash val="solid"/>
-          <a:miter lim="800000"/>
-        </a:ln>
-        <a:effectLst/>
-      </dsp:spPr>
-      <dsp:style>
-        <a:lnRef idx="2">
-          <a:scrgbClr r="0" g="0" b="0"/>
-        </a:lnRef>
-        <a:fillRef idx="0">
-          <a:scrgbClr r="0" g="0" b="0"/>
-        </a:fillRef>
-        <a:effectRef idx="0">
-          <a:scrgbClr r="0" g="0" b="0"/>
-        </a:effectRef>
-        <a:fontRef idx="minor"/>
-      </dsp:style>
-    </dsp:sp>
-    <dsp:sp modelId="{6D1FD870-2315-4054-B29C-39DF6F98439B}">
-      <dsp:nvSpPr>
-        <dsp:cNvPr id="0" name=""/>
-        <dsp:cNvSpPr/>
-      </dsp:nvSpPr>
-      <dsp:spPr>
-        <a:xfrm>
-          <a:off x="4687688" y="580190"/>
-          <a:ext cx="115638" cy="91440"/>
-        </a:xfrm>
-        <a:custGeom>
-          <a:avLst/>
-          <a:gdLst/>
-          <a:ahLst/>
-          <a:cxnLst/>
-          <a:rect l="0" t="0" r="0" b="0"/>
-          <a:pathLst>
-            <a:path>
-              <a:moveTo>
-                <a:pt x="0" y="45720"/>
-              </a:moveTo>
-              <a:lnTo>
-                <a:pt x="54148" y="45720"/>
-              </a:lnTo>
-              <a:lnTo>
-                <a:pt x="54148" y="45720"/>
-              </a:lnTo>
-              <a:lnTo>
-                <a:pt x="115638" y="45720"/>
-              </a:lnTo>
-            </a:path>
-          </a:pathLst>
-        </a:custGeom>
-        <a:noFill/>
-        <a:ln w="19050" cap="flat" cmpd="sng" algn="ctr">
-          <a:solidFill>
-            <a:schemeClr val="accent1">
-              <a:shade val="80000"/>
-              <a:hueOff val="0"/>
-              <a:satOff val="0"/>
-              <a:lumOff val="0"/>
-              <a:alphaOff val="0"/>
-            </a:schemeClr>
-          </a:solidFill>
-          <a:prstDash val="solid"/>
-          <a:miter lim="800000"/>
-        </a:ln>
-        <a:effectLst/>
-      </dsp:spPr>
-      <dsp:style>
-        <a:lnRef idx="2">
-          <a:scrgbClr r="0" g="0" b="0"/>
-        </a:lnRef>
-        <a:fillRef idx="0">
-          <a:scrgbClr r="0" g="0" b="0"/>
-        </a:fillRef>
-        <a:effectRef idx="0">
-          <a:scrgbClr r="0" g="0" b="0"/>
-        </a:effectRef>
-        <a:fontRef idx="minor"/>
-      </dsp:style>
-    </dsp:sp>
-    <dsp:sp modelId="{E35E075B-61F2-41BC-BC2A-69356E0D43EE}">
-      <dsp:nvSpPr>
-        <dsp:cNvPr id="0" name=""/>
-        <dsp:cNvSpPr/>
-      </dsp:nvSpPr>
-      <dsp:spPr>
-        <a:xfrm>
-          <a:off x="3949805" y="625910"/>
-          <a:ext cx="122980" cy="2281346"/>
-        </a:xfrm>
-        <a:custGeom>
-          <a:avLst/>
-          <a:gdLst/>
-          <a:ahLst/>
-          <a:cxnLst/>
-          <a:rect l="0" t="0" r="0" b="0"/>
-          <a:pathLst>
-            <a:path>
-              <a:moveTo>
-                <a:pt x="0" y="2281346"/>
-              </a:moveTo>
-              <a:lnTo>
-                <a:pt x="61490" y="2281346"/>
-              </a:lnTo>
-              <a:lnTo>
-                <a:pt x="61490" y="0"/>
-              </a:lnTo>
-              <a:lnTo>
-                <a:pt x="122980" y="0"/>
-              </a:lnTo>
-            </a:path>
-          </a:pathLst>
-        </a:custGeom>
-        <a:noFill/>
-        <a:ln w="19050" cap="flat" cmpd="sng" algn="ctr">
-          <a:solidFill>
-            <a:schemeClr val="accent1">
-              <a:shade val="60000"/>
-              <a:hueOff val="0"/>
-              <a:satOff val="0"/>
-              <a:lumOff val="0"/>
-              <a:alphaOff val="0"/>
-            </a:schemeClr>
-          </a:solidFill>
-          <a:prstDash val="solid"/>
-          <a:miter lim="800000"/>
-        </a:ln>
-        <a:effectLst/>
-      </dsp:spPr>
-      <dsp:style>
-        <a:lnRef idx="2">
-          <a:scrgbClr r="0" g="0" b="0"/>
-        </a:lnRef>
-        <a:fillRef idx="0">
-          <a:scrgbClr r="0" g="0" b="0"/>
-        </a:fillRef>
-        <a:effectRef idx="0">
-          <a:scrgbClr r="0" g="0" b="0"/>
-        </a:effectRef>
-        <a:fontRef idx="minor"/>
-      </dsp:style>
-    </dsp:sp>
-    <dsp:sp modelId="{ECBCB50C-17E3-4E08-8F2D-57A84F25E402}">
-      <dsp:nvSpPr>
-        <dsp:cNvPr id="0" name=""/>
-        <dsp:cNvSpPr/>
-      </dsp:nvSpPr>
-      <dsp:spPr>
-        <a:xfrm>
-          <a:off x="5648560" y="316608"/>
-          <a:ext cx="122980" cy="91440"/>
-        </a:xfrm>
-        <a:custGeom>
-          <a:avLst/>
-          <a:gdLst/>
-          <a:ahLst/>
-          <a:cxnLst/>
-          <a:rect l="0" t="0" r="0" b="0"/>
-          <a:pathLst>
-            <a:path>
-              <a:moveTo>
-                <a:pt x="0" y="45720"/>
-              </a:moveTo>
-              <a:lnTo>
-                <a:pt x="122980" y="45720"/>
-              </a:lnTo>
-            </a:path>
-          </a:pathLst>
-        </a:custGeom>
-        <a:noFill/>
-        <a:ln w="19050" cap="flat" cmpd="sng" algn="ctr">
-          <a:solidFill>
-            <a:schemeClr val="accent1">
-              <a:shade val="80000"/>
-              <a:hueOff val="0"/>
-              <a:satOff val="0"/>
-              <a:lumOff val="0"/>
-              <a:alphaOff val="0"/>
-            </a:schemeClr>
-          </a:solidFill>
-          <a:prstDash val="solid"/>
-          <a:miter lim="800000"/>
-        </a:ln>
-        <a:effectLst/>
-      </dsp:spPr>
-      <dsp:style>
-        <a:lnRef idx="2">
-          <a:scrgbClr r="0" g="0" b="0"/>
-        </a:lnRef>
-        <a:fillRef idx="0">
-          <a:scrgbClr r="0" g="0" b="0"/>
-        </a:fillRef>
-        <a:effectRef idx="0">
-          <a:scrgbClr r="0" g="0" b="0"/>
-        </a:effectRef>
-        <a:fontRef idx="minor"/>
-      </dsp:style>
-    </dsp:sp>
-    <dsp:sp modelId="{020B6BC5-D316-46FF-9657-FB38EAFCA478}">
-      <dsp:nvSpPr>
-        <dsp:cNvPr id="0" name=""/>
-        <dsp:cNvSpPr/>
-      </dsp:nvSpPr>
-      <dsp:spPr>
-        <a:xfrm>
-          <a:off x="4682117" y="230123"/>
-          <a:ext cx="351539" cy="132204"/>
-        </a:xfrm>
-        <a:custGeom>
-          <a:avLst/>
-          <a:gdLst/>
-          <a:ahLst/>
-          <a:cxnLst/>
-          <a:rect l="0" t="0" r="0" b="0"/>
-          <a:pathLst>
-            <a:path>
-              <a:moveTo>
-                <a:pt x="0" y="0"/>
-              </a:moveTo>
-              <a:lnTo>
-                <a:pt x="290049" y="0"/>
-              </a:lnTo>
-              <a:lnTo>
-                <a:pt x="290049" y="132204"/>
-              </a:lnTo>
-              <a:lnTo>
-                <a:pt x="351539" y="132204"/>
-              </a:lnTo>
-            </a:path>
-          </a:pathLst>
-        </a:custGeom>
-        <a:noFill/>
-        <a:ln w="19050" cap="flat" cmpd="sng" algn="ctr">
-          <a:solidFill>
-            <a:schemeClr val="accent1">
-              <a:shade val="80000"/>
-              <a:hueOff val="0"/>
-              <a:satOff val="0"/>
-              <a:lumOff val="0"/>
-              <a:alphaOff val="0"/>
-            </a:schemeClr>
-          </a:solidFill>
-          <a:prstDash val="solid"/>
-          <a:miter lim="800000"/>
-        </a:ln>
-        <a:effectLst/>
-      </dsp:spPr>
-      <dsp:style>
-        <a:lnRef idx="2">
-          <a:scrgbClr r="0" g="0" b="0"/>
-        </a:lnRef>
-        <a:fillRef idx="0">
-          <a:scrgbClr r="0" g="0" b="0"/>
-        </a:fillRef>
-        <a:effectRef idx="0">
-          <a:scrgbClr r="0" g="0" b="0"/>
-        </a:effectRef>
-        <a:fontRef idx="minor"/>
-      </dsp:style>
-    </dsp:sp>
-    <dsp:sp modelId="{8734EB56-5A9C-44D3-8046-4D4FDD398AAC}">
-      <dsp:nvSpPr>
-        <dsp:cNvPr id="0" name=""/>
-        <dsp:cNvSpPr/>
-      </dsp:nvSpPr>
-      <dsp:spPr>
-        <a:xfrm>
-          <a:off x="4682117" y="97919"/>
-          <a:ext cx="351539" cy="132204"/>
-        </a:xfrm>
-        <a:custGeom>
-          <a:avLst/>
-          <a:gdLst/>
-          <a:ahLst/>
-          <a:cxnLst/>
-          <a:rect l="0" t="0" r="0" b="0"/>
-          <a:pathLst>
-            <a:path>
-              <a:moveTo>
-                <a:pt x="0" y="132204"/>
-              </a:moveTo>
-              <a:lnTo>
-                <a:pt x="290049" y="132204"/>
-              </a:lnTo>
-              <a:lnTo>
-                <a:pt x="290049" y="0"/>
-              </a:lnTo>
-              <a:lnTo>
-                <a:pt x="351539" y="0"/>
-              </a:lnTo>
-            </a:path>
-          </a:pathLst>
-        </a:custGeom>
-        <a:noFill/>
-        <a:ln w="19050" cap="flat" cmpd="sng" algn="ctr">
-          <a:solidFill>
-            <a:schemeClr val="accent1">
-              <a:shade val="80000"/>
-              <a:hueOff val="0"/>
-              <a:satOff val="0"/>
-              <a:lumOff val="0"/>
-              <a:alphaOff val="0"/>
-            </a:schemeClr>
-          </a:solidFill>
-          <a:prstDash val="solid"/>
-          <a:miter lim="800000"/>
-        </a:ln>
-        <a:effectLst/>
-      </dsp:spPr>
-      <dsp:style>
-        <a:lnRef idx="2">
-          <a:scrgbClr r="0" g="0" b="0"/>
-        </a:lnRef>
-        <a:fillRef idx="0">
-          <a:scrgbClr r="0" g="0" b="0"/>
-        </a:fillRef>
-        <a:effectRef idx="0">
-          <a:scrgbClr r="0" g="0" b="0"/>
-        </a:effectRef>
-        <a:fontRef idx="minor"/>
-      </dsp:style>
-    </dsp:sp>
-    <dsp:sp modelId="{BF5293E0-96D7-49FD-81EA-757AF582D648}">
-      <dsp:nvSpPr>
-        <dsp:cNvPr id="0" name=""/>
-        <dsp:cNvSpPr/>
-      </dsp:nvSpPr>
-      <dsp:spPr>
-        <a:xfrm>
-          <a:off x="3949805" y="230123"/>
-          <a:ext cx="117409" cy="2677133"/>
-        </a:xfrm>
-        <a:custGeom>
-          <a:avLst/>
-          <a:gdLst/>
-          <a:ahLst/>
-          <a:cxnLst/>
-          <a:rect l="0" t="0" r="0" b="0"/>
-          <a:pathLst>
-            <a:path>
-              <a:moveTo>
-                <a:pt x="0" y="2677133"/>
-              </a:moveTo>
-              <a:lnTo>
-                <a:pt x="55919" y="2677133"/>
-              </a:lnTo>
-              <a:lnTo>
-                <a:pt x="55919" y="0"/>
-              </a:lnTo>
-              <a:lnTo>
-                <a:pt x="117409" y="0"/>
-              </a:lnTo>
-            </a:path>
-          </a:pathLst>
-        </a:custGeom>
-        <a:noFill/>
-        <a:ln w="19050" cap="flat" cmpd="sng" algn="ctr">
-          <a:solidFill>
-            <a:schemeClr val="accent1">
-              <a:shade val="60000"/>
-              <a:hueOff val="0"/>
-              <a:satOff val="0"/>
-              <a:lumOff val="0"/>
-              <a:alphaOff val="0"/>
-            </a:schemeClr>
-          </a:solidFill>
-          <a:prstDash val="solid"/>
-          <a:miter lim="800000"/>
-        </a:ln>
-        <a:effectLst/>
-      </dsp:spPr>
-      <dsp:style>
-        <a:lnRef idx="2">
-          <a:scrgbClr r="0" g="0" b="0"/>
-        </a:lnRef>
-        <a:fillRef idx="0">
-          <a:scrgbClr r="0" g="0" b="0"/>
-        </a:fillRef>
-        <a:effectRef idx="0">
-          <a:scrgbClr r="0" g="0" b="0"/>
-        </a:effectRef>
-        <a:fontRef idx="minor"/>
-      </dsp:style>
-    </dsp:sp>
     <dsp:sp modelId="{03A1BB14-9637-40F9-B5B5-81520F48315F}">
       <dsp:nvSpPr>
         <dsp:cNvPr id="0" name=""/>
@@ -9432,8 +9144,8 @@
       </dsp:nvSpPr>
       <dsp:spPr>
         <a:xfrm>
-          <a:off x="3334902" y="2813484"/>
-          <a:ext cx="614902" cy="187545"/>
+          <a:off x="3226079" y="2799024"/>
+          <a:ext cx="642251" cy="195886"/>
         </a:xfrm>
         <a:prstGeom prst="rect">
           <a:avLst/>
@@ -9499,8 +9211,8 @@
         </a:p>
       </dsp:txBody>
       <dsp:txXfrm>
-        <a:off x="3334902" y="2813484"/>
-        <a:ext cx="614902" cy="187545"/>
+        <a:off x="3226079" y="2799024"/>
+        <a:ext cx="642251" cy="195886"/>
       </dsp:txXfrm>
     </dsp:sp>
     <dsp:sp modelId="{361EB6FF-B859-4244-8485-2C0FEA5D265B}">
@@ -9510,8 +9222,8 @@
       </dsp:nvSpPr>
       <dsp:spPr>
         <a:xfrm>
-          <a:off x="4067215" y="136351"/>
-          <a:ext cx="614902" cy="187545"/>
+          <a:off x="3990962" y="140905"/>
+          <a:ext cx="642251" cy="195886"/>
         </a:xfrm>
         <a:prstGeom prst="rect">
           <a:avLst/>
@@ -9577,8 +9289,8 @@
         </a:p>
       </dsp:txBody>
       <dsp:txXfrm>
-        <a:off x="4067215" y="136351"/>
-        <a:ext cx="614902" cy="187545"/>
+        <a:off x="3990962" y="140905"/>
+        <a:ext cx="642251" cy="195886"/>
       </dsp:txXfrm>
     </dsp:sp>
     <dsp:sp modelId="{3F068B7C-EBFA-492F-ABD8-85DE3E477784}">
@@ -9588,8 +9300,8 @@
       </dsp:nvSpPr>
       <dsp:spPr>
         <a:xfrm>
-          <a:off x="5033657" y="4147"/>
-          <a:ext cx="614902" cy="187545"/>
+          <a:off x="5000388" y="2821"/>
+          <a:ext cx="642251" cy="195886"/>
         </a:xfrm>
         <a:prstGeom prst="rect">
           <a:avLst/>
@@ -9655,8 +9367,8 @@
         </a:p>
       </dsp:txBody>
       <dsp:txXfrm>
-        <a:off x="5033657" y="4147"/>
-        <a:ext cx="614902" cy="187545"/>
+        <a:off x="5000388" y="2821"/>
+        <a:ext cx="642251" cy="195886"/>
       </dsp:txXfrm>
     </dsp:sp>
     <dsp:sp modelId="{9902580C-CDB9-4BC5-95FA-874F98DE783B}">
@@ -9666,8 +9378,8 @@
       </dsp:nvSpPr>
       <dsp:spPr>
         <a:xfrm>
-          <a:off x="5033657" y="268555"/>
-          <a:ext cx="614902" cy="187545"/>
+          <a:off x="5000388" y="278989"/>
+          <a:ext cx="642251" cy="195886"/>
         </a:xfrm>
         <a:prstGeom prst="rect">
           <a:avLst/>
@@ -9733,8 +9445,8 @@
         </a:p>
       </dsp:txBody>
       <dsp:txXfrm>
-        <a:off x="5033657" y="268555"/>
-        <a:ext cx="614902" cy="187545"/>
+        <a:off x="5000388" y="278989"/>
+        <a:ext cx="642251" cy="195886"/>
       </dsp:txXfrm>
     </dsp:sp>
     <dsp:sp modelId="{7E24B55B-C21F-479D-AF16-BA5BFBEF12B2}">
@@ -9744,8 +9456,8 @@
       </dsp:nvSpPr>
       <dsp:spPr>
         <a:xfrm>
-          <a:off x="5771541" y="268555"/>
-          <a:ext cx="614902" cy="187545"/>
+          <a:off x="5771090" y="278989"/>
+          <a:ext cx="642251" cy="195886"/>
         </a:xfrm>
         <a:prstGeom prst="rect">
           <a:avLst/>
@@ -9806,8 +9518,8 @@
         </a:p>
       </dsp:txBody>
       <dsp:txXfrm>
-        <a:off x="5771541" y="268555"/>
-        <a:ext cx="614902" cy="187545"/>
+        <a:off x="5771090" y="278989"/>
+        <a:ext cx="642251" cy="195886"/>
       </dsp:txXfrm>
     </dsp:sp>
     <dsp:sp modelId="{1557FC18-F726-42E8-B0B5-F6D08A985014}">
@@ -9817,8 +9529,8 @@
       </dsp:nvSpPr>
       <dsp:spPr>
         <a:xfrm>
-          <a:off x="4072786" y="532138"/>
-          <a:ext cx="614902" cy="187545"/>
+          <a:off x="3996781" y="554295"/>
+          <a:ext cx="642251" cy="195886"/>
         </a:xfrm>
         <a:prstGeom prst="rect">
           <a:avLst/>
@@ -9884,8 +9596,8 @@
         </a:p>
       </dsp:txBody>
       <dsp:txXfrm>
-        <a:off x="4072786" y="532138"/>
-        <a:ext cx="614902" cy="187545"/>
+        <a:off x="3996781" y="554295"/>
+        <a:ext cx="642251" cy="195886"/>
       </dsp:txXfrm>
     </dsp:sp>
     <dsp:sp modelId="{8C383FB3-4D14-4CBA-A0C6-CFF4847BA3EC}">
@@ -9895,8 +9607,8 @@
       </dsp:nvSpPr>
       <dsp:spPr>
         <a:xfrm>
-          <a:off x="4803327" y="532138"/>
-          <a:ext cx="614902" cy="187545"/>
+          <a:off x="4759814" y="554295"/>
+          <a:ext cx="642251" cy="195886"/>
         </a:xfrm>
         <a:prstGeom prst="rect">
           <a:avLst/>
@@ -9962,8 +9674,8 @@
         </a:p>
       </dsp:txBody>
       <dsp:txXfrm>
-        <a:off x="4803327" y="532138"/>
-        <a:ext cx="614902" cy="187545"/>
+        <a:off x="4759814" y="554295"/>
+        <a:ext cx="642251" cy="195886"/>
       </dsp:txXfrm>
     </dsp:sp>
     <dsp:sp modelId="{8A071F50-0936-48EF-AE15-796B92F4F4A2}">
@@ -9973,8 +9685,8 @@
       </dsp:nvSpPr>
       <dsp:spPr>
         <a:xfrm>
-          <a:off x="5548553" y="532963"/>
-          <a:ext cx="614902" cy="187545"/>
+          <a:off x="5538184" y="555157"/>
+          <a:ext cx="642251" cy="195886"/>
         </a:xfrm>
         <a:prstGeom prst="rect">
           <a:avLst/>
@@ -10035,8 +9747,8 @@
         </a:p>
       </dsp:txBody>
       <dsp:txXfrm>
-        <a:off x="5548553" y="532963"/>
-        <a:ext cx="614902" cy="187545"/>
+        <a:off x="5538184" y="555157"/>
+        <a:ext cx="642251" cy="195886"/>
       </dsp:txXfrm>
     </dsp:sp>
     <dsp:sp modelId="{582577D3-050E-4B41-BF32-01AA487AE0ED}">
@@ -10046,8 +9758,8 @@
       </dsp:nvSpPr>
       <dsp:spPr>
         <a:xfrm>
-          <a:off x="4803327" y="774969"/>
-          <a:ext cx="614902" cy="187545"/>
+          <a:off x="4759814" y="807927"/>
+          <a:ext cx="642251" cy="195886"/>
         </a:xfrm>
         <a:prstGeom prst="rect">
           <a:avLst/>
@@ -10113,8 +9825,8 @@
         </a:p>
       </dsp:txBody>
       <dsp:txXfrm>
-        <a:off x="4803327" y="774969"/>
-        <a:ext cx="614902" cy="187545"/>
+        <a:off x="4759814" y="807927"/>
+        <a:ext cx="642251" cy="195886"/>
       </dsp:txXfrm>
     </dsp:sp>
     <dsp:sp modelId="{61A0D4EF-EC3A-4279-BC51-4F36D0B52EB7}">
@@ -10124,8 +9836,8 @@
       </dsp:nvSpPr>
       <dsp:spPr>
         <a:xfrm>
-          <a:off x="4072786" y="1788902"/>
-          <a:ext cx="614902" cy="187545"/>
+          <a:off x="3996781" y="1866956"/>
+          <a:ext cx="642251" cy="195886"/>
         </a:xfrm>
         <a:prstGeom prst="rect">
           <a:avLst/>
@@ -10191,8 +9903,8 @@
         </a:p>
       </dsp:txBody>
       <dsp:txXfrm>
-        <a:off x="4072786" y="1788902"/>
-        <a:ext cx="614902" cy="187545"/>
+        <a:off x="3996781" y="1866956"/>
+        <a:ext cx="642251" cy="195886"/>
       </dsp:txXfrm>
     </dsp:sp>
     <dsp:sp modelId="{BAE31ACF-752D-4EA8-8B6E-54DBD06D21AE}">
@@ -10202,8 +9914,8 @@
       </dsp:nvSpPr>
       <dsp:spPr>
         <a:xfrm>
-          <a:off x="4810669" y="1656698"/>
-          <a:ext cx="614902" cy="187545"/>
+          <a:off x="4767482" y="1728872"/>
+          <a:ext cx="642251" cy="195886"/>
         </a:xfrm>
         <a:prstGeom prst="rect">
           <a:avLst/>
@@ -10269,8 +9981,8 @@
         </a:p>
       </dsp:txBody>
       <dsp:txXfrm>
-        <a:off x="4810669" y="1656698"/>
-        <a:ext cx="614902" cy="187545"/>
+        <a:off x="4767482" y="1728872"/>
+        <a:ext cx="642251" cy="195886"/>
       </dsp:txXfrm>
     </dsp:sp>
     <dsp:sp modelId="{171F98E8-7A93-4667-99EC-A67EE133F035}">
@@ -10280,8 +9992,8 @@
       </dsp:nvSpPr>
       <dsp:spPr>
         <a:xfrm>
-          <a:off x="5548553" y="797371"/>
-          <a:ext cx="614902" cy="187545"/>
+          <a:off x="5538184" y="831326"/>
+          <a:ext cx="642251" cy="195886"/>
         </a:xfrm>
         <a:prstGeom prst="rect">
           <a:avLst/>
@@ -10347,8 +10059,8 @@
         </a:p>
       </dsp:txBody>
       <dsp:txXfrm>
-        <a:off x="5548553" y="797371"/>
-        <a:ext cx="614902" cy="187545"/>
+        <a:off x="5538184" y="831326"/>
+        <a:ext cx="642251" cy="195886"/>
       </dsp:txXfrm>
     </dsp:sp>
     <dsp:sp modelId="{4F157AFE-1A3E-4945-AFFE-3FBFDF773F45}">
@@ -10358,8 +10070,8 @@
       </dsp:nvSpPr>
       <dsp:spPr>
         <a:xfrm>
-          <a:off x="6286436" y="797371"/>
-          <a:ext cx="614902" cy="187545"/>
+          <a:off x="6308886" y="831326"/>
+          <a:ext cx="642251" cy="195886"/>
         </a:xfrm>
         <a:prstGeom prst="rect">
           <a:avLst/>
@@ -10420,8 +10132,8 @@
         </a:p>
       </dsp:txBody>
       <dsp:txXfrm>
-        <a:off x="6286436" y="797371"/>
-        <a:ext cx="614902" cy="187545"/>
+        <a:off x="6308886" y="831326"/>
+        <a:ext cx="642251" cy="195886"/>
       </dsp:txXfrm>
     </dsp:sp>
     <dsp:sp modelId="{1ECE9F9F-A668-4333-B43A-1DABED3BF4C5}">
@@ -10431,8 +10143,8 @@
       </dsp:nvSpPr>
       <dsp:spPr>
         <a:xfrm>
-          <a:off x="5548553" y="1061780"/>
-          <a:ext cx="614902" cy="187545"/>
+          <a:off x="5538184" y="1107494"/>
+          <a:ext cx="642251" cy="195886"/>
         </a:xfrm>
         <a:prstGeom prst="rect">
           <a:avLst/>
@@ -10498,8 +10210,8 @@
         </a:p>
       </dsp:txBody>
       <dsp:txXfrm>
-        <a:off x="5548553" y="1061780"/>
-        <a:ext cx="614902" cy="187545"/>
+        <a:off x="5538184" y="1107494"/>
+        <a:ext cx="642251" cy="195886"/>
       </dsp:txXfrm>
     </dsp:sp>
     <dsp:sp modelId="{88A62553-AA35-4C7E-AEE4-0944A5577F9F}">
@@ -10509,8 +10221,8 @@
       </dsp:nvSpPr>
       <dsp:spPr>
         <a:xfrm>
-          <a:off x="6286436" y="1061780"/>
-          <a:ext cx="614902" cy="187545"/>
+          <a:off x="6308886" y="1107494"/>
+          <a:ext cx="642251" cy="195886"/>
         </a:xfrm>
         <a:prstGeom prst="rect">
           <a:avLst/>
@@ -10571,8 +10283,8 @@
         </a:p>
       </dsp:txBody>
       <dsp:txXfrm>
-        <a:off x="6286436" y="1061780"/>
-        <a:ext cx="614902" cy="187545"/>
+        <a:off x="6308886" y="1107494"/>
+        <a:ext cx="642251" cy="195886"/>
       </dsp:txXfrm>
     </dsp:sp>
     <dsp:sp modelId="{E9A97367-2565-4CA7-B81D-4E147657D835}">
@@ -10582,8 +10294,8 @@
       </dsp:nvSpPr>
       <dsp:spPr>
         <a:xfrm>
-          <a:off x="5548553" y="1326188"/>
-          <a:ext cx="614902" cy="187545"/>
+          <a:off x="5538184" y="1383662"/>
+          <a:ext cx="642251" cy="195886"/>
         </a:xfrm>
         <a:prstGeom prst="rect">
           <a:avLst/>
@@ -10649,8 +10361,8 @@
         </a:p>
       </dsp:txBody>
       <dsp:txXfrm>
-        <a:off x="5548553" y="1326188"/>
-        <a:ext cx="614902" cy="187545"/>
+        <a:off x="5538184" y="1383662"/>
+        <a:ext cx="642251" cy="195886"/>
       </dsp:txXfrm>
     </dsp:sp>
     <dsp:sp modelId="{3E0FA384-F7A7-4EF5-BB6C-325C5B877E93}">
@@ -10660,8 +10372,8 @@
       </dsp:nvSpPr>
       <dsp:spPr>
         <a:xfrm>
-          <a:off x="5548553" y="1590596"/>
-          <a:ext cx="614902" cy="187545"/>
+          <a:off x="5538184" y="1659830"/>
+          <a:ext cx="642251" cy="195886"/>
         </a:xfrm>
         <a:prstGeom prst="rect">
           <a:avLst/>
@@ -10727,8 +10439,8 @@
         </a:p>
       </dsp:txBody>
       <dsp:txXfrm>
-        <a:off x="5548553" y="1590596"/>
-        <a:ext cx="614902" cy="187545"/>
+        <a:off x="5538184" y="1659830"/>
+        <a:ext cx="642251" cy="195886"/>
       </dsp:txXfrm>
     </dsp:sp>
     <dsp:sp modelId="{5CE68631-E50F-4A7D-A78E-B9848249D5F3}">
@@ -10738,8 +10450,8 @@
       </dsp:nvSpPr>
       <dsp:spPr>
         <a:xfrm>
-          <a:off x="6286436" y="1590596"/>
-          <a:ext cx="614902" cy="187545"/>
+          <a:off x="6308886" y="1659830"/>
+          <a:ext cx="642251" cy="195886"/>
         </a:xfrm>
         <a:prstGeom prst="rect">
           <a:avLst/>
@@ -10800,8 +10512,8 @@
         </a:p>
       </dsp:txBody>
       <dsp:txXfrm>
-        <a:off x="6286436" y="1590596"/>
-        <a:ext cx="614902" cy="187545"/>
+        <a:off x="6308886" y="1659830"/>
+        <a:ext cx="642251" cy="195886"/>
       </dsp:txXfrm>
     </dsp:sp>
     <dsp:sp modelId="{7E303F30-9711-4703-9E93-53900C059588}">
@@ -10811,8 +10523,8 @@
       </dsp:nvSpPr>
       <dsp:spPr>
         <a:xfrm>
-          <a:off x="5548553" y="1855004"/>
-          <a:ext cx="793950" cy="187545"/>
+          <a:off x="5538184" y="1935998"/>
+          <a:ext cx="829262" cy="195886"/>
         </a:xfrm>
         <a:prstGeom prst="rect">
           <a:avLst/>
@@ -10878,8 +10590,8 @@
         </a:p>
       </dsp:txBody>
       <dsp:txXfrm>
-        <a:off x="5548553" y="1855004"/>
-        <a:ext cx="793950" cy="187545"/>
+        <a:off x="5538184" y="1935998"/>
+        <a:ext cx="829262" cy="195886"/>
       </dsp:txXfrm>
     </dsp:sp>
     <dsp:sp modelId="{3D02A4C7-D3F8-46A9-BF13-B91E1207C679}">
@@ -10889,8 +10601,8 @@
       </dsp:nvSpPr>
       <dsp:spPr>
         <a:xfrm>
-          <a:off x="5548553" y="2119412"/>
-          <a:ext cx="614902" cy="187545"/>
+          <a:off x="5538184" y="2212166"/>
+          <a:ext cx="642251" cy="195886"/>
         </a:xfrm>
         <a:prstGeom prst="rect">
           <a:avLst/>
@@ -10956,8 +10668,8 @@
         </a:p>
       </dsp:txBody>
       <dsp:txXfrm>
-        <a:off x="5548553" y="2119412"/>
-        <a:ext cx="614902" cy="187545"/>
+        <a:off x="5538184" y="2212166"/>
+        <a:ext cx="642251" cy="195886"/>
       </dsp:txXfrm>
     </dsp:sp>
     <dsp:sp modelId="{90D35EA2-A25D-449A-8C0B-91C81C67A50C}">
@@ -10967,8 +10679,8 @@
       </dsp:nvSpPr>
       <dsp:spPr>
         <a:xfrm>
-          <a:off x="6286436" y="2119412"/>
-          <a:ext cx="614902" cy="187545"/>
+          <a:off x="6308886" y="2212166"/>
+          <a:ext cx="642251" cy="195886"/>
         </a:xfrm>
         <a:prstGeom prst="rect">
           <a:avLst/>
@@ -11037,8 +10749,8 @@
         </a:p>
       </dsp:txBody>
       <dsp:txXfrm>
-        <a:off x="6286436" y="2119412"/>
-        <a:ext cx="614902" cy="187545"/>
+        <a:off x="6308886" y="2212166"/>
+        <a:ext cx="642251" cy="195886"/>
       </dsp:txXfrm>
     </dsp:sp>
     <dsp:sp modelId="{9E916334-F27B-4E86-B949-E7079E77F959}">
@@ -11048,8 +10760,8 @@
       </dsp:nvSpPr>
       <dsp:spPr>
         <a:xfrm>
-          <a:off x="5548553" y="2516025"/>
-          <a:ext cx="614902" cy="187545"/>
+          <a:off x="5538184" y="2626418"/>
+          <a:ext cx="642251" cy="195886"/>
         </a:xfrm>
         <a:prstGeom prst="rect">
           <a:avLst/>
@@ -11115,8 +10827,8 @@
         </a:p>
       </dsp:txBody>
       <dsp:txXfrm>
-        <a:off x="5548553" y="2516025"/>
-        <a:ext cx="614902" cy="187545"/>
+        <a:off x="5538184" y="2626418"/>
+        <a:ext cx="642251" cy="195886"/>
       </dsp:txXfrm>
     </dsp:sp>
     <dsp:sp modelId="{0BA28261-1ED3-47EB-A7EA-310484F5DF09}">
@@ -11126,8 +10838,8 @@
       </dsp:nvSpPr>
       <dsp:spPr>
         <a:xfrm>
-          <a:off x="6286436" y="2383821"/>
-          <a:ext cx="614902" cy="187545"/>
+          <a:off x="6308886" y="2488334"/>
+          <a:ext cx="642251" cy="195886"/>
         </a:xfrm>
         <a:prstGeom prst="rect">
           <a:avLst/>
@@ -11193,8 +10905,8 @@
         </a:p>
       </dsp:txBody>
       <dsp:txXfrm>
-        <a:off x="6286436" y="2383821"/>
-        <a:ext cx="614902" cy="187545"/>
+        <a:off x="6308886" y="2488334"/>
+        <a:ext cx="642251" cy="195886"/>
       </dsp:txXfrm>
     </dsp:sp>
     <dsp:sp modelId="{B509227D-8391-4FEA-8798-380D7D9E41EE}">
@@ -11204,8 +10916,8 @@
       </dsp:nvSpPr>
       <dsp:spPr>
         <a:xfrm>
-          <a:off x="7024319" y="2383821"/>
-          <a:ext cx="614902" cy="187545"/>
+          <a:off x="7079588" y="2488334"/>
+          <a:ext cx="642251" cy="195886"/>
         </a:xfrm>
         <a:prstGeom prst="rect">
           <a:avLst/>
@@ -11266,8 +10978,8 @@
         </a:p>
       </dsp:txBody>
       <dsp:txXfrm>
-        <a:off x="7024319" y="2383821"/>
-        <a:ext cx="614902" cy="187545"/>
+        <a:off x="7079588" y="2488334"/>
+        <a:ext cx="642251" cy="195886"/>
       </dsp:txXfrm>
     </dsp:sp>
     <dsp:sp modelId="{E6FC81B0-8E90-4371-B499-DD25029D4106}">
@@ -11277,8 +10989,8 @@
       </dsp:nvSpPr>
       <dsp:spPr>
         <a:xfrm>
-          <a:off x="6285587" y="2660684"/>
-          <a:ext cx="758150" cy="187545"/>
+          <a:off x="6308000" y="2777511"/>
+          <a:ext cx="791870" cy="195886"/>
         </a:xfrm>
         <a:prstGeom prst="rect">
           <a:avLst/>
@@ -11344,8 +11056,8 @@
         </a:p>
       </dsp:txBody>
       <dsp:txXfrm>
-        <a:off x="6285587" y="2660684"/>
-        <a:ext cx="758150" cy="187545"/>
+        <a:off x="6308000" y="2777511"/>
+        <a:ext cx="791870" cy="195886"/>
       </dsp:txXfrm>
     </dsp:sp>
     <dsp:sp modelId="{B7BA8FDA-69EF-4F26-A438-76A43EC08BE5}">
@@ -11355,8 +11067,8 @@
       </dsp:nvSpPr>
       <dsp:spPr>
         <a:xfrm>
-          <a:off x="7147669" y="2660684"/>
-          <a:ext cx="614902" cy="187545"/>
+          <a:off x="7208423" y="2777511"/>
+          <a:ext cx="642251" cy="195886"/>
         </a:xfrm>
         <a:prstGeom prst="rect">
           <a:avLst/>
@@ -11417,8 +11129,8 @@
         </a:p>
       </dsp:txBody>
       <dsp:txXfrm>
-        <a:off x="7147669" y="2660684"/>
-        <a:ext cx="614902" cy="187545"/>
+        <a:off x="7208423" y="2777511"/>
+        <a:ext cx="642251" cy="195886"/>
       </dsp:txXfrm>
     </dsp:sp>
     <dsp:sp modelId="{8C63EC56-3637-4380-B189-D0B66ADCD3F7}">
@@ -11428,8 +11140,8 @@
       </dsp:nvSpPr>
       <dsp:spPr>
         <a:xfrm>
-          <a:off x="4810669" y="1921106"/>
-          <a:ext cx="614902" cy="187545"/>
+          <a:off x="4767482" y="2005040"/>
+          <a:ext cx="642251" cy="195886"/>
         </a:xfrm>
         <a:prstGeom prst="rect">
           <a:avLst/>
@@ -11495,8 +11207,8 @@
         </a:p>
       </dsp:txBody>
       <dsp:txXfrm>
-        <a:off x="4810669" y="1921106"/>
-        <a:ext cx="614902" cy="187545"/>
+        <a:off x="4767482" y="2005040"/>
+        <a:ext cx="642251" cy="195886"/>
       </dsp:txXfrm>
     </dsp:sp>
     <dsp:sp modelId="{110F79BE-B8CE-48C2-943A-1C7F5605B400}">
@@ -11506,8 +11218,8 @@
       </dsp:nvSpPr>
       <dsp:spPr>
         <a:xfrm>
-          <a:off x="4072786" y="3838066"/>
-          <a:ext cx="614902" cy="187545"/>
+          <a:off x="3996781" y="3869175"/>
+          <a:ext cx="642251" cy="195886"/>
         </a:xfrm>
         <a:prstGeom prst="rect">
           <a:avLst/>
@@ -11573,8 +11285,8 @@
         </a:p>
       </dsp:txBody>
       <dsp:txXfrm>
-        <a:off x="4072786" y="3838066"/>
-        <a:ext cx="614902" cy="187545"/>
+        <a:off x="3996781" y="3869175"/>
+        <a:ext cx="642251" cy="195886"/>
       </dsp:txXfrm>
     </dsp:sp>
     <dsp:sp modelId="{5ED98B15-1271-4C1B-BD70-D93D404A68CE}">
@@ -11584,8 +11296,8 @@
       </dsp:nvSpPr>
       <dsp:spPr>
         <a:xfrm>
-          <a:off x="4810669" y="3705862"/>
-          <a:ext cx="614902" cy="187545"/>
+          <a:off x="4767482" y="3731091"/>
+          <a:ext cx="642251" cy="195886"/>
         </a:xfrm>
         <a:prstGeom prst="rect">
           <a:avLst/>
@@ -11651,8 +11363,8 @@
         </a:p>
       </dsp:txBody>
       <dsp:txXfrm>
-        <a:off x="4810669" y="3705862"/>
-        <a:ext cx="614902" cy="187545"/>
+        <a:off x="4767482" y="3731091"/>
+        <a:ext cx="642251" cy="195886"/>
       </dsp:txXfrm>
     </dsp:sp>
     <dsp:sp modelId="{DDF5EC19-41AE-4BDE-81B3-DB61285BD74A}">
@@ -11662,8 +11374,8 @@
       </dsp:nvSpPr>
       <dsp:spPr>
         <a:xfrm>
-          <a:off x="5548553" y="2780433"/>
-          <a:ext cx="614902" cy="187545"/>
+          <a:off x="5538184" y="2902587"/>
+          <a:ext cx="642251" cy="195886"/>
         </a:xfrm>
         <a:prstGeom prst="rect">
           <a:avLst/>
@@ -11729,8 +11441,8 @@
         </a:p>
       </dsp:txBody>
       <dsp:txXfrm>
-        <a:off x="5548553" y="2780433"/>
-        <a:ext cx="614902" cy="187545"/>
+        <a:off x="5538184" y="2902587"/>
+        <a:ext cx="642251" cy="195886"/>
       </dsp:txXfrm>
     </dsp:sp>
     <dsp:sp modelId="{63612422-7E15-4BE2-8B4F-9279878BDF71}">
@@ -11740,8 +11452,8 @@
       </dsp:nvSpPr>
       <dsp:spPr>
         <a:xfrm>
-          <a:off x="5548553" y="3044841"/>
-          <a:ext cx="614902" cy="187545"/>
+          <a:off x="5538184" y="3178755"/>
+          <a:ext cx="642251" cy="195886"/>
         </a:xfrm>
         <a:prstGeom prst="rect">
           <a:avLst/>
@@ -11807,8 +11519,8 @@
         </a:p>
       </dsp:txBody>
       <dsp:txXfrm>
-        <a:off x="5548553" y="3044841"/>
-        <a:ext cx="614902" cy="187545"/>
+        <a:off x="5538184" y="3178755"/>
+        <a:ext cx="642251" cy="195886"/>
       </dsp:txXfrm>
     </dsp:sp>
     <dsp:sp modelId="{7232D9FE-A60D-4159-AA76-300C305B2795}">
@@ -11818,8 +11530,8 @@
       </dsp:nvSpPr>
       <dsp:spPr>
         <a:xfrm>
-          <a:off x="6286436" y="2912637"/>
-          <a:ext cx="614902" cy="187545"/>
+          <a:off x="6308886" y="3040671"/>
+          <a:ext cx="642251" cy="195886"/>
         </a:xfrm>
         <a:prstGeom prst="rect">
           <a:avLst/>
@@ -11885,8 +11597,8 @@
         </a:p>
       </dsp:txBody>
       <dsp:txXfrm>
-        <a:off x="6286436" y="2912637"/>
-        <a:ext cx="614902" cy="187545"/>
+        <a:off x="6308886" y="3040671"/>
+        <a:ext cx="642251" cy="195886"/>
       </dsp:txXfrm>
     </dsp:sp>
     <dsp:sp modelId="{69A556CA-411A-4BA8-88C1-CAB47DCD97EC}">
@@ -11896,8 +11608,8 @@
       </dsp:nvSpPr>
       <dsp:spPr>
         <a:xfrm>
-          <a:off x="6286436" y="3177045"/>
-          <a:ext cx="614902" cy="187545"/>
+          <a:off x="6308886" y="3316839"/>
+          <a:ext cx="642251" cy="195886"/>
         </a:xfrm>
         <a:prstGeom prst="rect">
           <a:avLst/>
@@ -11963,8 +11675,8 @@
         </a:p>
       </dsp:txBody>
       <dsp:txXfrm>
-        <a:off x="6286436" y="3177045"/>
-        <a:ext cx="614902" cy="187545"/>
+        <a:off x="6308886" y="3316839"/>
+        <a:ext cx="642251" cy="195886"/>
       </dsp:txXfrm>
     </dsp:sp>
     <dsp:sp modelId="{FD314EC3-FAF3-42D4-B72F-81E23652E3D9}">
@@ -11974,8 +11686,8 @@
       </dsp:nvSpPr>
       <dsp:spPr>
         <a:xfrm>
-          <a:off x="5548553" y="3706612"/>
-          <a:ext cx="614902" cy="187545"/>
+          <a:off x="5538184" y="3869959"/>
+          <a:ext cx="642251" cy="195886"/>
         </a:xfrm>
         <a:prstGeom prst="rect">
           <a:avLst/>
@@ -12041,8 +11753,8 @@
         </a:p>
       </dsp:txBody>
       <dsp:txXfrm>
-        <a:off x="5548553" y="3706612"/>
-        <a:ext cx="614902" cy="187545"/>
+        <a:off x="5538184" y="3869959"/>
+        <a:ext cx="642251" cy="195886"/>
       </dsp:txXfrm>
     </dsp:sp>
     <dsp:sp modelId="{5EB259C4-E4BD-45AD-8D91-75E7ABF1EFB4}">
@@ -12052,8 +11764,8 @@
       </dsp:nvSpPr>
       <dsp:spPr>
         <a:xfrm>
-          <a:off x="6286436" y="3441454"/>
-          <a:ext cx="614902" cy="187545"/>
+          <a:off x="6308886" y="3593007"/>
+          <a:ext cx="642251" cy="195886"/>
         </a:xfrm>
         <a:prstGeom prst="rect">
           <a:avLst/>
@@ -12115,8 +11827,8 @@
         </a:p>
       </dsp:txBody>
       <dsp:txXfrm>
-        <a:off x="6286436" y="3441454"/>
-        <a:ext cx="614902" cy="187545"/>
+        <a:off x="6308886" y="3593007"/>
+        <a:ext cx="642251" cy="195886"/>
       </dsp:txXfrm>
     </dsp:sp>
     <dsp:sp modelId="{8AB01EF0-ED64-478D-BD9E-3C5B414E81F6}">
@@ -12126,8 +11838,8 @@
       </dsp:nvSpPr>
       <dsp:spPr>
         <a:xfrm>
-          <a:off x="6286436" y="3705862"/>
-          <a:ext cx="614902" cy="187545"/>
+          <a:off x="6308886" y="3869175"/>
+          <a:ext cx="642251" cy="195886"/>
         </a:xfrm>
         <a:prstGeom prst="rect">
           <a:avLst/>
@@ -12189,8 +11901,8 @@
         </a:p>
       </dsp:txBody>
       <dsp:txXfrm>
-        <a:off x="6286436" y="3705862"/>
-        <a:ext cx="614902" cy="187545"/>
+        <a:off x="6308886" y="3869175"/>
+        <a:ext cx="642251" cy="195886"/>
       </dsp:txXfrm>
     </dsp:sp>
     <dsp:sp modelId="{B2752A28-996B-46DB-B7DE-DC0CC42081C8}">
@@ -12200,8 +11912,8 @@
       </dsp:nvSpPr>
       <dsp:spPr>
         <a:xfrm>
-          <a:off x="6286436" y="3970270"/>
-          <a:ext cx="614902" cy="187545"/>
+          <a:off x="6308886" y="4145343"/>
+          <a:ext cx="642251" cy="195886"/>
         </a:xfrm>
         <a:prstGeom prst="rect">
           <a:avLst/>
@@ -12263,19 +11975,19 @@
         </a:p>
       </dsp:txBody>
       <dsp:txXfrm>
-        <a:off x="6286436" y="3970270"/>
-        <a:ext cx="614902" cy="187545"/>
+        <a:off x="6308886" y="4145343"/>
+        <a:ext cx="642251" cy="195886"/>
       </dsp:txXfrm>
     </dsp:sp>
-    <dsp:sp modelId="{B7E87C89-F2A3-40BE-A158-9348331D318D}">
+    <dsp:sp modelId="{E3458C5F-4332-4439-96AF-FD966B7B137A}">
       <dsp:nvSpPr>
         <dsp:cNvPr id="0" name=""/>
         <dsp:cNvSpPr/>
       </dsp:nvSpPr>
       <dsp:spPr>
         <a:xfrm>
-          <a:off x="5548553" y="4234678"/>
-          <a:ext cx="614902" cy="187545"/>
+          <a:off x="5538184" y="4559595"/>
+          <a:ext cx="642251" cy="195886"/>
         </a:xfrm>
         <a:prstGeom prst="rect">
           <a:avLst/>
@@ -12336,97 +12048,24 @@
           </a:pPr>
           <a:r>
             <a:rPr lang="en-US" sz="600" kern="1200" dirty="0"/>
-            <a:t>Collection</a:t>
+            <a:t>Visitor Count</a:t>
           </a:r>
         </a:p>
       </dsp:txBody>
       <dsp:txXfrm>
-        <a:off x="5548553" y="4234678"/>
-        <a:ext cx="614902" cy="187545"/>
+        <a:off x="5538184" y="4559595"/>
+        <a:ext cx="642251" cy="195886"/>
       </dsp:txXfrm>
     </dsp:sp>
-    <dsp:sp modelId="{FD27C63C-53AB-4EF5-B065-A5CCC6683CBC}">
+    <dsp:sp modelId="{07CF39E6-9B2B-4A5F-B780-120DD8E62C9B}">
       <dsp:nvSpPr>
         <dsp:cNvPr id="0" name=""/>
         <dsp:cNvSpPr/>
       </dsp:nvSpPr>
       <dsp:spPr>
         <a:xfrm>
-          <a:off x="6286436" y="4234678"/>
-          <a:ext cx="614902" cy="187545"/>
-        </a:xfrm>
-        <a:prstGeom prst="rect">
-          <a:avLst/>
-        </a:prstGeom>
-        <a:solidFill>
-          <a:srgbClr val="FFC000"/>
-        </a:solidFill>
-        <a:ln w="19050" cap="flat" cmpd="sng" algn="ctr">
-          <a:solidFill>
-            <a:schemeClr val="lt1">
-              <a:hueOff val="0"/>
-              <a:satOff val="0"/>
-              <a:lumOff val="0"/>
-              <a:alphaOff val="0"/>
-            </a:schemeClr>
-          </a:solidFill>
-          <a:prstDash val="solid"/>
-          <a:miter lim="800000"/>
-        </a:ln>
-        <a:effectLst/>
-      </dsp:spPr>
-      <dsp:style>
-        <a:lnRef idx="2">
-          <a:scrgbClr r="0" g="0" b="0"/>
-        </a:lnRef>
-        <a:fillRef idx="1">
-          <a:scrgbClr r="0" g="0" b="0"/>
-        </a:fillRef>
-        <a:effectRef idx="0">
-          <a:scrgbClr r="0" g="0" b="0"/>
-        </a:effectRef>
-        <a:fontRef idx="minor">
-          <a:schemeClr val="lt1"/>
-        </a:fontRef>
-      </dsp:style>
-      <dsp:txBody>
-        <a:bodyPr spcFirstLastPara="0" vert="horz" wrap="square" lIns="3810" tIns="3810" rIns="3810" bIns="3810" numCol="1" spcCol="1270" anchor="ctr" anchorCtr="0">
-          <a:noAutofit/>
-        </a:bodyPr>
-        <a:lstStyle/>
-        <a:p>
-          <a:pPr marL="0" lvl="0" indent="0" algn="ctr" defTabSz="266700">
-            <a:lnSpc>
-              <a:spcPct val="90000"/>
-            </a:lnSpc>
-            <a:spcBef>
-              <a:spcPct val="0"/>
-            </a:spcBef>
-            <a:spcAft>
-              <a:spcPct val="35000"/>
-            </a:spcAft>
-            <a:buNone/>
-          </a:pPr>
-          <a:r>
-            <a:rPr lang="en-US" sz="600" i="1" kern="1200" dirty="0"/>
-            <a:t>Optional…</a:t>
-          </a:r>
-        </a:p>
-      </dsp:txBody>
-      <dsp:txXfrm>
-        <a:off x="6286436" y="4234678"/>
-        <a:ext cx="614902" cy="187545"/>
-      </dsp:txXfrm>
-    </dsp:sp>
-    <dsp:sp modelId="{E3458C5F-4332-4439-96AF-FD966B7B137A}">
-      <dsp:nvSpPr>
-        <dsp:cNvPr id="0" name=""/>
-        <dsp:cNvSpPr/>
-      </dsp:nvSpPr>
-      <dsp:spPr>
-        <a:xfrm>
-          <a:off x="5548553" y="4631291"/>
-          <a:ext cx="614902" cy="187545"/>
+          <a:off x="6308886" y="4421511"/>
+          <a:ext cx="642251" cy="195886"/>
         </a:xfrm>
         <a:prstGeom prst="rect">
           <a:avLst/>
@@ -12487,24 +12126,97 @@
           </a:pPr>
           <a:r>
             <a:rPr lang="en-US" sz="600" kern="1200" dirty="0"/>
-            <a:t>Visitor Count</a:t>
+            <a:t>Adult</a:t>
           </a:r>
         </a:p>
       </dsp:txBody>
       <dsp:txXfrm>
-        <a:off x="5548553" y="4631291"/>
-        <a:ext cx="614902" cy="187545"/>
+        <a:off x="6308886" y="4421511"/>
+        <a:ext cx="642251" cy="195886"/>
       </dsp:txXfrm>
     </dsp:sp>
-    <dsp:sp modelId="{07CF39E6-9B2B-4A5F-B780-120DD8E62C9B}">
+    <dsp:sp modelId="{B652EFB0-A88E-48A1-836A-A245919707FD}">
       <dsp:nvSpPr>
         <dsp:cNvPr id="0" name=""/>
         <dsp:cNvSpPr/>
       </dsp:nvSpPr>
       <dsp:spPr>
         <a:xfrm>
-          <a:off x="6286436" y="4499087"/>
-          <a:ext cx="614902" cy="187545"/>
+          <a:off x="7079588" y="4421511"/>
+          <a:ext cx="642251" cy="195886"/>
+        </a:xfrm>
+        <a:prstGeom prst="rect">
+          <a:avLst/>
+        </a:prstGeom>
+        <a:solidFill>
+          <a:srgbClr val="FFC000"/>
+        </a:solidFill>
+        <a:ln w="19050" cap="flat" cmpd="sng" algn="ctr">
+          <a:solidFill>
+            <a:schemeClr val="lt1">
+              <a:hueOff val="0"/>
+              <a:satOff val="0"/>
+              <a:lumOff val="0"/>
+              <a:alphaOff val="0"/>
+            </a:schemeClr>
+          </a:solidFill>
+          <a:prstDash val="solid"/>
+          <a:miter lim="800000"/>
+        </a:ln>
+        <a:effectLst/>
+      </dsp:spPr>
+      <dsp:style>
+        <a:lnRef idx="2">
+          <a:scrgbClr r="0" g="0" b="0"/>
+        </a:lnRef>
+        <a:fillRef idx="1">
+          <a:scrgbClr r="0" g="0" b="0"/>
+        </a:fillRef>
+        <a:effectRef idx="0">
+          <a:scrgbClr r="0" g="0" b="0"/>
+        </a:effectRef>
+        <a:fontRef idx="minor">
+          <a:schemeClr val="lt1"/>
+        </a:fontRef>
+      </dsp:style>
+      <dsp:txBody>
+        <a:bodyPr spcFirstLastPara="0" vert="horz" wrap="square" lIns="3810" tIns="3810" rIns="3810" bIns="3810" numCol="1" spcCol="1270" anchor="ctr" anchorCtr="0">
+          <a:noAutofit/>
+        </a:bodyPr>
+        <a:lstStyle/>
+        <a:p>
+          <a:pPr marL="0" lvl="0" indent="0" algn="ctr" defTabSz="266700">
+            <a:lnSpc>
+              <a:spcPct val="90000"/>
+            </a:lnSpc>
+            <a:spcBef>
+              <a:spcPct val="0"/>
+            </a:spcBef>
+            <a:spcAft>
+              <a:spcPct val="35000"/>
+            </a:spcAft>
+            <a:buNone/>
+          </a:pPr>
+          <a:r>
+            <a:rPr lang="en-US" sz="600" kern="1200" dirty="0"/>
+            <a:t>345 visitors/day</a:t>
+          </a:r>
+        </a:p>
+      </dsp:txBody>
+      <dsp:txXfrm>
+        <a:off x="7079588" y="4421511"/>
+        <a:ext cx="642251" cy="195886"/>
+      </dsp:txXfrm>
+    </dsp:sp>
+    <dsp:sp modelId="{1D1D8692-63AE-448E-8E39-430F6A4B46BF}">
+      <dsp:nvSpPr>
+        <dsp:cNvPr id="0" name=""/>
+        <dsp:cNvSpPr/>
+      </dsp:nvSpPr>
+      <dsp:spPr>
+        <a:xfrm>
+          <a:off x="6308886" y="4697680"/>
+          <a:ext cx="642251" cy="195886"/>
         </a:xfrm>
         <a:prstGeom prst="rect">
           <a:avLst/>
@@ -12565,24 +12277,24 @@
           </a:pPr>
           <a:r>
             <a:rPr lang="en-US" sz="600" kern="1200" dirty="0"/>
-            <a:t>Adult</a:t>
+            <a:t>Underage</a:t>
           </a:r>
         </a:p>
       </dsp:txBody>
       <dsp:txXfrm>
-        <a:off x="6286436" y="4499087"/>
-        <a:ext cx="614902" cy="187545"/>
+        <a:off x="6308886" y="4697680"/>
+        <a:ext cx="642251" cy="195886"/>
       </dsp:txXfrm>
     </dsp:sp>
-    <dsp:sp modelId="{B652EFB0-A88E-48A1-836A-A245919707FD}">
+    <dsp:sp modelId="{CF184D97-6870-475F-82DD-C951C974B444}">
       <dsp:nvSpPr>
         <dsp:cNvPr id="0" name=""/>
         <dsp:cNvSpPr/>
       </dsp:nvSpPr>
       <dsp:spPr>
         <a:xfrm>
-          <a:off x="7024319" y="4499087"/>
-          <a:ext cx="614902" cy="187545"/>
+          <a:off x="7079588" y="4697680"/>
+          <a:ext cx="642251" cy="195886"/>
         </a:xfrm>
         <a:prstGeom prst="rect">
           <a:avLst/>
@@ -12638,24 +12350,24 @@
           </a:pPr>
           <a:r>
             <a:rPr lang="en-US" sz="600" kern="1200" dirty="0"/>
-            <a:t>345 visitors/day</a:t>
+            <a:t>120 visitors/day</a:t>
           </a:r>
         </a:p>
       </dsp:txBody>
       <dsp:txXfrm>
-        <a:off x="7024319" y="4499087"/>
-        <a:ext cx="614902" cy="187545"/>
+        <a:off x="7079588" y="4697680"/>
+        <a:ext cx="642251" cy="195886"/>
       </dsp:txXfrm>
     </dsp:sp>
-    <dsp:sp modelId="{1D1D8692-63AE-448E-8E39-430F6A4B46BF}">
+    <dsp:sp modelId="{3BF77DC6-A893-4A65-9C1E-D38F5E103AA5}">
       <dsp:nvSpPr>
         <dsp:cNvPr id="0" name=""/>
         <dsp:cNvSpPr/>
       </dsp:nvSpPr>
       <dsp:spPr>
         <a:xfrm>
-          <a:off x="6286436" y="4763495"/>
-          <a:ext cx="614902" cy="187545"/>
+          <a:off x="4767482" y="4007259"/>
+          <a:ext cx="642251" cy="195886"/>
         </a:xfrm>
         <a:prstGeom prst="rect">
           <a:avLst/>
@@ -12716,97 +12428,24 @@
           </a:pPr>
           <a:r>
             <a:rPr lang="en-US" sz="600" kern="1200" dirty="0"/>
-            <a:t>Underage</a:t>
+            <a:t>Exhibition Id#2</a:t>
           </a:r>
         </a:p>
       </dsp:txBody>
       <dsp:txXfrm>
-        <a:off x="6286436" y="4763495"/>
-        <a:ext cx="614902" cy="187545"/>
+        <a:off x="4767482" y="4007259"/>
+        <a:ext cx="642251" cy="195886"/>
       </dsp:txXfrm>
     </dsp:sp>
-    <dsp:sp modelId="{CF184D97-6870-475F-82DD-C951C974B444}">
+    <dsp:sp modelId="{F727FD69-DA36-400A-9A17-E435D30B6294}">
       <dsp:nvSpPr>
         <dsp:cNvPr id="0" name=""/>
         <dsp:cNvSpPr/>
       </dsp:nvSpPr>
       <dsp:spPr>
         <a:xfrm>
-          <a:off x="7024319" y="4763495"/>
-          <a:ext cx="614902" cy="187545"/>
-        </a:xfrm>
-        <a:prstGeom prst="rect">
-          <a:avLst/>
-        </a:prstGeom>
-        <a:solidFill>
-          <a:srgbClr val="FFC000"/>
-        </a:solidFill>
-        <a:ln w="19050" cap="flat" cmpd="sng" algn="ctr">
-          <a:solidFill>
-            <a:schemeClr val="lt1">
-              <a:hueOff val="0"/>
-              <a:satOff val="0"/>
-              <a:lumOff val="0"/>
-              <a:alphaOff val="0"/>
-            </a:schemeClr>
-          </a:solidFill>
-          <a:prstDash val="solid"/>
-          <a:miter lim="800000"/>
-        </a:ln>
-        <a:effectLst/>
-      </dsp:spPr>
-      <dsp:style>
-        <a:lnRef idx="2">
-          <a:scrgbClr r="0" g="0" b="0"/>
-        </a:lnRef>
-        <a:fillRef idx="1">
-          <a:scrgbClr r="0" g="0" b="0"/>
-        </a:fillRef>
-        <a:effectRef idx="0">
-          <a:scrgbClr r="0" g="0" b="0"/>
-        </a:effectRef>
-        <a:fontRef idx="minor">
-          <a:schemeClr val="lt1"/>
-        </a:fontRef>
-      </dsp:style>
-      <dsp:txBody>
-        <a:bodyPr spcFirstLastPara="0" vert="horz" wrap="square" lIns="3810" tIns="3810" rIns="3810" bIns="3810" numCol="1" spcCol="1270" anchor="ctr" anchorCtr="0">
-          <a:noAutofit/>
-        </a:bodyPr>
-        <a:lstStyle/>
-        <a:p>
-          <a:pPr marL="0" lvl="0" indent="0" algn="ctr" defTabSz="266700">
-            <a:lnSpc>
-              <a:spcPct val="90000"/>
-            </a:lnSpc>
-            <a:spcBef>
-              <a:spcPct val="0"/>
-            </a:spcBef>
-            <a:spcAft>
-              <a:spcPct val="35000"/>
-            </a:spcAft>
-            <a:buNone/>
-          </a:pPr>
-          <a:r>
-            <a:rPr lang="en-US" sz="600" kern="1200" dirty="0"/>
-            <a:t>120 visitors/day</a:t>
-          </a:r>
-        </a:p>
-      </dsp:txBody>
-      <dsp:txXfrm>
-        <a:off x="7024319" y="4763495"/>
-        <a:ext cx="614902" cy="187545"/>
-      </dsp:txXfrm>
-    </dsp:sp>
-    <dsp:sp modelId="{3BF77DC6-A893-4A65-9C1E-D38F5E103AA5}">
-      <dsp:nvSpPr>
-        <dsp:cNvPr id="0" name=""/>
-        <dsp:cNvSpPr/>
-      </dsp:nvSpPr>
-      <dsp:spPr>
-        <a:xfrm>
-          <a:off x="4810669" y="3970270"/>
-          <a:ext cx="614902" cy="187545"/>
+          <a:off x="3996781" y="5424730"/>
+          <a:ext cx="642251" cy="195886"/>
         </a:xfrm>
         <a:prstGeom prst="rect">
           <a:avLst/>
@@ -12867,24 +12506,24 @@
           </a:pPr>
           <a:r>
             <a:rPr lang="en-US" sz="600" kern="1200" dirty="0"/>
-            <a:t>Exhibition Id#2</a:t>
+            <a:t>Restoration</a:t>
           </a:r>
         </a:p>
       </dsp:txBody>
       <dsp:txXfrm>
-        <a:off x="4810669" y="3970270"/>
-        <a:ext cx="614902" cy="187545"/>
+        <a:off x="3996781" y="5424730"/>
+        <a:ext cx="642251" cy="195886"/>
       </dsp:txXfrm>
     </dsp:sp>
-    <dsp:sp modelId="{F727FD69-DA36-400A-9A17-E435D30B6294}">
+    <dsp:sp modelId="{490BDFA8-D452-4BE4-9F81-245774E0D158}">
       <dsp:nvSpPr>
         <dsp:cNvPr id="0" name=""/>
         <dsp:cNvSpPr/>
       </dsp:nvSpPr>
       <dsp:spPr>
         <a:xfrm>
-          <a:off x="4072786" y="5459586"/>
-          <a:ext cx="614902" cy="187545"/>
+          <a:off x="4767482" y="5319058"/>
+          <a:ext cx="642251" cy="195886"/>
         </a:xfrm>
         <a:prstGeom prst="rect">
           <a:avLst/>
@@ -12945,24 +12584,24 @@
           </a:pPr>
           <a:r>
             <a:rPr lang="en-US" sz="600" kern="1200" dirty="0"/>
-            <a:t>Restoration</a:t>
+            <a:t>Project #1</a:t>
           </a:r>
         </a:p>
       </dsp:txBody>
       <dsp:txXfrm>
-        <a:off x="4072786" y="5459586"/>
-        <a:ext cx="614902" cy="187545"/>
+        <a:off x="4767482" y="5319058"/>
+        <a:ext cx="642251" cy="195886"/>
       </dsp:txXfrm>
     </dsp:sp>
-    <dsp:sp modelId="{490BDFA8-D452-4BE4-9F81-245774E0D158}">
+    <dsp:sp modelId="{BEB5F23A-260D-4EA4-9C52-D29289AE19DF}">
       <dsp:nvSpPr>
         <dsp:cNvPr id="0" name=""/>
         <dsp:cNvSpPr/>
       </dsp:nvSpPr>
       <dsp:spPr>
         <a:xfrm>
-          <a:off x="4810669" y="5358413"/>
-          <a:ext cx="614902" cy="187545"/>
+          <a:off x="5538184" y="4835764"/>
+          <a:ext cx="642251" cy="195886"/>
         </a:xfrm>
         <a:prstGeom prst="rect">
           <a:avLst/>
@@ -13023,24 +12662,24 @@
           </a:pPr>
           <a:r>
             <a:rPr lang="en-US" sz="600" kern="1200" dirty="0"/>
-            <a:t>Project #1</a:t>
+            <a:t>Loan “currency”</a:t>
           </a:r>
         </a:p>
       </dsp:txBody>
       <dsp:txXfrm>
-        <a:off x="4810669" y="5358413"/>
-        <a:ext cx="614902" cy="187545"/>
+        <a:off x="5538184" y="4835764"/>
+        <a:ext cx="642251" cy="195886"/>
       </dsp:txXfrm>
     </dsp:sp>
-    <dsp:sp modelId="{BEB5F23A-260D-4EA4-9C52-D29289AE19DF}">
+    <dsp:sp modelId="{15470CCD-2DC4-4446-952E-0EA1F9168293}">
       <dsp:nvSpPr>
         <dsp:cNvPr id="0" name=""/>
         <dsp:cNvSpPr/>
       </dsp:nvSpPr>
       <dsp:spPr>
         <a:xfrm>
-          <a:off x="5548553" y="4895699"/>
-          <a:ext cx="614902" cy="187545"/>
+          <a:off x="5538184" y="5111932"/>
+          <a:ext cx="642251" cy="195886"/>
         </a:xfrm>
         <a:prstGeom prst="rect">
           <a:avLst/>
@@ -13101,24 +12740,170 @@
           </a:pPr>
           <a:r>
             <a:rPr lang="en-US" sz="600" kern="1200" dirty="0"/>
-            <a:t>Loan “currency”</a:t>
+            <a:t>Artifacts</a:t>
           </a:r>
         </a:p>
       </dsp:txBody>
       <dsp:txXfrm>
-        <a:off x="5548553" y="4895699"/>
-        <a:ext cx="614902" cy="187545"/>
+        <a:off x="5538184" y="5111932"/>
+        <a:ext cx="642251" cy="195886"/>
       </dsp:txXfrm>
     </dsp:sp>
-    <dsp:sp modelId="{15470CCD-2DC4-4446-952E-0EA1F9168293}">
+    <dsp:sp modelId="{9921040E-A9AE-4E20-B3A7-1033725EAB32}">
       <dsp:nvSpPr>
         <dsp:cNvPr id="0" name=""/>
         <dsp:cNvSpPr/>
       </dsp:nvSpPr>
       <dsp:spPr>
         <a:xfrm>
-          <a:off x="5548553" y="5160107"/>
-          <a:ext cx="614902" cy="187545"/>
+          <a:off x="6308886" y="4973848"/>
+          <a:ext cx="642251" cy="195886"/>
+        </a:xfrm>
+        <a:prstGeom prst="rect">
+          <a:avLst/>
+        </a:prstGeom>
+        <a:solidFill>
+          <a:srgbClr val="FFC000"/>
+        </a:solidFill>
+        <a:ln w="19050" cap="flat" cmpd="sng" algn="ctr">
+          <a:solidFill>
+            <a:schemeClr val="lt1">
+              <a:hueOff val="0"/>
+              <a:satOff val="0"/>
+              <a:lumOff val="0"/>
+              <a:alphaOff val="0"/>
+            </a:schemeClr>
+          </a:solidFill>
+          <a:prstDash val="solid"/>
+          <a:miter lim="800000"/>
+        </a:ln>
+        <a:effectLst/>
+      </dsp:spPr>
+      <dsp:style>
+        <a:lnRef idx="2">
+          <a:scrgbClr r="0" g="0" b="0"/>
+        </a:lnRef>
+        <a:fillRef idx="1">
+          <a:scrgbClr r="0" g="0" b="0"/>
+        </a:fillRef>
+        <a:effectRef idx="0">
+          <a:scrgbClr r="0" g="0" b="0"/>
+        </a:effectRef>
+        <a:fontRef idx="minor">
+          <a:schemeClr val="lt1"/>
+        </a:fontRef>
+      </dsp:style>
+      <dsp:txBody>
+        <a:bodyPr spcFirstLastPara="0" vert="horz" wrap="square" lIns="3810" tIns="3810" rIns="3810" bIns="3810" numCol="1" spcCol="1270" anchor="ctr" anchorCtr="0">
+          <a:noAutofit/>
+        </a:bodyPr>
+        <a:lstStyle/>
+        <a:p>
+          <a:pPr marL="0" lvl="0" indent="0" algn="ctr" defTabSz="266700">
+            <a:lnSpc>
+              <a:spcPct val="90000"/>
+            </a:lnSpc>
+            <a:spcBef>
+              <a:spcPct val="0"/>
+            </a:spcBef>
+            <a:spcAft>
+              <a:spcPct val="35000"/>
+            </a:spcAft>
+            <a:buNone/>
+          </a:pPr>
+          <a:r>
+            <a:rPr lang="en-US" sz="600" kern="1200" dirty="0"/>
+            <a:t>Artifact ref#1</a:t>
+          </a:r>
+        </a:p>
+      </dsp:txBody>
+      <dsp:txXfrm>
+        <a:off x="6308886" y="4973848"/>
+        <a:ext cx="642251" cy="195886"/>
+      </dsp:txXfrm>
+    </dsp:sp>
+    <dsp:sp modelId="{4C50E7F0-CBE9-462F-A0E5-5FFE1AE84F4E}">
+      <dsp:nvSpPr>
+        <dsp:cNvPr id="0" name=""/>
+        <dsp:cNvSpPr/>
+      </dsp:nvSpPr>
+      <dsp:spPr>
+        <a:xfrm>
+          <a:off x="6308886" y="5250016"/>
+          <a:ext cx="642251" cy="195886"/>
+        </a:xfrm>
+        <a:prstGeom prst="rect">
+          <a:avLst/>
+        </a:prstGeom>
+        <a:solidFill>
+          <a:srgbClr val="FFC000"/>
+        </a:solidFill>
+        <a:ln w="19050" cap="flat" cmpd="sng" algn="ctr">
+          <a:solidFill>
+            <a:schemeClr val="lt1">
+              <a:hueOff val="0"/>
+              <a:satOff val="0"/>
+              <a:lumOff val="0"/>
+              <a:alphaOff val="0"/>
+            </a:schemeClr>
+          </a:solidFill>
+          <a:prstDash val="solid"/>
+          <a:miter lim="800000"/>
+        </a:ln>
+        <a:effectLst/>
+      </dsp:spPr>
+      <dsp:style>
+        <a:lnRef idx="2">
+          <a:scrgbClr r="0" g="0" b="0"/>
+        </a:lnRef>
+        <a:fillRef idx="1">
+          <a:scrgbClr r="0" g="0" b="0"/>
+        </a:fillRef>
+        <a:effectRef idx="0">
+          <a:scrgbClr r="0" g="0" b="0"/>
+        </a:effectRef>
+        <a:fontRef idx="minor">
+          <a:schemeClr val="lt1"/>
+        </a:fontRef>
+      </dsp:style>
+      <dsp:txBody>
+        <a:bodyPr spcFirstLastPara="0" vert="horz" wrap="square" lIns="3810" tIns="3810" rIns="3810" bIns="3810" numCol="1" spcCol="1270" anchor="ctr" anchorCtr="0">
+          <a:noAutofit/>
+        </a:bodyPr>
+        <a:lstStyle/>
+        <a:p>
+          <a:pPr marL="0" lvl="0" indent="0" algn="ctr" defTabSz="266700">
+            <a:lnSpc>
+              <a:spcPct val="90000"/>
+            </a:lnSpc>
+            <a:spcBef>
+              <a:spcPct val="0"/>
+            </a:spcBef>
+            <a:spcAft>
+              <a:spcPct val="35000"/>
+            </a:spcAft>
+            <a:buNone/>
+          </a:pPr>
+          <a:r>
+            <a:rPr lang="en-US" sz="600" kern="1200" dirty="0"/>
+            <a:t>Artifact ref#2</a:t>
+          </a:r>
+        </a:p>
+      </dsp:txBody>
+      <dsp:txXfrm>
+        <a:off x="6308886" y="5250016"/>
+        <a:ext cx="642251" cy="195886"/>
+      </dsp:txXfrm>
+    </dsp:sp>
+    <dsp:sp modelId="{E142E4F7-A4D2-449F-AA7F-C04C088A3C1F}">
+      <dsp:nvSpPr>
+        <dsp:cNvPr id="0" name=""/>
+        <dsp:cNvSpPr/>
+      </dsp:nvSpPr>
+      <dsp:spPr>
+        <a:xfrm>
+          <a:off x="5538184" y="5813369"/>
+          <a:ext cx="642251" cy="195886"/>
         </a:xfrm>
         <a:prstGeom prst="rect">
           <a:avLst/>
@@ -13179,170 +12964,24 @@
           </a:pPr>
           <a:r>
             <a:rPr lang="en-US" sz="600" kern="1200" dirty="0"/>
-            <a:t>Artifacts</a:t>
+            <a:t>Responsible</a:t>
           </a:r>
         </a:p>
       </dsp:txBody>
       <dsp:txXfrm>
-        <a:off x="5548553" y="5160107"/>
-        <a:ext cx="614902" cy="187545"/>
+        <a:off x="5538184" y="5813369"/>
+        <a:ext cx="642251" cy="195886"/>
       </dsp:txXfrm>
     </dsp:sp>
-    <dsp:sp modelId="{9921040E-A9AE-4E20-B3A7-1033725EAB32}">
+    <dsp:sp modelId="{077C8107-272A-4607-AB45-2B402815F473}">
       <dsp:nvSpPr>
         <dsp:cNvPr id="0" name=""/>
         <dsp:cNvSpPr/>
       </dsp:nvSpPr>
       <dsp:spPr>
         <a:xfrm>
-          <a:off x="6286436" y="5027903"/>
-          <a:ext cx="614902" cy="187545"/>
-        </a:xfrm>
-        <a:prstGeom prst="rect">
-          <a:avLst/>
-        </a:prstGeom>
-        <a:solidFill>
-          <a:srgbClr val="FFC000"/>
-        </a:solidFill>
-        <a:ln w="19050" cap="flat" cmpd="sng" algn="ctr">
-          <a:solidFill>
-            <a:schemeClr val="lt1">
-              <a:hueOff val="0"/>
-              <a:satOff val="0"/>
-              <a:lumOff val="0"/>
-              <a:alphaOff val="0"/>
-            </a:schemeClr>
-          </a:solidFill>
-          <a:prstDash val="solid"/>
-          <a:miter lim="800000"/>
-        </a:ln>
-        <a:effectLst/>
-      </dsp:spPr>
-      <dsp:style>
-        <a:lnRef idx="2">
-          <a:scrgbClr r="0" g="0" b="0"/>
-        </a:lnRef>
-        <a:fillRef idx="1">
-          <a:scrgbClr r="0" g="0" b="0"/>
-        </a:fillRef>
-        <a:effectRef idx="0">
-          <a:scrgbClr r="0" g="0" b="0"/>
-        </a:effectRef>
-        <a:fontRef idx="minor">
-          <a:schemeClr val="lt1"/>
-        </a:fontRef>
-      </dsp:style>
-      <dsp:txBody>
-        <a:bodyPr spcFirstLastPara="0" vert="horz" wrap="square" lIns="3810" tIns="3810" rIns="3810" bIns="3810" numCol="1" spcCol="1270" anchor="ctr" anchorCtr="0">
-          <a:noAutofit/>
-        </a:bodyPr>
-        <a:lstStyle/>
-        <a:p>
-          <a:pPr marL="0" lvl="0" indent="0" algn="ctr" defTabSz="266700">
-            <a:lnSpc>
-              <a:spcPct val="90000"/>
-            </a:lnSpc>
-            <a:spcBef>
-              <a:spcPct val="0"/>
-            </a:spcBef>
-            <a:spcAft>
-              <a:spcPct val="35000"/>
-            </a:spcAft>
-            <a:buNone/>
-          </a:pPr>
-          <a:r>
-            <a:rPr lang="en-US" sz="600" kern="1200" dirty="0"/>
-            <a:t>Artifact ref#1</a:t>
-          </a:r>
-        </a:p>
-      </dsp:txBody>
-      <dsp:txXfrm>
-        <a:off x="6286436" y="5027903"/>
-        <a:ext cx="614902" cy="187545"/>
-      </dsp:txXfrm>
-    </dsp:sp>
-    <dsp:sp modelId="{4C50E7F0-CBE9-462F-A0E5-5FFE1AE84F4E}">
-      <dsp:nvSpPr>
-        <dsp:cNvPr id="0" name=""/>
-        <dsp:cNvSpPr/>
-      </dsp:nvSpPr>
-      <dsp:spPr>
-        <a:xfrm>
-          <a:off x="6286436" y="5292311"/>
-          <a:ext cx="614902" cy="187545"/>
-        </a:xfrm>
-        <a:prstGeom prst="rect">
-          <a:avLst/>
-        </a:prstGeom>
-        <a:solidFill>
-          <a:srgbClr val="FFC000"/>
-        </a:solidFill>
-        <a:ln w="19050" cap="flat" cmpd="sng" algn="ctr">
-          <a:solidFill>
-            <a:schemeClr val="lt1">
-              <a:hueOff val="0"/>
-              <a:satOff val="0"/>
-              <a:lumOff val="0"/>
-              <a:alphaOff val="0"/>
-            </a:schemeClr>
-          </a:solidFill>
-          <a:prstDash val="solid"/>
-          <a:miter lim="800000"/>
-        </a:ln>
-        <a:effectLst/>
-      </dsp:spPr>
-      <dsp:style>
-        <a:lnRef idx="2">
-          <a:scrgbClr r="0" g="0" b="0"/>
-        </a:lnRef>
-        <a:fillRef idx="1">
-          <a:scrgbClr r="0" g="0" b="0"/>
-        </a:fillRef>
-        <a:effectRef idx="0">
-          <a:scrgbClr r="0" g="0" b="0"/>
-        </a:effectRef>
-        <a:fontRef idx="minor">
-          <a:schemeClr val="lt1"/>
-        </a:fontRef>
-      </dsp:style>
-      <dsp:txBody>
-        <a:bodyPr spcFirstLastPara="0" vert="horz" wrap="square" lIns="3810" tIns="3810" rIns="3810" bIns="3810" numCol="1" spcCol="1270" anchor="ctr" anchorCtr="0">
-          <a:noAutofit/>
-        </a:bodyPr>
-        <a:lstStyle/>
-        <a:p>
-          <a:pPr marL="0" lvl="0" indent="0" algn="ctr" defTabSz="266700">
-            <a:lnSpc>
-              <a:spcPct val="90000"/>
-            </a:lnSpc>
-            <a:spcBef>
-              <a:spcPct val="0"/>
-            </a:spcBef>
-            <a:spcAft>
-              <a:spcPct val="35000"/>
-            </a:spcAft>
-            <a:buNone/>
-          </a:pPr>
-          <a:r>
-            <a:rPr lang="en-US" sz="600" kern="1200" dirty="0"/>
-            <a:t>Artifact ref#2</a:t>
-          </a:r>
-        </a:p>
-      </dsp:txBody>
-      <dsp:txXfrm>
-        <a:off x="6286436" y="5292311"/>
-        <a:ext cx="614902" cy="187545"/>
-      </dsp:txXfrm>
-    </dsp:sp>
-    <dsp:sp modelId="{E142E4F7-A4D2-449F-AA7F-C04C088A3C1F}">
-      <dsp:nvSpPr>
-        <dsp:cNvPr id="0" name=""/>
-        <dsp:cNvSpPr/>
-      </dsp:nvSpPr>
-      <dsp:spPr>
-        <a:xfrm>
-          <a:off x="5548553" y="5831675"/>
-          <a:ext cx="614902" cy="187545"/>
+          <a:off x="6308886" y="5499937"/>
+          <a:ext cx="642251" cy="195886"/>
         </a:xfrm>
         <a:prstGeom prst="rect">
           <a:avLst/>
@@ -13402,25 +13041,98 @@
             <a:buNone/>
           </a:pPr>
           <a:r>
-            <a:rPr lang="en-US" sz="600" kern="1200" dirty="0"/>
-            <a:t>Responsible</a:t>
+            <a:rPr lang="en-GB" sz="600" kern="1200" dirty="0"/>
+            <a:t>Full Name</a:t>
           </a:r>
         </a:p>
       </dsp:txBody>
       <dsp:txXfrm>
-        <a:off x="5548553" y="5831675"/>
-        <a:ext cx="614902" cy="187545"/>
+        <a:off x="6308886" y="5499937"/>
+        <a:ext cx="642251" cy="195886"/>
       </dsp:txXfrm>
     </dsp:sp>
-    <dsp:sp modelId="{077C8107-272A-4607-AB45-2B402815F473}">
+    <dsp:sp modelId="{5E1565E1-8DBB-4A62-B412-DA531FDF40C5}">
       <dsp:nvSpPr>
         <dsp:cNvPr id="0" name=""/>
         <dsp:cNvSpPr/>
       </dsp:nvSpPr>
       <dsp:spPr>
         <a:xfrm>
-          <a:off x="6286436" y="5531590"/>
-          <a:ext cx="614902" cy="187545"/>
+          <a:off x="7078078" y="5498699"/>
+          <a:ext cx="642251" cy="195886"/>
+        </a:xfrm>
+        <a:prstGeom prst="rect">
+          <a:avLst/>
+        </a:prstGeom>
+        <a:solidFill>
+          <a:srgbClr val="FFC000"/>
+        </a:solidFill>
+        <a:ln w="19050" cap="flat" cmpd="sng" algn="ctr">
+          <a:solidFill>
+            <a:schemeClr val="lt1">
+              <a:hueOff val="0"/>
+              <a:satOff val="0"/>
+              <a:lumOff val="0"/>
+              <a:alphaOff val="0"/>
+            </a:schemeClr>
+          </a:solidFill>
+          <a:prstDash val="solid"/>
+          <a:miter lim="800000"/>
+        </a:ln>
+        <a:effectLst/>
+      </dsp:spPr>
+      <dsp:style>
+        <a:lnRef idx="2">
+          <a:scrgbClr r="0" g="0" b="0"/>
+        </a:lnRef>
+        <a:fillRef idx="1">
+          <a:scrgbClr r="0" g="0" b="0"/>
+        </a:fillRef>
+        <a:effectRef idx="0">
+          <a:scrgbClr r="0" g="0" b="0"/>
+        </a:effectRef>
+        <a:fontRef idx="minor">
+          <a:schemeClr val="lt1"/>
+        </a:fontRef>
+      </dsp:style>
+      <dsp:txBody>
+        <a:bodyPr spcFirstLastPara="0" vert="horz" wrap="square" lIns="3810" tIns="3810" rIns="3810" bIns="3810" numCol="1" spcCol="1270" anchor="ctr" anchorCtr="0">
+          <a:noAutofit/>
+        </a:bodyPr>
+        <a:lstStyle/>
+        <a:p>
+          <a:pPr marL="0" lvl="0" indent="0" algn="ctr" defTabSz="266700">
+            <a:lnSpc>
+              <a:spcPct val="90000"/>
+            </a:lnSpc>
+            <a:spcBef>
+              <a:spcPct val="0"/>
+            </a:spcBef>
+            <a:spcAft>
+              <a:spcPct val="35000"/>
+            </a:spcAft>
+            <a:buNone/>
+          </a:pPr>
+          <a:r>
+            <a:rPr lang="en-GB" sz="600" kern="1200" dirty="0"/>
+            <a:t>James Lopez</a:t>
+          </a:r>
+        </a:p>
+      </dsp:txBody>
+      <dsp:txXfrm>
+        <a:off x="7078078" y="5498699"/>
+        <a:ext cx="642251" cy="195886"/>
+      </dsp:txXfrm>
+    </dsp:sp>
+    <dsp:sp modelId="{5DE52887-637E-4373-B534-4602DEAB0BD9}">
+      <dsp:nvSpPr>
+        <dsp:cNvPr id="0" name=""/>
+        <dsp:cNvSpPr/>
+      </dsp:nvSpPr>
+      <dsp:spPr>
+        <a:xfrm>
+          <a:off x="6307377" y="5815514"/>
+          <a:ext cx="642251" cy="195886"/>
         </a:xfrm>
         <a:prstGeom prst="rect">
           <a:avLst/>
@@ -13481,24 +13193,24 @@
           </a:pPr>
           <a:r>
             <a:rPr lang="en-GB" sz="600" kern="1200" dirty="0"/>
-            <a:t>Full Name</a:t>
+            <a:t>Domain</a:t>
           </a:r>
         </a:p>
       </dsp:txBody>
       <dsp:txXfrm>
-        <a:off x="6286436" y="5531590"/>
-        <a:ext cx="614902" cy="187545"/>
+        <a:off x="6307377" y="5815514"/>
+        <a:ext cx="642251" cy="195886"/>
       </dsp:txXfrm>
     </dsp:sp>
-    <dsp:sp modelId="{5E1565E1-8DBB-4A62-B412-DA531FDF40C5}">
+    <dsp:sp modelId="{E3B5D82B-AC9E-4D78-9879-707CC20D19D9}">
       <dsp:nvSpPr>
         <dsp:cNvPr id="0" name=""/>
         <dsp:cNvSpPr/>
       </dsp:nvSpPr>
       <dsp:spPr>
         <a:xfrm>
-          <a:off x="7022874" y="5530405"/>
-          <a:ext cx="614902" cy="187545"/>
+          <a:off x="7098239" y="5816961"/>
+          <a:ext cx="642251" cy="195886"/>
         </a:xfrm>
         <a:prstGeom prst="rect">
           <a:avLst/>
@@ -13553,25 +13265,25 @@
             <a:buNone/>
           </a:pPr>
           <a:r>
-            <a:rPr lang="en-GB" sz="600" kern="1200" dirty="0"/>
-            <a:t>James Lopez</a:t>
+            <a:rPr lang="en-US" sz="600" kern="1200" dirty="0"/>
+            <a:t>Material</a:t>
           </a:r>
         </a:p>
       </dsp:txBody>
       <dsp:txXfrm>
-        <a:off x="7022874" y="5530405"/>
-        <a:ext cx="614902" cy="187545"/>
+        <a:off x="7098239" y="5816961"/>
+        <a:ext cx="642251" cy="195886"/>
       </dsp:txXfrm>
     </dsp:sp>
-    <dsp:sp modelId="{5DE52887-637E-4373-B534-4602DEAB0BD9}">
+    <dsp:sp modelId="{BFC464B6-E6B9-483D-BEE4-D79A9462E3E9}">
       <dsp:nvSpPr>
         <dsp:cNvPr id="0" name=""/>
         <dsp:cNvSpPr/>
       </dsp:nvSpPr>
       <dsp:spPr>
         <a:xfrm>
-          <a:off x="6284991" y="5833729"/>
-          <a:ext cx="614902" cy="187545"/>
+          <a:off x="6307377" y="6075039"/>
+          <a:ext cx="642251" cy="195886"/>
         </a:xfrm>
         <a:prstGeom prst="rect">
           <a:avLst/>
@@ -13632,24 +13344,24 @@
           </a:pPr>
           <a:r>
             <a:rPr lang="en-GB" sz="600" kern="1200" dirty="0"/>
-            <a:t>Domain</a:t>
+            <a:t>Expertise</a:t>
           </a:r>
         </a:p>
       </dsp:txBody>
       <dsp:txXfrm>
-        <a:off x="6284991" y="5833729"/>
-        <a:ext cx="614902" cy="187545"/>
+        <a:off x="6307377" y="6075039"/>
+        <a:ext cx="642251" cy="195886"/>
       </dsp:txXfrm>
     </dsp:sp>
-    <dsp:sp modelId="{E3B5D82B-AC9E-4D78-9879-707CC20D19D9}">
+    <dsp:sp modelId="{DE3D38DB-1546-46F2-860A-4E7282F74001}">
       <dsp:nvSpPr>
         <dsp:cNvPr id="0" name=""/>
         <dsp:cNvSpPr/>
       </dsp:nvSpPr>
       <dsp:spPr>
         <a:xfrm>
-          <a:off x="7042176" y="5835115"/>
-          <a:ext cx="614902" cy="187545"/>
+          <a:off x="7098232" y="6073145"/>
+          <a:ext cx="642251" cy="195886"/>
         </a:xfrm>
         <a:prstGeom prst="rect">
           <a:avLst/>
@@ -13705,24 +13417,24 @@
           </a:pPr>
           <a:r>
             <a:rPr lang="en-US" sz="600" kern="1200" dirty="0"/>
-            <a:t>Material</a:t>
+            <a:t>Marble Expert</a:t>
           </a:r>
         </a:p>
       </dsp:txBody>
       <dsp:txXfrm>
-        <a:off x="7042176" y="5835115"/>
-        <a:ext cx="614902" cy="187545"/>
+        <a:off x="7098232" y="6073145"/>
+        <a:ext cx="642251" cy="195886"/>
       </dsp:txXfrm>
     </dsp:sp>
-    <dsp:sp modelId="{BFC464B6-E6B9-483D-BEE4-D79A9462E3E9}">
+    <dsp:sp modelId="{E4AFD26B-C7BB-41CA-A59C-D4C3576380A8}">
       <dsp:nvSpPr>
         <dsp:cNvPr id="0" name=""/>
         <dsp:cNvSpPr/>
       </dsp:nvSpPr>
       <dsp:spPr>
         <a:xfrm>
-          <a:off x="6284991" y="6082203"/>
-          <a:ext cx="614902" cy="187545"/>
+          <a:off x="4767482" y="5745052"/>
+          <a:ext cx="642251" cy="195886"/>
         </a:xfrm>
         <a:prstGeom prst="rect">
           <a:avLst/>
@@ -13782,165 +13494,14 @@
             <a:buNone/>
           </a:pPr>
           <a:r>
-            <a:rPr lang="en-GB" sz="600" kern="1200" dirty="0"/>
-            <a:t>Expertise</a:t>
-          </a:r>
-        </a:p>
-      </dsp:txBody>
-      <dsp:txXfrm>
-        <a:off x="6284991" y="6082203"/>
-        <a:ext cx="614902" cy="187545"/>
-      </dsp:txXfrm>
-    </dsp:sp>
-    <dsp:sp modelId="{DE3D38DB-1546-46F2-860A-4E7282F74001}">
-      <dsp:nvSpPr>
-        <dsp:cNvPr id="0" name=""/>
-        <dsp:cNvSpPr/>
-      </dsp:nvSpPr>
-      <dsp:spPr>
-        <a:xfrm>
-          <a:off x="7042170" y="6080390"/>
-          <a:ext cx="614902" cy="187545"/>
-        </a:xfrm>
-        <a:prstGeom prst="rect">
-          <a:avLst/>
-        </a:prstGeom>
-        <a:solidFill>
-          <a:srgbClr val="FFC000"/>
-        </a:solidFill>
-        <a:ln w="19050" cap="flat" cmpd="sng" algn="ctr">
-          <a:solidFill>
-            <a:schemeClr val="lt1">
-              <a:hueOff val="0"/>
-              <a:satOff val="0"/>
-              <a:lumOff val="0"/>
-              <a:alphaOff val="0"/>
-            </a:schemeClr>
-          </a:solidFill>
-          <a:prstDash val="solid"/>
-          <a:miter lim="800000"/>
-        </a:ln>
-        <a:effectLst/>
-      </dsp:spPr>
-      <dsp:style>
-        <a:lnRef idx="2">
-          <a:scrgbClr r="0" g="0" b="0"/>
-        </a:lnRef>
-        <a:fillRef idx="1">
-          <a:scrgbClr r="0" g="0" b="0"/>
-        </a:fillRef>
-        <a:effectRef idx="0">
-          <a:scrgbClr r="0" g="0" b="0"/>
-        </a:effectRef>
-        <a:fontRef idx="minor">
-          <a:schemeClr val="lt1"/>
-        </a:fontRef>
-      </dsp:style>
-      <dsp:txBody>
-        <a:bodyPr spcFirstLastPara="0" vert="horz" wrap="square" lIns="3810" tIns="3810" rIns="3810" bIns="3810" numCol="1" spcCol="1270" anchor="ctr" anchorCtr="0">
-          <a:noAutofit/>
-        </a:bodyPr>
-        <a:lstStyle/>
-        <a:p>
-          <a:pPr marL="0" lvl="0" indent="0" algn="ctr" defTabSz="266700">
-            <a:lnSpc>
-              <a:spcPct val="90000"/>
-            </a:lnSpc>
-            <a:spcBef>
-              <a:spcPct val="0"/>
-            </a:spcBef>
-            <a:spcAft>
-              <a:spcPct val="35000"/>
-            </a:spcAft>
-            <a:buNone/>
-          </a:pPr>
-          <a:r>
-            <a:rPr lang="en-US" sz="600" kern="1200" dirty="0"/>
-            <a:t>Marble Expert</a:t>
-          </a:r>
-        </a:p>
-      </dsp:txBody>
-      <dsp:txXfrm>
-        <a:off x="7042170" y="6080390"/>
-        <a:ext cx="614902" cy="187545"/>
-      </dsp:txXfrm>
-    </dsp:sp>
-    <dsp:sp modelId="{E4AFD26B-C7BB-41CA-A59C-D4C3576380A8}">
-      <dsp:nvSpPr>
-        <dsp:cNvPr id="0" name=""/>
-        <dsp:cNvSpPr/>
-      </dsp:nvSpPr>
-      <dsp:spPr>
-        <a:xfrm>
-          <a:off x="4810669" y="5766268"/>
-          <a:ext cx="614902" cy="187545"/>
-        </a:xfrm>
-        <a:prstGeom prst="rect">
-          <a:avLst/>
-        </a:prstGeom>
-        <a:solidFill>
-          <a:schemeClr val="accent1">
-            <a:hueOff val="0"/>
-            <a:satOff val="0"/>
-            <a:lumOff val="0"/>
-            <a:alphaOff val="0"/>
-          </a:schemeClr>
-        </a:solidFill>
-        <a:ln w="19050" cap="flat" cmpd="sng" algn="ctr">
-          <a:solidFill>
-            <a:schemeClr val="lt1">
-              <a:hueOff val="0"/>
-              <a:satOff val="0"/>
-              <a:lumOff val="0"/>
-              <a:alphaOff val="0"/>
-            </a:schemeClr>
-          </a:solidFill>
-          <a:prstDash val="solid"/>
-          <a:miter lim="800000"/>
-        </a:ln>
-        <a:effectLst/>
-      </dsp:spPr>
-      <dsp:style>
-        <a:lnRef idx="2">
-          <a:scrgbClr r="0" g="0" b="0"/>
-        </a:lnRef>
-        <a:fillRef idx="1">
-          <a:scrgbClr r="0" g="0" b="0"/>
-        </a:fillRef>
-        <a:effectRef idx="0">
-          <a:scrgbClr r="0" g="0" b="0"/>
-        </a:effectRef>
-        <a:fontRef idx="minor">
-          <a:schemeClr val="lt1"/>
-        </a:fontRef>
-      </dsp:style>
-      <dsp:txBody>
-        <a:bodyPr spcFirstLastPara="0" vert="horz" wrap="square" lIns="3810" tIns="3810" rIns="3810" bIns="3810" numCol="1" spcCol="1270" anchor="ctr" anchorCtr="0">
-          <a:noAutofit/>
-        </a:bodyPr>
-        <a:lstStyle/>
-        <a:p>
-          <a:pPr marL="0" lvl="0" indent="0" algn="ctr" defTabSz="266700">
-            <a:lnSpc>
-              <a:spcPct val="90000"/>
-            </a:lnSpc>
-            <a:spcBef>
-              <a:spcPct val="0"/>
-            </a:spcBef>
-            <a:spcAft>
-              <a:spcPct val="35000"/>
-            </a:spcAft>
-            <a:buNone/>
-          </a:pPr>
-          <a:r>
             <a:rPr lang="en-US" sz="600" kern="1200" dirty="0"/>
             <a:t>Project #2</a:t>
           </a:r>
         </a:p>
       </dsp:txBody>
       <dsp:txXfrm>
-        <a:off x="4810669" y="5766268"/>
-        <a:ext cx="614902" cy="187545"/>
+        <a:off x="4767482" y="5745052"/>
+        <a:ext cx="642251" cy="195886"/>
       </dsp:txXfrm>
     </dsp:sp>
   </dsp:spTree>
@@ -15132,7 +14693,7 @@
 </file>
 
 <file path=ppt/diagrams/quickStyle1.xml><?xml version="1.0" encoding="utf-8"?>
-<dgm:styleDef xmlns:dgm="http://schemas.openxmlformats.org/drawingml/2006/diagram" xmlns:a="http://schemas.openxmlformats.org/drawingml/2006/main" uniqueId="urn:microsoft.com/office/officeart/2005/8/quickstyle/simple1">
+<dgm:styleDef xmlns:dgm="http://schemas.openxmlformats.org/drawingml/2006/diagram" xmlns:a="http://schemas.openxmlformats.org/drawingml/2006/main" uniqueId="urn:microsoft.com/office/officeart/2005/8/quickstyle/simple1#1">
   <dgm:title val=""/>
   <dgm:desc val=""/>
   <dgm:catLst>
@@ -16247,7 +15808,7 @@
           <a:p>
             <a:fld id="{C2FAB6F7-DBD4-408C-9910-75A9F1C0E741}" type="datetimeFigureOut">
               <a:rPr lang="en-GB" smtClean="0"/>
-              <a:t>31/07/2026</a:t>
+              <a:t>27/08/2026</a:t>
             </a:fld>
             <a:endParaRPr lang="en-GB"/>
           </a:p>
@@ -16746,7 +16307,7 @@
           <a:p>
             <a:fld id="{EA69702F-6818-46E6-8DD7-EE5C5CC7738E}" type="datetimeFigureOut">
               <a:rPr lang="en-US" smtClean="0"/>
-              <a:t>7/31/2026</a:t>
+              <a:t>8/27/2026</a:t>
             </a:fld>
             <a:endParaRPr lang="en-US"/>
           </a:p>
@@ -16944,7 +16505,7 @@
           <a:p>
             <a:fld id="{EA69702F-6818-46E6-8DD7-EE5C5CC7738E}" type="datetimeFigureOut">
               <a:rPr lang="en-US" smtClean="0"/>
-              <a:t>7/31/2026</a:t>
+              <a:t>8/27/2026</a:t>
             </a:fld>
             <a:endParaRPr lang="en-US"/>
           </a:p>
@@ -17152,7 +16713,7 @@
           <a:p>
             <a:fld id="{EA69702F-6818-46E6-8DD7-EE5C5CC7738E}" type="datetimeFigureOut">
               <a:rPr lang="en-US" smtClean="0"/>
-              <a:t>7/31/2026</a:t>
+              <a:t>8/27/2026</a:t>
             </a:fld>
             <a:endParaRPr lang="en-US"/>
           </a:p>
@@ -17350,7 +16911,7 @@
           <a:p>
             <a:fld id="{EA69702F-6818-46E6-8DD7-EE5C5CC7738E}" type="datetimeFigureOut">
               <a:rPr lang="en-US" smtClean="0"/>
-              <a:t>7/31/2026</a:t>
+              <a:t>8/27/2026</a:t>
             </a:fld>
             <a:endParaRPr lang="en-US"/>
           </a:p>
@@ -17625,7 +17186,7 @@
           <a:p>
             <a:fld id="{EA69702F-6818-46E6-8DD7-EE5C5CC7738E}" type="datetimeFigureOut">
               <a:rPr lang="en-US" smtClean="0"/>
-              <a:t>7/31/2026</a:t>
+              <a:t>8/27/2026</a:t>
             </a:fld>
             <a:endParaRPr lang="en-US"/>
           </a:p>
@@ -17890,7 +17451,7 @@
           <a:p>
             <a:fld id="{EA69702F-6818-46E6-8DD7-EE5C5CC7738E}" type="datetimeFigureOut">
               <a:rPr lang="en-US" smtClean="0"/>
-              <a:t>7/31/2026</a:t>
+              <a:t>8/27/2026</a:t>
             </a:fld>
             <a:endParaRPr lang="en-US"/>
           </a:p>
@@ -18302,7 +17863,7 @@
           <a:p>
             <a:fld id="{EA69702F-6818-46E6-8DD7-EE5C5CC7738E}" type="datetimeFigureOut">
               <a:rPr lang="en-US" smtClean="0"/>
-              <a:t>7/31/2026</a:t>
+              <a:t>8/27/2026</a:t>
             </a:fld>
             <a:endParaRPr lang="en-US"/>
           </a:p>
@@ -18443,7 +18004,7 @@
           <a:p>
             <a:fld id="{EA69702F-6818-46E6-8DD7-EE5C5CC7738E}" type="datetimeFigureOut">
               <a:rPr lang="en-US" smtClean="0"/>
-              <a:t>7/31/2026</a:t>
+              <a:t>8/27/2026</a:t>
             </a:fld>
             <a:endParaRPr lang="en-US"/>
           </a:p>
@@ -18556,7 +18117,7 @@
           <a:p>
             <a:fld id="{EA69702F-6818-46E6-8DD7-EE5C5CC7738E}" type="datetimeFigureOut">
               <a:rPr lang="en-US" smtClean="0"/>
-              <a:t>7/31/2026</a:t>
+              <a:t>8/27/2026</a:t>
             </a:fld>
             <a:endParaRPr lang="en-US"/>
           </a:p>
@@ -18867,7 +18428,7 @@
           <a:p>
             <a:fld id="{EA69702F-6818-46E6-8DD7-EE5C5CC7738E}" type="datetimeFigureOut">
               <a:rPr lang="en-US" smtClean="0"/>
-              <a:t>7/31/2026</a:t>
+              <a:t>8/27/2026</a:t>
             </a:fld>
             <a:endParaRPr lang="en-US"/>
           </a:p>
@@ -19155,7 +18716,7 @@
           <a:p>
             <a:fld id="{EA69702F-6818-46E6-8DD7-EE5C5CC7738E}" type="datetimeFigureOut">
               <a:rPr lang="en-US" smtClean="0"/>
-              <a:t>7/31/2026</a:t>
+              <a:t>8/27/2026</a:t>
             </a:fld>
             <a:endParaRPr lang="en-US"/>
           </a:p>
@@ -19396,7 +18957,7 @@
           <a:p>
             <a:fld id="{EA69702F-6818-46E6-8DD7-EE5C5CC7738E}" type="datetimeFigureOut">
               <a:rPr lang="en-US" smtClean="0"/>
-              <a:t>7/31/2026</a:t>
+              <a:t>8/27/2026</a:t>
             </a:fld>
             <a:endParaRPr lang="en-US"/>
           </a:p>
@@ -19826,7 +19387,7 @@
           <p:nvPr>
             <p:extLst>
               <p:ext uri="{D42A27DB-BD31-4B8C-83A1-F6EECF244321}">
-                <p14:modId xmlns:p14="http://schemas.microsoft.com/office/powerpoint/2010/main" val="257034213"/>
+                <p14:modId xmlns:p14="http://schemas.microsoft.com/office/powerpoint/2010/main" val="3930116965"/>
               </p:ext>
             </p:extLst>
           </p:nvPr>
